--- a/documents/명함제작/[2026 우리가치(WeValue) QI 활동 프로젝트 명함1(앞).pptx
+++ b/documents/명함제작/[2026 우리가치(WeValue) QI 활동 프로젝트 명함1(앞).pptx
@@ -2,7 +2,7 @@
 <file path=ppt/presentation.xml><?xml version="1.0" encoding="utf-8"?>
 <p:presentation xmlns:a="http://schemas.openxmlformats.org/drawingml/2006/main" xmlns:r="http://schemas.openxmlformats.org/officeDocument/2006/relationships" xmlns:p="http://schemas.openxmlformats.org/presentationml/2006/main" saveSubsetFonts="1">
   <p:sldMasterIdLst>
-    <p:sldMasterId id="2147483870" r:id="rId1"/>
+    <p:sldMasterId id="2147483883" r:id="rId1"/>
   </p:sldMasterIdLst>
   <p:notesMasterIdLst>
     <p:notesMasterId r:id="rId8"/>
@@ -15,7 +15,7 @@
     <p:sldId id="261" r:id="rId6"/>
     <p:sldId id="262" r:id="rId7"/>
   </p:sldIdLst>
-  <p:sldSz cx="3240088" cy="1800225"/>
+  <p:sldSz cx="3203575" cy="1800225"/>
   <p:notesSz cx="6858000" cy="9945688"/>
   <p:defaultTextStyle>
     <a:defPPr>
@@ -130,17 +130,17 @@
             <a:srgbClr val="A4A3A4"/>
           </p15:clr>
         </p15:guide>
-        <p15:guide id="8" pos="1021" userDrawn="1">
+        <p15:guide id="8" pos="1009" userDrawn="1">
           <p15:clr>
             <a:srgbClr val="A4A3A4"/>
           </p15:clr>
         </p15:guide>
-        <p15:guide id="9" pos="132" userDrawn="1">
+        <p15:guide id="9" pos="131" userDrawn="1">
           <p15:clr>
             <a:srgbClr val="A4A3A4"/>
           </p15:clr>
         </p15:guide>
-        <p15:guide id="10" pos="1909" userDrawn="1">
+        <p15:guide id="10" pos="1887" userDrawn="1">
           <p15:clr>
             <a:srgbClr val="A4A3A4"/>
           </p15:clr>
@@ -233,7 +233,7 @@
           <a:p>
             <a:fld id="{F929F65E-AEE7-45C5-814B-4468CAF1E537}" type="datetimeFigureOut">
               <a:rPr lang="ko-KR" altLang="en-US" smtClean="0"/>
-              <a:t>2026-03-01</a:t>
+              <a:t>2026-04-09</a:t>
             </a:fld>
             <a:endParaRPr lang="ko-KR" altLang="en-US"/>
           </a:p>
@@ -251,8 +251,8 @@
         </p:nvSpPr>
         <p:spPr>
           <a:xfrm>
-            <a:off x="407988" y="1241425"/>
-            <a:ext cx="6042025" cy="3357563"/>
+            <a:off x="441325" y="1241425"/>
+            <a:ext cx="5975350" cy="3359150"/>
           </a:xfrm>
           <a:prstGeom prst="rect">
             <a:avLst/>
@@ -284,8 +284,8 @@
         </p:nvSpPr>
         <p:spPr>
           <a:xfrm>
-            <a:off x="685800" y="4786311"/>
-            <a:ext cx="5486400" cy="3916364"/>
+            <a:off x="685800" y="4786312"/>
+            <a:ext cx="5486400" cy="3916363"/>
           </a:xfrm>
           <a:prstGeom prst="rect">
             <a:avLst/>
@@ -343,7 +343,7 @@
         </p:nvSpPr>
         <p:spPr>
           <a:xfrm>
-            <a:off x="3" y="9447214"/>
+            <a:off x="3" y="9447215"/>
             <a:ext cx="2971800" cy="498476"/>
           </a:xfrm>
           <a:prstGeom prst="rect">
@@ -374,7 +374,7 @@
         </p:nvSpPr>
         <p:spPr>
           <a:xfrm>
-            <a:off x="3884618" y="9447214"/>
+            <a:off x="3884618" y="9447215"/>
             <a:ext cx="2971800" cy="498476"/>
           </a:xfrm>
           <a:prstGeom prst="rect">
@@ -529,8 +529,8 @@
         </p:nvSpPr>
         <p:spPr>
           <a:xfrm>
-            <a:off x="405011" y="294620"/>
-            <a:ext cx="2430066" cy="626745"/>
+            <a:off x="400447" y="294620"/>
+            <a:ext cx="2402681" cy="626745"/>
           </a:xfrm>
         </p:spPr>
         <p:txBody>
@@ -561,8 +561,8 @@
         </p:nvSpPr>
         <p:spPr>
           <a:xfrm>
-            <a:off x="405011" y="945535"/>
-            <a:ext cx="2430066" cy="434638"/>
+            <a:off x="400447" y="945535"/>
+            <a:ext cx="2402681" cy="434638"/>
           </a:xfrm>
         </p:spPr>
         <p:txBody>
@@ -631,7 +631,7 @@
           <a:p>
             <a:fld id="{149F34B4-7175-41BD-B98B-2E7021201D7D}" type="datetimeFigureOut">
               <a:rPr lang="ko-KR" altLang="en-US" smtClean="0"/>
-              <a:t>2026-03-01</a:t>
+              <a:t>2026-04-09</a:t>
             </a:fld>
             <a:endParaRPr lang="ko-KR" altLang="en-US"/>
           </a:p>
@@ -682,7 +682,7 @@
     </p:spTree>
     <p:extLst>
       <p:ext uri="{BB962C8B-B14F-4D97-AF65-F5344CB8AC3E}">
-        <p14:creationId xmlns:p14="http://schemas.microsoft.com/office/powerpoint/2010/main" val="3453375835"/>
+        <p14:creationId xmlns:p14="http://schemas.microsoft.com/office/powerpoint/2010/main" val="3881911220"/>
       </p:ext>
     </p:extLst>
   </p:cSld>
@@ -801,7 +801,7 @@
           <a:p>
             <a:fld id="{149F34B4-7175-41BD-B98B-2E7021201D7D}" type="datetimeFigureOut">
               <a:rPr lang="ko-KR" altLang="en-US" smtClean="0"/>
-              <a:t>2026-03-01</a:t>
+              <a:t>2026-04-09</a:t>
             </a:fld>
             <a:endParaRPr lang="ko-KR" altLang="en-US"/>
           </a:p>
@@ -852,7 +852,7 @@
     </p:spTree>
     <p:extLst>
       <p:ext uri="{BB962C8B-B14F-4D97-AF65-F5344CB8AC3E}">
-        <p14:creationId xmlns:p14="http://schemas.microsoft.com/office/powerpoint/2010/main" val="3250027929"/>
+        <p14:creationId xmlns:p14="http://schemas.microsoft.com/office/powerpoint/2010/main" val="187044219"/>
       </p:ext>
     </p:extLst>
   </p:cSld>
@@ -891,8 +891,8 @@
         </p:nvSpPr>
         <p:spPr>
           <a:xfrm>
-            <a:off x="2318688" y="95846"/>
-            <a:ext cx="698644" cy="1525607"/>
+            <a:off x="2292558" y="95846"/>
+            <a:ext cx="690771" cy="1525607"/>
           </a:xfrm>
         </p:spPr>
         <p:txBody>
@@ -919,8 +919,8 @@
         </p:nvSpPr>
         <p:spPr>
           <a:xfrm>
-            <a:off x="222756" y="95846"/>
-            <a:ext cx="2055431" cy="1525607"/>
+            <a:off x="220246" y="95846"/>
+            <a:ext cx="2032268" cy="1525607"/>
           </a:xfrm>
         </p:spPr>
         <p:txBody>
@@ -981,7 +981,7 @@
           <a:p>
             <a:fld id="{149F34B4-7175-41BD-B98B-2E7021201D7D}" type="datetimeFigureOut">
               <a:rPr lang="ko-KR" altLang="en-US" smtClean="0"/>
-              <a:t>2026-03-01</a:t>
+              <a:t>2026-04-09</a:t>
             </a:fld>
             <a:endParaRPr lang="ko-KR" altLang="en-US"/>
           </a:p>
@@ -1032,7 +1032,7 @@
     </p:spTree>
     <p:extLst>
       <p:ext uri="{BB962C8B-B14F-4D97-AF65-F5344CB8AC3E}">
-        <p14:creationId xmlns:p14="http://schemas.microsoft.com/office/powerpoint/2010/main" val="3315396022"/>
+        <p14:creationId xmlns:p14="http://schemas.microsoft.com/office/powerpoint/2010/main" val="3150679966"/>
       </p:ext>
     </p:extLst>
   </p:cSld>
@@ -1073,8 +1073,8 @@
         </p:nvSpPr>
         <p:spPr>
           <a:xfrm>
-            <a:off x="1" y="0"/>
-            <a:ext cx="3246839" cy="1800225"/>
+            <a:off x="1" y="1"/>
+            <a:ext cx="3210250" cy="1800225"/>
           </a:xfrm>
           <a:prstGeom prst="rect">
             <a:avLst/>
@@ -1127,8 +1127,8 @@
         </p:nvSpPr>
         <p:spPr>
           <a:xfrm>
-            <a:off x="29909" y="30482"/>
-            <a:ext cx="3182265" cy="1728467"/>
+            <a:off x="29572" y="30483"/>
+            <a:ext cx="3146404" cy="1728467"/>
           </a:xfrm>
           <a:prstGeom prst="rect">
             <a:avLst/>
@@ -1187,8 +1187,8 @@
         </p:blipFill>
         <p:spPr>
           <a:xfrm>
-            <a:off x="2790825" y="81588"/>
-            <a:ext cx="363162" cy="203042"/>
+            <a:off x="2759375" y="81588"/>
+            <a:ext cx="359069" cy="203042"/>
           </a:xfrm>
           <a:prstGeom prst="rect">
             <a:avLst/>
@@ -1214,8 +1214,8 @@
         </p:nvSpPr>
         <p:spPr>
           <a:xfrm>
-            <a:off x="2098273" y="1569905"/>
-            <a:ext cx="1141815" cy="169277"/>
+            <a:off x="2074628" y="1569906"/>
+            <a:ext cx="1128948" cy="169277"/>
           </a:xfrm>
           <a:prstGeom prst="rect">
             <a:avLst/>
@@ -1252,7 +1252,7 @@
     </p:spTree>
     <p:extLst>
       <p:ext uri="{BB962C8B-B14F-4D97-AF65-F5344CB8AC3E}">
-        <p14:creationId xmlns:p14="http://schemas.microsoft.com/office/powerpoint/2010/main" val="2744513500"/>
+        <p14:creationId xmlns:p14="http://schemas.microsoft.com/office/powerpoint/2010/main" val="3420207064"/>
       </p:ext>
     </p:extLst>
   </p:cSld>
@@ -1267,7 +1267,7 @@
             <a:srgbClr val="FBAE40"/>
           </p15:clr>
         </p15:guide>
-        <p15:guide id="2" pos="1021">
+        <p15:guide id="2" pos="1009">
           <p15:clr>
             <a:srgbClr val="FBAE40"/>
           </p15:clr>
@@ -1309,8 +1309,8 @@
         </p:nvSpPr>
         <p:spPr>
           <a:xfrm>
-            <a:off x="1" y="0"/>
-            <a:ext cx="3246839" cy="1800225"/>
+            <a:off x="1" y="1"/>
+            <a:ext cx="3210250" cy="1800225"/>
           </a:xfrm>
           <a:prstGeom prst="rect">
             <a:avLst/>
@@ -1363,8 +1363,8 @@
         </p:nvSpPr>
         <p:spPr>
           <a:xfrm>
-            <a:off x="45477" y="17494"/>
-            <a:ext cx="3154111" cy="1764512"/>
+            <a:off x="44965" y="17494"/>
+            <a:ext cx="3118567" cy="1764512"/>
           </a:xfrm>
           <a:prstGeom prst="rect">
             <a:avLst/>
@@ -1423,8 +1423,8 @@
         </p:blipFill>
         <p:spPr>
           <a:xfrm>
-            <a:off x="2829499" y="29235"/>
-            <a:ext cx="324488" cy="75610"/>
+            <a:off x="2797613" y="29235"/>
+            <a:ext cx="320831" cy="75610"/>
           </a:xfrm>
           <a:prstGeom prst="rect">
             <a:avLst/>
@@ -1450,7 +1450,7 @@
         </p:nvSpPr>
         <p:spPr>
           <a:xfrm>
-            <a:off x="2890773" y="1686920"/>
+            <a:off x="2855230" y="1686921"/>
             <a:ext cx="263214" cy="123111"/>
           </a:xfrm>
           <a:prstGeom prst="rect">
@@ -1516,7 +1516,7 @@
             <a:srgbClr val="FBAE40"/>
           </p15:clr>
         </p15:guide>
-        <p15:guide id="2" pos="1021" userDrawn="1">
+        <p15:guide id="2" pos="1009" userDrawn="1">
           <p15:clr>
             <a:srgbClr val="FBAE40"/>
           </p15:clr>
@@ -1558,8 +1558,8 @@
         </p:nvSpPr>
         <p:spPr>
           <a:xfrm>
-            <a:off x="1" y="0"/>
-            <a:ext cx="3246839" cy="1800225"/>
+            <a:off x="1" y="1"/>
+            <a:ext cx="3210250" cy="1800225"/>
           </a:xfrm>
           <a:prstGeom prst="rect">
             <a:avLst/>
@@ -1612,8 +1612,8 @@
         </p:nvSpPr>
         <p:spPr>
           <a:xfrm>
-            <a:off x="45477" y="17494"/>
-            <a:ext cx="3154111" cy="1764512"/>
+            <a:off x="44965" y="17494"/>
+            <a:ext cx="3118567" cy="1764512"/>
           </a:xfrm>
           <a:prstGeom prst="rect">
             <a:avLst/>
@@ -1672,8 +1672,8 @@
         </p:blipFill>
         <p:spPr>
           <a:xfrm>
-            <a:off x="2827923" y="29235"/>
-            <a:ext cx="324488" cy="75610"/>
+            <a:off x="2796055" y="29235"/>
+            <a:ext cx="320831" cy="75610"/>
           </a:xfrm>
           <a:prstGeom prst="rect">
             <a:avLst/>
@@ -1699,8 +1699,8 @@
         </p:nvSpPr>
         <p:spPr>
           <a:xfrm>
-            <a:off x="2863523" y="1707219"/>
-            <a:ext cx="290464" cy="107722"/>
+            <a:off x="2827979" y="1707219"/>
+            <a:ext cx="290465" cy="107722"/>
           </a:xfrm>
           <a:prstGeom prst="rect">
             <a:avLst/>
@@ -1765,7 +1765,7 @@
             <a:srgbClr val="FBAE40"/>
           </p15:clr>
         </p15:guide>
-        <p15:guide id="2" pos="1021" userDrawn="1">
+        <p15:guide id="2" pos="1009" userDrawn="1">
           <p15:clr>
             <a:srgbClr val="FBAE40"/>
           </p15:clr>
@@ -1890,7 +1890,7 @@
           <a:p>
             <a:fld id="{149F34B4-7175-41BD-B98B-2E7021201D7D}" type="datetimeFigureOut">
               <a:rPr lang="ko-KR" altLang="en-US" smtClean="0"/>
-              <a:t>2026-03-01</a:t>
+              <a:t>2026-04-09</a:t>
             </a:fld>
             <a:endParaRPr lang="ko-KR" altLang="en-US"/>
           </a:p>
@@ -1941,7 +1941,7 @@
     </p:spTree>
     <p:extLst>
       <p:ext uri="{BB962C8B-B14F-4D97-AF65-F5344CB8AC3E}">
-        <p14:creationId xmlns:p14="http://schemas.microsoft.com/office/powerpoint/2010/main" val="1634003482"/>
+        <p14:creationId xmlns:p14="http://schemas.microsoft.com/office/powerpoint/2010/main" val="4004552864"/>
       </p:ext>
     </p:extLst>
   </p:cSld>
@@ -1980,8 +1980,8 @@
         </p:nvSpPr>
         <p:spPr>
           <a:xfrm>
-            <a:off x="221068" y="448807"/>
-            <a:ext cx="2794576" cy="748843"/>
+            <a:off x="218577" y="448807"/>
+            <a:ext cx="2763083" cy="748843"/>
           </a:xfrm>
         </p:spPr>
         <p:txBody>
@@ -2012,8 +2012,8 @@
         </p:nvSpPr>
         <p:spPr>
           <a:xfrm>
-            <a:off x="221068" y="1204734"/>
-            <a:ext cx="2794576" cy="393799"/>
+            <a:off x="218577" y="1204734"/>
+            <a:ext cx="2763083" cy="393799"/>
           </a:xfrm>
         </p:spPr>
         <p:txBody>
@@ -2136,7 +2136,7 @@
           <a:p>
             <a:fld id="{149F34B4-7175-41BD-B98B-2E7021201D7D}" type="datetimeFigureOut">
               <a:rPr lang="ko-KR" altLang="en-US" smtClean="0"/>
-              <a:t>2026-03-01</a:t>
+              <a:t>2026-04-09</a:t>
             </a:fld>
             <a:endParaRPr lang="ko-KR" altLang="en-US"/>
           </a:p>
@@ -2187,7 +2187,7 @@
     </p:spTree>
     <p:extLst>
       <p:ext uri="{BB962C8B-B14F-4D97-AF65-F5344CB8AC3E}">
-        <p14:creationId xmlns:p14="http://schemas.microsoft.com/office/powerpoint/2010/main" val="3434871378"/>
+        <p14:creationId xmlns:p14="http://schemas.microsoft.com/office/powerpoint/2010/main" val="1964110053"/>
       </p:ext>
     </p:extLst>
   </p:cSld>
@@ -2249,8 +2249,8 @@
         </p:nvSpPr>
         <p:spPr>
           <a:xfrm>
-            <a:off x="222756" y="479227"/>
-            <a:ext cx="1377037" cy="1142226"/>
+            <a:off x="220246" y="479227"/>
+            <a:ext cx="1361519" cy="1142226"/>
           </a:xfrm>
         </p:spPr>
         <p:txBody>
@@ -2306,8 +2306,8 @@
         </p:nvSpPr>
         <p:spPr>
           <a:xfrm>
-            <a:off x="1640295" y="479227"/>
-            <a:ext cx="1377037" cy="1142226"/>
+            <a:off x="1621810" y="479227"/>
+            <a:ext cx="1361519" cy="1142226"/>
           </a:xfrm>
         </p:spPr>
         <p:txBody>
@@ -2368,7 +2368,7 @@
           <a:p>
             <a:fld id="{149F34B4-7175-41BD-B98B-2E7021201D7D}" type="datetimeFigureOut">
               <a:rPr lang="ko-KR" altLang="en-US" smtClean="0"/>
-              <a:t>2026-03-01</a:t>
+              <a:t>2026-04-09</a:t>
             </a:fld>
             <a:endParaRPr lang="ko-KR" altLang="en-US"/>
           </a:p>
@@ -2419,7 +2419,7 @@
     </p:spTree>
     <p:extLst>
       <p:ext uri="{BB962C8B-B14F-4D97-AF65-F5344CB8AC3E}">
-        <p14:creationId xmlns:p14="http://schemas.microsoft.com/office/powerpoint/2010/main" val="3465910369"/>
+        <p14:creationId xmlns:p14="http://schemas.microsoft.com/office/powerpoint/2010/main" val="3548339769"/>
       </p:ext>
     </p:extLst>
   </p:cSld>
@@ -2458,8 +2458,8 @@
         </p:nvSpPr>
         <p:spPr>
           <a:xfrm>
-            <a:off x="223178" y="95846"/>
-            <a:ext cx="2794576" cy="347960"/>
+            <a:off x="220663" y="95846"/>
+            <a:ext cx="2763083" cy="347960"/>
           </a:xfrm>
         </p:spPr>
         <p:txBody>
@@ -2486,8 +2486,8 @@
         </p:nvSpPr>
         <p:spPr>
           <a:xfrm>
-            <a:off x="223178" y="441305"/>
-            <a:ext cx="1370709" cy="216277"/>
+            <a:off x="220663" y="441305"/>
+            <a:ext cx="1355262" cy="216277"/>
           </a:xfrm>
         </p:spPr>
         <p:txBody>
@@ -2551,8 +2551,8 @@
         </p:nvSpPr>
         <p:spPr>
           <a:xfrm>
-            <a:off x="223178" y="657582"/>
-            <a:ext cx="1370709" cy="967204"/>
+            <a:off x="220663" y="657582"/>
+            <a:ext cx="1355262" cy="967204"/>
           </a:xfrm>
         </p:spPr>
         <p:txBody>
@@ -2608,8 +2608,8 @@
         </p:nvSpPr>
         <p:spPr>
           <a:xfrm>
-            <a:off x="1640295" y="441305"/>
-            <a:ext cx="1377459" cy="216277"/>
+            <a:off x="1621810" y="441305"/>
+            <a:ext cx="1361937" cy="216277"/>
           </a:xfrm>
         </p:spPr>
         <p:txBody>
@@ -2673,8 +2673,8 @@
         </p:nvSpPr>
         <p:spPr>
           <a:xfrm>
-            <a:off x="1640295" y="657582"/>
-            <a:ext cx="1377459" cy="967204"/>
+            <a:off x="1621810" y="657582"/>
+            <a:ext cx="1361937" cy="967204"/>
           </a:xfrm>
         </p:spPr>
         <p:txBody>
@@ -2735,7 +2735,7 @@
           <a:p>
             <a:fld id="{149F34B4-7175-41BD-B98B-2E7021201D7D}" type="datetimeFigureOut">
               <a:rPr lang="ko-KR" altLang="en-US" smtClean="0"/>
-              <a:t>2026-03-01</a:t>
+              <a:t>2026-04-09</a:t>
             </a:fld>
             <a:endParaRPr lang="ko-KR" altLang="en-US"/>
           </a:p>
@@ -2786,7 +2786,7 @@
     </p:spTree>
     <p:extLst>
       <p:ext uri="{BB962C8B-B14F-4D97-AF65-F5344CB8AC3E}">
-        <p14:creationId xmlns:p14="http://schemas.microsoft.com/office/powerpoint/2010/main" val="4164050254"/>
+        <p14:creationId xmlns:p14="http://schemas.microsoft.com/office/powerpoint/2010/main" val="3435853614"/>
       </p:ext>
     </p:extLst>
   </p:cSld>
@@ -2853,7 +2853,7 @@
           <a:p>
             <a:fld id="{149F34B4-7175-41BD-B98B-2E7021201D7D}" type="datetimeFigureOut">
               <a:rPr lang="ko-KR" altLang="en-US" smtClean="0"/>
-              <a:t>2026-03-01</a:t>
+              <a:t>2026-04-09</a:t>
             </a:fld>
             <a:endParaRPr lang="ko-KR" altLang="en-US"/>
           </a:p>
@@ -2904,7 +2904,7 @@
     </p:spTree>
     <p:extLst>
       <p:ext uri="{BB962C8B-B14F-4D97-AF65-F5344CB8AC3E}">
-        <p14:creationId xmlns:p14="http://schemas.microsoft.com/office/powerpoint/2010/main" val="2126343418"/>
+        <p14:creationId xmlns:p14="http://schemas.microsoft.com/office/powerpoint/2010/main" val="1379415432"/>
       </p:ext>
     </p:extLst>
   </p:cSld>
@@ -2948,7 +2948,7 @@
           <a:p>
             <a:fld id="{149F34B4-7175-41BD-B98B-2E7021201D7D}" type="datetimeFigureOut">
               <a:rPr lang="ko-KR" altLang="en-US" smtClean="0"/>
-              <a:t>2026-03-01</a:t>
+              <a:t>2026-04-09</a:t>
             </a:fld>
             <a:endParaRPr lang="ko-KR" altLang="en-US"/>
           </a:p>
@@ -2999,7 +2999,7 @@
     </p:spTree>
     <p:extLst>
       <p:ext uri="{BB962C8B-B14F-4D97-AF65-F5344CB8AC3E}">
-        <p14:creationId xmlns:p14="http://schemas.microsoft.com/office/powerpoint/2010/main" val="2295738396"/>
+        <p14:creationId xmlns:p14="http://schemas.microsoft.com/office/powerpoint/2010/main" val="876941622"/>
       </p:ext>
     </p:extLst>
   </p:cSld>
@@ -3038,8 +3038,8 @@
         </p:nvSpPr>
         <p:spPr>
           <a:xfrm>
-            <a:off x="223178" y="120015"/>
-            <a:ext cx="1045013" cy="420053"/>
+            <a:off x="220663" y="120015"/>
+            <a:ext cx="1033236" cy="420053"/>
           </a:xfrm>
         </p:spPr>
         <p:txBody>
@@ -3070,8 +3070,8 @@
         </p:nvSpPr>
         <p:spPr>
           <a:xfrm>
-            <a:off x="1377459" y="259199"/>
-            <a:ext cx="1640295" cy="1279327"/>
+            <a:off x="1361937" y="259199"/>
+            <a:ext cx="1621810" cy="1279327"/>
           </a:xfrm>
         </p:spPr>
         <p:txBody>
@@ -3155,8 +3155,8 @@
         </p:nvSpPr>
         <p:spPr>
           <a:xfrm>
-            <a:off x="223178" y="540067"/>
-            <a:ext cx="1045013" cy="1000542"/>
+            <a:off x="220663" y="540067"/>
+            <a:ext cx="1033236" cy="1000542"/>
           </a:xfrm>
         </p:spPr>
         <p:txBody>
@@ -3225,7 +3225,7 @@
           <a:p>
             <a:fld id="{149F34B4-7175-41BD-B98B-2E7021201D7D}" type="datetimeFigureOut">
               <a:rPr lang="ko-KR" altLang="en-US" smtClean="0"/>
-              <a:t>2026-03-01</a:t>
+              <a:t>2026-04-09</a:t>
             </a:fld>
             <a:endParaRPr lang="ko-KR" altLang="en-US"/>
           </a:p>
@@ -3276,7 +3276,7 @@
     </p:spTree>
     <p:extLst>
       <p:ext uri="{BB962C8B-B14F-4D97-AF65-F5344CB8AC3E}">
-        <p14:creationId xmlns:p14="http://schemas.microsoft.com/office/powerpoint/2010/main" val="2035658595"/>
+        <p14:creationId xmlns:p14="http://schemas.microsoft.com/office/powerpoint/2010/main" val="3326254778"/>
       </p:ext>
     </p:extLst>
   </p:cSld>
@@ -3315,8 +3315,8 @@
         </p:nvSpPr>
         <p:spPr>
           <a:xfrm>
-            <a:off x="223178" y="120015"/>
-            <a:ext cx="1045013" cy="420053"/>
+            <a:off x="220663" y="120015"/>
+            <a:ext cx="1033236" cy="420053"/>
           </a:xfrm>
         </p:spPr>
         <p:txBody>
@@ -3347,8 +3347,8 @@
         </p:nvSpPr>
         <p:spPr>
           <a:xfrm>
-            <a:off x="1377459" y="259199"/>
-            <a:ext cx="1640295" cy="1279327"/>
+            <a:off x="1361937" y="259199"/>
+            <a:ext cx="1621810" cy="1279327"/>
           </a:xfrm>
         </p:spPr>
         <p:txBody>
@@ -3412,8 +3412,8 @@
         </p:nvSpPr>
         <p:spPr>
           <a:xfrm>
-            <a:off x="223178" y="540067"/>
-            <a:ext cx="1045013" cy="1000542"/>
+            <a:off x="220663" y="540067"/>
+            <a:ext cx="1033236" cy="1000542"/>
           </a:xfrm>
         </p:spPr>
         <p:txBody>
@@ -3482,7 +3482,7 @@
           <a:p>
             <a:fld id="{149F34B4-7175-41BD-B98B-2E7021201D7D}" type="datetimeFigureOut">
               <a:rPr lang="ko-KR" altLang="en-US" smtClean="0"/>
-              <a:t>2026-03-01</a:t>
+              <a:t>2026-04-09</a:t>
             </a:fld>
             <a:endParaRPr lang="ko-KR" altLang="en-US"/>
           </a:p>
@@ -3533,7 +3533,7 @@
     </p:spTree>
     <p:extLst>
       <p:ext uri="{BB962C8B-B14F-4D97-AF65-F5344CB8AC3E}">
-        <p14:creationId xmlns:p14="http://schemas.microsoft.com/office/powerpoint/2010/main" val="1745249668"/>
+        <p14:creationId xmlns:p14="http://schemas.microsoft.com/office/powerpoint/2010/main" val="1031906644"/>
       </p:ext>
     </p:extLst>
   </p:cSld>
@@ -3577,8 +3577,8 @@
         </p:nvSpPr>
         <p:spPr>
           <a:xfrm>
-            <a:off x="222756" y="95846"/>
-            <a:ext cx="2794576" cy="347960"/>
+            <a:off x="220246" y="95846"/>
+            <a:ext cx="2763083" cy="347960"/>
           </a:xfrm>
           <a:prstGeom prst="rect">
             <a:avLst/>
@@ -3610,8 +3610,8 @@
         </p:nvSpPr>
         <p:spPr>
           <a:xfrm>
-            <a:off x="222756" y="479227"/>
-            <a:ext cx="2794576" cy="1142226"/>
+            <a:off x="220246" y="479227"/>
+            <a:ext cx="2763083" cy="1142226"/>
           </a:xfrm>
           <a:prstGeom prst="rect">
             <a:avLst/>
@@ -3672,8 +3672,8 @@
         </p:nvSpPr>
         <p:spPr>
           <a:xfrm>
-            <a:off x="222756" y="1668542"/>
-            <a:ext cx="729020" cy="95845"/>
+            <a:off x="220246" y="1668542"/>
+            <a:ext cx="720804" cy="95845"/>
           </a:xfrm>
           <a:prstGeom prst="rect">
             <a:avLst/>
@@ -3695,7 +3695,7 @@
           <a:p>
             <a:fld id="{149F34B4-7175-41BD-B98B-2E7021201D7D}" type="datetimeFigureOut">
               <a:rPr lang="ko-KR" altLang="en-US" smtClean="0"/>
-              <a:t>2026-03-01</a:t>
+              <a:t>2026-04-09</a:t>
             </a:fld>
             <a:endParaRPr lang="ko-KR" altLang="en-US"/>
           </a:p>
@@ -3713,8 +3713,8 @@
         </p:nvSpPr>
         <p:spPr>
           <a:xfrm>
-            <a:off x="1073279" y="1668542"/>
-            <a:ext cx="1093530" cy="95845"/>
+            <a:off x="1061184" y="1668542"/>
+            <a:ext cx="1081207" cy="95845"/>
           </a:xfrm>
           <a:prstGeom prst="rect">
             <a:avLst/>
@@ -3750,8 +3750,8 @@
         </p:nvSpPr>
         <p:spPr>
           <a:xfrm>
-            <a:off x="2288312" y="1668542"/>
-            <a:ext cx="729020" cy="95845"/>
+            <a:off x="2262525" y="1668542"/>
+            <a:ext cx="720804" cy="95845"/>
           </a:xfrm>
           <a:prstGeom prst="rect">
             <a:avLst/>
@@ -3782,24 +3782,24 @@
     </p:spTree>
     <p:extLst>
       <p:ext uri="{BB962C8B-B14F-4D97-AF65-F5344CB8AC3E}">
-        <p14:creationId xmlns:p14="http://schemas.microsoft.com/office/powerpoint/2010/main" val="4252659477"/>
+        <p14:creationId xmlns:p14="http://schemas.microsoft.com/office/powerpoint/2010/main" val="2481041087"/>
       </p:ext>
     </p:extLst>
   </p:cSld>
   <p:clrMap bg1="lt1" tx1="dk1" bg2="lt2" tx2="dk2" accent1="accent1" accent2="accent2" accent3="accent3" accent4="accent4" accent5="accent5" accent6="accent6" hlink="hlink" folHlink="folHlink"/>
   <p:sldLayoutIdLst>
-    <p:sldLayoutId id="2147483871" r:id="rId1"/>
-    <p:sldLayoutId id="2147483872" r:id="rId2"/>
-    <p:sldLayoutId id="2147483873" r:id="rId3"/>
-    <p:sldLayoutId id="2147483874" r:id="rId4"/>
-    <p:sldLayoutId id="2147483875" r:id="rId5"/>
-    <p:sldLayoutId id="2147483876" r:id="rId6"/>
-    <p:sldLayoutId id="2147483877" r:id="rId7"/>
-    <p:sldLayoutId id="2147483878" r:id="rId8"/>
-    <p:sldLayoutId id="2147483879" r:id="rId9"/>
-    <p:sldLayoutId id="2147483880" r:id="rId10"/>
-    <p:sldLayoutId id="2147483881" r:id="rId11"/>
-    <p:sldLayoutId id="2147483882" r:id="rId12"/>
+    <p:sldLayoutId id="2147483884" r:id="rId1"/>
+    <p:sldLayoutId id="2147483885" r:id="rId2"/>
+    <p:sldLayoutId id="2147483886" r:id="rId3"/>
+    <p:sldLayoutId id="2147483887" r:id="rId4"/>
+    <p:sldLayoutId id="2147483888" r:id="rId5"/>
+    <p:sldLayoutId id="2147483889" r:id="rId6"/>
+    <p:sldLayoutId id="2147483890" r:id="rId7"/>
+    <p:sldLayoutId id="2147483891" r:id="rId8"/>
+    <p:sldLayoutId id="2147483892" r:id="rId9"/>
+    <p:sldLayoutId id="2147483893" r:id="rId10"/>
+    <p:sldLayoutId id="2147483894" r:id="rId11"/>
+    <p:sldLayoutId id="2147483895" r:id="rId12"/>
     <p:sldLayoutId id="2147483790" r:id="rId13"/>
     <p:sldLayoutId id="2147483789" r:id="rId14"/>
   </p:sldLayoutIdLst>
@@ -4091,7 +4091,7 @@
             <a:srgbClr val="F26B43"/>
           </p15:clr>
         </p15:guide>
-        <p15:guide id="2" pos="1021" userDrawn="1">
+        <p15:guide id="2" pos="1009" userDrawn="1">
           <p15:clr>
             <a:srgbClr val="F26B43"/>
           </p15:clr>
@@ -4133,7 +4133,7 @@
         </p:nvSpPr>
         <p:spPr>
           <a:xfrm>
-            <a:off x="1616893" y="1043683"/>
+            <a:off x="1598636" y="1043683"/>
             <a:ext cx="1264364" cy="230832"/>
           </a:xfrm>
           <a:prstGeom prst="roundRect">
@@ -4167,7 +4167,7 @@
           <a:lstStyle/>
           <a:p>
             <a:pPr algn="ctr"/>
-            <a:endParaRPr lang="ko-KR" altLang="en-US">
+            <a:endParaRPr lang="ko-KR" altLang="en-US" sz="2400">
               <a:latin typeface="KoPub돋움체 Light" panose="02020603020101020101" pitchFamily="18" charset="-127"/>
               <a:ea typeface="KoPub돋움체 Light" panose="02020603020101020101" pitchFamily="18" charset="-127"/>
             </a:endParaRPr>
@@ -4188,7 +4188,7 @@
         </p:nvSpPr>
         <p:spPr>
           <a:xfrm>
-            <a:off x="254362" y="1307925"/>
+            <a:off x="236105" y="1307925"/>
             <a:ext cx="1264364" cy="230832"/>
           </a:xfrm>
           <a:prstGeom prst="roundRect">
@@ -4222,7 +4222,7 @@
           <a:lstStyle/>
           <a:p>
             <a:pPr algn="ctr"/>
-            <a:endParaRPr lang="ko-KR" altLang="en-US">
+            <a:endParaRPr lang="ko-KR" altLang="en-US" sz="2400">
               <a:latin typeface="KoPub돋움체 Light" panose="02020603020101020101" pitchFamily="18" charset="-127"/>
               <a:ea typeface="KoPub돋움체 Light" panose="02020603020101020101" pitchFamily="18" charset="-127"/>
             </a:endParaRPr>
@@ -4243,7 +4243,7 @@
         </p:nvSpPr>
         <p:spPr>
           <a:xfrm>
-            <a:off x="1616893" y="1307925"/>
+            <a:off x="1598636" y="1307925"/>
             <a:ext cx="1264364" cy="230832"/>
           </a:xfrm>
           <a:prstGeom prst="roundRect">
@@ -4277,7 +4277,7 @@
           <a:lstStyle/>
           <a:p>
             <a:pPr algn="ctr"/>
-            <a:endParaRPr lang="ko-KR" altLang="en-US">
+            <a:endParaRPr lang="ko-KR" altLang="en-US" sz="2400">
               <a:latin typeface="KoPub돋움체 Light" panose="02020603020101020101" pitchFamily="18" charset="-127"/>
               <a:ea typeface="KoPub돋움체 Light" panose="02020603020101020101" pitchFamily="18" charset="-127"/>
             </a:endParaRPr>
@@ -4298,7 +4298,7 @@
         </p:nvSpPr>
         <p:spPr>
           <a:xfrm>
-            <a:off x="254362" y="1043683"/>
+            <a:off x="236105" y="1043683"/>
             <a:ext cx="1264364" cy="230832"/>
           </a:xfrm>
           <a:prstGeom prst="roundRect">
@@ -4332,7 +4332,7 @@
           <a:lstStyle/>
           <a:p>
             <a:pPr algn="ctr"/>
-            <a:endParaRPr lang="ko-KR" altLang="en-US">
+            <a:endParaRPr lang="ko-KR" altLang="en-US" sz="2400">
               <a:latin typeface="KoPub돋움체 Light" panose="02020603020101020101" pitchFamily="18" charset="-127"/>
               <a:ea typeface="KoPub돋움체 Light" panose="02020603020101020101" pitchFamily="18" charset="-127"/>
             </a:endParaRPr>
@@ -4353,7 +4353,7 @@
         </p:nvSpPr>
         <p:spPr>
           <a:xfrm>
-            <a:off x="61773" y="54245"/>
+            <a:off x="43517" y="54246"/>
             <a:ext cx="1180381" cy="169277"/>
           </a:xfrm>
           <a:prstGeom prst="rect">
@@ -4406,7 +4406,7 @@
         </p:nvGrpSpPr>
         <p:grpSpPr>
           <a:xfrm>
-            <a:off x="711096" y="331471"/>
+            <a:off x="692840" y="331471"/>
             <a:ext cx="2337499" cy="520584"/>
             <a:chOff x="422852" y="312900"/>
             <a:chExt cx="2337499" cy="520584"/>
@@ -4587,8 +4587,8 @@
         </p:nvSpPr>
         <p:spPr>
           <a:xfrm>
-            <a:off x="318921" y="1074461"/>
-            <a:ext cx="1135247" cy="200055"/>
+            <a:off x="163608" y="1041309"/>
+            <a:ext cx="1409361" cy="230832"/>
           </a:xfrm>
           <a:prstGeom prst="rect">
             <a:avLst/>
@@ -4603,7 +4603,7 @@
           <a:p>
             <a:pPr algn="ctr"/>
             <a:r>
-              <a:rPr lang="ko-KR" altLang="en-US" sz="700" b="1" dirty="0">
+              <a:rPr lang="ko-KR" altLang="en-US" sz="900" b="1" dirty="0">
                 <a:solidFill>
                   <a:schemeClr val="tx2">
                     <a:lumMod val="50000"/>
@@ -4615,7 +4615,7 @@
               <a:t>소통의 광장</a:t>
             </a:r>
             <a:r>
-              <a:rPr lang="en-US" altLang="ko-KR" sz="700" b="1" dirty="0">
+              <a:rPr lang="en-US" altLang="ko-KR" sz="900" b="1" dirty="0">
                 <a:solidFill>
                   <a:schemeClr val="tx2">
                     <a:lumMod val="50000"/>
@@ -4626,7 +4626,7 @@
               </a:rPr>
               <a:t> (Community)</a:t>
             </a:r>
-            <a:endParaRPr lang="en-US" altLang="ko-KR" sz="600" dirty="0">
+            <a:endParaRPr lang="en-US" altLang="ko-KR" sz="800" dirty="0">
               <a:solidFill>
                 <a:schemeClr val="tx2">
                   <a:lumMod val="50000"/>
@@ -4652,8 +4652,8 @@
         </p:nvSpPr>
         <p:spPr>
           <a:xfrm>
-            <a:off x="1699886" y="1074461"/>
-            <a:ext cx="1098379" cy="200055"/>
+            <a:off x="1548581" y="1041309"/>
+            <a:ext cx="1364476" cy="230832"/>
           </a:xfrm>
           <a:prstGeom prst="rect">
             <a:avLst/>
@@ -4668,7 +4668,7 @@
           <a:p>
             <a:pPr algn="ctr"/>
             <a:r>
-              <a:rPr lang="ko-KR" altLang="en-US" sz="700" b="1" dirty="0">
+              <a:rPr lang="ko-KR" altLang="en-US" sz="900" b="1" dirty="0">
                 <a:solidFill>
                   <a:schemeClr val="tx2">
                     <a:lumMod val="50000"/>
@@ -4680,7 +4680,7 @@
               <a:t>업무의 기준  </a:t>
             </a:r>
             <a:r>
-              <a:rPr lang="en-US" altLang="ko-KR" sz="700" b="1" dirty="0">
+              <a:rPr lang="en-US" altLang="ko-KR" sz="900" b="1" dirty="0">
                 <a:solidFill>
                   <a:schemeClr val="tx2">
                     <a:lumMod val="50000"/>
@@ -4691,7 +4691,7 @@
               </a:rPr>
               <a:t>(Standards)</a:t>
             </a:r>
-            <a:endParaRPr lang="en-US" altLang="ko-KR" sz="600" dirty="0">
+            <a:endParaRPr lang="en-US" altLang="ko-KR" sz="800" dirty="0">
               <a:solidFill>
                 <a:schemeClr val="tx2">
                   <a:lumMod val="50000"/>
@@ -4717,8 +4717,8 @@
         </p:nvSpPr>
         <p:spPr>
           <a:xfrm>
-            <a:off x="353385" y="1338703"/>
-            <a:ext cx="1066319" cy="200055"/>
+            <a:off x="206889" y="1305551"/>
+            <a:ext cx="1322798" cy="230832"/>
           </a:xfrm>
           <a:prstGeom prst="rect">
             <a:avLst/>
@@ -4733,7 +4733,7 @@
           <a:p>
             <a:pPr algn="ctr"/>
             <a:r>
-              <a:rPr lang="ko-KR" altLang="en-US" sz="700" b="1" dirty="0">
+              <a:rPr lang="ko-KR" altLang="en-US" sz="900" b="1" dirty="0">
                 <a:solidFill>
                   <a:schemeClr val="tx2">
                     <a:lumMod val="50000"/>
@@ -4745,7 +4745,7 @@
               <a:t>배움의 창구 </a:t>
             </a:r>
             <a:r>
-              <a:rPr lang="en-US" altLang="ko-KR" sz="700" b="1" dirty="0">
+              <a:rPr lang="en-US" altLang="ko-KR" sz="900" b="1" dirty="0">
                 <a:solidFill>
                   <a:schemeClr val="tx2">
                     <a:lumMod val="50000"/>
@@ -4756,7 +4756,7 @@
               </a:rPr>
               <a:t>(Education)</a:t>
             </a:r>
-            <a:endParaRPr lang="ko-KR" altLang="en-US" sz="600" dirty="0">
+            <a:endParaRPr lang="ko-KR" altLang="en-US" sz="800" dirty="0">
               <a:solidFill>
                 <a:schemeClr val="tx2">
                   <a:lumMod val="50000"/>
@@ -4782,8 +4782,8 @@
         </p:nvSpPr>
         <p:spPr>
           <a:xfrm>
-            <a:off x="1686261" y="1338703"/>
-            <a:ext cx="1125629" cy="200055"/>
+            <a:off x="1530948" y="1305551"/>
+            <a:ext cx="1399743" cy="230832"/>
           </a:xfrm>
           <a:prstGeom prst="rect">
             <a:avLst/>
@@ -4798,7 +4798,7 @@
           <a:p>
             <a:pPr algn="ctr"/>
             <a:r>
-              <a:rPr lang="ko-KR" altLang="en-US" sz="700" b="1" dirty="0">
+              <a:rPr lang="ko-KR" altLang="en-US" sz="900" b="1" dirty="0">
                 <a:solidFill>
                   <a:schemeClr val="tx2">
                     <a:lumMod val="50000"/>
@@ -4810,7 +4810,7 @@
               <a:t>투명한 지표  </a:t>
             </a:r>
             <a:r>
-              <a:rPr lang="en-US" altLang="ko-KR" sz="700" b="1" dirty="0">
+              <a:rPr lang="en-US" altLang="ko-KR" sz="900" b="1" dirty="0">
                 <a:solidFill>
                   <a:schemeClr val="tx2">
                     <a:lumMod val="50000"/>
@@ -4821,7 +4821,7 @@
               </a:rPr>
               <a:t>(Dashboard)</a:t>
             </a:r>
-            <a:endParaRPr lang="ko-KR" altLang="en-US" sz="600" dirty="0">
+            <a:endParaRPr lang="ko-KR" altLang="en-US" sz="800" dirty="0">
               <a:solidFill>
                 <a:schemeClr val="tx2">
                   <a:lumMod val="50000"/>
@@ -4847,7 +4847,7 @@
         </p:nvGrpSpPr>
         <p:grpSpPr>
           <a:xfrm>
-            <a:off x="191493" y="377028"/>
+            <a:off x="173236" y="377028"/>
             <a:ext cx="538336" cy="538336"/>
             <a:chOff x="777945" y="-736888"/>
             <a:chExt cx="663508" cy="663508"/>
@@ -5133,7 +5133,7 @@
         <p:cNvPr id="1" name="">
           <a:extLst>
             <a:ext uri="{FF2B5EF4-FFF2-40B4-BE49-F238E27FC236}">
-              <a16:creationId xmlns:a16="http://schemas.microsoft.com/office/drawing/2014/main" id="{4229FD92-E17A-B24B-65C3-FDDA2739FB2D}"/>
+              <a16:creationId xmlns:a16="http://schemas.microsoft.com/office/drawing/2014/main" id="{D4AAA997-8A33-0D89-CF30-952F52E61BE3}"/>
             </a:ext>
           </a:extLst>
         </p:cNvPr>
@@ -5153,7 +5153,7 @@
           <p:cNvPr id="28" name="사각형: 둥근 모서리 27">
             <a:extLst>
               <a:ext uri="{FF2B5EF4-FFF2-40B4-BE49-F238E27FC236}">
-                <a16:creationId xmlns:a16="http://schemas.microsoft.com/office/drawing/2014/main" id="{BD4D15A4-5817-67CE-3C6C-A0E93E18A524}"/>
+                <a16:creationId xmlns:a16="http://schemas.microsoft.com/office/drawing/2014/main" id="{C6063252-95E6-02C8-E68B-5A5406130CAC}"/>
               </a:ext>
             </a:extLst>
           </p:cNvPr>
@@ -5162,7 +5162,7 @@
         </p:nvSpPr>
         <p:spPr>
           <a:xfrm>
-            <a:off x="1616893" y="1043683"/>
+            <a:off x="1598636" y="1043683"/>
             <a:ext cx="1264364" cy="230832"/>
           </a:xfrm>
           <a:prstGeom prst="roundRect">
@@ -5196,7 +5196,7 @@
           <a:lstStyle/>
           <a:p>
             <a:pPr algn="ctr"/>
-            <a:endParaRPr lang="ko-KR" altLang="en-US">
+            <a:endParaRPr lang="ko-KR" altLang="en-US" sz="2400">
               <a:latin typeface="KoPub돋움체 Light" panose="02020603020101020101" pitchFamily="18" charset="-127"/>
               <a:ea typeface="KoPub돋움체 Light" panose="02020603020101020101" pitchFamily="18" charset="-127"/>
             </a:endParaRPr>
@@ -5208,7 +5208,7 @@
           <p:cNvPr id="29" name="사각형: 둥근 모서리 28">
             <a:extLst>
               <a:ext uri="{FF2B5EF4-FFF2-40B4-BE49-F238E27FC236}">
-                <a16:creationId xmlns:a16="http://schemas.microsoft.com/office/drawing/2014/main" id="{5B6ECE98-362E-96DD-5128-D23EF1760293}"/>
+                <a16:creationId xmlns:a16="http://schemas.microsoft.com/office/drawing/2014/main" id="{33172203-0AF1-62A8-FB03-2718CB658217}"/>
               </a:ext>
             </a:extLst>
           </p:cNvPr>
@@ -5217,7 +5217,7 @@
         </p:nvSpPr>
         <p:spPr>
           <a:xfrm>
-            <a:off x="254362" y="1307925"/>
+            <a:off x="236105" y="1307925"/>
             <a:ext cx="1264364" cy="230832"/>
           </a:xfrm>
           <a:prstGeom prst="roundRect">
@@ -5251,7 +5251,7 @@
           <a:lstStyle/>
           <a:p>
             <a:pPr algn="ctr"/>
-            <a:endParaRPr lang="ko-KR" altLang="en-US">
+            <a:endParaRPr lang="ko-KR" altLang="en-US" sz="2400">
               <a:latin typeface="KoPub돋움체 Light" panose="02020603020101020101" pitchFamily="18" charset="-127"/>
               <a:ea typeface="KoPub돋움체 Light" panose="02020603020101020101" pitchFamily="18" charset="-127"/>
             </a:endParaRPr>
@@ -5263,7 +5263,7 @@
           <p:cNvPr id="30" name="사각형: 둥근 모서리 29">
             <a:extLst>
               <a:ext uri="{FF2B5EF4-FFF2-40B4-BE49-F238E27FC236}">
-                <a16:creationId xmlns:a16="http://schemas.microsoft.com/office/drawing/2014/main" id="{6BA093E6-428F-68E8-7A26-FD8DC528659A}"/>
+                <a16:creationId xmlns:a16="http://schemas.microsoft.com/office/drawing/2014/main" id="{626BE8AA-205D-2E31-9D1D-D184895B6FFE}"/>
               </a:ext>
             </a:extLst>
           </p:cNvPr>
@@ -5272,7 +5272,7 @@
         </p:nvSpPr>
         <p:spPr>
           <a:xfrm>
-            <a:off x="1616893" y="1307925"/>
+            <a:off x="1598636" y="1307925"/>
             <a:ext cx="1264364" cy="230832"/>
           </a:xfrm>
           <a:prstGeom prst="roundRect">
@@ -5306,7 +5306,7 @@
           <a:lstStyle/>
           <a:p>
             <a:pPr algn="ctr"/>
-            <a:endParaRPr lang="ko-KR" altLang="en-US">
+            <a:endParaRPr lang="ko-KR" altLang="en-US" sz="2400">
               <a:latin typeface="KoPub돋움체 Light" panose="02020603020101020101" pitchFamily="18" charset="-127"/>
               <a:ea typeface="KoPub돋움체 Light" panose="02020603020101020101" pitchFamily="18" charset="-127"/>
             </a:endParaRPr>
@@ -5318,7 +5318,7 @@
           <p:cNvPr id="21" name="사각형: 둥근 모서리 20">
             <a:extLst>
               <a:ext uri="{FF2B5EF4-FFF2-40B4-BE49-F238E27FC236}">
-                <a16:creationId xmlns:a16="http://schemas.microsoft.com/office/drawing/2014/main" id="{FAA81102-3976-11AC-DF61-7B0C02F0948C}"/>
+                <a16:creationId xmlns:a16="http://schemas.microsoft.com/office/drawing/2014/main" id="{B494444E-F286-236C-4602-B32BCFCC28A2}"/>
               </a:ext>
             </a:extLst>
           </p:cNvPr>
@@ -5327,7 +5327,7 @@
         </p:nvSpPr>
         <p:spPr>
           <a:xfrm>
-            <a:off x="254362" y="1043683"/>
+            <a:off x="236105" y="1043683"/>
             <a:ext cx="1264364" cy="230832"/>
           </a:xfrm>
           <a:prstGeom prst="roundRect">
@@ -5361,7 +5361,7 @@
           <a:lstStyle/>
           <a:p>
             <a:pPr algn="ctr"/>
-            <a:endParaRPr lang="ko-KR" altLang="en-US">
+            <a:endParaRPr lang="ko-KR" altLang="en-US" sz="2400">
               <a:latin typeface="KoPub돋움체 Light" panose="02020603020101020101" pitchFamily="18" charset="-127"/>
               <a:ea typeface="KoPub돋움체 Light" panose="02020603020101020101" pitchFamily="18" charset="-127"/>
             </a:endParaRPr>
@@ -5373,7 +5373,7 @@
           <p:cNvPr id="3" name="TextBox 2">
             <a:extLst>
               <a:ext uri="{FF2B5EF4-FFF2-40B4-BE49-F238E27FC236}">
-                <a16:creationId xmlns:a16="http://schemas.microsoft.com/office/drawing/2014/main" id="{32924394-1FDB-21B6-29C9-58B75446F1D5}"/>
+                <a16:creationId xmlns:a16="http://schemas.microsoft.com/office/drawing/2014/main" id="{E36C2861-CC64-67B4-5BF7-89F7A524A14A}"/>
               </a:ext>
             </a:extLst>
           </p:cNvPr>
@@ -5382,7 +5382,7 @@
         </p:nvSpPr>
         <p:spPr>
           <a:xfrm>
-            <a:off x="61773" y="54245"/>
+            <a:off x="43517" y="54246"/>
             <a:ext cx="1180381" cy="169277"/>
           </a:xfrm>
           <a:prstGeom prst="rect">
@@ -5426,7 +5426,7 @@
           <p:cNvPr id="20" name="그룹 19">
             <a:extLst>
               <a:ext uri="{FF2B5EF4-FFF2-40B4-BE49-F238E27FC236}">
-                <a16:creationId xmlns:a16="http://schemas.microsoft.com/office/drawing/2014/main" id="{DA538743-3FE1-EE78-83CA-5F2682CECD49}"/>
+                <a16:creationId xmlns:a16="http://schemas.microsoft.com/office/drawing/2014/main" id="{2D7BBD09-C6CF-9E94-032E-391F419EA5A3}"/>
               </a:ext>
             </a:extLst>
           </p:cNvPr>
@@ -5435,7 +5435,7 @@
         </p:nvGrpSpPr>
         <p:grpSpPr>
           <a:xfrm>
-            <a:off x="711096" y="331471"/>
+            <a:off x="692840" y="331471"/>
             <a:ext cx="2337499" cy="520584"/>
             <a:chOff x="422852" y="312900"/>
             <a:chExt cx="2337499" cy="520584"/>
@@ -5446,7 +5446,7 @@
             <p:cNvPr id="4" name="TextBox 3">
               <a:extLst>
                 <a:ext uri="{FF2B5EF4-FFF2-40B4-BE49-F238E27FC236}">
-                  <a16:creationId xmlns:a16="http://schemas.microsoft.com/office/drawing/2014/main" id="{CF80034E-0507-FAD8-5BB6-D9B0C9FA9978}"/>
+                  <a16:creationId xmlns:a16="http://schemas.microsoft.com/office/drawing/2014/main" id="{442ACD3C-9E46-B6F1-9AAA-5FDC65A1B999}"/>
                 </a:ext>
               </a:extLst>
             </p:cNvPr>
@@ -5523,7 +5523,7 @@
             <p:cNvPr id="6" name="TextBox 5">
               <a:extLst>
                 <a:ext uri="{FF2B5EF4-FFF2-40B4-BE49-F238E27FC236}">
-                  <a16:creationId xmlns:a16="http://schemas.microsoft.com/office/drawing/2014/main" id="{3716242B-826C-3A04-12B5-8E0F50EB94CB}"/>
+                  <a16:creationId xmlns:a16="http://schemas.microsoft.com/office/drawing/2014/main" id="{F3617AFD-0BD9-CFDE-1738-2DE4374B3E6A}"/>
                 </a:ext>
               </a:extLst>
             </p:cNvPr>
@@ -5607,7 +5607,7 @@
           <p:cNvPr id="7" name="TextBox 6">
             <a:extLst>
               <a:ext uri="{FF2B5EF4-FFF2-40B4-BE49-F238E27FC236}">
-                <a16:creationId xmlns:a16="http://schemas.microsoft.com/office/drawing/2014/main" id="{D64E58B4-6046-1864-1CAE-7B1077C0BB74}"/>
+                <a16:creationId xmlns:a16="http://schemas.microsoft.com/office/drawing/2014/main" id="{C76C79B7-005A-1F96-9C33-E5C55A5E1E82}"/>
               </a:ext>
             </a:extLst>
           </p:cNvPr>
@@ -5616,8 +5616,8 @@
         </p:nvSpPr>
         <p:spPr>
           <a:xfrm>
-            <a:off x="318921" y="1074461"/>
-            <a:ext cx="1135247" cy="200055"/>
+            <a:off x="163608" y="1041309"/>
+            <a:ext cx="1409361" cy="230832"/>
           </a:xfrm>
           <a:prstGeom prst="rect">
             <a:avLst/>
@@ -5632,7 +5632,7 @@
           <a:p>
             <a:pPr algn="ctr"/>
             <a:r>
-              <a:rPr lang="ko-KR" altLang="en-US" sz="700" b="1" dirty="0">
+              <a:rPr lang="ko-KR" altLang="en-US" sz="900" b="1" dirty="0">
                 <a:solidFill>
                   <a:schemeClr val="tx2">
                     <a:lumMod val="50000"/>
@@ -5644,7 +5644,7 @@
               <a:t>소통의 광장</a:t>
             </a:r>
             <a:r>
-              <a:rPr lang="en-US" altLang="ko-KR" sz="700" b="1" dirty="0">
+              <a:rPr lang="en-US" altLang="ko-KR" sz="900" b="1" dirty="0">
                 <a:solidFill>
                   <a:schemeClr val="tx2">
                     <a:lumMod val="50000"/>
@@ -5655,7 +5655,7 @@
               </a:rPr>
               <a:t> (Community)</a:t>
             </a:r>
-            <a:endParaRPr lang="en-US" altLang="ko-KR" sz="600" dirty="0">
+            <a:endParaRPr lang="en-US" altLang="ko-KR" sz="800" dirty="0">
               <a:solidFill>
                 <a:schemeClr val="tx2">
                   <a:lumMod val="50000"/>
@@ -5672,7 +5672,7 @@
           <p:cNvPr id="8" name="TextBox 7">
             <a:extLst>
               <a:ext uri="{FF2B5EF4-FFF2-40B4-BE49-F238E27FC236}">
-                <a16:creationId xmlns:a16="http://schemas.microsoft.com/office/drawing/2014/main" id="{ABC56957-5FA3-3B55-F154-C738694F0CDC}"/>
+                <a16:creationId xmlns:a16="http://schemas.microsoft.com/office/drawing/2014/main" id="{C6DAAEA4-0089-280E-754E-9A4212B75F21}"/>
               </a:ext>
             </a:extLst>
           </p:cNvPr>
@@ -5681,8 +5681,8 @@
         </p:nvSpPr>
         <p:spPr>
           <a:xfrm>
-            <a:off x="1699886" y="1074461"/>
-            <a:ext cx="1098379" cy="200055"/>
+            <a:off x="1548581" y="1041309"/>
+            <a:ext cx="1364476" cy="230832"/>
           </a:xfrm>
           <a:prstGeom prst="rect">
             <a:avLst/>
@@ -5697,7 +5697,7 @@
           <a:p>
             <a:pPr algn="ctr"/>
             <a:r>
-              <a:rPr lang="ko-KR" altLang="en-US" sz="700" b="1" dirty="0">
+              <a:rPr lang="ko-KR" altLang="en-US" sz="900" b="1" dirty="0">
                 <a:solidFill>
                   <a:schemeClr val="tx2">
                     <a:lumMod val="50000"/>
@@ -5709,7 +5709,7 @@
               <a:t>업무의 기준  </a:t>
             </a:r>
             <a:r>
-              <a:rPr lang="en-US" altLang="ko-KR" sz="700" b="1" dirty="0">
+              <a:rPr lang="en-US" altLang="ko-KR" sz="900" b="1" dirty="0">
                 <a:solidFill>
                   <a:schemeClr val="tx2">
                     <a:lumMod val="50000"/>
@@ -5720,7 +5720,7 @@
               </a:rPr>
               <a:t>(Standards)</a:t>
             </a:r>
-            <a:endParaRPr lang="en-US" altLang="ko-KR" sz="600" dirty="0">
+            <a:endParaRPr lang="en-US" altLang="ko-KR" sz="800" dirty="0">
               <a:solidFill>
                 <a:schemeClr val="tx2">
                   <a:lumMod val="50000"/>
@@ -5737,7 +5737,7 @@
           <p:cNvPr id="9" name="TextBox 8">
             <a:extLst>
               <a:ext uri="{FF2B5EF4-FFF2-40B4-BE49-F238E27FC236}">
-                <a16:creationId xmlns:a16="http://schemas.microsoft.com/office/drawing/2014/main" id="{65050398-0D44-573F-5914-25E050DE95DA}"/>
+                <a16:creationId xmlns:a16="http://schemas.microsoft.com/office/drawing/2014/main" id="{405B90CA-2121-C2E5-E5A2-30C3F7A79A4F}"/>
               </a:ext>
             </a:extLst>
           </p:cNvPr>
@@ -5746,8 +5746,8 @@
         </p:nvSpPr>
         <p:spPr>
           <a:xfrm>
-            <a:off x="353385" y="1338703"/>
-            <a:ext cx="1066319" cy="200055"/>
+            <a:off x="206889" y="1305551"/>
+            <a:ext cx="1322798" cy="230832"/>
           </a:xfrm>
           <a:prstGeom prst="rect">
             <a:avLst/>
@@ -5762,7 +5762,7 @@
           <a:p>
             <a:pPr algn="ctr"/>
             <a:r>
-              <a:rPr lang="ko-KR" altLang="en-US" sz="700" b="1" dirty="0">
+              <a:rPr lang="ko-KR" altLang="en-US" sz="900" b="1" dirty="0">
                 <a:solidFill>
                   <a:schemeClr val="tx2">
                     <a:lumMod val="50000"/>
@@ -5774,7 +5774,7 @@
               <a:t>배움의 창구 </a:t>
             </a:r>
             <a:r>
-              <a:rPr lang="en-US" altLang="ko-KR" sz="700" b="1" dirty="0">
+              <a:rPr lang="en-US" altLang="ko-KR" sz="900" b="1" dirty="0">
                 <a:solidFill>
                   <a:schemeClr val="tx2">
                     <a:lumMod val="50000"/>
@@ -5785,7 +5785,7 @@
               </a:rPr>
               <a:t>(Education)</a:t>
             </a:r>
-            <a:endParaRPr lang="ko-KR" altLang="en-US" sz="600" dirty="0">
+            <a:endParaRPr lang="ko-KR" altLang="en-US" sz="800" dirty="0">
               <a:solidFill>
                 <a:schemeClr val="tx2">
                   <a:lumMod val="50000"/>
@@ -5802,7 +5802,7 @@
           <p:cNvPr id="10" name="TextBox 9">
             <a:extLst>
               <a:ext uri="{FF2B5EF4-FFF2-40B4-BE49-F238E27FC236}">
-                <a16:creationId xmlns:a16="http://schemas.microsoft.com/office/drawing/2014/main" id="{8CCE93D0-96A9-AFCB-3208-01FF0713F53E}"/>
+                <a16:creationId xmlns:a16="http://schemas.microsoft.com/office/drawing/2014/main" id="{190A7945-03C2-64D5-3EB6-3BADF453C26A}"/>
               </a:ext>
             </a:extLst>
           </p:cNvPr>
@@ -5811,8 +5811,8 @@
         </p:nvSpPr>
         <p:spPr>
           <a:xfrm>
-            <a:off x="1686261" y="1338703"/>
-            <a:ext cx="1125629" cy="200055"/>
+            <a:off x="1530948" y="1305551"/>
+            <a:ext cx="1399743" cy="230832"/>
           </a:xfrm>
           <a:prstGeom prst="rect">
             <a:avLst/>
@@ -5827,7 +5827,7 @@
           <a:p>
             <a:pPr algn="ctr"/>
             <a:r>
-              <a:rPr lang="ko-KR" altLang="en-US" sz="700" b="1" dirty="0">
+              <a:rPr lang="ko-KR" altLang="en-US" sz="900" b="1" dirty="0">
                 <a:solidFill>
                   <a:schemeClr val="tx2">
                     <a:lumMod val="50000"/>
@@ -5839,7 +5839,7 @@
               <a:t>투명한 지표  </a:t>
             </a:r>
             <a:r>
-              <a:rPr lang="en-US" altLang="ko-KR" sz="700" b="1" dirty="0">
+              <a:rPr lang="en-US" altLang="ko-KR" sz="900" b="1" dirty="0">
                 <a:solidFill>
                   <a:schemeClr val="tx2">
                     <a:lumMod val="50000"/>
@@ -5850,7 +5850,7 @@
               </a:rPr>
               <a:t>(Dashboard)</a:t>
             </a:r>
-            <a:endParaRPr lang="ko-KR" altLang="en-US" sz="600" dirty="0">
+            <a:endParaRPr lang="ko-KR" altLang="en-US" sz="800" dirty="0">
               <a:solidFill>
                 <a:schemeClr val="tx2">
                   <a:lumMod val="50000"/>
@@ -5867,7 +5867,7 @@
           <p:cNvPr id="17" name="그룹 16">
             <a:extLst>
               <a:ext uri="{FF2B5EF4-FFF2-40B4-BE49-F238E27FC236}">
-                <a16:creationId xmlns:a16="http://schemas.microsoft.com/office/drawing/2014/main" id="{69BD8961-A657-F110-B4D8-8926FF442F62}"/>
+                <a16:creationId xmlns:a16="http://schemas.microsoft.com/office/drawing/2014/main" id="{126D9EE3-36E1-6B71-9440-DB5A7D7AA853}"/>
               </a:ext>
             </a:extLst>
           </p:cNvPr>
@@ -5876,7 +5876,7 @@
         </p:nvGrpSpPr>
         <p:grpSpPr>
           <a:xfrm>
-            <a:off x="191493" y="377028"/>
+            <a:off x="173236" y="377028"/>
             <a:ext cx="538336" cy="538336"/>
             <a:chOff x="777945" y="-736888"/>
             <a:chExt cx="663508" cy="663508"/>
@@ -5887,7 +5887,7 @@
             <p:cNvPr id="5" name="그림 4" descr="패턴, 사각형, 예술, 직사각형이(가) 표시된 사진&#10;&#10;AI 생성 콘텐츠는 정확하지 않을 수 있습니다.">
               <a:extLst>
                 <a:ext uri="{FF2B5EF4-FFF2-40B4-BE49-F238E27FC236}">
-                  <a16:creationId xmlns:a16="http://schemas.microsoft.com/office/drawing/2014/main" id="{25E11E0F-3CE3-958A-8EAC-CA94BCC6FA37}"/>
+                  <a16:creationId xmlns:a16="http://schemas.microsoft.com/office/drawing/2014/main" id="{CD4E71F8-D5E3-818B-005E-ABD85D7BD4F9}"/>
                 </a:ext>
               </a:extLst>
             </p:cNvPr>
@@ -5917,7 +5917,7 @@
             <p:cNvPr id="13" name="L 도형 12">
               <a:extLst>
                 <a:ext uri="{FF2B5EF4-FFF2-40B4-BE49-F238E27FC236}">
-                  <a16:creationId xmlns:a16="http://schemas.microsoft.com/office/drawing/2014/main" id="{060939EB-304A-3ECB-0121-716BB6ACFC9D}"/>
+                  <a16:creationId xmlns:a16="http://schemas.microsoft.com/office/drawing/2014/main" id="{8221DC4C-C9CC-6E80-8D21-30FE06F6E874}"/>
                 </a:ext>
               </a:extLst>
             </p:cNvPr>
@@ -5974,7 +5974,7 @@
             <p:cNvPr id="14" name="L 도형 13">
               <a:extLst>
                 <a:ext uri="{FF2B5EF4-FFF2-40B4-BE49-F238E27FC236}">
-                  <a16:creationId xmlns:a16="http://schemas.microsoft.com/office/drawing/2014/main" id="{9F5B562B-1FC4-2917-9750-AF71F2FEB00B}"/>
+                  <a16:creationId xmlns:a16="http://schemas.microsoft.com/office/drawing/2014/main" id="{6A3FA9C7-F9E0-7C7A-1B40-864FE4744995}"/>
                 </a:ext>
               </a:extLst>
             </p:cNvPr>
@@ -6031,7 +6031,7 @@
             <p:cNvPr id="15" name="L 도형 14">
               <a:extLst>
                 <a:ext uri="{FF2B5EF4-FFF2-40B4-BE49-F238E27FC236}">
-                  <a16:creationId xmlns:a16="http://schemas.microsoft.com/office/drawing/2014/main" id="{6C32BE93-2E0A-BC92-52A0-AFC5448760FE}"/>
+                  <a16:creationId xmlns:a16="http://schemas.microsoft.com/office/drawing/2014/main" id="{2D4ECC1C-0BEC-0BD3-F554-3A0567A9B643}"/>
                 </a:ext>
               </a:extLst>
             </p:cNvPr>
@@ -6088,7 +6088,7 @@
             <p:cNvPr id="16" name="L 도형 15">
               <a:extLst>
                 <a:ext uri="{FF2B5EF4-FFF2-40B4-BE49-F238E27FC236}">
-                  <a16:creationId xmlns:a16="http://schemas.microsoft.com/office/drawing/2014/main" id="{33390D49-3B02-CEE2-708D-38088495453B}"/>
+                  <a16:creationId xmlns:a16="http://schemas.microsoft.com/office/drawing/2014/main" id="{ED1EE54C-A504-9212-924F-DE9E5CAD6CF7}"/>
                 </a:ext>
               </a:extLst>
             </p:cNvPr>
@@ -6144,7 +6144,7 @@
     </p:spTree>
     <p:extLst>
       <p:ext uri="{BB962C8B-B14F-4D97-AF65-F5344CB8AC3E}">
-        <p14:creationId xmlns:p14="http://schemas.microsoft.com/office/powerpoint/2010/main" val="368683416"/>
+        <p14:creationId xmlns:p14="http://schemas.microsoft.com/office/powerpoint/2010/main" val="2222454785"/>
       </p:ext>
     </p:extLst>
   </p:cSld>
@@ -6162,7 +6162,7 @@
         <p:cNvPr id="1" name="">
           <a:extLst>
             <a:ext uri="{FF2B5EF4-FFF2-40B4-BE49-F238E27FC236}">
-              <a16:creationId xmlns:a16="http://schemas.microsoft.com/office/drawing/2014/main" id="{54BC14EC-BCD3-96DE-08C5-B7EA8F9F65FA}"/>
+              <a16:creationId xmlns:a16="http://schemas.microsoft.com/office/drawing/2014/main" id="{5C7AE82B-6EAE-9A57-39A3-79023A20E89C}"/>
             </a:ext>
           </a:extLst>
         </p:cNvPr>
@@ -6182,7 +6182,7 @@
           <p:cNvPr id="28" name="사각형: 둥근 모서리 27">
             <a:extLst>
               <a:ext uri="{FF2B5EF4-FFF2-40B4-BE49-F238E27FC236}">
-                <a16:creationId xmlns:a16="http://schemas.microsoft.com/office/drawing/2014/main" id="{9FE129FC-FA16-7E0A-FFEC-ADDA439062FA}"/>
+                <a16:creationId xmlns:a16="http://schemas.microsoft.com/office/drawing/2014/main" id="{2C6649FF-9106-ACD6-C7D7-9614EC350346}"/>
               </a:ext>
             </a:extLst>
           </p:cNvPr>
@@ -6191,7 +6191,7 @@
         </p:nvSpPr>
         <p:spPr>
           <a:xfrm>
-            <a:off x="1616893" y="1043683"/>
+            <a:off x="1598636" y="1043683"/>
             <a:ext cx="1264364" cy="230832"/>
           </a:xfrm>
           <a:prstGeom prst="roundRect">
@@ -6225,7 +6225,7 @@
           <a:lstStyle/>
           <a:p>
             <a:pPr algn="ctr"/>
-            <a:endParaRPr lang="ko-KR" altLang="en-US">
+            <a:endParaRPr lang="ko-KR" altLang="en-US" sz="2400">
               <a:latin typeface="KoPub돋움체 Light" panose="02020603020101020101" pitchFamily="18" charset="-127"/>
               <a:ea typeface="KoPub돋움체 Light" panose="02020603020101020101" pitchFamily="18" charset="-127"/>
             </a:endParaRPr>
@@ -6237,7 +6237,7 @@
           <p:cNvPr id="29" name="사각형: 둥근 모서리 28">
             <a:extLst>
               <a:ext uri="{FF2B5EF4-FFF2-40B4-BE49-F238E27FC236}">
-                <a16:creationId xmlns:a16="http://schemas.microsoft.com/office/drawing/2014/main" id="{8F3CD272-24DE-F8D1-7BBD-A4B502FE742C}"/>
+                <a16:creationId xmlns:a16="http://schemas.microsoft.com/office/drawing/2014/main" id="{F78FB4D1-EB4A-DAD8-DFD3-E492B74D0C5F}"/>
               </a:ext>
             </a:extLst>
           </p:cNvPr>
@@ -6246,7 +6246,7 @@
         </p:nvSpPr>
         <p:spPr>
           <a:xfrm>
-            <a:off x="254362" y="1307925"/>
+            <a:off x="236105" y="1307925"/>
             <a:ext cx="1264364" cy="230832"/>
           </a:xfrm>
           <a:prstGeom prst="roundRect">
@@ -6280,7 +6280,7 @@
           <a:lstStyle/>
           <a:p>
             <a:pPr algn="ctr"/>
-            <a:endParaRPr lang="ko-KR" altLang="en-US">
+            <a:endParaRPr lang="ko-KR" altLang="en-US" sz="2400">
               <a:latin typeface="KoPub돋움체 Light" panose="02020603020101020101" pitchFamily="18" charset="-127"/>
               <a:ea typeface="KoPub돋움체 Light" panose="02020603020101020101" pitchFamily="18" charset="-127"/>
             </a:endParaRPr>
@@ -6292,7 +6292,7 @@
           <p:cNvPr id="30" name="사각형: 둥근 모서리 29">
             <a:extLst>
               <a:ext uri="{FF2B5EF4-FFF2-40B4-BE49-F238E27FC236}">
-                <a16:creationId xmlns:a16="http://schemas.microsoft.com/office/drawing/2014/main" id="{0B817E18-DDD0-85EB-B34E-284F90401F86}"/>
+                <a16:creationId xmlns:a16="http://schemas.microsoft.com/office/drawing/2014/main" id="{545544D8-5BAC-1D5E-A938-80B8A63877CF}"/>
               </a:ext>
             </a:extLst>
           </p:cNvPr>
@@ -6301,7 +6301,7 @@
         </p:nvSpPr>
         <p:spPr>
           <a:xfrm>
-            <a:off x="1616893" y="1307925"/>
+            <a:off x="1598636" y="1307925"/>
             <a:ext cx="1264364" cy="230832"/>
           </a:xfrm>
           <a:prstGeom prst="roundRect">
@@ -6335,7 +6335,7 @@
           <a:lstStyle/>
           <a:p>
             <a:pPr algn="ctr"/>
-            <a:endParaRPr lang="ko-KR" altLang="en-US">
+            <a:endParaRPr lang="ko-KR" altLang="en-US" sz="2400">
               <a:latin typeface="KoPub돋움체 Light" panose="02020603020101020101" pitchFamily="18" charset="-127"/>
               <a:ea typeface="KoPub돋움체 Light" panose="02020603020101020101" pitchFamily="18" charset="-127"/>
             </a:endParaRPr>
@@ -6347,7 +6347,7 @@
           <p:cNvPr id="21" name="사각형: 둥근 모서리 20">
             <a:extLst>
               <a:ext uri="{FF2B5EF4-FFF2-40B4-BE49-F238E27FC236}">
-                <a16:creationId xmlns:a16="http://schemas.microsoft.com/office/drawing/2014/main" id="{56028231-3811-3F35-D5FE-538986CDCCE0}"/>
+                <a16:creationId xmlns:a16="http://schemas.microsoft.com/office/drawing/2014/main" id="{7C55D35B-2B09-F0D9-4FA6-6CFFDA2A6C70}"/>
               </a:ext>
             </a:extLst>
           </p:cNvPr>
@@ -6356,7 +6356,7 @@
         </p:nvSpPr>
         <p:spPr>
           <a:xfrm>
-            <a:off x="254362" y="1043683"/>
+            <a:off x="236105" y="1043683"/>
             <a:ext cx="1264364" cy="230832"/>
           </a:xfrm>
           <a:prstGeom prst="roundRect">
@@ -6390,7 +6390,7 @@
           <a:lstStyle/>
           <a:p>
             <a:pPr algn="ctr"/>
-            <a:endParaRPr lang="ko-KR" altLang="en-US">
+            <a:endParaRPr lang="ko-KR" altLang="en-US" sz="2400">
               <a:latin typeface="KoPub돋움체 Light" panose="02020603020101020101" pitchFamily="18" charset="-127"/>
               <a:ea typeface="KoPub돋움체 Light" panose="02020603020101020101" pitchFamily="18" charset="-127"/>
             </a:endParaRPr>
@@ -6402,7 +6402,7 @@
           <p:cNvPr id="3" name="TextBox 2">
             <a:extLst>
               <a:ext uri="{FF2B5EF4-FFF2-40B4-BE49-F238E27FC236}">
-                <a16:creationId xmlns:a16="http://schemas.microsoft.com/office/drawing/2014/main" id="{72516882-7A83-2109-222A-2C9CAC13DB32}"/>
+                <a16:creationId xmlns:a16="http://schemas.microsoft.com/office/drawing/2014/main" id="{E1E56CFB-7FC4-0325-C694-47231F1863BA}"/>
               </a:ext>
             </a:extLst>
           </p:cNvPr>
@@ -6411,7 +6411,7 @@
         </p:nvSpPr>
         <p:spPr>
           <a:xfrm>
-            <a:off x="61773" y="54245"/>
+            <a:off x="43517" y="54246"/>
             <a:ext cx="1180381" cy="169277"/>
           </a:xfrm>
           <a:prstGeom prst="rect">
@@ -6455,7 +6455,7 @@
           <p:cNvPr id="20" name="그룹 19">
             <a:extLst>
               <a:ext uri="{FF2B5EF4-FFF2-40B4-BE49-F238E27FC236}">
-                <a16:creationId xmlns:a16="http://schemas.microsoft.com/office/drawing/2014/main" id="{A21FB24F-C37C-1CA5-367E-CDB3ACE498D1}"/>
+                <a16:creationId xmlns:a16="http://schemas.microsoft.com/office/drawing/2014/main" id="{1D73487C-5786-EB5A-C91B-CFC67161A1AA}"/>
               </a:ext>
             </a:extLst>
           </p:cNvPr>
@@ -6464,7 +6464,7 @@
         </p:nvGrpSpPr>
         <p:grpSpPr>
           <a:xfrm>
-            <a:off x="711096" y="331471"/>
+            <a:off x="692840" y="331471"/>
             <a:ext cx="2337499" cy="520584"/>
             <a:chOff x="422852" y="312900"/>
             <a:chExt cx="2337499" cy="520584"/>
@@ -6475,7 +6475,7 @@
             <p:cNvPr id="4" name="TextBox 3">
               <a:extLst>
                 <a:ext uri="{FF2B5EF4-FFF2-40B4-BE49-F238E27FC236}">
-                  <a16:creationId xmlns:a16="http://schemas.microsoft.com/office/drawing/2014/main" id="{F17A2BD6-9A4A-BAFB-C2E2-AA66DAC18541}"/>
+                  <a16:creationId xmlns:a16="http://schemas.microsoft.com/office/drawing/2014/main" id="{9E8573DF-2F57-FB6A-5504-01B2431A3F44}"/>
                 </a:ext>
               </a:extLst>
             </p:cNvPr>
@@ -6552,7 +6552,7 @@
             <p:cNvPr id="6" name="TextBox 5">
               <a:extLst>
                 <a:ext uri="{FF2B5EF4-FFF2-40B4-BE49-F238E27FC236}">
-                  <a16:creationId xmlns:a16="http://schemas.microsoft.com/office/drawing/2014/main" id="{0DA9F484-A5CA-4454-A993-C8169B49B261}"/>
+                  <a16:creationId xmlns:a16="http://schemas.microsoft.com/office/drawing/2014/main" id="{D741F560-8C71-171C-0D18-3B1D993940A2}"/>
                 </a:ext>
               </a:extLst>
             </p:cNvPr>
@@ -6636,7 +6636,7 @@
           <p:cNvPr id="7" name="TextBox 6">
             <a:extLst>
               <a:ext uri="{FF2B5EF4-FFF2-40B4-BE49-F238E27FC236}">
-                <a16:creationId xmlns:a16="http://schemas.microsoft.com/office/drawing/2014/main" id="{936AAA6D-6149-096E-8933-68EB83B0383C}"/>
+                <a16:creationId xmlns:a16="http://schemas.microsoft.com/office/drawing/2014/main" id="{767A8F8D-E64C-4876-E55B-DCAD15914A25}"/>
               </a:ext>
             </a:extLst>
           </p:cNvPr>
@@ -6645,8 +6645,8 @@
         </p:nvSpPr>
         <p:spPr>
           <a:xfrm>
-            <a:off x="318921" y="1074461"/>
-            <a:ext cx="1135247" cy="200055"/>
+            <a:off x="163608" y="1041309"/>
+            <a:ext cx="1409361" cy="230832"/>
           </a:xfrm>
           <a:prstGeom prst="rect">
             <a:avLst/>
@@ -6661,7 +6661,7 @@
           <a:p>
             <a:pPr algn="ctr"/>
             <a:r>
-              <a:rPr lang="ko-KR" altLang="en-US" sz="700" b="1" dirty="0">
+              <a:rPr lang="ko-KR" altLang="en-US" sz="900" b="1" dirty="0">
                 <a:solidFill>
                   <a:schemeClr val="tx2">
                     <a:lumMod val="50000"/>
@@ -6673,7 +6673,7 @@
               <a:t>소통의 광장</a:t>
             </a:r>
             <a:r>
-              <a:rPr lang="en-US" altLang="ko-KR" sz="700" b="1" dirty="0">
+              <a:rPr lang="en-US" altLang="ko-KR" sz="900" b="1" dirty="0">
                 <a:solidFill>
                   <a:schemeClr val="tx2">
                     <a:lumMod val="50000"/>
@@ -6684,7 +6684,7 @@
               </a:rPr>
               <a:t> (Community)</a:t>
             </a:r>
-            <a:endParaRPr lang="en-US" altLang="ko-KR" sz="600" dirty="0">
+            <a:endParaRPr lang="en-US" altLang="ko-KR" sz="800" dirty="0">
               <a:solidFill>
                 <a:schemeClr val="tx2">
                   <a:lumMod val="50000"/>
@@ -6701,7 +6701,7 @@
           <p:cNvPr id="8" name="TextBox 7">
             <a:extLst>
               <a:ext uri="{FF2B5EF4-FFF2-40B4-BE49-F238E27FC236}">
-                <a16:creationId xmlns:a16="http://schemas.microsoft.com/office/drawing/2014/main" id="{01B1D8C6-CF36-3D32-8CA7-D11D262CFBDC}"/>
+                <a16:creationId xmlns:a16="http://schemas.microsoft.com/office/drawing/2014/main" id="{11C9F6E1-31C6-BEBF-822B-2BA47D930954}"/>
               </a:ext>
             </a:extLst>
           </p:cNvPr>
@@ -6710,8 +6710,8 @@
         </p:nvSpPr>
         <p:spPr>
           <a:xfrm>
-            <a:off x="1699886" y="1074461"/>
-            <a:ext cx="1098379" cy="200055"/>
+            <a:off x="1548581" y="1041309"/>
+            <a:ext cx="1364476" cy="230832"/>
           </a:xfrm>
           <a:prstGeom prst="rect">
             <a:avLst/>
@@ -6726,7 +6726,7 @@
           <a:p>
             <a:pPr algn="ctr"/>
             <a:r>
-              <a:rPr lang="ko-KR" altLang="en-US" sz="700" b="1" dirty="0">
+              <a:rPr lang="ko-KR" altLang="en-US" sz="900" b="1" dirty="0">
                 <a:solidFill>
                   <a:schemeClr val="tx2">
                     <a:lumMod val="50000"/>
@@ -6738,7 +6738,7 @@
               <a:t>업무의 기준  </a:t>
             </a:r>
             <a:r>
-              <a:rPr lang="en-US" altLang="ko-KR" sz="700" b="1" dirty="0">
+              <a:rPr lang="en-US" altLang="ko-KR" sz="900" b="1" dirty="0">
                 <a:solidFill>
                   <a:schemeClr val="tx2">
                     <a:lumMod val="50000"/>
@@ -6749,7 +6749,7 @@
               </a:rPr>
               <a:t>(Standards)</a:t>
             </a:r>
-            <a:endParaRPr lang="en-US" altLang="ko-KR" sz="600" dirty="0">
+            <a:endParaRPr lang="en-US" altLang="ko-KR" sz="800" dirty="0">
               <a:solidFill>
                 <a:schemeClr val="tx2">
                   <a:lumMod val="50000"/>
@@ -6766,7 +6766,7 @@
           <p:cNvPr id="9" name="TextBox 8">
             <a:extLst>
               <a:ext uri="{FF2B5EF4-FFF2-40B4-BE49-F238E27FC236}">
-                <a16:creationId xmlns:a16="http://schemas.microsoft.com/office/drawing/2014/main" id="{1C93515D-21FF-6AF1-2431-1C10E0AB11C0}"/>
+                <a16:creationId xmlns:a16="http://schemas.microsoft.com/office/drawing/2014/main" id="{32507177-51A5-2369-7AB2-839274A5B4AB}"/>
               </a:ext>
             </a:extLst>
           </p:cNvPr>
@@ -6775,8 +6775,8 @@
         </p:nvSpPr>
         <p:spPr>
           <a:xfrm>
-            <a:off x="353385" y="1338703"/>
-            <a:ext cx="1066319" cy="200055"/>
+            <a:off x="206889" y="1305551"/>
+            <a:ext cx="1322798" cy="230832"/>
           </a:xfrm>
           <a:prstGeom prst="rect">
             <a:avLst/>
@@ -6791,7 +6791,7 @@
           <a:p>
             <a:pPr algn="ctr"/>
             <a:r>
-              <a:rPr lang="ko-KR" altLang="en-US" sz="700" b="1" dirty="0">
+              <a:rPr lang="ko-KR" altLang="en-US" sz="900" b="1" dirty="0">
                 <a:solidFill>
                   <a:schemeClr val="tx2">
                     <a:lumMod val="50000"/>
@@ -6803,7 +6803,7 @@
               <a:t>배움의 창구 </a:t>
             </a:r>
             <a:r>
-              <a:rPr lang="en-US" altLang="ko-KR" sz="700" b="1" dirty="0">
+              <a:rPr lang="en-US" altLang="ko-KR" sz="900" b="1" dirty="0">
                 <a:solidFill>
                   <a:schemeClr val="tx2">
                     <a:lumMod val="50000"/>
@@ -6814,7 +6814,7 @@
               </a:rPr>
               <a:t>(Education)</a:t>
             </a:r>
-            <a:endParaRPr lang="ko-KR" altLang="en-US" sz="600" dirty="0">
+            <a:endParaRPr lang="ko-KR" altLang="en-US" sz="800" dirty="0">
               <a:solidFill>
                 <a:schemeClr val="tx2">
                   <a:lumMod val="50000"/>
@@ -6831,7 +6831,7 @@
           <p:cNvPr id="10" name="TextBox 9">
             <a:extLst>
               <a:ext uri="{FF2B5EF4-FFF2-40B4-BE49-F238E27FC236}">
-                <a16:creationId xmlns:a16="http://schemas.microsoft.com/office/drawing/2014/main" id="{D081FF80-CCB2-9F87-1173-1146E8101CA5}"/>
+                <a16:creationId xmlns:a16="http://schemas.microsoft.com/office/drawing/2014/main" id="{F8451539-1986-D75F-2387-04BE1C783179}"/>
               </a:ext>
             </a:extLst>
           </p:cNvPr>
@@ -6840,8 +6840,8 @@
         </p:nvSpPr>
         <p:spPr>
           <a:xfrm>
-            <a:off x="1686261" y="1338703"/>
-            <a:ext cx="1125629" cy="200055"/>
+            <a:off x="1530948" y="1305551"/>
+            <a:ext cx="1399743" cy="230832"/>
           </a:xfrm>
           <a:prstGeom prst="rect">
             <a:avLst/>
@@ -6856,7 +6856,7 @@
           <a:p>
             <a:pPr algn="ctr"/>
             <a:r>
-              <a:rPr lang="ko-KR" altLang="en-US" sz="700" b="1" dirty="0">
+              <a:rPr lang="ko-KR" altLang="en-US" sz="900" b="1" dirty="0">
                 <a:solidFill>
                   <a:schemeClr val="tx2">
                     <a:lumMod val="50000"/>
@@ -6868,7 +6868,7 @@
               <a:t>투명한 지표  </a:t>
             </a:r>
             <a:r>
-              <a:rPr lang="en-US" altLang="ko-KR" sz="700" b="1" dirty="0">
+              <a:rPr lang="en-US" altLang="ko-KR" sz="900" b="1" dirty="0">
                 <a:solidFill>
                   <a:schemeClr val="tx2">
                     <a:lumMod val="50000"/>
@@ -6879,7 +6879,7 @@
               </a:rPr>
               <a:t>(Dashboard)</a:t>
             </a:r>
-            <a:endParaRPr lang="ko-KR" altLang="en-US" sz="600" dirty="0">
+            <a:endParaRPr lang="ko-KR" altLang="en-US" sz="800" dirty="0">
               <a:solidFill>
                 <a:schemeClr val="tx2">
                   <a:lumMod val="50000"/>
@@ -6896,7 +6896,7 @@
           <p:cNvPr id="17" name="그룹 16">
             <a:extLst>
               <a:ext uri="{FF2B5EF4-FFF2-40B4-BE49-F238E27FC236}">
-                <a16:creationId xmlns:a16="http://schemas.microsoft.com/office/drawing/2014/main" id="{931C2EB9-1456-1495-30BE-7FAFBC60A188}"/>
+                <a16:creationId xmlns:a16="http://schemas.microsoft.com/office/drawing/2014/main" id="{BAD9D0B6-DA99-12BD-19AC-8A0F3913EF65}"/>
               </a:ext>
             </a:extLst>
           </p:cNvPr>
@@ -6905,7 +6905,7 @@
         </p:nvGrpSpPr>
         <p:grpSpPr>
           <a:xfrm>
-            <a:off x="191493" y="377028"/>
+            <a:off x="173236" y="377028"/>
             <a:ext cx="538336" cy="538336"/>
             <a:chOff x="777945" y="-736888"/>
             <a:chExt cx="663508" cy="663508"/>
@@ -6916,7 +6916,7 @@
             <p:cNvPr id="5" name="그림 4" descr="패턴, 사각형, 예술, 직사각형이(가) 표시된 사진&#10;&#10;AI 생성 콘텐츠는 정확하지 않을 수 있습니다.">
               <a:extLst>
                 <a:ext uri="{FF2B5EF4-FFF2-40B4-BE49-F238E27FC236}">
-                  <a16:creationId xmlns:a16="http://schemas.microsoft.com/office/drawing/2014/main" id="{3F30BB51-C87C-17DD-2C5A-C845EB631F89}"/>
+                  <a16:creationId xmlns:a16="http://schemas.microsoft.com/office/drawing/2014/main" id="{C69C4A2A-B5F9-F51F-5B3E-74194EB2592E}"/>
                 </a:ext>
               </a:extLst>
             </p:cNvPr>
@@ -6946,7 +6946,7 @@
             <p:cNvPr id="13" name="L 도형 12">
               <a:extLst>
                 <a:ext uri="{FF2B5EF4-FFF2-40B4-BE49-F238E27FC236}">
-                  <a16:creationId xmlns:a16="http://schemas.microsoft.com/office/drawing/2014/main" id="{7189DF3B-9A65-7151-A5C8-9D28FB5EB0A8}"/>
+                  <a16:creationId xmlns:a16="http://schemas.microsoft.com/office/drawing/2014/main" id="{0B77DCAE-298A-1DA8-72DA-A99175DE5912}"/>
                 </a:ext>
               </a:extLst>
             </p:cNvPr>
@@ -7003,7 +7003,7 @@
             <p:cNvPr id="14" name="L 도형 13">
               <a:extLst>
                 <a:ext uri="{FF2B5EF4-FFF2-40B4-BE49-F238E27FC236}">
-                  <a16:creationId xmlns:a16="http://schemas.microsoft.com/office/drawing/2014/main" id="{11E75E8E-2C7D-127D-F27F-B7B3BB3B43DF}"/>
+                  <a16:creationId xmlns:a16="http://schemas.microsoft.com/office/drawing/2014/main" id="{F702F43E-52A2-5D9A-996D-AE14DDC762D6}"/>
                 </a:ext>
               </a:extLst>
             </p:cNvPr>
@@ -7060,7 +7060,7 @@
             <p:cNvPr id="15" name="L 도형 14">
               <a:extLst>
                 <a:ext uri="{FF2B5EF4-FFF2-40B4-BE49-F238E27FC236}">
-                  <a16:creationId xmlns:a16="http://schemas.microsoft.com/office/drawing/2014/main" id="{41E74331-1670-754C-B815-B8A8F5ED8C99}"/>
+                  <a16:creationId xmlns:a16="http://schemas.microsoft.com/office/drawing/2014/main" id="{5BF2D746-AD19-B1DB-EAFE-7AF79EE40C17}"/>
                 </a:ext>
               </a:extLst>
             </p:cNvPr>
@@ -7117,7 +7117,7 @@
             <p:cNvPr id="16" name="L 도형 15">
               <a:extLst>
                 <a:ext uri="{FF2B5EF4-FFF2-40B4-BE49-F238E27FC236}">
-                  <a16:creationId xmlns:a16="http://schemas.microsoft.com/office/drawing/2014/main" id="{81723014-F1F9-C775-EF35-52E83DB32985}"/>
+                  <a16:creationId xmlns:a16="http://schemas.microsoft.com/office/drawing/2014/main" id="{F996CF45-7E9F-6E68-AD72-7F4A9AF6B006}"/>
                 </a:ext>
               </a:extLst>
             </p:cNvPr>
@@ -7173,7 +7173,7 @@
     </p:spTree>
     <p:extLst>
       <p:ext uri="{BB962C8B-B14F-4D97-AF65-F5344CB8AC3E}">
-        <p14:creationId xmlns:p14="http://schemas.microsoft.com/office/powerpoint/2010/main" val="2365050968"/>
+        <p14:creationId xmlns:p14="http://schemas.microsoft.com/office/powerpoint/2010/main" val="949192635"/>
       </p:ext>
     </p:extLst>
   </p:cSld>
@@ -7191,7 +7191,7 @@
         <p:cNvPr id="1" name="">
           <a:extLst>
             <a:ext uri="{FF2B5EF4-FFF2-40B4-BE49-F238E27FC236}">
-              <a16:creationId xmlns:a16="http://schemas.microsoft.com/office/drawing/2014/main" id="{02170B89-764F-BCD1-43D0-6DF11C73A596}"/>
+              <a16:creationId xmlns:a16="http://schemas.microsoft.com/office/drawing/2014/main" id="{D1A97B0E-F09D-9EBA-4E5C-8A2A3FD1CC68}"/>
             </a:ext>
           </a:extLst>
         </p:cNvPr>
@@ -7211,7 +7211,7 @@
           <p:cNvPr id="28" name="사각형: 둥근 모서리 27">
             <a:extLst>
               <a:ext uri="{FF2B5EF4-FFF2-40B4-BE49-F238E27FC236}">
-                <a16:creationId xmlns:a16="http://schemas.microsoft.com/office/drawing/2014/main" id="{401214A6-9BB8-0C0F-AB5D-EC737733EC13}"/>
+                <a16:creationId xmlns:a16="http://schemas.microsoft.com/office/drawing/2014/main" id="{02978711-0B63-6F08-76D1-C3B27BB8CED7}"/>
               </a:ext>
             </a:extLst>
           </p:cNvPr>
@@ -7220,7 +7220,7 @@
         </p:nvSpPr>
         <p:spPr>
           <a:xfrm>
-            <a:off x="1616893" y="1043683"/>
+            <a:off x="1598636" y="1043683"/>
             <a:ext cx="1264364" cy="230832"/>
           </a:xfrm>
           <a:prstGeom prst="roundRect">
@@ -7254,7 +7254,7 @@
           <a:lstStyle/>
           <a:p>
             <a:pPr algn="ctr"/>
-            <a:endParaRPr lang="ko-KR" altLang="en-US">
+            <a:endParaRPr lang="ko-KR" altLang="en-US" sz="2400">
               <a:latin typeface="KoPub돋움체 Light" panose="02020603020101020101" pitchFamily="18" charset="-127"/>
               <a:ea typeface="KoPub돋움체 Light" panose="02020603020101020101" pitchFamily="18" charset="-127"/>
             </a:endParaRPr>
@@ -7266,7 +7266,7 @@
           <p:cNvPr id="29" name="사각형: 둥근 모서리 28">
             <a:extLst>
               <a:ext uri="{FF2B5EF4-FFF2-40B4-BE49-F238E27FC236}">
-                <a16:creationId xmlns:a16="http://schemas.microsoft.com/office/drawing/2014/main" id="{93AC0708-AD87-E1DC-04CD-4B0C3B7DED72}"/>
+                <a16:creationId xmlns:a16="http://schemas.microsoft.com/office/drawing/2014/main" id="{2300ABF6-793D-ED6F-A46D-2DD3BD8332AB}"/>
               </a:ext>
             </a:extLst>
           </p:cNvPr>
@@ -7275,7 +7275,7 @@
         </p:nvSpPr>
         <p:spPr>
           <a:xfrm>
-            <a:off x="254362" y="1307925"/>
+            <a:off x="236105" y="1307925"/>
             <a:ext cx="1264364" cy="230832"/>
           </a:xfrm>
           <a:prstGeom prst="roundRect">
@@ -7309,7 +7309,7 @@
           <a:lstStyle/>
           <a:p>
             <a:pPr algn="ctr"/>
-            <a:endParaRPr lang="ko-KR" altLang="en-US">
+            <a:endParaRPr lang="ko-KR" altLang="en-US" sz="2400">
               <a:latin typeface="KoPub돋움체 Light" panose="02020603020101020101" pitchFamily="18" charset="-127"/>
               <a:ea typeface="KoPub돋움체 Light" panose="02020603020101020101" pitchFamily="18" charset="-127"/>
             </a:endParaRPr>
@@ -7321,7 +7321,7 @@
           <p:cNvPr id="30" name="사각형: 둥근 모서리 29">
             <a:extLst>
               <a:ext uri="{FF2B5EF4-FFF2-40B4-BE49-F238E27FC236}">
-                <a16:creationId xmlns:a16="http://schemas.microsoft.com/office/drawing/2014/main" id="{43900E6D-52F4-46EC-CB4E-9F27DDE63DA5}"/>
+                <a16:creationId xmlns:a16="http://schemas.microsoft.com/office/drawing/2014/main" id="{F830B040-61E1-9A16-5B1F-B301EE2E3824}"/>
               </a:ext>
             </a:extLst>
           </p:cNvPr>
@@ -7330,7 +7330,7 @@
         </p:nvSpPr>
         <p:spPr>
           <a:xfrm>
-            <a:off x="1616893" y="1307925"/>
+            <a:off x="1598636" y="1307925"/>
             <a:ext cx="1264364" cy="230832"/>
           </a:xfrm>
           <a:prstGeom prst="roundRect">
@@ -7364,7 +7364,7 @@
           <a:lstStyle/>
           <a:p>
             <a:pPr algn="ctr"/>
-            <a:endParaRPr lang="ko-KR" altLang="en-US">
+            <a:endParaRPr lang="ko-KR" altLang="en-US" sz="2400">
               <a:latin typeface="KoPub돋움체 Light" panose="02020603020101020101" pitchFamily="18" charset="-127"/>
               <a:ea typeface="KoPub돋움체 Light" panose="02020603020101020101" pitchFamily="18" charset="-127"/>
             </a:endParaRPr>
@@ -7376,7 +7376,7 @@
           <p:cNvPr id="21" name="사각형: 둥근 모서리 20">
             <a:extLst>
               <a:ext uri="{FF2B5EF4-FFF2-40B4-BE49-F238E27FC236}">
-                <a16:creationId xmlns:a16="http://schemas.microsoft.com/office/drawing/2014/main" id="{F2C13B05-ECB5-CB44-5EAA-F6533B98D5C0}"/>
+                <a16:creationId xmlns:a16="http://schemas.microsoft.com/office/drawing/2014/main" id="{D8AA1BA5-9E65-EE1B-31A3-CD58865CAAA8}"/>
               </a:ext>
             </a:extLst>
           </p:cNvPr>
@@ -7385,7 +7385,7 @@
         </p:nvSpPr>
         <p:spPr>
           <a:xfrm>
-            <a:off x="254362" y="1043683"/>
+            <a:off x="236105" y="1043683"/>
             <a:ext cx="1264364" cy="230832"/>
           </a:xfrm>
           <a:prstGeom prst="roundRect">
@@ -7419,7 +7419,7 @@
           <a:lstStyle/>
           <a:p>
             <a:pPr algn="ctr"/>
-            <a:endParaRPr lang="ko-KR" altLang="en-US">
+            <a:endParaRPr lang="ko-KR" altLang="en-US" sz="2400">
               <a:latin typeface="KoPub돋움체 Light" panose="02020603020101020101" pitchFamily="18" charset="-127"/>
               <a:ea typeface="KoPub돋움체 Light" panose="02020603020101020101" pitchFamily="18" charset="-127"/>
             </a:endParaRPr>
@@ -7431,7 +7431,7 @@
           <p:cNvPr id="3" name="TextBox 2">
             <a:extLst>
               <a:ext uri="{FF2B5EF4-FFF2-40B4-BE49-F238E27FC236}">
-                <a16:creationId xmlns:a16="http://schemas.microsoft.com/office/drawing/2014/main" id="{5A6F914F-318B-D5FF-A412-0BDE083D3187}"/>
+                <a16:creationId xmlns:a16="http://schemas.microsoft.com/office/drawing/2014/main" id="{866CB8A1-E676-96CE-8CDF-7D64F41A4B45}"/>
               </a:ext>
             </a:extLst>
           </p:cNvPr>
@@ -7440,7 +7440,7 @@
         </p:nvSpPr>
         <p:spPr>
           <a:xfrm>
-            <a:off x="61773" y="54245"/>
+            <a:off x="43517" y="54246"/>
             <a:ext cx="1180381" cy="169277"/>
           </a:xfrm>
           <a:prstGeom prst="rect">
@@ -7484,7 +7484,7 @@
           <p:cNvPr id="20" name="그룹 19">
             <a:extLst>
               <a:ext uri="{FF2B5EF4-FFF2-40B4-BE49-F238E27FC236}">
-                <a16:creationId xmlns:a16="http://schemas.microsoft.com/office/drawing/2014/main" id="{92BA2143-4698-3EDB-6EBD-3B3D1F60CD57}"/>
+                <a16:creationId xmlns:a16="http://schemas.microsoft.com/office/drawing/2014/main" id="{3A94D311-91A8-9806-BB3D-18A5164105AA}"/>
               </a:ext>
             </a:extLst>
           </p:cNvPr>
@@ -7493,7 +7493,7 @@
         </p:nvGrpSpPr>
         <p:grpSpPr>
           <a:xfrm>
-            <a:off x="711096" y="331471"/>
+            <a:off x="692840" y="331471"/>
             <a:ext cx="2337499" cy="520584"/>
             <a:chOff x="422852" y="312900"/>
             <a:chExt cx="2337499" cy="520584"/>
@@ -7504,7 +7504,7 @@
             <p:cNvPr id="4" name="TextBox 3">
               <a:extLst>
                 <a:ext uri="{FF2B5EF4-FFF2-40B4-BE49-F238E27FC236}">
-                  <a16:creationId xmlns:a16="http://schemas.microsoft.com/office/drawing/2014/main" id="{BC07C207-1C3C-E0EF-9C72-78C7D58677E2}"/>
+                  <a16:creationId xmlns:a16="http://schemas.microsoft.com/office/drawing/2014/main" id="{A9F21CF1-B5E4-F760-15EB-8B3B09B18594}"/>
                 </a:ext>
               </a:extLst>
             </p:cNvPr>
@@ -7581,7 +7581,7 @@
             <p:cNvPr id="6" name="TextBox 5">
               <a:extLst>
                 <a:ext uri="{FF2B5EF4-FFF2-40B4-BE49-F238E27FC236}">
-                  <a16:creationId xmlns:a16="http://schemas.microsoft.com/office/drawing/2014/main" id="{7B25AE6A-782A-8F7A-2E3B-8B9F647FBCE1}"/>
+                  <a16:creationId xmlns:a16="http://schemas.microsoft.com/office/drawing/2014/main" id="{7568F1DE-CF71-0724-1C36-0F54F127F211}"/>
                 </a:ext>
               </a:extLst>
             </p:cNvPr>
@@ -7665,7 +7665,7 @@
           <p:cNvPr id="7" name="TextBox 6">
             <a:extLst>
               <a:ext uri="{FF2B5EF4-FFF2-40B4-BE49-F238E27FC236}">
-                <a16:creationId xmlns:a16="http://schemas.microsoft.com/office/drawing/2014/main" id="{CF1A00A5-DCE0-0ED4-1167-21CAAD969665}"/>
+                <a16:creationId xmlns:a16="http://schemas.microsoft.com/office/drawing/2014/main" id="{320C932E-738E-226D-2236-9B9E5B9AABCC}"/>
               </a:ext>
             </a:extLst>
           </p:cNvPr>
@@ -7674,8 +7674,8 @@
         </p:nvSpPr>
         <p:spPr>
           <a:xfrm>
-            <a:off x="318921" y="1074461"/>
-            <a:ext cx="1135247" cy="200055"/>
+            <a:off x="163608" y="1041309"/>
+            <a:ext cx="1409361" cy="230832"/>
           </a:xfrm>
           <a:prstGeom prst="rect">
             <a:avLst/>
@@ -7690,7 +7690,7 @@
           <a:p>
             <a:pPr algn="ctr"/>
             <a:r>
-              <a:rPr lang="ko-KR" altLang="en-US" sz="700" b="1" dirty="0">
+              <a:rPr lang="ko-KR" altLang="en-US" sz="900" b="1" dirty="0">
                 <a:solidFill>
                   <a:schemeClr val="tx2">
                     <a:lumMod val="50000"/>
@@ -7702,7 +7702,7 @@
               <a:t>소통의 광장</a:t>
             </a:r>
             <a:r>
-              <a:rPr lang="en-US" altLang="ko-KR" sz="700" b="1" dirty="0">
+              <a:rPr lang="en-US" altLang="ko-KR" sz="900" b="1" dirty="0">
                 <a:solidFill>
                   <a:schemeClr val="tx2">
                     <a:lumMod val="50000"/>
@@ -7713,7 +7713,7 @@
               </a:rPr>
               <a:t> (Community)</a:t>
             </a:r>
-            <a:endParaRPr lang="en-US" altLang="ko-KR" sz="600" dirty="0">
+            <a:endParaRPr lang="en-US" altLang="ko-KR" sz="800" dirty="0">
               <a:solidFill>
                 <a:schemeClr val="tx2">
                   <a:lumMod val="50000"/>
@@ -7730,7 +7730,7 @@
           <p:cNvPr id="8" name="TextBox 7">
             <a:extLst>
               <a:ext uri="{FF2B5EF4-FFF2-40B4-BE49-F238E27FC236}">
-                <a16:creationId xmlns:a16="http://schemas.microsoft.com/office/drawing/2014/main" id="{EEDC12C6-2D75-FA26-E778-B111A217F464}"/>
+                <a16:creationId xmlns:a16="http://schemas.microsoft.com/office/drawing/2014/main" id="{64D595D3-D09E-F0D0-DC82-B4CC62DF8AE9}"/>
               </a:ext>
             </a:extLst>
           </p:cNvPr>
@@ -7739,8 +7739,8 @@
         </p:nvSpPr>
         <p:spPr>
           <a:xfrm>
-            <a:off x="1699886" y="1074461"/>
-            <a:ext cx="1098379" cy="200055"/>
+            <a:off x="1548581" y="1041309"/>
+            <a:ext cx="1364476" cy="230832"/>
           </a:xfrm>
           <a:prstGeom prst="rect">
             <a:avLst/>
@@ -7755,7 +7755,7 @@
           <a:p>
             <a:pPr algn="ctr"/>
             <a:r>
-              <a:rPr lang="ko-KR" altLang="en-US" sz="700" b="1" dirty="0">
+              <a:rPr lang="ko-KR" altLang="en-US" sz="900" b="1" dirty="0">
                 <a:solidFill>
                   <a:schemeClr val="tx2">
                     <a:lumMod val="50000"/>
@@ -7767,7 +7767,7 @@
               <a:t>업무의 기준  </a:t>
             </a:r>
             <a:r>
-              <a:rPr lang="en-US" altLang="ko-KR" sz="700" b="1" dirty="0">
+              <a:rPr lang="en-US" altLang="ko-KR" sz="900" b="1" dirty="0">
                 <a:solidFill>
                   <a:schemeClr val="tx2">
                     <a:lumMod val="50000"/>
@@ -7778,7 +7778,7 @@
               </a:rPr>
               <a:t>(Standards)</a:t>
             </a:r>
-            <a:endParaRPr lang="en-US" altLang="ko-KR" sz="600" dirty="0">
+            <a:endParaRPr lang="en-US" altLang="ko-KR" sz="800" dirty="0">
               <a:solidFill>
                 <a:schemeClr val="tx2">
                   <a:lumMod val="50000"/>
@@ -7795,7 +7795,7 @@
           <p:cNvPr id="9" name="TextBox 8">
             <a:extLst>
               <a:ext uri="{FF2B5EF4-FFF2-40B4-BE49-F238E27FC236}">
-                <a16:creationId xmlns:a16="http://schemas.microsoft.com/office/drawing/2014/main" id="{FD67DF17-D35E-7645-1522-BD4AF167D60B}"/>
+                <a16:creationId xmlns:a16="http://schemas.microsoft.com/office/drawing/2014/main" id="{173A6E1A-53F6-285B-8984-EC8B50750AFA}"/>
               </a:ext>
             </a:extLst>
           </p:cNvPr>
@@ -7804,8 +7804,8 @@
         </p:nvSpPr>
         <p:spPr>
           <a:xfrm>
-            <a:off x="353385" y="1338703"/>
-            <a:ext cx="1066319" cy="200055"/>
+            <a:off x="206889" y="1305551"/>
+            <a:ext cx="1322798" cy="230832"/>
           </a:xfrm>
           <a:prstGeom prst="rect">
             <a:avLst/>
@@ -7820,7 +7820,7 @@
           <a:p>
             <a:pPr algn="ctr"/>
             <a:r>
-              <a:rPr lang="ko-KR" altLang="en-US" sz="700" b="1" dirty="0">
+              <a:rPr lang="ko-KR" altLang="en-US" sz="900" b="1" dirty="0">
                 <a:solidFill>
                   <a:schemeClr val="tx2">
                     <a:lumMod val="50000"/>
@@ -7832,7 +7832,7 @@
               <a:t>배움의 창구 </a:t>
             </a:r>
             <a:r>
-              <a:rPr lang="en-US" altLang="ko-KR" sz="700" b="1" dirty="0">
+              <a:rPr lang="en-US" altLang="ko-KR" sz="900" b="1" dirty="0">
                 <a:solidFill>
                   <a:schemeClr val="tx2">
                     <a:lumMod val="50000"/>
@@ -7843,7 +7843,7 @@
               </a:rPr>
               <a:t>(Education)</a:t>
             </a:r>
-            <a:endParaRPr lang="ko-KR" altLang="en-US" sz="600" dirty="0">
+            <a:endParaRPr lang="ko-KR" altLang="en-US" sz="800" dirty="0">
               <a:solidFill>
                 <a:schemeClr val="tx2">
                   <a:lumMod val="50000"/>
@@ -7860,7 +7860,7 @@
           <p:cNvPr id="10" name="TextBox 9">
             <a:extLst>
               <a:ext uri="{FF2B5EF4-FFF2-40B4-BE49-F238E27FC236}">
-                <a16:creationId xmlns:a16="http://schemas.microsoft.com/office/drawing/2014/main" id="{6D1D6E9C-17CE-48CA-A7A4-9B75F48F48B5}"/>
+                <a16:creationId xmlns:a16="http://schemas.microsoft.com/office/drawing/2014/main" id="{0E1B8703-A0FA-4236-9ABC-7BE8C2843DDF}"/>
               </a:ext>
             </a:extLst>
           </p:cNvPr>
@@ -7869,8 +7869,8 @@
         </p:nvSpPr>
         <p:spPr>
           <a:xfrm>
-            <a:off x="1686261" y="1338703"/>
-            <a:ext cx="1125629" cy="200055"/>
+            <a:off x="1530948" y="1305551"/>
+            <a:ext cx="1399743" cy="230832"/>
           </a:xfrm>
           <a:prstGeom prst="rect">
             <a:avLst/>
@@ -7885,7 +7885,7 @@
           <a:p>
             <a:pPr algn="ctr"/>
             <a:r>
-              <a:rPr lang="ko-KR" altLang="en-US" sz="700" b="1" dirty="0">
+              <a:rPr lang="ko-KR" altLang="en-US" sz="900" b="1" dirty="0">
                 <a:solidFill>
                   <a:schemeClr val="tx2">
                     <a:lumMod val="50000"/>
@@ -7897,7 +7897,7 @@
               <a:t>투명한 지표  </a:t>
             </a:r>
             <a:r>
-              <a:rPr lang="en-US" altLang="ko-KR" sz="700" b="1" dirty="0">
+              <a:rPr lang="en-US" altLang="ko-KR" sz="900" b="1" dirty="0">
                 <a:solidFill>
                   <a:schemeClr val="tx2">
                     <a:lumMod val="50000"/>
@@ -7908,7 +7908,7 @@
               </a:rPr>
               <a:t>(Dashboard)</a:t>
             </a:r>
-            <a:endParaRPr lang="ko-KR" altLang="en-US" sz="600" dirty="0">
+            <a:endParaRPr lang="ko-KR" altLang="en-US" sz="800" dirty="0">
               <a:solidFill>
                 <a:schemeClr val="tx2">
                   <a:lumMod val="50000"/>
@@ -7925,7 +7925,7 @@
           <p:cNvPr id="17" name="그룹 16">
             <a:extLst>
               <a:ext uri="{FF2B5EF4-FFF2-40B4-BE49-F238E27FC236}">
-                <a16:creationId xmlns:a16="http://schemas.microsoft.com/office/drawing/2014/main" id="{DAB693D7-40C4-A6AA-807A-D5CB916C7056}"/>
+                <a16:creationId xmlns:a16="http://schemas.microsoft.com/office/drawing/2014/main" id="{DCB0B500-4142-7FA3-3C92-323388B42ECA}"/>
               </a:ext>
             </a:extLst>
           </p:cNvPr>
@@ -7934,7 +7934,7 @@
         </p:nvGrpSpPr>
         <p:grpSpPr>
           <a:xfrm>
-            <a:off x="191493" y="377028"/>
+            <a:off x="173236" y="377028"/>
             <a:ext cx="538336" cy="538336"/>
             <a:chOff x="777945" y="-736888"/>
             <a:chExt cx="663508" cy="663508"/>
@@ -7945,7 +7945,7 @@
             <p:cNvPr id="5" name="그림 4" descr="패턴, 사각형, 예술, 직사각형이(가) 표시된 사진&#10;&#10;AI 생성 콘텐츠는 정확하지 않을 수 있습니다.">
               <a:extLst>
                 <a:ext uri="{FF2B5EF4-FFF2-40B4-BE49-F238E27FC236}">
-                  <a16:creationId xmlns:a16="http://schemas.microsoft.com/office/drawing/2014/main" id="{B052D40A-DF36-A8B0-8604-F70E71ACA2E2}"/>
+                  <a16:creationId xmlns:a16="http://schemas.microsoft.com/office/drawing/2014/main" id="{0528E6C8-A59A-2BEA-1020-50AA14FF171D}"/>
                 </a:ext>
               </a:extLst>
             </p:cNvPr>
@@ -7975,7 +7975,7 @@
             <p:cNvPr id="13" name="L 도형 12">
               <a:extLst>
                 <a:ext uri="{FF2B5EF4-FFF2-40B4-BE49-F238E27FC236}">
-                  <a16:creationId xmlns:a16="http://schemas.microsoft.com/office/drawing/2014/main" id="{5331B5A2-62A7-417A-A748-EDFF4337BCE8}"/>
+                  <a16:creationId xmlns:a16="http://schemas.microsoft.com/office/drawing/2014/main" id="{418FD9C1-4647-E1F7-F113-42259DA23F31}"/>
                 </a:ext>
               </a:extLst>
             </p:cNvPr>
@@ -8032,7 +8032,7 @@
             <p:cNvPr id="14" name="L 도형 13">
               <a:extLst>
                 <a:ext uri="{FF2B5EF4-FFF2-40B4-BE49-F238E27FC236}">
-                  <a16:creationId xmlns:a16="http://schemas.microsoft.com/office/drawing/2014/main" id="{5864203E-8DEF-F77C-B8AA-47FC7D1CB041}"/>
+                  <a16:creationId xmlns:a16="http://schemas.microsoft.com/office/drawing/2014/main" id="{9220F428-BEE0-80B3-1BBA-6A5FDE235791}"/>
                 </a:ext>
               </a:extLst>
             </p:cNvPr>
@@ -8089,7 +8089,7 @@
             <p:cNvPr id="15" name="L 도형 14">
               <a:extLst>
                 <a:ext uri="{FF2B5EF4-FFF2-40B4-BE49-F238E27FC236}">
-                  <a16:creationId xmlns:a16="http://schemas.microsoft.com/office/drawing/2014/main" id="{798C0637-6607-A145-0EF5-2D2FDB2DC4CC}"/>
+                  <a16:creationId xmlns:a16="http://schemas.microsoft.com/office/drawing/2014/main" id="{DA8CFCB1-0B2E-38AA-A39A-FDEE013D9336}"/>
                 </a:ext>
               </a:extLst>
             </p:cNvPr>
@@ -8146,7 +8146,7 @@
             <p:cNvPr id="16" name="L 도형 15">
               <a:extLst>
                 <a:ext uri="{FF2B5EF4-FFF2-40B4-BE49-F238E27FC236}">
-                  <a16:creationId xmlns:a16="http://schemas.microsoft.com/office/drawing/2014/main" id="{B397053E-AEFD-A74E-5BE9-6A406865C35D}"/>
+                  <a16:creationId xmlns:a16="http://schemas.microsoft.com/office/drawing/2014/main" id="{7FB2DF92-F8CC-2F10-20A3-015CCB1C6973}"/>
                 </a:ext>
               </a:extLst>
             </p:cNvPr>
@@ -8202,7 +8202,7 @@
     </p:spTree>
     <p:extLst>
       <p:ext uri="{BB962C8B-B14F-4D97-AF65-F5344CB8AC3E}">
-        <p14:creationId xmlns:p14="http://schemas.microsoft.com/office/powerpoint/2010/main" val="2346887554"/>
+        <p14:creationId xmlns:p14="http://schemas.microsoft.com/office/powerpoint/2010/main" val="3035045437"/>
       </p:ext>
     </p:extLst>
   </p:cSld>
@@ -8220,7 +8220,7 @@
         <p:cNvPr id="1" name="">
           <a:extLst>
             <a:ext uri="{FF2B5EF4-FFF2-40B4-BE49-F238E27FC236}">
-              <a16:creationId xmlns:a16="http://schemas.microsoft.com/office/drawing/2014/main" id="{0C320923-E4AD-27DA-C03E-B1D9312AFB2F}"/>
+              <a16:creationId xmlns:a16="http://schemas.microsoft.com/office/drawing/2014/main" id="{BE3EABFA-89D1-F49C-FDBC-ED763734C028}"/>
             </a:ext>
           </a:extLst>
         </p:cNvPr>
@@ -8240,7 +8240,7 @@
           <p:cNvPr id="28" name="사각형: 둥근 모서리 27">
             <a:extLst>
               <a:ext uri="{FF2B5EF4-FFF2-40B4-BE49-F238E27FC236}">
-                <a16:creationId xmlns:a16="http://schemas.microsoft.com/office/drawing/2014/main" id="{948DC3F7-20C0-3931-BB8A-DCC75BDFE41E}"/>
+                <a16:creationId xmlns:a16="http://schemas.microsoft.com/office/drawing/2014/main" id="{1F106E9E-CF8C-17EC-E717-F78CA06360C9}"/>
               </a:ext>
             </a:extLst>
           </p:cNvPr>
@@ -8249,7 +8249,7 @@
         </p:nvSpPr>
         <p:spPr>
           <a:xfrm>
-            <a:off x="1616893" y="1043683"/>
+            <a:off x="1598636" y="1043683"/>
             <a:ext cx="1264364" cy="230832"/>
           </a:xfrm>
           <a:prstGeom prst="roundRect">
@@ -8283,7 +8283,7 @@
           <a:lstStyle/>
           <a:p>
             <a:pPr algn="ctr"/>
-            <a:endParaRPr lang="ko-KR" altLang="en-US">
+            <a:endParaRPr lang="ko-KR" altLang="en-US" sz="2400">
               <a:latin typeface="KoPub돋움체 Light" panose="02020603020101020101" pitchFamily="18" charset="-127"/>
               <a:ea typeface="KoPub돋움체 Light" panose="02020603020101020101" pitchFamily="18" charset="-127"/>
             </a:endParaRPr>
@@ -8295,7 +8295,7 @@
           <p:cNvPr id="29" name="사각형: 둥근 모서리 28">
             <a:extLst>
               <a:ext uri="{FF2B5EF4-FFF2-40B4-BE49-F238E27FC236}">
-                <a16:creationId xmlns:a16="http://schemas.microsoft.com/office/drawing/2014/main" id="{069C152F-7073-1675-1A49-0B4139F52241}"/>
+                <a16:creationId xmlns:a16="http://schemas.microsoft.com/office/drawing/2014/main" id="{58CFD439-A0AF-7A76-9198-506D59B2106C}"/>
               </a:ext>
             </a:extLst>
           </p:cNvPr>
@@ -8304,7 +8304,7 @@
         </p:nvSpPr>
         <p:spPr>
           <a:xfrm>
-            <a:off x="254362" y="1307925"/>
+            <a:off x="236105" y="1307925"/>
             <a:ext cx="1264364" cy="230832"/>
           </a:xfrm>
           <a:prstGeom prst="roundRect">
@@ -8338,7 +8338,7 @@
           <a:lstStyle/>
           <a:p>
             <a:pPr algn="ctr"/>
-            <a:endParaRPr lang="ko-KR" altLang="en-US">
+            <a:endParaRPr lang="ko-KR" altLang="en-US" sz="2400">
               <a:latin typeface="KoPub돋움체 Light" panose="02020603020101020101" pitchFamily="18" charset="-127"/>
               <a:ea typeface="KoPub돋움체 Light" panose="02020603020101020101" pitchFamily="18" charset="-127"/>
             </a:endParaRPr>
@@ -8350,7 +8350,7 @@
           <p:cNvPr id="30" name="사각형: 둥근 모서리 29">
             <a:extLst>
               <a:ext uri="{FF2B5EF4-FFF2-40B4-BE49-F238E27FC236}">
-                <a16:creationId xmlns:a16="http://schemas.microsoft.com/office/drawing/2014/main" id="{90C03280-8C5A-DC47-BB61-5570005CCAF5}"/>
+                <a16:creationId xmlns:a16="http://schemas.microsoft.com/office/drawing/2014/main" id="{1AFCA293-C6A1-E8D9-FC8C-9BB0317CC6AF}"/>
               </a:ext>
             </a:extLst>
           </p:cNvPr>
@@ -8359,7 +8359,7 @@
         </p:nvSpPr>
         <p:spPr>
           <a:xfrm>
-            <a:off x="1616893" y="1307925"/>
+            <a:off x="1598636" y="1307925"/>
             <a:ext cx="1264364" cy="230832"/>
           </a:xfrm>
           <a:prstGeom prst="roundRect">
@@ -8393,7 +8393,7 @@
           <a:lstStyle/>
           <a:p>
             <a:pPr algn="ctr"/>
-            <a:endParaRPr lang="ko-KR" altLang="en-US">
+            <a:endParaRPr lang="ko-KR" altLang="en-US" sz="2400">
               <a:latin typeface="KoPub돋움체 Light" panose="02020603020101020101" pitchFamily="18" charset="-127"/>
               <a:ea typeface="KoPub돋움체 Light" panose="02020603020101020101" pitchFamily="18" charset="-127"/>
             </a:endParaRPr>
@@ -8405,7 +8405,7 @@
           <p:cNvPr id="21" name="사각형: 둥근 모서리 20">
             <a:extLst>
               <a:ext uri="{FF2B5EF4-FFF2-40B4-BE49-F238E27FC236}">
-                <a16:creationId xmlns:a16="http://schemas.microsoft.com/office/drawing/2014/main" id="{A8A7CE5E-5AEC-5D78-C801-67032C305C63}"/>
+                <a16:creationId xmlns:a16="http://schemas.microsoft.com/office/drawing/2014/main" id="{0409F8CB-5924-349A-24EF-B76653FC25BC}"/>
               </a:ext>
             </a:extLst>
           </p:cNvPr>
@@ -8414,7 +8414,7 @@
         </p:nvSpPr>
         <p:spPr>
           <a:xfrm>
-            <a:off x="254362" y="1043683"/>
+            <a:off x="236105" y="1043683"/>
             <a:ext cx="1264364" cy="230832"/>
           </a:xfrm>
           <a:prstGeom prst="roundRect">
@@ -8448,7 +8448,7 @@
           <a:lstStyle/>
           <a:p>
             <a:pPr algn="ctr"/>
-            <a:endParaRPr lang="ko-KR" altLang="en-US">
+            <a:endParaRPr lang="ko-KR" altLang="en-US" sz="2400">
               <a:latin typeface="KoPub돋움체 Light" panose="02020603020101020101" pitchFamily="18" charset="-127"/>
               <a:ea typeface="KoPub돋움체 Light" panose="02020603020101020101" pitchFamily="18" charset="-127"/>
             </a:endParaRPr>
@@ -8460,7 +8460,7 @@
           <p:cNvPr id="3" name="TextBox 2">
             <a:extLst>
               <a:ext uri="{FF2B5EF4-FFF2-40B4-BE49-F238E27FC236}">
-                <a16:creationId xmlns:a16="http://schemas.microsoft.com/office/drawing/2014/main" id="{C9BF64DE-73B9-8C37-BA67-036A15DBDFF7}"/>
+                <a16:creationId xmlns:a16="http://schemas.microsoft.com/office/drawing/2014/main" id="{8AD3B992-48B4-F39B-12E0-18A8B9663DFF}"/>
               </a:ext>
             </a:extLst>
           </p:cNvPr>
@@ -8469,7 +8469,7 @@
         </p:nvSpPr>
         <p:spPr>
           <a:xfrm>
-            <a:off x="61773" y="54245"/>
+            <a:off x="43517" y="54246"/>
             <a:ext cx="1180381" cy="169277"/>
           </a:xfrm>
           <a:prstGeom prst="rect">
@@ -8513,7 +8513,7 @@
           <p:cNvPr id="20" name="그룹 19">
             <a:extLst>
               <a:ext uri="{FF2B5EF4-FFF2-40B4-BE49-F238E27FC236}">
-                <a16:creationId xmlns:a16="http://schemas.microsoft.com/office/drawing/2014/main" id="{E84EEC1E-C8DC-5CBF-85B0-A7B3F70F517E}"/>
+                <a16:creationId xmlns:a16="http://schemas.microsoft.com/office/drawing/2014/main" id="{C6A298F1-07CA-FA71-45BD-583AE88A8C72}"/>
               </a:ext>
             </a:extLst>
           </p:cNvPr>
@@ -8522,7 +8522,7 @@
         </p:nvGrpSpPr>
         <p:grpSpPr>
           <a:xfrm>
-            <a:off x="711096" y="331471"/>
+            <a:off x="692840" y="331471"/>
             <a:ext cx="2337499" cy="520584"/>
             <a:chOff x="422852" y="312900"/>
             <a:chExt cx="2337499" cy="520584"/>
@@ -8533,7 +8533,7 @@
             <p:cNvPr id="4" name="TextBox 3">
               <a:extLst>
                 <a:ext uri="{FF2B5EF4-FFF2-40B4-BE49-F238E27FC236}">
-                  <a16:creationId xmlns:a16="http://schemas.microsoft.com/office/drawing/2014/main" id="{F0C30B3D-39DF-0B57-A84A-8DC65B3CD4E3}"/>
+                  <a16:creationId xmlns:a16="http://schemas.microsoft.com/office/drawing/2014/main" id="{8653F9BC-4CAC-32F0-320F-EF8D2DB62F49}"/>
                 </a:ext>
               </a:extLst>
             </p:cNvPr>
@@ -8610,7 +8610,7 @@
             <p:cNvPr id="6" name="TextBox 5">
               <a:extLst>
                 <a:ext uri="{FF2B5EF4-FFF2-40B4-BE49-F238E27FC236}">
-                  <a16:creationId xmlns:a16="http://schemas.microsoft.com/office/drawing/2014/main" id="{4A65659A-C3E3-1CF2-86F7-466D74B57D58}"/>
+                  <a16:creationId xmlns:a16="http://schemas.microsoft.com/office/drawing/2014/main" id="{A5DE4D22-A46D-F359-B635-BEB69BDDA779}"/>
                 </a:ext>
               </a:extLst>
             </p:cNvPr>
@@ -8694,7 +8694,7 @@
           <p:cNvPr id="7" name="TextBox 6">
             <a:extLst>
               <a:ext uri="{FF2B5EF4-FFF2-40B4-BE49-F238E27FC236}">
-                <a16:creationId xmlns:a16="http://schemas.microsoft.com/office/drawing/2014/main" id="{5A2BE2B1-F3F7-167C-E234-A8E18783C89A}"/>
+                <a16:creationId xmlns:a16="http://schemas.microsoft.com/office/drawing/2014/main" id="{1870A3F3-F16E-83CC-5E59-71AB1AB09CD8}"/>
               </a:ext>
             </a:extLst>
           </p:cNvPr>
@@ -8703,8 +8703,8 @@
         </p:nvSpPr>
         <p:spPr>
           <a:xfrm>
-            <a:off x="318921" y="1074461"/>
-            <a:ext cx="1135247" cy="200055"/>
+            <a:off x="163608" y="1041309"/>
+            <a:ext cx="1409361" cy="230832"/>
           </a:xfrm>
           <a:prstGeom prst="rect">
             <a:avLst/>
@@ -8719,7 +8719,7 @@
           <a:p>
             <a:pPr algn="ctr"/>
             <a:r>
-              <a:rPr lang="ko-KR" altLang="en-US" sz="700" b="1" dirty="0">
+              <a:rPr lang="ko-KR" altLang="en-US" sz="900" b="1" dirty="0">
                 <a:solidFill>
                   <a:schemeClr val="tx2">
                     <a:lumMod val="50000"/>
@@ -8731,7 +8731,7 @@
               <a:t>소통의 광장</a:t>
             </a:r>
             <a:r>
-              <a:rPr lang="en-US" altLang="ko-KR" sz="700" b="1" dirty="0">
+              <a:rPr lang="en-US" altLang="ko-KR" sz="900" b="1" dirty="0">
                 <a:solidFill>
                   <a:schemeClr val="tx2">
                     <a:lumMod val="50000"/>
@@ -8742,7 +8742,7 @@
               </a:rPr>
               <a:t> (Community)</a:t>
             </a:r>
-            <a:endParaRPr lang="en-US" altLang="ko-KR" sz="600" dirty="0">
+            <a:endParaRPr lang="en-US" altLang="ko-KR" sz="800" dirty="0">
               <a:solidFill>
                 <a:schemeClr val="tx2">
                   <a:lumMod val="50000"/>
@@ -8759,7 +8759,7 @@
           <p:cNvPr id="8" name="TextBox 7">
             <a:extLst>
               <a:ext uri="{FF2B5EF4-FFF2-40B4-BE49-F238E27FC236}">
-                <a16:creationId xmlns:a16="http://schemas.microsoft.com/office/drawing/2014/main" id="{A480A01C-2854-06E0-C6E7-4E156EC154F7}"/>
+                <a16:creationId xmlns:a16="http://schemas.microsoft.com/office/drawing/2014/main" id="{F7E630A3-6FB2-BE7A-C5D9-F3498EACFF09}"/>
               </a:ext>
             </a:extLst>
           </p:cNvPr>
@@ -8768,8 +8768,8 @@
         </p:nvSpPr>
         <p:spPr>
           <a:xfrm>
-            <a:off x="1699886" y="1074461"/>
-            <a:ext cx="1098379" cy="200055"/>
+            <a:off x="1548581" y="1041309"/>
+            <a:ext cx="1364476" cy="230832"/>
           </a:xfrm>
           <a:prstGeom prst="rect">
             <a:avLst/>
@@ -8784,7 +8784,7 @@
           <a:p>
             <a:pPr algn="ctr"/>
             <a:r>
-              <a:rPr lang="ko-KR" altLang="en-US" sz="700" b="1" dirty="0">
+              <a:rPr lang="ko-KR" altLang="en-US" sz="900" b="1" dirty="0">
                 <a:solidFill>
                   <a:schemeClr val="tx2">
                     <a:lumMod val="50000"/>
@@ -8796,7 +8796,7 @@
               <a:t>업무의 기준  </a:t>
             </a:r>
             <a:r>
-              <a:rPr lang="en-US" altLang="ko-KR" sz="700" b="1" dirty="0">
+              <a:rPr lang="en-US" altLang="ko-KR" sz="900" b="1" dirty="0">
                 <a:solidFill>
                   <a:schemeClr val="tx2">
                     <a:lumMod val="50000"/>
@@ -8807,7 +8807,7 @@
               </a:rPr>
               <a:t>(Standards)</a:t>
             </a:r>
-            <a:endParaRPr lang="en-US" altLang="ko-KR" sz="600" dirty="0">
+            <a:endParaRPr lang="en-US" altLang="ko-KR" sz="800" dirty="0">
               <a:solidFill>
                 <a:schemeClr val="tx2">
                   <a:lumMod val="50000"/>
@@ -8824,7 +8824,7 @@
           <p:cNvPr id="9" name="TextBox 8">
             <a:extLst>
               <a:ext uri="{FF2B5EF4-FFF2-40B4-BE49-F238E27FC236}">
-                <a16:creationId xmlns:a16="http://schemas.microsoft.com/office/drawing/2014/main" id="{764A2EA1-A3D5-E3C6-3921-43D59181B97B}"/>
+                <a16:creationId xmlns:a16="http://schemas.microsoft.com/office/drawing/2014/main" id="{10BCCA17-84E1-2203-A1BA-C17EDF70A644}"/>
               </a:ext>
             </a:extLst>
           </p:cNvPr>
@@ -8833,8 +8833,8 @@
         </p:nvSpPr>
         <p:spPr>
           <a:xfrm>
-            <a:off x="353385" y="1338703"/>
-            <a:ext cx="1066319" cy="200055"/>
+            <a:off x="206889" y="1305551"/>
+            <a:ext cx="1322798" cy="230832"/>
           </a:xfrm>
           <a:prstGeom prst="rect">
             <a:avLst/>
@@ -8849,7 +8849,7 @@
           <a:p>
             <a:pPr algn="ctr"/>
             <a:r>
-              <a:rPr lang="ko-KR" altLang="en-US" sz="700" b="1" dirty="0">
+              <a:rPr lang="ko-KR" altLang="en-US" sz="900" b="1" dirty="0">
                 <a:solidFill>
                   <a:schemeClr val="tx2">
                     <a:lumMod val="50000"/>
@@ -8861,7 +8861,7 @@
               <a:t>배움의 창구 </a:t>
             </a:r>
             <a:r>
-              <a:rPr lang="en-US" altLang="ko-KR" sz="700" b="1" dirty="0">
+              <a:rPr lang="en-US" altLang="ko-KR" sz="900" b="1" dirty="0">
                 <a:solidFill>
                   <a:schemeClr val="tx2">
                     <a:lumMod val="50000"/>
@@ -8872,7 +8872,7 @@
               </a:rPr>
               <a:t>(Education)</a:t>
             </a:r>
-            <a:endParaRPr lang="ko-KR" altLang="en-US" sz="600" dirty="0">
+            <a:endParaRPr lang="ko-KR" altLang="en-US" sz="800" dirty="0">
               <a:solidFill>
                 <a:schemeClr val="tx2">
                   <a:lumMod val="50000"/>
@@ -8889,7 +8889,7 @@
           <p:cNvPr id="10" name="TextBox 9">
             <a:extLst>
               <a:ext uri="{FF2B5EF4-FFF2-40B4-BE49-F238E27FC236}">
-                <a16:creationId xmlns:a16="http://schemas.microsoft.com/office/drawing/2014/main" id="{68F6429B-3469-9F23-6AB2-AAC9D76C11FD}"/>
+                <a16:creationId xmlns:a16="http://schemas.microsoft.com/office/drawing/2014/main" id="{1DFEE1B1-57ED-D354-1F6F-A313667B4A50}"/>
               </a:ext>
             </a:extLst>
           </p:cNvPr>
@@ -8898,8 +8898,8 @@
         </p:nvSpPr>
         <p:spPr>
           <a:xfrm>
-            <a:off x="1686261" y="1338703"/>
-            <a:ext cx="1125629" cy="200055"/>
+            <a:off x="1530948" y="1305551"/>
+            <a:ext cx="1399743" cy="230832"/>
           </a:xfrm>
           <a:prstGeom prst="rect">
             <a:avLst/>
@@ -8914,7 +8914,7 @@
           <a:p>
             <a:pPr algn="ctr"/>
             <a:r>
-              <a:rPr lang="ko-KR" altLang="en-US" sz="700" b="1" dirty="0">
+              <a:rPr lang="ko-KR" altLang="en-US" sz="900" b="1" dirty="0">
                 <a:solidFill>
                   <a:schemeClr val="tx2">
                     <a:lumMod val="50000"/>
@@ -8926,7 +8926,7 @@
               <a:t>투명한 지표  </a:t>
             </a:r>
             <a:r>
-              <a:rPr lang="en-US" altLang="ko-KR" sz="700" b="1" dirty="0">
+              <a:rPr lang="en-US" altLang="ko-KR" sz="900" b="1" dirty="0">
                 <a:solidFill>
                   <a:schemeClr val="tx2">
                     <a:lumMod val="50000"/>
@@ -8937,7 +8937,7 @@
               </a:rPr>
               <a:t>(Dashboard)</a:t>
             </a:r>
-            <a:endParaRPr lang="ko-KR" altLang="en-US" sz="600" dirty="0">
+            <a:endParaRPr lang="ko-KR" altLang="en-US" sz="800" dirty="0">
               <a:solidFill>
                 <a:schemeClr val="tx2">
                   <a:lumMod val="50000"/>
@@ -8954,7 +8954,7 @@
           <p:cNvPr id="17" name="그룹 16">
             <a:extLst>
               <a:ext uri="{FF2B5EF4-FFF2-40B4-BE49-F238E27FC236}">
-                <a16:creationId xmlns:a16="http://schemas.microsoft.com/office/drawing/2014/main" id="{F5A9CD0B-ECEC-A6C8-E8E8-6E38C71C2868}"/>
+                <a16:creationId xmlns:a16="http://schemas.microsoft.com/office/drawing/2014/main" id="{3058DB84-8B15-C7F0-3BE3-861DC0FBCA5B}"/>
               </a:ext>
             </a:extLst>
           </p:cNvPr>
@@ -8963,7 +8963,7 @@
         </p:nvGrpSpPr>
         <p:grpSpPr>
           <a:xfrm>
-            <a:off x="191493" y="377028"/>
+            <a:off x="173236" y="377028"/>
             <a:ext cx="538336" cy="538336"/>
             <a:chOff x="777945" y="-736888"/>
             <a:chExt cx="663508" cy="663508"/>
@@ -8974,7 +8974,7 @@
             <p:cNvPr id="5" name="그림 4" descr="패턴, 사각형, 예술, 직사각형이(가) 표시된 사진&#10;&#10;AI 생성 콘텐츠는 정확하지 않을 수 있습니다.">
               <a:extLst>
                 <a:ext uri="{FF2B5EF4-FFF2-40B4-BE49-F238E27FC236}">
-                  <a16:creationId xmlns:a16="http://schemas.microsoft.com/office/drawing/2014/main" id="{0DE6BF57-728E-2AFE-BB72-95C0CDA2823B}"/>
+                  <a16:creationId xmlns:a16="http://schemas.microsoft.com/office/drawing/2014/main" id="{7279740F-C713-181A-194A-981C0CDFA5BA}"/>
                 </a:ext>
               </a:extLst>
             </p:cNvPr>
@@ -9004,7 +9004,7 @@
             <p:cNvPr id="13" name="L 도형 12">
               <a:extLst>
                 <a:ext uri="{FF2B5EF4-FFF2-40B4-BE49-F238E27FC236}">
-                  <a16:creationId xmlns:a16="http://schemas.microsoft.com/office/drawing/2014/main" id="{CA1A6A7E-5607-692B-8523-0D97B033178B}"/>
+                  <a16:creationId xmlns:a16="http://schemas.microsoft.com/office/drawing/2014/main" id="{1657A78E-9A49-31CC-9A1C-664B434E3947}"/>
                 </a:ext>
               </a:extLst>
             </p:cNvPr>
@@ -9061,7 +9061,7 @@
             <p:cNvPr id="14" name="L 도형 13">
               <a:extLst>
                 <a:ext uri="{FF2B5EF4-FFF2-40B4-BE49-F238E27FC236}">
-                  <a16:creationId xmlns:a16="http://schemas.microsoft.com/office/drawing/2014/main" id="{831A46D6-4348-2148-3CC1-10E068459E7E}"/>
+                  <a16:creationId xmlns:a16="http://schemas.microsoft.com/office/drawing/2014/main" id="{D33AB8F5-F938-BE19-9C16-4AB2728F9776}"/>
                 </a:ext>
               </a:extLst>
             </p:cNvPr>
@@ -9118,7 +9118,7 @@
             <p:cNvPr id="15" name="L 도형 14">
               <a:extLst>
                 <a:ext uri="{FF2B5EF4-FFF2-40B4-BE49-F238E27FC236}">
-                  <a16:creationId xmlns:a16="http://schemas.microsoft.com/office/drawing/2014/main" id="{0969244F-F262-FB6B-07A2-D54C7C9F0C45}"/>
+                  <a16:creationId xmlns:a16="http://schemas.microsoft.com/office/drawing/2014/main" id="{AB7EFB1C-2BB3-021A-61C1-9B51360C01A2}"/>
                 </a:ext>
               </a:extLst>
             </p:cNvPr>
@@ -9175,7 +9175,7 @@
             <p:cNvPr id="16" name="L 도형 15">
               <a:extLst>
                 <a:ext uri="{FF2B5EF4-FFF2-40B4-BE49-F238E27FC236}">
-                  <a16:creationId xmlns:a16="http://schemas.microsoft.com/office/drawing/2014/main" id="{564D8ADC-619C-F050-2890-ADAB38FADED0}"/>
+                  <a16:creationId xmlns:a16="http://schemas.microsoft.com/office/drawing/2014/main" id="{456130F0-48F9-4414-DD2F-BDAD1F6FF808}"/>
                 </a:ext>
               </a:extLst>
             </p:cNvPr>
@@ -9231,7 +9231,7 @@
     </p:spTree>
     <p:extLst>
       <p:ext uri="{BB962C8B-B14F-4D97-AF65-F5344CB8AC3E}">
-        <p14:creationId xmlns:p14="http://schemas.microsoft.com/office/powerpoint/2010/main" val="2213346439"/>
+        <p14:creationId xmlns:p14="http://schemas.microsoft.com/office/powerpoint/2010/main" val="1485855118"/>
       </p:ext>
     </p:extLst>
   </p:cSld>
@@ -9249,7 +9249,7 @@
         <p:cNvPr id="1" name="">
           <a:extLst>
             <a:ext uri="{FF2B5EF4-FFF2-40B4-BE49-F238E27FC236}">
-              <a16:creationId xmlns:a16="http://schemas.microsoft.com/office/drawing/2014/main" id="{5C5E2B06-A246-B537-C956-1F0E67DAE787}"/>
+              <a16:creationId xmlns:a16="http://schemas.microsoft.com/office/drawing/2014/main" id="{4A45EECB-D19F-3B2B-B08A-864D0278F18D}"/>
             </a:ext>
           </a:extLst>
         </p:cNvPr>
@@ -9269,7 +9269,7 @@
           <p:cNvPr id="28" name="사각형: 둥근 모서리 27">
             <a:extLst>
               <a:ext uri="{FF2B5EF4-FFF2-40B4-BE49-F238E27FC236}">
-                <a16:creationId xmlns:a16="http://schemas.microsoft.com/office/drawing/2014/main" id="{034DE5FB-5EC1-0A73-54A9-91169C0D75D7}"/>
+                <a16:creationId xmlns:a16="http://schemas.microsoft.com/office/drawing/2014/main" id="{071431D5-5E25-7627-419B-0AD186404C59}"/>
               </a:ext>
             </a:extLst>
           </p:cNvPr>
@@ -9278,7 +9278,7 @@
         </p:nvSpPr>
         <p:spPr>
           <a:xfrm>
-            <a:off x="1616893" y="1043683"/>
+            <a:off x="1598636" y="1043683"/>
             <a:ext cx="1264364" cy="230832"/>
           </a:xfrm>
           <a:prstGeom prst="roundRect">
@@ -9312,7 +9312,7 @@
           <a:lstStyle/>
           <a:p>
             <a:pPr algn="ctr"/>
-            <a:endParaRPr lang="ko-KR" altLang="en-US">
+            <a:endParaRPr lang="ko-KR" altLang="en-US" sz="2400">
               <a:latin typeface="KoPub돋움체 Light" panose="02020603020101020101" pitchFamily="18" charset="-127"/>
               <a:ea typeface="KoPub돋움체 Light" panose="02020603020101020101" pitchFamily="18" charset="-127"/>
             </a:endParaRPr>
@@ -9324,7 +9324,7 @@
           <p:cNvPr id="29" name="사각형: 둥근 모서리 28">
             <a:extLst>
               <a:ext uri="{FF2B5EF4-FFF2-40B4-BE49-F238E27FC236}">
-                <a16:creationId xmlns:a16="http://schemas.microsoft.com/office/drawing/2014/main" id="{CBCCFBF8-20E2-A3B3-7129-CDB6E3F02B10}"/>
+                <a16:creationId xmlns:a16="http://schemas.microsoft.com/office/drawing/2014/main" id="{64CF6182-47FD-F9C3-AD01-EE6B6030D748}"/>
               </a:ext>
             </a:extLst>
           </p:cNvPr>
@@ -9333,7 +9333,7 @@
         </p:nvSpPr>
         <p:spPr>
           <a:xfrm>
-            <a:off x="254362" y="1307925"/>
+            <a:off x="236105" y="1307925"/>
             <a:ext cx="1264364" cy="230832"/>
           </a:xfrm>
           <a:prstGeom prst="roundRect">
@@ -9367,7 +9367,7 @@
           <a:lstStyle/>
           <a:p>
             <a:pPr algn="ctr"/>
-            <a:endParaRPr lang="ko-KR" altLang="en-US">
+            <a:endParaRPr lang="ko-KR" altLang="en-US" sz="2400">
               <a:latin typeface="KoPub돋움체 Light" panose="02020603020101020101" pitchFamily="18" charset="-127"/>
               <a:ea typeface="KoPub돋움체 Light" panose="02020603020101020101" pitchFamily="18" charset="-127"/>
             </a:endParaRPr>
@@ -9379,7 +9379,7 @@
           <p:cNvPr id="30" name="사각형: 둥근 모서리 29">
             <a:extLst>
               <a:ext uri="{FF2B5EF4-FFF2-40B4-BE49-F238E27FC236}">
-                <a16:creationId xmlns:a16="http://schemas.microsoft.com/office/drawing/2014/main" id="{E199B6D7-9351-578A-5A3A-71400143066B}"/>
+                <a16:creationId xmlns:a16="http://schemas.microsoft.com/office/drawing/2014/main" id="{6E1EB857-FA0B-4F06-DE3D-34BE8644BF74}"/>
               </a:ext>
             </a:extLst>
           </p:cNvPr>
@@ -9388,7 +9388,7 @@
         </p:nvSpPr>
         <p:spPr>
           <a:xfrm>
-            <a:off x="1616893" y="1307925"/>
+            <a:off x="1598636" y="1307925"/>
             <a:ext cx="1264364" cy="230832"/>
           </a:xfrm>
           <a:prstGeom prst="roundRect">
@@ -9422,7 +9422,7 @@
           <a:lstStyle/>
           <a:p>
             <a:pPr algn="ctr"/>
-            <a:endParaRPr lang="ko-KR" altLang="en-US">
+            <a:endParaRPr lang="ko-KR" altLang="en-US" sz="2400">
               <a:latin typeface="KoPub돋움체 Light" panose="02020603020101020101" pitchFamily="18" charset="-127"/>
               <a:ea typeface="KoPub돋움체 Light" panose="02020603020101020101" pitchFamily="18" charset="-127"/>
             </a:endParaRPr>
@@ -9434,7 +9434,7 @@
           <p:cNvPr id="21" name="사각형: 둥근 모서리 20">
             <a:extLst>
               <a:ext uri="{FF2B5EF4-FFF2-40B4-BE49-F238E27FC236}">
-                <a16:creationId xmlns:a16="http://schemas.microsoft.com/office/drawing/2014/main" id="{C5D84555-11DB-67B5-C342-CC6360B94842}"/>
+                <a16:creationId xmlns:a16="http://schemas.microsoft.com/office/drawing/2014/main" id="{BDBC9CBC-50D5-B6E4-D4E6-9234B31E9C5F}"/>
               </a:ext>
             </a:extLst>
           </p:cNvPr>
@@ -9443,7 +9443,7 @@
         </p:nvSpPr>
         <p:spPr>
           <a:xfrm>
-            <a:off x="254362" y="1043683"/>
+            <a:off x="236105" y="1043683"/>
             <a:ext cx="1264364" cy="230832"/>
           </a:xfrm>
           <a:prstGeom prst="roundRect">
@@ -9477,7 +9477,7 @@
           <a:lstStyle/>
           <a:p>
             <a:pPr algn="ctr"/>
-            <a:endParaRPr lang="ko-KR" altLang="en-US">
+            <a:endParaRPr lang="ko-KR" altLang="en-US" sz="2400">
               <a:latin typeface="KoPub돋움체 Light" panose="02020603020101020101" pitchFamily="18" charset="-127"/>
               <a:ea typeface="KoPub돋움체 Light" panose="02020603020101020101" pitchFamily="18" charset="-127"/>
             </a:endParaRPr>
@@ -9489,7 +9489,7 @@
           <p:cNvPr id="3" name="TextBox 2">
             <a:extLst>
               <a:ext uri="{FF2B5EF4-FFF2-40B4-BE49-F238E27FC236}">
-                <a16:creationId xmlns:a16="http://schemas.microsoft.com/office/drawing/2014/main" id="{52B857DC-105B-FCB3-4829-E706C4E58614}"/>
+                <a16:creationId xmlns:a16="http://schemas.microsoft.com/office/drawing/2014/main" id="{B8FF198A-0E88-CABE-6012-A4584D652C68}"/>
               </a:ext>
             </a:extLst>
           </p:cNvPr>
@@ -9498,7 +9498,7 @@
         </p:nvSpPr>
         <p:spPr>
           <a:xfrm>
-            <a:off x="61773" y="54245"/>
+            <a:off x="43517" y="54246"/>
             <a:ext cx="1180381" cy="169277"/>
           </a:xfrm>
           <a:prstGeom prst="rect">
@@ -9542,7 +9542,7 @@
           <p:cNvPr id="20" name="그룹 19">
             <a:extLst>
               <a:ext uri="{FF2B5EF4-FFF2-40B4-BE49-F238E27FC236}">
-                <a16:creationId xmlns:a16="http://schemas.microsoft.com/office/drawing/2014/main" id="{7042E8C4-861D-5B01-E2CD-6C4E44321E50}"/>
+                <a16:creationId xmlns:a16="http://schemas.microsoft.com/office/drawing/2014/main" id="{8541629C-5945-9C84-FFC8-B36486DE8FFF}"/>
               </a:ext>
             </a:extLst>
           </p:cNvPr>
@@ -9551,7 +9551,7 @@
         </p:nvGrpSpPr>
         <p:grpSpPr>
           <a:xfrm>
-            <a:off x="711096" y="331471"/>
+            <a:off x="692840" y="331471"/>
             <a:ext cx="2337499" cy="520584"/>
             <a:chOff x="422852" y="312900"/>
             <a:chExt cx="2337499" cy="520584"/>
@@ -9562,7 +9562,7 @@
             <p:cNvPr id="4" name="TextBox 3">
               <a:extLst>
                 <a:ext uri="{FF2B5EF4-FFF2-40B4-BE49-F238E27FC236}">
-                  <a16:creationId xmlns:a16="http://schemas.microsoft.com/office/drawing/2014/main" id="{A5EE103B-A8A6-2BAE-A9BB-4C1D83410EBE}"/>
+                  <a16:creationId xmlns:a16="http://schemas.microsoft.com/office/drawing/2014/main" id="{34C3D8C5-33E6-52B4-0063-0DFA4E956887}"/>
                 </a:ext>
               </a:extLst>
             </p:cNvPr>
@@ -9639,7 +9639,7 @@
             <p:cNvPr id="6" name="TextBox 5">
               <a:extLst>
                 <a:ext uri="{FF2B5EF4-FFF2-40B4-BE49-F238E27FC236}">
-                  <a16:creationId xmlns:a16="http://schemas.microsoft.com/office/drawing/2014/main" id="{858E0D51-A09B-B605-C7AE-66115185AD76}"/>
+                  <a16:creationId xmlns:a16="http://schemas.microsoft.com/office/drawing/2014/main" id="{9A55B737-7A78-F138-5C13-9304655EF519}"/>
                 </a:ext>
               </a:extLst>
             </p:cNvPr>
@@ -9723,7 +9723,7 @@
           <p:cNvPr id="7" name="TextBox 6">
             <a:extLst>
               <a:ext uri="{FF2B5EF4-FFF2-40B4-BE49-F238E27FC236}">
-                <a16:creationId xmlns:a16="http://schemas.microsoft.com/office/drawing/2014/main" id="{CC8ECA3F-E404-9FE4-6F88-F571EC0DF140}"/>
+                <a16:creationId xmlns:a16="http://schemas.microsoft.com/office/drawing/2014/main" id="{C7DB18BA-F1FF-74F7-F26F-EA4CCCF289FF}"/>
               </a:ext>
             </a:extLst>
           </p:cNvPr>
@@ -9732,8 +9732,8 @@
         </p:nvSpPr>
         <p:spPr>
           <a:xfrm>
-            <a:off x="318921" y="1074461"/>
-            <a:ext cx="1135247" cy="200055"/>
+            <a:off x="163608" y="1041309"/>
+            <a:ext cx="1409361" cy="230832"/>
           </a:xfrm>
           <a:prstGeom prst="rect">
             <a:avLst/>
@@ -9748,7 +9748,7 @@
           <a:p>
             <a:pPr algn="ctr"/>
             <a:r>
-              <a:rPr lang="ko-KR" altLang="en-US" sz="700" b="1" dirty="0">
+              <a:rPr lang="ko-KR" altLang="en-US" sz="900" b="1" dirty="0">
                 <a:solidFill>
                   <a:schemeClr val="tx2">
                     <a:lumMod val="50000"/>
@@ -9760,7 +9760,7 @@
               <a:t>소통의 광장</a:t>
             </a:r>
             <a:r>
-              <a:rPr lang="en-US" altLang="ko-KR" sz="700" b="1" dirty="0">
+              <a:rPr lang="en-US" altLang="ko-KR" sz="900" b="1" dirty="0">
                 <a:solidFill>
                   <a:schemeClr val="tx2">
                     <a:lumMod val="50000"/>
@@ -9771,7 +9771,7 @@
               </a:rPr>
               <a:t> (Community)</a:t>
             </a:r>
-            <a:endParaRPr lang="en-US" altLang="ko-KR" sz="600" dirty="0">
+            <a:endParaRPr lang="en-US" altLang="ko-KR" sz="800" dirty="0">
               <a:solidFill>
                 <a:schemeClr val="tx2">
                   <a:lumMod val="50000"/>
@@ -9788,7 +9788,7 @@
           <p:cNvPr id="8" name="TextBox 7">
             <a:extLst>
               <a:ext uri="{FF2B5EF4-FFF2-40B4-BE49-F238E27FC236}">
-                <a16:creationId xmlns:a16="http://schemas.microsoft.com/office/drawing/2014/main" id="{FE7798AE-B98B-2E0D-51C5-9FC75CA7A7B7}"/>
+                <a16:creationId xmlns:a16="http://schemas.microsoft.com/office/drawing/2014/main" id="{8775AB22-C659-E20D-CE3D-BCAFB77D9628}"/>
               </a:ext>
             </a:extLst>
           </p:cNvPr>
@@ -9797,8 +9797,8 @@
         </p:nvSpPr>
         <p:spPr>
           <a:xfrm>
-            <a:off x="1699886" y="1074461"/>
-            <a:ext cx="1098379" cy="200055"/>
+            <a:off x="1548581" y="1041309"/>
+            <a:ext cx="1364476" cy="230832"/>
           </a:xfrm>
           <a:prstGeom prst="rect">
             <a:avLst/>
@@ -9813,7 +9813,7 @@
           <a:p>
             <a:pPr algn="ctr"/>
             <a:r>
-              <a:rPr lang="ko-KR" altLang="en-US" sz="700" b="1" dirty="0">
+              <a:rPr lang="ko-KR" altLang="en-US" sz="900" b="1" dirty="0">
                 <a:solidFill>
                   <a:schemeClr val="tx2">
                     <a:lumMod val="50000"/>
@@ -9825,7 +9825,7 @@
               <a:t>업무의 기준  </a:t>
             </a:r>
             <a:r>
-              <a:rPr lang="en-US" altLang="ko-KR" sz="700" b="1" dirty="0">
+              <a:rPr lang="en-US" altLang="ko-KR" sz="900" b="1" dirty="0">
                 <a:solidFill>
                   <a:schemeClr val="tx2">
                     <a:lumMod val="50000"/>
@@ -9836,7 +9836,7 @@
               </a:rPr>
               <a:t>(Standards)</a:t>
             </a:r>
-            <a:endParaRPr lang="en-US" altLang="ko-KR" sz="600" dirty="0">
+            <a:endParaRPr lang="en-US" altLang="ko-KR" sz="800" dirty="0">
               <a:solidFill>
                 <a:schemeClr val="tx2">
                   <a:lumMod val="50000"/>
@@ -9853,7 +9853,7 @@
           <p:cNvPr id="9" name="TextBox 8">
             <a:extLst>
               <a:ext uri="{FF2B5EF4-FFF2-40B4-BE49-F238E27FC236}">
-                <a16:creationId xmlns:a16="http://schemas.microsoft.com/office/drawing/2014/main" id="{011B032A-6D89-784E-2E39-C63A6818E2D1}"/>
+                <a16:creationId xmlns:a16="http://schemas.microsoft.com/office/drawing/2014/main" id="{DBFABAC6-B2E3-9F5B-F3F0-569BA71EEC6F}"/>
               </a:ext>
             </a:extLst>
           </p:cNvPr>
@@ -9862,8 +9862,8 @@
         </p:nvSpPr>
         <p:spPr>
           <a:xfrm>
-            <a:off x="353385" y="1338703"/>
-            <a:ext cx="1066319" cy="200055"/>
+            <a:off x="206889" y="1305551"/>
+            <a:ext cx="1322798" cy="230832"/>
           </a:xfrm>
           <a:prstGeom prst="rect">
             <a:avLst/>
@@ -9878,7 +9878,7 @@
           <a:p>
             <a:pPr algn="ctr"/>
             <a:r>
-              <a:rPr lang="ko-KR" altLang="en-US" sz="700" b="1" dirty="0">
+              <a:rPr lang="ko-KR" altLang="en-US" sz="900" b="1" dirty="0">
                 <a:solidFill>
                   <a:schemeClr val="tx2">
                     <a:lumMod val="50000"/>
@@ -9890,7 +9890,7 @@
               <a:t>배움의 창구 </a:t>
             </a:r>
             <a:r>
-              <a:rPr lang="en-US" altLang="ko-KR" sz="700" b="1" dirty="0">
+              <a:rPr lang="en-US" altLang="ko-KR" sz="900" b="1" dirty="0">
                 <a:solidFill>
                   <a:schemeClr val="tx2">
                     <a:lumMod val="50000"/>
@@ -9901,7 +9901,7 @@
               </a:rPr>
               <a:t>(Education)</a:t>
             </a:r>
-            <a:endParaRPr lang="ko-KR" altLang="en-US" sz="600" dirty="0">
+            <a:endParaRPr lang="ko-KR" altLang="en-US" sz="800" dirty="0">
               <a:solidFill>
                 <a:schemeClr val="tx2">
                   <a:lumMod val="50000"/>
@@ -9918,7 +9918,7 @@
           <p:cNvPr id="10" name="TextBox 9">
             <a:extLst>
               <a:ext uri="{FF2B5EF4-FFF2-40B4-BE49-F238E27FC236}">
-                <a16:creationId xmlns:a16="http://schemas.microsoft.com/office/drawing/2014/main" id="{A3C9EAD4-C66C-2DB1-EF82-B9972B2504AE}"/>
+                <a16:creationId xmlns:a16="http://schemas.microsoft.com/office/drawing/2014/main" id="{616185A7-F63F-4F18-0F71-745C868E89D0}"/>
               </a:ext>
             </a:extLst>
           </p:cNvPr>
@@ -9927,8 +9927,8 @@
         </p:nvSpPr>
         <p:spPr>
           <a:xfrm>
-            <a:off x="1686261" y="1338703"/>
-            <a:ext cx="1125629" cy="200055"/>
+            <a:off x="1530948" y="1305551"/>
+            <a:ext cx="1399743" cy="230832"/>
           </a:xfrm>
           <a:prstGeom prst="rect">
             <a:avLst/>
@@ -9943,7 +9943,7 @@
           <a:p>
             <a:pPr algn="ctr"/>
             <a:r>
-              <a:rPr lang="ko-KR" altLang="en-US" sz="700" b="1" dirty="0">
+              <a:rPr lang="ko-KR" altLang="en-US" sz="900" b="1" dirty="0">
                 <a:solidFill>
                   <a:schemeClr val="tx2">
                     <a:lumMod val="50000"/>
@@ -9955,7 +9955,7 @@
               <a:t>투명한 지표  </a:t>
             </a:r>
             <a:r>
-              <a:rPr lang="en-US" altLang="ko-KR" sz="700" b="1" dirty="0">
+              <a:rPr lang="en-US" altLang="ko-KR" sz="900" b="1" dirty="0">
                 <a:solidFill>
                   <a:schemeClr val="tx2">
                     <a:lumMod val="50000"/>
@@ -9966,7 +9966,7 @@
               </a:rPr>
               <a:t>(Dashboard)</a:t>
             </a:r>
-            <a:endParaRPr lang="ko-KR" altLang="en-US" sz="600" dirty="0">
+            <a:endParaRPr lang="ko-KR" altLang="en-US" sz="800" dirty="0">
               <a:solidFill>
                 <a:schemeClr val="tx2">
                   <a:lumMod val="50000"/>
@@ -9983,7 +9983,7 @@
           <p:cNvPr id="17" name="그룹 16">
             <a:extLst>
               <a:ext uri="{FF2B5EF4-FFF2-40B4-BE49-F238E27FC236}">
-                <a16:creationId xmlns:a16="http://schemas.microsoft.com/office/drawing/2014/main" id="{CB067A95-2D65-83A9-1D9A-E08C602D2017}"/>
+                <a16:creationId xmlns:a16="http://schemas.microsoft.com/office/drawing/2014/main" id="{494B4D00-F5F3-1DA3-1D31-4FEB229CB2FD}"/>
               </a:ext>
             </a:extLst>
           </p:cNvPr>
@@ -9992,7 +9992,7 @@
         </p:nvGrpSpPr>
         <p:grpSpPr>
           <a:xfrm>
-            <a:off x="191493" y="377028"/>
+            <a:off x="173236" y="377028"/>
             <a:ext cx="538336" cy="538336"/>
             <a:chOff x="777945" y="-736888"/>
             <a:chExt cx="663508" cy="663508"/>
@@ -10003,7 +10003,7 @@
             <p:cNvPr id="5" name="그림 4" descr="패턴, 사각형, 예술, 직사각형이(가) 표시된 사진&#10;&#10;AI 생성 콘텐츠는 정확하지 않을 수 있습니다.">
               <a:extLst>
                 <a:ext uri="{FF2B5EF4-FFF2-40B4-BE49-F238E27FC236}">
-                  <a16:creationId xmlns:a16="http://schemas.microsoft.com/office/drawing/2014/main" id="{E4286401-A6C4-C58F-76EC-287804EA4A12}"/>
+                  <a16:creationId xmlns:a16="http://schemas.microsoft.com/office/drawing/2014/main" id="{74392C30-91B7-7477-3F03-4E87E9F36E4B}"/>
                 </a:ext>
               </a:extLst>
             </p:cNvPr>
@@ -10033,7 +10033,7 @@
             <p:cNvPr id="13" name="L 도형 12">
               <a:extLst>
                 <a:ext uri="{FF2B5EF4-FFF2-40B4-BE49-F238E27FC236}">
-                  <a16:creationId xmlns:a16="http://schemas.microsoft.com/office/drawing/2014/main" id="{A6FDC8A4-A1E1-9D4E-BCE5-0B87F8B44F8A}"/>
+                  <a16:creationId xmlns:a16="http://schemas.microsoft.com/office/drawing/2014/main" id="{C0F0F03A-08A8-59B9-2937-78B0D5A94EE4}"/>
                 </a:ext>
               </a:extLst>
             </p:cNvPr>
@@ -10090,7 +10090,7 @@
             <p:cNvPr id="14" name="L 도형 13">
               <a:extLst>
                 <a:ext uri="{FF2B5EF4-FFF2-40B4-BE49-F238E27FC236}">
-                  <a16:creationId xmlns:a16="http://schemas.microsoft.com/office/drawing/2014/main" id="{C5C7FED9-247C-61CD-5241-BE0FD9C98D13}"/>
+                  <a16:creationId xmlns:a16="http://schemas.microsoft.com/office/drawing/2014/main" id="{DC16ED84-4496-018B-DC41-24A9053D6275}"/>
                 </a:ext>
               </a:extLst>
             </p:cNvPr>
@@ -10147,7 +10147,7 @@
             <p:cNvPr id="15" name="L 도형 14">
               <a:extLst>
                 <a:ext uri="{FF2B5EF4-FFF2-40B4-BE49-F238E27FC236}">
-                  <a16:creationId xmlns:a16="http://schemas.microsoft.com/office/drawing/2014/main" id="{794355B2-4107-A11F-85EA-DB14BD776469}"/>
+                  <a16:creationId xmlns:a16="http://schemas.microsoft.com/office/drawing/2014/main" id="{68A82964-820A-70AC-3524-49C9CDD29D30}"/>
                 </a:ext>
               </a:extLst>
             </p:cNvPr>
@@ -10204,7 +10204,7 @@
             <p:cNvPr id="16" name="L 도형 15">
               <a:extLst>
                 <a:ext uri="{FF2B5EF4-FFF2-40B4-BE49-F238E27FC236}">
-                  <a16:creationId xmlns:a16="http://schemas.microsoft.com/office/drawing/2014/main" id="{74A147C1-44F8-F042-8AB6-6540612674AB}"/>
+                  <a16:creationId xmlns:a16="http://schemas.microsoft.com/office/drawing/2014/main" id="{0ECF5BD8-D202-7B2D-7A9D-F341609A0350}"/>
                 </a:ext>
               </a:extLst>
             </p:cNvPr>
@@ -10260,7 +10260,7 @@
     </p:spTree>
     <p:extLst>
       <p:ext uri="{BB962C8B-B14F-4D97-AF65-F5344CB8AC3E}">
-        <p14:creationId xmlns:p14="http://schemas.microsoft.com/office/powerpoint/2010/main" val="1356555659"/>
+        <p14:creationId xmlns:p14="http://schemas.microsoft.com/office/powerpoint/2010/main" val="1442143501"/>
       </p:ext>
     </p:extLst>
   </p:cSld>

--- a/documents/명함제작/[2026 우리가치(WeValue) QI 활동 프로젝트 명함1(앞).pptx
+++ b/documents/명함제작/[2026 우리가치(WeValue) QI 활동 프로젝트 명함1(앞).pptx
@@ -8,12 +8,12 @@
     <p:notesMasterId r:id="rId8"/>
   </p:notesMasterIdLst>
   <p:sldIdLst>
-    <p:sldId id="257" r:id="rId2"/>
-    <p:sldId id="258" r:id="rId3"/>
-    <p:sldId id="259" r:id="rId4"/>
-    <p:sldId id="260" r:id="rId5"/>
-    <p:sldId id="261" r:id="rId6"/>
-    <p:sldId id="262" r:id="rId7"/>
+    <p:sldId id="265" r:id="rId2"/>
+    <p:sldId id="266" r:id="rId3"/>
+    <p:sldId id="267" r:id="rId4"/>
+    <p:sldId id="268" r:id="rId5"/>
+    <p:sldId id="269" r:id="rId6"/>
+    <p:sldId id="270" r:id="rId7"/>
   </p:sldIdLst>
   <p:sldSz cx="3203575" cy="1800225"/>
   <p:notesSz cx="6858000" cy="9945688"/>
@@ -233,7 +233,7 @@
           <a:p>
             <a:fld id="{F929F65E-AEE7-45C5-814B-4468CAF1E537}" type="datetimeFigureOut">
               <a:rPr lang="ko-KR" altLang="en-US" smtClean="0"/>
-              <a:t>2026-04-09</a:t>
+              <a:t>2026-04-29</a:t>
             </a:fld>
             <a:endParaRPr lang="ko-KR" altLang="en-US"/>
           </a:p>
@@ -631,7 +631,7 @@
           <a:p>
             <a:fld id="{149F34B4-7175-41BD-B98B-2E7021201D7D}" type="datetimeFigureOut">
               <a:rPr lang="ko-KR" altLang="en-US" smtClean="0"/>
-              <a:t>2026-04-09</a:t>
+              <a:t>2026-04-29</a:t>
             </a:fld>
             <a:endParaRPr lang="ko-KR" altLang="en-US"/>
           </a:p>
@@ -801,7 +801,7 @@
           <a:p>
             <a:fld id="{149F34B4-7175-41BD-B98B-2E7021201D7D}" type="datetimeFigureOut">
               <a:rPr lang="ko-KR" altLang="en-US" smtClean="0"/>
-              <a:t>2026-04-09</a:t>
+              <a:t>2026-04-29</a:t>
             </a:fld>
             <a:endParaRPr lang="ko-KR" altLang="en-US"/>
           </a:p>
@@ -981,7 +981,7 @@
           <a:p>
             <a:fld id="{149F34B4-7175-41BD-B98B-2E7021201D7D}" type="datetimeFigureOut">
               <a:rPr lang="ko-KR" altLang="en-US" smtClean="0"/>
-              <a:t>2026-04-09</a:t>
+              <a:t>2026-04-29</a:t>
             </a:fld>
             <a:endParaRPr lang="ko-KR" altLang="en-US"/>
           </a:p>
@@ -1890,7 +1890,7 @@
           <a:p>
             <a:fld id="{149F34B4-7175-41BD-B98B-2E7021201D7D}" type="datetimeFigureOut">
               <a:rPr lang="ko-KR" altLang="en-US" smtClean="0"/>
-              <a:t>2026-04-09</a:t>
+              <a:t>2026-04-29</a:t>
             </a:fld>
             <a:endParaRPr lang="ko-KR" altLang="en-US"/>
           </a:p>
@@ -2136,7 +2136,7 @@
           <a:p>
             <a:fld id="{149F34B4-7175-41BD-B98B-2E7021201D7D}" type="datetimeFigureOut">
               <a:rPr lang="ko-KR" altLang="en-US" smtClean="0"/>
-              <a:t>2026-04-09</a:t>
+              <a:t>2026-04-29</a:t>
             </a:fld>
             <a:endParaRPr lang="ko-KR" altLang="en-US"/>
           </a:p>
@@ -2368,7 +2368,7 @@
           <a:p>
             <a:fld id="{149F34B4-7175-41BD-B98B-2E7021201D7D}" type="datetimeFigureOut">
               <a:rPr lang="ko-KR" altLang="en-US" smtClean="0"/>
-              <a:t>2026-04-09</a:t>
+              <a:t>2026-04-29</a:t>
             </a:fld>
             <a:endParaRPr lang="ko-KR" altLang="en-US"/>
           </a:p>
@@ -2735,7 +2735,7 @@
           <a:p>
             <a:fld id="{149F34B4-7175-41BD-B98B-2E7021201D7D}" type="datetimeFigureOut">
               <a:rPr lang="ko-KR" altLang="en-US" smtClean="0"/>
-              <a:t>2026-04-09</a:t>
+              <a:t>2026-04-29</a:t>
             </a:fld>
             <a:endParaRPr lang="ko-KR" altLang="en-US"/>
           </a:p>
@@ -2853,7 +2853,7 @@
           <a:p>
             <a:fld id="{149F34B4-7175-41BD-B98B-2E7021201D7D}" type="datetimeFigureOut">
               <a:rPr lang="ko-KR" altLang="en-US" smtClean="0"/>
-              <a:t>2026-04-09</a:t>
+              <a:t>2026-04-29</a:t>
             </a:fld>
             <a:endParaRPr lang="ko-KR" altLang="en-US"/>
           </a:p>
@@ -2948,7 +2948,7 @@
           <a:p>
             <a:fld id="{149F34B4-7175-41BD-B98B-2E7021201D7D}" type="datetimeFigureOut">
               <a:rPr lang="ko-KR" altLang="en-US" smtClean="0"/>
-              <a:t>2026-04-09</a:t>
+              <a:t>2026-04-29</a:t>
             </a:fld>
             <a:endParaRPr lang="ko-KR" altLang="en-US"/>
           </a:p>
@@ -3225,7 +3225,7 @@
           <a:p>
             <a:fld id="{149F34B4-7175-41BD-B98B-2E7021201D7D}" type="datetimeFigureOut">
               <a:rPr lang="ko-KR" altLang="en-US" smtClean="0"/>
-              <a:t>2026-04-09</a:t>
+              <a:t>2026-04-29</a:t>
             </a:fld>
             <a:endParaRPr lang="ko-KR" altLang="en-US"/>
           </a:p>
@@ -3482,7 +3482,7 @@
           <a:p>
             <a:fld id="{149F34B4-7175-41BD-B98B-2E7021201D7D}" type="datetimeFigureOut">
               <a:rPr lang="ko-KR" altLang="en-US" smtClean="0"/>
-              <a:t>2026-04-09</a:t>
+              <a:t>2026-04-29</a:t>
             </a:fld>
             <a:endParaRPr lang="ko-KR" altLang="en-US"/>
           </a:p>
@@ -3695,7 +3695,7 @@
           <a:p>
             <a:fld id="{149F34B4-7175-41BD-B98B-2E7021201D7D}" type="datetimeFigureOut">
               <a:rPr lang="ko-KR" altLang="en-US" smtClean="0"/>
-              <a:t>2026-04-09</a:t>
+              <a:t>2026-04-29</a:t>
             </a:fld>
             <a:endParaRPr lang="ko-KR" altLang="en-US"/>
           </a:p>
@@ -4121,226 +4121,6 @@
       </p:grpSpPr>
       <p:sp>
         <p:nvSpPr>
-          <p:cNvPr id="28" name="사각형: 둥근 모서리 27">
-            <a:extLst>
-              <a:ext uri="{FF2B5EF4-FFF2-40B4-BE49-F238E27FC236}">
-                <a16:creationId xmlns:a16="http://schemas.microsoft.com/office/drawing/2014/main" id="{F4CDCC63-1B49-E29D-2639-15C72FBF93D9}"/>
-              </a:ext>
-            </a:extLst>
-          </p:cNvPr>
-          <p:cNvSpPr/>
-          <p:nvPr/>
-        </p:nvSpPr>
-        <p:spPr>
-          <a:xfrm>
-            <a:off x="1598636" y="1043683"/>
-            <a:ext cx="1264364" cy="230832"/>
-          </a:xfrm>
-          <a:prstGeom prst="roundRect">
-            <a:avLst/>
-          </a:prstGeom>
-          <a:solidFill>
-            <a:schemeClr val="bg2"/>
-          </a:solidFill>
-          <a:ln>
-            <a:noFill/>
-          </a:ln>
-        </p:spPr>
-        <p:style>
-          <a:lnRef idx="2">
-            <a:schemeClr val="accent3">
-              <a:shade val="15000"/>
-            </a:schemeClr>
-          </a:lnRef>
-          <a:fillRef idx="1">
-            <a:schemeClr val="accent3"/>
-          </a:fillRef>
-          <a:effectRef idx="0">
-            <a:schemeClr val="accent3"/>
-          </a:effectRef>
-          <a:fontRef idx="minor">
-            <a:schemeClr val="lt1"/>
-          </a:fontRef>
-        </p:style>
-        <p:txBody>
-          <a:bodyPr rtlCol="0" anchor="ctr"/>
-          <a:lstStyle/>
-          <a:p>
-            <a:pPr algn="ctr"/>
-            <a:endParaRPr lang="ko-KR" altLang="en-US" sz="2400">
-              <a:latin typeface="KoPub돋움체 Light" panose="02020603020101020101" pitchFamily="18" charset="-127"/>
-              <a:ea typeface="KoPub돋움체 Light" panose="02020603020101020101" pitchFamily="18" charset="-127"/>
-            </a:endParaRPr>
-          </a:p>
-        </p:txBody>
-      </p:sp>
-      <p:sp>
-        <p:nvSpPr>
-          <p:cNvPr id="29" name="사각형: 둥근 모서리 28">
-            <a:extLst>
-              <a:ext uri="{FF2B5EF4-FFF2-40B4-BE49-F238E27FC236}">
-                <a16:creationId xmlns:a16="http://schemas.microsoft.com/office/drawing/2014/main" id="{4C331443-AF77-EA7C-A68D-1AF2C1938311}"/>
-              </a:ext>
-            </a:extLst>
-          </p:cNvPr>
-          <p:cNvSpPr/>
-          <p:nvPr/>
-        </p:nvSpPr>
-        <p:spPr>
-          <a:xfrm>
-            <a:off x="236105" y="1307925"/>
-            <a:ext cx="1264364" cy="230832"/>
-          </a:xfrm>
-          <a:prstGeom prst="roundRect">
-            <a:avLst/>
-          </a:prstGeom>
-          <a:solidFill>
-            <a:schemeClr val="bg2"/>
-          </a:solidFill>
-          <a:ln>
-            <a:noFill/>
-          </a:ln>
-        </p:spPr>
-        <p:style>
-          <a:lnRef idx="2">
-            <a:schemeClr val="accent3">
-              <a:shade val="15000"/>
-            </a:schemeClr>
-          </a:lnRef>
-          <a:fillRef idx="1">
-            <a:schemeClr val="accent3"/>
-          </a:fillRef>
-          <a:effectRef idx="0">
-            <a:schemeClr val="accent3"/>
-          </a:effectRef>
-          <a:fontRef idx="minor">
-            <a:schemeClr val="lt1"/>
-          </a:fontRef>
-        </p:style>
-        <p:txBody>
-          <a:bodyPr rtlCol="0" anchor="ctr"/>
-          <a:lstStyle/>
-          <a:p>
-            <a:pPr algn="ctr"/>
-            <a:endParaRPr lang="ko-KR" altLang="en-US" sz="2400">
-              <a:latin typeface="KoPub돋움체 Light" panose="02020603020101020101" pitchFamily="18" charset="-127"/>
-              <a:ea typeface="KoPub돋움체 Light" panose="02020603020101020101" pitchFamily="18" charset="-127"/>
-            </a:endParaRPr>
-          </a:p>
-        </p:txBody>
-      </p:sp>
-      <p:sp>
-        <p:nvSpPr>
-          <p:cNvPr id="30" name="사각형: 둥근 모서리 29">
-            <a:extLst>
-              <a:ext uri="{FF2B5EF4-FFF2-40B4-BE49-F238E27FC236}">
-                <a16:creationId xmlns:a16="http://schemas.microsoft.com/office/drawing/2014/main" id="{E9D0B6FB-F245-5CA5-01A2-7ECE70059B31}"/>
-              </a:ext>
-            </a:extLst>
-          </p:cNvPr>
-          <p:cNvSpPr/>
-          <p:nvPr/>
-        </p:nvSpPr>
-        <p:spPr>
-          <a:xfrm>
-            <a:off x="1598636" y="1307925"/>
-            <a:ext cx="1264364" cy="230832"/>
-          </a:xfrm>
-          <a:prstGeom prst="roundRect">
-            <a:avLst/>
-          </a:prstGeom>
-          <a:solidFill>
-            <a:schemeClr val="bg2"/>
-          </a:solidFill>
-          <a:ln>
-            <a:noFill/>
-          </a:ln>
-        </p:spPr>
-        <p:style>
-          <a:lnRef idx="2">
-            <a:schemeClr val="accent3">
-              <a:shade val="15000"/>
-            </a:schemeClr>
-          </a:lnRef>
-          <a:fillRef idx="1">
-            <a:schemeClr val="accent3"/>
-          </a:fillRef>
-          <a:effectRef idx="0">
-            <a:schemeClr val="accent3"/>
-          </a:effectRef>
-          <a:fontRef idx="minor">
-            <a:schemeClr val="lt1"/>
-          </a:fontRef>
-        </p:style>
-        <p:txBody>
-          <a:bodyPr rtlCol="0" anchor="ctr"/>
-          <a:lstStyle/>
-          <a:p>
-            <a:pPr algn="ctr"/>
-            <a:endParaRPr lang="ko-KR" altLang="en-US" sz="2400">
-              <a:latin typeface="KoPub돋움체 Light" panose="02020603020101020101" pitchFamily="18" charset="-127"/>
-              <a:ea typeface="KoPub돋움체 Light" panose="02020603020101020101" pitchFamily="18" charset="-127"/>
-            </a:endParaRPr>
-          </a:p>
-        </p:txBody>
-      </p:sp>
-      <p:sp>
-        <p:nvSpPr>
-          <p:cNvPr id="21" name="사각형: 둥근 모서리 20">
-            <a:extLst>
-              <a:ext uri="{FF2B5EF4-FFF2-40B4-BE49-F238E27FC236}">
-                <a16:creationId xmlns:a16="http://schemas.microsoft.com/office/drawing/2014/main" id="{2D25819D-DF75-2963-B40C-E9AD78F5AC89}"/>
-              </a:ext>
-            </a:extLst>
-          </p:cNvPr>
-          <p:cNvSpPr/>
-          <p:nvPr/>
-        </p:nvSpPr>
-        <p:spPr>
-          <a:xfrm>
-            <a:off x="236105" y="1043683"/>
-            <a:ext cx="1264364" cy="230832"/>
-          </a:xfrm>
-          <a:prstGeom prst="roundRect">
-            <a:avLst/>
-          </a:prstGeom>
-          <a:solidFill>
-            <a:schemeClr val="bg2"/>
-          </a:solidFill>
-          <a:ln>
-            <a:noFill/>
-          </a:ln>
-        </p:spPr>
-        <p:style>
-          <a:lnRef idx="2">
-            <a:schemeClr val="accent3">
-              <a:shade val="15000"/>
-            </a:schemeClr>
-          </a:lnRef>
-          <a:fillRef idx="1">
-            <a:schemeClr val="accent3"/>
-          </a:fillRef>
-          <a:effectRef idx="0">
-            <a:schemeClr val="accent3"/>
-          </a:effectRef>
-          <a:fontRef idx="minor">
-            <a:schemeClr val="lt1"/>
-          </a:fontRef>
-        </p:style>
-        <p:txBody>
-          <a:bodyPr rtlCol="0" anchor="ctr"/>
-          <a:lstStyle/>
-          <a:p>
-            <a:pPr algn="ctr"/>
-            <a:endParaRPr lang="ko-KR" altLang="en-US" sz="2400">
-              <a:latin typeface="KoPub돋움체 Light" panose="02020603020101020101" pitchFamily="18" charset="-127"/>
-              <a:ea typeface="KoPub돋움체 Light" panose="02020603020101020101" pitchFamily="18" charset="-127"/>
-            </a:endParaRPr>
-          </a:p>
-        </p:txBody>
-      </p:sp>
-      <p:sp>
-        <p:nvSpPr>
           <p:cNvPr id="3" name="TextBox 2">
             <a:extLst>
               <a:ext uri="{FF2B5EF4-FFF2-40B4-BE49-F238E27FC236}">
@@ -4353,8 +4133,8 @@
         </p:nvSpPr>
         <p:spPr>
           <a:xfrm>
-            <a:off x="43517" y="54246"/>
-            <a:ext cx="1180381" cy="169277"/>
+            <a:off x="25241" y="63223"/>
+            <a:ext cx="1403509" cy="184666"/>
           </a:xfrm>
           <a:prstGeom prst="rect">
             <a:avLst/>
@@ -4367,469 +4147,27 @@
           </a:bodyPr>
           <a:lstStyle/>
           <a:p>
-            <a:pPr algn="ctr"/>
             <a:r>
-              <a:rPr lang="ko-KR" altLang="en-US" sz="500" spc="-11" dirty="0">
-                <a:latin typeface="KoPub돋움체 Light" panose="02020603020101020101" pitchFamily="18" charset="-127"/>
-                <a:ea typeface="KoPub돋움체 Light" panose="02020603020101020101" pitchFamily="18" charset="-127"/>
+              <a:rPr lang="ko-KR" altLang="en-US" sz="600" b="1" spc="-11" dirty="0">
+                <a:latin typeface="KoPub돋움체 Bold" panose="00000800000000000000" pitchFamily="2" charset="-127"/>
+                <a:ea typeface="KoPub돋움체 Bold" panose="00000800000000000000" pitchFamily="2" charset="-127"/>
               </a:rPr>
               <a:t>순천향대학교 천안병원 </a:t>
             </a:r>
             <a:r>
-              <a:rPr lang="en-US" altLang="ko-KR" sz="500" spc="-11" dirty="0">
-                <a:latin typeface="KoPub돋움체 Light" panose="02020603020101020101" pitchFamily="18" charset="-127"/>
-                <a:ea typeface="KoPub돋움체 Light" panose="02020603020101020101" pitchFamily="18" charset="-127"/>
+              <a:rPr lang="en-US" altLang="ko-KR" sz="600" b="1" spc="-11" dirty="0">
+                <a:latin typeface="KoPub돋움체 Bold" panose="00000800000000000000" pitchFamily="2" charset="-127"/>
+                <a:ea typeface="KoPub돋움체 Bold" panose="00000800000000000000" pitchFamily="2" charset="-127"/>
               </a:rPr>
               <a:t>| </a:t>
             </a:r>
             <a:r>
-              <a:rPr lang="ko-KR" altLang="en-US" sz="500" spc="-11" dirty="0">
-                <a:latin typeface="KoPub돋움체 Light" panose="02020603020101020101" pitchFamily="18" charset="-127"/>
-                <a:ea typeface="KoPub돋움체 Light" panose="02020603020101020101" pitchFamily="18" charset="-127"/>
+              <a:rPr lang="ko-KR" altLang="en-US" sz="600" b="1" spc="-11" dirty="0">
+                <a:latin typeface="KoPub돋움체 Bold" panose="00000800000000000000" pitchFamily="2" charset="-127"/>
+                <a:ea typeface="KoPub돋움체 Bold" panose="00000800000000000000" pitchFamily="2" charset="-127"/>
               </a:rPr>
               <a:t>진료지원간호팀 </a:t>
             </a:r>
-          </a:p>
-        </p:txBody>
-      </p:sp>
-      <p:grpSp>
-        <p:nvGrpSpPr>
-          <p:cNvPr id="20" name="그룹 19">
-            <a:extLst>
-              <a:ext uri="{FF2B5EF4-FFF2-40B4-BE49-F238E27FC236}">
-                <a16:creationId xmlns:a16="http://schemas.microsoft.com/office/drawing/2014/main" id="{FFD471BF-3E8B-E294-1EF7-7949D4D05762}"/>
-              </a:ext>
-            </a:extLst>
-          </p:cNvPr>
-          <p:cNvGrpSpPr/>
-          <p:nvPr/>
-        </p:nvGrpSpPr>
-        <p:grpSpPr>
-          <a:xfrm>
-            <a:off x="692840" y="331471"/>
-            <a:ext cx="2337499" cy="520584"/>
-            <a:chOff x="422852" y="312900"/>
-            <a:chExt cx="2337499" cy="520584"/>
-          </a:xfrm>
-        </p:grpSpPr>
-        <p:sp>
-          <p:nvSpPr>
-            <p:cNvPr id="4" name="TextBox 3">
-              <a:extLst>
-                <a:ext uri="{FF2B5EF4-FFF2-40B4-BE49-F238E27FC236}">
-                  <a16:creationId xmlns:a16="http://schemas.microsoft.com/office/drawing/2014/main" id="{1F0C02A7-D766-DD14-548E-2AE7955534F4}"/>
-                </a:ext>
-              </a:extLst>
-            </p:cNvPr>
-            <p:cNvSpPr txBox="1"/>
-            <p:nvPr/>
-          </p:nvSpPr>
-          <p:spPr>
-            <a:xfrm>
-              <a:off x="696163" y="312900"/>
-              <a:ext cx="1790875" cy="338554"/>
-            </a:xfrm>
-            <a:prstGeom prst="rect">
-              <a:avLst/>
-            </a:prstGeom>
-            <a:noFill/>
-          </p:spPr>
-          <p:txBody>
-            <a:bodyPr wrap="none">
-              <a:spAutoFit/>
-            </a:bodyPr>
-            <a:lstStyle/>
-            <a:p>
-              <a:pPr algn="ctr"/>
-              <a:r>
-                <a:rPr lang="ko-KR" altLang="en-US" sz="1600" dirty="0" err="1">
-                  <a:solidFill>
-                    <a:schemeClr val="accent1">
-                      <a:lumMod val="50000"/>
-                    </a:schemeClr>
-                  </a:solidFill>
-                  <a:latin typeface="KoPub돋움체 Bold" panose="02020603020101020101" pitchFamily="18" charset="-127"/>
-                  <a:ea typeface="KoPub돋움체 Bold" panose="02020603020101020101" pitchFamily="18" charset="-127"/>
-                </a:rPr>
-                <a:t>우리가치</a:t>
-              </a:r>
-              <a:r>
-                <a:rPr lang="ko-KR" altLang="en-US" sz="1600" dirty="0">
-                  <a:solidFill>
-                    <a:schemeClr val="accent1">
-                      <a:lumMod val="50000"/>
-                    </a:schemeClr>
-                  </a:solidFill>
-                  <a:latin typeface="KoPub돋움체 Bold" panose="02020603020101020101" pitchFamily="18" charset="-127"/>
-                  <a:ea typeface="KoPub돋움체 Bold" panose="02020603020101020101" pitchFamily="18" charset="-127"/>
-                </a:rPr>
-                <a:t> </a:t>
-              </a:r>
-              <a:r>
-                <a:rPr lang="en-US" altLang="ko-KR" sz="1600" dirty="0" err="1">
-                  <a:solidFill>
-                    <a:schemeClr val="accent1">
-                      <a:lumMod val="50000"/>
-                    </a:schemeClr>
-                  </a:solidFill>
-                  <a:latin typeface="KoPub돋움체 Bold" panose="02020603020101020101" pitchFamily="18" charset="-127"/>
-                  <a:ea typeface="KoPub돋움체 Bold" panose="02020603020101020101" pitchFamily="18" charset="-127"/>
-                </a:rPr>
-                <a:t>WeValue</a:t>
-              </a:r>
-              <a:endParaRPr lang="en-US" altLang="ko-KR" sz="1600" dirty="0">
-                <a:solidFill>
-                  <a:schemeClr val="accent1">
-                    <a:lumMod val="50000"/>
-                  </a:schemeClr>
-                </a:solidFill>
-                <a:latin typeface="KoPub돋움체 Bold" panose="02020603020101020101" pitchFamily="18" charset="-127"/>
-                <a:ea typeface="KoPub돋움체 Bold" panose="02020603020101020101" pitchFamily="18" charset="-127"/>
-              </a:endParaRPr>
-            </a:p>
-          </p:txBody>
-        </p:sp>
-        <p:sp>
-          <p:nvSpPr>
-            <p:cNvPr id="6" name="TextBox 5">
-              <a:extLst>
-                <a:ext uri="{FF2B5EF4-FFF2-40B4-BE49-F238E27FC236}">
-                  <a16:creationId xmlns:a16="http://schemas.microsoft.com/office/drawing/2014/main" id="{25F3C248-44C4-9D7A-C464-62D68C9890DC}"/>
-                </a:ext>
-              </a:extLst>
-            </p:cNvPr>
-            <p:cNvSpPr txBox="1"/>
-            <p:nvPr/>
-          </p:nvSpPr>
-          <p:spPr>
-            <a:xfrm>
-              <a:off x="422852" y="587263"/>
-              <a:ext cx="2337499" cy="246221"/>
-            </a:xfrm>
-            <a:prstGeom prst="rect">
-              <a:avLst/>
-            </a:prstGeom>
-            <a:noFill/>
-          </p:spPr>
-          <p:txBody>
-            <a:bodyPr wrap="none">
-              <a:spAutoFit/>
-            </a:bodyPr>
-            <a:lstStyle/>
-            <a:p>
-              <a:pPr algn="ctr"/>
-              <a:r>
-                <a:rPr lang="en-US" altLang="ko-KR" sz="1000" b="1" dirty="0">
-                  <a:latin typeface="KoPub돋움체 Light" panose="02020603020101020101" pitchFamily="18" charset="-127"/>
-                  <a:ea typeface="KoPub돋움체 Light" panose="02020603020101020101" pitchFamily="18" charset="-127"/>
-                </a:rPr>
-                <a:t>[</a:t>
-              </a:r>
-              <a:r>
-                <a:rPr lang="ko-KR" altLang="en-US" sz="1000" b="1" dirty="0">
-                  <a:latin typeface="KoPub돋움체 Light" panose="02020603020101020101" pitchFamily="18" charset="-127"/>
-                  <a:ea typeface="KoPub돋움체 Light" panose="02020603020101020101" pitchFamily="18" charset="-127"/>
-                </a:rPr>
-                <a:t>우리가 가치를 만드는 공간</a:t>
-              </a:r>
-              <a:r>
-                <a:rPr lang="en-US" altLang="ko-KR" sz="1000" b="1" dirty="0">
-                  <a:latin typeface="KoPub돋움체 Light" panose="02020603020101020101" pitchFamily="18" charset="-127"/>
-                  <a:ea typeface="KoPub돋움체 Light" panose="02020603020101020101" pitchFamily="18" charset="-127"/>
-                </a:rPr>
-                <a:t>, </a:t>
-              </a:r>
-              <a:r>
-                <a:rPr lang="ko-KR" altLang="en-US" sz="1000" b="1" dirty="0" err="1">
-                  <a:latin typeface="KoPub돋움체 Light" panose="02020603020101020101" pitchFamily="18" charset="-127"/>
-                  <a:ea typeface="KoPub돋움체 Light" panose="02020603020101020101" pitchFamily="18" charset="-127"/>
-                </a:rPr>
-                <a:t>우리가치</a:t>
-              </a:r>
-              <a:r>
-                <a:rPr lang="ko-KR" altLang="en-US" sz="1000" b="1" dirty="0">
-                  <a:latin typeface="KoPub돋움체 Light" panose="02020603020101020101" pitchFamily="18" charset="-127"/>
-                  <a:ea typeface="KoPub돋움체 Light" panose="02020603020101020101" pitchFamily="18" charset="-127"/>
-                </a:rPr>
-                <a:t> 허브</a:t>
-              </a:r>
-              <a:r>
-                <a:rPr lang="en-US" altLang="ko-KR" sz="1000" b="1" dirty="0">
-                  <a:latin typeface="KoPub돋움체 Light" panose="02020603020101020101" pitchFamily="18" charset="-127"/>
-                  <a:ea typeface="KoPub돋움체 Light" panose="02020603020101020101" pitchFamily="18" charset="-127"/>
-                </a:rPr>
-                <a:t>]</a:t>
-              </a:r>
-              <a:endParaRPr lang="en-US" altLang="ko-KR" sz="1000" b="1" dirty="0">
-                <a:solidFill>
-                  <a:schemeClr val="accent1">
-                    <a:lumMod val="50000"/>
-                  </a:schemeClr>
-                </a:solidFill>
-                <a:latin typeface="KoPub돋움체 Light" panose="02020603020101020101" pitchFamily="18" charset="-127"/>
-                <a:ea typeface="KoPub돋움체 Light" panose="02020603020101020101" pitchFamily="18" charset="-127"/>
-              </a:endParaRPr>
-            </a:p>
-          </p:txBody>
-        </p:sp>
-      </p:grpSp>
-      <p:sp>
-        <p:nvSpPr>
-          <p:cNvPr id="7" name="TextBox 6">
-            <a:extLst>
-              <a:ext uri="{FF2B5EF4-FFF2-40B4-BE49-F238E27FC236}">
-                <a16:creationId xmlns:a16="http://schemas.microsoft.com/office/drawing/2014/main" id="{6DCC158E-675F-C121-F60E-F44282305A18}"/>
-              </a:ext>
-            </a:extLst>
-          </p:cNvPr>
-          <p:cNvSpPr txBox="1"/>
-          <p:nvPr/>
-        </p:nvSpPr>
-        <p:spPr>
-          <a:xfrm>
-            <a:off x="163608" y="1041309"/>
-            <a:ext cx="1409361" cy="230832"/>
-          </a:xfrm>
-          <a:prstGeom prst="rect">
-            <a:avLst/>
-          </a:prstGeom>
-          <a:noFill/>
-        </p:spPr>
-        <p:txBody>
-          <a:bodyPr wrap="none">
-            <a:spAutoFit/>
-          </a:bodyPr>
-          <a:lstStyle/>
-          <a:p>
-            <a:pPr algn="ctr"/>
-            <a:r>
-              <a:rPr lang="ko-KR" altLang="en-US" sz="900" b="1" dirty="0">
-                <a:solidFill>
-                  <a:schemeClr val="tx2">
-                    <a:lumMod val="50000"/>
-                  </a:schemeClr>
-                </a:solidFill>
-                <a:latin typeface="KoPub돋움체 Light" panose="02020603020101020101" pitchFamily="18" charset="-127"/>
-                <a:ea typeface="KoPub돋움체 Light" panose="02020603020101020101" pitchFamily="18" charset="-127"/>
-              </a:rPr>
-              <a:t>소통의 광장</a:t>
-            </a:r>
-            <a:r>
-              <a:rPr lang="en-US" altLang="ko-KR" sz="900" b="1" dirty="0">
-                <a:solidFill>
-                  <a:schemeClr val="tx2">
-                    <a:lumMod val="50000"/>
-                  </a:schemeClr>
-                </a:solidFill>
-                <a:latin typeface="KoPub돋움체 Light" panose="02020603020101020101" pitchFamily="18" charset="-127"/>
-                <a:ea typeface="KoPub돋움체 Light" panose="02020603020101020101" pitchFamily="18" charset="-127"/>
-              </a:rPr>
-              <a:t> (Community)</a:t>
-            </a:r>
-            <a:endParaRPr lang="en-US" altLang="ko-KR" sz="800" dirty="0">
-              <a:solidFill>
-                <a:schemeClr val="tx2">
-                  <a:lumMod val="50000"/>
-                </a:schemeClr>
-              </a:solidFill>
-              <a:latin typeface="KoPub돋움체 Light" panose="02020603020101020101" pitchFamily="18" charset="-127"/>
-              <a:ea typeface="KoPub돋움체 Light" panose="02020603020101020101" pitchFamily="18" charset="-127"/>
-            </a:endParaRPr>
-          </a:p>
-        </p:txBody>
-      </p:sp>
-      <p:sp>
-        <p:nvSpPr>
-          <p:cNvPr id="8" name="TextBox 7">
-            <a:extLst>
-              <a:ext uri="{FF2B5EF4-FFF2-40B4-BE49-F238E27FC236}">
-                <a16:creationId xmlns:a16="http://schemas.microsoft.com/office/drawing/2014/main" id="{1D2DD8AC-667F-42B8-5265-B6ED7A4CC558}"/>
-              </a:ext>
-            </a:extLst>
-          </p:cNvPr>
-          <p:cNvSpPr txBox="1"/>
-          <p:nvPr/>
-        </p:nvSpPr>
-        <p:spPr>
-          <a:xfrm>
-            <a:off x="1548581" y="1041309"/>
-            <a:ext cx="1364476" cy="230832"/>
-          </a:xfrm>
-          <a:prstGeom prst="rect">
-            <a:avLst/>
-          </a:prstGeom>
-          <a:noFill/>
-        </p:spPr>
-        <p:txBody>
-          <a:bodyPr wrap="none">
-            <a:spAutoFit/>
-          </a:bodyPr>
-          <a:lstStyle/>
-          <a:p>
-            <a:pPr algn="ctr"/>
-            <a:r>
-              <a:rPr lang="ko-KR" altLang="en-US" sz="900" b="1" dirty="0">
-                <a:solidFill>
-                  <a:schemeClr val="tx2">
-                    <a:lumMod val="50000"/>
-                  </a:schemeClr>
-                </a:solidFill>
-                <a:latin typeface="KoPub돋움체 Light" panose="02020603020101020101" pitchFamily="18" charset="-127"/>
-                <a:ea typeface="KoPub돋움체 Light" panose="02020603020101020101" pitchFamily="18" charset="-127"/>
-              </a:rPr>
-              <a:t>업무의 기준  </a:t>
-            </a:r>
-            <a:r>
-              <a:rPr lang="en-US" altLang="ko-KR" sz="900" b="1" dirty="0">
-                <a:solidFill>
-                  <a:schemeClr val="tx2">
-                    <a:lumMod val="50000"/>
-                  </a:schemeClr>
-                </a:solidFill>
-                <a:latin typeface="KoPub돋움체 Light" panose="02020603020101020101" pitchFamily="18" charset="-127"/>
-                <a:ea typeface="KoPub돋움체 Light" panose="02020603020101020101" pitchFamily="18" charset="-127"/>
-              </a:rPr>
-              <a:t>(Standards)</a:t>
-            </a:r>
-            <a:endParaRPr lang="en-US" altLang="ko-KR" sz="800" dirty="0">
-              <a:solidFill>
-                <a:schemeClr val="tx2">
-                  <a:lumMod val="50000"/>
-                </a:schemeClr>
-              </a:solidFill>
-              <a:latin typeface="KoPub돋움체 Light" panose="02020603020101020101" pitchFamily="18" charset="-127"/>
-              <a:ea typeface="KoPub돋움체 Light" panose="02020603020101020101" pitchFamily="18" charset="-127"/>
-            </a:endParaRPr>
-          </a:p>
-        </p:txBody>
-      </p:sp>
-      <p:sp>
-        <p:nvSpPr>
-          <p:cNvPr id="9" name="TextBox 8">
-            <a:extLst>
-              <a:ext uri="{FF2B5EF4-FFF2-40B4-BE49-F238E27FC236}">
-                <a16:creationId xmlns:a16="http://schemas.microsoft.com/office/drawing/2014/main" id="{96577137-5AAD-FF43-5955-A6188CF122CB}"/>
-              </a:ext>
-            </a:extLst>
-          </p:cNvPr>
-          <p:cNvSpPr txBox="1"/>
-          <p:nvPr/>
-        </p:nvSpPr>
-        <p:spPr>
-          <a:xfrm>
-            <a:off x="206889" y="1305551"/>
-            <a:ext cx="1322798" cy="230832"/>
-          </a:xfrm>
-          <a:prstGeom prst="rect">
-            <a:avLst/>
-          </a:prstGeom>
-          <a:noFill/>
-        </p:spPr>
-        <p:txBody>
-          <a:bodyPr wrap="none">
-            <a:spAutoFit/>
-          </a:bodyPr>
-          <a:lstStyle/>
-          <a:p>
-            <a:pPr algn="ctr"/>
-            <a:r>
-              <a:rPr lang="ko-KR" altLang="en-US" sz="900" b="1" dirty="0">
-                <a:solidFill>
-                  <a:schemeClr val="tx2">
-                    <a:lumMod val="50000"/>
-                  </a:schemeClr>
-                </a:solidFill>
-                <a:latin typeface="KoPub돋움체 Light" panose="02020603020101020101" pitchFamily="18" charset="-127"/>
-                <a:ea typeface="KoPub돋움체 Light" panose="02020603020101020101" pitchFamily="18" charset="-127"/>
-              </a:rPr>
-              <a:t>배움의 창구 </a:t>
-            </a:r>
-            <a:r>
-              <a:rPr lang="en-US" altLang="ko-KR" sz="900" b="1" dirty="0">
-                <a:solidFill>
-                  <a:schemeClr val="tx2">
-                    <a:lumMod val="50000"/>
-                  </a:schemeClr>
-                </a:solidFill>
-                <a:latin typeface="KoPub돋움체 Light" panose="02020603020101020101" pitchFamily="18" charset="-127"/>
-                <a:ea typeface="KoPub돋움체 Light" panose="02020603020101020101" pitchFamily="18" charset="-127"/>
-              </a:rPr>
-              <a:t>(Education)</a:t>
-            </a:r>
-            <a:endParaRPr lang="ko-KR" altLang="en-US" sz="800" dirty="0">
-              <a:solidFill>
-                <a:schemeClr val="tx2">
-                  <a:lumMod val="50000"/>
-                </a:schemeClr>
-              </a:solidFill>
-              <a:latin typeface="KoPub돋움체 Light" panose="02020603020101020101" pitchFamily="18" charset="-127"/>
-              <a:ea typeface="KoPub돋움체 Light" panose="02020603020101020101" pitchFamily="18" charset="-127"/>
-            </a:endParaRPr>
-          </a:p>
-        </p:txBody>
-      </p:sp>
-      <p:sp>
-        <p:nvSpPr>
-          <p:cNvPr id="10" name="TextBox 9">
-            <a:extLst>
-              <a:ext uri="{FF2B5EF4-FFF2-40B4-BE49-F238E27FC236}">
-                <a16:creationId xmlns:a16="http://schemas.microsoft.com/office/drawing/2014/main" id="{E44756B4-A4F7-10F9-54F6-FD186916090A}"/>
-              </a:ext>
-            </a:extLst>
-          </p:cNvPr>
-          <p:cNvSpPr txBox="1"/>
-          <p:nvPr/>
-        </p:nvSpPr>
-        <p:spPr>
-          <a:xfrm>
-            <a:off x="1530948" y="1305551"/>
-            <a:ext cx="1399743" cy="230832"/>
-          </a:xfrm>
-          <a:prstGeom prst="rect">
-            <a:avLst/>
-          </a:prstGeom>
-          <a:noFill/>
-        </p:spPr>
-        <p:txBody>
-          <a:bodyPr wrap="none">
-            <a:spAutoFit/>
-          </a:bodyPr>
-          <a:lstStyle/>
-          <a:p>
-            <a:pPr algn="ctr"/>
-            <a:r>
-              <a:rPr lang="ko-KR" altLang="en-US" sz="900" b="1" dirty="0">
-                <a:solidFill>
-                  <a:schemeClr val="tx2">
-                    <a:lumMod val="50000"/>
-                  </a:schemeClr>
-                </a:solidFill>
-                <a:latin typeface="KoPub돋움체 Light" panose="02020603020101020101" pitchFamily="18" charset="-127"/>
-                <a:ea typeface="KoPub돋움체 Light" panose="02020603020101020101" pitchFamily="18" charset="-127"/>
-              </a:rPr>
-              <a:t>투명한 지표  </a:t>
-            </a:r>
-            <a:r>
-              <a:rPr lang="en-US" altLang="ko-KR" sz="900" b="1" dirty="0">
-                <a:solidFill>
-                  <a:schemeClr val="tx2">
-                    <a:lumMod val="50000"/>
-                  </a:schemeClr>
-                </a:solidFill>
-                <a:latin typeface="KoPub돋움체 Light" panose="02020603020101020101" pitchFamily="18" charset="-127"/>
-                <a:ea typeface="KoPub돋움체 Light" panose="02020603020101020101" pitchFamily="18" charset="-127"/>
-              </a:rPr>
-              <a:t>(Dashboard)</a:t>
-            </a:r>
-            <a:endParaRPr lang="ko-KR" altLang="en-US" sz="800" dirty="0">
-              <a:solidFill>
-                <a:schemeClr val="tx2">
-                  <a:lumMod val="50000"/>
-                </a:schemeClr>
-              </a:solidFill>
-              <a:latin typeface="KoPub돋움체 Light" panose="02020603020101020101" pitchFamily="18" charset="-127"/>
-              <a:ea typeface="KoPub돋움체 Light" panose="02020603020101020101" pitchFamily="18" charset="-127"/>
-            </a:endParaRPr>
           </a:p>
         </p:txBody>
       </p:sp>
@@ -4847,8 +4185,8 @@
         </p:nvGrpSpPr>
         <p:grpSpPr>
           <a:xfrm>
-            <a:off x="173236" y="377028"/>
-            <a:ext cx="538336" cy="538336"/>
+            <a:off x="589938" y="838920"/>
+            <a:ext cx="634026" cy="568432"/>
             <a:chOff x="777945" y="-736888"/>
             <a:chExt cx="663508" cy="663508"/>
           </a:xfrm>
@@ -5112,10 +4450,564 @@
           </p:txBody>
         </p:sp>
       </p:grpSp>
+      <p:grpSp>
+        <p:nvGrpSpPr>
+          <p:cNvPr id="18" name="그룹 17">
+            <a:extLst>
+              <a:ext uri="{FF2B5EF4-FFF2-40B4-BE49-F238E27FC236}">
+                <a16:creationId xmlns:a16="http://schemas.microsoft.com/office/drawing/2014/main" id="{360DDF2E-2289-473B-B5F6-77027118C993}"/>
+              </a:ext>
+            </a:extLst>
+          </p:cNvPr>
+          <p:cNvGrpSpPr/>
+          <p:nvPr/>
+        </p:nvGrpSpPr>
+        <p:grpSpPr>
+          <a:xfrm>
+            <a:off x="113069" y="274768"/>
+            <a:ext cx="1746464" cy="425416"/>
+            <a:chOff x="614240" y="226472"/>
+            <a:chExt cx="1746464" cy="425416"/>
+          </a:xfrm>
+        </p:grpSpPr>
+        <p:sp>
+          <p:nvSpPr>
+            <p:cNvPr id="4" name="TextBox 3">
+              <a:extLst>
+                <a:ext uri="{FF2B5EF4-FFF2-40B4-BE49-F238E27FC236}">
+                  <a16:creationId xmlns:a16="http://schemas.microsoft.com/office/drawing/2014/main" id="{1F0C02A7-D766-DD14-548E-2AE7955534F4}"/>
+                </a:ext>
+              </a:extLst>
+            </p:cNvPr>
+            <p:cNvSpPr txBox="1"/>
+            <p:nvPr/>
+          </p:nvSpPr>
+          <p:spPr>
+            <a:xfrm>
+              <a:off x="685077" y="226472"/>
+              <a:ext cx="1604991" cy="307777"/>
+            </a:xfrm>
+            <a:prstGeom prst="rect">
+              <a:avLst/>
+            </a:prstGeom>
+            <a:noFill/>
+          </p:spPr>
+          <p:txBody>
+            <a:bodyPr wrap="none">
+              <a:spAutoFit/>
+            </a:bodyPr>
+            <a:lstStyle/>
+            <a:p>
+              <a:pPr algn="ctr"/>
+              <a:r>
+                <a:rPr lang="ko-KR" altLang="en-US" sz="1400" dirty="0" err="1">
+                  <a:solidFill>
+                    <a:srgbClr val="00B0F0"/>
+                  </a:solidFill>
+                  <a:latin typeface="KoPub돋움체 Bold" panose="00000800000000000000" pitchFamily="2" charset="-127"/>
+                  <a:ea typeface="KoPub돋움체 Bold" panose="00000800000000000000" pitchFamily="2" charset="-127"/>
+                </a:rPr>
+                <a:t>우리가치</a:t>
+              </a:r>
+              <a:r>
+                <a:rPr lang="ko-KR" altLang="en-US" sz="1400" dirty="0">
+                  <a:solidFill>
+                    <a:schemeClr val="accent1">
+                      <a:lumMod val="50000"/>
+                    </a:schemeClr>
+                  </a:solidFill>
+                  <a:latin typeface="KoPub돋움체 Bold" panose="02020603020101020101" pitchFamily="18" charset="-127"/>
+                  <a:ea typeface="KoPub돋움체 Bold" panose="02020603020101020101" pitchFamily="18" charset="-127"/>
+                </a:rPr>
+                <a:t> </a:t>
+              </a:r>
+              <a:r>
+                <a:rPr lang="en-US" altLang="ko-KR" sz="1400" dirty="0" err="1">
+                  <a:solidFill>
+                    <a:schemeClr val="accent1">
+                      <a:lumMod val="50000"/>
+                    </a:schemeClr>
+                  </a:solidFill>
+                  <a:latin typeface="Franklin Gothic Heavy" panose="020B0903020102020204" pitchFamily="34" charset="0"/>
+                  <a:ea typeface="KoPub돋움체 Bold" panose="02020603020101020101" pitchFamily="18" charset="-127"/>
+                </a:rPr>
+                <a:t>WeValue</a:t>
+              </a:r>
+              <a:endParaRPr lang="en-US" altLang="ko-KR" sz="1400" dirty="0">
+                <a:solidFill>
+                  <a:schemeClr val="accent1">
+                    <a:lumMod val="50000"/>
+                  </a:schemeClr>
+                </a:solidFill>
+                <a:latin typeface="Franklin Gothic Heavy" panose="020B0903020102020204" pitchFamily="34" charset="0"/>
+                <a:ea typeface="KoPub돋움체 Bold" panose="02020603020101020101" pitchFamily="18" charset="-127"/>
+              </a:endParaRPr>
+            </a:p>
+          </p:txBody>
+        </p:sp>
+        <p:sp>
+          <p:nvSpPr>
+            <p:cNvPr id="6" name="TextBox 5">
+              <a:extLst>
+                <a:ext uri="{FF2B5EF4-FFF2-40B4-BE49-F238E27FC236}">
+                  <a16:creationId xmlns:a16="http://schemas.microsoft.com/office/drawing/2014/main" id="{25F3C248-44C4-9D7A-C464-62D68C9890DC}"/>
+                </a:ext>
+              </a:extLst>
+            </p:cNvPr>
+            <p:cNvSpPr txBox="1"/>
+            <p:nvPr/>
+          </p:nvSpPr>
+          <p:spPr>
+            <a:xfrm>
+              <a:off x="622591" y="451833"/>
+              <a:ext cx="1729962" cy="200055"/>
+            </a:xfrm>
+            <a:prstGeom prst="rect">
+              <a:avLst/>
+            </a:prstGeom>
+            <a:noFill/>
+          </p:spPr>
+          <p:txBody>
+            <a:bodyPr wrap="none">
+              <a:spAutoFit/>
+            </a:bodyPr>
+            <a:lstStyle/>
+            <a:p>
+              <a:pPr algn="ctr"/>
+              <a:r>
+                <a:rPr lang="en-US" altLang="ko-KR" sz="700" b="1" dirty="0">
+                  <a:latin typeface="KoPub돋움체 Bold" panose="00000800000000000000" pitchFamily="2" charset="-127"/>
+                  <a:ea typeface="KoPub돋움체 Bold" panose="00000800000000000000" pitchFamily="2" charset="-127"/>
+                </a:rPr>
+                <a:t>[</a:t>
+              </a:r>
+              <a:r>
+                <a:rPr lang="ko-KR" altLang="en-US" sz="700" b="1" dirty="0">
+                  <a:latin typeface="KoPub돋움체 Bold" panose="00000800000000000000" pitchFamily="2" charset="-127"/>
+                  <a:ea typeface="KoPub돋움체 Bold" panose="00000800000000000000" pitchFamily="2" charset="-127"/>
+                </a:rPr>
+                <a:t>우리가 가치를 만드는 공간</a:t>
+              </a:r>
+              <a:r>
+                <a:rPr lang="en-US" altLang="ko-KR" sz="700" b="1" dirty="0">
+                  <a:latin typeface="KoPub돋움체 Bold" panose="00000800000000000000" pitchFamily="2" charset="-127"/>
+                  <a:ea typeface="KoPub돋움체 Bold" panose="00000800000000000000" pitchFamily="2" charset="-127"/>
+                </a:rPr>
+                <a:t>, </a:t>
+              </a:r>
+              <a:r>
+                <a:rPr lang="ko-KR" altLang="en-US" sz="700" b="1" dirty="0" err="1">
+                  <a:latin typeface="KoPub돋움체 Bold" panose="00000800000000000000" pitchFamily="2" charset="-127"/>
+                  <a:ea typeface="KoPub돋움체 Bold" panose="00000800000000000000" pitchFamily="2" charset="-127"/>
+                </a:rPr>
+                <a:t>우리가치</a:t>
+              </a:r>
+              <a:r>
+                <a:rPr lang="ko-KR" altLang="en-US" sz="700" b="1" dirty="0">
+                  <a:latin typeface="KoPub돋움체 Bold" panose="00000800000000000000" pitchFamily="2" charset="-127"/>
+                  <a:ea typeface="KoPub돋움체 Bold" panose="00000800000000000000" pitchFamily="2" charset="-127"/>
+                </a:rPr>
+                <a:t> 허브</a:t>
+              </a:r>
+              <a:r>
+                <a:rPr lang="en-US" altLang="ko-KR" sz="700" b="1" dirty="0">
+                  <a:latin typeface="KoPub돋움체 Bold" panose="00000800000000000000" pitchFamily="2" charset="-127"/>
+                  <a:ea typeface="KoPub돋움체 Bold" panose="00000800000000000000" pitchFamily="2" charset="-127"/>
+                </a:rPr>
+                <a:t>]</a:t>
+              </a:r>
+            </a:p>
+          </p:txBody>
+        </p:sp>
+        <p:pic>
+          <p:nvPicPr>
+            <p:cNvPr id="10" name="그림 9">
+              <a:extLst>
+                <a:ext uri="{FF2B5EF4-FFF2-40B4-BE49-F238E27FC236}">
+                  <a16:creationId xmlns:a16="http://schemas.microsoft.com/office/drawing/2014/main" id="{EB1E9046-9340-4D3D-AA23-F89851FB0C3F}"/>
+                </a:ext>
+              </a:extLst>
+            </p:cNvPr>
+            <p:cNvPicPr>
+              <a:picLocks noChangeAspect="1"/>
+            </p:cNvPicPr>
+            <p:nvPr/>
+          </p:nvPicPr>
+          <p:blipFill>
+            <a:blip r:embed="rId3"/>
+            <a:stretch>
+              <a:fillRect/>
+            </a:stretch>
+          </p:blipFill>
+          <p:spPr>
+            <a:xfrm>
+              <a:off x="614240" y="271322"/>
+              <a:ext cx="147416" cy="128728"/>
+            </a:xfrm>
+            <a:prstGeom prst="rect">
+              <a:avLst/>
+            </a:prstGeom>
+          </p:spPr>
+        </p:pic>
+        <p:pic>
+          <p:nvPicPr>
+            <p:cNvPr id="29" name="그림 28">
+              <a:extLst>
+                <a:ext uri="{FF2B5EF4-FFF2-40B4-BE49-F238E27FC236}">
+                  <a16:creationId xmlns:a16="http://schemas.microsoft.com/office/drawing/2014/main" id="{799E618A-B635-413C-90D6-9BBB5F48E428}"/>
+                </a:ext>
+              </a:extLst>
+            </p:cNvPr>
+            <p:cNvPicPr>
+              <a:picLocks noChangeAspect="1"/>
+            </p:cNvPicPr>
+            <p:nvPr/>
+          </p:nvPicPr>
+          <p:blipFill>
+            <a:blip r:embed="rId3"/>
+            <a:stretch>
+              <a:fillRect/>
+            </a:stretch>
+          </p:blipFill>
+          <p:spPr>
+            <a:xfrm rot="10800000">
+              <a:off x="2181315" y="257361"/>
+              <a:ext cx="179389" cy="156650"/>
+            </a:xfrm>
+            <a:prstGeom prst="rect">
+              <a:avLst/>
+            </a:prstGeom>
+          </p:spPr>
+        </p:pic>
+        <p:pic>
+          <p:nvPicPr>
+            <p:cNvPr id="30" name="그림 29">
+              <a:extLst>
+                <a:ext uri="{FF2B5EF4-FFF2-40B4-BE49-F238E27FC236}">
+                  <a16:creationId xmlns:a16="http://schemas.microsoft.com/office/drawing/2014/main" id="{FCD9B137-9F07-4052-B76C-36D6AED25D86}"/>
+                </a:ext>
+              </a:extLst>
+            </p:cNvPr>
+            <p:cNvPicPr>
+              <a:picLocks noChangeAspect="1"/>
+            </p:cNvPicPr>
+            <p:nvPr/>
+          </p:nvPicPr>
+          <p:blipFill>
+            <a:blip r:embed="rId3"/>
+            <a:stretch>
+              <a:fillRect/>
+            </a:stretch>
+          </p:blipFill>
+          <p:spPr>
+            <a:xfrm rot="10800000">
+              <a:off x="2197302" y="276730"/>
+              <a:ext cx="147414" cy="128728"/>
+            </a:xfrm>
+            <a:prstGeom prst="rect">
+              <a:avLst/>
+            </a:prstGeom>
+          </p:spPr>
+        </p:pic>
+      </p:grpSp>
+      <p:grpSp>
+        <p:nvGrpSpPr>
+          <p:cNvPr id="12" name="그룹 11">
+            <a:extLst>
+              <a:ext uri="{FF2B5EF4-FFF2-40B4-BE49-F238E27FC236}">
+                <a16:creationId xmlns:a16="http://schemas.microsoft.com/office/drawing/2014/main" id="{6B2D700B-07E0-4E28-A7D2-0F4C62846EE3}"/>
+              </a:ext>
+            </a:extLst>
+          </p:cNvPr>
+          <p:cNvGrpSpPr/>
+          <p:nvPr/>
+        </p:nvGrpSpPr>
+        <p:grpSpPr>
+          <a:xfrm>
+            <a:off x="1488355" y="772187"/>
+            <a:ext cx="1564409" cy="707886"/>
+            <a:chOff x="796295" y="778765"/>
+            <a:chExt cx="1564409" cy="707886"/>
+          </a:xfrm>
+        </p:grpSpPr>
+        <p:sp>
+          <p:nvSpPr>
+            <p:cNvPr id="26" name="TextBox 25">
+              <a:extLst>
+                <a:ext uri="{FF2B5EF4-FFF2-40B4-BE49-F238E27FC236}">
+                  <a16:creationId xmlns:a16="http://schemas.microsoft.com/office/drawing/2014/main" id="{61921C24-9018-417C-966E-E56980F41166}"/>
+                </a:ext>
+              </a:extLst>
+            </p:cNvPr>
+            <p:cNvSpPr txBox="1"/>
+            <p:nvPr/>
+          </p:nvSpPr>
+          <p:spPr>
+            <a:xfrm>
+              <a:off x="1422627" y="778765"/>
+              <a:ext cx="938077" cy="707886"/>
+            </a:xfrm>
+            <a:prstGeom prst="rect">
+              <a:avLst/>
+            </a:prstGeom>
+            <a:noFill/>
+          </p:spPr>
+          <p:txBody>
+            <a:bodyPr wrap="none" rtlCol="0">
+              <a:spAutoFit/>
+            </a:bodyPr>
+            <a:lstStyle/>
+            <a:p>
+              <a:r>
+                <a:rPr lang="en-US" altLang="ko-KR" sz="800" dirty="0">
+                  <a:latin typeface="KoPub돋움체 Light" panose="00000300000000000000" pitchFamily="2" charset="-127"/>
+                  <a:ea typeface="KoPub돋움체 Light" panose="00000300000000000000" pitchFamily="2" charset="-127"/>
+                </a:rPr>
+                <a:t>"</a:t>
+              </a:r>
+              <a:r>
+                <a:rPr lang="ko-KR" altLang="en-US" sz="800" dirty="0">
+                  <a:latin typeface="KoPub돋움체 Light" panose="00000300000000000000" pitchFamily="2" charset="-127"/>
+                  <a:ea typeface="KoPub돋움체 Light" panose="00000300000000000000" pitchFamily="2" charset="-127"/>
+                </a:rPr>
+                <a:t>함께하는 즐거움</a:t>
+              </a:r>
+              <a:r>
+                <a:rPr lang="en-US" altLang="ko-KR" sz="800" dirty="0">
+                  <a:latin typeface="KoPub돋움체 Light" panose="00000300000000000000" pitchFamily="2" charset="-127"/>
+                  <a:ea typeface="KoPub돋움체 Light" panose="00000300000000000000" pitchFamily="2" charset="-127"/>
+                </a:rPr>
+                <a:t>“</a:t>
+              </a:r>
+            </a:p>
+            <a:p>
+              <a:r>
+                <a:rPr lang="en-US" altLang="ko-KR" sz="800" dirty="0">
+                  <a:latin typeface="KoPub돋움체 Light" panose="00000300000000000000" pitchFamily="2" charset="-127"/>
+                  <a:ea typeface="KoPub돋움체 Light" panose="00000300000000000000" pitchFamily="2" charset="-127"/>
+                </a:rPr>
+                <a:t>"</a:t>
+              </a:r>
+              <a:r>
+                <a:rPr lang="ko-KR" altLang="en-US" sz="800" dirty="0">
+                  <a:latin typeface="KoPub돋움체 Light" panose="00000300000000000000" pitchFamily="2" charset="-127"/>
+                  <a:ea typeface="KoPub돋움체 Light" panose="00000300000000000000" pitchFamily="2" charset="-127"/>
+                </a:rPr>
+                <a:t>명확한 약속</a:t>
+              </a:r>
+              <a:r>
+                <a:rPr lang="en-US" altLang="ko-KR" sz="800" dirty="0">
+                  <a:latin typeface="KoPub돋움체 Light" panose="00000300000000000000" pitchFamily="2" charset="-127"/>
+                  <a:ea typeface="KoPub돋움체 Light" panose="00000300000000000000" pitchFamily="2" charset="-127"/>
+                </a:rPr>
+                <a:t>"</a:t>
+              </a:r>
+              <a:endParaRPr lang="ko-KR" altLang="en-US" sz="800" dirty="0">
+                <a:latin typeface="KoPub돋움체 Light" panose="00000300000000000000" pitchFamily="2" charset="-127"/>
+                <a:ea typeface="KoPub돋움체 Light" panose="00000300000000000000" pitchFamily="2" charset="-127"/>
+              </a:endParaRPr>
+            </a:p>
+            <a:p>
+              <a:r>
+                <a:rPr lang="en-US" altLang="ko-KR" sz="800" dirty="0">
+                  <a:latin typeface="KoPub돋움체 Light" panose="00000300000000000000" pitchFamily="2" charset="-127"/>
+                  <a:ea typeface="KoPub돋움체 Light" panose="00000300000000000000" pitchFamily="2" charset="-127"/>
+                </a:rPr>
+                <a:t>"</a:t>
+              </a:r>
+              <a:r>
+                <a:rPr lang="ko-KR" altLang="en-US" sz="800" dirty="0">
+                  <a:latin typeface="KoPub돋움체 Light" panose="00000300000000000000" pitchFamily="2" charset="-127"/>
+                  <a:ea typeface="KoPub돋움체 Light" panose="00000300000000000000" pitchFamily="2" charset="-127"/>
+                </a:rPr>
+                <a:t>한눈에 보는 실무</a:t>
+              </a:r>
+              <a:r>
+                <a:rPr lang="en-US" altLang="ko-KR" sz="800" dirty="0">
+                  <a:latin typeface="KoPub돋움체 Light" panose="00000300000000000000" pitchFamily="2" charset="-127"/>
+                  <a:ea typeface="KoPub돋움체 Light" panose="00000300000000000000" pitchFamily="2" charset="-127"/>
+                </a:rPr>
+                <a:t>"</a:t>
+              </a:r>
+              <a:endParaRPr lang="ko-KR" altLang="en-US" sz="800" dirty="0">
+                <a:latin typeface="KoPub돋움체 Light" panose="00000300000000000000" pitchFamily="2" charset="-127"/>
+                <a:ea typeface="KoPub돋움체 Light" panose="00000300000000000000" pitchFamily="2" charset="-127"/>
+              </a:endParaRPr>
+            </a:p>
+            <a:p>
+              <a:r>
+                <a:rPr lang="en-US" altLang="ko-KR" sz="800" dirty="0">
+                  <a:latin typeface="KoPub돋움체 Light" panose="00000300000000000000" pitchFamily="2" charset="-127"/>
+                  <a:ea typeface="KoPub돋움체 Light" panose="00000300000000000000" pitchFamily="2" charset="-127"/>
+                </a:rPr>
+                <a:t>"</a:t>
+              </a:r>
+              <a:r>
+                <a:rPr lang="ko-KR" altLang="en-US" sz="800" dirty="0">
+                  <a:latin typeface="KoPub돋움체 Light" panose="00000300000000000000" pitchFamily="2" charset="-127"/>
+                  <a:ea typeface="KoPub돋움체 Light" panose="00000300000000000000" pitchFamily="2" charset="-127"/>
+                </a:rPr>
+                <a:t>현장 밀착형 지원</a:t>
+              </a:r>
+              <a:r>
+                <a:rPr lang="en-US" altLang="ko-KR" sz="800" dirty="0">
+                  <a:latin typeface="KoPub돋움체 Light" panose="00000300000000000000" pitchFamily="2" charset="-127"/>
+                  <a:ea typeface="KoPub돋움체 Light" panose="00000300000000000000" pitchFamily="2" charset="-127"/>
+                </a:rPr>
+                <a:t>"</a:t>
+              </a:r>
+              <a:endParaRPr lang="ko-KR" altLang="en-US" sz="800" dirty="0">
+                <a:latin typeface="KoPub돋움체 Light" panose="00000300000000000000" pitchFamily="2" charset="-127"/>
+                <a:ea typeface="KoPub돋움체 Light" panose="00000300000000000000" pitchFamily="2" charset="-127"/>
+              </a:endParaRPr>
+            </a:p>
+            <a:p>
+              <a:r>
+                <a:rPr lang="en-US" altLang="ko-KR" sz="800" dirty="0">
+                  <a:latin typeface="KoPub돋움체 Light" panose="00000300000000000000" pitchFamily="2" charset="-127"/>
+                  <a:ea typeface="KoPub돋움체 Light" panose="00000300000000000000" pitchFamily="2" charset="-127"/>
+                </a:rPr>
+                <a:t>"</a:t>
+              </a:r>
+              <a:r>
+                <a:rPr lang="ko-KR" altLang="en-US" sz="800" dirty="0">
+                  <a:latin typeface="KoPub돋움체 Light" panose="00000300000000000000" pitchFamily="2" charset="-127"/>
+                  <a:ea typeface="KoPub돋움체 Light" panose="00000300000000000000" pitchFamily="2" charset="-127"/>
+                </a:rPr>
+                <a:t>변화의 체감</a:t>
+              </a:r>
+              <a:r>
+                <a:rPr lang="en-US" altLang="ko-KR" sz="800" dirty="0">
+                  <a:latin typeface="KoPub돋움체 Light" panose="00000300000000000000" pitchFamily="2" charset="-127"/>
+                  <a:ea typeface="KoPub돋움체 Light" panose="00000300000000000000" pitchFamily="2" charset="-127"/>
+                </a:rPr>
+                <a:t>"</a:t>
+              </a:r>
+              <a:endParaRPr lang="ko-KR" altLang="en-US" sz="800" dirty="0">
+                <a:latin typeface="KoPub돋움체 Light" panose="00000300000000000000" pitchFamily="2" charset="-127"/>
+                <a:ea typeface="KoPub돋움체 Light" panose="00000300000000000000" pitchFamily="2" charset="-127"/>
+              </a:endParaRPr>
+            </a:p>
+          </p:txBody>
+        </p:sp>
+        <p:sp>
+          <p:nvSpPr>
+            <p:cNvPr id="31" name="TextBox 30">
+              <a:extLst>
+                <a:ext uri="{FF2B5EF4-FFF2-40B4-BE49-F238E27FC236}">
+                  <a16:creationId xmlns:a16="http://schemas.microsoft.com/office/drawing/2014/main" id="{62EAB35A-296C-468C-BCA0-D585048BF4E9}"/>
+                </a:ext>
+              </a:extLst>
+            </p:cNvPr>
+            <p:cNvSpPr txBox="1"/>
+            <p:nvPr/>
+          </p:nvSpPr>
+          <p:spPr>
+            <a:xfrm>
+              <a:off x="796295" y="778765"/>
+              <a:ext cx="753732" cy="707886"/>
+            </a:xfrm>
+            <a:prstGeom prst="rect">
+              <a:avLst/>
+            </a:prstGeom>
+            <a:noFill/>
+          </p:spPr>
+          <p:txBody>
+            <a:bodyPr wrap="none" rtlCol="0">
+              <a:spAutoFit/>
+            </a:bodyPr>
+            <a:lstStyle/>
+            <a:p>
+              <a:pPr marL="88900" indent="-88900">
+                <a:buClr>
+                  <a:srgbClr val="00B0F0"/>
+                </a:buClr>
+                <a:buFont typeface="Arial" panose="020B0604020202020204" pitchFamily="34" charset="0"/>
+                <a:buChar char="•"/>
+              </a:pPr>
+              <a:r>
+                <a:rPr lang="ko-KR" altLang="en-US" sz="800" b="1" dirty="0">
+                  <a:latin typeface="KoPub돋움체 Bold" panose="00000800000000000000" pitchFamily="2" charset="-127"/>
+                  <a:ea typeface="KoPub돋움체 Bold" panose="00000800000000000000" pitchFamily="2" charset="-127"/>
+                </a:rPr>
+                <a:t>소통의 광장</a:t>
+              </a:r>
+              <a:endParaRPr lang="en-US" altLang="ko-KR" sz="800" b="1" dirty="0">
+                <a:latin typeface="KoPub돋움체 Bold" panose="00000800000000000000" pitchFamily="2" charset="-127"/>
+                <a:ea typeface="KoPub돋움체 Bold" panose="00000800000000000000" pitchFamily="2" charset="-127"/>
+              </a:endParaRPr>
+            </a:p>
+            <a:p>
+              <a:pPr marL="88900" indent="-88900">
+                <a:buClr>
+                  <a:srgbClr val="00B0F0"/>
+                </a:buClr>
+                <a:buFont typeface="Arial" panose="020B0604020202020204" pitchFamily="34" charset="0"/>
+                <a:buChar char="•"/>
+              </a:pPr>
+              <a:r>
+                <a:rPr lang="ko-KR" altLang="en-US" sz="800" b="1" dirty="0">
+                  <a:latin typeface="KoPub돋움체 Bold" panose="00000800000000000000" pitchFamily="2" charset="-127"/>
+                  <a:ea typeface="KoPub돋움체 Bold" panose="00000800000000000000" pitchFamily="2" charset="-127"/>
+                </a:rPr>
+                <a:t>업무 기준</a:t>
+              </a:r>
+            </a:p>
+            <a:p>
+              <a:pPr marL="88900" indent="-88900">
+                <a:buClr>
+                  <a:srgbClr val="00B0F0"/>
+                </a:buClr>
+                <a:buFont typeface="Arial" panose="020B0604020202020204" pitchFamily="34" charset="0"/>
+                <a:buChar char="•"/>
+              </a:pPr>
+              <a:r>
+                <a:rPr lang="ko-KR" altLang="en-US" sz="800" b="1" dirty="0">
+                  <a:latin typeface="KoPub돋움체 Bold" panose="00000800000000000000" pitchFamily="2" charset="-127"/>
+                  <a:ea typeface="KoPub돋움체 Bold" panose="00000800000000000000" pitchFamily="2" charset="-127"/>
+                </a:rPr>
+                <a:t>교육자료</a:t>
+              </a:r>
+            </a:p>
+            <a:p>
+              <a:pPr marL="88900" indent="-88900">
+                <a:buClr>
+                  <a:srgbClr val="00B0F0"/>
+                </a:buClr>
+                <a:buFont typeface="Arial" panose="020B0604020202020204" pitchFamily="34" charset="0"/>
+                <a:buChar char="•"/>
+              </a:pPr>
+              <a:r>
+                <a:rPr lang="ko-KR" altLang="en-US" sz="800" b="1" dirty="0">
+                  <a:latin typeface="KoPub돋움체 Bold" panose="00000800000000000000" pitchFamily="2" charset="-127"/>
+                  <a:ea typeface="KoPub돋움체 Bold" panose="00000800000000000000" pitchFamily="2" charset="-127"/>
+                </a:rPr>
+                <a:t>요청</a:t>
+              </a:r>
+            </a:p>
+            <a:p>
+              <a:pPr marL="88900" indent="-88900">
+                <a:buClr>
+                  <a:srgbClr val="00B0F0"/>
+                </a:buClr>
+                <a:buFont typeface="Arial" panose="020B0604020202020204" pitchFamily="34" charset="0"/>
+                <a:buChar char="•"/>
+              </a:pPr>
+              <a:r>
+                <a:rPr lang="ko-KR" altLang="en-US" sz="800" b="1" dirty="0">
+                  <a:latin typeface="KoPub돋움체 Bold" panose="00000800000000000000" pitchFamily="2" charset="-127"/>
+                  <a:ea typeface="KoPub돋움체 Bold" panose="00000800000000000000" pitchFamily="2" charset="-127"/>
+                </a:rPr>
+                <a:t>지표</a:t>
+              </a:r>
+            </a:p>
+          </p:txBody>
+        </p:sp>
+      </p:grpSp>
     </p:spTree>
     <p:extLst>
       <p:ext uri="{BB962C8B-B14F-4D97-AF65-F5344CB8AC3E}">
-        <p14:creationId xmlns:p14="http://schemas.microsoft.com/office/powerpoint/2010/main" val="1275630205"/>
+        <p14:creationId xmlns:p14="http://schemas.microsoft.com/office/powerpoint/2010/main" val="1956204071"/>
       </p:ext>
     </p:extLst>
   </p:cSld>
@@ -5130,13 +5022,7 @@
   <p:cSld>
     <p:spTree>
       <p:nvGrpSpPr>
-        <p:cNvPr id="1" name="">
-          <a:extLst>
-            <a:ext uri="{FF2B5EF4-FFF2-40B4-BE49-F238E27FC236}">
-              <a16:creationId xmlns:a16="http://schemas.microsoft.com/office/drawing/2014/main" id="{D4AAA997-8A33-0D89-CF30-952F52E61BE3}"/>
-            </a:ext>
-          </a:extLst>
-        </p:cNvPr>
+        <p:cNvPr id="1" name=""/>
         <p:cNvGrpSpPr/>
         <p:nvPr/>
       </p:nvGrpSpPr>
@@ -5150,230 +5036,10 @@
       </p:grpSpPr>
       <p:sp>
         <p:nvSpPr>
-          <p:cNvPr id="28" name="사각형: 둥근 모서리 27">
-            <a:extLst>
-              <a:ext uri="{FF2B5EF4-FFF2-40B4-BE49-F238E27FC236}">
-                <a16:creationId xmlns:a16="http://schemas.microsoft.com/office/drawing/2014/main" id="{C6063252-95E6-02C8-E68B-5A5406130CAC}"/>
-              </a:ext>
-            </a:extLst>
-          </p:cNvPr>
-          <p:cNvSpPr/>
-          <p:nvPr/>
-        </p:nvSpPr>
-        <p:spPr>
-          <a:xfrm>
-            <a:off x="1598636" y="1043683"/>
-            <a:ext cx="1264364" cy="230832"/>
-          </a:xfrm>
-          <a:prstGeom prst="roundRect">
-            <a:avLst/>
-          </a:prstGeom>
-          <a:solidFill>
-            <a:schemeClr val="bg2"/>
-          </a:solidFill>
-          <a:ln>
-            <a:noFill/>
-          </a:ln>
-        </p:spPr>
-        <p:style>
-          <a:lnRef idx="2">
-            <a:schemeClr val="accent3">
-              <a:shade val="15000"/>
-            </a:schemeClr>
-          </a:lnRef>
-          <a:fillRef idx="1">
-            <a:schemeClr val="accent3"/>
-          </a:fillRef>
-          <a:effectRef idx="0">
-            <a:schemeClr val="accent3"/>
-          </a:effectRef>
-          <a:fontRef idx="minor">
-            <a:schemeClr val="lt1"/>
-          </a:fontRef>
-        </p:style>
-        <p:txBody>
-          <a:bodyPr rtlCol="0" anchor="ctr"/>
-          <a:lstStyle/>
-          <a:p>
-            <a:pPr algn="ctr"/>
-            <a:endParaRPr lang="ko-KR" altLang="en-US" sz="2400">
-              <a:latin typeface="KoPub돋움체 Light" panose="02020603020101020101" pitchFamily="18" charset="-127"/>
-              <a:ea typeface="KoPub돋움체 Light" panose="02020603020101020101" pitchFamily="18" charset="-127"/>
-            </a:endParaRPr>
-          </a:p>
-        </p:txBody>
-      </p:sp>
-      <p:sp>
-        <p:nvSpPr>
-          <p:cNvPr id="29" name="사각형: 둥근 모서리 28">
-            <a:extLst>
-              <a:ext uri="{FF2B5EF4-FFF2-40B4-BE49-F238E27FC236}">
-                <a16:creationId xmlns:a16="http://schemas.microsoft.com/office/drawing/2014/main" id="{33172203-0AF1-62A8-FB03-2718CB658217}"/>
-              </a:ext>
-            </a:extLst>
-          </p:cNvPr>
-          <p:cNvSpPr/>
-          <p:nvPr/>
-        </p:nvSpPr>
-        <p:spPr>
-          <a:xfrm>
-            <a:off x="236105" y="1307925"/>
-            <a:ext cx="1264364" cy="230832"/>
-          </a:xfrm>
-          <a:prstGeom prst="roundRect">
-            <a:avLst/>
-          </a:prstGeom>
-          <a:solidFill>
-            <a:schemeClr val="bg2"/>
-          </a:solidFill>
-          <a:ln>
-            <a:noFill/>
-          </a:ln>
-        </p:spPr>
-        <p:style>
-          <a:lnRef idx="2">
-            <a:schemeClr val="accent3">
-              <a:shade val="15000"/>
-            </a:schemeClr>
-          </a:lnRef>
-          <a:fillRef idx="1">
-            <a:schemeClr val="accent3"/>
-          </a:fillRef>
-          <a:effectRef idx="0">
-            <a:schemeClr val="accent3"/>
-          </a:effectRef>
-          <a:fontRef idx="minor">
-            <a:schemeClr val="lt1"/>
-          </a:fontRef>
-        </p:style>
-        <p:txBody>
-          <a:bodyPr rtlCol="0" anchor="ctr"/>
-          <a:lstStyle/>
-          <a:p>
-            <a:pPr algn="ctr"/>
-            <a:endParaRPr lang="ko-KR" altLang="en-US" sz="2400">
-              <a:latin typeface="KoPub돋움체 Light" panose="02020603020101020101" pitchFamily="18" charset="-127"/>
-              <a:ea typeface="KoPub돋움체 Light" panose="02020603020101020101" pitchFamily="18" charset="-127"/>
-            </a:endParaRPr>
-          </a:p>
-        </p:txBody>
-      </p:sp>
-      <p:sp>
-        <p:nvSpPr>
-          <p:cNvPr id="30" name="사각형: 둥근 모서리 29">
-            <a:extLst>
-              <a:ext uri="{FF2B5EF4-FFF2-40B4-BE49-F238E27FC236}">
-                <a16:creationId xmlns:a16="http://schemas.microsoft.com/office/drawing/2014/main" id="{626BE8AA-205D-2E31-9D1D-D184895B6FFE}"/>
-              </a:ext>
-            </a:extLst>
-          </p:cNvPr>
-          <p:cNvSpPr/>
-          <p:nvPr/>
-        </p:nvSpPr>
-        <p:spPr>
-          <a:xfrm>
-            <a:off x="1598636" y="1307925"/>
-            <a:ext cx="1264364" cy="230832"/>
-          </a:xfrm>
-          <a:prstGeom prst="roundRect">
-            <a:avLst/>
-          </a:prstGeom>
-          <a:solidFill>
-            <a:schemeClr val="bg2"/>
-          </a:solidFill>
-          <a:ln>
-            <a:noFill/>
-          </a:ln>
-        </p:spPr>
-        <p:style>
-          <a:lnRef idx="2">
-            <a:schemeClr val="accent3">
-              <a:shade val="15000"/>
-            </a:schemeClr>
-          </a:lnRef>
-          <a:fillRef idx="1">
-            <a:schemeClr val="accent3"/>
-          </a:fillRef>
-          <a:effectRef idx="0">
-            <a:schemeClr val="accent3"/>
-          </a:effectRef>
-          <a:fontRef idx="minor">
-            <a:schemeClr val="lt1"/>
-          </a:fontRef>
-        </p:style>
-        <p:txBody>
-          <a:bodyPr rtlCol="0" anchor="ctr"/>
-          <a:lstStyle/>
-          <a:p>
-            <a:pPr algn="ctr"/>
-            <a:endParaRPr lang="ko-KR" altLang="en-US" sz="2400">
-              <a:latin typeface="KoPub돋움체 Light" panose="02020603020101020101" pitchFamily="18" charset="-127"/>
-              <a:ea typeface="KoPub돋움체 Light" panose="02020603020101020101" pitchFamily="18" charset="-127"/>
-            </a:endParaRPr>
-          </a:p>
-        </p:txBody>
-      </p:sp>
-      <p:sp>
-        <p:nvSpPr>
-          <p:cNvPr id="21" name="사각형: 둥근 모서리 20">
-            <a:extLst>
-              <a:ext uri="{FF2B5EF4-FFF2-40B4-BE49-F238E27FC236}">
-                <a16:creationId xmlns:a16="http://schemas.microsoft.com/office/drawing/2014/main" id="{B494444E-F286-236C-4602-B32BCFCC28A2}"/>
-              </a:ext>
-            </a:extLst>
-          </p:cNvPr>
-          <p:cNvSpPr/>
-          <p:nvPr/>
-        </p:nvSpPr>
-        <p:spPr>
-          <a:xfrm>
-            <a:off x="236105" y="1043683"/>
-            <a:ext cx="1264364" cy="230832"/>
-          </a:xfrm>
-          <a:prstGeom prst="roundRect">
-            <a:avLst/>
-          </a:prstGeom>
-          <a:solidFill>
-            <a:schemeClr val="bg2"/>
-          </a:solidFill>
-          <a:ln>
-            <a:noFill/>
-          </a:ln>
-        </p:spPr>
-        <p:style>
-          <a:lnRef idx="2">
-            <a:schemeClr val="accent3">
-              <a:shade val="15000"/>
-            </a:schemeClr>
-          </a:lnRef>
-          <a:fillRef idx="1">
-            <a:schemeClr val="accent3"/>
-          </a:fillRef>
-          <a:effectRef idx="0">
-            <a:schemeClr val="accent3"/>
-          </a:effectRef>
-          <a:fontRef idx="minor">
-            <a:schemeClr val="lt1"/>
-          </a:fontRef>
-        </p:style>
-        <p:txBody>
-          <a:bodyPr rtlCol="0" anchor="ctr"/>
-          <a:lstStyle/>
-          <a:p>
-            <a:pPr algn="ctr"/>
-            <a:endParaRPr lang="ko-KR" altLang="en-US" sz="2400">
-              <a:latin typeface="KoPub돋움체 Light" panose="02020603020101020101" pitchFamily="18" charset="-127"/>
-              <a:ea typeface="KoPub돋움체 Light" panose="02020603020101020101" pitchFamily="18" charset="-127"/>
-            </a:endParaRPr>
-          </a:p>
-        </p:txBody>
-      </p:sp>
-      <p:sp>
-        <p:nvSpPr>
           <p:cNvPr id="3" name="TextBox 2">
             <a:extLst>
               <a:ext uri="{FF2B5EF4-FFF2-40B4-BE49-F238E27FC236}">
-                <a16:creationId xmlns:a16="http://schemas.microsoft.com/office/drawing/2014/main" id="{E36C2861-CC64-67B4-5BF7-89F7A524A14A}"/>
+                <a16:creationId xmlns:a16="http://schemas.microsoft.com/office/drawing/2014/main" id="{F5E3E193-F1E8-6947-F01D-A96C1A9F6D0E}"/>
               </a:ext>
             </a:extLst>
           </p:cNvPr>
@@ -5382,8 +5048,8 @@
         </p:nvSpPr>
         <p:spPr>
           <a:xfrm>
-            <a:off x="43517" y="54246"/>
-            <a:ext cx="1180381" cy="169277"/>
+            <a:off x="25241" y="63223"/>
+            <a:ext cx="1403509" cy="184666"/>
           </a:xfrm>
           <a:prstGeom prst="rect">
             <a:avLst/>
@@ -5396,25 +5062,24 @@
           </a:bodyPr>
           <a:lstStyle/>
           <a:p>
-            <a:pPr algn="ctr"/>
             <a:r>
-              <a:rPr lang="ko-KR" altLang="en-US" sz="500" spc="-11" dirty="0">
-                <a:latin typeface="KoPub돋움체 Light" panose="02020603020101020101" pitchFamily="18" charset="-127"/>
-                <a:ea typeface="KoPub돋움체 Light" panose="02020603020101020101" pitchFamily="18" charset="-127"/>
+              <a:rPr lang="ko-KR" altLang="en-US" sz="600" b="1" spc="-11" dirty="0">
+                <a:latin typeface="KoPub돋움체 Bold" panose="00000800000000000000" pitchFamily="2" charset="-127"/>
+                <a:ea typeface="KoPub돋움체 Bold" panose="00000800000000000000" pitchFamily="2" charset="-127"/>
               </a:rPr>
               <a:t>순천향대학교 천안병원 </a:t>
             </a:r>
             <a:r>
-              <a:rPr lang="en-US" altLang="ko-KR" sz="500" spc="-11" dirty="0">
-                <a:latin typeface="KoPub돋움체 Light" panose="02020603020101020101" pitchFamily="18" charset="-127"/>
-                <a:ea typeface="KoPub돋움체 Light" panose="02020603020101020101" pitchFamily="18" charset="-127"/>
+              <a:rPr lang="en-US" altLang="ko-KR" sz="600" b="1" spc="-11" dirty="0">
+                <a:latin typeface="KoPub돋움체 Bold" panose="00000800000000000000" pitchFamily="2" charset="-127"/>
+                <a:ea typeface="KoPub돋움체 Bold" panose="00000800000000000000" pitchFamily="2" charset="-127"/>
               </a:rPr>
               <a:t>| </a:t>
             </a:r>
             <a:r>
-              <a:rPr lang="ko-KR" altLang="en-US" sz="500" spc="-11" dirty="0">
-                <a:latin typeface="KoPub돋움체 Light" panose="02020603020101020101" pitchFamily="18" charset="-127"/>
-                <a:ea typeface="KoPub돋움체 Light" panose="02020603020101020101" pitchFamily="18" charset="-127"/>
+              <a:rPr lang="ko-KR" altLang="en-US" sz="600" b="1" spc="-11" dirty="0">
+                <a:latin typeface="KoPub돋움체 Bold" panose="00000800000000000000" pitchFamily="2" charset="-127"/>
+                <a:ea typeface="KoPub돋움체 Bold" panose="00000800000000000000" pitchFamily="2" charset="-127"/>
               </a:rPr>
               <a:t>진료지원간호팀 </a:t>
             </a:r>
@@ -5423,10 +5088,10 @@
       </p:sp>
       <p:grpSp>
         <p:nvGrpSpPr>
-          <p:cNvPr id="20" name="그룹 19">
+          <p:cNvPr id="17" name="그룹 16">
             <a:extLst>
               <a:ext uri="{FF2B5EF4-FFF2-40B4-BE49-F238E27FC236}">
-                <a16:creationId xmlns:a16="http://schemas.microsoft.com/office/drawing/2014/main" id="{2D7BBD09-C6CF-9E94-032E-391F419EA5A3}"/>
+                <a16:creationId xmlns:a16="http://schemas.microsoft.com/office/drawing/2014/main" id="{CCD23336-35E2-7BBF-742C-67D82BDC7617}"/>
               </a:ext>
             </a:extLst>
           </p:cNvPr>
@@ -5435,449 +5100,8 @@
         </p:nvGrpSpPr>
         <p:grpSpPr>
           <a:xfrm>
-            <a:off x="692840" y="331471"/>
-            <a:ext cx="2337499" cy="520584"/>
-            <a:chOff x="422852" y="312900"/>
-            <a:chExt cx="2337499" cy="520584"/>
-          </a:xfrm>
-        </p:grpSpPr>
-        <p:sp>
-          <p:nvSpPr>
-            <p:cNvPr id="4" name="TextBox 3">
-              <a:extLst>
-                <a:ext uri="{FF2B5EF4-FFF2-40B4-BE49-F238E27FC236}">
-                  <a16:creationId xmlns:a16="http://schemas.microsoft.com/office/drawing/2014/main" id="{442ACD3C-9E46-B6F1-9AAA-5FDC65A1B999}"/>
-                </a:ext>
-              </a:extLst>
-            </p:cNvPr>
-            <p:cNvSpPr txBox="1"/>
-            <p:nvPr/>
-          </p:nvSpPr>
-          <p:spPr>
-            <a:xfrm>
-              <a:off x="696163" y="312900"/>
-              <a:ext cx="1790875" cy="338554"/>
-            </a:xfrm>
-            <a:prstGeom prst="rect">
-              <a:avLst/>
-            </a:prstGeom>
-            <a:noFill/>
-          </p:spPr>
-          <p:txBody>
-            <a:bodyPr wrap="none">
-              <a:spAutoFit/>
-            </a:bodyPr>
-            <a:lstStyle/>
-            <a:p>
-              <a:pPr algn="ctr"/>
-              <a:r>
-                <a:rPr lang="ko-KR" altLang="en-US" sz="1600" dirty="0" err="1">
-                  <a:solidFill>
-                    <a:schemeClr val="accent1">
-                      <a:lumMod val="50000"/>
-                    </a:schemeClr>
-                  </a:solidFill>
-                  <a:latin typeface="KoPub돋움체 Bold" panose="02020603020101020101" pitchFamily="18" charset="-127"/>
-                  <a:ea typeface="KoPub돋움체 Bold" panose="02020603020101020101" pitchFamily="18" charset="-127"/>
-                </a:rPr>
-                <a:t>우리가치</a:t>
-              </a:r>
-              <a:r>
-                <a:rPr lang="ko-KR" altLang="en-US" sz="1600" dirty="0">
-                  <a:solidFill>
-                    <a:schemeClr val="accent1">
-                      <a:lumMod val="50000"/>
-                    </a:schemeClr>
-                  </a:solidFill>
-                  <a:latin typeface="KoPub돋움체 Bold" panose="02020603020101020101" pitchFamily="18" charset="-127"/>
-                  <a:ea typeface="KoPub돋움체 Bold" panose="02020603020101020101" pitchFamily="18" charset="-127"/>
-                </a:rPr>
-                <a:t> </a:t>
-              </a:r>
-              <a:r>
-                <a:rPr lang="en-US" altLang="ko-KR" sz="1600" dirty="0" err="1">
-                  <a:solidFill>
-                    <a:schemeClr val="accent1">
-                      <a:lumMod val="50000"/>
-                    </a:schemeClr>
-                  </a:solidFill>
-                  <a:latin typeface="KoPub돋움체 Bold" panose="02020603020101020101" pitchFamily="18" charset="-127"/>
-                  <a:ea typeface="KoPub돋움체 Bold" panose="02020603020101020101" pitchFamily="18" charset="-127"/>
-                </a:rPr>
-                <a:t>WeValue</a:t>
-              </a:r>
-              <a:endParaRPr lang="en-US" altLang="ko-KR" sz="1600" dirty="0">
-                <a:solidFill>
-                  <a:schemeClr val="accent1">
-                    <a:lumMod val="50000"/>
-                  </a:schemeClr>
-                </a:solidFill>
-                <a:latin typeface="KoPub돋움체 Bold" panose="02020603020101020101" pitchFamily="18" charset="-127"/>
-                <a:ea typeface="KoPub돋움체 Bold" panose="02020603020101020101" pitchFamily="18" charset="-127"/>
-              </a:endParaRPr>
-            </a:p>
-          </p:txBody>
-        </p:sp>
-        <p:sp>
-          <p:nvSpPr>
-            <p:cNvPr id="6" name="TextBox 5">
-              <a:extLst>
-                <a:ext uri="{FF2B5EF4-FFF2-40B4-BE49-F238E27FC236}">
-                  <a16:creationId xmlns:a16="http://schemas.microsoft.com/office/drawing/2014/main" id="{F3617AFD-0BD9-CFDE-1738-2DE4374B3E6A}"/>
-                </a:ext>
-              </a:extLst>
-            </p:cNvPr>
-            <p:cNvSpPr txBox="1"/>
-            <p:nvPr/>
-          </p:nvSpPr>
-          <p:spPr>
-            <a:xfrm>
-              <a:off x="422852" y="587263"/>
-              <a:ext cx="2337499" cy="246221"/>
-            </a:xfrm>
-            <a:prstGeom prst="rect">
-              <a:avLst/>
-            </a:prstGeom>
-            <a:noFill/>
-          </p:spPr>
-          <p:txBody>
-            <a:bodyPr wrap="none">
-              <a:spAutoFit/>
-            </a:bodyPr>
-            <a:lstStyle/>
-            <a:p>
-              <a:pPr algn="ctr"/>
-              <a:r>
-                <a:rPr lang="en-US" altLang="ko-KR" sz="1000" b="1" dirty="0">
-                  <a:latin typeface="KoPub돋움체 Light" panose="02020603020101020101" pitchFamily="18" charset="-127"/>
-                  <a:ea typeface="KoPub돋움체 Light" panose="02020603020101020101" pitchFamily="18" charset="-127"/>
-                </a:rPr>
-                <a:t>[</a:t>
-              </a:r>
-              <a:r>
-                <a:rPr lang="ko-KR" altLang="en-US" sz="1000" b="1" dirty="0">
-                  <a:latin typeface="KoPub돋움체 Light" panose="02020603020101020101" pitchFamily="18" charset="-127"/>
-                  <a:ea typeface="KoPub돋움체 Light" panose="02020603020101020101" pitchFamily="18" charset="-127"/>
-                </a:rPr>
-                <a:t>우리가 가치를 만드는 공간</a:t>
-              </a:r>
-              <a:r>
-                <a:rPr lang="en-US" altLang="ko-KR" sz="1000" b="1" dirty="0">
-                  <a:latin typeface="KoPub돋움체 Light" panose="02020603020101020101" pitchFamily="18" charset="-127"/>
-                  <a:ea typeface="KoPub돋움체 Light" panose="02020603020101020101" pitchFamily="18" charset="-127"/>
-                </a:rPr>
-                <a:t>, </a:t>
-              </a:r>
-              <a:r>
-                <a:rPr lang="ko-KR" altLang="en-US" sz="1000" b="1" dirty="0" err="1">
-                  <a:latin typeface="KoPub돋움체 Light" panose="02020603020101020101" pitchFamily="18" charset="-127"/>
-                  <a:ea typeface="KoPub돋움체 Light" panose="02020603020101020101" pitchFamily="18" charset="-127"/>
-                </a:rPr>
-                <a:t>우리가치</a:t>
-              </a:r>
-              <a:r>
-                <a:rPr lang="ko-KR" altLang="en-US" sz="1000" b="1" dirty="0">
-                  <a:latin typeface="KoPub돋움체 Light" panose="02020603020101020101" pitchFamily="18" charset="-127"/>
-                  <a:ea typeface="KoPub돋움체 Light" panose="02020603020101020101" pitchFamily="18" charset="-127"/>
-                </a:rPr>
-                <a:t> 허브</a:t>
-              </a:r>
-              <a:r>
-                <a:rPr lang="en-US" altLang="ko-KR" sz="1000" b="1" dirty="0">
-                  <a:latin typeface="KoPub돋움체 Light" panose="02020603020101020101" pitchFamily="18" charset="-127"/>
-                  <a:ea typeface="KoPub돋움체 Light" panose="02020603020101020101" pitchFamily="18" charset="-127"/>
-                </a:rPr>
-                <a:t>]</a:t>
-              </a:r>
-              <a:endParaRPr lang="en-US" altLang="ko-KR" sz="1000" b="1" dirty="0">
-                <a:solidFill>
-                  <a:schemeClr val="accent1">
-                    <a:lumMod val="50000"/>
-                  </a:schemeClr>
-                </a:solidFill>
-                <a:latin typeface="KoPub돋움체 Light" panose="02020603020101020101" pitchFamily="18" charset="-127"/>
-                <a:ea typeface="KoPub돋움체 Light" panose="02020603020101020101" pitchFamily="18" charset="-127"/>
-              </a:endParaRPr>
-            </a:p>
-          </p:txBody>
-        </p:sp>
-      </p:grpSp>
-      <p:sp>
-        <p:nvSpPr>
-          <p:cNvPr id="7" name="TextBox 6">
-            <a:extLst>
-              <a:ext uri="{FF2B5EF4-FFF2-40B4-BE49-F238E27FC236}">
-                <a16:creationId xmlns:a16="http://schemas.microsoft.com/office/drawing/2014/main" id="{C76C79B7-005A-1F96-9C33-E5C55A5E1E82}"/>
-              </a:ext>
-            </a:extLst>
-          </p:cNvPr>
-          <p:cNvSpPr txBox="1"/>
-          <p:nvPr/>
-        </p:nvSpPr>
-        <p:spPr>
-          <a:xfrm>
-            <a:off x="163608" y="1041309"/>
-            <a:ext cx="1409361" cy="230832"/>
-          </a:xfrm>
-          <a:prstGeom prst="rect">
-            <a:avLst/>
-          </a:prstGeom>
-          <a:noFill/>
-        </p:spPr>
-        <p:txBody>
-          <a:bodyPr wrap="none">
-            <a:spAutoFit/>
-          </a:bodyPr>
-          <a:lstStyle/>
-          <a:p>
-            <a:pPr algn="ctr"/>
-            <a:r>
-              <a:rPr lang="ko-KR" altLang="en-US" sz="900" b="1" dirty="0">
-                <a:solidFill>
-                  <a:schemeClr val="tx2">
-                    <a:lumMod val="50000"/>
-                  </a:schemeClr>
-                </a:solidFill>
-                <a:latin typeface="KoPub돋움체 Light" panose="02020603020101020101" pitchFamily="18" charset="-127"/>
-                <a:ea typeface="KoPub돋움체 Light" panose="02020603020101020101" pitchFamily="18" charset="-127"/>
-              </a:rPr>
-              <a:t>소통의 광장</a:t>
-            </a:r>
-            <a:r>
-              <a:rPr lang="en-US" altLang="ko-KR" sz="900" b="1" dirty="0">
-                <a:solidFill>
-                  <a:schemeClr val="tx2">
-                    <a:lumMod val="50000"/>
-                  </a:schemeClr>
-                </a:solidFill>
-                <a:latin typeface="KoPub돋움체 Light" panose="02020603020101020101" pitchFamily="18" charset="-127"/>
-                <a:ea typeface="KoPub돋움체 Light" panose="02020603020101020101" pitchFamily="18" charset="-127"/>
-              </a:rPr>
-              <a:t> (Community)</a:t>
-            </a:r>
-            <a:endParaRPr lang="en-US" altLang="ko-KR" sz="800" dirty="0">
-              <a:solidFill>
-                <a:schemeClr val="tx2">
-                  <a:lumMod val="50000"/>
-                </a:schemeClr>
-              </a:solidFill>
-              <a:latin typeface="KoPub돋움체 Light" panose="02020603020101020101" pitchFamily="18" charset="-127"/>
-              <a:ea typeface="KoPub돋움체 Light" panose="02020603020101020101" pitchFamily="18" charset="-127"/>
-            </a:endParaRPr>
-          </a:p>
-        </p:txBody>
-      </p:sp>
-      <p:sp>
-        <p:nvSpPr>
-          <p:cNvPr id="8" name="TextBox 7">
-            <a:extLst>
-              <a:ext uri="{FF2B5EF4-FFF2-40B4-BE49-F238E27FC236}">
-                <a16:creationId xmlns:a16="http://schemas.microsoft.com/office/drawing/2014/main" id="{C6DAAEA4-0089-280E-754E-9A4212B75F21}"/>
-              </a:ext>
-            </a:extLst>
-          </p:cNvPr>
-          <p:cNvSpPr txBox="1"/>
-          <p:nvPr/>
-        </p:nvSpPr>
-        <p:spPr>
-          <a:xfrm>
-            <a:off x="1548581" y="1041309"/>
-            <a:ext cx="1364476" cy="230832"/>
-          </a:xfrm>
-          <a:prstGeom prst="rect">
-            <a:avLst/>
-          </a:prstGeom>
-          <a:noFill/>
-        </p:spPr>
-        <p:txBody>
-          <a:bodyPr wrap="none">
-            <a:spAutoFit/>
-          </a:bodyPr>
-          <a:lstStyle/>
-          <a:p>
-            <a:pPr algn="ctr"/>
-            <a:r>
-              <a:rPr lang="ko-KR" altLang="en-US" sz="900" b="1" dirty="0">
-                <a:solidFill>
-                  <a:schemeClr val="tx2">
-                    <a:lumMod val="50000"/>
-                  </a:schemeClr>
-                </a:solidFill>
-                <a:latin typeface="KoPub돋움체 Light" panose="02020603020101020101" pitchFamily="18" charset="-127"/>
-                <a:ea typeface="KoPub돋움체 Light" panose="02020603020101020101" pitchFamily="18" charset="-127"/>
-              </a:rPr>
-              <a:t>업무의 기준  </a:t>
-            </a:r>
-            <a:r>
-              <a:rPr lang="en-US" altLang="ko-KR" sz="900" b="1" dirty="0">
-                <a:solidFill>
-                  <a:schemeClr val="tx2">
-                    <a:lumMod val="50000"/>
-                  </a:schemeClr>
-                </a:solidFill>
-                <a:latin typeface="KoPub돋움체 Light" panose="02020603020101020101" pitchFamily="18" charset="-127"/>
-                <a:ea typeface="KoPub돋움체 Light" panose="02020603020101020101" pitchFamily="18" charset="-127"/>
-              </a:rPr>
-              <a:t>(Standards)</a:t>
-            </a:r>
-            <a:endParaRPr lang="en-US" altLang="ko-KR" sz="800" dirty="0">
-              <a:solidFill>
-                <a:schemeClr val="tx2">
-                  <a:lumMod val="50000"/>
-                </a:schemeClr>
-              </a:solidFill>
-              <a:latin typeface="KoPub돋움체 Light" panose="02020603020101020101" pitchFamily="18" charset="-127"/>
-              <a:ea typeface="KoPub돋움체 Light" panose="02020603020101020101" pitchFamily="18" charset="-127"/>
-            </a:endParaRPr>
-          </a:p>
-        </p:txBody>
-      </p:sp>
-      <p:sp>
-        <p:nvSpPr>
-          <p:cNvPr id="9" name="TextBox 8">
-            <a:extLst>
-              <a:ext uri="{FF2B5EF4-FFF2-40B4-BE49-F238E27FC236}">
-                <a16:creationId xmlns:a16="http://schemas.microsoft.com/office/drawing/2014/main" id="{405B90CA-2121-C2E5-E5A2-30C3F7A79A4F}"/>
-              </a:ext>
-            </a:extLst>
-          </p:cNvPr>
-          <p:cNvSpPr txBox="1"/>
-          <p:nvPr/>
-        </p:nvSpPr>
-        <p:spPr>
-          <a:xfrm>
-            <a:off x="206889" y="1305551"/>
-            <a:ext cx="1322798" cy="230832"/>
-          </a:xfrm>
-          <a:prstGeom prst="rect">
-            <a:avLst/>
-          </a:prstGeom>
-          <a:noFill/>
-        </p:spPr>
-        <p:txBody>
-          <a:bodyPr wrap="none">
-            <a:spAutoFit/>
-          </a:bodyPr>
-          <a:lstStyle/>
-          <a:p>
-            <a:pPr algn="ctr"/>
-            <a:r>
-              <a:rPr lang="ko-KR" altLang="en-US" sz="900" b="1" dirty="0">
-                <a:solidFill>
-                  <a:schemeClr val="tx2">
-                    <a:lumMod val="50000"/>
-                  </a:schemeClr>
-                </a:solidFill>
-                <a:latin typeface="KoPub돋움체 Light" panose="02020603020101020101" pitchFamily="18" charset="-127"/>
-                <a:ea typeface="KoPub돋움체 Light" panose="02020603020101020101" pitchFamily="18" charset="-127"/>
-              </a:rPr>
-              <a:t>배움의 창구 </a:t>
-            </a:r>
-            <a:r>
-              <a:rPr lang="en-US" altLang="ko-KR" sz="900" b="1" dirty="0">
-                <a:solidFill>
-                  <a:schemeClr val="tx2">
-                    <a:lumMod val="50000"/>
-                  </a:schemeClr>
-                </a:solidFill>
-                <a:latin typeface="KoPub돋움체 Light" panose="02020603020101020101" pitchFamily="18" charset="-127"/>
-                <a:ea typeface="KoPub돋움체 Light" panose="02020603020101020101" pitchFamily="18" charset="-127"/>
-              </a:rPr>
-              <a:t>(Education)</a:t>
-            </a:r>
-            <a:endParaRPr lang="ko-KR" altLang="en-US" sz="800" dirty="0">
-              <a:solidFill>
-                <a:schemeClr val="tx2">
-                  <a:lumMod val="50000"/>
-                </a:schemeClr>
-              </a:solidFill>
-              <a:latin typeface="KoPub돋움체 Light" panose="02020603020101020101" pitchFamily="18" charset="-127"/>
-              <a:ea typeface="KoPub돋움체 Light" panose="02020603020101020101" pitchFamily="18" charset="-127"/>
-            </a:endParaRPr>
-          </a:p>
-        </p:txBody>
-      </p:sp>
-      <p:sp>
-        <p:nvSpPr>
-          <p:cNvPr id="10" name="TextBox 9">
-            <a:extLst>
-              <a:ext uri="{FF2B5EF4-FFF2-40B4-BE49-F238E27FC236}">
-                <a16:creationId xmlns:a16="http://schemas.microsoft.com/office/drawing/2014/main" id="{190A7945-03C2-64D5-3EB6-3BADF453C26A}"/>
-              </a:ext>
-            </a:extLst>
-          </p:cNvPr>
-          <p:cNvSpPr txBox="1"/>
-          <p:nvPr/>
-        </p:nvSpPr>
-        <p:spPr>
-          <a:xfrm>
-            <a:off x="1530948" y="1305551"/>
-            <a:ext cx="1399743" cy="230832"/>
-          </a:xfrm>
-          <a:prstGeom prst="rect">
-            <a:avLst/>
-          </a:prstGeom>
-          <a:noFill/>
-        </p:spPr>
-        <p:txBody>
-          <a:bodyPr wrap="none">
-            <a:spAutoFit/>
-          </a:bodyPr>
-          <a:lstStyle/>
-          <a:p>
-            <a:pPr algn="ctr"/>
-            <a:r>
-              <a:rPr lang="ko-KR" altLang="en-US" sz="900" b="1" dirty="0">
-                <a:solidFill>
-                  <a:schemeClr val="tx2">
-                    <a:lumMod val="50000"/>
-                  </a:schemeClr>
-                </a:solidFill>
-                <a:latin typeface="KoPub돋움체 Light" panose="02020603020101020101" pitchFamily="18" charset="-127"/>
-                <a:ea typeface="KoPub돋움체 Light" panose="02020603020101020101" pitchFamily="18" charset="-127"/>
-              </a:rPr>
-              <a:t>투명한 지표  </a:t>
-            </a:r>
-            <a:r>
-              <a:rPr lang="en-US" altLang="ko-KR" sz="900" b="1" dirty="0">
-                <a:solidFill>
-                  <a:schemeClr val="tx2">
-                    <a:lumMod val="50000"/>
-                  </a:schemeClr>
-                </a:solidFill>
-                <a:latin typeface="KoPub돋움체 Light" panose="02020603020101020101" pitchFamily="18" charset="-127"/>
-                <a:ea typeface="KoPub돋움체 Light" panose="02020603020101020101" pitchFamily="18" charset="-127"/>
-              </a:rPr>
-              <a:t>(Dashboard)</a:t>
-            </a:r>
-            <a:endParaRPr lang="ko-KR" altLang="en-US" sz="800" dirty="0">
-              <a:solidFill>
-                <a:schemeClr val="tx2">
-                  <a:lumMod val="50000"/>
-                </a:schemeClr>
-              </a:solidFill>
-              <a:latin typeface="KoPub돋움체 Light" panose="02020603020101020101" pitchFamily="18" charset="-127"/>
-              <a:ea typeface="KoPub돋움체 Light" panose="02020603020101020101" pitchFamily="18" charset="-127"/>
-            </a:endParaRPr>
-          </a:p>
-        </p:txBody>
-      </p:sp>
-      <p:grpSp>
-        <p:nvGrpSpPr>
-          <p:cNvPr id="17" name="그룹 16">
-            <a:extLst>
-              <a:ext uri="{FF2B5EF4-FFF2-40B4-BE49-F238E27FC236}">
-                <a16:creationId xmlns:a16="http://schemas.microsoft.com/office/drawing/2014/main" id="{126D9EE3-36E1-6B71-9440-DB5A7D7AA853}"/>
-              </a:ext>
-            </a:extLst>
-          </p:cNvPr>
-          <p:cNvGrpSpPr/>
-          <p:nvPr/>
-        </p:nvGrpSpPr>
-        <p:grpSpPr>
-          <a:xfrm>
-            <a:off x="173236" y="377028"/>
-            <a:ext cx="538336" cy="538336"/>
+            <a:off x="589938" y="838920"/>
+            <a:ext cx="634026" cy="568432"/>
             <a:chOff x="777945" y="-736888"/>
             <a:chExt cx="663508" cy="663508"/>
           </a:xfrm>
@@ -5887,7 +5111,7 @@
             <p:cNvPr id="5" name="그림 4" descr="패턴, 사각형, 예술, 직사각형이(가) 표시된 사진&#10;&#10;AI 생성 콘텐츠는 정확하지 않을 수 있습니다.">
               <a:extLst>
                 <a:ext uri="{FF2B5EF4-FFF2-40B4-BE49-F238E27FC236}">
-                  <a16:creationId xmlns:a16="http://schemas.microsoft.com/office/drawing/2014/main" id="{CD4E71F8-D5E3-818B-005E-ABD85D7BD4F9}"/>
+                  <a16:creationId xmlns:a16="http://schemas.microsoft.com/office/drawing/2014/main" id="{40C63F4C-30AB-6EF2-23BA-1233104A9DC3}"/>
                 </a:ext>
               </a:extLst>
             </p:cNvPr>
@@ -5917,7 +5141,7 @@
             <p:cNvPr id="13" name="L 도형 12">
               <a:extLst>
                 <a:ext uri="{FF2B5EF4-FFF2-40B4-BE49-F238E27FC236}">
-                  <a16:creationId xmlns:a16="http://schemas.microsoft.com/office/drawing/2014/main" id="{8221DC4C-C9CC-6E80-8D21-30FE06F6E874}"/>
+                  <a16:creationId xmlns:a16="http://schemas.microsoft.com/office/drawing/2014/main" id="{B242B433-4D06-F840-EA3E-7FA7766D184C}"/>
                 </a:ext>
               </a:extLst>
             </p:cNvPr>
@@ -5974,7 +5198,7 @@
             <p:cNvPr id="14" name="L 도형 13">
               <a:extLst>
                 <a:ext uri="{FF2B5EF4-FFF2-40B4-BE49-F238E27FC236}">
-                  <a16:creationId xmlns:a16="http://schemas.microsoft.com/office/drawing/2014/main" id="{6A3FA9C7-F9E0-7C7A-1B40-864FE4744995}"/>
+                  <a16:creationId xmlns:a16="http://schemas.microsoft.com/office/drawing/2014/main" id="{37DD2CDD-BF9D-CD6A-CC77-30C00DF7A8EA}"/>
                 </a:ext>
               </a:extLst>
             </p:cNvPr>
@@ -6031,7 +5255,7 @@
             <p:cNvPr id="15" name="L 도형 14">
               <a:extLst>
                 <a:ext uri="{FF2B5EF4-FFF2-40B4-BE49-F238E27FC236}">
-                  <a16:creationId xmlns:a16="http://schemas.microsoft.com/office/drawing/2014/main" id="{2D4ECC1C-0BEC-0BD3-F554-3A0567A9B643}"/>
+                  <a16:creationId xmlns:a16="http://schemas.microsoft.com/office/drawing/2014/main" id="{DD20813D-7C4F-9420-E012-EB09FDC9059E}"/>
                 </a:ext>
               </a:extLst>
             </p:cNvPr>
@@ -6088,7 +5312,7 @@
             <p:cNvPr id="16" name="L 도형 15">
               <a:extLst>
                 <a:ext uri="{FF2B5EF4-FFF2-40B4-BE49-F238E27FC236}">
-                  <a16:creationId xmlns:a16="http://schemas.microsoft.com/office/drawing/2014/main" id="{ED1EE54C-A504-9212-924F-DE9E5CAD6CF7}"/>
+                  <a16:creationId xmlns:a16="http://schemas.microsoft.com/office/drawing/2014/main" id="{C2F58D7B-1E2F-7C1C-29C2-3CBAF321313E}"/>
                 </a:ext>
               </a:extLst>
             </p:cNvPr>
@@ -6141,10 +5365,564 @@
           </p:txBody>
         </p:sp>
       </p:grpSp>
+      <p:grpSp>
+        <p:nvGrpSpPr>
+          <p:cNvPr id="18" name="그룹 17">
+            <a:extLst>
+              <a:ext uri="{FF2B5EF4-FFF2-40B4-BE49-F238E27FC236}">
+                <a16:creationId xmlns:a16="http://schemas.microsoft.com/office/drawing/2014/main" id="{360DDF2E-2289-473B-B5F6-77027118C993}"/>
+              </a:ext>
+            </a:extLst>
+          </p:cNvPr>
+          <p:cNvGrpSpPr/>
+          <p:nvPr/>
+        </p:nvGrpSpPr>
+        <p:grpSpPr>
+          <a:xfrm>
+            <a:off x="113069" y="274768"/>
+            <a:ext cx="1746464" cy="425416"/>
+            <a:chOff x="614240" y="226472"/>
+            <a:chExt cx="1746464" cy="425416"/>
+          </a:xfrm>
+        </p:grpSpPr>
+        <p:sp>
+          <p:nvSpPr>
+            <p:cNvPr id="4" name="TextBox 3">
+              <a:extLst>
+                <a:ext uri="{FF2B5EF4-FFF2-40B4-BE49-F238E27FC236}">
+                  <a16:creationId xmlns:a16="http://schemas.microsoft.com/office/drawing/2014/main" id="{1F0C02A7-D766-DD14-548E-2AE7955534F4}"/>
+                </a:ext>
+              </a:extLst>
+            </p:cNvPr>
+            <p:cNvSpPr txBox="1"/>
+            <p:nvPr/>
+          </p:nvSpPr>
+          <p:spPr>
+            <a:xfrm>
+              <a:off x="685077" y="226472"/>
+              <a:ext cx="1604991" cy="307777"/>
+            </a:xfrm>
+            <a:prstGeom prst="rect">
+              <a:avLst/>
+            </a:prstGeom>
+            <a:noFill/>
+          </p:spPr>
+          <p:txBody>
+            <a:bodyPr wrap="none">
+              <a:spAutoFit/>
+            </a:bodyPr>
+            <a:lstStyle/>
+            <a:p>
+              <a:pPr algn="ctr"/>
+              <a:r>
+                <a:rPr lang="ko-KR" altLang="en-US" sz="1400" dirty="0" err="1">
+                  <a:solidFill>
+                    <a:srgbClr val="00B0F0"/>
+                  </a:solidFill>
+                  <a:latin typeface="KoPub돋움체 Bold" panose="00000800000000000000" pitchFamily="2" charset="-127"/>
+                  <a:ea typeface="KoPub돋움체 Bold" panose="00000800000000000000" pitchFamily="2" charset="-127"/>
+                </a:rPr>
+                <a:t>우리가치</a:t>
+              </a:r>
+              <a:r>
+                <a:rPr lang="ko-KR" altLang="en-US" sz="1400" dirty="0">
+                  <a:solidFill>
+                    <a:schemeClr val="accent1">
+                      <a:lumMod val="50000"/>
+                    </a:schemeClr>
+                  </a:solidFill>
+                  <a:latin typeface="KoPub돋움체 Bold" panose="02020603020101020101" pitchFamily="18" charset="-127"/>
+                  <a:ea typeface="KoPub돋움체 Bold" panose="02020603020101020101" pitchFamily="18" charset="-127"/>
+                </a:rPr>
+                <a:t> </a:t>
+              </a:r>
+              <a:r>
+                <a:rPr lang="en-US" altLang="ko-KR" sz="1400" dirty="0" err="1">
+                  <a:solidFill>
+                    <a:schemeClr val="accent1">
+                      <a:lumMod val="50000"/>
+                    </a:schemeClr>
+                  </a:solidFill>
+                  <a:latin typeface="Franklin Gothic Heavy" panose="020B0903020102020204" pitchFamily="34" charset="0"/>
+                  <a:ea typeface="KoPub돋움체 Bold" panose="02020603020101020101" pitchFamily="18" charset="-127"/>
+                </a:rPr>
+                <a:t>WeValue</a:t>
+              </a:r>
+              <a:endParaRPr lang="en-US" altLang="ko-KR" sz="1400" dirty="0">
+                <a:solidFill>
+                  <a:schemeClr val="accent1">
+                    <a:lumMod val="50000"/>
+                  </a:schemeClr>
+                </a:solidFill>
+                <a:latin typeface="Franklin Gothic Heavy" panose="020B0903020102020204" pitchFamily="34" charset="0"/>
+                <a:ea typeface="KoPub돋움체 Bold" panose="02020603020101020101" pitchFamily="18" charset="-127"/>
+              </a:endParaRPr>
+            </a:p>
+          </p:txBody>
+        </p:sp>
+        <p:sp>
+          <p:nvSpPr>
+            <p:cNvPr id="6" name="TextBox 5">
+              <a:extLst>
+                <a:ext uri="{FF2B5EF4-FFF2-40B4-BE49-F238E27FC236}">
+                  <a16:creationId xmlns:a16="http://schemas.microsoft.com/office/drawing/2014/main" id="{25F3C248-44C4-9D7A-C464-62D68C9890DC}"/>
+                </a:ext>
+              </a:extLst>
+            </p:cNvPr>
+            <p:cNvSpPr txBox="1"/>
+            <p:nvPr/>
+          </p:nvSpPr>
+          <p:spPr>
+            <a:xfrm>
+              <a:off x="622591" y="451833"/>
+              <a:ext cx="1729962" cy="200055"/>
+            </a:xfrm>
+            <a:prstGeom prst="rect">
+              <a:avLst/>
+            </a:prstGeom>
+            <a:noFill/>
+          </p:spPr>
+          <p:txBody>
+            <a:bodyPr wrap="none">
+              <a:spAutoFit/>
+            </a:bodyPr>
+            <a:lstStyle/>
+            <a:p>
+              <a:pPr algn="ctr"/>
+              <a:r>
+                <a:rPr lang="en-US" altLang="ko-KR" sz="700" b="1" dirty="0">
+                  <a:latin typeface="KoPub돋움체 Bold" panose="00000800000000000000" pitchFamily="2" charset="-127"/>
+                  <a:ea typeface="KoPub돋움체 Bold" panose="00000800000000000000" pitchFamily="2" charset="-127"/>
+                </a:rPr>
+                <a:t>[</a:t>
+              </a:r>
+              <a:r>
+                <a:rPr lang="ko-KR" altLang="en-US" sz="700" b="1" dirty="0">
+                  <a:latin typeface="KoPub돋움체 Bold" panose="00000800000000000000" pitchFamily="2" charset="-127"/>
+                  <a:ea typeface="KoPub돋움체 Bold" panose="00000800000000000000" pitchFamily="2" charset="-127"/>
+                </a:rPr>
+                <a:t>우리가 가치를 만드는 공간</a:t>
+              </a:r>
+              <a:r>
+                <a:rPr lang="en-US" altLang="ko-KR" sz="700" b="1" dirty="0">
+                  <a:latin typeface="KoPub돋움체 Bold" panose="00000800000000000000" pitchFamily="2" charset="-127"/>
+                  <a:ea typeface="KoPub돋움체 Bold" panose="00000800000000000000" pitchFamily="2" charset="-127"/>
+                </a:rPr>
+                <a:t>, </a:t>
+              </a:r>
+              <a:r>
+                <a:rPr lang="ko-KR" altLang="en-US" sz="700" b="1" dirty="0" err="1">
+                  <a:latin typeface="KoPub돋움체 Bold" panose="00000800000000000000" pitchFamily="2" charset="-127"/>
+                  <a:ea typeface="KoPub돋움체 Bold" panose="00000800000000000000" pitchFamily="2" charset="-127"/>
+                </a:rPr>
+                <a:t>우리가치</a:t>
+              </a:r>
+              <a:r>
+                <a:rPr lang="ko-KR" altLang="en-US" sz="700" b="1" dirty="0">
+                  <a:latin typeface="KoPub돋움체 Bold" panose="00000800000000000000" pitchFamily="2" charset="-127"/>
+                  <a:ea typeface="KoPub돋움체 Bold" panose="00000800000000000000" pitchFamily="2" charset="-127"/>
+                </a:rPr>
+                <a:t> 허브</a:t>
+              </a:r>
+              <a:r>
+                <a:rPr lang="en-US" altLang="ko-KR" sz="700" b="1" dirty="0">
+                  <a:latin typeface="KoPub돋움체 Bold" panose="00000800000000000000" pitchFamily="2" charset="-127"/>
+                  <a:ea typeface="KoPub돋움체 Bold" panose="00000800000000000000" pitchFamily="2" charset="-127"/>
+                </a:rPr>
+                <a:t>]</a:t>
+              </a:r>
+            </a:p>
+          </p:txBody>
+        </p:sp>
+        <p:pic>
+          <p:nvPicPr>
+            <p:cNvPr id="10" name="그림 9">
+              <a:extLst>
+                <a:ext uri="{FF2B5EF4-FFF2-40B4-BE49-F238E27FC236}">
+                  <a16:creationId xmlns:a16="http://schemas.microsoft.com/office/drawing/2014/main" id="{EB1E9046-9340-4D3D-AA23-F89851FB0C3F}"/>
+                </a:ext>
+              </a:extLst>
+            </p:cNvPr>
+            <p:cNvPicPr>
+              <a:picLocks noChangeAspect="1"/>
+            </p:cNvPicPr>
+            <p:nvPr/>
+          </p:nvPicPr>
+          <p:blipFill>
+            <a:blip r:embed="rId3"/>
+            <a:stretch>
+              <a:fillRect/>
+            </a:stretch>
+          </p:blipFill>
+          <p:spPr>
+            <a:xfrm>
+              <a:off x="614240" y="271322"/>
+              <a:ext cx="147416" cy="128728"/>
+            </a:xfrm>
+            <a:prstGeom prst="rect">
+              <a:avLst/>
+            </a:prstGeom>
+          </p:spPr>
+        </p:pic>
+        <p:pic>
+          <p:nvPicPr>
+            <p:cNvPr id="29" name="그림 28">
+              <a:extLst>
+                <a:ext uri="{FF2B5EF4-FFF2-40B4-BE49-F238E27FC236}">
+                  <a16:creationId xmlns:a16="http://schemas.microsoft.com/office/drawing/2014/main" id="{799E618A-B635-413C-90D6-9BBB5F48E428}"/>
+                </a:ext>
+              </a:extLst>
+            </p:cNvPr>
+            <p:cNvPicPr>
+              <a:picLocks noChangeAspect="1"/>
+            </p:cNvPicPr>
+            <p:nvPr/>
+          </p:nvPicPr>
+          <p:blipFill>
+            <a:blip r:embed="rId3"/>
+            <a:stretch>
+              <a:fillRect/>
+            </a:stretch>
+          </p:blipFill>
+          <p:spPr>
+            <a:xfrm rot="10800000">
+              <a:off x="2181315" y="257361"/>
+              <a:ext cx="179389" cy="156650"/>
+            </a:xfrm>
+            <a:prstGeom prst="rect">
+              <a:avLst/>
+            </a:prstGeom>
+          </p:spPr>
+        </p:pic>
+        <p:pic>
+          <p:nvPicPr>
+            <p:cNvPr id="30" name="그림 29">
+              <a:extLst>
+                <a:ext uri="{FF2B5EF4-FFF2-40B4-BE49-F238E27FC236}">
+                  <a16:creationId xmlns:a16="http://schemas.microsoft.com/office/drawing/2014/main" id="{FCD9B137-9F07-4052-B76C-36D6AED25D86}"/>
+                </a:ext>
+              </a:extLst>
+            </p:cNvPr>
+            <p:cNvPicPr>
+              <a:picLocks noChangeAspect="1"/>
+            </p:cNvPicPr>
+            <p:nvPr/>
+          </p:nvPicPr>
+          <p:blipFill>
+            <a:blip r:embed="rId3"/>
+            <a:stretch>
+              <a:fillRect/>
+            </a:stretch>
+          </p:blipFill>
+          <p:spPr>
+            <a:xfrm rot="10800000">
+              <a:off x="2197302" y="276730"/>
+              <a:ext cx="147414" cy="128728"/>
+            </a:xfrm>
+            <a:prstGeom prst="rect">
+              <a:avLst/>
+            </a:prstGeom>
+          </p:spPr>
+        </p:pic>
+      </p:grpSp>
+      <p:grpSp>
+        <p:nvGrpSpPr>
+          <p:cNvPr id="12" name="그룹 11">
+            <a:extLst>
+              <a:ext uri="{FF2B5EF4-FFF2-40B4-BE49-F238E27FC236}">
+                <a16:creationId xmlns:a16="http://schemas.microsoft.com/office/drawing/2014/main" id="{6B2D700B-07E0-4E28-A7D2-0F4C62846EE3}"/>
+              </a:ext>
+            </a:extLst>
+          </p:cNvPr>
+          <p:cNvGrpSpPr/>
+          <p:nvPr/>
+        </p:nvGrpSpPr>
+        <p:grpSpPr>
+          <a:xfrm>
+            <a:off x="1488355" y="772187"/>
+            <a:ext cx="1564409" cy="707886"/>
+            <a:chOff x="796295" y="778765"/>
+            <a:chExt cx="1564409" cy="707886"/>
+          </a:xfrm>
+        </p:grpSpPr>
+        <p:sp>
+          <p:nvSpPr>
+            <p:cNvPr id="26" name="TextBox 25">
+              <a:extLst>
+                <a:ext uri="{FF2B5EF4-FFF2-40B4-BE49-F238E27FC236}">
+                  <a16:creationId xmlns:a16="http://schemas.microsoft.com/office/drawing/2014/main" id="{61921C24-9018-417C-966E-E56980F41166}"/>
+                </a:ext>
+              </a:extLst>
+            </p:cNvPr>
+            <p:cNvSpPr txBox="1"/>
+            <p:nvPr/>
+          </p:nvSpPr>
+          <p:spPr>
+            <a:xfrm>
+              <a:off x="1422627" y="778765"/>
+              <a:ext cx="938077" cy="707886"/>
+            </a:xfrm>
+            <a:prstGeom prst="rect">
+              <a:avLst/>
+            </a:prstGeom>
+            <a:noFill/>
+          </p:spPr>
+          <p:txBody>
+            <a:bodyPr wrap="none" rtlCol="0">
+              <a:spAutoFit/>
+            </a:bodyPr>
+            <a:lstStyle/>
+            <a:p>
+              <a:r>
+                <a:rPr lang="en-US" altLang="ko-KR" sz="800" dirty="0">
+                  <a:latin typeface="KoPub돋움체 Light" panose="00000300000000000000" pitchFamily="2" charset="-127"/>
+                  <a:ea typeface="KoPub돋움체 Light" panose="00000300000000000000" pitchFamily="2" charset="-127"/>
+                </a:rPr>
+                <a:t>"</a:t>
+              </a:r>
+              <a:r>
+                <a:rPr lang="ko-KR" altLang="en-US" sz="800" dirty="0">
+                  <a:latin typeface="KoPub돋움체 Light" panose="00000300000000000000" pitchFamily="2" charset="-127"/>
+                  <a:ea typeface="KoPub돋움체 Light" panose="00000300000000000000" pitchFamily="2" charset="-127"/>
+                </a:rPr>
+                <a:t>함께하는 즐거움</a:t>
+              </a:r>
+              <a:r>
+                <a:rPr lang="en-US" altLang="ko-KR" sz="800" dirty="0">
+                  <a:latin typeface="KoPub돋움체 Light" panose="00000300000000000000" pitchFamily="2" charset="-127"/>
+                  <a:ea typeface="KoPub돋움체 Light" panose="00000300000000000000" pitchFamily="2" charset="-127"/>
+                </a:rPr>
+                <a:t>“</a:t>
+              </a:r>
+            </a:p>
+            <a:p>
+              <a:r>
+                <a:rPr lang="en-US" altLang="ko-KR" sz="800" dirty="0">
+                  <a:latin typeface="KoPub돋움체 Light" panose="00000300000000000000" pitchFamily="2" charset="-127"/>
+                  <a:ea typeface="KoPub돋움체 Light" panose="00000300000000000000" pitchFamily="2" charset="-127"/>
+                </a:rPr>
+                <a:t>"</a:t>
+              </a:r>
+              <a:r>
+                <a:rPr lang="ko-KR" altLang="en-US" sz="800" dirty="0">
+                  <a:latin typeface="KoPub돋움체 Light" panose="00000300000000000000" pitchFamily="2" charset="-127"/>
+                  <a:ea typeface="KoPub돋움체 Light" panose="00000300000000000000" pitchFamily="2" charset="-127"/>
+                </a:rPr>
+                <a:t>명확한 약속</a:t>
+              </a:r>
+              <a:r>
+                <a:rPr lang="en-US" altLang="ko-KR" sz="800" dirty="0">
+                  <a:latin typeface="KoPub돋움체 Light" panose="00000300000000000000" pitchFamily="2" charset="-127"/>
+                  <a:ea typeface="KoPub돋움체 Light" panose="00000300000000000000" pitchFamily="2" charset="-127"/>
+                </a:rPr>
+                <a:t>"</a:t>
+              </a:r>
+              <a:endParaRPr lang="ko-KR" altLang="en-US" sz="800" dirty="0">
+                <a:latin typeface="KoPub돋움체 Light" panose="00000300000000000000" pitchFamily="2" charset="-127"/>
+                <a:ea typeface="KoPub돋움체 Light" panose="00000300000000000000" pitchFamily="2" charset="-127"/>
+              </a:endParaRPr>
+            </a:p>
+            <a:p>
+              <a:r>
+                <a:rPr lang="en-US" altLang="ko-KR" sz="800" dirty="0">
+                  <a:latin typeface="KoPub돋움체 Light" panose="00000300000000000000" pitchFamily="2" charset="-127"/>
+                  <a:ea typeface="KoPub돋움체 Light" panose="00000300000000000000" pitchFamily="2" charset="-127"/>
+                </a:rPr>
+                <a:t>"</a:t>
+              </a:r>
+              <a:r>
+                <a:rPr lang="ko-KR" altLang="en-US" sz="800" dirty="0">
+                  <a:latin typeface="KoPub돋움체 Light" panose="00000300000000000000" pitchFamily="2" charset="-127"/>
+                  <a:ea typeface="KoPub돋움체 Light" panose="00000300000000000000" pitchFamily="2" charset="-127"/>
+                </a:rPr>
+                <a:t>한눈에 보는 실무</a:t>
+              </a:r>
+              <a:r>
+                <a:rPr lang="en-US" altLang="ko-KR" sz="800" dirty="0">
+                  <a:latin typeface="KoPub돋움체 Light" panose="00000300000000000000" pitchFamily="2" charset="-127"/>
+                  <a:ea typeface="KoPub돋움체 Light" panose="00000300000000000000" pitchFamily="2" charset="-127"/>
+                </a:rPr>
+                <a:t>"</a:t>
+              </a:r>
+              <a:endParaRPr lang="ko-KR" altLang="en-US" sz="800" dirty="0">
+                <a:latin typeface="KoPub돋움체 Light" panose="00000300000000000000" pitchFamily="2" charset="-127"/>
+                <a:ea typeface="KoPub돋움체 Light" panose="00000300000000000000" pitchFamily="2" charset="-127"/>
+              </a:endParaRPr>
+            </a:p>
+            <a:p>
+              <a:r>
+                <a:rPr lang="en-US" altLang="ko-KR" sz="800" dirty="0">
+                  <a:latin typeface="KoPub돋움체 Light" panose="00000300000000000000" pitchFamily="2" charset="-127"/>
+                  <a:ea typeface="KoPub돋움체 Light" panose="00000300000000000000" pitchFamily="2" charset="-127"/>
+                </a:rPr>
+                <a:t>"</a:t>
+              </a:r>
+              <a:r>
+                <a:rPr lang="ko-KR" altLang="en-US" sz="800" dirty="0">
+                  <a:latin typeface="KoPub돋움체 Light" panose="00000300000000000000" pitchFamily="2" charset="-127"/>
+                  <a:ea typeface="KoPub돋움체 Light" panose="00000300000000000000" pitchFamily="2" charset="-127"/>
+                </a:rPr>
+                <a:t>현장 밀착형 지원</a:t>
+              </a:r>
+              <a:r>
+                <a:rPr lang="en-US" altLang="ko-KR" sz="800" dirty="0">
+                  <a:latin typeface="KoPub돋움체 Light" panose="00000300000000000000" pitchFamily="2" charset="-127"/>
+                  <a:ea typeface="KoPub돋움체 Light" panose="00000300000000000000" pitchFamily="2" charset="-127"/>
+                </a:rPr>
+                <a:t>"</a:t>
+              </a:r>
+              <a:endParaRPr lang="ko-KR" altLang="en-US" sz="800" dirty="0">
+                <a:latin typeface="KoPub돋움체 Light" panose="00000300000000000000" pitchFamily="2" charset="-127"/>
+                <a:ea typeface="KoPub돋움체 Light" panose="00000300000000000000" pitchFamily="2" charset="-127"/>
+              </a:endParaRPr>
+            </a:p>
+            <a:p>
+              <a:r>
+                <a:rPr lang="en-US" altLang="ko-KR" sz="800" dirty="0">
+                  <a:latin typeface="KoPub돋움체 Light" panose="00000300000000000000" pitchFamily="2" charset="-127"/>
+                  <a:ea typeface="KoPub돋움체 Light" panose="00000300000000000000" pitchFamily="2" charset="-127"/>
+                </a:rPr>
+                <a:t>"</a:t>
+              </a:r>
+              <a:r>
+                <a:rPr lang="ko-KR" altLang="en-US" sz="800" dirty="0">
+                  <a:latin typeface="KoPub돋움체 Light" panose="00000300000000000000" pitchFamily="2" charset="-127"/>
+                  <a:ea typeface="KoPub돋움체 Light" panose="00000300000000000000" pitchFamily="2" charset="-127"/>
+                </a:rPr>
+                <a:t>변화의 체감</a:t>
+              </a:r>
+              <a:r>
+                <a:rPr lang="en-US" altLang="ko-KR" sz="800" dirty="0">
+                  <a:latin typeface="KoPub돋움체 Light" panose="00000300000000000000" pitchFamily="2" charset="-127"/>
+                  <a:ea typeface="KoPub돋움체 Light" panose="00000300000000000000" pitchFamily="2" charset="-127"/>
+                </a:rPr>
+                <a:t>"</a:t>
+              </a:r>
+              <a:endParaRPr lang="ko-KR" altLang="en-US" sz="800" dirty="0">
+                <a:latin typeface="KoPub돋움체 Light" panose="00000300000000000000" pitchFamily="2" charset="-127"/>
+                <a:ea typeface="KoPub돋움체 Light" panose="00000300000000000000" pitchFamily="2" charset="-127"/>
+              </a:endParaRPr>
+            </a:p>
+          </p:txBody>
+        </p:sp>
+        <p:sp>
+          <p:nvSpPr>
+            <p:cNvPr id="31" name="TextBox 30">
+              <a:extLst>
+                <a:ext uri="{FF2B5EF4-FFF2-40B4-BE49-F238E27FC236}">
+                  <a16:creationId xmlns:a16="http://schemas.microsoft.com/office/drawing/2014/main" id="{62EAB35A-296C-468C-BCA0-D585048BF4E9}"/>
+                </a:ext>
+              </a:extLst>
+            </p:cNvPr>
+            <p:cNvSpPr txBox="1"/>
+            <p:nvPr/>
+          </p:nvSpPr>
+          <p:spPr>
+            <a:xfrm>
+              <a:off x="796295" y="778765"/>
+              <a:ext cx="753732" cy="707886"/>
+            </a:xfrm>
+            <a:prstGeom prst="rect">
+              <a:avLst/>
+            </a:prstGeom>
+            <a:noFill/>
+          </p:spPr>
+          <p:txBody>
+            <a:bodyPr wrap="none" rtlCol="0">
+              <a:spAutoFit/>
+            </a:bodyPr>
+            <a:lstStyle/>
+            <a:p>
+              <a:pPr marL="88900" indent="-88900">
+                <a:buClr>
+                  <a:srgbClr val="00B0F0"/>
+                </a:buClr>
+                <a:buFont typeface="Arial" panose="020B0604020202020204" pitchFamily="34" charset="0"/>
+                <a:buChar char="•"/>
+              </a:pPr>
+              <a:r>
+                <a:rPr lang="ko-KR" altLang="en-US" sz="800" b="1" dirty="0">
+                  <a:latin typeface="KoPub돋움체 Bold" panose="00000800000000000000" pitchFamily="2" charset="-127"/>
+                  <a:ea typeface="KoPub돋움체 Bold" panose="00000800000000000000" pitchFamily="2" charset="-127"/>
+                </a:rPr>
+                <a:t>소통의 광장</a:t>
+              </a:r>
+              <a:endParaRPr lang="en-US" altLang="ko-KR" sz="800" b="1" dirty="0">
+                <a:latin typeface="KoPub돋움체 Bold" panose="00000800000000000000" pitchFamily="2" charset="-127"/>
+                <a:ea typeface="KoPub돋움체 Bold" panose="00000800000000000000" pitchFamily="2" charset="-127"/>
+              </a:endParaRPr>
+            </a:p>
+            <a:p>
+              <a:pPr marL="88900" indent="-88900">
+                <a:buClr>
+                  <a:srgbClr val="00B0F0"/>
+                </a:buClr>
+                <a:buFont typeface="Arial" panose="020B0604020202020204" pitchFamily="34" charset="0"/>
+                <a:buChar char="•"/>
+              </a:pPr>
+              <a:r>
+                <a:rPr lang="ko-KR" altLang="en-US" sz="800" b="1" dirty="0">
+                  <a:latin typeface="KoPub돋움체 Bold" panose="00000800000000000000" pitchFamily="2" charset="-127"/>
+                  <a:ea typeface="KoPub돋움체 Bold" panose="00000800000000000000" pitchFamily="2" charset="-127"/>
+                </a:rPr>
+                <a:t>업무 기준</a:t>
+              </a:r>
+            </a:p>
+            <a:p>
+              <a:pPr marL="88900" indent="-88900">
+                <a:buClr>
+                  <a:srgbClr val="00B0F0"/>
+                </a:buClr>
+                <a:buFont typeface="Arial" panose="020B0604020202020204" pitchFamily="34" charset="0"/>
+                <a:buChar char="•"/>
+              </a:pPr>
+              <a:r>
+                <a:rPr lang="ko-KR" altLang="en-US" sz="800" b="1" dirty="0">
+                  <a:latin typeface="KoPub돋움체 Bold" panose="00000800000000000000" pitchFamily="2" charset="-127"/>
+                  <a:ea typeface="KoPub돋움체 Bold" panose="00000800000000000000" pitchFamily="2" charset="-127"/>
+                </a:rPr>
+                <a:t>교육자료</a:t>
+              </a:r>
+            </a:p>
+            <a:p>
+              <a:pPr marL="88900" indent="-88900">
+                <a:buClr>
+                  <a:srgbClr val="00B0F0"/>
+                </a:buClr>
+                <a:buFont typeface="Arial" panose="020B0604020202020204" pitchFamily="34" charset="0"/>
+                <a:buChar char="•"/>
+              </a:pPr>
+              <a:r>
+                <a:rPr lang="ko-KR" altLang="en-US" sz="800" b="1" dirty="0">
+                  <a:latin typeface="KoPub돋움체 Bold" panose="00000800000000000000" pitchFamily="2" charset="-127"/>
+                  <a:ea typeface="KoPub돋움체 Bold" panose="00000800000000000000" pitchFamily="2" charset="-127"/>
+                </a:rPr>
+                <a:t>요청</a:t>
+              </a:r>
+            </a:p>
+            <a:p>
+              <a:pPr marL="88900" indent="-88900">
+                <a:buClr>
+                  <a:srgbClr val="00B0F0"/>
+                </a:buClr>
+                <a:buFont typeface="Arial" panose="020B0604020202020204" pitchFamily="34" charset="0"/>
+                <a:buChar char="•"/>
+              </a:pPr>
+              <a:r>
+                <a:rPr lang="ko-KR" altLang="en-US" sz="800" b="1" dirty="0">
+                  <a:latin typeface="KoPub돋움체 Bold" panose="00000800000000000000" pitchFamily="2" charset="-127"/>
+                  <a:ea typeface="KoPub돋움체 Bold" panose="00000800000000000000" pitchFamily="2" charset="-127"/>
+                </a:rPr>
+                <a:t>지표</a:t>
+              </a:r>
+            </a:p>
+          </p:txBody>
+        </p:sp>
+      </p:grpSp>
     </p:spTree>
     <p:extLst>
       <p:ext uri="{BB962C8B-B14F-4D97-AF65-F5344CB8AC3E}">
-        <p14:creationId xmlns:p14="http://schemas.microsoft.com/office/powerpoint/2010/main" val="2222454785"/>
+        <p14:creationId xmlns:p14="http://schemas.microsoft.com/office/powerpoint/2010/main" val="2768433760"/>
       </p:ext>
     </p:extLst>
   </p:cSld>
@@ -6159,13 +5937,7 @@
   <p:cSld>
     <p:spTree>
       <p:nvGrpSpPr>
-        <p:cNvPr id="1" name="">
-          <a:extLst>
-            <a:ext uri="{FF2B5EF4-FFF2-40B4-BE49-F238E27FC236}">
-              <a16:creationId xmlns:a16="http://schemas.microsoft.com/office/drawing/2014/main" id="{5C7AE82B-6EAE-9A57-39A3-79023A20E89C}"/>
-            </a:ext>
-          </a:extLst>
-        </p:cNvPr>
+        <p:cNvPr id="1" name=""/>
         <p:cNvGrpSpPr/>
         <p:nvPr/>
       </p:nvGrpSpPr>
@@ -6179,230 +5951,10 @@
       </p:grpSpPr>
       <p:sp>
         <p:nvSpPr>
-          <p:cNvPr id="28" name="사각형: 둥근 모서리 27">
-            <a:extLst>
-              <a:ext uri="{FF2B5EF4-FFF2-40B4-BE49-F238E27FC236}">
-                <a16:creationId xmlns:a16="http://schemas.microsoft.com/office/drawing/2014/main" id="{2C6649FF-9106-ACD6-C7D7-9614EC350346}"/>
-              </a:ext>
-            </a:extLst>
-          </p:cNvPr>
-          <p:cNvSpPr/>
-          <p:nvPr/>
-        </p:nvSpPr>
-        <p:spPr>
-          <a:xfrm>
-            <a:off x="1598636" y="1043683"/>
-            <a:ext cx="1264364" cy="230832"/>
-          </a:xfrm>
-          <a:prstGeom prst="roundRect">
-            <a:avLst/>
-          </a:prstGeom>
-          <a:solidFill>
-            <a:schemeClr val="bg2"/>
-          </a:solidFill>
-          <a:ln>
-            <a:noFill/>
-          </a:ln>
-        </p:spPr>
-        <p:style>
-          <a:lnRef idx="2">
-            <a:schemeClr val="accent3">
-              <a:shade val="15000"/>
-            </a:schemeClr>
-          </a:lnRef>
-          <a:fillRef idx="1">
-            <a:schemeClr val="accent3"/>
-          </a:fillRef>
-          <a:effectRef idx="0">
-            <a:schemeClr val="accent3"/>
-          </a:effectRef>
-          <a:fontRef idx="minor">
-            <a:schemeClr val="lt1"/>
-          </a:fontRef>
-        </p:style>
-        <p:txBody>
-          <a:bodyPr rtlCol="0" anchor="ctr"/>
-          <a:lstStyle/>
-          <a:p>
-            <a:pPr algn="ctr"/>
-            <a:endParaRPr lang="ko-KR" altLang="en-US" sz="2400">
-              <a:latin typeface="KoPub돋움체 Light" panose="02020603020101020101" pitchFamily="18" charset="-127"/>
-              <a:ea typeface="KoPub돋움체 Light" panose="02020603020101020101" pitchFamily="18" charset="-127"/>
-            </a:endParaRPr>
-          </a:p>
-        </p:txBody>
-      </p:sp>
-      <p:sp>
-        <p:nvSpPr>
-          <p:cNvPr id="29" name="사각형: 둥근 모서리 28">
-            <a:extLst>
-              <a:ext uri="{FF2B5EF4-FFF2-40B4-BE49-F238E27FC236}">
-                <a16:creationId xmlns:a16="http://schemas.microsoft.com/office/drawing/2014/main" id="{F78FB4D1-EB4A-DAD8-DFD3-E492B74D0C5F}"/>
-              </a:ext>
-            </a:extLst>
-          </p:cNvPr>
-          <p:cNvSpPr/>
-          <p:nvPr/>
-        </p:nvSpPr>
-        <p:spPr>
-          <a:xfrm>
-            <a:off x="236105" y="1307925"/>
-            <a:ext cx="1264364" cy="230832"/>
-          </a:xfrm>
-          <a:prstGeom prst="roundRect">
-            <a:avLst/>
-          </a:prstGeom>
-          <a:solidFill>
-            <a:schemeClr val="bg2"/>
-          </a:solidFill>
-          <a:ln>
-            <a:noFill/>
-          </a:ln>
-        </p:spPr>
-        <p:style>
-          <a:lnRef idx="2">
-            <a:schemeClr val="accent3">
-              <a:shade val="15000"/>
-            </a:schemeClr>
-          </a:lnRef>
-          <a:fillRef idx="1">
-            <a:schemeClr val="accent3"/>
-          </a:fillRef>
-          <a:effectRef idx="0">
-            <a:schemeClr val="accent3"/>
-          </a:effectRef>
-          <a:fontRef idx="minor">
-            <a:schemeClr val="lt1"/>
-          </a:fontRef>
-        </p:style>
-        <p:txBody>
-          <a:bodyPr rtlCol="0" anchor="ctr"/>
-          <a:lstStyle/>
-          <a:p>
-            <a:pPr algn="ctr"/>
-            <a:endParaRPr lang="ko-KR" altLang="en-US" sz="2400">
-              <a:latin typeface="KoPub돋움체 Light" panose="02020603020101020101" pitchFamily="18" charset="-127"/>
-              <a:ea typeface="KoPub돋움체 Light" panose="02020603020101020101" pitchFamily="18" charset="-127"/>
-            </a:endParaRPr>
-          </a:p>
-        </p:txBody>
-      </p:sp>
-      <p:sp>
-        <p:nvSpPr>
-          <p:cNvPr id="30" name="사각형: 둥근 모서리 29">
-            <a:extLst>
-              <a:ext uri="{FF2B5EF4-FFF2-40B4-BE49-F238E27FC236}">
-                <a16:creationId xmlns:a16="http://schemas.microsoft.com/office/drawing/2014/main" id="{545544D8-5BAC-1D5E-A938-80B8A63877CF}"/>
-              </a:ext>
-            </a:extLst>
-          </p:cNvPr>
-          <p:cNvSpPr/>
-          <p:nvPr/>
-        </p:nvSpPr>
-        <p:spPr>
-          <a:xfrm>
-            <a:off x="1598636" y="1307925"/>
-            <a:ext cx="1264364" cy="230832"/>
-          </a:xfrm>
-          <a:prstGeom prst="roundRect">
-            <a:avLst/>
-          </a:prstGeom>
-          <a:solidFill>
-            <a:schemeClr val="bg2"/>
-          </a:solidFill>
-          <a:ln>
-            <a:noFill/>
-          </a:ln>
-        </p:spPr>
-        <p:style>
-          <a:lnRef idx="2">
-            <a:schemeClr val="accent3">
-              <a:shade val="15000"/>
-            </a:schemeClr>
-          </a:lnRef>
-          <a:fillRef idx="1">
-            <a:schemeClr val="accent3"/>
-          </a:fillRef>
-          <a:effectRef idx="0">
-            <a:schemeClr val="accent3"/>
-          </a:effectRef>
-          <a:fontRef idx="minor">
-            <a:schemeClr val="lt1"/>
-          </a:fontRef>
-        </p:style>
-        <p:txBody>
-          <a:bodyPr rtlCol="0" anchor="ctr"/>
-          <a:lstStyle/>
-          <a:p>
-            <a:pPr algn="ctr"/>
-            <a:endParaRPr lang="ko-KR" altLang="en-US" sz="2400">
-              <a:latin typeface="KoPub돋움체 Light" panose="02020603020101020101" pitchFamily="18" charset="-127"/>
-              <a:ea typeface="KoPub돋움체 Light" panose="02020603020101020101" pitchFamily="18" charset="-127"/>
-            </a:endParaRPr>
-          </a:p>
-        </p:txBody>
-      </p:sp>
-      <p:sp>
-        <p:nvSpPr>
-          <p:cNvPr id="21" name="사각형: 둥근 모서리 20">
-            <a:extLst>
-              <a:ext uri="{FF2B5EF4-FFF2-40B4-BE49-F238E27FC236}">
-                <a16:creationId xmlns:a16="http://schemas.microsoft.com/office/drawing/2014/main" id="{7C55D35B-2B09-F0D9-4FA6-6CFFDA2A6C70}"/>
-              </a:ext>
-            </a:extLst>
-          </p:cNvPr>
-          <p:cNvSpPr/>
-          <p:nvPr/>
-        </p:nvSpPr>
-        <p:spPr>
-          <a:xfrm>
-            <a:off x="236105" y="1043683"/>
-            <a:ext cx="1264364" cy="230832"/>
-          </a:xfrm>
-          <a:prstGeom prst="roundRect">
-            <a:avLst/>
-          </a:prstGeom>
-          <a:solidFill>
-            <a:schemeClr val="bg2"/>
-          </a:solidFill>
-          <a:ln>
-            <a:noFill/>
-          </a:ln>
-        </p:spPr>
-        <p:style>
-          <a:lnRef idx="2">
-            <a:schemeClr val="accent3">
-              <a:shade val="15000"/>
-            </a:schemeClr>
-          </a:lnRef>
-          <a:fillRef idx="1">
-            <a:schemeClr val="accent3"/>
-          </a:fillRef>
-          <a:effectRef idx="0">
-            <a:schemeClr val="accent3"/>
-          </a:effectRef>
-          <a:fontRef idx="minor">
-            <a:schemeClr val="lt1"/>
-          </a:fontRef>
-        </p:style>
-        <p:txBody>
-          <a:bodyPr rtlCol="0" anchor="ctr"/>
-          <a:lstStyle/>
-          <a:p>
-            <a:pPr algn="ctr"/>
-            <a:endParaRPr lang="ko-KR" altLang="en-US" sz="2400">
-              <a:latin typeface="KoPub돋움체 Light" panose="02020603020101020101" pitchFamily="18" charset="-127"/>
-              <a:ea typeface="KoPub돋움체 Light" panose="02020603020101020101" pitchFamily="18" charset="-127"/>
-            </a:endParaRPr>
-          </a:p>
-        </p:txBody>
-      </p:sp>
-      <p:sp>
-        <p:nvSpPr>
           <p:cNvPr id="3" name="TextBox 2">
             <a:extLst>
               <a:ext uri="{FF2B5EF4-FFF2-40B4-BE49-F238E27FC236}">
-                <a16:creationId xmlns:a16="http://schemas.microsoft.com/office/drawing/2014/main" id="{E1E56CFB-7FC4-0325-C694-47231F1863BA}"/>
+                <a16:creationId xmlns:a16="http://schemas.microsoft.com/office/drawing/2014/main" id="{F5E3E193-F1E8-6947-F01D-A96C1A9F6D0E}"/>
               </a:ext>
             </a:extLst>
           </p:cNvPr>
@@ -6411,8 +5963,8 @@
         </p:nvSpPr>
         <p:spPr>
           <a:xfrm>
-            <a:off x="43517" y="54246"/>
-            <a:ext cx="1180381" cy="169277"/>
+            <a:off x="25241" y="63223"/>
+            <a:ext cx="1403509" cy="184666"/>
           </a:xfrm>
           <a:prstGeom prst="rect">
             <a:avLst/>
@@ -6425,25 +5977,24 @@
           </a:bodyPr>
           <a:lstStyle/>
           <a:p>
-            <a:pPr algn="ctr"/>
             <a:r>
-              <a:rPr lang="ko-KR" altLang="en-US" sz="500" spc="-11" dirty="0">
-                <a:latin typeface="KoPub돋움체 Light" panose="02020603020101020101" pitchFamily="18" charset="-127"/>
-                <a:ea typeface="KoPub돋움체 Light" panose="02020603020101020101" pitchFamily="18" charset="-127"/>
+              <a:rPr lang="ko-KR" altLang="en-US" sz="600" b="1" spc="-11" dirty="0">
+                <a:latin typeface="KoPub돋움체 Bold" panose="00000800000000000000" pitchFamily="2" charset="-127"/>
+                <a:ea typeface="KoPub돋움체 Bold" panose="00000800000000000000" pitchFamily="2" charset="-127"/>
               </a:rPr>
               <a:t>순천향대학교 천안병원 </a:t>
             </a:r>
             <a:r>
-              <a:rPr lang="en-US" altLang="ko-KR" sz="500" spc="-11" dirty="0">
-                <a:latin typeface="KoPub돋움체 Light" panose="02020603020101020101" pitchFamily="18" charset="-127"/>
-                <a:ea typeface="KoPub돋움체 Light" panose="02020603020101020101" pitchFamily="18" charset="-127"/>
+              <a:rPr lang="en-US" altLang="ko-KR" sz="600" b="1" spc="-11" dirty="0">
+                <a:latin typeface="KoPub돋움체 Bold" panose="00000800000000000000" pitchFamily="2" charset="-127"/>
+                <a:ea typeface="KoPub돋움체 Bold" panose="00000800000000000000" pitchFamily="2" charset="-127"/>
               </a:rPr>
               <a:t>| </a:t>
             </a:r>
             <a:r>
-              <a:rPr lang="ko-KR" altLang="en-US" sz="500" spc="-11" dirty="0">
-                <a:latin typeface="KoPub돋움체 Light" panose="02020603020101020101" pitchFamily="18" charset="-127"/>
-                <a:ea typeface="KoPub돋움체 Light" panose="02020603020101020101" pitchFamily="18" charset="-127"/>
+              <a:rPr lang="ko-KR" altLang="en-US" sz="600" b="1" spc="-11" dirty="0">
+                <a:latin typeface="KoPub돋움체 Bold" panose="00000800000000000000" pitchFamily="2" charset="-127"/>
+                <a:ea typeface="KoPub돋움체 Bold" panose="00000800000000000000" pitchFamily="2" charset="-127"/>
               </a:rPr>
               <a:t>진료지원간호팀 </a:t>
             </a:r>
@@ -6452,10 +6003,10 @@
       </p:sp>
       <p:grpSp>
         <p:nvGrpSpPr>
-          <p:cNvPr id="20" name="그룹 19">
+          <p:cNvPr id="17" name="그룹 16">
             <a:extLst>
               <a:ext uri="{FF2B5EF4-FFF2-40B4-BE49-F238E27FC236}">
-                <a16:creationId xmlns:a16="http://schemas.microsoft.com/office/drawing/2014/main" id="{1D73487C-5786-EB5A-C91B-CFC67161A1AA}"/>
+                <a16:creationId xmlns:a16="http://schemas.microsoft.com/office/drawing/2014/main" id="{CCD23336-35E2-7BBF-742C-67D82BDC7617}"/>
               </a:ext>
             </a:extLst>
           </p:cNvPr>
@@ -6464,449 +6015,8 @@
         </p:nvGrpSpPr>
         <p:grpSpPr>
           <a:xfrm>
-            <a:off x="692840" y="331471"/>
-            <a:ext cx="2337499" cy="520584"/>
-            <a:chOff x="422852" y="312900"/>
-            <a:chExt cx="2337499" cy="520584"/>
-          </a:xfrm>
-        </p:grpSpPr>
-        <p:sp>
-          <p:nvSpPr>
-            <p:cNvPr id="4" name="TextBox 3">
-              <a:extLst>
-                <a:ext uri="{FF2B5EF4-FFF2-40B4-BE49-F238E27FC236}">
-                  <a16:creationId xmlns:a16="http://schemas.microsoft.com/office/drawing/2014/main" id="{9E8573DF-2F57-FB6A-5504-01B2431A3F44}"/>
-                </a:ext>
-              </a:extLst>
-            </p:cNvPr>
-            <p:cNvSpPr txBox="1"/>
-            <p:nvPr/>
-          </p:nvSpPr>
-          <p:spPr>
-            <a:xfrm>
-              <a:off x="696163" y="312900"/>
-              <a:ext cx="1790875" cy="338554"/>
-            </a:xfrm>
-            <a:prstGeom prst="rect">
-              <a:avLst/>
-            </a:prstGeom>
-            <a:noFill/>
-          </p:spPr>
-          <p:txBody>
-            <a:bodyPr wrap="none">
-              <a:spAutoFit/>
-            </a:bodyPr>
-            <a:lstStyle/>
-            <a:p>
-              <a:pPr algn="ctr"/>
-              <a:r>
-                <a:rPr lang="ko-KR" altLang="en-US" sz="1600" dirty="0" err="1">
-                  <a:solidFill>
-                    <a:schemeClr val="accent1">
-                      <a:lumMod val="50000"/>
-                    </a:schemeClr>
-                  </a:solidFill>
-                  <a:latin typeface="KoPub돋움체 Bold" panose="02020603020101020101" pitchFamily="18" charset="-127"/>
-                  <a:ea typeface="KoPub돋움체 Bold" panose="02020603020101020101" pitchFamily="18" charset="-127"/>
-                </a:rPr>
-                <a:t>우리가치</a:t>
-              </a:r>
-              <a:r>
-                <a:rPr lang="ko-KR" altLang="en-US" sz="1600" dirty="0">
-                  <a:solidFill>
-                    <a:schemeClr val="accent1">
-                      <a:lumMod val="50000"/>
-                    </a:schemeClr>
-                  </a:solidFill>
-                  <a:latin typeface="KoPub돋움체 Bold" panose="02020603020101020101" pitchFamily="18" charset="-127"/>
-                  <a:ea typeface="KoPub돋움체 Bold" panose="02020603020101020101" pitchFamily="18" charset="-127"/>
-                </a:rPr>
-                <a:t> </a:t>
-              </a:r>
-              <a:r>
-                <a:rPr lang="en-US" altLang="ko-KR" sz="1600" dirty="0" err="1">
-                  <a:solidFill>
-                    <a:schemeClr val="accent1">
-                      <a:lumMod val="50000"/>
-                    </a:schemeClr>
-                  </a:solidFill>
-                  <a:latin typeface="KoPub돋움체 Bold" panose="02020603020101020101" pitchFamily="18" charset="-127"/>
-                  <a:ea typeface="KoPub돋움체 Bold" panose="02020603020101020101" pitchFamily="18" charset="-127"/>
-                </a:rPr>
-                <a:t>WeValue</a:t>
-              </a:r>
-              <a:endParaRPr lang="en-US" altLang="ko-KR" sz="1600" dirty="0">
-                <a:solidFill>
-                  <a:schemeClr val="accent1">
-                    <a:lumMod val="50000"/>
-                  </a:schemeClr>
-                </a:solidFill>
-                <a:latin typeface="KoPub돋움체 Bold" panose="02020603020101020101" pitchFamily="18" charset="-127"/>
-                <a:ea typeface="KoPub돋움체 Bold" panose="02020603020101020101" pitchFamily="18" charset="-127"/>
-              </a:endParaRPr>
-            </a:p>
-          </p:txBody>
-        </p:sp>
-        <p:sp>
-          <p:nvSpPr>
-            <p:cNvPr id="6" name="TextBox 5">
-              <a:extLst>
-                <a:ext uri="{FF2B5EF4-FFF2-40B4-BE49-F238E27FC236}">
-                  <a16:creationId xmlns:a16="http://schemas.microsoft.com/office/drawing/2014/main" id="{D741F560-8C71-171C-0D18-3B1D993940A2}"/>
-                </a:ext>
-              </a:extLst>
-            </p:cNvPr>
-            <p:cNvSpPr txBox="1"/>
-            <p:nvPr/>
-          </p:nvSpPr>
-          <p:spPr>
-            <a:xfrm>
-              <a:off x="422852" y="587263"/>
-              <a:ext cx="2337499" cy="246221"/>
-            </a:xfrm>
-            <a:prstGeom prst="rect">
-              <a:avLst/>
-            </a:prstGeom>
-            <a:noFill/>
-          </p:spPr>
-          <p:txBody>
-            <a:bodyPr wrap="none">
-              <a:spAutoFit/>
-            </a:bodyPr>
-            <a:lstStyle/>
-            <a:p>
-              <a:pPr algn="ctr"/>
-              <a:r>
-                <a:rPr lang="en-US" altLang="ko-KR" sz="1000" b="1" dirty="0">
-                  <a:latin typeface="KoPub돋움체 Light" panose="02020603020101020101" pitchFamily="18" charset="-127"/>
-                  <a:ea typeface="KoPub돋움체 Light" panose="02020603020101020101" pitchFamily="18" charset="-127"/>
-                </a:rPr>
-                <a:t>[</a:t>
-              </a:r>
-              <a:r>
-                <a:rPr lang="ko-KR" altLang="en-US" sz="1000" b="1" dirty="0">
-                  <a:latin typeface="KoPub돋움체 Light" panose="02020603020101020101" pitchFamily="18" charset="-127"/>
-                  <a:ea typeface="KoPub돋움체 Light" panose="02020603020101020101" pitchFamily="18" charset="-127"/>
-                </a:rPr>
-                <a:t>우리가 가치를 만드는 공간</a:t>
-              </a:r>
-              <a:r>
-                <a:rPr lang="en-US" altLang="ko-KR" sz="1000" b="1" dirty="0">
-                  <a:latin typeface="KoPub돋움체 Light" panose="02020603020101020101" pitchFamily="18" charset="-127"/>
-                  <a:ea typeface="KoPub돋움체 Light" panose="02020603020101020101" pitchFamily="18" charset="-127"/>
-                </a:rPr>
-                <a:t>, </a:t>
-              </a:r>
-              <a:r>
-                <a:rPr lang="ko-KR" altLang="en-US" sz="1000" b="1" dirty="0" err="1">
-                  <a:latin typeface="KoPub돋움체 Light" panose="02020603020101020101" pitchFamily="18" charset="-127"/>
-                  <a:ea typeface="KoPub돋움체 Light" panose="02020603020101020101" pitchFamily="18" charset="-127"/>
-                </a:rPr>
-                <a:t>우리가치</a:t>
-              </a:r>
-              <a:r>
-                <a:rPr lang="ko-KR" altLang="en-US" sz="1000" b="1" dirty="0">
-                  <a:latin typeface="KoPub돋움체 Light" panose="02020603020101020101" pitchFamily="18" charset="-127"/>
-                  <a:ea typeface="KoPub돋움체 Light" panose="02020603020101020101" pitchFamily="18" charset="-127"/>
-                </a:rPr>
-                <a:t> 허브</a:t>
-              </a:r>
-              <a:r>
-                <a:rPr lang="en-US" altLang="ko-KR" sz="1000" b="1" dirty="0">
-                  <a:latin typeface="KoPub돋움체 Light" panose="02020603020101020101" pitchFamily="18" charset="-127"/>
-                  <a:ea typeface="KoPub돋움체 Light" panose="02020603020101020101" pitchFamily="18" charset="-127"/>
-                </a:rPr>
-                <a:t>]</a:t>
-              </a:r>
-              <a:endParaRPr lang="en-US" altLang="ko-KR" sz="1000" b="1" dirty="0">
-                <a:solidFill>
-                  <a:schemeClr val="accent1">
-                    <a:lumMod val="50000"/>
-                  </a:schemeClr>
-                </a:solidFill>
-                <a:latin typeface="KoPub돋움체 Light" panose="02020603020101020101" pitchFamily="18" charset="-127"/>
-                <a:ea typeface="KoPub돋움체 Light" panose="02020603020101020101" pitchFamily="18" charset="-127"/>
-              </a:endParaRPr>
-            </a:p>
-          </p:txBody>
-        </p:sp>
-      </p:grpSp>
-      <p:sp>
-        <p:nvSpPr>
-          <p:cNvPr id="7" name="TextBox 6">
-            <a:extLst>
-              <a:ext uri="{FF2B5EF4-FFF2-40B4-BE49-F238E27FC236}">
-                <a16:creationId xmlns:a16="http://schemas.microsoft.com/office/drawing/2014/main" id="{767A8F8D-E64C-4876-E55B-DCAD15914A25}"/>
-              </a:ext>
-            </a:extLst>
-          </p:cNvPr>
-          <p:cNvSpPr txBox="1"/>
-          <p:nvPr/>
-        </p:nvSpPr>
-        <p:spPr>
-          <a:xfrm>
-            <a:off x="163608" y="1041309"/>
-            <a:ext cx="1409361" cy="230832"/>
-          </a:xfrm>
-          <a:prstGeom prst="rect">
-            <a:avLst/>
-          </a:prstGeom>
-          <a:noFill/>
-        </p:spPr>
-        <p:txBody>
-          <a:bodyPr wrap="none">
-            <a:spAutoFit/>
-          </a:bodyPr>
-          <a:lstStyle/>
-          <a:p>
-            <a:pPr algn="ctr"/>
-            <a:r>
-              <a:rPr lang="ko-KR" altLang="en-US" sz="900" b="1" dirty="0">
-                <a:solidFill>
-                  <a:schemeClr val="tx2">
-                    <a:lumMod val="50000"/>
-                  </a:schemeClr>
-                </a:solidFill>
-                <a:latin typeface="KoPub돋움체 Light" panose="02020603020101020101" pitchFamily="18" charset="-127"/>
-                <a:ea typeface="KoPub돋움체 Light" panose="02020603020101020101" pitchFamily="18" charset="-127"/>
-              </a:rPr>
-              <a:t>소통의 광장</a:t>
-            </a:r>
-            <a:r>
-              <a:rPr lang="en-US" altLang="ko-KR" sz="900" b="1" dirty="0">
-                <a:solidFill>
-                  <a:schemeClr val="tx2">
-                    <a:lumMod val="50000"/>
-                  </a:schemeClr>
-                </a:solidFill>
-                <a:latin typeface="KoPub돋움체 Light" panose="02020603020101020101" pitchFamily="18" charset="-127"/>
-                <a:ea typeface="KoPub돋움체 Light" panose="02020603020101020101" pitchFamily="18" charset="-127"/>
-              </a:rPr>
-              <a:t> (Community)</a:t>
-            </a:r>
-            <a:endParaRPr lang="en-US" altLang="ko-KR" sz="800" dirty="0">
-              <a:solidFill>
-                <a:schemeClr val="tx2">
-                  <a:lumMod val="50000"/>
-                </a:schemeClr>
-              </a:solidFill>
-              <a:latin typeface="KoPub돋움체 Light" panose="02020603020101020101" pitchFamily="18" charset="-127"/>
-              <a:ea typeface="KoPub돋움체 Light" panose="02020603020101020101" pitchFamily="18" charset="-127"/>
-            </a:endParaRPr>
-          </a:p>
-        </p:txBody>
-      </p:sp>
-      <p:sp>
-        <p:nvSpPr>
-          <p:cNvPr id="8" name="TextBox 7">
-            <a:extLst>
-              <a:ext uri="{FF2B5EF4-FFF2-40B4-BE49-F238E27FC236}">
-                <a16:creationId xmlns:a16="http://schemas.microsoft.com/office/drawing/2014/main" id="{11C9F6E1-31C6-BEBF-822B-2BA47D930954}"/>
-              </a:ext>
-            </a:extLst>
-          </p:cNvPr>
-          <p:cNvSpPr txBox="1"/>
-          <p:nvPr/>
-        </p:nvSpPr>
-        <p:spPr>
-          <a:xfrm>
-            <a:off x="1548581" y="1041309"/>
-            <a:ext cx="1364476" cy="230832"/>
-          </a:xfrm>
-          <a:prstGeom prst="rect">
-            <a:avLst/>
-          </a:prstGeom>
-          <a:noFill/>
-        </p:spPr>
-        <p:txBody>
-          <a:bodyPr wrap="none">
-            <a:spAutoFit/>
-          </a:bodyPr>
-          <a:lstStyle/>
-          <a:p>
-            <a:pPr algn="ctr"/>
-            <a:r>
-              <a:rPr lang="ko-KR" altLang="en-US" sz="900" b="1" dirty="0">
-                <a:solidFill>
-                  <a:schemeClr val="tx2">
-                    <a:lumMod val="50000"/>
-                  </a:schemeClr>
-                </a:solidFill>
-                <a:latin typeface="KoPub돋움체 Light" panose="02020603020101020101" pitchFamily="18" charset="-127"/>
-                <a:ea typeface="KoPub돋움체 Light" panose="02020603020101020101" pitchFamily="18" charset="-127"/>
-              </a:rPr>
-              <a:t>업무의 기준  </a:t>
-            </a:r>
-            <a:r>
-              <a:rPr lang="en-US" altLang="ko-KR" sz="900" b="1" dirty="0">
-                <a:solidFill>
-                  <a:schemeClr val="tx2">
-                    <a:lumMod val="50000"/>
-                  </a:schemeClr>
-                </a:solidFill>
-                <a:latin typeface="KoPub돋움체 Light" panose="02020603020101020101" pitchFamily="18" charset="-127"/>
-                <a:ea typeface="KoPub돋움체 Light" panose="02020603020101020101" pitchFamily="18" charset="-127"/>
-              </a:rPr>
-              <a:t>(Standards)</a:t>
-            </a:r>
-            <a:endParaRPr lang="en-US" altLang="ko-KR" sz="800" dirty="0">
-              <a:solidFill>
-                <a:schemeClr val="tx2">
-                  <a:lumMod val="50000"/>
-                </a:schemeClr>
-              </a:solidFill>
-              <a:latin typeface="KoPub돋움체 Light" panose="02020603020101020101" pitchFamily="18" charset="-127"/>
-              <a:ea typeface="KoPub돋움체 Light" panose="02020603020101020101" pitchFamily="18" charset="-127"/>
-            </a:endParaRPr>
-          </a:p>
-        </p:txBody>
-      </p:sp>
-      <p:sp>
-        <p:nvSpPr>
-          <p:cNvPr id="9" name="TextBox 8">
-            <a:extLst>
-              <a:ext uri="{FF2B5EF4-FFF2-40B4-BE49-F238E27FC236}">
-                <a16:creationId xmlns:a16="http://schemas.microsoft.com/office/drawing/2014/main" id="{32507177-51A5-2369-7AB2-839274A5B4AB}"/>
-              </a:ext>
-            </a:extLst>
-          </p:cNvPr>
-          <p:cNvSpPr txBox="1"/>
-          <p:nvPr/>
-        </p:nvSpPr>
-        <p:spPr>
-          <a:xfrm>
-            <a:off x="206889" y="1305551"/>
-            <a:ext cx="1322798" cy="230832"/>
-          </a:xfrm>
-          <a:prstGeom prst="rect">
-            <a:avLst/>
-          </a:prstGeom>
-          <a:noFill/>
-        </p:spPr>
-        <p:txBody>
-          <a:bodyPr wrap="none">
-            <a:spAutoFit/>
-          </a:bodyPr>
-          <a:lstStyle/>
-          <a:p>
-            <a:pPr algn="ctr"/>
-            <a:r>
-              <a:rPr lang="ko-KR" altLang="en-US" sz="900" b="1" dirty="0">
-                <a:solidFill>
-                  <a:schemeClr val="tx2">
-                    <a:lumMod val="50000"/>
-                  </a:schemeClr>
-                </a:solidFill>
-                <a:latin typeface="KoPub돋움체 Light" panose="02020603020101020101" pitchFamily="18" charset="-127"/>
-                <a:ea typeface="KoPub돋움체 Light" panose="02020603020101020101" pitchFamily="18" charset="-127"/>
-              </a:rPr>
-              <a:t>배움의 창구 </a:t>
-            </a:r>
-            <a:r>
-              <a:rPr lang="en-US" altLang="ko-KR" sz="900" b="1" dirty="0">
-                <a:solidFill>
-                  <a:schemeClr val="tx2">
-                    <a:lumMod val="50000"/>
-                  </a:schemeClr>
-                </a:solidFill>
-                <a:latin typeface="KoPub돋움체 Light" panose="02020603020101020101" pitchFamily="18" charset="-127"/>
-                <a:ea typeface="KoPub돋움체 Light" panose="02020603020101020101" pitchFamily="18" charset="-127"/>
-              </a:rPr>
-              <a:t>(Education)</a:t>
-            </a:r>
-            <a:endParaRPr lang="ko-KR" altLang="en-US" sz="800" dirty="0">
-              <a:solidFill>
-                <a:schemeClr val="tx2">
-                  <a:lumMod val="50000"/>
-                </a:schemeClr>
-              </a:solidFill>
-              <a:latin typeface="KoPub돋움체 Light" panose="02020603020101020101" pitchFamily="18" charset="-127"/>
-              <a:ea typeface="KoPub돋움체 Light" panose="02020603020101020101" pitchFamily="18" charset="-127"/>
-            </a:endParaRPr>
-          </a:p>
-        </p:txBody>
-      </p:sp>
-      <p:sp>
-        <p:nvSpPr>
-          <p:cNvPr id="10" name="TextBox 9">
-            <a:extLst>
-              <a:ext uri="{FF2B5EF4-FFF2-40B4-BE49-F238E27FC236}">
-                <a16:creationId xmlns:a16="http://schemas.microsoft.com/office/drawing/2014/main" id="{F8451539-1986-D75F-2387-04BE1C783179}"/>
-              </a:ext>
-            </a:extLst>
-          </p:cNvPr>
-          <p:cNvSpPr txBox="1"/>
-          <p:nvPr/>
-        </p:nvSpPr>
-        <p:spPr>
-          <a:xfrm>
-            <a:off x="1530948" y="1305551"/>
-            <a:ext cx="1399743" cy="230832"/>
-          </a:xfrm>
-          <a:prstGeom prst="rect">
-            <a:avLst/>
-          </a:prstGeom>
-          <a:noFill/>
-        </p:spPr>
-        <p:txBody>
-          <a:bodyPr wrap="none">
-            <a:spAutoFit/>
-          </a:bodyPr>
-          <a:lstStyle/>
-          <a:p>
-            <a:pPr algn="ctr"/>
-            <a:r>
-              <a:rPr lang="ko-KR" altLang="en-US" sz="900" b="1" dirty="0">
-                <a:solidFill>
-                  <a:schemeClr val="tx2">
-                    <a:lumMod val="50000"/>
-                  </a:schemeClr>
-                </a:solidFill>
-                <a:latin typeface="KoPub돋움체 Light" panose="02020603020101020101" pitchFamily="18" charset="-127"/>
-                <a:ea typeface="KoPub돋움체 Light" panose="02020603020101020101" pitchFamily="18" charset="-127"/>
-              </a:rPr>
-              <a:t>투명한 지표  </a:t>
-            </a:r>
-            <a:r>
-              <a:rPr lang="en-US" altLang="ko-KR" sz="900" b="1" dirty="0">
-                <a:solidFill>
-                  <a:schemeClr val="tx2">
-                    <a:lumMod val="50000"/>
-                  </a:schemeClr>
-                </a:solidFill>
-                <a:latin typeface="KoPub돋움체 Light" panose="02020603020101020101" pitchFamily="18" charset="-127"/>
-                <a:ea typeface="KoPub돋움체 Light" panose="02020603020101020101" pitchFamily="18" charset="-127"/>
-              </a:rPr>
-              <a:t>(Dashboard)</a:t>
-            </a:r>
-            <a:endParaRPr lang="ko-KR" altLang="en-US" sz="800" dirty="0">
-              <a:solidFill>
-                <a:schemeClr val="tx2">
-                  <a:lumMod val="50000"/>
-                </a:schemeClr>
-              </a:solidFill>
-              <a:latin typeface="KoPub돋움체 Light" panose="02020603020101020101" pitchFamily="18" charset="-127"/>
-              <a:ea typeface="KoPub돋움체 Light" panose="02020603020101020101" pitchFamily="18" charset="-127"/>
-            </a:endParaRPr>
-          </a:p>
-        </p:txBody>
-      </p:sp>
-      <p:grpSp>
-        <p:nvGrpSpPr>
-          <p:cNvPr id="17" name="그룹 16">
-            <a:extLst>
-              <a:ext uri="{FF2B5EF4-FFF2-40B4-BE49-F238E27FC236}">
-                <a16:creationId xmlns:a16="http://schemas.microsoft.com/office/drawing/2014/main" id="{BAD9D0B6-DA99-12BD-19AC-8A0F3913EF65}"/>
-              </a:ext>
-            </a:extLst>
-          </p:cNvPr>
-          <p:cNvGrpSpPr/>
-          <p:nvPr/>
-        </p:nvGrpSpPr>
-        <p:grpSpPr>
-          <a:xfrm>
-            <a:off x="173236" y="377028"/>
-            <a:ext cx="538336" cy="538336"/>
+            <a:off x="589938" y="838920"/>
+            <a:ext cx="634026" cy="568432"/>
             <a:chOff x="777945" y="-736888"/>
             <a:chExt cx="663508" cy="663508"/>
           </a:xfrm>
@@ -6916,7 +6026,7 @@
             <p:cNvPr id="5" name="그림 4" descr="패턴, 사각형, 예술, 직사각형이(가) 표시된 사진&#10;&#10;AI 생성 콘텐츠는 정확하지 않을 수 있습니다.">
               <a:extLst>
                 <a:ext uri="{FF2B5EF4-FFF2-40B4-BE49-F238E27FC236}">
-                  <a16:creationId xmlns:a16="http://schemas.microsoft.com/office/drawing/2014/main" id="{C69C4A2A-B5F9-F51F-5B3E-74194EB2592E}"/>
+                  <a16:creationId xmlns:a16="http://schemas.microsoft.com/office/drawing/2014/main" id="{40C63F4C-30AB-6EF2-23BA-1233104A9DC3}"/>
                 </a:ext>
               </a:extLst>
             </p:cNvPr>
@@ -6946,7 +6056,7 @@
             <p:cNvPr id="13" name="L 도형 12">
               <a:extLst>
                 <a:ext uri="{FF2B5EF4-FFF2-40B4-BE49-F238E27FC236}">
-                  <a16:creationId xmlns:a16="http://schemas.microsoft.com/office/drawing/2014/main" id="{0B77DCAE-298A-1DA8-72DA-A99175DE5912}"/>
+                  <a16:creationId xmlns:a16="http://schemas.microsoft.com/office/drawing/2014/main" id="{B242B433-4D06-F840-EA3E-7FA7766D184C}"/>
                 </a:ext>
               </a:extLst>
             </p:cNvPr>
@@ -7003,7 +6113,7 @@
             <p:cNvPr id="14" name="L 도형 13">
               <a:extLst>
                 <a:ext uri="{FF2B5EF4-FFF2-40B4-BE49-F238E27FC236}">
-                  <a16:creationId xmlns:a16="http://schemas.microsoft.com/office/drawing/2014/main" id="{F702F43E-52A2-5D9A-996D-AE14DDC762D6}"/>
+                  <a16:creationId xmlns:a16="http://schemas.microsoft.com/office/drawing/2014/main" id="{37DD2CDD-BF9D-CD6A-CC77-30C00DF7A8EA}"/>
                 </a:ext>
               </a:extLst>
             </p:cNvPr>
@@ -7060,7 +6170,7 @@
             <p:cNvPr id="15" name="L 도형 14">
               <a:extLst>
                 <a:ext uri="{FF2B5EF4-FFF2-40B4-BE49-F238E27FC236}">
-                  <a16:creationId xmlns:a16="http://schemas.microsoft.com/office/drawing/2014/main" id="{5BF2D746-AD19-B1DB-EAFE-7AF79EE40C17}"/>
+                  <a16:creationId xmlns:a16="http://schemas.microsoft.com/office/drawing/2014/main" id="{DD20813D-7C4F-9420-E012-EB09FDC9059E}"/>
                 </a:ext>
               </a:extLst>
             </p:cNvPr>
@@ -7117,7 +6227,7 @@
             <p:cNvPr id="16" name="L 도형 15">
               <a:extLst>
                 <a:ext uri="{FF2B5EF4-FFF2-40B4-BE49-F238E27FC236}">
-                  <a16:creationId xmlns:a16="http://schemas.microsoft.com/office/drawing/2014/main" id="{F996CF45-7E9F-6E68-AD72-7F4A9AF6B006}"/>
+                  <a16:creationId xmlns:a16="http://schemas.microsoft.com/office/drawing/2014/main" id="{C2F58D7B-1E2F-7C1C-29C2-3CBAF321313E}"/>
                 </a:ext>
               </a:extLst>
             </p:cNvPr>
@@ -7170,10 +6280,564 @@
           </p:txBody>
         </p:sp>
       </p:grpSp>
+      <p:grpSp>
+        <p:nvGrpSpPr>
+          <p:cNvPr id="18" name="그룹 17">
+            <a:extLst>
+              <a:ext uri="{FF2B5EF4-FFF2-40B4-BE49-F238E27FC236}">
+                <a16:creationId xmlns:a16="http://schemas.microsoft.com/office/drawing/2014/main" id="{360DDF2E-2289-473B-B5F6-77027118C993}"/>
+              </a:ext>
+            </a:extLst>
+          </p:cNvPr>
+          <p:cNvGrpSpPr/>
+          <p:nvPr/>
+        </p:nvGrpSpPr>
+        <p:grpSpPr>
+          <a:xfrm>
+            <a:off x="113069" y="274768"/>
+            <a:ext cx="1746464" cy="425416"/>
+            <a:chOff x="614240" y="226472"/>
+            <a:chExt cx="1746464" cy="425416"/>
+          </a:xfrm>
+        </p:grpSpPr>
+        <p:sp>
+          <p:nvSpPr>
+            <p:cNvPr id="4" name="TextBox 3">
+              <a:extLst>
+                <a:ext uri="{FF2B5EF4-FFF2-40B4-BE49-F238E27FC236}">
+                  <a16:creationId xmlns:a16="http://schemas.microsoft.com/office/drawing/2014/main" id="{1F0C02A7-D766-DD14-548E-2AE7955534F4}"/>
+                </a:ext>
+              </a:extLst>
+            </p:cNvPr>
+            <p:cNvSpPr txBox="1"/>
+            <p:nvPr/>
+          </p:nvSpPr>
+          <p:spPr>
+            <a:xfrm>
+              <a:off x="685077" y="226472"/>
+              <a:ext cx="1604991" cy="307777"/>
+            </a:xfrm>
+            <a:prstGeom prst="rect">
+              <a:avLst/>
+            </a:prstGeom>
+            <a:noFill/>
+          </p:spPr>
+          <p:txBody>
+            <a:bodyPr wrap="none">
+              <a:spAutoFit/>
+            </a:bodyPr>
+            <a:lstStyle/>
+            <a:p>
+              <a:pPr algn="ctr"/>
+              <a:r>
+                <a:rPr lang="ko-KR" altLang="en-US" sz="1400" dirty="0" err="1">
+                  <a:solidFill>
+                    <a:srgbClr val="00B0F0"/>
+                  </a:solidFill>
+                  <a:latin typeface="KoPub돋움체 Bold" panose="00000800000000000000" pitchFamily="2" charset="-127"/>
+                  <a:ea typeface="KoPub돋움체 Bold" panose="00000800000000000000" pitchFamily="2" charset="-127"/>
+                </a:rPr>
+                <a:t>우리가치</a:t>
+              </a:r>
+              <a:r>
+                <a:rPr lang="ko-KR" altLang="en-US" sz="1400" dirty="0">
+                  <a:solidFill>
+                    <a:schemeClr val="accent1">
+                      <a:lumMod val="50000"/>
+                    </a:schemeClr>
+                  </a:solidFill>
+                  <a:latin typeface="KoPub돋움체 Bold" panose="02020603020101020101" pitchFamily="18" charset="-127"/>
+                  <a:ea typeface="KoPub돋움체 Bold" panose="02020603020101020101" pitchFamily="18" charset="-127"/>
+                </a:rPr>
+                <a:t> </a:t>
+              </a:r>
+              <a:r>
+                <a:rPr lang="en-US" altLang="ko-KR" sz="1400" dirty="0" err="1">
+                  <a:solidFill>
+                    <a:schemeClr val="accent1">
+                      <a:lumMod val="50000"/>
+                    </a:schemeClr>
+                  </a:solidFill>
+                  <a:latin typeface="Franklin Gothic Heavy" panose="020B0903020102020204" pitchFamily="34" charset="0"/>
+                  <a:ea typeface="KoPub돋움체 Bold" panose="02020603020101020101" pitchFamily="18" charset="-127"/>
+                </a:rPr>
+                <a:t>WeValue</a:t>
+              </a:r>
+              <a:endParaRPr lang="en-US" altLang="ko-KR" sz="1400" dirty="0">
+                <a:solidFill>
+                  <a:schemeClr val="accent1">
+                    <a:lumMod val="50000"/>
+                  </a:schemeClr>
+                </a:solidFill>
+                <a:latin typeface="Franklin Gothic Heavy" panose="020B0903020102020204" pitchFamily="34" charset="0"/>
+                <a:ea typeface="KoPub돋움체 Bold" panose="02020603020101020101" pitchFamily="18" charset="-127"/>
+              </a:endParaRPr>
+            </a:p>
+          </p:txBody>
+        </p:sp>
+        <p:sp>
+          <p:nvSpPr>
+            <p:cNvPr id="6" name="TextBox 5">
+              <a:extLst>
+                <a:ext uri="{FF2B5EF4-FFF2-40B4-BE49-F238E27FC236}">
+                  <a16:creationId xmlns:a16="http://schemas.microsoft.com/office/drawing/2014/main" id="{25F3C248-44C4-9D7A-C464-62D68C9890DC}"/>
+                </a:ext>
+              </a:extLst>
+            </p:cNvPr>
+            <p:cNvSpPr txBox="1"/>
+            <p:nvPr/>
+          </p:nvSpPr>
+          <p:spPr>
+            <a:xfrm>
+              <a:off x="622591" y="451833"/>
+              <a:ext cx="1729962" cy="200055"/>
+            </a:xfrm>
+            <a:prstGeom prst="rect">
+              <a:avLst/>
+            </a:prstGeom>
+            <a:noFill/>
+          </p:spPr>
+          <p:txBody>
+            <a:bodyPr wrap="none">
+              <a:spAutoFit/>
+            </a:bodyPr>
+            <a:lstStyle/>
+            <a:p>
+              <a:pPr algn="ctr"/>
+              <a:r>
+                <a:rPr lang="en-US" altLang="ko-KR" sz="700" b="1" dirty="0">
+                  <a:latin typeface="KoPub돋움체 Bold" panose="00000800000000000000" pitchFamily="2" charset="-127"/>
+                  <a:ea typeface="KoPub돋움체 Bold" panose="00000800000000000000" pitchFamily="2" charset="-127"/>
+                </a:rPr>
+                <a:t>[</a:t>
+              </a:r>
+              <a:r>
+                <a:rPr lang="ko-KR" altLang="en-US" sz="700" b="1" dirty="0">
+                  <a:latin typeface="KoPub돋움체 Bold" panose="00000800000000000000" pitchFamily="2" charset="-127"/>
+                  <a:ea typeface="KoPub돋움체 Bold" panose="00000800000000000000" pitchFamily="2" charset="-127"/>
+                </a:rPr>
+                <a:t>우리가 가치를 만드는 공간</a:t>
+              </a:r>
+              <a:r>
+                <a:rPr lang="en-US" altLang="ko-KR" sz="700" b="1" dirty="0">
+                  <a:latin typeface="KoPub돋움체 Bold" panose="00000800000000000000" pitchFamily="2" charset="-127"/>
+                  <a:ea typeface="KoPub돋움체 Bold" panose="00000800000000000000" pitchFamily="2" charset="-127"/>
+                </a:rPr>
+                <a:t>, </a:t>
+              </a:r>
+              <a:r>
+                <a:rPr lang="ko-KR" altLang="en-US" sz="700" b="1" dirty="0" err="1">
+                  <a:latin typeface="KoPub돋움체 Bold" panose="00000800000000000000" pitchFamily="2" charset="-127"/>
+                  <a:ea typeface="KoPub돋움체 Bold" panose="00000800000000000000" pitchFamily="2" charset="-127"/>
+                </a:rPr>
+                <a:t>우리가치</a:t>
+              </a:r>
+              <a:r>
+                <a:rPr lang="ko-KR" altLang="en-US" sz="700" b="1" dirty="0">
+                  <a:latin typeface="KoPub돋움체 Bold" panose="00000800000000000000" pitchFamily="2" charset="-127"/>
+                  <a:ea typeface="KoPub돋움체 Bold" panose="00000800000000000000" pitchFamily="2" charset="-127"/>
+                </a:rPr>
+                <a:t> 허브</a:t>
+              </a:r>
+              <a:r>
+                <a:rPr lang="en-US" altLang="ko-KR" sz="700" b="1" dirty="0">
+                  <a:latin typeface="KoPub돋움체 Bold" panose="00000800000000000000" pitchFamily="2" charset="-127"/>
+                  <a:ea typeface="KoPub돋움체 Bold" panose="00000800000000000000" pitchFamily="2" charset="-127"/>
+                </a:rPr>
+                <a:t>]</a:t>
+              </a:r>
+            </a:p>
+          </p:txBody>
+        </p:sp>
+        <p:pic>
+          <p:nvPicPr>
+            <p:cNvPr id="10" name="그림 9">
+              <a:extLst>
+                <a:ext uri="{FF2B5EF4-FFF2-40B4-BE49-F238E27FC236}">
+                  <a16:creationId xmlns:a16="http://schemas.microsoft.com/office/drawing/2014/main" id="{EB1E9046-9340-4D3D-AA23-F89851FB0C3F}"/>
+                </a:ext>
+              </a:extLst>
+            </p:cNvPr>
+            <p:cNvPicPr>
+              <a:picLocks noChangeAspect="1"/>
+            </p:cNvPicPr>
+            <p:nvPr/>
+          </p:nvPicPr>
+          <p:blipFill>
+            <a:blip r:embed="rId3"/>
+            <a:stretch>
+              <a:fillRect/>
+            </a:stretch>
+          </p:blipFill>
+          <p:spPr>
+            <a:xfrm>
+              <a:off x="614240" y="271322"/>
+              <a:ext cx="147416" cy="128728"/>
+            </a:xfrm>
+            <a:prstGeom prst="rect">
+              <a:avLst/>
+            </a:prstGeom>
+          </p:spPr>
+        </p:pic>
+        <p:pic>
+          <p:nvPicPr>
+            <p:cNvPr id="29" name="그림 28">
+              <a:extLst>
+                <a:ext uri="{FF2B5EF4-FFF2-40B4-BE49-F238E27FC236}">
+                  <a16:creationId xmlns:a16="http://schemas.microsoft.com/office/drawing/2014/main" id="{799E618A-B635-413C-90D6-9BBB5F48E428}"/>
+                </a:ext>
+              </a:extLst>
+            </p:cNvPr>
+            <p:cNvPicPr>
+              <a:picLocks noChangeAspect="1"/>
+            </p:cNvPicPr>
+            <p:nvPr/>
+          </p:nvPicPr>
+          <p:blipFill>
+            <a:blip r:embed="rId3"/>
+            <a:stretch>
+              <a:fillRect/>
+            </a:stretch>
+          </p:blipFill>
+          <p:spPr>
+            <a:xfrm rot="10800000">
+              <a:off x="2181315" y="257361"/>
+              <a:ext cx="179389" cy="156650"/>
+            </a:xfrm>
+            <a:prstGeom prst="rect">
+              <a:avLst/>
+            </a:prstGeom>
+          </p:spPr>
+        </p:pic>
+        <p:pic>
+          <p:nvPicPr>
+            <p:cNvPr id="30" name="그림 29">
+              <a:extLst>
+                <a:ext uri="{FF2B5EF4-FFF2-40B4-BE49-F238E27FC236}">
+                  <a16:creationId xmlns:a16="http://schemas.microsoft.com/office/drawing/2014/main" id="{FCD9B137-9F07-4052-B76C-36D6AED25D86}"/>
+                </a:ext>
+              </a:extLst>
+            </p:cNvPr>
+            <p:cNvPicPr>
+              <a:picLocks noChangeAspect="1"/>
+            </p:cNvPicPr>
+            <p:nvPr/>
+          </p:nvPicPr>
+          <p:blipFill>
+            <a:blip r:embed="rId3"/>
+            <a:stretch>
+              <a:fillRect/>
+            </a:stretch>
+          </p:blipFill>
+          <p:spPr>
+            <a:xfrm rot="10800000">
+              <a:off x="2197302" y="276730"/>
+              <a:ext cx="147414" cy="128728"/>
+            </a:xfrm>
+            <a:prstGeom prst="rect">
+              <a:avLst/>
+            </a:prstGeom>
+          </p:spPr>
+        </p:pic>
+      </p:grpSp>
+      <p:grpSp>
+        <p:nvGrpSpPr>
+          <p:cNvPr id="12" name="그룹 11">
+            <a:extLst>
+              <a:ext uri="{FF2B5EF4-FFF2-40B4-BE49-F238E27FC236}">
+                <a16:creationId xmlns:a16="http://schemas.microsoft.com/office/drawing/2014/main" id="{6B2D700B-07E0-4E28-A7D2-0F4C62846EE3}"/>
+              </a:ext>
+            </a:extLst>
+          </p:cNvPr>
+          <p:cNvGrpSpPr/>
+          <p:nvPr/>
+        </p:nvGrpSpPr>
+        <p:grpSpPr>
+          <a:xfrm>
+            <a:off x="1488355" y="772187"/>
+            <a:ext cx="1564409" cy="707886"/>
+            <a:chOff x="796295" y="778765"/>
+            <a:chExt cx="1564409" cy="707886"/>
+          </a:xfrm>
+        </p:grpSpPr>
+        <p:sp>
+          <p:nvSpPr>
+            <p:cNvPr id="26" name="TextBox 25">
+              <a:extLst>
+                <a:ext uri="{FF2B5EF4-FFF2-40B4-BE49-F238E27FC236}">
+                  <a16:creationId xmlns:a16="http://schemas.microsoft.com/office/drawing/2014/main" id="{61921C24-9018-417C-966E-E56980F41166}"/>
+                </a:ext>
+              </a:extLst>
+            </p:cNvPr>
+            <p:cNvSpPr txBox="1"/>
+            <p:nvPr/>
+          </p:nvSpPr>
+          <p:spPr>
+            <a:xfrm>
+              <a:off x="1422627" y="778765"/>
+              <a:ext cx="938077" cy="707886"/>
+            </a:xfrm>
+            <a:prstGeom prst="rect">
+              <a:avLst/>
+            </a:prstGeom>
+            <a:noFill/>
+          </p:spPr>
+          <p:txBody>
+            <a:bodyPr wrap="none" rtlCol="0">
+              <a:spAutoFit/>
+            </a:bodyPr>
+            <a:lstStyle/>
+            <a:p>
+              <a:r>
+                <a:rPr lang="en-US" altLang="ko-KR" sz="800" dirty="0">
+                  <a:latin typeface="KoPub돋움체 Light" panose="00000300000000000000" pitchFamily="2" charset="-127"/>
+                  <a:ea typeface="KoPub돋움체 Light" panose="00000300000000000000" pitchFamily="2" charset="-127"/>
+                </a:rPr>
+                <a:t>"</a:t>
+              </a:r>
+              <a:r>
+                <a:rPr lang="ko-KR" altLang="en-US" sz="800" dirty="0">
+                  <a:latin typeface="KoPub돋움체 Light" panose="00000300000000000000" pitchFamily="2" charset="-127"/>
+                  <a:ea typeface="KoPub돋움체 Light" panose="00000300000000000000" pitchFamily="2" charset="-127"/>
+                </a:rPr>
+                <a:t>함께하는 즐거움</a:t>
+              </a:r>
+              <a:r>
+                <a:rPr lang="en-US" altLang="ko-KR" sz="800" dirty="0">
+                  <a:latin typeface="KoPub돋움체 Light" panose="00000300000000000000" pitchFamily="2" charset="-127"/>
+                  <a:ea typeface="KoPub돋움체 Light" panose="00000300000000000000" pitchFamily="2" charset="-127"/>
+                </a:rPr>
+                <a:t>“</a:t>
+              </a:r>
+            </a:p>
+            <a:p>
+              <a:r>
+                <a:rPr lang="en-US" altLang="ko-KR" sz="800" dirty="0">
+                  <a:latin typeface="KoPub돋움체 Light" panose="00000300000000000000" pitchFamily="2" charset="-127"/>
+                  <a:ea typeface="KoPub돋움체 Light" panose="00000300000000000000" pitchFamily="2" charset="-127"/>
+                </a:rPr>
+                <a:t>"</a:t>
+              </a:r>
+              <a:r>
+                <a:rPr lang="ko-KR" altLang="en-US" sz="800" dirty="0">
+                  <a:latin typeface="KoPub돋움체 Light" panose="00000300000000000000" pitchFamily="2" charset="-127"/>
+                  <a:ea typeface="KoPub돋움체 Light" panose="00000300000000000000" pitchFamily="2" charset="-127"/>
+                </a:rPr>
+                <a:t>명확한 약속</a:t>
+              </a:r>
+              <a:r>
+                <a:rPr lang="en-US" altLang="ko-KR" sz="800" dirty="0">
+                  <a:latin typeface="KoPub돋움체 Light" panose="00000300000000000000" pitchFamily="2" charset="-127"/>
+                  <a:ea typeface="KoPub돋움체 Light" panose="00000300000000000000" pitchFamily="2" charset="-127"/>
+                </a:rPr>
+                <a:t>"</a:t>
+              </a:r>
+              <a:endParaRPr lang="ko-KR" altLang="en-US" sz="800" dirty="0">
+                <a:latin typeface="KoPub돋움체 Light" panose="00000300000000000000" pitchFamily="2" charset="-127"/>
+                <a:ea typeface="KoPub돋움체 Light" panose="00000300000000000000" pitchFamily="2" charset="-127"/>
+              </a:endParaRPr>
+            </a:p>
+            <a:p>
+              <a:r>
+                <a:rPr lang="en-US" altLang="ko-KR" sz="800" dirty="0">
+                  <a:latin typeface="KoPub돋움체 Light" panose="00000300000000000000" pitchFamily="2" charset="-127"/>
+                  <a:ea typeface="KoPub돋움체 Light" panose="00000300000000000000" pitchFamily="2" charset="-127"/>
+                </a:rPr>
+                <a:t>"</a:t>
+              </a:r>
+              <a:r>
+                <a:rPr lang="ko-KR" altLang="en-US" sz="800" dirty="0">
+                  <a:latin typeface="KoPub돋움체 Light" panose="00000300000000000000" pitchFamily="2" charset="-127"/>
+                  <a:ea typeface="KoPub돋움체 Light" panose="00000300000000000000" pitchFamily="2" charset="-127"/>
+                </a:rPr>
+                <a:t>한눈에 보는 실무</a:t>
+              </a:r>
+              <a:r>
+                <a:rPr lang="en-US" altLang="ko-KR" sz="800" dirty="0">
+                  <a:latin typeface="KoPub돋움체 Light" panose="00000300000000000000" pitchFamily="2" charset="-127"/>
+                  <a:ea typeface="KoPub돋움체 Light" panose="00000300000000000000" pitchFamily="2" charset="-127"/>
+                </a:rPr>
+                <a:t>"</a:t>
+              </a:r>
+              <a:endParaRPr lang="ko-KR" altLang="en-US" sz="800" dirty="0">
+                <a:latin typeface="KoPub돋움체 Light" panose="00000300000000000000" pitchFamily="2" charset="-127"/>
+                <a:ea typeface="KoPub돋움체 Light" panose="00000300000000000000" pitchFamily="2" charset="-127"/>
+              </a:endParaRPr>
+            </a:p>
+            <a:p>
+              <a:r>
+                <a:rPr lang="en-US" altLang="ko-KR" sz="800" dirty="0">
+                  <a:latin typeface="KoPub돋움체 Light" panose="00000300000000000000" pitchFamily="2" charset="-127"/>
+                  <a:ea typeface="KoPub돋움체 Light" panose="00000300000000000000" pitchFamily="2" charset="-127"/>
+                </a:rPr>
+                <a:t>"</a:t>
+              </a:r>
+              <a:r>
+                <a:rPr lang="ko-KR" altLang="en-US" sz="800" dirty="0">
+                  <a:latin typeface="KoPub돋움체 Light" panose="00000300000000000000" pitchFamily="2" charset="-127"/>
+                  <a:ea typeface="KoPub돋움체 Light" panose="00000300000000000000" pitchFamily="2" charset="-127"/>
+                </a:rPr>
+                <a:t>현장 밀착형 지원</a:t>
+              </a:r>
+              <a:r>
+                <a:rPr lang="en-US" altLang="ko-KR" sz="800" dirty="0">
+                  <a:latin typeface="KoPub돋움체 Light" panose="00000300000000000000" pitchFamily="2" charset="-127"/>
+                  <a:ea typeface="KoPub돋움체 Light" panose="00000300000000000000" pitchFamily="2" charset="-127"/>
+                </a:rPr>
+                <a:t>"</a:t>
+              </a:r>
+              <a:endParaRPr lang="ko-KR" altLang="en-US" sz="800" dirty="0">
+                <a:latin typeface="KoPub돋움체 Light" panose="00000300000000000000" pitchFamily="2" charset="-127"/>
+                <a:ea typeface="KoPub돋움체 Light" panose="00000300000000000000" pitchFamily="2" charset="-127"/>
+              </a:endParaRPr>
+            </a:p>
+            <a:p>
+              <a:r>
+                <a:rPr lang="en-US" altLang="ko-KR" sz="800" dirty="0">
+                  <a:latin typeface="KoPub돋움체 Light" panose="00000300000000000000" pitchFamily="2" charset="-127"/>
+                  <a:ea typeface="KoPub돋움체 Light" panose="00000300000000000000" pitchFamily="2" charset="-127"/>
+                </a:rPr>
+                <a:t>"</a:t>
+              </a:r>
+              <a:r>
+                <a:rPr lang="ko-KR" altLang="en-US" sz="800" dirty="0">
+                  <a:latin typeface="KoPub돋움체 Light" panose="00000300000000000000" pitchFamily="2" charset="-127"/>
+                  <a:ea typeface="KoPub돋움체 Light" panose="00000300000000000000" pitchFamily="2" charset="-127"/>
+                </a:rPr>
+                <a:t>변화의 체감</a:t>
+              </a:r>
+              <a:r>
+                <a:rPr lang="en-US" altLang="ko-KR" sz="800" dirty="0">
+                  <a:latin typeface="KoPub돋움체 Light" panose="00000300000000000000" pitchFamily="2" charset="-127"/>
+                  <a:ea typeface="KoPub돋움체 Light" panose="00000300000000000000" pitchFamily="2" charset="-127"/>
+                </a:rPr>
+                <a:t>"</a:t>
+              </a:r>
+              <a:endParaRPr lang="ko-KR" altLang="en-US" sz="800" dirty="0">
+                <a:latin typeface="KoPub돋움체 Light" panose="00000300000000000000" pitchFamily="2" charset="-127"/>
+                <a:ea typeface="KoPub돋움체 Light" panose="00000300000000000000" pitchFamily="2" charset="-127"/>
+              </a:endParaRPr>
+            </a:p>
+          </p:txBody>
+        </p:sp>
+        <p:sp>
+          <p:nvSpPr>
+            <p:cNvPr id="31" name="TextBox 30">
+              <a:extLst>
+                <a:ext uri="{FF2B5EF4-FFF2-40B4-BE49-F238E27FC236}">
+                  <a16:creationId xmlns:a16="http://schemas.microsoft.com/office/drawing/2014/main" id="{62EAB35A-296C-468C-BCA0-D585048BF4E9}"/>
+                </a:ext>
+              </a:extLst>
+            </p:cNvPr>
+            <p:cNvSpPr txBox="1"/>
+            <p:nvPr/>
+          </p:nvSpPr>
+          <p:spPr>
+            <a:xfrm>
+              <a:off x="796295" y="778765"/>
+              <a:ext cx="753732" cy="707886"/>
+            </a:xfrm>
+            <a:prstGeom prst="rect">
+              <a:avLst/>
+            </a:prstGeom>
+            <a:noFill/>
+          </p:spPr>
+          <p:txBody>
+            <a:bodyPr wrap="none" rtlCol="0">
+              <a:spAutoFit/>
+            </a:bodyPr>
+            <a:lstStyle/>
+            <a:p>
+              <a:pPr marL="88900" indent="-88900">
+                <a:buClr>
+                  <a:srgbClr val="00B0F0"/>
+                </a:buClr>
+                <a:buFont typeface="Arial" panose="020B0604020202020204" pitchFamily="34" charset="0"/>
+                <a:buChar char="•"/>
+              </a:pPr>
+              <a:r>
+                <a:rPr lang="ko-KR" altLang="en-US" sz="800" b="1" dirty="0">
+                  <a:latin typeface="KoPub돋움체 Bold" panose="00000800000000000000" pitchFamily="2" charset="-127"/>
+                  <a:ea typeface="KoPub돋움체 Bold" panose="00000800000000000000" pitchFamily="2" charset="-127"/>
+                </a:rPr>
+                <a:t>소통의 광장</a:t>
+              </a:r>
+              <a:endParaRPr lang="en-US" altLang="ko-KR" sz="800" b="1" dirty="0">
+                <a:latin typeface="KoPub돋움체 Bold" panose="00000800000000000000" pitchFamily="2" charset="-127"/>
+                <a:ea typeface="KoPub돋움체 Bold" panose="00000800000000000000" pitchFamily="2" charset="-127"/>
+              </a:endParaRPr>
+            </a:p>
+            <a:p>
+              <a:pPr marL="88900" indent="-88900">
+                <a:buClr>
+                  <a:srgbClr val="00B0F0"/>
+                </a:buClr>
+                <a:buFont typeface="Arial" panose="020B0604020202020204" pitchFamily="34" charset="0"/>
+                <a:buChar char="•"/>
+              </a:pPr>
+              <a:r>
+                <a:rPr lang="ko-KR" altLang="en-US" sz="800" b="1" dirty="0">
+                  <a:latin typeface="KoPub돋움체 Bold" panose="00000800000000000000" pitchFamily="2" charset="-127"/>
+                  <a:ea typeface="KoPub돋움체 Bold" panose="00000800000000000000" pitchFamily="2" charset="-127"/>
+                </a:rPr>
+                <a:t>업무 기준</a:t>
+              </a:r>
+            </a:p>
+            <a:p>
+              <a:pPr marL="88900" indent="-88900">
+                <a:buClr>
+                  <a:srgbClr val="00B0F0"/>
+                </a:buClr>
+                <a:buFont typeface="Arial" panose="020B0604020202020204" pitchFamily="34" charset="0"/>
+                <a:buChar char="•"/>
+              </a:pPr>
+              <a:r>
+                <a:rPr lang="ko-KR" altLang="en-US" sz="800" b="1" dirty="0">
+                  <a:latin typeface="KoPub돋움체 Bold" panose="00000800000000000000" pitchFamily="2" charset="-127"/>
+                  <a:ea typeface="KoPub돋움체 Bold" panose="00000800000000000000" pitchFamily="2" charset="-127"/>
+                </a:rPr>
+                <a:t>교육자료</a:t>
+              </a:r>
+            </a:p>
+            <a:p>
+              <a:pPr marL="88900" indent="-88900">
+                <a:buClr>
+                  <a:srgbClr val="00B0F0"/>
+                </a:buClr>
+                <a:buFont typeface="Arial" panose="020B0604020202020204" pitchFamily="34" charset="0"/>
+                <a:buChar char="•"/>
+              </a:pPr>
+              <a:r>
+                <a:rPr lang="ko-KR" altLang="en-US" sz="800" b="1" dirty="0">
+                  <a:latin typeface="KoPub돋움체 Bold" panose="00000800000000000000" pitchFamily="2" charset="-127"/>
+                  <a:ea typeface="KoPub돋움체 Bold" panose="00000800000000000000" pitchFamily="2" charset="-127"/>
+                </a:rPr>
+                <a:t>요청</a:t>
+              </a:r>
+            </a:p>
+            <a:p>
+              <a:pPr marL="88900" indent="-88900">
+                <a:buClr>
+                  <a:srgbClr val="00B0F0"/>
+                </a:buClr>
+                <a:buFont typeface="Arial" panose="020B0604020202020204" pitchFamily="34" charset="0"/>
+                <a:buChar char="•"/>
+              </a:pPr>
+              <a:r>
+                <a:rPr lang="ko-KR" altLang="en-US" sz="800" b="1" dirty="0">
+                  <a:latin typeface="KoPub돋움체 Bold" panose="00000800000000000000" pitchFamily="2" charset="-127"/>
+                  <a:ea typeface="KoPub돋움체 Bold" panose="00000800000000000000" pitchFamily="2" charset="-127"/>
+                </a:rPr>
+                <a:t>지표</a:t>
+              </a:r>
+            </a:p>
+          </p:txBody>
+        </p:sp>
+      </p:grpSp>
     </p:spTree>
     <p:extLst>
       <p:ext uri="{BB962C8B-B14F-4D97-AF65-F5344CB8AC3E}">
-        <p14:creationId xmlns:p14="http://schemas.microsoft.com/office/powerpoint/2010/main" val="949192635"/>
+        <p14:creationId xmlns:p14="http://schemas.microsoft.com/office/powerpoint/2010/main" val="1527098437"/>
       </p:ext>
     </p:extLst>
   </p:cSld>
@@ -7188,13 +6852,7 @@
   <p:cSld>
     <p:spTree>
       <p:nvGrpSpPr>
-        <p:cNvPr id="1" name="">
-          <a:extLst>
-            <a:ext uri="{FF2B5EF4-FFF2-40B4-BE49-F238E27FC236}">
-              <a16:creationId xmlns:a16="http://schemas.microsoft.com/office/drawing/2014/main" id="{D1A97B0E-F09D-9EBA-4E5C-8A2A3FD1CC68}"/>
-            </a:ext>
-          </a:extLst>
-        </p:cNvPr>
+        <p:cNvPr id="1" name=""/>
         <p:cNvGrpSpPr/>
         <p:nvPr/>
       </p:nvGrpSpPr>
@@ -7208,230 +6866,10 @@
       </p:grpSpPr>
       <p:sp>
         <p:nvSpPr>
-          <p:cNvPr id="28" name="사각형: 둥근 모서리 27">
-            <a:extLst>
-              <a:ext uri="{FF2B5EF4-FFF2-40B4-BE49-F238E27FC236}">
-                <a16:creationId xmlns:a16="http://schemas.microsoft.com/office/drawing/2014/main" id="{02978711-0B63-6F08-76D1-C3B27BB8CED7}"/>
-              </a:ext>
-            </a:extLst>
-          </p:cNvPr>
-          <p:cNvSpPr/>
-          <p:nvPr/>
-        </p:nvSpPr>
-        <p:spPr>
-          <a:xfrm>
-            <a:off x="1598636" y="1043683"/>
-            <a:ext cx="1264364" cy="230832"/>
-          </a:xfrm>
-          <a:prstGeom prst="roundRect">
-            <a:avLst/>
-          </a:prstGeom>
-          <a:solidFill>
-            <a:schemeClr val="bg2"/>
-          </a:solidFill>
-          <a:ln>
-            <a:noFill/>
-          </a:ln>
-        </p:spPr>
-        <p:style>
-          <a:lnRef idx="2">
-            <a:schemeClr val="accent3">
-              <a:shade val="15000"/>
-            </a:schemeClr>
-          </a:lnRef>
-          <a:fillRef idx="1">
-            <a:schemeClr val="accent3"/>
-          </a:fillRef>
-          <a:effectRef idx="0">
-            <a:schemeClr val="accent3"/>
-          </a:effectRef>
-          <a:fontRef idx="minor">
-            <a:schemeClr val="lt1"/>
-          </a:fontRef>
-        </p:style>
-        <p:txBody>
-          <a:bodyPr rtlCol="0" anchor="ctr"/>
-          <a:lstStyle/>
-          <a:p>
-            <a:pPr algn="ctr"/>
-            <a:endParaRPr lang="ko-KR" altLang="en-US" sz="2400">
-              <a:latin typeface="KoPub돋움체 Light" panose="02020603020101020101" pitchFamily="18" charset="-127"/>
-              <a:ea typeface="KoPub돋움체 Light" panose="02020603020101020101" pitchFamily="18" charset="-127"/>
-            </a:endParaRPr>
-          </a:p>
-        </p:txBody>
-      </p:sp>
-      <p:sp>
-        <p:nvSpPr>
-          <p:cNvPr id="29" name="사각형: 둥근 모서리 28">
-            <a:extLst>
-              <a:ext uri="{FF2B5EF4-FFF2-40B4-BE49-F238E27FC236}">
-                <a16:creationId xmlns:a16="http://schemas.microsoft.com/office/drawing/2014/main" id="{2300ABF6-793D-ED6F-A46D-2DD3BD8332AB}"/>
-              </a:ext>
-            </a:extLst>
-          </p:cNvPr>
-          <p:cNvSpPr/>
-          <p:nvPr/>
-        </p:nvSpPr>
-        <p:spPr>
-          <a:xfrm>
-            <a:off x="236105" y="1307925"/>
-            <a:ext cx="1264364" cy="230832"/>
-          </a:xfrm>
-          <a:prstGeom prst="roundRect">
-            <a:avLst/>
-          </a:prstGeom>
-          <a:solidFill>
-            <a:schemeClr val="bg2"/>
-          </a:solidFill>
-          <a:ln>
-            <a:noFill/>
-          </a:ln>
-        </p:spPr>
-        <p:style>
-          <a:lnRef idx="2">
-            <a:schemeClr val="accent3">
-              <a:shade val="15000"/>
-            </a:schemeClr>
-          </a:lnRef>
-          <a:fillRef idx="1">
-            <a:schemeClr val="accent3"/>
-          </a:fillRef>
-          <a:effectRef idx="0">
-            <a:schemeClr val="accent3"/>
-          </a:effectRef>
-          <a:fontRef idx="minor">
-            <a:schemeClr val="lt1"/>
-          </a:fontRef>
-        </p:style>
-        <p:txBody>
-          <a:bodyPr rtlCol="0" anchor="ctr"/>
-          <a:lstStyle/>
-          <a:p>
-            <a:pPr algn="ctr"/>
-            <a:endParaRPr lang="ko-KR" altLang="en-US" sz="2400">
-              <a:latin typeface="KoPub돋움체 Light" panose="02020603020101020101" pitchFamily="18" charset="-127"/>
-              <a:ea typeface="KoPub돋움체 Light" panose="02020603020101020101" pitchFamily="18" charset="-127"/>
-            </a:endParaRPr>
-          </a:p>
-        </p:txBody>
-      </p:sp>
-      <p:sp>
-        <p:nvSpPr>
-          <p:cNvPr id="30" name="사각형: 둥근 모서리 29">
-            <a:extLst>
-              <a:ext uri="{FF2B5EF4-FFF2-40B4-BE49-F238E27FC236}">
-                <a16:creationId xmlns:a16="http://schemas.microsoft.com/office/drawing/2014/main" id="{F830B040-61E1-9A16-5B1F-B301EE2E3824}"/>
-              </a:ext>
-            </a:extLst>
-          </p:cNvPr>
-          <p:cNvSpPr/>
-          <p:nvPr/>
-        </p:nvSpPr>
-        <p:spPr>
-          <a:xfrm>
-            <a:off x="1598636" y="1307925"/>
-            <a:ext cx="1264364" cy="230832"/>
-          </a:xfrm>
-          <a:prstGeom prst="roundRect">
-            <a:avLst/>
-          </a:prstGeom>
-          <a:solidFill>
-            <a:schemeClr val="bg2"/>
-          </a:solidFill>
-          <a:ln>
-            <a:noFill/>
-          </a:ln>
-        </p:spPr>
-        <p:style>
-          <a:lnRef idx="2">
-            <a:schemeClr val="accent3">
-              <a:shade val="15000"/>
-            </a:schemeClr>
-          </a:lnRef>
-          <a:fillRef idx="1">
-            <a:schemeClr val="accent3"/>
-          </a:fillRef>
-          <a:effectRef idx="0">
-            <a:schemeClr val="accent3"/>
-          </a:effectRef>
-          <a:fontRef idx="minor">
-            <a:schemeClr val="lt1"/>
-          </a:fontRef>
-        </p:style>
-        <p:txBody>
-          <a:bodyPr rtlCol="0" anchor="ctr"/>
-          <a:lstStyle/>
-          <a:p>
-            <a:pPr algn="ctr"/>
-            <a:endParaRPr lang="ko-KR" altLang="en-US" sz="2400">
-              <a:latin typeface="KoPub돋움체 Light" panose="02020603020101020101" pitchFamily="18" charset="-127"/>
-              <a:ea typeface="KoPub돋움체 Light" panose="02020603020101020101" pitchFamily="18" charset="-127"/>
-            </a:endParaRPr>
-          </a:p>
-        </p:txBody>
-      </p:sp>
-      <p:sp>
-        <p:nvSpPr>
-          <p:cNvPr id="21" name="사각형: 둥근 모서리 20">
-            <a:extLst>
-              <a:ext uri="{FF2B5EF4-FFF2-40B4-BE49-F238E27FC236}">
-                <a16:creationId xmlns:a16="http://schemas.microsoft.com/office/drawing/2014/main" id="{D8AA1BA5-9E65-EE1B-31A3-CD58865CAAA8}"/>
-              </a:ext>
-            </a:extLst>
-          </p:cNvPr>
-          <p:cNvSpPr/>
-          <p:nvPr/>
-        </p:nvSpPr>
-        <p:spPr>
-          <a:xfrm>
-            <a:off x="236105" y="1043683"/>
-            <a:ext cx="1264364" cy="230832"/>
-          </a:xfrm>
-          <a:prstGeom prst="roundRect">
-            <a:avLst/>
-          </a:prstGeom>
-          <a:solidFill>
-            <a:schemeClr val="bg2"/>
-          </a:solidFill>
-          <a:ln>
-            <a:noFill/>
-          </a:ln>
-        </p:spPr>
-        <p:style>
-          <a:lnRef idx="2">
-            <a:schemeClr val="accent3">
-              <a:shade val="15000"/>
-            </a:schemeClr>
-          </a:lnRef>
-          <a:fillRef idx="1">
-            <a:schemeClr val="accent3"/>
-          </a:fillRef>
-          <a:effectRef idx="0">
-            <a:schemeClr val="accent3"/>
-          </a:effectRef>
-          <a:fontRef idx="minor">
-            <a:schemeClr val="lt1"/>
-          </a:fontRef>
-        </p:style>
-        <p:txBody>
-          <a:bodyPr rtlCol="0" anchor="ctr"/>
-          <a:lstStyle/>
-          <a:p>
-            <a:pPr algn="ctr"/>
-            <a:endParaRPr lang="ko-KR" altLang="en-US" sz="2400">
-              <a:latin typeface="KoPub돋움체 Light" panose="02020603020101020101" pitchFamily="18" charset="-127"/>
-              <a:ea typeface="KoPub돋움체 Light" panose="02020603020101020101" pitchFamily="18" charset="-127"/>
-            </a:endParaRPr>
-          </a:p>
-        </p:txBody>
-      </p:sp>
-      <p:sp>
-        <p:nvSpPr>
           <p:cNvPr id="3" name="TextBox 2">
             <a:extLst>
               <a:ext uri="{FF2B5EF4-FFF2-40B4-BE49-F238E27FC236}">
-                <a16:creationId xmlns:a16="http://schemas.microsoft.com/office/drawing/2014/main" id="{866CB8A1-E676-96CE-8CDF-7D64F41A4B45}"/>
+                <a16:creationId xmlns:a16="http://schemas.microsoft.com/office/drawing/2014/main" id="{F5E3E193-F1E8-6947-F01D-A96C1A9F6D0E}"/>
               </a:ext>
             </a:extLst>
           </p:cNvPr>
@@ -7440,8 +6878,8 @@
         </p:nvSpPr>
         <p:spPr>
           <a:xfrm>
-            <a:off x="43517" y="54246"/>
-            <a:ext cx="1180381" cy="169277"/>
+            <a:off x="25241" y="63223"/>
+            <a:ext cx="1403509" cy="184666"/>
           </a:xfrm>
           <a:prstGeom prst="rect">
             <a:avLst/>
@@ -7454,25 +6892,24 @@
           </a:bodyPr>
           <a:lstStyle/>
           <a:p>
-            <a:pPr algn="ctr"/>
             <a:r>
-              <a:rPr lang="ko-KR" altLang="en-US" sz="500" spc="-11" dirty="0">
-                <a:latin typeface="KoPub돋움체 Light" panose="02020603020101020101" pitchFamily="18" charset="-127"/>
-                <a:ea typeface="KoPub돋움체 Light" panose="02020603020101020101" pitchFamily="18" charset="-127"/>
+              <a:rPr lang="ko-KR" altLang="en-US" sz="600" b="1" spc="-11" dirty="0">
+                <a:latin typeface="KoPub돋움체 Bold" panose="00000800000000000000" pitchFamily="2" charset="-127"/>
+                <a:ea typeface="KoPub돋움체 Bold" panose="00000800000000000000" pitchFamily="2" charset="-127"/>
               </a:rPr>
               <a:t>순천향대학교 천안병원 </a:t>
             </a:r>
             <a:r>
-              <a:rPr lang="en-US" altLang="ko-KR" sz="500" spc="-11" dirty="0">
-                <a:latin typeface="KoPub돋움체 Light" panose="02020603020101020101" pitchFamily="18" charset="-127"/>
-                <a:ea typeface="KoPub돋움체 Light" panose="02020603020101020101" pitchFamily="18" charset="-127"/>
+              <a:rPr lang="en-US" altLang="ko-KR" sz="600" b="1" spc="-11" dirty="0">
+                <a:latin typeface="KoPub돋움체 Bold" panose="00000800000000000000" pitchFamily="2" charset="-127"/>
+                <a:ea typeface="KoPub돋움체 Bold" panose="00000800000000000000" pitchFamily="2" charset="-127"/>
               </a:rPr>
               <a:t>| </a:t>
             </a:r>
             <a:r>
-              <a:rPr lang="ko-KR" altLang="en-US" sz="500" spc="-11" dirty="0">
-                <a:latin typeface="KoPub돋움체 Light" panose="02020603020101020101" pitchFamily="18" charset="-127"/>
-                <a:ea typeface="KoPub돋움체 Light" panose="02020603020101020101" pitchFamily="18" charset="-127"/>
+              <a:rPr lang="ko-KR" altLang="en-US" sz="600" b="1" spc="-11" dirty="0">
+                <a:latin typeface="KoPub돋움체 Bold" panose="00000800000000000000" pitchFamily="2" charset="-127"/>
+                <a:ea typeface="KoPub돋움체 Bold" panose="00000800000000000000" pitchFamily="2" charset="-127"/>
               </a:rPr>
               <a:t>진료지원간호팀 </a:t>
             </a:r>
@@ -7481,10 +6918,10 @@
       </p:sp>
       <p:grpSp>
         <p:nvGrpSpPr>
-          <p:cNvPr id="20" name="그룹 19">
+          <p:cNvPr id="17" name="그룹 16">
             <a:extLst>
               <a:ext uri="{FF2B5EF4-FFF2-40B4-BE49-F238E27FC236}">
-                <a16:creationId xmlns:a16="http://schemas.microsoft.com/office/drawing/2014/main" id="{3A94D311-91A8-9806-BB3D-18A5164105AA}"/>
+                <a16:creationId xmlns:a16="http://schemas.microsoft.com/office/drawing/2014/main" id="{CCD23336-35E2-7BBF-742C-67D82BDC7617}"/>
               </a:ext>
             </a:extLst>
           </p:cNvPr>
@@ -7493,449 +6930,8 @@
         </p:nvGrpSpPr>
         <p:grpSpPr>
           <a:xfrm>
-            <a:off x="692840" y="331471"/>
-            <a:ext cx="2337499" cy="520584"/>
-            <a:chOff x="422852" y="312900"/>
-            <a:chExt cx="2337499" cy="520584"/>
-          </a:xfrm>
-        </p:grpSpPr>
-        <p:sp>
-          <p:nvSpPr>
-            <p:cNvPr id="4" name="TextBox 3">
-              <a:extLst>
-                <a:ext uri="{FF2B5EF4-FFF2-40B4-BE49-F238E27FC236}">
-                  <a16:creationId xmlns:a16="http://schemas.microsoft.com/office/drawing/2014/main" id="{A9F21CF1-B5E4-F760-15EB-8B3B09B18594}"/>
-                </a:ext>
-              </a:extLst>
-            </p:cNvPr>
-            <p:cNvSpPr txBox="1"/>
-            <p:nvPr/>
-          </p:nvSpPr>
-          <p:spPr>
-            <a:xfrm>
-              <a:off x="696163" y="312900"/>
-              <a:ext cx="1790875" cy="338554"/>
-            </a:xfrm>
-            <a:prstGeom prst="rect">
-              <a:avLst/>
-            </a:prstGeom>
-            <a:noFill/>
-          </p:spPr>
-          <p:txBody>
-            <a:bodyPr wrap="none">
-              <a:spAutoFit/>
-            </a:bodyPr>
-            <a:lstStyle/>
-            <a:p>
-              <a:pPr algn="ctr"/>
-              <a:r>
-                <a:rPr lang="ko-KR" altLang="en-US" sz="1600" dirty="0" err="1">
-                  <a:solidFill>
-                    <a:schemeClr val="accent1">
-                      <a:lumMod val="50000"/>
-                    </a:schemeClr>
-                  </a:solidFill>
-                  <a:latin typeface="KoPub돋움체 Bold" panose="02020603020101020101" pitchFamily="18" charset="-127"/>
-                  <a:ea typeface="KoPub돋움체 Bold" panose="02020603020101020101" pitchFamily="18" charset="-127"/>
-                </a:rPr>
-                <a:t>우리가치</a:t>
-              </a:r>
-              <a:r>
-                <a:rPr lang="ko-KR" altLang="en-US" sz="1600" dirty="0">
-                  <a:solidFill>
-                    <a:schemeClr val="accent1">
-                      <a:lumMod val="50000"/>
-                    </a:schemeClr>
-                  </a:solidFill>
-                  <a:latin typeface="KoPub돋움체 Bold" panose="02020603020101020101" pitchFamily="18" charset="-127"/>
-                  <a:ea typeface="KoPub돋움체 Bold" panose="02020603020101020101" pitchFamily="18" charset="-127"/>
-                </a:rPr>
-                <a:t> </a:t>
-              </a:r>
-              <a:r>
-                <a:rPr lang="en-US" altLang="ko-KR" sz="1600" dirty="0" err="1">
-                  <a:solidFill>
-                    <a:schemeClr val="accent1">
-                      <a:lumMod val="50000"/>
-                    </a:schemeClr>
-                  </a:solidFill>
-                  <a:latin typeface="KoPub돋움체 Bold" panose="02020603020101020101" pitchFamily="18" charset="-127"/>
-                  <a:ea typeface="KoPub돋움체 Bold" panose="02020603020101020101" pitchFamily="18" charset="-127"/>
-                </a:rPr>
-                <a:t>WeValue</a:t>
-              </a:r>
-              <a:endParaRPr lang="en-US" altLang="ko-KR" sz="1600" dirty="0">
-                <a:solidFill>
-                  <a:schemeClr val="accent1">
-                    <a:lumMod val="50000"/>
-                  </a:schemeClr>
-                </a:solidFill>
-                <a:latin typeface="KoPub돋움체 Bold" panose="02020603020101020101" pitchFamily="18" charset="-127"/>
-                <a:ea typeface="KoPub돋움체 Bold" panose="02020603020101020101" pitchFamily="18" charset="-127"/>
-              </a:endParaRPr>
-            </a:p>
-          </p:txBody>
-        </p:sp>
-        <p:sp>
-          <p:nvSpPr>
-            <p:cNvPr id="6" name="TextBox 5">
-              <a:extLst>
-                <a:ext uri="{FF2B5EF4-FFF2-40B4-BE49-F238E27FC236}">
-                  <a16:creationId xmlns:a16="http://schemas.microsoft.com/office/drawing/2014/main" id="{7568F1DE-CF71-0724-1C36-0F54F127F211}"/>
-                </a:ext>
-              </a:extLst>
-            </p:cNvPr>
-            <p:cNvSpPr txBox="1"/>
-            <p:nvPr/>
-          </p:nvSpPr>
-          <p:spPr>
-            <a:xfrm>
-              <a:off x="422852" y="587263"/>
-              <a:ext cx="2337499" cy="246221"/>
-            </a:xfrm>
-            <a:prstGeom prst="rect">
-              <a:avLst/>
-            </a:prstGeom>
-            <a:noFill/>
-          </p:spPr>
-          <p:txBody>
-            <a:bodyPr wrap="none">
-              <a:spAutoFit/>
-            </a:bodyPr>
-            <a:lstStyle/>
-            <a:p>
-              <a:pPr algn="ctr"/>
-              <a:r>
-                <a:rPr lang="en-US" altLang="ko-KR" sz="1000" b="1" dirty="0">
-                  <a:latin typeface="KoPub돋움체 Light" panose="02020603020101020101" pitchFamily="18" charset="-127"/>
-                  <a:ea typeface="KoPub돋움체 Light" panose="02020603020101020101" pitchFamily="18" charset="-127"/>
-                </a:rPr>
-                <a:t>[</a:t>
-              </a:r>
-              <a:r>
-                <a:rPr lang="ko-KR" altLang="en-US" sz="1000" b="1" dirty="0">
-                  <a:latin typeface="KoPub돋움체 Light" panose="02020603020101020101" pitchFamily="18" charset="-127"/>
-                  <a:ea typeface="KoPub돋움체 Light" panose="02020603020101020101" pitchFamily="18" charset="-127"/>
-                </a:rPr>
-                <a:t>우리가 가치를 만드는 공간</a:t>
-              </a:r>
-              <a:r>
-                <a:rPr lang="en-US" altLang="ko-KR" sz="1000" b="1" dirty="0">
-                  <a:latin typeface="KoPub돋움체 Light" panose="02020603020101020101" pitchFamily="18" charset="-127"/>
-                  <a:ea typeface="KoPub돋움체 Light" panose="02020603020101020101" pitchFamily="18" charset="-127"/>
-                </a:rPr>
-                <a:t>, </a:t>
-              </a:r>
-              <a:r>
-                <a:rPr lang="ko-KR" altLang="en-US" sz="1000" b="1" dirty="0" err="1">
-                  <a:latin typeface="KoPub돋움체 Light" panose="02020603020101020101" pitchFamily="18" charset="-127"/>
-                  <a:ea typeface="KoPub돋움체 Light" panose="02020603020101020101" pitchFamily="18" charset="-127"/>
-                </a:rPr>
-                <a:t>우리가치</a:t>
-              </a:r>
-              <a:r>
-                <a:rPr lang="ko-KR" altLang="en-US" sz="1000" b="1" dirty="0">
-                  <a:latin typeface="KoPub돋움체 Light" panose="02020603020101020101" pitchFamily="18" charset="-127"/>
-                  <a:ea typeface="KoPub돋움체 Light" panose="02020603020101020101" pitchFamily="18" charset="-127"/>
-                </a:rPr>
-                <a:t> 허브</a:t>
-              </a:r>
-              <a:r>
-                <a:rPr lang="en-US" altLang="ko-KR" sz="1000" b="1" dirty="0">
-                  <a:latin typeface="KoPub돋움체 Light" panose="02020603020101020101" pitchFamily="18" charset="-127"/>
-                  <a:ea typeface="KoPub돋움체 Light" panose="02020603020101020101" pitchFamily="18" charset="-127"/>
-                </a:rPr>
-                <a:t>]</a:t>
-              </a:r>
-              <a:endParaRPr lang="en-US" altLang="ko-KR" sz="1000" b="1" dirty="0">
-                <a:solidFill>
-                  <a:schemeClr val="accent1">
-                    <a:lumMod val="50000"/>
-                  </a:schemeClr>
-                </a:solidFill>
-                <a:latin typeface="KoPub돋움체 Light" panose="02020603020101020101" pitchFamily="18" charset="-127"/>
-                <a:ea typeface="KoPub돋움체 Light" panose="02020603020101020101" pitchFamily="18" charset="-127"/>
-              </a:endParaRPr>
-            </a:p>
-          </p:txBody>
-        </p:sp>
-      </p:grpSp>
-      <p:sp>
-        <p:nvSpPr>
-          <p:cNvPr id="7" name="TextBox 6">
-            <a:extLst>
-              <a:ext uri="{FF2B5EF4-FFF2-40B4-BE49-F238E27FC236}">
-                <a16:creationId xmlns:a16="http://schemas.microsoft.com/office/drawing/2014/main" id="{320C932E-738E-226D-2236-9B9E5B9AABCC}"/>
-              </a:ext>
-            </a:extLst>
-          </p:cNvPr>
-          <p:cNvSpPr txBox="1"/>
-          <p:nvPr/>
-        </p:nvSpPr>
-        <p:spPr>
-          <a:xfrm>
-            <a:off x="163608" y="1041309"/>
-            <a:ext cx="1409361" cy="230832"/>
-          </a:xfrm>
-          <a:prstGeom prst="rect">
-            <a:avLst/>
-          </a:prstGeom>
-          <a:noFill/>
-        </p:spPr>
-        <p:txBody>
-          <a:bodyPr wrap="none">
-            <a:spAutoFit/>
-          </a:bodyPr>
-          <a:lstStyle/>
-          <a:p>
-            <a:pPr algn="ctr"/>
-            <a:r>
-              <a:rPr lang="ko-KR" altLang="en-US" sz="900" b="1" dirty="0">
-                <a:solidFill>
-                  <a:schemeClr val="tx2">
-                    <a:lumMod val="50000"/>
-                  </a:schemeClr>
-                </a:solidFill>
-                <a:latin typeface="KoPub돋움체 Light" panose="02020603020101020101" pitchFamily="18" charset="-127"/>
-                <a:ea typeface="KoPub돋움체 Light" panose="02020603020101020101" pitchFamily="18" charset="-127"/>
-              </a:rPr>
-              <a:t>소통의 광장</a:t>
-            </a:r>
-            <a:r>
-              <a:rPr lang="en-US" altLang="ko-KR" sz="900" b="1" dirty="0">
-                <a:solidFill>
-                  <a:schemeClr val="tx2">
-                    <a:lumMod val="50000"/>
-                  </a:schemeClr>
-                </a:solidFill>
-                <a:latin typeface="KoPub돋움체 Light" panose="02020603020101020101" pitchFamily="18" charset="-127"/>
-                <a:ea typeface="KoPub돋움체 Light" panose="02020603020101020101" pitchFamily="18" charset="-127"/>
-              </a:rPr>
-              <a:t> (Community)</a:t>
-            </a:r>
-            <a:endParaRPr lang="en-US" altLang="ko-KR" sz="800" dirty="0">
-              <a:solidFill>
-                <a:schemeClr val="tx2">
-                  <a:lumMod val="50000"/>
-                </a:schemeClr>
-              </a:solidFill>
-              <a:latin typeface="KoPub돋움체 Light" panose="02020603020101020101" pitchFamily="18" charset="-127"/>
-              <a:ea typeface="KoPub돋움체 Light" panose="02020603020101020101" pitchFamily="18" charset="-127"/>
-            </a:endParaRPr>
-          </a:p>
-        </p:txBody>
-      </p:sp>
-      <p:sp>
-        <p:nvSpPr>
-          <p:cNvPr id="8" name="TextBox 7">
-            <a:extLst>
-              <a:ext uri="{FF2B5EF4-FFF2-40B4-BE49-F238E27FC236}">
-                <a16:creationId xmlns:a16="http://schemas.microsoft.com/office/drawing/2014/main" id="{64D595D3-D09E-F0D0-DC82-B4CC62DF8AE9}"/>
-              </a:ext>
-            </a:extLst>
-          </p:cNvPr>
-          <p:cNvSpPr txBox="1"/>
-          <p:nvPr/>
-        </p:nvSpPr>
-        <p:spPr>
-          <a:xfrm>
-            <a:off x="1548581" y="1041309"/>
-            <a:ext cx="1364476" cy="230832"/>
-          </a:xfrm>
-          <a:prstGeom prst="rect">
-            <a:avLst/>
-          </a:prstGeom>
-          <a:noFill/>
-        </p:spPr>
-        <p:txBody>
-          <a:bodyPr wrap="none">
-            <a:spAutoFit/>
-          </a:bodyPr>
-          <a:lstStyle/>
-          <a:p>
-            <a:pPr algn="ctr"/>
-            <a:r>
-              <a:rPr lang="ko-KR" altLang="en-US" sz="900" b="1" dirty="0">
-                <a:solidFill>
-                  <a:schemeClr val="tx2">
-                    <a:lumMod val="50000"/>
-                  </a:schemeClr>
-                </a:solidFill>
-                <a:latin typeface="KoPub돋움체 Light" panose="02020603020101020101" pitchFamily="18" charset="-127"/>
-                <a:ea typeface="KoPub돋움체 Light" panose="02020603020101020101" pitchFamily="18" charset="-127"/>
-              </a:rPr>
-              <a:t>업무의 기준  </a:t>
-            </a:r>
-            <a:r>
-              <a:rPr lang="en-US" altLang="ko-KR" sz="900" b="1" dirty="0">
-                <a:solidFill>
-                  <a:schemeClr val="tx2">
-                    <a:lumMod val="50000"/>
-                  </a:schemeClr>
-                </a:solidFill>
-                <a:latin typeface="KoPub돋움체 Light" panose="02020603020101020101" pitchFamily="18" charset="-127"/>
-                <a:ea typeface="KoPub돋움체 Light" panose="02020603020101020101" pitchFamily="18" charset="-127"/>
-              </a:rPr>
-              <a:t>(Standards)</a:t>
-            </a:r>
-            <a:endParaRPr lang="en-US" altLang="ko-KR" sz="800" dirty="0">
-              <a:solidFill>
-                <a:schemeClr val="tx2">
-                  <a:lumMod val="50000"/>
-                </a:schemeClr>
-              </a:solidFill>
-              <a:latin typeface="KoPub돋움체 Light" panose="02020603020101020101" pitchFamily="18" charset="-127"/>
-              <a:ea typeface="KoPub돋움체 Light" panose="02020603020101020101" pitchFamily="18" charset="-127"/>
-            </a:endParaRPr>
-          </a:p>
-        </p:txBody>
-      </p:sp>
-      <p:sp>
-        <p:nvSpPr>
-          <p:cNvPr id="9" name="TextBox 8">
-            <a:extLst>
-              <a:ext uri="{FF2B5EF4-FFF2-40B4-BE49-F238E27FC236}">
-                <a16:creationId xmlns:a16="http://schemas.microsoft.com/office/drawing/2014/main" id="{173A6E1A-53F6-285B-8984-EC8B50750AFA}"/>
-              </a:ext>
-            </a:extLst>
-          </p:cNvPr>
-          <p:cNvSpPr txBox="1"/>
-          <p:nvPr/>
-        </p:nvSpPr>
-        <p:spPr>
-          <a:xfrm>
-            <a:off x="206889" y="1305551"/>
-            <a:ext cx="1322798" cy="230832"/>
-          </a:xfrm>
-          <a:prstGeom prst="rect">
-            <a:avLst/>
-          </a:prstGeom>
-          <a:noFill/>
-        </p:spPr>
-        <p:txBody>
-          <a:bodyPr wrap="none">
-            <a:spAutoFit/>
-          </a:bodyPr>
-          <a:lstStyle/>
-          <a:p>
-            <a:pPr algn="ctr"/>
-            <a:r>
-              <a:rPr lang="ko-KR" altLang="en-US" sz="900" b="1" dirty="0">
-                <a:solidFill>
-                  <a:schemeClr val="tx2">
-                    <a:lumMod val="50000"/>
-                  </a:schemeClr>
-                </a:solidFill>
-                <a:latin typeface="KoPub돋움체 Light" panose="02020603020101020101" pitchFamily="18" charset="-127"/>
-                <a:ea typeface="KoPub돋움체 Light" panose="02020603020101020101" pitchFamily="18" charset="-127"/>
-              </a:rPr>
-              <a:t>배움의 창구 </a:t>
-            </a:r>
-            <a:r>
-              <a:rPr lang="en-US" altLang="ko-KR" sz="900" b="1" dirty="0">
-                <a:solidFill>
-                  <a:schemeClr val="tx2">
-                    <a:lumMod val="50000"/>
-                  </a:schemeClr>
-                </a:solidFill>
-                <a:latin typeface="KoPub돋움체 Light" panose="02020603020101020101" pitchFamily="18" charset="-127"/>
-                <a:ea typeface="KoPub돋움체 Light" panose="02020603020101020101" pitchFamily="18" charset="-127"/>
-              </a:rPr>
-              <a:t>(Education)</a:t>
-            </a:r>
-            <a:endParaRPr lang="ko-KR" altLang="en-US" sz="800" dirty="0">
-              <a:solidFill>
-                <a:schemeClr val="tx2">
-                  <a:lumMod val="50000"/>
-                </a:schemeClr>
-              </a:solidFill>
-              <a:latin typeface="KoPub돋움체 Light" panose="02020603020101020101" pitchFamily="18" charset="-127"/>
-              <a:ea typeface="KoPub돋움체 Light" panose="02020603020101020101" pitchFamily="18" charset="-127"/>
-            </a:endParaRPr>
-          </a:p>
-        </p:txBody>
-      </p:sp>
-      <p:sp>
-        <p:nvSpPr>
-          <p:cNvPr id="10" name="TextBox 9">
-            <a:extLst>
-              <a:ext uri="{FF2B5EF4-FFF2-40B4-BE49-F238E27FC236}">
-                <a16:creationId xmlns:a16="http://schemas.microsoft.com/office/drawing/2014/main" id="{0E1B8703-A0FA-4236-9ABC-7BE8C2843DDF}"/>
-              </a:ext>
-            </a:extLst>
-          </p:cNvPr>
-          <p:cNvSpPr txBox="1"/>
-          <p:nvPr/>
-        </p:nvSpPr>
-        <p:spPr>
-          <a:xfrm>
-            <a:off x="1530948" y="1305551"/>
-            <a:ext cx="1399743" cy="230832"/>
-          </a:xfrm>
-          <a:prstGeom prst="rect">
-            <a:avLst/>
-          </a:prstGeom>
-          <a:noFill/>
-        </p:spPr>
-        <p:txBody>
-          <a:bodyPr wrap="none">
-            <a:spAutoFit/>
-          </a:bodyPr>
-          <a:lstStyle/>
-          <a:p>
-            <a:pPr algn="ctr"/>
-            <a:r>
-              <a:rPr lang="ko-KR" altLang="en-US" sz="900" b="1" dirty="0">
-                <a:solidFill>
-                  <a:schemeClr val="tx2">
-                    <a:lumMod val="50000"/>
-                  </a:schemeClr>
-                </a:solidFill>
-                <a:latin typeface="KoPub돋움체 Light" panose="02020603020101020101" pitchFamily="18" charset="-127"/>
-                <a:ea typeface="KoPub돋움체 Light" panose="02020603020101020101" pitchFamily="18" charset="-127"/>
-              </a:rPr>
-              <a:t>투명한 지표  </a:t>
-            </a:r>
-            <a:r>
-              <a:rPr lang="en-US" altLang="ko-KR" sz="900" b="1" dirty="0">
-                <a:solidFill>
-                  <a:schemeClr val="tx2">
-                    <a:lumMod val="50000"/>
-                  </a:schemeClr>
-                </a:solidFill>
-                <a:latin typeface="KoPub돋움체 Light" panose="02020603020101020101" pitchFamily="18" charset="-127"/>
-                <a:ea typeface="KoPub돋움체 Light" panose="02020603020101020101" pitchFamily="18" charset="-127"/>
-              </a:rPr>
-              <a:t>(Dashboard)</a:t>
-            </a:r>
-            <a:endParaRPr lang="ko-KR" altLang="en-US" sz="800" dirty="0">
-              <a:solidFill>
-                <a:schemeClr val="tx2">
-                  <a:lumMod val="50000"/>
-                </a:schemeClr>
-              </a:solidFill>
-              <a:latin typeface="KoPub돋움체 Light" panose="02020603020101020101" pitchFamily="18" charset="-127"/>
-              <a:ea typeface="KoPub돋움체 Light" panose="02020603020101020101" pitchFamily="18" charset="-127"/>
-            </a:endParaRPr>
-          </a:p>
-        </p:txBody>
-      </p:sp>
-      <p:grpSp>
-        <p:nvGrpSpPr>
-          <p:cNvPr id="17" name="그룹 16">
-            <a:extLst>
-              <a:ext uri="{FF2B5EF4-FFF2-40B4-BE49-F238E27FC236}">
-                <a16:creationId xmlns:a16="http://schemas.microsoft.com/office/drawing/2014/main" id="{DCB0B500-4142-7FA3-3C92-323388B42ECA}"/>
-              </a:ext>
-            </a:extLst>
-          </p:cNvPr>
-          <p:cNvGrpSpPr/>
-          <p:nvPr/>
-        </p:nvGrpSpPr>
-        <p:grpSpPr>
-          <a:xfrm>
-            <a:off x="173236" y="377028"/>
-            <a:ext cx="538336" cy="538336"/>
+            <a:off x="589938" y="838920"/>
+            <a:ext cx="634026" cy="568432"/>
             <a:chOff x="777945" y="-736888"/>
             <a:chExt cx="663508" cy="663508"/>
           </a:xfrm>
@@ -7945,7 +6941,7 @@
             <p:cNvPr id="5" name="그림 4" descr="패턴, 사각형, 예술, 직사각형이(가) 표시된 사진&#10;&#10;AI 생성 콘텐츠는 정확하지 않을 수 있습니다.">
               <a:extLst>
                 <a:ext uri="{FF2B5EF4-FFF2-40B4-BE49-F238E27FC236}">
-                  <a16:creationId xmlns:a16="http://schemas.microsoft.com/office/drawing/2014/main" id="{0528E6C8-A59A-2BEA-1020-50AA14FF171D}"/>
+                  <a16:creationId xmlns:a16="http://schemas.microsoft.com/office/drawing/2014/main" id="{40C63F4C-30AB-6EF2-23BA-1233104A9DC3}"/>
                 </a:ext>
               </a:extLst>
             </p:cNvPr>
@@ -7975,7 +6971,7 @@
             <p:cNvPr id="13" name="L 도형 12">
               <a:extLst>
                 <a:ext uri="{FF2B5EF4-FFF2-40B4-BE49-F238E27FC236}">
-                  <a16:creationId xmlns:a16="http://schemas.microsoft.com/office/drawing/2014/main" id="{418FD9C1-4647-E1F7-F113-42259DA23F31}"/>
+                  <a16:creationId xmlns:a16="http://schemas.microsoft.com/office/drawing/2014/main" id="{B242B433-4D06-F840-EA3E-7FA7766D184C}"/>
                 </a:ext>
               </a:extLst>
             </p:cNvPr>
@@ -8032,7 +7028,7 @@
             <p:cNvPr id="14" name="L 도형 13">
               <a:extLst>
                 <a:ext uri="{FF2B5EF4-FFF2-40B4-BE49-F238E27FC236}">
-                  <a16:creationId xmlns:a16="http://schemas.microsoft.com/office/drawing/2014/main" id="{9220F428-BEE0-80B3-1BBA-6A5FDE235791}"/>
+                  <a16:creationId xmlns:a16="http://schemas.microsoft.com/office/drawing/2014/main" id="{37DD2CDD-BF9D-CD6A-CC77-30C00DF7A8EA}"/>
                 </a:ext>
               </a:extLst>
             </p:cNvPr>
@@ -8089,7 +7085,7 @@
             <p:cNvPr id="15" name="L 도형 14">
               <a:extLst>
                 <a:ext uri="{FF2B5EF4-FFF2-40B4-BE49-F238E27FC236}">
-                  <a16:creationId xmlns:a16="http://schemas.microsoft.com/office/drawing/2014/main" id="{DA8CFCB1-0B2E-38AA-A39A-FDEE013D9336}"/>
+                  <a16:creationId xmlns:a16="http://schemas.microsoft.com/office/drawing/2014/main" id="{DD20813D-7C4F-9420-E012-EB09FDC9059E}"/>
                 </a:ext>
               </a:extLst>
             </p:cNvPr>
@@ -8146,7 +7142,7 @@
             <p:cNvPr id="16" name="L 도형 15">
               <a:extLst>
                 <a:ext uri="{FF2B5EF4-FFF2-40B4-BE49-F238E27FC236}">
-                  <a16:creationId xmlns:a16="http://schemas.microsoft.com/office/drawing/2014/main" id="{7FB2DF92-F8CC-2F10-20A3-015CCB1C6973}"/>
+                  <a16:creationId xmlns:a16="http://schemas.microsoft.com/office/drawing/2014/main" id="{C2F58D7B-1E2F-7C1C-29C2-3CBAF321313E}"/>
                 </a:ext>
               </a:extLst>
             </p:cNvPr>
@@ -8199,10 +7195,564 @@
           </p:txBody>
         </p:sp>
       </p:grpSp>
+      <p:grpSp>
+        <p:nvGrpSpPr>
+          <p:cNvPr id="18" name="그룹 17">
+            <a:extLst>
+              <a:ext uri="{FF2B5EF4-FFF2-40B4-BE49-F238E27FC236}">
+                <a16:creationId xmlns:a16="http://schemas.microsoft.com/office/drawing/2014/main" id="{360DDF2E-2289-473B-B5F6-77027118C993}"/>
+              </a:ext>
+            </a:extLst>
+          </p:cNvPr>
+          <p:cNvGrpSpPr/>
+          <p:nvPr/>
+        </p:nvGrpSpPr>
+        <p:grpSpPr>
+          <a:xfrm>
+            <a:off x="113069" y="274768"/>
+            <a:ext cx="1746464" cy="425416"/>
+            <a:chOff x="614240" y="226472"/>
+            <a:chExt cx="1746464" cy="425416"/>
+          </a:xfrm>
+        </p:grpSpPr>
+        <p:sp>
+          <p:nvSpPr>
+            <p:cNvPr id="4" name="TextBox 3">
+              <a:extLst>
+                <a:ext uri="{FF2B5EF4-FFF2-40B4-BE49-F238E27FC236}">
+                  <a16:creationId xmlns:a16="http://schemas.microsoft.com/office/drawing/2014/main" id="{1F0C02A7-D766-DD14-548E-2AE7955534F4}"/>
+                </a:ext>
+              </a:extLst>
+            </p:cNvPr>
+            <p:cNvSpPr txBox="1"/>
+            <p:nvPr/>
+          </p:nvSpPr>
+          <p:spPr>
+            <a:xfrm>
+              <a:off x="685077" y="226472"/>
+              <a:ext cx="1604991" cy="307777"/>
+            </a:xfrm>
+            <a:prstGeom prst="rect">
+              <a:avLst/>
+            </a:prstGeom>
+            <a:noFill/>
+          </p:spPr>
+          <p:txBody>
+            <a:bodyPr wrap="none">
+              <a:spAutoFit/>
+            </a:bodyPr>
+            <a:lstStyle/>
+            <a:p>
+              <a:pPr algn="ctr"/>
+              <a:r>
+                <a:rPr lang="ko-KR" altLang="en-US" sz="1400" dirty="0" err="1">
+                  <a:solidFill>
+                    <a:srgbClr val="00B0F0"/>
+                  </a:solidFill>
+                  <a:latin typeface="KoPub돋움체 Bold" panose="00000800000000000000" pitchFamily="2" charset="-127"/>
+                  <a:ea typeface="KoPub돋움체 Bold" panose="00000800000000000000" pitchFamily="2" charset="-127"/>
+                </a:rPr>
+                <a:t>우리가치</a:t>
+              </a:r>
+              <a:r>
+                <a:rPr lang="ko-KR" altLang="en-US" sz="1400" dirty="0">
+                  <a:solidFill>
+                    <a:schemeClr val="accent1">
+                      <a:lumMod val="50000"/>
+                    </a:schemeClr>
+                  </a:solidFill>
+                  <a:latin typeface="KoPub돋움체 Bold" panose="02020603020101020101" pitchFamily="18" charset="-127"/>
+                  <a:ea typeface="KoPub돋움체 Bold" panose="02020603020101020101" pitchFamily="18" charset="-127"/>
+                </a:rPr>
+                <a:t> </a:t>
+              </a:r>
+              <a:r>
+                <a:rPr lang="en-US" altLang="ko-KR" sz="1400" dirty="0" err="1">
+                  <a:solidFill>
+                    <a:schemeClr val="accent1">
+                      <a:lumMod val="50000"/>
+                    </a:schemeClr>
+                  </a:solidFill>
+                  <a:latin typeface="Franklin Gothic Heavy" panose="020B0903020102020204" pitchFamily="34" charset="0"/>
+                  <a:ea typeface="KoPub돋움체 Bold" panose="02020603020101020101" pitchFamily="18" charset="-127"/>
+                </a:rPr>
+                <a:t>WeValue</a:t>
+              </a:r>
+              <a:endParaRPr lang="en-US" altLang="ko-KR" sz="1400" dirty="0">
+                <a:solidFill>
+                  <a:schemeClr val="accent1">
+                    <a:lumMod val="50000"/>
+                  </a:schemeClr>
+                </a:solidFill>
+                <a:latin typeface="Franklin Gothic Heavy" panose="020B0903020102020204" pitchFamily="34" charset="0"/>
+                <a:ea typeface="KoPub돋움체 Bold" panose="02020603020101020101" pitchFamily="18" charset="-127"/>
+              </a:endParaRPr>
+            </a:p>
+          </p:txBody>
+        </p:sp>
+        <p:sp>
+          <p:nvSpPr>
+            <p:cNvPr id="6" name="TextBox 5">
+              <a:extLst>
+                <a:ext uri="{FF2B5EF4-FFF2-40B4-BE49-F238E27FC236}">
+                  <a16:creationId xmlns:a16="http://schemas.microsoft.com/office/drawing/2014/main" id="{25F3C248-44C4-9D7A-C464-62D68C9890DC}"/>
+                </a:ext>
+              </a:extLst>
+            </p:cNvPr>
+            <p:cNvSpPr txBox="1"/>
+            <p:nvPr/>
+          </p:nvSpPr>
+          <p:spPr>
+            <a:xfrm>
+              <a:off x="622591" y="451833"/>
+              <a:ext cx="1729962" cy="200055"/>
+            </a:xfrm>
+            <a:prstGeom prst="rect">
+              <a:avLst/>
+            </a:prstGeom>
+            <a:noFill/>
+          </p:spPr>
+          <p:txBody>
+            <a:bodyPr wrap="none">
+              <a:spAutoFit/>
+            </a:bodyPr>
+            <a:lstStyle/>
+            <a:p>
+              <a:pPr algn="ctr"/>
+              <a:r>
+                <a:rPr lang="en-US" altLang="ko-KR" sz="700" b="1" dirty="0">
+                  <a:latin typeface="KoPub돋움체 Bold" panose="00000800000000000000" pitchFamily="2" charset="-127"/>
+                  <a:ea typeface="KoPub돋움체 Bold" panose="00000800000000000000" pitchFamily="2" charset="-127"/>
+                </a:rPr>
+                <a:t>[</a:t>
+              </a:r>
+              <a:r>
+                <a:rPr lang="ko-KR" altLang="en-US" sz="700" b="1" dirty="0">
+                  <a:latin typeface="KoPub돋움체 Bold" panose="00000800000000000000" pitchFamily="2" charset="-127"/>
+                  <a:ea typeface="KoPub돋움체 Bold" panose="00000800000000000000" pitchFamily="2" charset="-127"/>
+                </a:rPr>
+                <a:t>우리가 가치를 만드는 공간</a:t>
+              </a:r>
+              <a:r>
+                <a:rPr lang="en-US" altLang="ko-KR" sz="700" b="1" dirty="0">
+                  <a:latin typeface="KoPub돋움체 Bold" panose="00000800000000000000" pitchFamily="2" charset="-127"/>
+                  <a:ea typeface="KoPub돋움체 Bold" panose="00000800000000000000" pitchFamily="2" charset="-127"/>
+                </a:rPr>
+                <a:t>, </a:t>
+              </a:r>
+              <a:r>
+                <a:rPr lang="ko-KR" altLang="en-US" sz="700" b="1" dirty="0" err="1">
+                  <a:latin typeface="KoPub돋움체 Bold" panose="00000800000000000000" pitchFamily="2" charset="-127"/>
+                  <a:ea typeface="KoPub돋움체 Bold" panose="00000800000000000000" pitchFamily="2" charset="-127"/>
+                </a:rPr>
+                <a:t>우리가치</a:t>
+              </a:r>
+              <a:r>
+                <a:rPr lang="ko-KR" altLang="en-US" sz="700" b="1" dirty="0">
+                  <a:latin typeface="KoPub돋움체 Bold" panose="00000800000000000000" pitchFamily="2" charset="-127"/>
+                  <a:ea typeface="KoPub돋움체 Bold" panose="00000800000000000000" pitchFamily="2" charset="-127"/>
+                </a:rPr>
+                <a:t> 허브</a:t>
+              </a:r>
+              <a:r>
+                <a:rPr lang="en-US" altLang="ko-KR" sz="700" b="1" dirty="0">
+                  <a:latin typeface="KoPub돋움체 Bold" panose="00000800000000000000" pitchFamily="2" charset="-127"/>
+                  <a:ea typeface="KoPub돋움체 Bold" panose="00000800000000000000" pitchFamily="2" charset="-127"/>
+                </a:rPr>
+                <a:t>]</a:t>
+              </a:r>
+            </a:p>
+          </p:txBody>
+        </p:sp>
+        <p:pic>
+          <p:nvPicPr>
+            <p:cNvPr id="10" name="그림 9">
+              <a:extLst>
+                <a:ext uri="{FF2B5EF4-FFF2-40B4-BE49-F238E27FC236}">
+                  <a16:creationId xmlns:a16="http://schemas.microsoft.com/office/drawing/2014/main" id="{EB1E9046-9340-4D3D-AA23-F89851FB0C3F}"/>
+                </a:ext>
+              </a:extLst>
+            </p:cNvPr>
+            <p:cNvPicPr>
+              <a:picLocks noChangeAspect="1"/>
+            </p:cNvPicPr>
+            <p:nvPr/>
+          </p:nvPicPr>
+          <p:blipFill>
+            <a:blip r:embed="rId3"/>
+            <a:stretch>
+              <a:fillRect/>
+            </a:stretch>
+          </p:blipFill>
+          <p:spPr>
+            <a:xfrm>
+              <a:off x="614240" y="271322"/>
+              <a:ext cx="147416" cy="128728"/>
+            </a:xfrm>
+            <a:prstGeom prst="rect">
+              <a:avLst/>
+            </a:prstGeom>
+          </p:spPr>
+        </p:pic>
+        <p:pic>
+          <p:nvPicPr>
+            <p:cNvPr id="29" name="그림 28">
+              <a:extLst>
+                <a:ext uri="{FF2B5EF4-FFF2-40B4-BE49-F238E27FC236}">
+                  <a16:creationId xmlns:a16="http://schemas.microsoft.com/office/drawing/2014/main" id="{799E618A-B635-413C-90D6-9BBB5F48E428}"/>
+                </a:ext>
+              </a:extLst>
+            </p:cNvPr>
+            <p:cNvPicPr>
+              <a:picLocks noChangeAspect="1"/>
+            </p:cNvPicPr>
+            <p:nvPr/>
+          </p:nvPicPr>
+          <p:blipFill>
+            <a:blip r:embed="rId3"/>
+            <a:stretch>
+              <a:fillRect/>
+            </a:stretch>
+          </p:blipFill>
+          <p:spPr>
+            <a:xfrm rot="10800000">
+              <a:off x="2181315" y="257361"/>
+              <a:ext cx="179389" cy="156650"/>
+            </a:xfrm>
+            <a:prstGeom prst="rect">
+              <a:avLst/>
+            </a:prstGeom>
+          </p:spPr>
+        </p:pic>
+        <p:pic>
+          <p:nvPicPr>
+            <p:cNvPr id="30" name="그림 29">
+              <a:extLst>
+                <a:ext uri="{FF2B5EF4-FFF2-40B4-BE49-F238E27FC236}">
+                  <a16:creationId xmlns:a16="http://schemas.microsoft.com/office/drawing/2014/main" id="{FCD9B137-9F07-4052-B76C-36D6AED25D86}"/>
+                </a:ext>
+              </a:extLst>
+            </p:cNvPr>
+            <p:cNvPicPr>
+              <a:picLocks noChangeAspect="1"/>
+            </p:cNvPicPr>
+            <p:nvPr/>
+          </p:nvPicPr>
+          <p:blipFill>
+            <a:blip r:embed="rId3"/>
+            <a:stretch>
+              <a:fillRect/>
+            </a:stretch>
+          </p:blipFill>
+          <p:spPr>
+            <a:xfrm rot="10800000">
+              <a:off x="2197302" y="276730"/>
+              <a:ext cx="147414" cy="128728"/>
+            </a:xfrm>
+            <a:prstGeom prst="rect">
+              <a:avLst/>
+            </a:prstGeom>
+          </p:spPr>
+        </p:pic>
+      </p:grpSp>
+      <p:grpSp>
+        <p:nvGrpSpPr>
+          <p:cNvPr id="12" name="그룹 11">
+            <a:extLst>
+              <a:ext uri="{FF2B5EF4-FFF2-40B4-BE49-F238E27FC236}">
+                <a16:creationId xmlns:a16="http://schemas.microsoft.com/office/drawing/2014/main" id="{6B2D700B-07E0-4E28-A7D2-0F4C62846EE3}"/>
+              </a:ext>
+            </a:extLst>
+          </p:cNvPr>
+          <p:cNvGrpSpPr/>
+          <p:nvPr/>
+        </p:nvGrpSpPr>
+        <p:grpSpPr>
+          <a:xfrm>
+            <a:off x="1488355" y="772187"/>
+            <a:ext cx="1564409" cy="707886"/>
+            <a:chOff x="796295" y="778765"/>
+            <a:chExt cx="1564409" cy="707886"/>
+          </a:xfrm>
+        </p:grpSpPr>
+        <p:sp>
+          <p:nvSpPr>
+            <p:cNvPr id="26" name="TextBox 25">
+              <a:extLst>
+                <a:ext uri="{FF2B5EF4-FFF2-40B4-BE49-F238E27FC236}">
+                  <a16:creationId xmlns:a16="http://schemas.microsoft.com/office/drawing/2014/main" id="{61921C24-9018-417C-966E-E56980F41166}"/>
+                </a:ext>
+              </a:extLst>
+            </p:cNvPr>
+            <p:cNvSpPr txBox="1"/>
+            <p:nvPr/>
+          </p:nvSpPr>
+          <p:spPr>
+            <a:xfrm>
+              <a:off x="1422627" y="778765"/>
+              <a:ext cx="938077" cy="707886"/>
+            </a:xfrm>
+            <a:prstGeom prst="rect">
+              <a:avLst/>
+            </a:prstGeom>
+            <a:noFill/>
+          </p:spPr>
+          <p:txBody>
+            <a:bodyPr wrap="none" rtlCol="0">
+              <a:spAutoFit/>
+            </a:bodyPr>
+            <a:lstStyle/>
+            <a:p>
+              <a:r>
+                <a:rPr lang="en-US" altLang="ko-KR" sz="800" dirty="0">
+                  <a:latin typeface="KoPub돋움체 Light" panose="00000300000000000000" pitchFamily="2" charset="-127"/>
+                  <a:ea typeface="KoPub돋움체 Light" panose="00000300000000000000" pitchFamily="2" charset="-127"/>
+                </a:rPr>
+                <a:t>"</a:t>
+              </a:r>
+              <a:r>
+                <a:rPr lang="ko-KR" altLang="en-US" sz="800" dirty="0">
+                  <a:latin typeface="KoPub돋움체 Light" panose="00000300000000000000" pitchFamily="2" charset="-127"/>
+                  <a:ea typeface="KoPub돋움체 Light" panose="00000300000000000000" pitchFamily="2" charset="-127"/>
+                </a:rPr>
+                <a:t>함께하는 즐거움</a:t>
+              </a:r>
+              <a:r>
+                <a:rPr lang="en-US" altLang="ko-KR" sz="800" dirty="0">
+                  <a:latin typeface="KoPub돋움체 Light" panose="00000300000000000000" pitchFamily="2" charset="-127"/>
+                  <a:ea typeface="KoPub돋움체 Light" panose="00000300000000000000" pitchFamily="2" charset="-127"/>
+                </a:rPr>
+                <a:t>“</a:t>
+              </a:r>
+            </a:p>
+            <a:p>
+              <a:r>
+                <a:rPr lang="en-US" altLang="ko-KR" sz="800" dirty="0">
+                  <a:latin typeface="KoPub돋움체 Light" panose="00000300000000000000" pitchFamily="2" charset="-127"/>
+                  <a:ea typeface="KoPub돋움체 Light" panose="00000300000000000000" pitchFamily="2" charset="-127"/>
+                </a:rPr>
+                <a:t>"</a:t>
+              </a:r>
+              <a:r>
+                <a:rPr lang="ko-KR" altLang="en-US" sz="800" dirty="0">
+                  <a:latin typeface="KoPub돋움체 Light" panose="00000300000000000000" pitchFamily="2" charset="-127"/>
+                  <a:ea typeface="KoPub돋움체 Light" panose="00000300000000000000" pitchFamily="2" charset="-127"/>
+                </a:rPr>
+                <a:t>명확한 약속</a:t>
+              </a:r>
+              <a:r>
+                <a:rPr lang="en-US" altLang="ko-KR" sz="800" dirty="0">
+                  <a:latin typeface="KoPub돋움체 Light" panose="00000300000000000000" pitchFamily="2" charset="-127"/>
+                  <a:ea typeface="KoPub돋움체 Light" panose="00000300000000000000" pitchFamily="2" charset="-127"/>
+                </a:rPr>
+                <a:t>"</a:t>
+              </a:r>
+              <a:endParaRPr lang="ko-KR" altLang="en-US" sz="800" dirty="0">
+                <a:latin typeface="KoPub돋움체 Light" panose="00000300000000000000" pitchFamily="2" charset="-127"/>
+                <a:ea typeface="KoPub돋움체 Light" panose="00000300000000000000" pitchFamily="2" charset="-127"/>
+              </a:endParaRPr>
+            </a:p>
+            <a:p>
+              <a:r>
+                <a:rPr lang="en-US" altLang="ko-KR" sz="800" dirty="0">
+                  <a:latin typeface="KoPub돋움체 Light" panose="00000300000000000000" pitchFamily="2" charset="-127"/>
+                  <a:ea typeface="KoPub돋움체 Light" panose="00000300000000000000" pitchFamily="2" charset="-127"/>
+                </a:rPr>
+                <a:t>"</a:t>
+              </a:r>
+              <a:r>
+                <a:rPr lang="ko-KR" altLang="en-US" sz="800" dirty="0">
+                  <a:latin typeface="KoPub돋움체 Light" panose="00000300000000000000" pitchFamily="2" charset="-127"/>
+                  <a:ea typeface="KoPub돋움체 Light" panose="00000300000000000000" pitchFamily="2" charset="-127"/>
+                </a:rPr>
+                <a:t>한눈에 보는 실무</a:t>
+              </a:r>
+              <a:r>
+                <a:rPr lang="en-US" altLang="ko-KR" sz="800" dirty="0">
+                  <a:latin typeface="KoPub돋움체 Light" panose="00000300000000000000" pitchFamily="2" charset="-127"/>
+                  <a:ea typeface="KoPub돋움체 Light" panose="00000300000000000000" pitchFamily="2" charset="-127"/>
+                </a:rPr>
+                <a:t>"</a:t>
+              </a:r>
+              <a:endParaRPr lang="ko-KR" altLang="en-US" sz="800" dirty="0">
+                <a:latin typeface="KoPub돋움체 Light" panose="00000300000000000000" pitchFamily="2" charset="-127"/>
+                <a:ea typeface="KoPub돋움체 Light" panose="00000300000000000000" pitchFamily="2" charset="-127"/>
+              </a:endParaRPr>
+            </a:p>
+            <a:p>
+              <a:r>
+                <a:rPr lang="en-US" altLang="ko-KR" sz="800" dirty="0">
+                  <a:latin typeface="KoPub돋움체 Light" panose="00000300000000000000" pitchFamily="2" charset="-127"/>
+                  <a:ea typeface="KoPub돋움체 Light" panose="00000300000000000000" pitchFamily="2" charset="-127"/>
+                </a:rPr>
+                <a:t>"</a:t>
+              </a:r>
+              <a:r>
+                <a:rPr lang="ko-KR" altLang="en-US" sz="800" dirty="0">
+                  <a:latin typeface="KoPub돋움체 Light" panose="00000300000000000000" pitchFamily="2" charset="-127"/>
+                  <a:ea typeface="KoPub돋움체 Light" panose="00000300000000000000" pitchFamily="2" charset="-127"/>
+                </a:rPr>
+                <a:t>현장 밀착형 지원</a:t>
+              </a:r>
+              <a:r>
+                <a:rPr lang="en-US" altLang="ko-KR" sz="800" dirty="0">
+                  <a:latin typeface="KoPub돋움체 Light" panose="00000300000000000000" pitchFamily="2" charset="-127"/>
+                  <a:ea typeface="KoPub돋움체 Light" panose="00000300000000000000" pitchFamily="2" charset="-127"/>
+                </a:rPr>
+                <a:t>"</a:t>
+              </a:r>
+              <a:endParaRPr lang="ko-KR" altLang="en-US" sz="800" dirty="0">
+                <a:latin typeface="KoPub돋움체 Light" panose="00000300000000000000" pitchFamily="2" charset="-127"/>
+                <a:ea typeface="KoPub돋움체 Light" panose="00000300000000000000" pitchFamily="2" charset="-127"/>
+              </a:endParaRPr>
+            </a:p>
+            <a:p>
+              <a:r>
+                <a:rPr lang="en-US" altLang="ko-KR" sz="800" dirty="0">
+                  <a:latin typeface="KoPub돋움체 Light" panose="00000300000000000000" pitchFamily="2" charset="-127"/>
+                  <a:ea typeface="KoPub돋움체 Light" panose="00000300000000000000" pitchFamily="2" charset="-127"/>
+                </a:rPr>
+                <a:t>"</a:t>
+              </a:r>
+              <a:r>
+                <a:rPr lang="ko-KR" altLang="en-US" sz="800" dirty="0">
+                  <a:latin typeface="KoPub돋움체 Light" panose="00000300000000000000" pitchFamily="2" charset="-127"/>
+                  <a:ea typeface="KoPub돋움체 Light" panose="00000300000000000000" pitchFamily="2" charset="-127"/>
+                </a:rPr>
+                <a:t>변화의 체감</a:t>
+              </a:r>
+              <a:r>
+                <a:rPr lang="en-US" altLang="ko-KR" sz="800" dirty="0">
+                  <a:latin typeface="KoPub돋움체 Light" panose="00000300000000000000" pitchFamily="2" charset="-127"/>
+                  <a:ea typeface="KoPub돋움체 Light" panose="00000300000000000000" pitchFamily="2" charset="-127"/>
+                </a:rPr>
+                <a:t>"</a:t>
+              </a:r>
+              <a:endParaRPr lang="ko-KR" altLang="en-US" sz="800" dirty="0">
+                <a:latin typeface="KoPub돋움체 Light" panose="00000300000000000000" pitchFamily="2" charset="-127"/>
+                <a:ea typeface="KoPub돋움체 Light" panose="00000300000000000000" pitchFamily="2" charset="-127"/>
+              </a:endParaRPr>
+            </a:p>
+          </p:txBody>
+        </p:sp>
+        <p:sp>
+          <p:nvSpPr>
+            <p:cNvPr id="31" name="TextBox 30">
+              <a:extLst>
+                <a:ext uri="{FF2B5EF4-FFF2-40B4-BE49-F238E27FC236}">
+                  <a16:creationId xmlns:a16="http://schemas.microsoft.com/office/drawing/2014/main" id="{62EAB35A-296C-468C-BCA0-D585048BF4E9}"/>
+                </a:ext>
+              </a:extLst>
+            </p:cNvPr>
+            <p:cNvSpPr txBox="1"/>
+            <p:nvPr/>
+          </p:nvSpPr>
+          <p:spPr>
+            <a:xfrm>
+              <a:off x="796295" y="778765"/>
+              <a:ext cx="753732" cy="707886"/>
+            </a:xfrm>
+            <a:prstGeom prst="rect">
+              <a:avLst/>
+            </a:prstGeom>
+            <a:noFill/>
+          </p:spPr>
+          <p:txBody>
+            <a:bodyPr wrap="none" rtlCol="0">
+              <a:spAutoFit/>
+            </a:bodyPr>
+            <a:lstStyle/>
+            <a:p>
+              <a:pPr marL="88900" indent="-88900">
+                <a:buClr>
+                  <a:srgbClr val="00B0F0"/>
+                </a:buClr>
+                <a:buFont typeface="Arial" panose="020B0604020202020204" pitchFamily="34" charset="0"/>
+                <a:buChar char="•"/>
+              </a:pPr>
+              <a:r>
+                <a:rPr lang="ko-KR" altLang="en-US" sz="800" b="1" dirty="0">
+                  <a:latin typeface="KoPub돋움체 Bold" panose="00000800000000000000" pitchFamily="2" charset="-127"/>
+                  <a:ea typeface="KoPub돋움체 Bold" panose="00000800000000000000" pitchFamily="2" charset="-127"/>
+                </a:rPr>
+                <a:t>소통의 광장</a:t>
+              </a:r>
+              <a:endParaRPr lang="en-US" altLang="ko-KR" sz="800" b="1" dirty="0">
+                <a:latin typeface="KoPub돋움체 Bold" panose="00000800000000000000" pitchFamily="2" charset="-127"/>
+                <a:ea typeface="KoPub돋움체 Bold" panose="00000800000000000000" pitchFamily="2" charset="-127"/>
+              </a:endParaRPr>
+            </a:p>
+            <a:p>
+              <a:pPr marL="88900" indent="-88900">
+                <a:buClr>
+                  <a:srgbClr val="00B0F0"/>
+                </a:buClr>
+                <a:buFont typeface="Arial" panose="020B0604020202020204" pitchFamily="34" charset="0"/>
+                <a:buChar char="•"/>
+              </a:pPr>
+              <a:r>
+                <a:rPr lang="ko-KR" altLang="en-US" sz="800" b="1" dirty="0">
+                  <a:latin typeface="KoPub돋움체 Bold" panose="00000800000000000000" pitchFamily="2" charset="-127"/>
+                  <a:ea typeface="KoPub돋움체 Bold" panose="00000800000000000000" pitchFamily="2" charset="-127"/>
+                </a:rPr>
+                <a:t>업무 기준</a:t>
+              </a:r>
+            </a:p>
+            <a:p>
+              <a:pPr marL="88900" indent="-88900">
+                <a:buClr>
+                  <a:srgbClr val="00B0F0"/>
+                </a:buClr>
+                <a:buFont typeface="Arial" panose="020B0604020202020204" pitchFamily="34" charset="0"/>
+                <a:buChar char="•"/>
+              </a:pPr>
+              <a:r>
+                <a:rPr lang="ko-KR" altLang="en-US" sz="800" b="1" dirty="0">
+                  <a:latin typeface="KoPub돋움체 Bold" panose="00000800000000000000" pitchFamily="2" charset="-127"/>
+                  <a:ea typeface="KoPub돋움체 Bold" panose="00000800000000000000" pitchFamily="2" charset="-127"/>
+                </a:rPr>
+                <a:t>교육자료</a:t>
+              </a:r>
+            </a:p>
+            <a:p>
+              <a:pPr marL="88900" indent="-88900">
+                <a:buClr>
+                  <a:srgbClr val="00B0F0"/>
+                </a:buClr>
+                <a:buFont typeface="Arial" panose="020B0604020202020204" pitchFamily="34" charset="0"/>
+                <a:buChar char="•"/>
+              </a:pPr>
+              <a:r>
+                <a:rPr lang="ko-KR" altLang="en-US" sz="800" b="1" dirty="0">
+                  <a:latin typeface="KoPub돋움체 Bold" panose="00000800000000000000" pitchFamily="2" charset="-127"/>
+                  <a:ea typeface="KoPub돋움체 Bold" panose="00000800000000000000" pitchFamily="2" charset="-127"/>
+                </a:rPr>
+                <a:t>요청</a:t>
+              </a:r>
+            </a:p>
+            <a:p>
+              <a:pPr marL="88900" indent="-88900">
+                <a:buClr>
+                  <a:srgbClr val="00B0F0"/>
+                </a:buClr>
+                <a:buFont typeface="Arial" panose="020B0604020202020204" pitchFamily="34" charset="0"/>
+                <a:buChar char="•"/>
+              </a:pPr>
+              <a:r>
+                <a:rPr lang="ko-KR" altLang="en-US" sz="800" b="1" dirty="0">
+                  <a:latin typeface="KoPub돋움체 Bold" panose="00000800000000000000" pitchFamily="2" charset="-127"/>
+                  <a:ea typeface="KoPub돋움체 Bold" panose="00000800000000000000" pitchFamily="2" charset="-127"/>
+                </a:rPr>
+                <a:t>지표</a:t>
+              </a:r>
+            </a:p>
+          </p:txBody>
+        </p:sp>
+      </p:grpSp>
     </p:spTree>
     <p:extLst>
       <p:ext uri="{BB962C8B-B14F-4D97-AF65-F5344CB8AC3E}">
-        <p14:creationId xmlns:p14="http://schemas.microsoft.com/office/powerpoint/2010/main" val="3035045437"/>
+        <p14:creationId xmlns:p14="http://schemas.microsoft.com/office/powerpoint/2010/main" val="4217173869"/>
       </p:ext>
     </p:extLst>
   </p:cSld>
@@ -8217,13 +7767,7 @@
   <p:cSld>
     <p:spTree>
       <p:nvGrpSpPr>
-        <p:cNvPr id="1" name="">
-          <a:extLst>
-            <a:ext uri="{FF2B5EF4-FFF2-40B4-BE49-F238E27FC236}">
-              <a16:creationId xmlns:a16="http://schemas.microsoft.com/office/drawing/2014/main" id="{BE3EABFA-89D1-F49C-FDBC-ED763734C028}"/>
-            </a:ext>
-          </a:extLst>
-        </p:cNvPr>
+        <p:cNvPr id="1" name=""/>
         <p:cNvGrpSpPr/>
         <p:nvPr/>
       </p:nvGrpSpPr>
@@ -8237,230 +7781,10 @@
       </p:grpSpPr>
       <p:sp>
         <p:nvSpPr>
-          <p:cNvPr id="28" name="사각형: 둥근 모서리 27">
-            <a:extLst>
-              <a:ext uri="{FF2B5EF4-FFF2-40B4-BE49-F238E27FC236}">
-                <a16:creationId xmlns:a16="http://schemas.microsoft.com/office/drawing/2014/main" id="{1F106E9E-CF8C-17EC-E717-F78CA06360C9}"/>
-              </a:ext>
-            </a:extLst>
-          </p:cNvPr>
-          <p:cNvSpPr/>
-          <p:nvPr/>
-        </p:nvSpPr>
-        <p:spPr>
-          <a:xfrm>
-            <a:off x="1598636" y="1043683"/>
-            <a:ext cx="1264364" cy="230832"/>
-          </a:xfrm>
-          <a:prstGeom prst="roundRect">
-            <a:avLst/>
-          </a:prstGeom>
-          <a:solidFill>
-            <a:schemeClr val="bg2"/>
-          </a:solidFill>
-          <a:ln>
-            <a:noFill/>
-          </a:ln>
-        </p:spPr>
-        <p:style>
-          <a:lnRef idx="2">
-            <a:schemeClr val="accent3">
-              <a:shade val="15000"/>
-            </a:schemeClr>
-          </a:lnRef>
-          <a:fillRef idx="1">
-            <a:schemeClr val="accent3"/>
-          </a:fillRef>
-          <a:effectRef idx="0">
-            <a:schemeClr val="accent3"/>
-          </a:effectRef>
-          <a:fontRef idx="minor">
-            <a:schemeClr val="lt1"/>
-          </a:fontRef>
-        </p:style>
-        <p:txBody>
-          <a:bodyPr rtlCol="0" anchor="ctr"/>
-          <a:lstStyle/>
-          <a:p>
-            <a:pPr algn="ctr"/>
-            <a:endParaRPr lang="ko-KR" altLang="en-US" sz="2400">
-              <a:latin typeface="KoPub돋움체 Light" panose="02020603020101020101" pitchFamily="18" charset="-127"/>
-              <a:ea typeface="KoPub돋움체 Light" panose="02020603020101020101" pitchFamily="18" charset="-127"/>
-            </a:endParaRPr>
-          </a:p>
-        </p:txBody>
-      </p:sp>
-      <p:sp>
-        <p:nvSpPr>
-          <p:cNvPr id="29" name="사각형: 둥근 모서리 28">
-            <a:extLst>
-              <a:ext uri="{FF2B5EF4-FFF2-40B4-BE49-F238E27FC236}">
-                <a16:creationId xmlns:a16="http://schemas.microsoft.com/office/drawing/2014/main" id="{58CFD439-A0AF-7A76-9198-506D59B2106C}"/>
-              </a:ext>
-            </a:extLst>
-          </p:cNvPr>
-          <p:cNvSpPr/>
-          <p:nvPr/>
-        </p:nvSpPr>
-        <p:spPr>
-          <a:xfrm>
-            <a:off x="236105" y="1307925"/>
-            <a:ext cx="1264364" cy="230832"/>
-          </a:xfrm>
-          <a:prstGeom prst="roundRect">
-            <a:avLst/>
-          </a:prstGeom>
-          <a:solidFill>
-            <a:schemeClr val="bg2"/>
-          </a:solidFill>
-          <a:ln>
-            <a:noFill/>
-          </a:ln>
-        </p:spPr>
-        <p:style>
-          <a:lnRef idx="2">
-            <a:schemeClr val="accent3">
-              <a:shade val="15000"/>
-            </a:schemeClr>
-          </a:lnRef>
-          <a:fillRef idx="1">
-            <a:schemeClr val="accent3"/>
-          </a:fillRef>
-          <a:effectRef idx="0">
-            <a:schemeClr val="accent3"/>
-          </a:effectRef>
-          <a:fontRef idx="minor">
-            <a:schemeClr val="lt1"/>
-          </a:fontRef>
-        </p:style>
-        <p:txBody>
-          <a:bodyPr rtlCol="0" anchor="ctr"/>
-          <a:lstStyle/>
-          <a:p>
-            <a:pPr algn="ctr"/>
-            <a:endParaRPr lang="ko-KR" altLang="en-US" sz="2400">
-              <a:latin typeface="KoPub돋움체 Light" panose="02020603020101020101" pitchFamily="18" charset="-127"/>
-              <a:ea typeface="KoPub돋움체 Light" panose="02020603020101020101" pitchFamily="18" charset="-127"/>
-            </a:endParaRPr>
-          </a:p>
-        </p:txBody>
-      </p:sp>
-      <p:sp>
-        <p:nvSpPr>
-          <p:cNvPr id="30" name="사각형: 둥근 모서리 29">
-            <a:extLst>
-              <a:ext uri="{FF2B5EF4-FFF2-40B4-BE49-F238E27FC236}">
-                <a16:creationId xmlns:a16="http://schemas.microsoft.com/office/drawing/2014/main" id="{1AFCA293-C6A1-E8D9-FC8C-9BB0317CC6AF}"/>
-              </a:ext>
-            </a:extLst>
-          </p:cNvPr>
-          <p:cNvSpPr/>
-          <p:nvPr/>
-        </p:nvSpPr>
-        <p:spPr>
-          <a:xfrm>
-            <a:off x="1598636" y="1307925"/>
-            <a:ext cx="1264364" cy="230832"/>
-          </a:xfrm>
-          <a:prstGeom prst="roundRect">
-            <a:avLst/>
-          </a:prstGeom>
-          <a:solidFill>
-            <a:schemeClr val="bg2"/>
-          </a:solidFill>
-          <a:ln>
-            <a:noFill/>
-          </a:ln>
-        </p:spPr>
-        <p:style>
-          <a:lnRef idx="2">
-            <a:schemeClr val="accent3">
-              <a:shade val="15000"/>
-            </a:schemeClr>
-          </a:lnRef>
-          <a:fillRef idx="1">
-            <a:schemeClr val="accent3"/>
-          </a:fillRef>
-          <a:effectRef idx="0">
-            <a:schemeClr val="accent3"/>
-          </a:effectRef>
-          <a:fontRef idx="minor">
-            <a:schemeClr val="lt1"/>
-          </a:fontRef>
-        </p:style>
-        <p:txBody>
-          <a:bodyPr rtlCol="0" anchor="ctr"/>
-          <a:lstStyle/>
-          <a:p>
-            <a:pPr algn="ctr"/>
-            <a:endParaRPr lang="ko-KR" altLang="en-US" sz="2400">
-              <a:latin typeface="KoPub돋움체 Light" panose="02020603020101020101" pitchFamily="18" charset="-127"/>
-              <a:ea typeface="KoPub돋움체 Light" panose="02020603020101020101" pitchFamily="18" charset="-127"/>
-            </a:endParaRPr>
-          </a:p>
-        </p:txBody>
-      </p:sp>
-      <p:sp>
-        <p:nvSpPr>
-          <p:cNvPr id="21" name="사각형: 둥근 모서리 20">
-            <a:extLst>
-              <a:ext uri="{FF2B5EF4-FFF2-40B4-BE49-F238E27FC236}">
-                <a16:creationId xmlns:a16="http://schemas.microsoft.com/office/drawing/2014/main" id="{0409F8CB-5924-349A-24EF-B76653FC25BC}"/>
-              </a:ext>
-            </a:extLst>
-          </p:cNvPr>
-          <p:cNvSpPr/>
-          <p:nvPr/>
-        </p:nvSpPr>
-        <p:spPr>
-          <a:xfrm>
-            <a:off x="236105" y="1043683"/>
-            <a:ext cx="1264364" cy="230832"/>
-          </a:xfrm>
-          <a:prstGeom prst="roundRect">
-            <a:avLst/>
-          </a:prstGeom>
-          <a:solidFill>
-            <a:schemeClr val="bg2"/>
-          </a:solidFill>
-          <a:ln>
-            <a:noFill/>
-          </a:ln>
-        </p:spPr>
-        <p:style>
-          <a:lnRef idx="2">
-            <a:schemeClr val="accent3">
-              <a:shade val="15000"/>
-            </a:schemeClr>
-          </a:lnRef>
-          <a:fillRef idx="1">
-            <a:schemeClr val="accent3"/>
-          </a:fillRef>
-          <a:effectRef idx="0">
-            <a:schemeClr val="accent3"/>
-          </a:effectRef>
-          <a:fontRef idx="minor">
-            <a:schemeClr val="lt1"/>
-          </a:fontRef>
-        </p:style>
-        <p:txBody>
-          <a:bodyPr rtlCol="0" anchor="ctr"/>
-          <a:lstStyle/>
-          <a:p>
-            <a:pPr algn="ctr"/>
-            <a:endParaRPr lang="ko-KR" altLang="en-US" sz="2400">
-              <a:latin typeface="KoPub돋움체 Light" panose="02020603020101020101" pitchFamily="18" charset="-127"/>
-              <a:ea typeface="KoPub돋움체 Light" panose="02020603020101020101" pitchFamily="18" charset="-127"/>
-            </a:endParaRPr>
-          </a:p>
-        </p:txBody>
-      </p:sp>
-      <p:sp>
-        <p:nvSpPr>
           <p:cNvPr id="3" name="TextBox 2">
             <a:extLst>
               <a:ext uri="{FF2B5EF4-FFF2-40B4-BE49-F238E27FC236}">
-                <a16:creationId xmlns:a16="http://schemas.microsoft.com/office/drawing/2014/main" id="{8AD3B992-48B4-F39B-12E0-18A8B9663DFF}"/>
+                <a16:creationId xmlns:a16="http://schemas.microsoft.com/office/drawing/2014/main" id="{F5E3E193-F1E8-6947-F01D-A96C1A9F6D0E}"/>
               </a:ext>
             </a:extLst>
           </p:cNvPr>
@@ -8469,8 +7793,8 @@
         </p:nvSpPr>
         <p:spPr>
           <a:xfrm>
-            <a:off x="43517" y="54246"/>
-            <a:ext cx="1180381" cy="169277"/>
+            <a:off x="25241" y="63223"/>
+            <a:ext cx="1403509" cy="184666"/>
           </a:xfrm>
           <a:prstGeom prst="rect">
             <a:avLst/>
@@ -8483,25 +7807,24 @@
           </a:bodyPr>
           <a:lstStyle/>
           <a:p>
-            <a:pPr algn="ctr"/>
             <a:r>
-              <a:rPr lang="ko-KR" altLang="en-US" sz="500" spc="-11" dirty="0">
-                <a:latin typeface="KoPub돋움체 Light" panose="02020603020101020101" pitchFamily="18" charset="-127"/>
-                <a:ea typeface="KoPub돋움체 Light" panose="02020603020101020101" pitchFamily="18" charset="-127"/>
+              <a:rPr lang="ko-KR" altLang="en-US" sz="600" b="1" spc="-11" dirty="0">
+                <a:latin typeface="KoPub돋움체 Bold" panose="00000800000000000000" pitchFamily="2" charset="-127"/>
+                <a:ea typeface="KoPub돋움체 Bold" panose="00000800000000000000" pitchFamily="2" charset="-127"/>
               </a:rPr>
               <a:t>순천향대학교 천안병원 </a:t>
             </a:r>
             <a:r>
-              <a:rPr lang="en-US" altLang="ko-KR" sz="500" spc="-11" dirty="0">
-                <a:latin typeface="KoPub돋움체 Light" panose="02020603020101020101" pitchFamily="18" charset="-127"/>
-                <a:ea typeface="KoPub돋움체 Light" panose="02020603020101020101" pitchFamily="18" charset="-127"/>
+              <a:rPr lang="en-US" altLang="ko-KR" sz="600" b="1" spc="-11" dirty="0">
+                <a:latin typeface="KoPub돋움체 Bold" panose="00000800000000000000" pitchFamily="2" charset="-127"/>
+                <a:ea typeface="KoPub돋움체 Bold" panose="00000800000000000000" pitchFamily="2" charset="-127"/>
               </a:rPr>
               <a:t>| </a:t>
             </a:r>
             <a:r>
-              <a:rPr lang="ko-KR" altLang="en-US" sz="500" spc="-11" dirty="0">
-                <a:latin typeface="KoPub돋움체 Light" panose="02020603020101020101" pitchFamily="18" charset="-127"/>
-                <a:ea typeface="KoPub돋움체 Light" panose="02020603020101020101" pitchFamily="18" charset="-127"/>
+              <a:rPr lang="ko-KR" altLang="en-US" sz="600" b="1" spc="-11" dirty="0">
+                <a:latin typeface="KoPub돋움체 Bold" panose="00000800000000000000" pitchFamily="2" charset="-127"/>
+                <a:ea typeface="KoPub돋움체 Bold" panose="00000800000000000000" pitchFamily="2" charset="-127"/>
               </a:rPr>
               <a:t>진료지원간호팀 </a:t>
             </a:r>
@@ -8510,10 +7833,10 @@
       </p:sp>
       <p:grpSp>
         <p:nvGrpSpPr>
-          <p:cNvPr id="20" name="그룹 19">
+          <p:cNvPr id="17" name="그룹 16">
             <a:extLst>
               <a:ext uri="{FF2B5EF4-FFF2-40B4-BE49-F238E27FC236}">
-                <a16:creationId xmlns:a16="http://schemas.microsoft.com/office/drawing/2014/main" id="{C6A298F1-07CA-FA71-45BD-583AE88A8C72}"/>
+                <a16:creationId xmlns:a16="http://schemas.microsoft.com/office/drawing/2014/main" id="{CCD23336-35E2-7BBF-742C-67D82BDC7617}"/>
               </a:ext>
             </a:extLst>
           </p:cNvPr>
@@ -8522,449 +7845,8 @@
         </p:nvGrpSpPr>
         <p:grpSpPr>
           <a:xfrm>
-            <a:off x="692840" y="331471"/>
-            <a:ext cx="2337499" cy="520584"/>
-            <a:chOff x="422852" y="312900"/>
-            <a:chExt cx="2337499" cy="520584"/>
-          </a:xfrm>
-        </p:grpSpPr>
-        <p:sp>
-          <p:nvSpPr>
-            <p:cNvPr id="4" name="TextBox 3">
-              <a:extLst>
-                <a:ext uri="{FF2B5EF4-FFF2-40B4-BE49-F238E27FC236}">
-                  <a16:creationId xmlns:a16="http://schemas.microsoft.com/office/drawing/2014/main" id="{8653F9BC-4CAC-32F0-320F-EF8D2DB62F49}"/>
-                </a:ext>
-              </a:extLst>
-            </p:cNvPr>
-            <p:cNvSpPr txBox="1"/>
-            <p:nvPr/>
-          </p:nvSpPr>
-          <p:spPr>
-            <a:xfrm>
-              <a:off x="696163" y="312900"/>
-              <a:ext cx="1790875" cy="338554"/>
-            </a:xfrm>
-            <a:prstGeom prst="rect">
-              <a:avLst/>
-            </a:prstGeom>
-            <a:noFill/>
-          </p:spPr>
-          <p:txBody>
-            <a:bodyPr wrap="none">
-              <a:spAutoFit/>
-            </a:bodyPr>
-            <a:lstStyle/>
-            <a:p>
-              <a:pPr algn="ctr"/>
-              <a:r>
-                <a:rPr lang="ko-KR" altLang="en-US" sz="1600" dirty="0" err="1">
-                  <a:solidFill>
-                    <a:schemeClr val="accent1">
-                      <a:lumMod val="50000"/>
-                    </a:schemeClr>
-                  </a:solidFill>
-                  <a:latin typeface="KoPub돋움체 Bold" panose="02020603020101020101" pitchFamily="18" charset="-127"/>
-                  <a:ea typeface="KoPub돋움체 Bold" panose="02020603020101020101" pitchFamily="18" charset="-127"/>
-                </a:rPr>
-                <a:t>우리가치</a:t>
-              </a:r>
-              <a:r>
-                <a:rPr lang="ko-KR" altLang="en-US" sz="1600" dirty="0">
-                  <a:solidFill>
-                    <a:schemeClr val="accent1">
-                      <a:lumMod val="50000"/>
-                    </a:schemeClr>
-                  </a:solidFill>
-                  <a:latin typeface="KoPub돋움체 Bold" panose="02020603020101020101" pitchFamily="18" charset="-127"/>
-                  <a:ea typeface="KoPub돋움체 Bold" panose="02020603020101020101" pitchFamily="18" charset="-127"/>
-                </a:rPr>
-                <a:t> </a:t>
-              </a:r>
-              <a:r>
-                <a:rPr lang="en-US" altLang="ko-KR" sz="1600" dirty="0" err="1">
-                  <a:solidFill>
-                    <a:schemeClr val="accent1">
-                      <a:lumMod val="50000"/>
-                    </a:schemeClr>
-                  </a:solidFill>
-                  <a:latin typeface="KoPub돋움체 Bold" panose="02020603020101020101" pitchFamily="18" charset="-127"/>
-                  <a:ea typeface="KoPub돋움체 Bold" panose="02020603020101020101" pitchFamily="18" charset="-127"/>
-                </a:rPr>
-                <a:t>WeValue</a:t>
-              </a:r>
-              <a:endParaRPr lang="en-US" altLang="ko-KR" sz="1600" dirty="0">
-                <a:solidFill>
-                  <a:schemeClr val="accent1">
-                    <a:lumMod val="50000"/>
-                  </a:schemeClr>
-                </a:solidFill>
-                <a:latin typeface="KoPub돋움체 Bold" panose="02020603020101020101" pitchFamily="18" charset="-127"/>
-                <a:ea typeface="KoPub돋움체 Bold" panose="02020603020101020101" pitchFamily="18" charset="-127"/>
-              </a:endParaRPr>
-            </a:p>
-          </p:txBody>
-        </p:sp>
-        <p:sp>
-          <p:nvSpPr>
-            <p:cNvPr id="6" name="TextBox 5">
-              <a:extLst>
-                <a:ext uri="{FF2B5EF4-FFF2-40B4-BE49-F238E27FC236}">
-                  <a16:creationId xmlns:a16="http://schemas.microsoft.com/office/drawing/2014/main" id="{A5DE4D22-A46D-F359-B635-BEB69BDDA779}"/>
-                </a:ext>
-              </a:extLst>
-            </p:cNvPr>
-            <p:cNvSpPr txBox="1"/>
-            <p:nvPr/>
-          </p:nvSpPr>
-          <p:spPr>
-            <a:xfrm>
-              <a:off x="422852" y="587263"/>
-              <a:ext cx="2337499" cy="246221"/>
-            </a:xfrm>
-            <a:prstGeom prst="rect">
-              <a:avLst/>
-            </a:prstGeom>
-            <a:noFill/>
-          </p:spPr>
-          <p:txBody>
-            <a:bodyPr wrap="none">
-              <a:spAutoFit/>
-            </a:bodyPr>
-            <a:lstStyle/>
-            <a:p>
-              <a:pPr algn="ctr"/>
-              <a:r>
-                <a:rPr lang="en-US" altLang="ko-KR" sz="1000" b="1" dirty="0">
-                  <a:latin typeface="KoPub돋움체 Light" panose="02020603020101020101" pitchFamily="18" charset="-127"/>
-                  <a:ea typeface="KoPub돋움체 Light" panose="02020603020101020101" pitchFamily="18" charset="-127"/>
-                </a:rPr>
-                <a:t>[</a:t>
-              </a:r>
-              <a:r>
-                <a:rPr lang="ko-KR" altLang="en-US" sz="1000" b="1" dirty="0">
-                  <a:latin typeface="KoPub돋움체 Light" panose="02020603020101020101" pitchFamily="18" charset="-127"/>
-                  <a:ea typeface="KoPub돋움체 Light" panose="02020603020101020101" pitchFamily="18" charset="-127"/>
-                </a:rPr>
-                <a:t>우리가 가치를 만드는 공간</a:t>
-              </a:r>
-              <a:r>
-                <a:rPr lang="en-US" altLang="ko-KR" sz="1000" b="1" dirty="0">
-                  <a:latin typeface="KoPub돋움체 Light" panose="02020603020101020101" pitchFamily="18" charset="-127"/>
-                  <a:ea typeface="KoPub돋움체 Light" panose="02020603020101020101" pitchFamily="18" charset="-127"/>
-                </a:rPr>
-                <a:t>, </a:t>
-              </a:r>
-              <a:r>
-                <a:rPr lang="ko-KR" altLang="en-US" sz="1000" b="1" dirty="0" err="1">
-                  <a:latin typeface="KoPub돋움체 Light" panose="02020603020101020101" pitchFamily="18" charset="-127"/>
-                  <a:ea typeface="KoPub돋움체 Light" panose="02020603020101020101" pitchFamily="18" charset="-127"/>
-                </a:rPr>
-                <a:t>우리가치</a:t>
-              </a:r>
-              <a:r>
-                <a:rPr lang="ko-KR" altLang="en-US" sz="1000" b="1" dirty="0">
-                  <a:latin typeface="KoPub돋움체 Light" panose="02020603020101020101" pitchFamily="18" charset="-127"/>
-                  <a:ea typeface="KoPub돋움체 Light" panose="02020603020101020101" pitchFamily="18" charset="-127"/>
-                </a:rPr>
-                <a:t> 허브</a:t>
-              </a:r>
-              <a:r>
-                <a:rPr lang="en-US" altLang="ko-KR" sz="1000" b="1" dirty="0">
-                  <a:latin typeface="KoPub돋움체 Light" panose="02020603020101020101" pitchFamily="18" charset="-127"/>
-                  <a:ea typeface="KoPub돋움체 Light" panose="02020603020101020101" pitchFamily="18" charset="-127"/>
-                </a:rPr>
-                <a:t>]</a:t>
-              </a:r>
-              <a:endParaRPr lang="en-US" altLang="ko-KR" sz="1000" b="1" dirty="0">
-                <a:solidFill>
-                  <a:schemeClr val="accent1">
-                    <a:lumMod val="50000"/>
-                  </a:schemeClr>
-                </a:solidFill>
-                <a:latin typeface="KoPub돋움체 Light" panose="02020603020101020101" pitchFamily="18" charset="-127"/>
-                <a:ea typeface="KoPub돋움체 Light" panose="02020603020101020101" pitchFamily="18" charset="-127"/>
-              </a:endParaRPr>
-            </a:p>
-          </p:txBody>
-        </p:sp>
-      </p:grpSp>
-      <p:sp>
-        <p:nvSpPr>
-          <p:cNvPr id="7" name="TextBox 6">
-            <a:extLst>
-              <a:ext uri="{FF2B5EF4-FFF2-40B4-BE49-F238E27FC236}">
-                <a16:creationId xmlns:a16="http://schemas.microsoft.com/office/drawing/2014/main" id="{1870A3F3-F16E-83CC-5E59-71AB1AB09CD8}"/>
-              </a:ext>
-            </a:extLst>
-          </p:cNvPr>
-          <p:cNvSpPr txBox="1"/>
-          <p:nvPr/>
-        </p:nvSpPr>
-        <p:spPr>
-          <a:xfrm>
-            <a:off x="163608" y="1041309"/>
-            <a:ext cx="1409361" cy="230832"/>
-          </a:xfrm>
-          <a:prstGeom prst="rect">
-            <a:avLst/>
-          </a:prstGeom>
-          <a:noFill/>
-        </p:spPr>
-        <p:txBody>
-          <a:bodyPr wrap="none">
-            <a:spAutoFit/>
-          </a:bodyPr>
-          <a:lstStyle/>
-          <a:p>
-            <a:pPr algn="ctr"/>
-            <a:r>
-              <a:rPr lang="ko-KR" altLang="en-US" sz="900" b="1" dirty="0">
-                <a:solidFill>
-                  <a:schemeClr val="tx2">
-                    <a:lumMod val="50000"/>
-                  </a:schemeClr>
-                </a:solidFill>
-                <a:latin typeface="KoPub돋움체 Light" panose="02020603020101020101" pitchFamily="18" charset="-127"/>
-                <a:ea typeface="KoPub돋움체 Light" panose="02020603020101020101" pitchFamily="18" charset="-127"/>
-              </a:rPr>
-              <a:t>소통의 광장</a:t>
-            </a:r>
-            <a:r>
-              <a:rPr lang="en-US" altLang="ko-KR" sz="900" b="1" dirty="0">
-                <a:solidFill>
-                  <a:schemeClr val="tx2">
-                    <a:lumMod val="50000"/>
-                  </a:schemeClr>
-                </a:solidFill>
-                <a:latin typeface="KoPub돋움체 Light" panose="02020603020101020101" pitchFamily="18" charset="-127"/>
-                <a:ea typeface="KoPub돋움체 Light" panose="02020603020101020101" pitchFamily="18" charset="-127"/>
-              </a:rPr>
-              <a:t> (Community)</a:t>
-            </a:r>
-            <a:endParaRPr lang="en-US" altLang="ko-KR" sz="800" dirty="0">
-              <a:solidFill>
-                <a:schemeClr val="tx2">
-                  <a:lumMod val="50000"/>
-                </a:schemeClr>
-              </a:solidFill>
-              <a:latin typeface="KoPub돋움체 Light" panose="02020603020101020101" pitchFamily="18" charset="-127"/>
-              <a:ea typeface="KoPub돋움체 Light" panose="02020603020101020101" pitchFamily="18" charset="-127"/>
-            </a:endParaRPr>
-          </a:p>
-        </p:txBody>
-      </p:sp>
-      <p:sp>
-        <p:nvSpPr>
-          <p:cNvPr id="8" name="TextBox 7">
-            <a:extLst>
-              <a:ext uri="{FF2B5EF4-FFF2-40B4-BE49-F238E27FC236}">
-                <a16:creationId xmlns:a16="http://schemas.microsoft.com/office/drawing/2014/main" id="{F7E630A3-6FB2-BE7A-C5D9-F3498EACFF09}"/>
-              </a:ext>
-            </a:extLst>
-          </p:cNvPr>
-          <p:cNvSpPr txBox="1"/>
-          <p:nvPr/>
-        </p:nvSpPr>
-        <p:spPr>
-          <a:xfrm>
-            <a:off x="1548581" y="1041309"/>
-            <a:ext cx="1364476" cy="230832"/>
-          </a:xfrm>
-          <a:prstGeom prst="rect">
-            <a:avLst/>
-          </a:prstGeom>
-          <a:noFill/>
-        </p:spPr>
-        <p:txBody>
-          <a:bodyPr wrap="none">
-            <a:spAutoFit/>
-          </a:bodyPr>
-          <a:lstStyle/>
-          <a:p>
-            <a:pPr algn="ctr"/>
-            <a:r>
-              <a:rPr lang="ko-KR" altLang="en-US" sz="900" b="1" dirty="0">
-                <a:solidFill>
-                  <a:schemeClr val="tx2">
-                    <a:lumMod val="50000"/>
-                  </a:schemeClr>
-                </a:solidFill>
-                <a:latin typeface="KoPub돋움체 Light" panose="02020603020101020101" pitchFamily="18" charset="-127"/>
-                <a:ea typeface="KoPub돋움체 Light" panose="02020603020101020101" pitchFamily="18" charset="-127"/>
-              </a:rPr>
-              <a:t>업무의 기준  </a:t>
-            </a:r>
-            <a:r>
-              <a:rPr lang="en-US" altLang="ko-KR" sz="900" b="1" dirty="0">
-                <a:solidFill>
-                  <a:schemeClr val="tx2">
-                    <a:lumMod val="50000"/>
-                  </a:schemeClr>
-                </a:solidFill>
-                <a:latin typeface="KoPub돋움체 Light" panose="02020603020101020101" pitchFamily="18" charset="-127"/>
-                <a:ea typeface="KoPub돋움체 Light" panose="02020603020101020101" pitchFamily="18" charset="-127"/>
-              </a:rPr>
-              <a:t>(Standards)</a:t>
-            </a:r>
-            <a:endParaRPr lang="en-US" altLang="ko-KR" sz="800" dirty="0">
-              <a:solidFill>
-                <a:schemeClr val="tx2">
-                  <a:lumMod val="50000"/>
-                </a:schemeClr>
-              </a:solidFill>
-              <a:latin typeface="KoPub돋움체 Light" panose="02020603020101020101" pitchFamily="18" charset="-127"/>
-              <a:ea typeface="KoPub돋움체 Light" panose="02020603020101020101" pitchFamily="18" charset="-127"/>
-            </a:endParaRPr>
-          </a:p>
-        </p:txBody>
-      </p:sp>
-      <p:sp>
-        <p:nvSpPr>
-          <p:cNvPr id="9" name="TextBox 8">
-            <a:extLst>
-              <a:ext uri="{FF2B5EF4-FFF2-40B4-BE49-F238E27FC236}">
-                <a16:creationId xmlns:a16="http://schemas.microsoft.com/office/drawing/2014/main" id="{10BCCA17-84E1-2203-A1BA-C17EDF70A644}"/>
-              </a:ext>
-            </a:extLst>
-          </p:cNvPr>
-          <p:cNvSpPr txBox="1"/>
-          <p:nvPr/>
-        </p:nvSpPr>
-        <p:spPr>
-          <a:xfrm>
-            <a:off x="206889" y="1305551"/>
-            <a:ext cx="1322798" cy="230832"/>
-          </a:xfrm>
-          <a:prstGeom prst="rect">
-            <a:avLst/>
-          </a:prstGeom>
-          <a:noFill/>
-        </p:spPr>
-        <p:txBody>
-          <a:bodyPr wrap="none">
-            <a:spAutoFit/>
-          </a:bodyPr>
-          <a:lstStyle/>
-          <a:p>
-            <a:pPr algn="ctr"/>
-            <a:r>
-              <a:rPr lang="ko-KR" altLang="en-US" sz="900" b="1" dirty="0">
-                <a:solidFill>
-                  <a:schemeClr val="tx2">
-                    <a:lumMod val="50000"/>
-                  </a:schemeClr>
-                </a:solidFill>
-                <a:latin typeface="KoPub돋움체 Light" panose="02020603020101020101" pitchFamily="18" charset="-127"/>
-                <a:ea typeface="KoPub돋움체 Light" panose="02020603020101020101" pitchFamily="18" charset="-127"/>
-              </a:rPr>
-              <a:t>배움의 창구 </a:t>
-            </a:r>
-            <a:r>
-              <a:rPr lang="en-US" altLang="ko-KR" sz="900" b="1" dirty="0">
-                <a:solidFill>
-                  <a:schemeClr val="tx2">
-                    <a:lumMod val="50000"/>
-                  </a:schemeClr>
-                </a:solidFill>
-                <a:latin typeface="KoPub돋움체 Light" panose="02020603020101020101" pitchFamily="18" charset="-127"/>
-                <a:ea typeface="KoPub돋움체 Light" panose="02020603020101020101" pitchFamily="18" charset="-127"/>
-              </a:rPr>
-              <a:t>(Education)</a:t>
-            </a:r>
-            <a:endParaRPr lang="ko-KR" altLang="en-US" sz="800" dirty="0">
-              <a:solidFill>
-                <a:schemeClr val="tx2">
-                  <a:lumMod val="50000"/>
-                </a:schemeClr>
-              </a:solidFill>
-              <a:latin typeface="KoPub돋움체 Light" panose="02020603020101020101" pitchFamily="18" charset="-127"/>
-              <a:ea typeface="KoPub돋움체 Light" panose="02020603020101020101" pitchFamily="18" charset="-127"/>
-            </a:endParaRPr>
-          </a:p>
-        </p:txBody>
-      </p:sp>
-      <p:sp>
-        <p:nvSpPr>
-          <p:cNvPr id="10" name="TextBox 9">
-            <a:extLst>
-              <a:ext uri="{FF2B5EF4-FFF2-40B4-BE49-F238E27FC236}">
-                <a16:creationId xmlns:a16="http://schemas.microsoft.com/office/drawing/2014/main" id="{1DFEE1B1-57ED-D354-1F6F-A313667B4A50}"/>
-              </a:ext>
-            </a:extLst>
-          </p:cNvPr>
-          <p:cNvSpPr txBox="1"/>
-          <p:nvPr/>
-        </p:nvSpPr>
-        <p:spPr>
-          <a:xfrm>
-            <a:off x="1530948" y="1305551"/>
-            <a:ext cx="1399743" cy="230832"/>
-          </a:xfrm>
-          <a:prstGeom prst="rect">
-            <a:avLst/>
-          </a:prstGeom>
-          <a:noFill/>
-        </p:spPr>
-        <p:txBody>
-          <a:bodyPr wrap="none">
-            <a:spAutoFit/>
-          </a:bodyPr>
-          <a:lstStyle/>
-          <a:p>
-            <a:pPr algn="ctr"/>
-            <a:r>
-              <a:rPr lang="ko-KR" altLang="en-US" sz="900" b="1" dirty="0">
-                <a:solidFill>
-                  <a:schemeClr val="tx2">
-                    <a:lumMod val="50000"/>
-                  </a:schemeClr>
-                </a:solidFill>
-                <a:latin typeface="KoPub돋움체 Light" panose="02020603020101020101" pitchFamily="18" charset="-127"/>
-                <a:ea typeface="KoPub돋움체 Light" panose="02020603020101020101" pitchFamily="18" charset="-127"/>
-              </a:rPr>
-              <a:t>투명한 지표  </a:t>
-            </a:r>
-            <a:r>
-              <a:rPr lang="en-US" altLang="ko-KR" sz="900" b="1" dirty="0">
-                <a:solidFill>
-                  <a:schemeClr val="tx2">
-                    <a:lumMod val="50000"/>
-                  </a:schemeClr>
-                </a:solidFill>
-                <a:latin typeface="KoPub돋움체 Light" panose="02020603020101020101" pitchFamily="18" charset="-127"/>
-                <a:ea typeface="KoPub돋움체 Light" panose="02020603020101020101" pitchFamily="18" charset="-127"/>
-              </a:rPr>
-              <a:t>(Dashboard)</a:t>
-            </a:r>
-            <a:endParaRPr lang="ko-KR" altLang="en-US" sz="800" dirty="0">
-              <a:solidFill>
-                <a:schemeClr val="tx2">
-                  <a:lumMod val="50000"/>
-                </a:schemeClr>
-              </a:solidFill>
-              <a:latin typeface="KoPub돋움체 Light" panose="02020603020101020101" pitchFamily="18" charset="-127"/>
-              <a:ea typeface="KoPub돋움체 Light" panose="02020603020101020101" pitchFamily="18" charset="-127"/>
-            </a:endParaRPr>
-          </a:p>
-        </p:txBody>
-      </p:sp>
-      <p:grpSp>
-        <p:nvGrpSpPr>
-          <p:cNvPr id="17" name="그룹 16">
-            <a:extLst>
-              <a:ext uri="{FF2B5EF4-FFF2-40B4-BE49-F238E27FC236}">
-                <a16:creationId xmlns:a16="http://schemas.microsoft.com/office/drawing/2014/main" id="{3058DB84-8B15-C7F0-3BE3-861DC0FBCA5B}"/>
-              </a:ext>
-            </a:extLst>
-          </p:cNvPr>
-          <p:cNvGrpSpPr/>
-          <p:nvPr/>
-        </p:nvGrpSpPr>
-        <p:grpSpPr>
-          <a:xfrm>
-            <a:off x="173236" y="377028"/>
-            <a:ext cx="538336" cy="538336"/>
+            <a:off x="589938" y="838920"/>
+            <a:ext cx="634026" cy="568432"/>
             <a:chOff x="777945" y="-736888"/>
             <a:chExt cx="663508" cy="663508"/>
           </a:xfrm>
@@ -8974,7 +7856,7 @@
             <p:cNvPr id="5" name="그림 4" descr="패턴, 사각형, 예술, 직사각형이(가) 표시된 사진&#10;&#10;AI 생성 콘텐츠는 정확하지 않을 수 있습니다.">
               <a:extLst>
                 <a:ext uri="{FF2B5EF4-FFF2-40B4-BE49-F238E27FC236}">
-                  <a16:creationId xmlns:a16="http://schemas.microsoft.com/office/drawing/2014/main" id="{7279740F-C713-181A-194A-981C0CDFA5BA}"/>
+                  <a16:creationId xmlns:a16="http://schemas.microsoft.com/office/drawing/2014/main" id="{40C63F4C-30AB-6EF2-23BA-1233104A9DC3}"/>
                 </a:ext>
               </a:extLst>
             </p:cNvPr>
@@ -9004,7 +7886,7 @@
             <p:cNvPr id="13" name="L 도형 12">
               <a:extLst>
                 <a:ext uri="{FF2B5EF4-FFF2-40B4-BE49-F238E27FC236}">
-                  <a16:creationId xmlns:a16="http://schemas.microsoft.com/office/drawing/2014/main" id="{1657A78E-9A49-31CC-9A1C-664B434E3947}"/>
+                  <a16:creationId xmlns:a16="http://schemas.microsoft.com/office/drawing/2014/main" id="{B242B433-4D06-F840-EA3E-7FA7766D184C}"/>
                 </a:ext>
               </a:extLst>
             </p:cNvPr>
@@ -9061,7 +7943,7 @@
             <p:cNvPr id="14" name="L 도형 13">
               <a:extLst>
                 <a:ext uri="{FF2B5EF4-FFF2-40B4-BE49-F238E27FC236}">
-                  <a16:creationId xmlns:a16="http://schemas.microsoft.com/office/drawing/2014/main" id="{D33AB8F5-F938-BE19-9C16-4AB2728F9776}"/>
+                  <a16:creationId xmlns:a16="http://schemas.microsoft.com/office/drawing/2014/main" id="{37DD2CDD-BF9D-CD6A-CC77-30C00DF7A8EA}"/>
                 </a:ext>
               </a:extLst>
             </p:cNvPr>
@@ -9118,7 +8000,7 @@
             <p:cNvPr id="15" name="L 도형 14">
               <a:extLst>
                 <a:ext uri="{FF2B5EF4-FFF2-40B4-BE49-F238E27FC236}">
-                  <a16:creationId xmlns:a16="http://schemas.microsoft.com/office/drawing/2014/main" id="{AB7EFB1C-2BB3-021A-61C1-9B51360C01A2}"/>
+                  <a16:creationId xmlns:a16="http://schemas.microsoft.com/office/drawing/2014/main" id="{DD20813D-7C4F-9420-E012-EB09FDC9059E}"/>
                 </a:ext>
               </a:extLst>
             </p:cNvPr>
@@ -9175,7 +8057,7 @@
             <p:cNvPr id="16" name="L 도형 15">
               <a:extLst>
                 <a:ext uri="{FF2B5EF4-FFF2-40B4-BE49-F238E27FC236}">
-                  <a16:creationId xmlns:a16="http://schemas.microsoft.com/office/drawing/2014/main" id="{456130F0-48F9-4414-DD2F-BDAD1F6FF808}"/>
+                  <a16:creationId xmlns:a16="http://schemas.microsoft.com/office/drawing/2014/main" id="{C2F58D7B-1E2F-7C1C-29C2-3CBAF321313E}"/>
                 </a:ext>
               </a:extLst>
             </p:cNvPr>
@@ -9228,10 +8110,564 @@
           </p:txBody>
         </p:sp>
       </p:grpSp>
+      <p:grpSp>
+        <p:nvGrpSpPr>
+          <p:cNvPr id="18" name="그룹 17">
+            <a:extLst>
+              <a:ext uri="{FF2B5EF4-FFF2-40B4-BE49-F238E27FC236}">
+                <a16:creationId xmlns:a16="http://schemas.microsoft.com/office/drawing/2014/main" id="{360DDF2E-2289-473B-B5F6-77027118C993}"/>
+              </a:ext>
+            </a:extLst>
+          </p:cNvPr>
+          <p:cNvGrpSpPr/>
+          <p:nvPr/>
+        </p:nvGrpSpPr>
+        <p:grpSpPr>
+          <a:xfrm>
+            <a:off x="113069" y="274768"/>
+            <a:ext cx="1746464" cy="425416"/>
+            <a:chOff x="614240" y="226472"/>
+            <a:chExt cx="1746464" cy="425416"/>
+          </a:xfrm>
+        </p:grpSpPr>
+        <p:sp>
+          <p:nvSpPr>
+            <p:cNvPr id="4" name="TextBox 3">
+              <a:extLst>
+                <a:ext uri="{FF2B5EF4-FFF2-40B4-BE49-F238E27FC236}">
+                  <a16:creationId xmlns:a16="http://schemas.microsoft.com/office/drawing/2014/main" id="{1F0C02A7-D766-DD14-548E-2AE7955534F4}"/>
+                </a:ext>
+              </a:extLst>
+            </p:cNvPr>
+            <p:cNvSpPr txBox="1"/>
+            <p:nvPr/>
+          </p:nvSpPr>
+          <p:spPr>
+            <a:xfrm>
+              <a:off x="685077" y="226472"/>
+              <a:ext cx="1604991" cy="307777"/>
+            </a:xfrm>
+            <a:prstGeom prst="rect">
+              <a:avLst/>
+            </a:prstGeom>
+            <a:noFill/>
+          </p:spPr>
+          <p:txBody>
+            <a:bodyPr wrap="none">
+              <a:spAutoFit/>
+            </a:bodyPr>
+            <a:lstStyle/>
+            <a:p>
+              <a:pPr algn="ctr"/>
+              <a:r>
+                <a:rPr lang="ko-KR" altLang="en-US" sz="1400" dirty="0" err="1">
+                  <a:solidFill>
+                    <a:srgbClr val="00B0F0"/>
+                  </a:solidFill>
+                  <a:latin typeface="KoPub돋움체 Bold" panose="00000800000000000000" pitchFamily="2" charset="-127"/>
+                  <a:ea typeface="KoPub돋움체 Bold" panose="00000800000000000000" pitchFamily="2" charset="-127"/>
+                </a:rPr>
+                <a:t>우리가치</a:t>
+              </a:r>
+              <a:r>
+                <a:rPr lang="ko-KR" altLang="en-US" sz="1400" dirty="0">
+                  <a:solidFill>
+                    <a:schemeClr val="accent1">
+                      <a:lumMod val="50000"/>
+                    </a:schemeClr>
+                  </a:solidFill>
+                  <a:latin typeface="KoPub돋움체 Bold" panose="02020603020101020101" pitchFamily="18" charset="-127"/>
+                  <a:ea typeface="KoPub돋움체 Bold" panose="02020603020101020101" pitchFamily="18" charset="-127"/>
+                </a:rPr>
+                <a:t> </a:t>
+              </a:r>
+              <a:r>
+                <a:rPr lang="en-US" altLang="ko-KR" sz="1400" dirty="0" err="1">
+                  <a:solidFill>
+                    <a:schemeClr val="accent1">
+                      <a:lumMod val="50000"/>
+                    </a:schemeClr>
+                  </a:solidFill>
+                  <a:latin typeface="Franklin Gothic Heavy" panose="020B0903020102020204" pitchFamily="34" charset="0"/>
+                  <a:ea typeface="KoPub돋움체 Bold" panose="02020603020101020101" pitchFamily="18" charset="-127"/>
+                </a:rPr>
+                <a:t>WeValue</a:t>
+              </a:r>
+              <a:endParaRPr lang="en-US" altLang="ko-KR" sz="1400" dirty="0">
+                <a:solidFill>
+                  <a:schemeClr val="accent1">
+                    <a:lumMod val="50000"/>
+                  </a:schemeClr>
+                </a:solidFill>
+                <a:latin typeface="Franklin Gothic Heavy" panose="020B0903020102020204" pitchFamily="34" charset="0"/>
+                <a:ea typeface="KoPub돋움체 Bold" panose="02020603020101020101" pitchFamily="18" charset="-127"/>
+              </a:endParaRPr>
+            </a:p>
+          </p:txBody>
+        </p:sp>
+        <p:sp>
+          <p:nvSpPr>
+            <p:cNvPr id="6" name="TextBox 5">
+              <a:extLst>
+                <a:ext uri="{FF2B5EF4-FFF2-40B4-BE49-F238E27FC236}">
+                  <a16:creationId xmlns:a16="http://schemas.microsoft.com/office/drawing/2014/main" id="{25F3C248-44C4-9D7A-C464-62D68C9890DC}"/>
+                </a:ext>
+              </a:extLst>
+            </p:cNvPr>
+            <p:cNvSpPr txBox="1"/>
+            <p:nvPr/>
+          </p:nvSpPr>
+          <p:spPr>
+            <a:xfrm>
+              <a:off x="622591" y="451833"/>
+              <a:ext cx="1729962" cy="200055"/>
+            </a:xfrm>
+            <a:prstGeom prst="rect">
+              <a:avLst/>
+            </a:prstGeom>
+            <a:noFill/>
+          </p:spPr>
+          <p:txBody>
+            <a:bodyPr wrap="none">
+              <a:spAutoFit/>
+            </a:bodyPr>
+            <a:lstStyle/>
+            <a:p>
+              <a:pPr algn="ctr"/>
+              <a:r>
+                <a:rPr lang="en-US" altLang="ko-KR" sz="700" b="1" dirty="0">
+                  <a:latin typeface="KoPub돋움체 Bold" panose="00000800000000000000" pitchFamily="2" charset="-127"/>
+                  <a:ea typeface="KoPub돋움체 Bold" panose="00000800000000000000" pitchFamily="2" charset="-127"/>
+                </a:rPr>
+                <a:t>[</a:t>
+              </a:r>
+              <a:r>
+                <a:rPr lang="ko-KR" altLang="en-US" sz="700" b="1" dirty="0">
+                  <a:latin typeface="KoPub돋움체 Bold" panose="00000800000000000000" pitchFamily="2" charset="-127"/>
+                  <a:ea typeface="KoPub돋움체 Bold" panose="00000800000000000000" pitchFamily="2" charset="-127"/>
+                </a:rPr>
+                <a:t>우리가 가치를 만드는 공간</a:t>
+              </a:r>
+              <a:r>
+                <a:rPr lang="en-US" altLang="ko-KR" sz="700" b="1" dirty="0">
+                  <a:latin typeface="KoPub돋움체 Bold" panose="00000800000000000000" pitchFamily="2" charset="-127"/>
+                  <a:ea typeface="KoPub돋움체 Bold" panose="00000800000000000000" pitchFamily="2" charset="-127"/>
+                </a:rPr>
+                <a:t>, </a:t>
+              </a:r>
+              <a:r>
+                <a:rPr lang="ko-KR" altLang="en-US" sz="700" b="1" dirty="0" err="1">
+                  <a:latin typeface="KoPub돋움체 Bold" panose="00000800000000000000" pitchFamily="2" charset="-127"/>
+                  <a:ea typeface="KoPub돋움체 Bold" panose="00000800000000000000" pitchFamily="2" charset="-127"/>
+                </a:rPr>
+                <a:t>우리가치</a:t>
+              </a:r>
+              <a:r>
+                <a:rPr lang="ko-KR" altLang="en-US" sz="700" b="1" dirty="0">
+                  <a:latin typeface="KoPub돋움체 Bold" panose="00000800000000000000" pitchFamily="2" charset="-127"/>
+                  <a:ea typeface="KoPub돋움체 Bold" panose="00000800000000000000" pitchFamily="2" charset="-127"/>
+                </a:rPr>
+                <a:t> 허브</a:t>
+              </a:r>
+              <a:r>
+                <a:rPr lang="en-US" altLang="ko-KR" sz="700" b="1" dirty="0">
+                  <a:latin typeface="KoPub돋움체 Bold" panose="00000800000000000000" pitchFamily="2" charset="-127"/>
+                  <a:ea typeface="KoPub돋움체 Bold" panose="00000800000000000000" pitchFamily="2" charset="-127"/>
+                </a:rPr>
+                <a:t>]</a:t>
+              </a:r>
+            </a:p>
+          </p:txBody>
+        </p:sp>
+        <p:pic>
+          <p:nvPicPr>
+            <p:cNvPr id="10" name="그림 9">
+              <a:extLst>
+                <a:ext uri="{FF2B5EF4-FFF2-40B4-BE49-F238E27FC236}">
+                  <a16:creationId xmlns:a16="http://schemas.microsoft.com/office/drawing/2014/main" id="{EB1E9046-9340-4D3D-AA23-F89851FB0C3F}"/>
+                </a:ext>
+              </a:extLst>
+            </p:cNvPr>
+            <p:cNvPicPr>
+              <a:picLocks noChangeAspect="1"/>
+            </p:cNvPicPr>
+            <p:nvPr/>
+          </p:nvPicPr>
+          <p:blipFill>
+            <a:blip r:embed="rId3"/>
+            <a:stretch>
+              <a:fillRect/>
+            </a:stretch>
+          </p:blipFill>
+          <p:spPr>
+            <a:xfrm>
+              <a:off x="614240" y="271322"/>
+              <a:ext cx="147416" cy="128728"/>
+            </a:xfrm>
+            <a:prstGeom prst="rect">
+              <a:avLst/>
+            </a:prstGeom>
+          </p:spPr>
+        </p:pic>
+        <p:pic>
+          <p:nvPicPr>
+            <p:cNvPr id="29" name="그림 28">
+              <a:extLst>
+                <a:ext uri="{FF2B5EF4-FFF2-40B4-BE49-F238E27FC236}">
+                  <a16:creationId xmlns:a16="http://schemas.microsoft.com/office/drawing/2014/main" id="{799E618A-B635-413C-90D6-9BBB5F48E428}"/>
+                </a:ext>
+              </a:extLst>
+            </p:cNvPr>
+            <p:cNvPicPr>
+              <a:picLocks noChangeAspect="1"/>
+            </p:cNvPicPr>
+            <p:nvPr/>
+          </p:nvPicPr>
+          <p:blipFill>
+            <a:blip r:embed="rId3"/>
+            <a:stretch>
+              <a:fillRect/>
+            </a:stretch>
+          </p:blipFill>
+          <p:spPr>
+            <a:xfrm rot="10800000">
+              <a:off x="2181315" y="257361"/>
+              <a:ext cx="179389" cy="156650"/>
+            </a:xfrm>
+            <a:prstGeom prst="rect">
+              <a:avLst/>
+            </a:prstGeom>
+          </p:spPr>
+        </p:pic>
+        <p:pic>
+          <p:nvPicPr>
+            <p:cNvPr id="30" name="그림 29">
+              <a:extLst>
+                <a:ext uri="{FF2B5EF4-FFF2-40B4-BE49-F238E27FC236}">
+                  <a16:creationId xmlns:a16="http://schemas.microsoft.com/office/drawing/2014/main" id="{FCD9B137-9F07-4052-B76C-36D6AED25D86}"/>
+                </a:ext>
+              </a:extLst>
+            </p:cNvPr>
+            <p:cNvPicPr>
+              <a:picLocks noChangeAspect="1"/>
+            </p:cNvPicPr>
+            <p:nvPr/>
+          </p:nvPicPr>
+          <p:blipFill>
+            <a:blip r:embed="rId3"/>
+            <a:stretch>
+              <a:fillRect/>
+            </a:stretch>
+          </p:blipFill>
+          <p:spPr>
+            <a:xfrm rot="10800000">
+              <a:off x="2197302" y="276730"/>
+              <a:ext cx="147414" cy="128728"/>
+            </a:xfrm>
+            <a:prstGeom prst="rect">
+              <a:avLst/>
+            </a:prstGeom>
+          </p:spPr>
+        </p:pic>
+      </p:grpSp>
+      <p:grpSp>
+        <p:nvGrpSpPr>
+          <p:cNvPr id="12" name="그룹 11">
+            <a:extLst>
+              <a:ext uri="{FF2B5EF4-FFF2-40B4-BE49-F238E27FC236}">
+                <a16:creationId xmlns:a16="http://schemas.microsoft.com/office/drawing/2014/main" id="{6B2D700B-07E0-4E28-A7D2-0F4C62846EE3}"/>
+              </a:ext>
+            </a:extLst>
+          </p:cNvPr>
+          <p:cNvGrpSpPr/>
+          <p:nvPr/>
+        </p:nvGrpSpPr>
+        <p:grpSpPr>
+          <a:xfrm>
+            <a:off x="1488355" y="772187"/>
+            <a:ext cx="1564409" cy="707886"/>
+            <a:chOff x="796295" y="778765"/>
+            <a:chExt cx="1564409" cy="707886"/>
+          </a:xfrm>
+        </p:grpSpPr>
+        <p:sp>
+          <p:nvSpPr>
+            <p:cNvPr id="26" name="TextBox 25">
+              <a:extLst>
+                <a:ext uri="{FF2B5EF4-FFF2-40B4-BE49-F238E27FC236}">
+                  <a16:creationId xmlns:a16="http://schemas.microsoft.com/office/drawing/2014/main" id="{61921C24-9018-417C-966E-E56980F41166}"/>
+                </a:ext>
+              </a:extLst>
+            </p:cNvPr>
+            <p:cNvSpPr txBox="1"/>
+            <p:nvPr/>
+          </p:nvSpPr>
+          <p:spPr>
+            <a:xfrm>
+              <a:off x="1422627" y="778765"/>
+              <a:ext cx="938077" cy="707886"/>
+            </a:xfrm>
+            <a:prstGeom prst="rect">
+              <a:avLst/>
+            </a:prstGeom>
+            <a:noFill/>
+          </p:spPr>
+          <p:txBody>
+            <a:bodyPr wrap="none" rtlCol="0">
+              <a:spAutoFit/>
+            </a:bodyPr>
+            <a:lstStyle/>
+            <a:p>
+              <a:r>
+                <a:rPr lang="en-US" altLang="ko-KR" sz="800" dirty="0">
+                  <a:latin typeface="KoPub돋움체 Light" panose="00000300000000000000" pitchFamily="2" charset="-127"/>
+                  <a:ea typeface="KoPub돋움체 Light" panose="00000300000000000000" pitchFamily="2" charset="-127"/>
+                </a:rPr>
+                <a:t>"</a:t>
+              </a:r>
+              <a:r>
+                <a:rPr lang="ko-KR" altLang="en-US" sz="800" dirty="0">
+                  <a:latin typeface="KoPub돋움체 Light" panose="00000300000000000000" pitchFamily="2" charset="-127"/>
+                  <a:ea typeface="KoPub돋움체 Light" panose="00000300000000000000" pitchFamily="2" charset="-127"/>
+                </a:rPr>
+                <a:t>함께하는 즐거움</a:t>
+              </a:r>
+              <a:r>
+                <a:rPr lang="en-US" altLang="ko-KR" sz="800" dirty="0">
+                  <a:latin typeface="KoPub돋움체 Light" panose="00000300000000000000" pitchFamily="2" charset="-127"/>
+                  <a:ea typeface="KoPub돋움체 Light" panose="00000300000000000000" pitchFamily="2" charset="-127"/>
+                </a:rPr>
+                <a:t>“</a:t>
+              </a:r>
+            </a:p>
+            <a:p>
+              <a:r>
+                <a:rPr lang="en-US" altLang="ko-KR" sz="800" dirty="0">
+                  <a:latin typeface="KoPub돋움체 Light" panose="00000300000000000000" pitchFamily="2" charset="-127"/>
+                  <a:ea typeface="KoPub돋움체 Light" panose="00000300000000000000" pitchFamily="2" charset="-127"/>
+                </a:rPr>
+                <a:t>"</a:t>
+              </a:r>
+              <a:r>
+                <a:rPr lang="ko-KR" altLang="en-US" sz="800" dirty="0">
+                  <a:latin typeface="KoPub돋움체 Light" panose="00000300000000000000" pitchFamily="2" charset="-127"/>
+                  <a:ea typeface="KoPub돋움체 Light" panose="00000300000000000000" pitchFamily="2" charset="-127"/>
+                </a:rPr>
+                <a:t>명확한 약속</a:t>
+              </a:r>
+              <a:r>
+                <a:rPr lang="en-US" altLang="ko-KR" sz="800" dirty="0">
+                  <a:latin typeface="KoPub돋움체 Light" panose="00000300000000000000" pitchFamily="2" charset="-127"/>
+                  <a:ea typeface="KoPub돋움체 Light" panose="00000300000000000000" pitchFamily="2" charset="-127"/>
+                </a:rPr>
+                <a:t>"</a:t>
+              </a:r>
+              <a:endParaRPr lang="ko-KR" altLang="en-US" sz="800" dirty="0">
+                <a:latin typeface="KoPub돋움체 Light" panose="00000300000000000000" pitchFamily="2" charset="-127"/>
+                <a:ea typeface="KoPub돋움체 Light" panose="00000300000000000000" pitchFamily="2" charset="-127"/>
+              </a:endParaRPr>
+            </a:p>
+            <a:p>
+              <a:r>
+                <a:rPr lang="en-US" altLang="ko-KR" sz="800" dirty="0">
+                  <a:latin typeface="KoPub돋움체 Light" panose="00000300000000000000" pitchFamily="2" charset="-127"/>
+                  <a:ea typeface="KoPub돋움체 Light" panose="00000300000000000000" pitchFamily="2" charset="-127"/>
+                </a:rPr>
+                <a:t>"</a:t>
+              </a:r>
+              <a:r>
+                <a:rPr lang="ko-KR" altLang="en-US" sz="800" dirty="0">
+                  <a:latin typeface="KoPub돋움체 Light" panose="00000300000000000000" pitchFamily="2" charset="-127"/>
+                  <a:ea typeface="KoPub돋움체 Light" panose="00000300000000000000" pitchFamily="2" charset="-127"/>
+                </a:rPr>
+                <a:t>한눈에 보는 실무</a:t>
+              </a:r>
+              <a:r>
+                <a:rPr lang="en-US" altLang="ko-KR" sz="800" dirty="0">
+                  <a:latin typeface="KoPub돋움체 Light" panose="00000300000000000000" pitchFamily="2" charset="-127"/>
+                  <a:ea typeface="KoPub돋움체 Light" panose="00000300000000000000" pitchFamily="2" charset="-127"/>
+                </a:rPr>
+                <a:t>"</a:t>
+              </a:r>
+              <a:endParaRPr lang="ko-KR" altLang="en-US" sz="800" dirty="0">
+                <a:latin typeface="KoPub돋움체 Light" panose="00000300000000000000" pitchFamily="2" charset="-127"/>
+                <a:ea typeface="KoPub돋움체 Light" panose="00000300000000000000" pitchFamily="2" charset="-127"/>
+              </a:endParaRPr>
+            </a:p>
+            <a:p>
+              <a:r>
+                <a:rPr lang="en-US" altLang="ko-KR" sz="800" dirty="0">
+                  <a:latin typeface="KoPub돋움체 Light" panose="00000300000000000000" pitchFamily="2" charset="-127"/>
+                  <a:ea typeface="KoPub돋움체 Light" panose="00000300000000000000" pitchFamily="2" charset="-127"/>
+                </a:rPr>
+                <a:t>"</a:t>
+              </a:r>
+              <a:r>
+                <a:rPr lang="ko-KR" altLang="en-US" sz="800" dirty="0">
+                  <a:latin typeface="KoPub돋움체 Light" panose="00000300000000000000" pitchFamily="2" charset="-127"/>
+                  <a:ea typeface="KoPub돋움체 Light" panose="00000300000000000000" pitchFamily="2" charset="-127"/>
+                </a:rPr>
+                <a:t>현장 밀착형 지원</a:t>
+              </a:r>
+              <a:r>
+                <a:rPr lang="en-US" altLang="ko-KR" sz="800" dirty="0">
+                  <a:latin typeface="KoPub돋움체 Light" panose="00000300000000000000" pitchFamily="2" charset="-127"/>
+                  <a:ea typeface="KoPub돋움체 Light" panose="00000300000000000000" pitchFamily="2" charset="-127"/>
+                </a:rPr>
+                <a:t>"</a:t>
+              </a:r>
+              <a:endParaRPr lang="ko-KR" altLang="en-US" sz="800" dirty="0">
+                <a:latin typeface="KoPub돋움체 Light" panose="00000300000000000000" pitchFamily="2" charset="-127"/>
+                <a:ea typeface="KoPub돋움체 Light" panose="00000300000000000000" pitchFamily="2" charset="-127"/>
+              </a:endParaRPr>
+            </a:p>
+            <a:p>
+              <a:r>
+                <a:rPr lang="en-US" altLang="ko-KR" sz="800" dirty="0">
+                  <a:latin typeface="KoPub돋움체 Light" panose="00000300000000000000" pitchFamily="2" charset="-127"/>
+                  <a:ea typeface="KoPub돋움체 Light" panose="00000300000000000000" pitchFamily="2" charset="-127"/>
+                </a:rPr>
+                <a:t>"</a:t>
+              </a:r>
+              <a:r>
+                <a:rPr lang="ko-KR" altLang="en-US" sz="800" dirty="0">
+                  <a:latin typeface="KoPub돋움체 Light" panose="00000300000000000000" pitchFamily="2" charset="-127"/>
+                  <a:ea typeface="KoPub돋움체 Light" panose="00000300000000000000" pitchFamily="2" charset="-127"/>
+                </a:rPr>
+                <a:t>변화의 체감</a:t>
+              </a:r>
+              <a:r>
+                <a:rPr lang="en-US" altLang="ko-KR" sz="800" dirty="0">
+                  <a:latin typeface="KoPub돋움체 Light" panose="00000300000000000000" pitchFamily="2" charset="-127"/>
+                  <a:ea typeface="KoPub돋움체 Light" panose="00000300000000000000" pitchFamily="2" charset="-127"/>
+                </a:rPr>
+                <a:t>"</a:t>
+              </a:r>
+              <a:endParaRPr lang="ko-KR" altLang="en-US" sz="800" dirty="0">
+                <a:latin typeface="KoPub돋움체 Light" panose="00000300000000000000" pitchFamily="2" charset="-127"/>
+                <a:ea typeface="KoPub돋움체 Light" panose="00000300000000000000" pitchFamily="2" charset="-127"/>
+              </a:endParaRPr>
+            </a:p>
+          </p:txBody>
+        </p:sp>
+        <p:sp>
+          <p:nvSpPr>
+            <p:cNvPr id="31" name="TextBox 30">
+              <a:extLst>
+                <a:ext uri="{FF2B5EF4-FFF2-40B4-BE49-F238E27FC236}">
+                  <a16:creationId xmlns:a16="http://schemas.microsoft.com/office/drawing/2014/main" id="{62EAB35A-296C-468C-BCA0-D585048BF4E9}"/>
+                </a:ext>
+              </a:extLst>
+            </p:cNvPr>
+            <p:cNvSpPr txBox="1"/>
+            <p:nvPr/>
+          </p:nvSpPr>
+          <p:spPr>
+            <a:xfrm>
+              <a:off x="796295" y="778765"/>
+              <a:ext cx="753732" cy="707886"/>
+            </a:xfrm>
+            <a:prstGeom prst="rect">
+              <a:avLst/>
+            </a:prstGeom>
+            <a:noFill/>
+          </p:spPr>
+          <p:txBody>
+            <a:bodyPr wrap="none" rtlCol="0">
+              <a:spAutoFit/>
+            </a:bodyPr>
+            <a:lstStyle/>
+            <a:p>
+              <a:pPr marL="88900" indent="-88900">
+                <a:buClr>
+                  <a:srgbClr val="00B0F0"/>
+                </a:buClr>
+                <a:buFont typeface="Arial" panose="020B0604020202020204" pitchFamily="34" charset="0"/>
+                <a:buChar char="•"/>
+              </a:pPr>
+              <a:r>
+                <a:rPr lang="ko-KR" altLang="en-US" sz="800" b="1" dirty="0">
+                  <a:latin typeface="KoPub돋움체 Bold" panose="00000800000000000000" pitchFamily="2" charset="-127"/>
+                  <a:ea typeface="KoPub돋움체 Bold" panose="00000800000000000000" pitchFamily="2" charset="-127"/>
+                </a:rPr>
+                <a:t>소통의 광장</a:t>
+              </a:r>
+              <a:endParaRPr lang="en-US" altLang="ko-KR" sz="800" b="1" dirty="0">
+                <a:latin typeface="KoPub돋움체 Bold" panose="00000800000000000000" pitchFamily="2" charset="-127"/>
+                <a:ea typeface="KoPub돋움체 Bold" panose="00000800000000000000" pitchFamily="2" charset="-127"/>
+              </a:endParaRPr>
+            </a:p>
+            <a:p>
+              <a:pPr marL="88900" indent="-88900">
+                <a:buClr>
+                  <a:srgbClr val="00B0F0"/>
+                </a:buClr>
+                <a:buFont typeface="Arial" panose="020B0604020202020204" pitchFamily="34" charset="0"/>
+                <a:buChar char="•"/>
+              </a:pPr>
+              <a:r>
+                <a:rPr lang="ko-KR" altLang="en-US" sz="800" b="1" dirty="0">
+                  <a:latin typeface="KoPub돋움체 Bold" panose="00000800000000000000" pitchFamily="2" charset="-127"/>
+                  <a:ea typeface="KoPub돋움체 Bold" panose="00000800000000000000" pitchFamily="2" charset="-127"/>
+                </a:rPr>
+                <a:t>업무 기준</a:t>
+              </a:r>
+            </a:p>
+            <a:p>
+              <a:pPr marL="88900" indent="-88900">
+                <a:buClr>
+                  <a:srgbClr val="00B0F0"/>
+                </a:buClr>
+                <a:buFont typeface="Arial" panose="020B0604020202020204" pitchFamily="34" charset="0"/>
+                <a:buChar char="•"/>
+              </a:pPr>
+              <a:r>
+                <a:rPr lang="ko-KR" altLang="en-US" sz="800" b="1" dirty="0">
+                  <a:latin typeface="KoPub돋움체 Bold" panose="00000800000000000000" pitchFamily="2" charset="-127"/>
+                  <a:ea typeface="KoPub돋움체 Bold" panose="00000800000000000000" pitchFamily="2" charset="-127"/>
+                </a:rPr>
+                <a:t>교육자료</a:t>
+              </a:r>
+            </a:p>
+            <a:p>
+              <a:pPr marL="88900" indent="-88900">
+                <a:buClr>
+                  <a:srgbClr val="00B0F0"/>
+                </a:buClr>
+                <a:buFont typeface="Arial" panose="020B0604020202020204" pitchFamily="34" charset="0"/>
+                <a:buChar char="•"/>
+              </a:pPr>
+              <a:r>
+                <a:rPr lang="ko-KR" altLang="en-US" sz="800" b="1" dirty="0">
+                  <a:latin typeface="KoPub돋움체 Bold" panose="00000800000000000000" pitchFamily="2" charset="-127"/>
+                  <a:ea typeface="KoPub돋움체 Bold" panose="00000800000000000000" pitchFamily="2" charset="-127"/>
+                </a:rPr>
+                <a:t>요청</a:t>
+              </a:r>
+            </a:p>
+            <a:p>
+              <a:pPr marL="88900" indent="-88900">
+                <a:buClr>
+                  <a:srgbClr val="00B0F0"/>
+                </a:buClr>
+                <a:buFont typeface="Arial" panose="020B0604020202020204" pitchFamily="34" charset="0"/>
+                <a:buChar char="•"/>
+              </a:pPr>
+              <a:r>
+                <a:rPr lang="ko-KR" altLang="en-US" sz="800" b="1" dirty="0">
+                  <a:latin typeface="KoPub돋움체 Bold" panose="00000800000000000000" pitchFamily="2" charset="-127"/>
+                  <a:ea typeface="KoPub돋움체 Bold" panose="00000800000000000000" pitchFamily="2" charset="-127"/>
+                </a:rPr>
+                <a:t>지표</a:t>
+              </a:r>
+            </a:p>
+          </p:txBody>
+        </p:sp>
+      </p:grpSp>
     </p:spTree>
     <p:extLst>
       <p:ext uri="{BB962C8B-B14F-4D97-AF65-F5344CB8AC3E}">
-        <p14:creationId xmlns:p14="http://schemas.microsoft.com/office/powerpoint/2010/main" val="1485855118"/>
+        <p14:creationId xmlns:p14="http://schemas.microsoft.com/office/powerpoint/2010/main" val="3037608543"/>
       </p:ext>
     </p:extLst>
   </p:cSld>
@@ -9246,13 +8682,7 @@
   <p:cSld>
     <p:spTree>
       <p:nvGrpSpPr>
-        <p:cNvPr id="1" name="">
-          <a:extLst>
-            <a:ext uri="{FF2B5EF4-FFF2-40B4-BE49-F238E27FC236}">
-              <a16:creationId xmlns:a16="http://schemas.microsoft.com/office/drawing/2014/main" id="{4A45EECB-D19F-3B2B-B08A-864D0278F18D}"/>
-            </a:ext>
-          </a:extLst>
-        </p:cNvPr>
+        <p:cNvPr id="1" name=""/>
         <p:cNvGrpSpPr/>
         <p:nvPr/>
       </p:nvGrpSpPr>
@@ -9266,230 +8696,10 @@
       </p:grpSpPr>
       <p:sp>
         <p:nvSpPr>
-          <p:cNvPr id="28" name="사각형: 둥근 모서리 27">
-            <a:extLst>
-              <a:ext uri="{FF2B5EF4-FFF2-40B4-BE49-F238E27FC236}">
-                <a16:creationId xmlns:a16="http://schemas.microsoft.com/office/drawing/2014/main" id="{071431D5-5E25-7627-419B-0AD186404C59}"/>
-              </a:ext>
-            </a:extLst>
-          </p:cNvPr>
-          <p:cNvSpPr/>
-          <p:nvPr/>
-        </p:nvSpPr>
-        <p:spPr>
-          <a:xfrm>
-            <a:off x="1598636" y="1043683"/>
-            <a:ext cx="1264364" cy="230832"/>
-          </a:xfrm>
-          <a:prstGeom prst="roundRect">
-            <a:avLst/>
-          </a:prstGeom>
-          <a:solidFill>
-            <a:schemeClr val="bg2"/>
-          </a:solidFill>
-          <a:ln>
-            <a:noFill/>
-          </a:ln>
-        </p:spPr>
-        <p:style>
-          <a:lnRef idx="2">
-            <a:schemeClr val="accent3">
-              <a:shade val="15000"/>
-            </a:schemeClr>
-          </a:lnRef>
-          <a:fillRef idx="1">
-            <a:schemeClr val="accent3"/>
-          </a:fillRef>
-          <a:effectRef idx="0">
-            <a:schemeClr val="accent3"/>
-          </a:effectRef>
-          <a:fontRef idx="minor">
-            <a:schemeClr val="lt1"/>
-          </a:fontRef>
-        </p:style>
-        <p:txBody>
-          <a:bodyPr rtlCol="0" anchor="ctr"/>
-          <a:lstStyle/>
-          <a:p>
-            <a:pPr algn="ctr"/>
-            <a:endParaRPr lang="ko-KR" altLang="en-US" sz="2400">
-              <a:latin typeface="KoPub돋움체 Light" panose="02020603020101020101" pitchFamily="18" charset="-127"/>
-              <a:ea typeface="KoPub돋움체 Light" panose="02020603020101020101" pitchFamily="18" charset="-127"/>
-            </a:endParaRPr>
-          </a:p>
-        </p:txBody>
-      </p:sp>
-      <p:sp>
-        <p:nvSpPr>
-          <p:cNvPr id="29" name="사각형: 둥근 모서리 28">
-            <a:extLst>
-              <a:ext uri="{FF2B5EF4-FFF2-40B4-BE49-F238E27FC236}">
-                <a16:creationId xmlns:a16="http://schemas.microsoft.com/office/drawing/2014/main" id="{64CF6182-47FD-F9C3-AD01-EE6B6030D748}"/>
-              </a:ext>
-            </a:extLst>
-          </p:cNvPr>
-          <p:cNvSpPr/>
-          <p:nvPr/>
-        </p:nvSpPr>
-        <p:spPr>
-          <a:xfrm>
-            <a:off x="236105" y="1307925"/>
-            <a:ext cx="1264364" cy="230832"/>
-          </a:xfrm>
-          <a:prstGeom prst="roundRect">
-            <a:avLst/>
-          </a:prstGeom>
-          <a:solidFill>
-            <a:schemeClr val="bg2"/>
-          </a:solidFill>
-          <a:ln>
-            <a:noFill/>
-          </a:ln>
-        </p:spPr>
-        <p:style>
-          <a:lnRef idx="2">
-            <a:schemeClr val="accent3">
-              <a:shade val="15000"/>
-            </a:schemeClr>
-          </a:lnRef>
-          <a:fillRef idx="1">
-            <a:schemeClr val="accent3"/>
-          </a:fillRef>
-          <a:effectRef idx="0">
-            <a:schemeClr val="accent3"/>
-          </a:effectRef>
-          <a:fontRef idx="minor">
-            <a:schemeClr val="lt1"/>
-          </a:fontRef>
-        </p:style>
-        <p:txBody>
-          <a:bodyPr rtlCol="0" anchor="ctr"/>
-          <a:lstStyle/>
-          <a:p>
-            <a:pPr algn="ctr"/>
-            <a:endParaRPr lang="ko-KR" altLang="en-US" sz="2400">
-              <a:latin typeface="KoPub돋움체 Light" panose="02020603020101020101" pitchFamily="18" charset="-127"/>
-              <a:ea typeface="KoPub돋움체 Light" panose="02020603020101020101" pitchFamily="18" charset="-127"/>
-            </a:endParaRPr>
-          </a:p>
-        </p:txBody>
-      </p:sp>
-      <p:sp>
-        <p:nvSpPr>
-          <p:cNvPr id="30" name="사각형: 둥근 모서리 29">
-            <a:extLst>
-              <a:ext uri="{FF2B5EF4-FFF2-40B4-BE49-F238E27FC236}">
-                <a16:creationId xmlns:a16="http://schemas.microsoft.com/office/drawing/2014/main" id="{6E1EB857-FA0B-4F06-DE3D-34BE8644BF74}"/>
-              </a:ext>
-            </a:extLst>
-          </p:cNvPr>
-          <p:cNvSpPr/>
-          <p:nvPr/>
-        </p:nvSpPr>
-        <p:spPr>
-          <a:xfrm>
-            <a:off x="1598636" y="1307925"/>
-            <a:ext cx="1264364" cy="230832"/>
-          </a:xfrm>
-          <a:prstGeom prst="roundRect">
-            <a:avLst/>
-          </a:prstGeom>
-          <a:solidFill>
-            <a:schemeClr val="bg2"/>
-          </a:solidFill>
-          <a:ln>
-            <a:noFill/>
-          </a:ln>
-        </p:spPr>
-        <p:style>
-          <a:lnRef idx="2">
-            <a:schemeClr val="accent3">
-              <a:shade val="15000"/>
-            </a:schemeClr>
-          </a:lnRef>
-          <a:fillRef idx="1">
-            <a:schemeClr val="accent3"/>
-          </a:fillRef>
-          <a:effectRef idx="0">
-            <a:schemeClr val="accent3"/>
-          </a:effectRef>
-          <a:fontRef idx="minor">
-            <a:schemeClr val="lt1"/>
-          </a:fontRef>
-        </p:style>
-        <p:txBody>
-          <a:bodyPr rtlCol="0" anchor="ctr"/>
-          <a:lstStyle/>
-          <a:p>
-            <a:pPr algn="ctr"/>
-            <a:endParaRPr lang="ko-KR" altLang="en-US" sz="2400">
-              <a:latin typeface="KoPub돋움체 Light" panose="02020603020101020101" pitchFamily="18" charset="-127"/>
-              <a:ea typeface="KoPub돋움체 Light" panose="02020603020101020101" pitchFamily="18" charset="-127"/>
-            </a:endParaRPr>
-          </a:p>
-        </p:txBody>
-      </p:sp>
-      <p:sp>
-        <p:nvSpPr>
-          <p:cNvPr id="21" name="사각형: 둥근 모서리 20">
-            <a:extLst>
-              <a:ext uri="{FF2B5EF4-FFF2-40B4-BE49-F238E27FC236}">
-                <a16:creationId xmlns:a16="http://schemas.microsoft.com/office/drawing/2014/main" id="{BDBC9CBC-50D5-B6E4-D4E6-9234B31E9C5F}"/>
-              </a:ext>
-            </a:extLst>
-          </p:cNvPr>
-          <p:cNvSpPr/>
-          <p:nvPr/>
-        </p:nvSpPr>
-        <p:spPr>
-          <a:xfrm>
-            <a:off x="236105" y="1043683"/>
-            <a:ext cx="1264364" cy="230832"/>
-          </a:xfrm>
-          <a:prstGeom prst="roundRect">
-            <a:avLst/>
-          </a:prstGeom>
-          <a:solidFill>
-            <a:schemeClr val="bg2"/>
-          </a:solidFill>
-          <a:ln>
-            <a:noFill/>
-          </a:ln>
-        </p:spPr>
-        <p:style>
-          <a:lnRef idx="2">
-            <a:schemeClr val="accent3">
-              <a:shade val="15000"/>
-            </a:schemeClr>
-          </a:lnRef>
-          <a:fillRef idx="1">
-            <a:schemeClr val="accent3"/>
-          </a:fillRef>
-          <a:effectRef idx="0">
-            <a:schemeClr val="accent3"/>
-          </a:effectRef>
-          <a:fontRef idx="minor">
-            <a:schemeClr val="lt1"/>
-          </a:fontRef>
-        </p:style>
-        <p:txBody>
-          <a:bodyPr rtlCol="0" anchor="ctr"/>
-          <a:lstStyle/>
-          <a:p>
-            <a:pPr algn="ctr"/>
-            <a:endParaRPr lang="ko-KR" altLang="en-US" sz="2400">
-              <a:latin typeface="KoPub돋움체 Light" panose="02020603020101020101" pitchFamily="18" charset="-127"/>
-              <a:ea typeface="KoPub돋움체 Light" panose="02020603020101020101" pitchFamily="18" charset="-127"/>
-            </a:endParaRPr>
-          </a:p>
-        </p:txBody>
-      </p:sp>
-      <p:sp>
-        <p:nvSpPr>
           <p:cNvPr id="3" name="TextBox 2">
             <a:extLst>
               <a:ext uri="{FF2B5EF4-FFF2-40B4-BE49-F238E27FC236}">
-                <a16:creationId xmlns:a16="http://schemas.microsoft.com/office/drawing/2014/main" id="{B8FF198A-0E88-CABE-6012-A4584D652C68}"/>
+                <a16:creationId xmlns:a16="http://schemas.microsoft.com/office/drawing/2014/main" id="{F5E3E193-F1E8-6947-F01D-A96C1A9F6D0E}"/>
               </a:ext>
             </a:extLst>
           </p:cNvPr>
@@ -9498,8 +8708,8 @@
         </p:nvSpPr>
         <p:spPr>
           <a:xfrm>
-            <a:off x="43517" y="54246"/>
-            <a:ext cx="1180381" cy="169277"/>
+            <a:off x="25241" y="63223"/>
+            <a:ext cx="1403509" cy="184666"/>
           </a:xfrm>
           <a:prstGeom prst="rect">
             <a:avLst/>
@@ -9512,25 +8722,24 @@
           </a:bodyPr>
           <a:lstStyle/>
           <a:p>
-            <a:pPr algn="ctr"/>
             <a:r>
-              <a:rPr lang="ko-KR" altLang="en-US" sz="500" spc="-11" dirty="0">
-                <a:latin typeface="KoPub돋움체 Light" panose="02020603020101020101" pitchFamily="18" charset="-127"/>
-                <a:ea typeface="KoPub돋움체 Light" panose="02020603020101020101" pitchFamily="18" charset="-127"/>
+              <a:rPr lang="ko-KR" altLang="en-US" sz="600" b="1" spc="-11" dirty="0">
+                <a:latin typeface="KoPub돋움체 Bold" panose="00000800000000000000" pitchFamily="2" charset="-127"/>
+                <a:ea typeface="KoPub돋움체 Bold" panose="00000800000000000000" pitchFamily="2" charset="-127"/>
               </a:rPr>
               <a:t>순천향대학교 천안병원 </a:t>
             </a:r>
             <a:r>
-              <a:rPr lang="en-US" altLang="ko-KR" sz="500" spc="-11" dirty="0">
-                <a:latin typeface="KoPub돋움체 Light" panose="02020603020101020101" pitchFamily="18" charset="-127"/>
-                <a:ea typeface="KoPub돋움체 Light" panose="02020603020101020101" pitchFamily="18" charset="-127"/>
+              <a:rPr lang="en-US" altLang="ko-KR" sz="600" b="1" spc="-11" dirty="0">
+                <a:latin typeface="KoPub돋움체 Bold" panose="00000800000000000000" pitchFamily="2" charset="-127"/>
+                <a:ea typeface="KoPub돋움체 Bold" panose="00000800000000000000" pitchFamily="2" charset="-127"/>
               </a:rPr>
               <a:t>| </a:t>
             </a:r>
             <a:r>
-              <a:rPr lang="ko-KR" altLang="en-US" sz="500" spc="-11" dirty="0">
-                <a:latin typeface="KoPub돋움체 Light" panose="02020603020101020101" pitchFamily="18" charset="-127"/>
-                <a:ea typeface="KoPub돋움체 Light" panose="02020603020101020101" pitchFamily="18" charset="-127"/>
+              <a:rPr lang="ko-KR" altLang="en-US" sz="600" b="1" spc="-11" dirty="0">
+                <a:latin typeface="KoPub돋움체 Bold" panose="00000800000000000000" pitchFamily="2" charset="-127"/>
+                <a:ea typeface="KoPub돋움체 Bold" panose="00000800000000000000" pitchFamily="2" charset="-127"/>
               </a:rPr>
               <a:t>진료지원간호팀 </a:t>
             </a:r>
@@ -9539,10 +8748,10 @@
       </p:sp>
       <p:grpSp>
         <p:nvGrpSpPr>
-          <p:cNvPr id="20" name="그룹 19">
+          <p:cNvPr id="17" name="그룹 16">
             <a:extLst>
               <a:ext uri="{FF2B5EF4-FFF2-40B4-BE49-F238E27FC236}">
-                <a16:creationId xmlns:a16="http://schemas.microsoft.com/office/drawing/2014/main" id="{8541629C-5945-9C84-FFC8-B36486DE8FFF}"/>
+                <a16:creationId xmlns:a16="http://schemas.microsoft.com/office/drawing/2014/main" id="{CCD23336-35E2-7BBF-742C-67D82BDC7617}"/>
               </a:ext>
             </a:extLst>
           </p:cNvPr>
@@ -9551,449 +8760,8 @@
         </p:nvGrpSpPr>
         <p:grpSpPr>
           <a:xfrm>
-            <a:off x="692840" y="331471"/>
-            <a:ext cx="2337499" cy="520584"/>
-            <a:chOff x="422852" y="312900"/>
-            <a:chExt cx="2337499" cy="520584"/>
-          </a:xfrm>
-        </p:grpSpPr>
-        <p:sp>
-          <p:nvSpPr>
-            <p:cNvPr id="4" name="TextBox 3">
-              <a:extLst>
-                <a:ext uri="{FF2B5EF4-FFF2-40B4-BE49-F238E27FC236}">
-                  <a16:creationId xmlns:a16="http://schemas.microsoft.com/office/drawing/2014/main" id="{34C3D8C5-33E6-52B4-0063-0DFA4E956887}"/>
-                </a:ext>
-              </a:extLst>
-            </p:cNvPr>
-            <p:cNvSpPr txBox="1"/>
-            <p:nvPr/>
-          </p:nvSpPr>
-          <p:spPr>
-            <a:xfrm>
-              <a:off x="696163" y="312900"/>
-              <a:ext cx="1790875" cy="338554"/>
-            </a:xfrm>
-            <a:prstGeom prst="rect">
-              <a:avLst/>
-            </a:prstGeom>
-            <a:noFill/>
-          </p:spPr>
-          <p:txBody>
-            <a:bodyPr wrap="none">
-              <a:spAutoFit/>
-            </a:bodyPr>
-            <a:lstStyle/>
-            <a:p>
-              <a:pPr algn="ctr"/>
-              <a:r>
-                <a:rPr lang="ko-KR" altLang="en-US" sz="1600" dirty="0" err="1">
-                  <a:solidFill>
-                    <a:schemeClr val="accent1">
-                      <a:lumMod val="50000"/>
-                    </a:schemeClr>
-                  </a:solidFill>
-                  <a:latin typeface="KoPub돋움체 Bold" panose="02020603020101020101" pitchFamily="18" charset="-127"/>
-                  <a:ea typeface="KoPub돋움체 Bold" panose="02020603020101020101" pitchFamily="18" charset="-127"/>
-                </a:rPr>
-                <a:t>우리가치</a:t>
-              </a:r>
-              <a:r>
-                <a:rPr lang="ko-KR" altLang="en-US" sz="1600" dirty="0">
-                  <a:solidFill>
-                    <a:schemeClr val="accent1">
-                      <a:lumMod val="50000"/>
-                    </a:schemeClr>
-                  </a:solidFill>
-                  <a:latin typeface="KoPub돋움체 Bold" panose="02020603020101020101" pitchFamily="18" charset="-127"/>
-                  <a:ea typeface="KoPub돋움체 Bold" panose="02020603020101020101" pitchFamily="18" charset="-127"/>
-                </a:rPr>
-                <a:t> </a:t>
-              </a:r>
-              <a:r>
-                <a:rPr lang="en-US" altLang="ko-KR" sz="1600" dirty="0" err="1">
-                  <a:solidFill>
-                    <a:schemeClr val="accent1">
-                      <a:lumMod val="50000"/>
-                    </a:schemeClr>
-                  </a:solidFill>
-                  <a:latin typeface="KoPub돋움체 Bold" panose="02020603020101020101" pitchFamily="18" charset="-127"/>
-                  <a:ea typeface="KoPub돋움체 Bold" panose="02020603020101020101" pitchFamily="18" charset="-127"/>
-                </a:rPr>
-                <a:t>WeValue</a:t>
-              </a:r>
-              <a:endParaRPr lang="en-US" altLang="ko-KR" sz="1600" dirty="0">
-                <a:solidFill>
-                  <a:schemeClr val="accent1">
-                    <a:lumMod val="50000"/>
-                  </a:schemeClr>
-                </a:solidFill>
-                <a:latin typeface="KoPub돋움체 Bold" panose="02020603020101020101" pitchFamily="18" charset="-127"/>
-                <a:ea typeface="KoPub돋움체 Bold" panose="02020603020101020101" pitchFamily="18" charset="-127"/>
-              </a:endParaRPr>
-            </a:p>
-          </p:txBody>
-        </p:sp>
-        <p:sp>
-          <p:nvSpPr>
-            <p:cNvPr id="6" name="TextBox 5">
-              <a:extLst>
-                <a:ext uri="{FF2B5EF4-FFF2-40B4-BE49-F238E27FC236}">
-                  <a16:creationId xmlns:a16="http://schemas.microsoft.com/office/drawing/2014/main" id="{9A55B737-7A78-F138-5C13-9304655EF519}"/>
-                </a:ext>
-              </a:extLst>
-            </p:cNvPr>
-            <p:cNvSpPr txBox="1"/>
-            <p:nvPr/>
-          </p:nvSpPr>
-          <p:spPr>
-            <a:xfrm>
-              <a:off x="422852" y="587263"/>
-              <a:ext cx="2337499" cy="246221"/>
-            </a:xfrm>
-            <a:prstGeom prst="rect">
-              <a:avLst/>
-            </a:prstGeom>
-            <a:noFill/>
-          </p:spPr>
-          <p:txBody>
-            <a:bodyPr wrap="none">
-              <a:spAutoFit/>
-            </a:bodyPr>
-            <a:lstStyle/>
-            <a:p>
-              <a:pPr algn="ctr"/>
-              <a:r>
-                <a:rPr lang="en-US" altLang="ko-KR" sz="1000" b="1" dirty="0">
-                  <a:latin typeface="KoPub돋움체 Light" panose="02020603020101020101" pitchFamily="18" charset="-127"/>
-                  <a:ea typeface="KoPub돋움체 Light" panose="02020603020101020101" pitchFamily="18" charset="-127"/>
-                </a:rPr>
-                <a:t>[</a:t>
-              </a:r>
-              <a:r>
-                <a:rPr lang="ko-KR" altLang="en-US" sz="1000" b="1" dirty="0">
-                  <a:latin typeface="KoPub돋움체 Light" panose="02020603020101020101" pitchFamily="18" charset="-127"/>
-                  <a:ea typeface="KoPub돋움체 Light" panose="02020603020101020101" pitchFamily="18" charset="-127"/>
-                </a:rPr>
-                <a:t>우리가 가치를 만드는 공간</a:t>
-              </a:r>
-              <a:r>
-                <a:rPr lang="en-US" altLang="ko-KR" sz="1000" b="1" dirty="0">
-                  <a:latin typeface="KoPub돋움체 Light" panose="02020603020101020101" pitchFamily="18" charset="-127"/>
-                  <a:ea typeface="KoPub돋움체 Light" panose="02020603020101020101" pitchFamily="18" charset="-127"/>
-                </a:rPr>
-                <a:t>, </a:t>
-              </a:r>
-              <a:r>
-                <a:rPr lang="ko-KR" altLang="en-US" sz="1000" b="1" dirty="0" err="1">
-                  <a:latin typeface="KoPub돋움체 Light" panose="02020603020101020101" pitchFamily="18" charset="-127"/>
-                  <a:ea typeface="KoPub돋움체 Light" panose="02020603020101020101" pitchFamily="18" charset="-127"/>
-                </a:rPr>
-                <a:t>우리가치</a:t>
-              </a:r>
-              <a:r>
-                <a:rPr lang="ko-KR" altLang="en-US" sz="1000" b="1" dirty="0">
-                  <a:latin typeface="KoPub돋움체 Light" panose="02020603020101020101" pitchFamily="18" charset="-127"/>
-                  <a:ea typeface="KoPub돋움체 Light" panose="02020603020101020101" pitchFamily="18" charset="-127"/>
-                </a:rPr>
-                <a:t> 허브</a:t>
-              </a:r>
-              <a:r>
-                <a:rPr lang="en-US" altLang="ko-KR" sz="1000" b="1" dirty="0">
-                  <a:latin typeface="KoPub돋움체 Light" panose="02020603020101020101" pitchFamily="18" charset="-127"/>
-                  <a:ea typeface="KoPub돋움체 Light" panose="02020603020101020101" pitchFamily="18" charset="-127"/>
-                </a:rPr>
-                <a:t>]</a:t>
-              </a:r>
-              <a:endParaRPr lang="en-US" altLang="ko-KR" sz="1000" b="1" dirty="0">
-                <a:solidFill>
-                  <a:schemeClr val="accent1">
-                    <a:lumMod val="50000"/>
-                  </a:schemeClr>
-                </a:solidFill>
-                <a:latin typeface="KoPub돋움체 Light" panose="02020603020101020101" pitchFamily="18" charset="-127"/>
-                <a:ea typeface="KoPub돋움체 Light" panose="02020603020101020101" pitchFamily="18" charset="-127"/>
-              </a:endParaRPr>
-            </a:p>
-          </p:txBody>
-        </p:sp>
-      </p:grpSp>
-      <p:sp>
-        <p:nvSpPr>
-          <p:cNvPr id="7" name="TextBox 6">
-            <a:extLst>
-              <a:ext uri="{FF2B5EF4-FFF2-40B4-BE49-F238E27FC236}">
-                <a16:creationId xmlns:a16="http://schemas.microsoft.com/office/drawing/2014/main" id="{C7DB18BA-F1FF-74F7-F26F-EA4CCCF289FF}"/>
-              </a:ext>
-            </a:extLst>
-          </p:cNvPr>
-          <p:cNvSpPr txBox="1"/>
-          <p:nvPr/>
-        </p:nvSpPr>
-        <p:spPr>
-          <a:xfrm>
-            <a:off x="163608" y="1041309"/>
-            <a:ext cx="1409361" cy="230832"/>
-          </a:xfrm>
-          <a:prstGeom prst="rect">
-            <a:avLst/>
-          </a:prstGeom>
-          <a:noFill/>
-        </p:spPr>
-        <p:txBody>
-          <a:bodyPr wrap="none">
-            <a:spAutoFit/>
-          </a:bodyPr>
-          <a:lstStyle/>
-          <a:p>
-            <a:pPr algn="ctr"/>
-            <a:r>
-              <a:rPr lang="ko-KR" altLang="en-US" sz="900" b="1" dirty="0">
-                <a:solidFill>
-                  <a:schemeClr val="tx2">
-                    <a:lumMod val="50000"/>
-                  </a:schemeClr>
-                </a:solidFill>
-                <a:latin typeface="KoPub돋움체 Light" panose="02020603020101020101" pitchFamily="18" charset="-127"/>
-                <a:ea typeface="KoPub돋움체 Light" panose="02020603020101020101" pitchFamily="18" charset="-127"/>
-              </a:rPr>
-              <a:t>소통의 광장</a:t>
-            </a:r>
-            <a:r>
-              <a:rPr lang="en-US" altLang="ko-KR" sz="900" b="1" dirty="0">
-                <a:solidFill>
-                  <a:schemeClr val="tx2">
-                    <a:lumMod val="50000"/>
-                  </a:schemeClr>
-                </a:solidFill>
-                <a:latin typeface="KoPub돋움체 Light" panose="02020603020101020101" pitchFamily="18" charset="-127"/>
-                <a:ea typeface="KoPub돋움체 Light" panose="02020603020101020101" pitchFamily="18" charset="-127"/>
-              </a:rPr>
-              <a:t> (Community)</a:t>
-            </a:r>
-            <a:endParaRPr lang="en-US" altLang="ko-KR" sz="800" dirty="0">
-              <a:solidFill>
-                <a:schemeClr val="tx2">
-                  <a:lumMod val="50000"/>
-                </a:schemeClr>
-              </a:solidFill>
-              <a:latin typeface="KoPub돋움체 Light" panose="02020603020101020101" pitchFamily="18" charset="-127"/>
-              <a:ea typeface="KoPub돋움체 Light" panose="02020603020101020101" pitchFamily="18" charset="-127"/>
-            </a:endParaRPr>
-          </a:p>
-        </p:txBody>
-      </p:sp>
-      <p:sp>
-        <p:nvSpPr>
-          <p:cNvPr id="8" name="TextBox 7">
-            <a:extLst>
-              <a:ext uri="{FF2B5EF4-FFF2-40B4-BE49-F238E27FC236}">
-                <a16:creationId xmlns:a16="http://schemas.microsoft.com/office/drawing/2014/main" id="{8775AB22-C659-E20D-CE3D-BCAFB77D9628}"/>
-              </a:ext>
-            </a:extLst>
-          </p:cNvPr>
-          <p:cNvSpPr txBox="1"/>
-          <p:nvPr/>
-        </p:nvSpPr>
-        <p:spPr>
-          <a:xfrm>
-            <a:off x="1548581" y="1041309"/>
-            <a:ext cx="1364476" cy="230832"/>
-          </a:xfrm>
-          <a:prstGeom prst="rect">
-            <a:avLst/>
-          </a:prstGeom>
-          <a:noFill/>
-        </p:spPr>
-        <p:txBody>
-          <a:bodyPr wrap="none">
-            <a:spAutoFit/>
-          </a:bodyPr>
-          <a:lstStyle/>
-          <a:p>
-            <a:pPr algn="ctr"/>
-            <a:r>
-              <a:rPr lang="ko-KR" altLang="en-US" sz="900" b="1" dirty="0">
-                <a:solidFill>
-                  <a:schemeClr val="tx2">
-                    <a:lumMod val="50000"/>
-                  </a:schemeClr>
-                </a:solidFill>
-                <a:latin typeface="KoPub돋움체 Light" panose="02020603020101020101" pitchFamily="18" charset="-127"/>
-                <a:ea typeface="KoPub돋움체 Light" panose="02020603020101020101" pitchFamily="18" charset="-127"/>
-              </a:rPr>
-              <a:t>업무의 기준  </a:t>
-            </a:r>
-            <a:r>
-              <a:rPr lang="en-US" altLang="ko-KR" sz="900" b="1" dirty="0">
-                <a:solidFill>
-                  <a:schemeClr val="tx2">
-                    <a:lumMod val="50000"/>
-                  </a:schemeClr>
-                </a:solidFill>
-                <a:latin typeface="KoPub돋움체 Light" panose="02020603020101020101" pitchFamily="18" charset="-127"/>
-                <a:ea typeface="KoPub돋움체 Light" panose="02020603020101020101" pitchFamily="18" charset="-127"/>
-              </a:rPr>
-              <a:t>(Standards)</a:t>
-            </a:r>
-            <a:endParaRPr lang="en-US" altLang="ko-KR" sz="800" dirty="0">
-              <a:solidFill>
-                <a:schemeClr val="tx2">
-                  <a:lumMod val="50000"/>
-                </a:schemeClr>
-              </a:solidFill>
-              <a:latin typeface="KoPub돋움체 Light" panose="02020603020101020101" pitchFamily="18" charset="-127"/>
-              <a:ea typeface="KoPub돋움체 Light" panose="02020603020101020101" pitchFamily="18" charset="-127"/>
-            </a:endParaRPr>
-          </a:p>
-        </p:txBody>
-      </p:sp>
-      <p:sp>
-        <p:nvSpPr>
-          <p:cNvPr id="9" name="TextBox 8">
-            <a:extLst>
-              <a:ext uri="{FF2B5EF4-FFF2-40B4-BE49-F238E27FC236}">
-                <a16:creationId xmlns:a16="http://schemas.microsoft.com/office/drawing/2014/main" id="{DBFABAC6-B2E3-9F5B-F3F0-569BA71EEC6F}"/>
-              </a:ext>
-            </a:extLst>
-          </p:cNvPr>
-          <p:cNvSpPr txBox="1"/>
-          <p:nvPr/>
-        </p:nvSpPr>
-        <p:spPr>
-          <a:xfrm>
-            <a:off x="206889" y="1305551"/>
-            <a:ext cx="1322798" cy="230832"/>
-          </a:xfrm>
-          <a:prstGeom prst="rect">
-            <a:avLst/>
-          </a:prstGeom>
-          <a:noFill/>
-        </p:spPr>
-        <p:txBody>
-          <a:bodyPr wrap="none">
-            <a:spAutoFit/>
-          </a:bodyPr>
-          <a:lstStyle/>
-          <a:p>
-            <a:pPr algn="ctr"/>
-            <a:r>
-              <a:rPr lang="ko-KR" altLang="en-US" sz="900" b="1" dirty="0">
-                <a:solidFill>
-                  <a:schemeClr val="tx2">
-                    <a:lumMod val="50000"/>
-                  </a:schemeClr>
-                </a:solidFill>
-                <a:latin typeface="KoPub돋움체 Light" panose="02020603020101020101" pitchFamily="18" charset="-127"/>
-                <a:ea typeface="KoPub돋움체 Light" panose="02020603020101020101" pitchFamily="18" charset="-127"/>
-              </a:rPr>
-              <a:t>배움의 창구 </a:t>
-            </a:r>
-            <a:r>
-              <a:rPr lang="en-US" altLang="ko-KR" sz="900" b="1" dirty="0">
-                <a:solidFill>
-                  <a:schemeClr val="tx2">
-                    <a:lumMod val="50000"/>
-                  </a:schemeClr>
-                </a:solidFill>
-                <a:latin typeface="KoPub돋움체 Light" panose="02020603020101020101" pitchFamily="18" charset="-127"/>
-                <a:ea typeface="KoPub돋움체 Light" panose="02020603020101020101" pitchFamily="18" charset="-127"/>
-              </a:rPr>
-              <a:t>(Education)</a:t>
-            </a:r>
-            <a:endParaRPr lang="ko-KR" altLang="en-US" sz="800" dirty="0">
-              <a:solidFill>
-                <a:schemeClr val="tx2">
-                  <a:lumMod val="50000"/>
-                </a:schemeClr>
-              </a:solidFill>
-              <a:latin typeface="KoPub돋움체 Light" panose="02020603020101020101" pitchFamily="18" charset="-127"/>
-              <a:ea typeface="KoPub돋움체 Light" panose="02020603020101020101" pitchFamily="18" charset="-127"/>
-            </a:endParaRPr>
-          </a:p>
-        </p:txBody>
-      </p:sp>
-      <p:sp>
-        <p:nvSpPr>
-          <p:cNvPr id="10" name="TextBox 9">
-            <a:extLst>
-              <a:ext uri="{FF2B5EF4-FFF2-40B4-BE49-F238E27FC236}">
-                <a16:creationId xmlns:a16="http://schemas.microsoft.com/office/drawing/2014/main" id="{616185A7-F63F-4F18-0F71-745C868E89D0}"/>
-              </a:ext>
-            </a:extLst>
-          </p:cNvPr>
-          <p:cNvSpPr txBox="1"/>
-          <p:nvPr/>
-        </p:nvSpPr>
-        <p:spPr>
-          <a:xfrm>
-            <a:off x="1530948" y="1305551"/>
-            <a:ext cx="1399743" cy="230832"/>
-          </a:xfrm>
-          <a:prstGeom prst="rect">
-            <a:avLst/>
-          </a:prstGeom>
-          <a:noFill/>
-        </p:spPr>
-        <p:txBody>
-          <a:bodyPr wrap="none">
-            <a:spAutoFit/>
-          </a:bodyPr>
-          <a:lstStyle/>
-          <a:p>
-            <a:pPr algn="ctr"/>
-            <a:r>
-              <a:rPr lang="ko-KR" altLang="en-US" sz="900" b="1" dirty="0">
-                <a:solidFill>
-                  <a:schemeClr val="tx2">
-                    <a:lumMod val="50000"/>
-                  </a:schemeClr>
-                </a:solidFill>
-                <a:latin typeface="KoPub돋움체 Light" panose="02020603020101020101" pitchFamily="18" charset="-127"/>
-                <a:ea typeface="KoPub돋움체 Light" panose="02020603020101020101" pitchFamily="18" charset="-127"/>
-              </a:rPr>
-              <a:t>투명한 지표  </a:t>
-            </a:r>
-            <a:r>
-              <a:rPr lang="en-US" altLang="ko-KR" sz="900" b="1" dirty="0">
-                <a:solidFill>
-                  <a:schemeClr val="tx2">
-                    <a:lumMod val="50000"/>
-                  </a:schemeClr>
-                </a:solidFill>
-                <a:latin typeface="KoPub돋움체 Light" panose="02020603020101020101" pitchFamily="18" charset="-127"/>
-                <a:ea typeface="KoPub돋움체 Light" panose="02020603020101020101" pitchFamily="18" charset="-127"/>
-              </a:rPr>
-              <a:t>(Dashboard)</a:t>
-            </a:r>
-            <a:endParaRPr lang="ko-KR" altLang="en-US" sz="800" dirty="0">
-              <a:solidFill>
-                <a:schemeClr val="tx2">
-                  <a:lumMod val="50000"/>
-                </a:schemeClr>
-              </a:solidFill>
-              <a:latin typeface="KoPub돋움체 Light" panose="02020603020101020101" pitchFamily="18" charset="-127"/>
-              <a:ea typeface="KoPub돋움체 Light" panose="02020603020101020101" pitchFamily="18" charset="-127"/>
-            </a:endParaRPr>
-          </a:p>
-        </p:txBody>
-      </p:sp>
-      <p:grpSp>
-        <p:nvGrpSpPr>
-          <p:cNvPr id="17" name="그룹 16">
-            <a:extLst>
-              <a:ext uri="{FF2B5EF4-FFF2-40B4-BE49-F238E27FC236}">
-                <a16:creationId xmlns:a16="http://schemas.microsoft.com/office/drawing/2014/main" id="{494B4D00-F5F3-1DA3-1D31-4FEB229CB2FD}"/>
-              </a:ext>
-            </a:extLst>
-          </p:cNvPr>
-          <p:cNvGrpSpPr/>
-          <p:nvPr/>
-        </p:nvGrpSpPr>
-        <p:grpSpPr>
-          <a:xfrm>
-            <a:off x="173236" y="377028"/>
-            <a:ext cx="538336" cy="538336"/>
+            <a:off x="589938" y="838920"/>
+            <a:ext cx="634026" cy="568432"/>
             <a:chOff x="777945" y="-736888"/>
             <a:chExt cx="663508" cy="663508"/>
           </a:xfrm>
@@ -10003,7 +8771,7 @@
             <p:cNvPr id="5" name="그림 4" descr="패턴, 사각형, 예술, 직사각형이(가) 표시된 사진&#10;&#10;AI 생성 콘텐츠는 정확하지 않을 수 있습니다.">
               <a:extLst>
                 <a:ext uri="{FF2B5EF4-FFF2-40B4-BE49-F238E27FC236}">
-                  <a16:creationId xmlns:a16="http://schemas.microsoft.com/office/drawing/2014/main" id="{74392C30-91B7-7477-3F03-4E87E9F36E4B}"/>
+                  <a16:creationId xmlns:a16="http://schemas.microsoft.com/office/drawing/2014/main" id="{40C63F4C-30AB-6EF2-23BA-1233104A9DC3}"/>
                 </a:ext>
               </a:extLst>
             </p:cNvPr>
@@ -10033,7 +8801,7 @@
             <p:cNvPr id="13" name="L 도형 12">
               <a:extLst>
                 <a:ext uri="{FF2B5EF4-FFF2-40B4-BE49-F238E27FC236}">
-                  <a16:creationId xmlns:a16="http://schemas.microsoft.com/office/drawing/2014/main" id="{C0F0F03A-08A8-59B9-2937-78B0D5A94EE4}"/>
+                  <a16:creationId xmlns:a16="http://schemas.microsoft.com/office/drawing/2014/main" id="{B242B433-4D06-F840-EA3E-7FA7766D184C}"/>
                 </a:ext>
               </a:extLst>
             </p:cNvPr>
@@ -10090,7 +8858,7 @@
             <p:cNvPr id="14" name="L 도형 13">
               <a:extLst>
                 <a:ext uri="{FF2B5EF4-FFF2-40B4-BE49-F238E27FC236}">
-                  <a16:creationId xmlns:a16="http://schemas.microsoft.com/office/drawing/2014/main" id="{DC16ED84-4496-018B-DC41-24A9053D6275}"/>
+                  <a16:creationId xmlns:a16="http://schemas.microsoft.com/office/drawing/2014/main" id="{37DD2CDD-BF9D-CD6A-CC77-30C00DF7A8EA}"/>
                 </a:ext>
               </a:extLst>
             </p:cNvPr>
@@ -10147,7 +8915,7 @@
             <p:cNvPr id="15" name="L 도형 14">
               <a:extLst>
                 <a:ext uri="{FF2B5EF4-FFF2-40B4-BE49-F238E27FC236}">
-                  <a16:creationId xmlns:a16="http://schemas.microsoft.com/office/drawing/2014/main" id="{68A82964-820A-70AC-3524-49C9CDD29D30}"/>
+                  <a16:creationId xmlns:a16="http://schemas.microsoft.com/office/drawing/2014/main" id="{DD20813D-7C4F-9420-E012-EB09FDC9059E}"/>
                 </a:ext>
               </a:extLst>
             </p:cNvPr>
@@ -10204,7 +8972,7 @@
             <p:cNvPr id="16" name="L 도형 15">
               <a:extLst>
                 <a:ext uri="{FF2B5EF4-FFF2-40B4-BE49-F238E27FC236}">
-                  <a16:creationId xmlns:a16="http://schemas.microsoft.com/office/drawing/2014/main" id="{0ECF5BD8-D202-7B2D-7A9D-F341609A0350}"/>
+                  <a16:creationId xmlns:a16="http://schemas.microsoft.com/office/drawing/2014/main" id="{C2F58D7B-1E2F-7C1C-29C2-3CBAF321313E}"/>
                 </a:ext>
               </a:extLst>
             </p:cNvPr>
@@ -10257,10 +9025,564 @@
           </p:txBody>
         </p:sp>
       </p:grpSp>
+      <p:grpSp>
+        <p:nvGrpSpPr>
+          <p:cNvPr id="18" name="그룹 17">
+            <a:extLst>
+              <a:ext uri="{FF2B5EF4-FFF2-40B4-BE49-F238E27FC236}">
+                <a16:creationId xmlns:a16="http://schemas.microsoft.com/office/drawing/2014/main" id="{360DDF2E-2289-473B-B5F6-77027118C993}"/>
+              </a:ext>
+            </a:extLst>
+          </p:cNvPr>
+          <p:cNvGrpSpPr/>
+          <p:nvPr/>
+        </p:nvGrpSpPr>
+        <p:grpSpPr>
+          <a:xfrm>
+            <a:off x="113069" y="274768"/>
+            <a:ext cx="1746464" cy="425416"/>
+            <a:chOff x="614240" y="226472"/>
+            <a:chExt cx="1746464" cy="425416"/>
+          </a:xfrm>
+        </p:grpSpPr>
+        <p:sp>
+          <p:nvSpPr>
+            <p:cNvPr id="4" name="TextBox 3">
+              <a:extLst>
+                <a:ext uri="{FF2B5EF4-FFF2-40B4-BE49-F238E27FC236}">
+                  <a16:creationId xmlns:a16="http://schemas.microsoft.com/office/drawing/2014/main" id="{1F0C02A7-D766-DD14-548E-2AE7955534F4}"/>
+                </a:ext>
+              </a:extLst>
+            </p:cNvPr>
+            <p:cNvSpPr txBox="1"/>
+            <p:nvPr/>
+          </p:nvSpPr>
+          <p:spPr>
+            <a:xfrm>
+              <a:off x="685077" y="226472"/>
+              <a:ext cx="1604991" cy="307777"/>
+            </a:xfrm>
+            <a:prstGeom prst="rect">
+              <a:avLst/>
+            </a:prstGeom>
+            <a:noFill/>
+          </p:spPr>
+          <p:txBody>
+            <a:bodyPr wrap="none">
+              <a:spAutoFit/>
+            </a:bodyPr>
+            <a:lstStyle/>
+            <a:p>
+              <a:pPr algn="ctr"/>
+              <a:r>
+                <a:rPr lang="ko-KR" altLang="en-US" sz="1400" dirty="0" err="1">
+                  <a:solidFill>
+                    <a:srgbClr val="00B0F0"/>
+                  </a:solidFill>
+                  <a:latin typeface="KoPub돋움체 Bold" panose="00000800000000000000" pitchFamily="2" charset="-127"/>
+                  <a:ea typeface="KoPub돋움체 Bold" panose="00000800000000000000" pitchFamily="2" charset="-127"/>
+                </a:rPr>
+                <a:t>우리가치</a:t>
+              </a:r>
+              <a:r>
+                <a:rPr lang="ko-KR" altLang="en-US" sz="1400" dirty="0">
+                  <a:solidFill>
+                    <a:schemeClr val="accent1">
+                      <a:lumMod val="50000"/>
+                    </a:schemeClr>
+                  </a:solidFill>
+                  <a:latin typeface="KoPub돋움체 Bold" panose="02020603020101020101" pitchFamily="18" charset="-127"/>
+                  <a:ea typeface="KoPub돋움체 Bold" panose="02020603020101020101" pitchFamily="18" charset="-127"/>
+                </a:rPr>
+                <a:t> </a:t>
+              </a:r>
+              <a:r>
+                <a:rPr lang="en-US" altLang="ko-KR" sz="1400" dirty="0" err="1">
+                  <a:solidFill>
+                    <a:schemeClr val="accent1">
+                      <a:lumMod val="50000"/>
+                    </a:schemeClr>
+                  </a:solidFill>
+                  <a:latin typeface="Franklin Gothic Heavy" panose="020B0903020102020204" pitchFamily="34" charset="0"/>
+                  <a:ea typeface="KoPub돋움체 Bold" panose="02020603020101020101" pitchFamily="18" charset="-127"/>
+                </a:rPr>
+                <a:t>WeValue</a:t>
+              </a:r>
+              <a:endParaRPr lang="en-US" altLang="ko-KR" sz="1400" dirty="0">
+                <a:solidFill>
+                  <a:schemeClr val="accent1">
+                    <a:lumMod val="50000"/>
+                  </a:schemeClr>
+                </a:solidFill>
+                <a:latin typeface="Franklin Gothic Heavy" panose="020B0903020102020204" pitchFamily="34" charset="0"/>
+                <a:ea typeface="KoPub돋움체 Bold" panose="02020603020101020101" pitchFamily="18" charset="-127"/>
+              </a:endParaRPr>
+            </a:p>
+          </p:txBody>
+        </p:sp>
+        <p:sp>
+          <p:nvSpPr>
+            <p:cNvPr id="6" name="TextBox 5">
+              <a:extLst>
+                <a:ext uri="{FF2B5EF4-FFF2-40B4-BE49-F238E27FC236}">
+                  <a16:creationId xmlns:a16="http://schemas.microsoft.com/office/drawing/2014/main" id="{25F3C248-44C4-9D7A-C464-62D68C9890DC}"/>
+                </a:ext>
+              </a:extLst>
+            </p:cNvPr>
+            <p:cNvSpPr txBox="1"/>
+            <p:nvPr/>
+          </p:nvSpPr>
+          <p:spPr>
+            <a:xfrm>
+              <a:off x="622591" y="451833"/>
+              <a:ext cx="1729962" cy="200055"/>
+            </a:xfrm>
+            <a:prstGeom prst="rect">
+              <a:avLst/>
+            </a:prstGeom>
+            <a:noFill/>
+          </p:spPr>
+          <p:txBody>
+            <a:bodyPr wrap="none">
+              <a:spAutoFit/>
+            </a:bodyPr>
+            <a:lstStyle/>
+            <a:p>
+              <a:pPr algn="ctr"/>
+              <a:r>
+                <a:rPr lang="en-US" altLang="ko-KR" sz="700" b="1" dirty="0">
+                  <a:latin typeface="KoPub돋움체 Bold" panose="00000800000000000000" pitchFamily="2" charset="-127"/>
+                  <a:ea typeface="KoPub돋움체 Bold" panose="00000800000000000000" pitchFamily="2" charset="-127"/>
+                </a:rPr>
+                <a:t>[</a:t>
+              </a:r>
+              <a:r>
+                <a:rPr lang="ko-KR" altLang="en-US" sz="700" b="1" dirty="0">
+                  <a:latin typeface="KoPub돋움체 Bold" panose="00000800000000000000" pitchFamily="2" charset="-127"/>
+                  <a:ea typeface="KoPub돋움체 Bold" panose="00000800000000000000" pitchFamily="2" charset="-127"/>
+                </a:rPr>
+                <a:t>우리가 가치를 만드는 공간</a:t>
+              </a:r>
+              <a:r>
+                <a:rPr lang="en-US" altLang="ko-KR" sz="700" b="1" dirty="0">
+                  <a:latin typeface="KoPub돋움체 Bold" panose="00000800000000000000" pitchFamily="2" charset="-127"/>
+                  <a:ea typeface="KoPub돋움체 Bold" panose="00000800000000000000" pitchFamily="2" charset="-127"/>
+                </a:rPr>
+                <a:t>, </a:t>
+              </a:r>
+              <a:r>
+                <a:rPr lang="ko-KR" altLang="en-US" sz="700" b="1" dirty="0" err="1">
+                  <a:latin typeface="KoPub돋움체 Bold" panose="00000800000000000000" pitchFamily="2" charset="-127"/>
+                  <a:ea typeface="KoPub돋움체 Bold" panose="00000800000000000000" pitchFamily="2" charset="-127"/>
+                </a:rPr>
+                <a:t>우리가치</a:t>
+              </a:r>
+              <a:r>
+                <a:rPr lang="ko-KR" altLang="en-US" sz="700" b="1" dirty="0">
+                  <a:latin typeface="KoPub돋움체 Bold" panose="00000800000000000000" pitchFamily="2" charset="-127"/>
+                  <a:ea typeface="KoPub돋움체 Bold" panose="00000800000000000000" pitchFamily="2" charset="-127"/>
+                </a:rPr>
+                <a:t> 허브</a:t>
+              </a:r>
+              <a:r>
+                <a:rPr lang="en-US" altLang="ko-KR" sz="700" b="1" dirty="0">
+                  <a:latin typeface="KoPub돋움체 Bold" panose="00000800000000000000" pitchFamily="2" charset="-127"/>
+                  <a:ea typeface="KoPub돋움체 Bold" panose="00000800000000000000" pitchFamily="2" charset="-127"/>
+                </a:rPr>
+                <a:t>]</a:t>
+              </a:r>
+            </a:p>
+          </p:txBody>
+        </p:sp>
+        <p:pic>
+          <p:nvPicPr>
+            <p:cNvPr id="10" name="그림 9">
+              <a:extLst>
+                <a:ext uri="{FF2B5EF4-FFF2-40B4-BE49-F238E27FC236}">
+                  <a16:creationId xmlns:a16="http://schemas.microsoft.com/office/drawing/2014/main" id="{EB1E9046-9340-4D3D-AA23-F89851FB0C3F}"/>
+                </a:ext>
+              </a:extLst>
+            </p:cNvPr>
+            <p:cNvPicPr>
+              <a:picLocks noChangeAspect="1"/>
+            </p:cNvPicPr>
+            <p:nvPr/>
+          </p:nvPicPr>
+          <p:blipFill>
+            <a:blip r:embed="rId3"/>
+            <a:stretch>
+              <a:fillRect/>
+            </a:stretch>
+          </p:blipFill>
+          <p:spPr>
+            <a:xfrm>
+              <a:off x="614240" y="271322"/>
+              <a:ext cx="147416" cy="128728"/>
+            </a:xfrm>
+            <a:prstGeom prst="rect">
+              <a:avLst/>
+            </a:prstGeom>
+          </p:spPr>
+        </p:pic>
+        <p:pic>
+          <p:nvPicPr>
+            <p:cNvPr id="29" name="그림 28">
+              <a:extLst>
+                <a:ext uri="{FF2B5EF4-FFF2-40B4-BE49-F238E27FC236}">
+                  <a16:creationId xmlns:a16="http://schemas.microsoft.com/office/drawing/2014/main" id="{799E618A-B635-413C-90D6-9BBB5F48E428}"/>
+                </a:ext>
+              </a:extLst>
+            </p:cNvPr>
+            <p:cNvPicPr>
+              <a:picLocks noChangeAspect="1"/>
+            </p:cNvPicPr>
+            <p:nvPr/>
+          </p:nvPicPr>
+          <p:blipFill>
+            <a:blip r:embed="rId3"/>
+            <a:stretch>
+              <a:fillRect/>
+            </a:stretch>
+          </p:blipFill>
+          <p:spPr>
+            <a:xfrm rot="10800000">
+              <a:off x="2181315" y="257361"/>
+              <a:ext cx="179389" cy="156650"/>
+            </a:xfrm>
+            <a:prstGeom prst="rect">
+              <a:avLst/>
+            </a:prstGeom>
+          </p:spPr>
+        </p:pic>
+        <p:pic>
+          <p:nvPicPr>
+            <p:cNvPr id="30" name="그림 29">
+              <a:extLst>
+                <a:ext uri="{FF2B5EF4-FFF2-40B4-BE49-F238E27FC236}">
+                  <a16:creationId xmlns:a16="http://schemas.microsoft.com/office/drawing/2014/main" id="{FCD9B137-9F07-4052-B76C-36D6AED25D86}"/>
+                </a:ext>
+              </a:extLst>
+            </p:cNvPr>
+            <p:cNvPicPr>
+              <a:picLocks noChangeAspect="1"/>
+            </p:cNvPicPr>
+            <p:nvPr/>
+          </p:nvPicPr>
+          <p:blipFill>
+            <a:blip r:embed="rId3"/>
+            <a:stretch>
+              <a:fillRect/>
+            </a:stretch>
+          </p:blipFill>
+          <p:spPr>
+            <a:xfrm rot="10800000">
+              <a:off x="2197302" y="276730"/>
+              <a:ext cx="147414" cy="128728"/>
+            </a:xfrm>
+            <a:prstGeom prst="rect">
+              <a:avLst/>
+            </a:prstGeom>
+          </p:spPr>
+        </p:pic>
+      </p:grpSp>
+      <p:grpSp>
+        <p:nvGrpSpPr>
+          <p:cNvPr id="12" name="그룹 11">
+            <a:extLst>
+              <a:ext uri="{FF2B5EF4-FFF2-40B4-BE49-F238E27FC236}">
+                <a16:creationId xmlns:a16="http://schemas.microsoft.com/office/drawing/2014/main" id="{6B2D700B-07E0-4E28-A7D2-0F4C62846EE3}"/>
+              </a:ext>
+            </a:extLst>
+          </p:cNvPr>
+          <p:cNvGrpSpPr/>
+          <p:nvPr/>
+        </p:nvGrpSpPr>
+        <p:grpSpPr>
+          <a:xfrm>
+            <a:off x="1488355" y="772187"/>
+            <a:ext cx="1564409" cy="707886"/>
+            <a:chOff x="796295" y="778765"/>
+            <a:chExt cx="1564409" cy="707886"/>
+          </a:xfrm>
+        </p:grpSpPr>
+        <p:sp>
+          <p:nvSpPr>
+            <p:cNvPr id="26" name="TextBox 25">
+              <a:extLst>
+                <a:ext uri="{FF2B5EF4-FFF2-40B4-BE49-F238E27FC236}">
+                  <a16:creationId xmlns:a16="http://schemas.microsoft.com/office/drawing/2014/main" id="{61921C24-9018-417C-966E-E56980F41166}"/>
+                </a:ext>
+              </a:extLst>
+            </p:cNvPr>
+            <p:cNvSpPr txBox="1"/>
+            <p:nvPr/>
+          </p:nvSpPr>
+          <p:spPr>
+            <a:xfrm>
+              <a:off x="1422627" y="778765"/>
+              <a:ext cx="938077" cy="707886"/>
+            </a:xfrm>
+            <a:prstGeom prst="rect">
+              <a:avLst/>
+            </a:prstGeom>
+            <a:noFill/>
+          </p:spPr>
+          <p:txBody>
+            <a:bodyPr wrap="none" rtlCol="0">
+              <a:spAutoFit/>
+            </a:bodyPr>
+            <a:lstStyle/>
+            <a:p>
+              <a:r>
+                <a:rPr lang="en-US" altLang="ko-KR" sz="800" dirty="0">
+                  <a:latin typeface="KoPub돋움체 Light" panose="00000300000000000000" pitchFamily="2" charset="-127"/>
+                  <a:ea typeface="KoPub돋움체 Light" panose="00000300000000000000" pitchFamily="2" charset="-127"/>
+                </a:rPr>
+                <a:t>"</a:t>
+              </a:r>
+              <a:r>
+                <a:rPr lang="ko-KR" altLang="en-US" sz="800" dirty="0">
+                  <a:latin typeface="KoPub돋움체 Light" panose="00000300000000000000" pitchFamily="2" charset="-127"/>
+                  <a:ea typeface="KoPub돋움체 Light" panose="00000300000000000000" pitchFamily="2" charset="-127"/>
+                </a:rPr>
+                <a:t>함께하는 즐거움</a:t>
+              </a:r>
+              <a:r>
+                <a:rPr lang="en-US" altLang="ko-KR" sz="800" dirty="0">
+                  <a:latin typeface="KoPub돋움체 Light" panose="00000300000000000000" pitchFamily="2" charset="-127"/>
+                  <a:ea typeface="KoPub돋움체 Light" panose="00000300000000000000" pitchFamily="2" charset="-127"/>
+                </a:rPr>
+                <a:t>“</a:t>
+              </a:r>
+            </a:p>
+            <a:p>
+              <a:r>
+                <a:rPr lang="en-US" altLang="ko-KR" sz="800" dirty="0">
+                  <a:latin typeface="KoPub돋움체 Light" panose="00000300000000000000" pitchFamily="2" charset="-127"/>
+                  <a:ea typeface="KoPub돋움체 Light" panose="00000300000000000000" pitchFamily="2" charset="-127"/>
+                </a:rPr>
+                <a:t>"</a:t>
+              </a:r>
+              <a:r>
+                <a:rPr lang="ko-KR" altLang="en-US" sz="800" dirty="0">
+                  <a:latin typeface="KoPub돋움체 Light" panose="00000300000000000000" pitchFamily="2" charset="-127"/>
+                  <a:ea typeface="KoPub돋움체 Light" panose="00000300000000000000" pitchFamily="2" charset="-127"/>
+                </a:rPr>
+                <a:t>명확한 약속</a:t>
+              </a:r>
+              <a:r>
+                <a:rPr lang="en-US" altLang="ko-KR" sz="800" dirty="0">
+                  <a:latin typeface="KoPub돋움체 Light" panose="00000300000000000000" pitchFamily="2" charset="-127"/>
+                  <a:ea typeface="KoPub돋움체 Light" panose="00000300000000000000" pitchFamily="2" charset="-127"/>
+                </a:rPr>
+                <a:t>"</a:t>
+              </a:r>
+              <a:endParaRPr lang="ko-KR" altLang="en-US" sz="800" dirty="0">
+                <a:latin typeface="KoPub돋움체 Light" panose="00000300000000000000" pitchFamily="2" charset="-127"/>
+                <a:ea typeface="KoPub돋움체 Light" panose="00000300000000000000" pitchFamily="2" charset="-127"/>
+              </a:endParaRPr>
+            </a:p>
+            <a:p>
+              <a:r>
+                <a:rPr lang="en-US" altLang="ko-KR" sz="800" dirty="0">
+                  <a:latin typeface="KoPub돋움체 Light" panose="00000300000000000000" pitchFamily="2" charset="-127"/>
+                  <a:ea typeface="KoPub돋움체 Light" panose="00000300000000000000" pitchFamily="2" charset="-127"/>
+                </a:rPr>
+                <a:t>"</a:t>
+              </a:r>
+              <a:r>
+                <a:rPr lang="ko-KR" altLang="en-US" sz="800" dirty="0">
+                  <a:latin typeface="KoPub돋움체 Light" panose="00000300000000000000" pitchFamily="2" charset="-127"/>
+                  <a:ea typeface="KoPub돋움체 Light" panose="00000300000000000000" pitchFamily="2" charset="-127"/>
+                </a:rPr>
+                <a:t>한눈에 보는 실무</a:t>
+              </a:r>
+              <a:r>
+                <a:rPr lang="en-US" altLang="ko-KR" sz="800" dirty="0">
+                  <a:latin typeface="KoPub돋움체 Light" panose="00000300000000000000" pitchFamily="2" charset="-127"/>
+                  <a:ea typeface="KoPub돋움체 Light" panose="00000300000000000000" pitchFamily="2" charset="-127"/>
+                </a:rPr>
+                <a:t>"</a:t>
+              </a:r>
+              <a:endParaRPr lang="ko-KR" altLang="en-US" sz="800" dirty="0">
+                <a:latin typeface="KoPub돋움체 Light" panose="00000300000000000000" pitchFamily="2" charset="-127"/>
+                <a:ea typeface="KoPub돋움체 Light" panose="00000300000000000000" pitchFamily="2" charset="-127"/>
+              </a:endParaRPr>
+            </a:p>
+            <a:p>
+              <a:r>
+                <a:rPr lang="en-US" altLang="ko-KR" sz="800" dirty="0">
+                  <a:latin typeface="KoPub돋움체 Light" panose="00000300000000000000" pitchFamily="2" charset="-127"/>
+                  <a:ea typeface="KoPub돋움체 Light" panose="00000300000000000000" pitchFamily="2" charset="-127"/>
+                </a:rPr>
+                <a:t>"</a:t>
+              </a:r>
+              <a:r>
+                <a:rPr lang="ko-KR" altLang="en-US" sz="800" dirty="0">
+                  <a:latin typeface="KoPub돋움체 Light" panose="00000300000000000000" pitchFamily="2" charset="-127"/>
+                  <a:ea typeface="KoPub돋움체 Light" panose="00000300000000000000" pitchFamily="2" charset="-127"/>
+                </a:rPr>
+                <a:t>현장 밀착형 지원</a:t>
+              </a:r>
+              <a:r>
+                <a:rPr lang="en-US" altLang="ko-KR" sz="800" dirty="0">
+                  <a:latin typeface="KoPub돋움체 Light" panose="00000300000000000000" pitchFamily="2" charset="-127"/>
+                  <a:ea typeface="KoPub돋움체 Light" panose="00000300000000000000" pitchFamily="2" charset="-127"/>
+                </a:rPr>
+                <a:t>"</a:t>
+              </a:r>
+              <a:endParaRPr lang="ko-KR" altLang="en-US" sz="800" dirty="0">
+                <a:latin typeface="KoPub돋움체 Light" panose="00000300000000000000" pitchFamily="2" charset="-127"/>
+                <a:ea typeface="KoPub돋움체 Light" panose="00000300000000000000" pitchFamily="2" charset="-127"/>
+              </a:endParaRPr>
+            </a:p>
+            <a:p>
+              <a:r>
+                <a:rPr lang="en-US" altLang="ko-KR" sz="800" dirty="0">
+                  <a:latin typeface="KoPub돋움체 Light" panose="00000300000000000000" pitchFamily="2" charset="-127"/>
+                  <a:ea typeface="KoPub돋움체 Light" panose="00000300000000000000" pitchFamily="2" charset="-127"/>
+                </a:rPr>
+                <a:t>"</a:t>
+              </a:r>
+              <a:r>
+                <a:rPr lang="ko-KR" altLang="en-US" sz="800" dirty="0">
+                  <a:latin typeface="KoPub돋움체 Light" panose="00000300000000000000" pitchFamily="2" charset="-127"/>
+                  <a:ea typeface="KoPub돋움체 Light" panose="00000300000000000000" pitchFamily="2" charset="-127"/>
+                </a:rPr>
+                <a:t>변화의 체감</a:t>
+              </a:r>
+              <a:r>
+                <a:rPr lang="en-US" altLang="ko-KR" sz="800" dirty="0">
+                  <a:latin typeface="KoPub돋움체 Light" panose="00000300000000000000" pitchFamily="2" charset="-127"/>
+                  <a:ea typeface="KoPub돋움체 Light" panose="00000300000000000000" pitchFamily="2" charset="-127"/>
+                </a:rPr>
+                <a:t>"</a:t>
+              </a:r>
+              <a:endParaRPr lang="ko-KR" altLang="en-US" sz="800" dirty="0">
+                <a:latin typeface="KoPub돋움체 Light" panose="00000300000000000000" pitchFamily="2" charset="-127"/>
+                <a:ea typeface="KoPub돋움체 Light" panose="00000300000000000000" pitchFamily="2" charset="-127"/>
+              </a:endParaRPr>
+            </a:p>
+          </p:txBody>
+        </p:sp>
+        <p:sp>
+          <p:nvSpPr>
+            <p:cNvPr id="31" name="TextBox 30">
+              <a:extLst>
+                <a:ext uri="{FF2B5EF4-FFF2-40B4-BE49-F238E27FC236}">
+                  <a16:creationId xmlns:a16="http://schemas.microsoft.com/office/drawing/2014/main" id="{62EAB35A-296C-468C-BCA0-D585048BF4E9}"/>
+                </a:ext>
+              </a:extLst>
+            </p:cNvPr>
+            <p:cNvSpPr txBox="1"/>
+            <p:nvPr/>
+          </p:nvSpPr>
+          <p:spPr>
+            <a:xfrm>
+              <a:off x="796295" y="778765"/>
+              <a:ext cx="753732" cy="707886"/>
+            </a:xfrm>
+            <a:prstGeom prst="rect">
+              <a:avLst/>
+            </a:prstGeom>
+            <a:noFill/>
+          </p:spPr>
+          <p:txBody>
+            <a:bodyPr wrap="none" rtlCol="0">
+              <a:spAutoFit/>
+            </a:bodyPr>
+            <a:lstStyle/>
+            <a:p>
+              <a:pPr marL="88900" indent="-88900">
+                <a:buClr>
+                  <a:srgbClr val="00B0F0"/>
+                </a:buClr>
+                <a:buFont typeface="Arial" panose="020B0604020202020204" pitchFamily="34" charset="0"/>
+                <a:buChar char="•"/>
+              </a:pPr>
+              <a:r>
+                <a:rPr lang="ko-KR" altLang="en-US" sz="800" b="1" dirty="0">
+                  <a:latin typeface="KoPub돋움체 Bold" panose="00000800000000000000" pitchFamily="2" charset="-127"/>
+                  <a:ea typeface="KoPub돋움체 Bold" panose="00000800000000000000" pitchFamily="2" charset="-127"/>
+                </a:rPr>
+                <a:t>소통의 광장</a:t>
+              </a:r>
+              <a:endParaRPr lang="en-US" altLang="ko-KR" sz="800" b="1" dirty="0">
+                <a:latin typeface="KoPub돋움체 Bold" panose="00000800000000000000" pitchFamily="2" charset="-127"/>
+                <a:ea typeface="KoPub돋움체 Bold" panose="00000800000000000000" pitchFamily="2" charset="-127"/>
+              </a:endParaRPr>
+            </a:p>
+            <a:p>
+              <a:pPr marL="88900" indent="-88900">
+                <a:buClr>
+                  <a:srgbClr val="00B0F0"/>
+                </a:buClr>
+                <a:buFont typeface="Arial" panose="020B0604020202020204" pitchFamily="34" charset="0"/>
+                <a:buChar char="•"/>
+              </a:pPr>
+              <a:r>
+                <a:rPr lang="ko-KR" altLang="en-US" sz="800" b="1" dirty="0">
+                  <a:latin typeface="KoPub돋움체 Bold" panose="00000800000000000000" pitchFamily="2" charset="-127"/>
+                  <a:ea typeface="KoPub돋움체 Bold" panose="00000800000000000000" pitchFamily="2" charset="-127"/>
+                </a:rPr>
+                <a:t>업무 기준</a:t>
+              </a:r>
+            </a:p>
+            <a:p>
+              <a:pPr marL="88900" indent="-88900">
+                <a:buClr>
+                  <a:srgbClr val="00B0F0"/>
+                </a:buClr>
+                <a:buFont typeface="Arial" panose="020B0604020202020204" pitchFamily="34" charset="0"/>
+                <a:buChar char="•"/>
+              </a:pPr>
+              <a:r>
+                <a:rPr lang="ko-KR" altLang="en-US" sz="800" b="1" dirty="0">
+                  <a:latin typeface="KoPub돋움체 Bold" panose="00000800000000000000" pitchFamily="2" charset="-127"/>
+                  <a:ea typeface="KoPub돋움체 Bold" panose="00000800000000000000" pitchFamily="2" charset="-127"/>
+                </a:rPr>
+                <a:t>교육자료</a:t>
+              </a:r>
+            </a:p>
+            <a:p>
+              <a:pPr marL="88900" indent="-88900">
+                <a:buClr>
+                  <a:srgbClr val="00B0F0"/>
+                </a:buClr>
+                <a:buFont typeface="Arial" panose="020B0604020202020204" pitchFamily="34" charset="0"/>
+                <a:buChar char="•"/>
+              </a:pPr>
+              <a:r>
+                <a:rPr lang="ko-KR" altLang="en-US" sz="800" b="1" dirty="0">
+                  <a:latin typeface="KoPub돋움체 Bold" panose="00000800000000000000" pitchFamily="2" charset="-127"/>
+                  <a:ea typeface="KoPub돋움체 Bold" panose="00000800000000000000" pitchFamily="2" charset="-127"/>
+                </a:rPr>
+                <a:t>요청</a:t>
+              </a:r>
+            </a:p>
+            <a:p>
+              <a:pPr marL="88900" indent="-88900">
+                <a:buClr>
+                  <a:srgbClr val="00B0F0"/>
+                </a:buClr>
+                <a:buFont typeface="Arial" panose="020B0604020202020204" pitchFamily="34" charset="0"/>
+                <a:buChar char="•"/>
+              </a:pPr>
+              <a:r>
+                <a:rPr lang="ko-KR" altLang="en-US" sz="800" b="1" dirty="0">
+                  <a:latin typeface="KoPub돋움체 Bold" panose="00000800000000000000" pitchFamily="2" charset="-127"/>
+                  <a:ea typeface="KoPub돋움체 Bold" panose="00000800000000000000" pitchFamily="2" charset="-127"/>
+                </a:rPr>
+                <a:t>지표</a:t>
+              </a:r>
+            </a:p>
+          </p:txBody>
+        </p:sp>
+      </p:grpSp>
     </p:spTree>
     <p:extLst>
       <p:ext uri="{BB962C8B-B14F-4D97-AF65-F5344CB8AC3E}">
-        <p14:creationId xmlns:p14="http://schemas.microsoft.com/office/powerpoint/2010/main" val="1442143501"/>
+        <p14:creationId xmlns:p14="http://schemas.microsoft.com/office/powerpoint/2010/main" val="4175183273"/>
       </p:ext>
     </p:extLst>
   </p:cSld>

--- a/documents/명함제작/[2026 우리가치(WeValue) QI 활동 프로젝트 명함1(앞).pptx
+++ b/documents/명함제작/[2026 우리가치(WeValue) QI 활동 프로젝트 명함1(앞).pptx
@@ -233,7 +233,7 @@
           <a:p>
             <a:fld id="{F929F65E-AEE7-45C5-814B-4468CAF1E537}" type="datetimeFigureOut">
               <a:rPr lang="ko-KR" altLang="en-US" smtClean="0"/>
-              <a:t>2026-04-29</a:t>
+              <a:t>2026-05-14</a:t>
             </a:fld>
             <a:endParaRPr lang="ko-KR" altLang="en-US"/>
           </a:p>
@@ -631,7 +631,7 @@
           <a:p>
             <a:fld id="{149F34B4-7175-41BD-B98B-2E7021201D7D}" type="datetimeFigureOut">
               <a:rPr lang="ko-KR" altLang="en-US" smtClean="0"/>
-              <a:t>2026-04-29</a:t>
+              <a:t>2026-05-14</a:t>
             </a:fld>
             <a:endParaRPr lang="ko-KR" altLang="en-US"/>
           </a:p>
@@ -801,7 +801,7 @@
           <a:p>
             <a:fld id="{149F34B4-7175-41BD-B98B-2E7021201D7D}" type="datetimeFigureOut">
               <a:rPr lang="ko-KR" altLang="en-US" smtClean="0"/>
-              <a:t>2026-04-29</a:t>
+              <a:t>2026-05-14</a:t>
             </a:fld>
             <a:endParaRPr lang="ko-KR" altLang="en-US"/>
           </a:p>
@@ -981,7 +981,7 @@
           <a:p>
             <a:fld id="{149F34B4-7175-41BD-B98B-2E7021201D7D}" type="datetimeFigureOut">
               <a:rPr lang="ko-KR" altLang="en-US" smtClean="0"/>
-              <a:t>2026-04-29</a:t>
+              <a:t>2026-05-14</a:t>
             </a:fld>
             <a:endParaRPr lang="ko-KR" altLang="en-US"/>
           </a:p>
@@ -1080,7 +1080,7 @@
             <a:avLst/>
           </a:prstGeom>
           <a:solidFill>
-            <a:schemeClr val="accent5">
+            <a:schemeClr val="accent1">
               <a:lumMod val="75000"/>
             </a:schemeClr>
           </a:solidFill>
@@ -1890,7 +1890,7 @@
           <a:p>
             <a:fld id="{149F34B4-7175-41BD-B98B-2E7021201D7D}" type="datetimeFigureOut">
               <a:rPr lang="ko-KR" altLang="en-US" smtClean="0"/>
-              <a:t>2026-04-29</a:t>
+              <a:t>2026-05-14</a:t>
             </a:fld>
             <a:endParaRPr lang="ko-KR" altLang="en-US"/>
           </a:p>
@@ -2136,7 +2136,7 @@
           <a:p>
             <a:fld id="{149F34B4-7175-41BD-B98B-2E7021201D7D}" type="datetimeFigureOut">
               <a:rPr lang="ko-KR" altLang="en-US" smtClean="0"/>
-              <a:t>2026-04-29</a:t>
+              <a:t>2026-05-14</a:t>
             </a:fld>
             <a:endParaRPr lang="ko-KR" altLang="en-US"/>
           </a:p>
@@ -2368,7 +2368,7 @@
           <a:p>
             <a:fld id="{149F34B4-7175-41BD-B98B-2E7021201D7D}" type="datetimeFigureOut">
               <a:rPr lang="ko-KR" altLang="en-US" smtClean="0"/>
-              <a:t>2026-04-29</a:t>
+              <a:t>2026-05-14</a:t>
             </a:fld>
             <a:endParaRPr lang="ko-KR" altLang="en-US"/>
           </a:p>
@@ -2735,7 +2735,7 @@
           <a:p>
             <a:fld id="{149F34B4-7175-41BD-B98B-2E7021201D7D}" type="datetimeFigureOut">
               <a:rPr lang="ko-KR" altLang="en-US" smtClean="0"/>
-              <a:t>2026-04-29</a:t>
+              <a:t>2026-05-14</a:t>
             </a:fld>
             <a:endParaRPr lang="ko-KR" altLang="en-US"/>
           </a:p>
@@ -2853,7 +2853,7 @@
           <a:p>
             <a:fld id="{149F34B4-7175-41BD-B98B-2E7021201D7D}" type="datetimeFigureOut">
               <a:rPr lang="ko-KR" altLang="en-US" smtClean="0"/>
-              <a:t>2026-04-29</a:t>
+              <a:t>2026-05-14</a:t>
             </a:fld>
             <a:endParaRPr lang="ko-KR" altLang="en-US"/>
           </a:p>
@@ -2948,7 +2948,7 @@
           <a:p>
             <a:fld id="{149F34B4-7175-41BD-B98B-2E7021201D7D}" type="datetimeFigureOut">
               <a:rPr lang="ko-KR" altLang="en-US" smtClean="0"/>
-              <a:t>2026-04-29</a:t>
+              <a:t>2026-05-14</a:t>
             </a:fld>
             <a:endParaRPr lang="ko-KR" altLang="en-US"/>
           </a:p>
@@ -3225,7 +3225,7 @@
           <a:p>
             <a:fld id="{149F34B4-7175-41BD-B98B-2E7021201D7D}" type="datetimeFigureOut">
               <a:rPr lang="ko-KR" altLang="en-US" smtClean="0"/>
-              <a:t>2026-04-29</a:t>
+              <a:t>2026-05-14</a:t>
             </a:fld>
             <a:endParaRPr lang="ko-KR" altLang="en-US"/>
           </a:p>
@@ -3482,7 +3482,7 @@
           <a:p>
             <a:fld id="{149F34B4-7175-41BD-B98B-2E7021201D7D}" type="datetimeFigureOut">
               <a:rPr lang="ko-KR" altLang="en-US" smtClean="0"/>
-              <a:t>2026-04-29</a:t>
+              <a:t>2026-05-14</a:t>
             </a:fld>
             <a:endParaRPr lang="ko-KR" altLang="en-US"/>
           </a:p>
@@ -3695,7 +3695,7 @@
           <a:p>
             <a:fld id="{149F34B4-7175-41BD-B98B-2E7021201D7D}" type="datetimeFigureOut">
               <a:rPr lang="ko-KR" altLang="en-US" smtClean="0"/>
-              <a:t>2026-04-29</a:t>
+              <a:t>2026-05-14</a:t>
             </a:fld>
             <a:endParaRPr lang="ko-KR" altLang="en-US"/>
           </a:p>
@@ -4185,8 +4185,8 @@
         </p:nvGrpSpPr>
         <p:grpSpPr>
           <a:xfrm>
-            <a:off x="589938" y="838920"/>
-            <a:ext cx="634026" cy="568432"/>
+            <a:off x="2050303" y="549443"/>
+            <a:ext cx="854822" cy="766386"/>
             <a:chOff x="777945" y="-736888"/>
             <a:chExt cx="663508" cy="663508"/>
           </a:xfrm>
@@ -4465,9 +4465,9 @@
         <p:grpSpPr>
           <a:xfrm>
             <a:off x="113069" y="274768"/>
-            <a:ext cx="1746464" cy="425416"/>
+            <a:ext cx="1755833" cy="425416"/>
             <a:chOff x="614240" y="226472"/>
-            <a:chExt cx="1746464" cy="425416"/>
+            <a:chExt cx="1755833" cy="425416"/>
           </a:xfrm>
         </p:grpSpPr>
         <p:sp>
@@ -4484,8 +4484,8 @@
           </p:nvSpPr>
           <p:spPr>
             <a:xfrm>
-              <a:off x="685077" y="226472"/>
-              <a:ext cx="1604991" cy="307777"/>
+              <a:off x="646605" y="226472"/>
+              <a:ext cx="1681935" cy="307777"/>
             </a:xfrm>
             <a:prstGeom prst="rect">
               <a:avLst/>
@@ -4500,12 +4500,12 @@
             <a:p>
               <a:pPr algn="ctr"/>
               <a:r>
-                <a:rPr lang="ko-KR" altLang="en-US" sz="1400" dirty="0" err="1">
+                <a:rPr lang="ko-KR" altLang="en-US" sz="1400" b="1" dirty="0" err="1">
                   <a:solidFill>
                     <a:srgbClr val="00B0F0"/>
                   </a:solidFill>
-                  <a:latin typeface="KoPub돋움체 Bold" panose="00000800000000000000" pitchFamily="2" charset="-127"/>
-                  <a:ea typeface="KoPub돋움체 Bold" panose="00000800000000000000" pitchFamily="2" charset="-127"/>
+                  <a:latin typeface="Noto Sans KR Black" panose="020B0200000000000000" pitchFamily="50" charset="-127"/>
+                  <a:ea typeface="Noto Sans KR Black" panose="020B0200000000000000" pitchFamily="50" charset="-127"/>
                 </a:rPr>
                 <a:t>우리가치</a:t>
               </a:r>
@@ -4524,8 +4524,8 @@
               <a:r>
                 <a:rPr lang="en-US" altLang="ko-KR" sz="1400" dirty="0" err="1">
                   <a:solidFill>
-                    <a:schemeClr val="accent1">
-                      <a:lumMod val="50000"/>
+                    <a:schemeClr val="bg2">
+                      <a:lumMod val="10000"/>
                     </a:schemeClr>
                   </a:solidFill>
                   <a:latin typeface="Franklin Gothic Heavy" panose="020B0903020102020204" pitchFamily="34" charset="0"/>
@@ -4535,8 +4535,8 @@
               </a:r>
               <a:endParaRPr lang="en-US" altLang="ko-KR" sz="1400" dirty="0">
                 <a:solidFill>
-                  <a:schemeClr val="accent1">
-                    <a:lumMod val="50000"/>
+                  <a:schemeClr val="bg2">
+                    <a:lumMod val="10000"/>
                   </a:schemeClr>
                 </a:solidFill>
                 <a:latin typeface="Franklin Gothic Heavy" panose="020B0903020102020204" pitchFamily="34" charset="0"/>
@@ -4651,36 +4651,6 @@
         </p:pic>
         <p:pic>
           <p:nvPicPr>
-            <p:cNvPr id="29" name="그림 28">
-              <a:extLst>
-                <a:ext uri="{FF2B5EF4-FFF2-40B4-BE49-F238E27FC236}">
-                  <a16:creationId xmlns:a16="http://schemas.microsoft.com/office/drawing/2014/main" id="{799E618A-B635-413C-90D6-9BBB5F48E428}"/>
-                </a:ext>
-              </a:extLst>
-            </p:cNvPr>
-            <p:cNvPicPr>
-              <a:picLocks noChangeAspect="1"/>
-            </p:cNvPicPr>
-            <p:nvPr/>
-          </p:nvPicPr>
-          <p:blipFill>
-            <a:blip r:embed="rId3"/>
-            <a:stretch>
-              <a:fillRect/>
-            </a:stretch>
-          </p:blipFill>
-          <p:spPr>
-            <a:xfrm rot="10800000">
-              <a:off x="2181315" y="257361"/>
-              <a:ext cx="179389" cy="156650"/>
-            </a:xfrm>
-            <a:prstGeom prst="rect">
-              <a:avLst/>
-            </a:prstGeom>
-          </p:spPr>
-        </p:pic>
-        <p:pic>
-          <p:nvPicPr>
             <p:cNvPr id="30" name="그림 29">
               <a:extLst>
                 <a:ext uri="{FF2B5EF4-FFF2-40B4-BE49-F238E27FC236}">
@@ -4701,7 +4671,7 @@
           </p:blipFill>
           <p:spPr>
             <a:xfrm rot="10800000">
-              <a:off x="2197302" y="276730"/>
+              <a:off x="2222659" y="276730"/>
               <a:ext cx="147414" cy="128728"/>
             </a:xfrm>
             <a:prstGeom prst="rect">
@@ -4724,10 +4694,10 @@
         </p:nvGrpSpPr>
         <p:grpSpPr>
           <a:xfrm>
-            <a:off x="1488355" y="772187"/>
-            <a:ext cx="1564409" cy="707886"/>
+            <a:off x="205429" y="781187"/>
+            <a:ext cx="1731561" cy="784830"/>
             <a:chOff x="796295" y="778765"/>
-            <a:chExt cx="1564409" cy="707886"/>
+            <a:chExt cx="1731561" cy="784830"/>
           </a:xfrm>
         </p:grpSpPr>
         <p:sp>
@@ -4744,8 +4714,8 @@
           </p:nvSpPr>
           <p:spPr>
             <a:xfrm>
-              <a:off x="1422627" y="778765"/>
-              <a:ext cx="938077" cy="707886"/>
+              <a:off x="1495201" y="778765"/>
+              <a:ext cx="1032655" cy="784830"/>
             </a:xfrm>
             <a:prstGeom prst="rect">
               <a:avLst/>
@@ -4759,21 +4729,21 @@
             <a:lstStyle/>
             <a:p>
               <a:r>
-                <a:rPr lang="en-US" altLang="ko-KR" sz="800" dirty="0">
+                <a:rPr lang="en-US" altLang="ko-KR" sz="900" dirty="0">
                   <a:latin typeface="KoPub돋움체 Light" panose="00000300000000000000" pitchFamily="2" charset="-127"/>
                   <a:ea typeface="KoPub돋움체 Light" panose="00000300000000000000" pitchFamily="2" charset="-127"/>
                 </a:rPr>
                 <a:t>"</a:t>
               </a:r>
               <a:r>
-                <a:rPr lang="ko-KR" altLang="en-US" sz="800" dirty="0">
+                <a:rPr lang="ko-KR" altLang="en-US" sz="900" dirty="0">
                   <a:latin typeface="KoPub돋움체 Light" panose="00000300000000000000" pitchFamily="2" charset="-127"/>
                   <a:ea typeface="KoPub돋움체 Light" panose="00000300000000000000" pitchFamily="2" charset="-127"/>
                 </a:rPr>
                 <a:t>함께하는 즐거움</a:t>
               </a:r>
               <a:r>
-                <a:rPr lang="en-US" altLang="ko-KR" sz="800" dirty="0">
+                <a:rPr lang="en-US" altLang="ko-KR" sz="900" dirty="0">
                   <a:latin typeface="KoPub돋움체 Light" panose="00000300000000000000" pitchFamily="2" charset="-127"/>
                   <a:ea typeface="KoPub돋움체 Light" panose="00000300000000000000" pitchFamily="2" charset="-127"/>
                 </a:rPr>
@@ -4782,108 +4752,108 @@
             </a:p>
             <a:p>
               <a:r>
-                <a:rPr lang="en-US" altLang="ko-KR" sz="800" dirty="0">
+                <a:rPr lang="en-US" altLang="ko-KR" sz="900" dirty="0">
                   <a:latin typeface="KoPub돋움체 Light" panose="00000300000000000000" pitchFamily="2" charset="-127"/>
                   <a:ea typeface="KoPub돋움체 Light" panose="00000300000000000000" pitchFamily="2" charset="-127"/>
                 </a:rPr>
                 <a:t>"</a:t>
               </a:r>
               <a:r>
-                <a:rPr lang="ko-KR" altLang="en-US" sz="800" dirty="0">
+                <a:rPr lang="ko-KR" altLang="en-US" sz="900" dirty="0">
                   <a:latin typeface="KoPub돋움체 Light" panose="00000300000000000000" pitchFamily="2" charset="-127"/>
                   <a:ea typeface="KoPub돋움체 Light" panose="00000300000000000000" pitchFamily="2" charset="-127"/>
                 </a:rPr>
                 <a:t>명확한 약속</a:t>
               </a:r>
               <a:r>
-                <a:rPr lang="en-US" altLang="ko-KR" sz="800" dirty="0">
+                <a:rPr lang="en-US" altLang="ko-KR" sz="900" dirty="0">
                   <a:latin typeface="KoPub돋움체 Light" panose="00000300000000000000" pitchFamily="2" charset="-127"/>
                   <a:ea typeface="KoPub돋움체 Light" panose="00000300000000000000" pitchFamily="2" charset="-127"/>
                 </a:rPr>
                 <a:t>"</a:t>
               </a:r>
-              <a:endParaRPr lang="ko-KR" altLang="en-US" sz="800" dirty="0">
+              <a:endParaRPr lang="ko-KR" altLang="en-US" sz="900" dirty="0">
                 <a:latin typeface="KoPub돋움체 Light" panose="00000300000000000000" pitchFamily="2" charset="-127"/>
                 <a:ea typeface="KoPub돋움체 Light" panose="00000300000000000000" pitchFamily="2" charset="-127"/>
               </a:endParaRPr>
             </a:p>
             <a:p>
               <a:r>
-                <a:rPr lang="en-US" altLang="ko-KR" sz="800" dirty="0">
+                <a:rPr lang="en-US" altLang="ko-KR" sz="900" dirty="0">
                   <a:latin typeface="KoPub돋움체 Light" panose="00000300000000000000" pitchFamily="2" charset="-127"/>
                   <a:ea typeface="KoPub돋움체 Light" panose="00000300000000000000" pitchFamily="2" charset="-127"/>
                 </a:rPr>
                 <a:t>"</a:t>
               </a:r>
               <a:r>
-                <a:rPr lang="ko-KR" altLang="en-US" sz="800" dirty="0">
+                <a:rPr lang="ko-KR" altLang="en-US" sz="900" dirty="0">
                   <a:latin typeface="KoPub돋움체 Light" panose="00000300000000000000" pitchFamily="2" charset="-127"/>
                   <a:ea typeface="KoPub돋움체 Light" panose="00000300000000000000" pitchFamily="2" charset="-127"/>
                 </a:rPr>
                 <a:t>한눈에 보는 실무</a:t>
               </a:r>
               <a:r>
-                <a:rPr lang="en-US" altLang="ko-KR" sz="800" dirty="0">
+                <a:rPr lang="en-US" altLang="ko-KR" sz="900" dirty="0">
                   <a:latin typeface="KoPub돋움체 Light" panose="00000300000000000000" pitchFamily="2" charset="-127"/>
                   <a:ea typeface="KoPub돋움체 Light" panose="00000300000000000000" pitchFamily="2" charset="-127"/>
                 </a:rPr>
                 <a:t>"</a:t>
               </a:r>
-              <a:endParaRPr lang="ko-KR" altLang="en-US" sz="800" dirty="0">
+              <a:endParaRPr lang="ko-KR" altLang="en-US" sz="900" dirty="0">
                 <a:latin typeface="KoPub돋움체 Light" panose="00000300000000000000" pitchFamily="2" charset="-127"/>
                 <a:ea typeface="KoPub돋움체 Light" panose="00000300000000000000" pitchFamily="2" charset="-127"/>
               </a:endParaRPr>
             </a:p>
             <a:p>
               <a:r>
-                <a:rPr lang="en-US" altLang="ko-KR" sz="800" dirty="0">
+                <a:rPr lang="en-US" altLang="ko-KR" sz="900" dirty="0">
                   <a:latin typeface="KoPub돋움체 Light" panose="00000300000000000000" pitchFamily="2" charset="-127"/>
                   <a:ea typeface="KoPub돋움체 Light" panose="00000300000000000000" pitchFamily="2" charset="-127"/>
                 </a:rPr>
                 <a:t>"</a:t>
               </a:r>
               <a:r>
-                <a:rPr lang="ko-KR" altLang="en-US" sz="800" dirty="0">
+                <a:rPr lang="ko-KR" altLang="en-US" sz="900" dirty="0">
                   <a:latin typeface="KoPub돋움체 Light" panose="00000300000000000000" pitchFamily="2" charset="-127"/>
                   <a:ea typeface="KoPub돋움체 Light" panose="00000300000000000000" pitchFamily="2" charset="-127"/>
                 </a:rPr>
                 <a:t>현장 밀착형 지원</a:t>
               </a:r>
               <a:r>
-                <a:rPr lang="en-US" altLang="ko-KR" sz="800" dirty="0">
+                <a:rPr lang="en-US" altLang="ko-KR" sz="900" dirty="0">
                   <a:latin typeface="KoPub돋움체 Light" panose="00000300000000000000" pitchFamily="2" charset="-127"/>
                   <a:ea typeface="KoPub돋움체 Light" panose="00000300000000000000" pitchFamily="2" charset="-127"/>
                 </a:rPr>
                 <a:t>"</a:t>
               </a:r>
-              <a:endParaRPr lang="ko-KR" altLang="en-US" sz="800" dirty="0">
+              <a:endParaRPr lang="ko-KR" altLang="en-US" sz="900" dirty="0">
                 <a:latin typeface="KoPub돋움체 Light" panose="00000300000000000000" pitchFamily="2" charset="-127"/>
                 <a:ea typeface="KoPub돋움체 Light" panose="00000300000000000000" pitchFamily="2" charset="-127"/>
               </a:endParaRPr>
             </a:p>
             <a:p>
               <a:r>
-                <a:rPr lang="en-US" altLang="ko-KR" sz="800" dirty="0">
+                <a:rPr lang="en-US" altLang="ko-KR" sz="900" dirty="0">
                   <a:latin typeface="KoPub돋움체 Light" panose="00000300000000000000" pitchFamily="2" charset="-127"/>
                   <a:ea typeface="KoPub돋움체 Light" panose="00000300000000000000" pitchFamily="2" charset="-127"/>
                 </a:rPr>
                 <a:t>"</a:t>
               </a:r>
               <a:r>
-                <a:rPr lang="ko-KR" altLang="en-US" sz="800" dirty="0">
+                <a:rPr lang="ko-KR" altLang="en-US" sz="900" dirty="0">
                   <a:latin typeface="KoPub돋움체 Light" panose="00000300000000000000" pitchFamily="2" charset="-127"/>
                   <a:ea typeface="KoPub돋움체 Light" panose="00000300000000000000" pitchFamily="2" charset="-127"/>
                 </a:rPr>
                 <a:t>변화의 체감</a:t>
               </a:r>
               <a:r>
-                <a:rPr lang="en-US" altLang="ko-KR" sz="800" dirty="0">
+                <a:rPr lang="en-US" altLang="ko-KR" sz="900" dirty="0">
                   <a:latin typeface="KoPub돋움체 Light" panose="00000300000000000000" pitchFamily="2" charset="-127"/>
                   <a:ea typeface="KoPub돋움체 Light" panose="00000300000000000000" pitchFamily="2" charset="-127"/>
                 </a:rPr>
                 <a:t>"</a:t>
               </a:r>
-              <a:endParaRPr lang="ko-KR" altLang="en-US" sz="800" dirty="0">
+              <a:endParaRPr lang="ko-KR" altLang="en-US" sz="900" dirty="0">
                 <a:latin typeface="KoPub돋움체 Light" panose="00000300000000000000" pitchFamily="2" charset="-127"/>
                 <a:ea typeface="KoPub돋움체 Light" panose="00000300000000000000" pitchFamily="2" charset="-127"/>
               </a:endParaRPr>
@@ -4905,7 +4875,7 @@
           <p:spPr>
             <a:xfrm>
               <a:off x="796295" y="778765"/>
-              <a:ext cx="753732" cy="707886"/>
+              <a:ext cx="813043" cy="784830"/>
             </a:xfrm>
             <a:prstGeom prst="rect">
               <a:avLst/>
@@ -4926,13 +4896,13 @@
                 <a:buChar char="•"/>
               </a:pPr>
               <a:r>
-                <a:rPr lang="ko-KR" altLang="en-US" sz="800" b="1" dirty="0">
+                <a:rPr lang="ko-KR" altLang="en-US" sz="900" b="1" dirty="0">
                   <a:latin typeface="KoPub돋움체 Bold" panose="00000800000000000000" pitchFamily="2" charset="-127"/>
                   <a:ea typeface="KoPub돋움체 Bold" panose="00000800000000000000" pitchFamily="2" charset="-127"/>
                 </a:rPr>
                 <a:t>소통의 광장</a:t>
               </a:r>
-              <a:endParaRPr lang="en-US" altLang="ko-KR" sz="800" b="1" dirty="0">
+              <a:endParaRPr lang="en-US" altLang="ko-KR" sz="900" b="1" dirty="0">
                 <a:latin typeface="KoPub돋움체 Bold" panose="00000800000000000000" pitchFamily="2" charset="-127"/>
                 <a:ea typeface="KoPub돋움체 Bold" panose="00000800000000000000" pitchFamily="2" charset="-127"/>
               </a:endParaRPr>
@@ -4946,7 +4916,7 @@
                 <a:buChar char="•"/>
               </a:pPr>
               <a:r>
-                <a:rPr lang="ko-KR" altLang="en-US" sz="800" b="1" dirty="0">
+                <a:rPr lang="ko-KR" altLang="en-US" sz="900" b="1" dirty="0">
                   <a:latin typeface="KoPub돋움체 Bold" panose="00000800000000000000" pitchFamily="2" charset="-127"/>
                   <a:ea typeface="KoPub돋움체 Bold" panose="00000800000000000000" pitchFamily="2" charset="-127"/>
                 </a:rPr>
@@ -4962,7 +4932,7 @@
                 <a:buChar char="•"/>
               </a:pPr>
               <a:r>
-                <a:rPr lang="ko-KR" altLang="en-US" sz="800" b="1" dirty="0">
+                <a:rPr lang="ko-KR" altLang="en-US" sz="900" b="1" dirty="0">
                   <a:latin typeface="KoPub돋움체 Bold" panose="00000800000000000000" pitchFamily="2" charset="-127"/>
                   <a:ea typeface="KoPub돋움체 Bold" panose="00000800000000000000" pitchFamily="2" charset="-127"/>
                 </a:rPr>
@@ -4978,7 +4948,7 @@
                 <a:buChar char="•"/>
               </a:pPr>
               <a:r>
-                <a:rPr lang="ko-KR" altLang="en-US" sz="800" b="1" dirty="0">
+                <a:rPr lang="ko-KR" altLang="en-US" sz="900" b="1" dirty="0">
                   <a:latin typeface="KoPub돋움체 Bold" panose="00000800000000000000" pitchFamily="2" charset="-127"/>
                   <a:ea typeface="KoPub돋움체 Bold" panose="00000800000000000000" pitchFamily="2" charset="-127"/>
                 </a:rPr>
@@ -4994,7 +4964,7 @@
                 <a:buChar char="•"/>
               </a:pPr>
               <a:r>
-                <a:rPr lang="ko-KR" altLang="en-US" sz="800" b="1" dirty="0">
+                <a:rPr lang="ko-KR" altLang="en-US" sz="900" b="1" dirty="0">
                   <a:latin typeface="KoPub돋움체 Bold" panose="00000800000000000000" pitchFamily="2" charset="-127"/>
                   <a:ea typeface="KoPub돋움체 Bold" panose="00000800000000000000" pitchFamily="2" charset="-127"/>
                 </a:rPr>
@@ -5022,7 +4992,13 @@
   <p:cSld>
     <p:spTree>
       <p:nvGrpSpPr>
-        <p:cNvPr id="1" name=""/>
+        <p:cNvPr id="1" name="">
+          <a:extLst>
+            <a:ext uri="{FF2B5EF4-FFF2-40B4-BE49-F238E27FC236}">
+              <a16:creationId xmlns:a16="http://schemas.microsoft.com/office/drawing/2014/main" id="{61FB1853-D86F-AE10-543F-BAABA72B3674}"/>
+            </a:ext>
+          </a:extLst>
+        </p:cNvPr>
         <p:cNvGrpSpPr/>
         <p:nvPr/>
       </p:nvGrpSpPr>
@@ -5039,7 +5015,7 @@
           <p:cNvPr id="3" name="TextBox 2">
             <a:extLst>
               <a:ext uri="{FF2B5EF4-FFF2-40B4-BE49-F238E27FC236}">
-                <a16:creationId xmlns:a16="http://schemas.microsoft.com/office/drawing/2014/main" id="{F5E3E193-F1E8-6947-F01D-A96C1A9F6D0E}"/>
+                <a16:creationId xmlns:a16="http://schemas.microsoft.com/office/drawing/2014/main" id="{26A23A21-E568-0342-3A20-FA8182BCF8D6}"/>
               </a:ext>
             </a:extLst>
           </p:cNvPr>
@@ -5091,7 +5067,7 @@
           <p:cNvPr id="17" name="그룹 16">
             <a:extLst>
               <a:ext uri="{FF2B5EF4-FFF2-40B4-BE49-F238E27FC236}">
-                <a16:creationId xmlns:a16="http://schemas.microsoft.com/office/drawing/2014/main" id="{CCD23336-35E2-7BBF-742C-67D82BDC7617}"/>
+                <a16:creationId xmlns:a16="http://schemas.microsoft.com/office/drawing/2014/main" id="{19217828-C16C-7429-AC1A-2C8AAFD9F0BE}"/>
               </a:ext>
             </a:extLst>
           </p:cNvPr>
@@ -5100,8 +5076,8 @@
         </p:nvGrpSpPr>
         <p:grpSpPr>
           <a:xfrm>
-            <a:off x="589938" y="838920"/>
-            <a:ext cx="634026" cy="568432"/>
+            <a:off x="2050303" y="549443"/>
+            <a:ext cx="854822" cy="766386"/>
             <a:chOff x="777945" y="-736888"/>
             <a:chExt cx="663508" cy="663508"/>
           </a:xfrm>
@@ -5111,7 +5087,7 @@
             <p:cNvPr id="5" name="그림 4" descr="패턴, 사각형, 예술, 직사각형이(가) 표시된 사진&#10;&#10;AI 생성 콘텐츠는 정확하지 않을 수 있습니다.">
               <a:extLst>
                 <a:ext uri="{FF2B5EF4-FFF2-40B4-BE49-F238E27FC236}">
-                  <a16:creationId xmlns:a16="http://schemas.microsoft.com/office/drawing/2014/main" id="{40C63F4C-30AB-6EF2-23BA-1233104A9DC3}"/>
+                  <a16:creationId xmlns:a16="http://schemas.microsoft.com/office/drawing/2014/main" id="{BA461494-ABB8-F5DB-BA43-AD168AB94CE7}"/>
                 </a:ext>
               </a:extLst>
             </p:cNvPr>
@@ -5141,7 +5117,7 @@
             <p:cNvPr id="13" name="L 도형 12">
               <a:extLst>
                 <a:ext uri="{FF2B5EF4-FFF2-40B4-BE49-F238E27FC236}">
-                  <a16:creationId xmlns:a16="http://schemas.microsoft.com/office/drawing/2014/main" id="{B242B433-4D06-F840-EA3E-7FA7766D184C}"/>
+                  <a16:creationId xmlns:a16="http://schemas.microsoft.com/office/drawing/2014/main" id="{F536F961-28D9-0E9B-4EA6-A7858F4C75B2}"/>
                 </a:ext>
               </a:extLst>
             </p:cNvPr>
@@ -5198,7 +5174,7 @@
             <p:cNvPr id="14" name="L 도형 13">
               <a:extLst>
                 <a:ext uri="{FF2B5EF4-FFF2-40B4-BE49-F238E27FC236}">
-                  <a16:creationId xmlns:a16="http://schemas.microsoft.com/office/drawing/2014/main" id="{37DD2CDD-BF9D-CD6A-CC77-30C00DF7A8EA}"/>
+                  <a16:creationId xmlns:a16="http://schemas.microsoft.com/office/drawing/2014/main" id="{976B8771-FC7D-5649-DF68-BB076A834F2A}"/>
                 </a:ext>
               </a:extLst>
             </p:cNvPr>
@@ -5255,7 +5231,7 @@
             <p:cNvPr id="15" name="L 도형 14">
               <a:extLst>
                 <a:ext uri="{FF2B5EF4-FFF2-40B4-BE49-F238E27FC236}">
-                  <a16:creationId xmlns:a16="http://schemas.microsoft.com/office/drawing/2014/main" id="{DD20813D-7C4F-9420-E012-EB09FDC9059E}"/>
+                  <a16:creationId xmlns:a16="http://schemas.microsoft.com/office/drawing/2014/main" id="{11289191-0401-B8EC-355E-FD5A93C57126}"/>
                 </a:ext>
               </a:extLst>
             </p:cNvPr>
@@ -5312,7 +5288,7 @@
             <p:cNvPr id="16" name="L 도형 15">
               <a:extLst>
                 <a:ext uri="{FF2B5EF4-FFF2-40B4-BE49-F238E27FC236}">
-                  <a16:creationId xmlns:a16="http://schemas.microsoft.com/office/drawing/2014/main" id="{C2F58D7B-1E2F-7C1C-29C2-3CBAF321313E}"/>
+                  <a16:creationId xmlns:a16="http://schemas.microsoft.com/office/drawing/2014/main" id="{4A757402-69EE-78AA-363F-5A95E0E396E0}"/>
                 </a:ext>
               </a:extLst>
             </p:cNvPr>
@@ -5370,7 +5346,7 @@
           <p:cNvPr id="18" name="그룹 17">
             <a:extLst>
               <a:ext uri="{FF2B5EF4-FFF2-40B4-BE49-F238E27FC236}">
-                <a16:creationId xmlns:a16="http://schemas.microsoft.com/office/drawing/2014/main" id="{360DDF2E-2289-473B-B5F6-77027118C993}"/>
+                <a16:creationId xmlns:a16="http://schemas.microsoft.com/office/drawing/2014/main" id="{9FC97A71-578A-2057-ADB8-52F77F11B4DD}"/>
               </a:ext>
             </a:extLst>
           </p:cNvPr>
@@ -5380,9 +5356,9 @@
         <p:grpSpPr>
           <a:xfrm>
             <a:off x="113069" y="274768"/>
-            <a:ext cx="1746464" cy="425416"/>
+            <a:ext cx="1755833" cy="425416"/>
             <a:chOff x="614240" y="226472"/>
-            <a:chExt cx="1746464" cy="425416"/>
+            <a:chExt cx="1755833" cy="425416"/>
           </a:xfrm>
         </p:grpSpPr>
         <p:sp>
@@ -5390,7 +5366,7 @@
             <p:cNvPr id="4" name="TextBox 3">
               <a:extLst>
                 <a:ext uri="{FF2B5EF4-FFF2-40B4-BE49-F238E27FC236}">
-                  <a16:creationId xmlns:a16="http://schemas.microsoft.com/office/drawing/2014/main" id="{1F0C02A7-D766-DD14-548E-2AE7955534F4}"/>
+                  <a16:creationId xmlns:a16="http://schemas.microsoft.com/office/drawing/2014/main" id="{92BE50D3-21BE-AB1A-4F05-A3BFEB8126C7}"/>
                 </a:ext>
               </a:extLst>
             </p:cNvPr>
@@ -5399,8 +5375,8 @@
           </p:nvSpPr>
           <p:spPr>
             <a:xfrm>
-              <a:off x="685077" y="226472"/>
-              <a:ext cx="1604991" cy="307777"/>
+              <a:off x="646605" y="226472"/>
+              <a:ext cx="1681935" cy="307777"/>
             </a:xfrm>
             <a:prstGeom prst="rect">
               <a:avLst/>
@@ -5415,12 +5391,12 @@
             <a:p>
               <a:pPr algn="ctr"/>
               <a:r>
-                <a:rPr lang="ko-KR" altLang="en-US" sz="1400" dirty="0" err="1">
+                <a:rPr lang="ko-KR" altLang="en-US" sz="1400" b="1" dirty="0" err="1">
                   <a:solidFill>
                     <a:srgbClr val="00B0F0"/>
                   </a:solidFill>
-                  <a:latin typeface="KoPub돋움체 Bold" panose="00000800000000000000" pitchFamily="2" charset="-127"/>
-                  <a:ea typeface="KoPub돋움체 Bold" panose="00000800000000000000" pitchFamily="2" charset="-127"/>
+                  <a:latin typeface="Noto Sans KR Black" panose="020B0200000000000000" pitchFamily="50" charset="-127"/>
+                  <a:ea typeface="Noto Sans KR Black" panose="020B0200000000000000" pitchFamily="50" charset="-127"/>
                 </a:rPr>
                 <a:t>우리가치</a:t>
               </a:r>
@@ -5439,8 +5415,8 @@
               <a:r>
                 <a:rPr lang="en-US" altLang="ko-KR" sz="1400" dirty="0" err="1">
                   <a:solidFill>
-                    <a:schemeClr val="accent1">
-                      <a:lumMod val="50000"/>
+                    <a:schemeClr val="bg2">
+                      <a:lumMod val="10000"/>
                     </a:schemeClr>
                   </a:solidFill>
                   <a:latin typeface="Franklin Gothic Heavy" panose="020B0903020102020204" pitchFamily="34" charset="0"/>
@@ -5450,8 +5426,8 @@
               </a:r>
               <a:endParaRPr lang="en-US" altLang="ko-KR" sz="1400" dirty="0">
                 <a:solidFill>
-                  <a:schemeClr val="accent1">
-                    <a:lumMod val="50000"/>
+                  <a:schemeClr val="bg2">
+                    <a:lumMod val="10000"/>
                   </a:schemeClr>
                 </a:solidFill>
                 <a:latin typeface="Franklin Gothic Heavy" panose="020B0903020102020204" pitchFamily="34" charset="0"/>
@@ -5465,7 +5441,7 @@
             <p:cNvPr id="6" name="TextBox 5">
               <a:extLst>
                 <a:ext uri="{FF2B5EF4-FFF2-40B4-BE49-F238E27FC236}">
-                  <a16:creationId xmlns:a16="http://schemas.microsoft.com/office/drawing/2014/main" id="{25F3C248-44C4-9D7A-C464-62D68C9890DC}"/>
+                  <a16:creationId xmlns:a16="http://schemas.microsoft.com/office/drawing/2014/main" id="{3A824919-9EC1-560E-A7F8-0280B081097A}"/>
                 </a:ext>
               </a:extLst>
             </p:cNvPr>
@@ -5539,7 +5515,7 @@
             <p:cNvPr id="10" name="그림 9">
               <a:extLst>
                 <a:ext uri="{FF2B5EF4-FFF2-40B4-BE49-F238E27FC236}">
-                  <a16:creationId xmlns:a16="http://schemas.microsoft.com/office/drawing/2014/main" id="{EB1E9046-9340-4D3D-AA23-F89851FB0C3F}"/>
+                  <a16:creationId xmlns:a16="http://schemas.microsoft.com/office/drawing/2014/main" id="{068AAB0D-7BD0-E425-9368-9A2068744F2C}"/>
                 </a:ext>
               </a:extLst>
             </p:cNvPr>
@@ -5566,10 +5542,10 @@
         </p:pic>
         <p:pic>
           <p:nvPicPr>
-            <p:cNvPr id="29" name="그림 28">
+            <p:cNvPr id="30" name="그림 29">
               <a:extLst>
                 <a:ext uri="{FF2B5EF4-FFF2-40B4-BE49-F238E27FC236}">
-                  <a16:creationId xmlns:a16="http://schemas.microsoft.com/office/drawing/2014/main" id="{799E618A-B635-413C-90D6-9BBB5F48E428}"/>
+                  <a16:creationId xmlns:a16="http://schemas.microsoft.com/office/drawing/2014/main" id="{10CB1D78-7715-1EE6-6680-17E5EC69EC1A}"/>
                 </a:ext>
               </a:extLst>
             </p:cNvPr>
@@ -5586,37 +5562,7 @@
           </p:blipFill>
           <p:spPr>
             <a:xfrm rot="10800000">
-              <a:off x="2181315" y="257361"/>
-              <a:ext cx="179389" cy="156650"/>
-            </a:xfrm>
-            <a:prstGeom prst="rect">
-              <a:avLst/>
-            </a:prstGeom>
-          </p:spPr>
-        </p:pic>
-        <p:pic>
-          <p:nvPicPr>
-            <p:cNvPr id="30" name="그림 29">
-              <a:extLst>
-                <a:ext uri="{FF2B5EF4-FFF2-40B4-BE49-F238E27FC236}">
-                  <a16:creationId xmlns:a16="http://schemas.microsoft.com/office/drawing/2014/main" id="{FCD9B137-9F07-4052-B76C-36D6AED25D86}"/>
-                </a:ext>
-              </a:extLst>
-            </p:cNvPr>
-            <p:cNvPicPr>
-              <a:picLocks noChangeAspect="1"/>
-            </p:cNvPicPr>
-            <p:nvPr/>
-          </p:nvPicPr>
-          <p:blipFill>
-            <a:blip r:embed="rId3"/>
-            <a:stretch>
-              <a:fillRect/>
-            </a:stretch>
-          </p:blipFill>
-          <p:spPr>
-            <a:xfrm rot="10800000">
-              <a:off x="2197302" y="276730"/>
+              <a:off x="2222659" y="276730"/>
               <a:ext cx="147414" cy="128728"/>
             </a:xfrm>
             <a:prstGeom prst="rect">
@@ -5630,7 +5576,7 @@
           <p:cNvPr id="12" name="그룹 11">
             <a:extLst>
               <a:ext uri="{FF2B5EF4-FFF2-40B4-BE49-F238E27FC236}">
-                <a16:creationId xmlns:a16="http://schemas.microsoft.com/office/drawing/2014/main" id="{6B2D700B-07E0-4E28-A7D2-0F4C62846EE3}"/>
+                <a16:creationId xmlns:a16="http://schemas.microsoft.com/office/drawing/2014/main" id="{B7F2EA6B-BAA9-8379-0FD3-123EB46A73D7}"/>
               </a:ext>
             </a:extLst>
           </p:cNvPr>
@@ -5639,10 +5585,10 @@
         </p:nvGrpSpPr>
         <p:grpSpPr>
           <a:xfrm>
-            <a:off x="1488355" y="772187"/>
-            <a:ext cx="1564409" cy="707886"/>
+            <a:off x="205429" y="781187"/>
+            <a:ext cx="1731561" cy="784830"/>
             <a:chOff x="796295" y="778765"/>
-            <a:chExt cx="1564409" cy="707886"/>
+            <a:chExt cx="1731561" cy="784830"/>
           </a:xfrm>
         </p:grpSpPr>
         <p:sp>
@@ -5650,7 +5596,7 @@
             <p:cNvPr id="26" name="TextBox 25">
               <a:extLst>
                 <a:ext uri="{FF2B5EF4-FFF2-40B4-BE49-F238E27FC236}">
-                  <a16:creationId xmlns:a16="http://schemas.microsoft.com/office/drawing/2014/main" id="{61921C24-9018-417C-966E-E56980F41166}"/>
+                  <a16:creationId xmlns:a16="http://schemas.microsoft.com/office/drawing/2014/main" id="{40E844D0-1902-E7CC-6AAD-D7774E0E783E}"/>
                 </a:ext>
               </a:extLst>
             </p:cNvPr>
@@ -5659,8 +5605,8 @@
           </p:nvSpPr>
           <p:spPr>
             <a:xfrm>
-              <a:off x="1422627" y="778765"/>
-              <a:ext cx="938077" cy="707886"/>
+              <a:off x="1495201" y="778765"/>
+              <a:ext cx="1032655" cy="784830"/>
             </a:xfrm>
             <a:prstGeom prst="rect">
               <a:avLst/>
@@ -5674,21 +5620,21 @@
             <a:lstStyle/>
             <a:p>
               <a:r>
-                <a:rPr lang="en-US" altLang="ko-KR" sz="800" dirty="0">
+                <a:rPr lang="en-US" altLang="ko-KR" sz="900" dirty="0">
                   <a:latin typeface="KoPub돋움체 Light" panose="00000300000000000000" pitchFamily="2" charset="-127"/>
                   <a:ea typeface="KoPub돋움체 Light" panose="00000300000000000000" pitchFamily="2" charset="-127"/>
                 </a:rPr>
                 <a:t>"</a:t>
               </a:r>
               <a:r>
-                <a:rPr lang="ko-KR" altLang="en-US" sz="800" dirty="0">
+                <a:rPr lang="ko-KR" altLang="en-US" sz="900" dirty="0">
                   <a:latin typeface="KoPub돋움체 Light" panose="00000300000000000000" pitchFamily="2" charset="-127"/>
                   <a:ea typeface="KoPub돋움체 Light" panose="00000300000000000000" pitchFamily="2" charset="-127"/>
                 </a:rPr>
                 <a:t>함께하는 즐거움</a:t>
               </a:r>
               <a:r>
-                <a:rPr lang="en-US" altLang="ko-KR" sz="800" dirty="0">
+                <a:rPr lang="en-US" altLang="ko-KR" sz="900" dirty="0">
                   <a:latin typeface="KoPub돋움체 Light" panose="00000300000000000000" pitchFamily="2" charset="-127"/>
                   <a:ea typeface="KoPub돋움체 Light" panose="00000300000000000000" pitchFamily="2" charset="-127"/>
                 </a:rPr>
@@ -5697,108 +5643,108 @@
             </a:p>
             <a:p>
               <a:r>
-                <a:rPr lang="en-US" altLang="ko-KR" sz="800" dirty="0">
+                <a:rPr lang="en-US" altLang="ko-KR" sz="900" dirty="0">
                   <a:latin typeface="KoPub돋움체 Light" panose="00000300000000000000" pitchFamily="2" charset="-127"/>
                   <a:ea typeface="KoPub돋움체 Light" panose="00000300000000000000" pitchFamily="2" charset="-127"/>
                 </a:rPr>
                 <a:t>"</a:t>
               </a:r>
               <a:r>
-                <a:rPr lang="ko-KR" altLang="en-US" sz="800" dirty="0">
+                <a:rPr lang="ko-KR" altLang="en-US" sz="900" dirty="0">
                   <a:latin typeface="KoPub돋움체 Light" panose="00000300000000000000" pitchFamily="2" charset="-127"/>
                   <a:ea typeface="KoPub돋움체 Light" panose="00000300000000000000" pitchFamily="2" charset="-127"/>
                 </a:rPr>
                 <a:t>명확한 약속</a:t>
               </a:r>
               <a:r>
-                <a:rPr lang="en-US" altLang="ko-KR" sz="800" dirty="0">
+                <a:rPr lang="en-US" altLang="ko-KR" sz="900" dirty="0">
                   <a:latin typeface="KoPub돋움체 Light" panose="00000300000000000000" pitchFamily="2" charset="-127"/>
                   <a:ea typeface="KoPub돋움체 Light" panose="00000300000000000000" pitchFamily="2" charset="-127"/>
                 </a:rPr>
                 <a:t>"</a:t>
               </a:r>
-              <a:endParaRPr lang="ko-KR" altLang="en-US" sz="800" dirty="0">
+              <a:endParaRPr lang="ko-KR" altLang="en-US" sz="900" dirty="0">
                 <a:latin typeface="KoPub돋움체 Light" panose="00000300000000000000" pitchFamily="2" charset="-127"/>
                 <a:ea typeface="KoPub돋움체 Light" panose="00000300000000000000" pitchFamily="2" charset="-127"/>
               </a:endParaRPr>
             </a:p>
             <a:p>
               <a:r>
-                <a:rPr lang="en-US" altLang="ko-KR" sz="800" dirty="0">
+                <a:rPr lang="en-US" altLang="ko-KR" sz="900" dirty="0">
                   <a:latin typeface="KoPub돋움체 Light" panose="00000300000000000000" pitchFamily="2" charset="-127"/>
                   <a:ea typeface="KoPub돋움체 Light" panose="00000300000000000000" pitchFamily="2" charset="-127"/>
                 </a:rPr>
                 <a:t>"</a:t>
               </a:r>
               <a:r>
-                <a:rPr lang="ko-KR" altLang="en-US" sz="800" dirty="0">
+                <a:rPr lang="ko-KR" altLang="en-US" sz="900" dirty="0">
                   <a:latin typeface="KoPub돋움체 Light" panose="00000300000000000000" pitchFamily="2" charset="-127"/>
                   <a:ea typeface="KoPub돋움체 Light" panose="00000300000000000000" pitchFamily="2" charset="-127"/>
                 </a:rPr>
                 <a:t>한눈에 보는 실무</a:t>
               </a:r>
               <a:r>
-                <a:rPr lang="en-US" altLang="ko-KR" sz="800" dirty="0">
+                <a:rPr lang="en-US" altLang="ko-KR" sz="900" dirty="0">
                   <a:latin typeface="KoPub돋움체 Light" panose="00000300000000000000" pitchFamily="2" charset="-127"/>
                   <a:ea typeface="KoPub돋움체 Light" panose="00000300000000000000" pitchFamily="2" charset="-127"/>
                 </a:rPr>
                 <a:t>"</a:t>
               </a:r>
-              <a:endParaRPr lang="ko-KR" altLang="en-US" sz="800" dirty="0">
+              <a:endParaRPr lang="ko-KR" altLang="en-US" sz="900" dirty="0">
                 <a:latin typeface="KoPub돋움체 Light" panose="00000300000000000000" pitchFamily="2" charset="-127"/>
                 <a:ea typeface="KoPub돋움체 Light" panose="00000300000000000000" pitchFamily="2" charset="-127"/>
               </a:endParaRPr>
             </a:p>
             <a:p>
               <a:r>
-                <a:rPr lang="en-US" altLang="ko-KR" sz="800" dirty="0">
+                <a:rPr lang="en-US" altLang="ko-KR" sz="900" dirty="0">
                   <a:latin typeface="KoPub돋움체 Light" panose="00000300000000000000" pitchFamily="2" charset="-127"/>
                   <a:ea typeface="KoPub돋움체 Light" panose="00000300000000000000" pitchFamily="2" charset="-127"/>
                 </a:rPr>
                 <a:t>"</a:t>
               </a:r>
               <a:r>
-                <a:rPr lang="ko-KR" altLang="en-US" sz="800" dirty="0">
+                <a:rPr lang="ko-KR" altLang="en-US" sz="900" dirty="0">
                   <a:latin typeface="KoPub돋움체 Light" panose="00000300000000000000" pitchFamily="2" charset="-127"/>
                   <a:ea typeface="KoPub돋움체 Light" panose="00000300000000000000" pitchFamily="2" charset="-127"/>
                 </a:rPr>
                 <a:t>현장 밀착형 지원</a:t>
               </a:r>
               <a:r>
-                <a:rPr lang="en-US" altLang="ko-KR" sz="800" dirty="0">
+                <a:rPr lang="en-US" altLang="ko-KR" sz="900" dirty="0">
                   <a:latin typeface="KoPub돋움체 Light" panose="00000300000000000000" pitchFamily="2" charset="-127"/>
                   <a:ea typeface="KoPub돋움체 Light" panose="00000300000000000000" pitchFamily="2" charset="-127"/>
                 </a:rPr>
                 <a:t>"</a:t>
               </a:r>
-              <a:endParaRPr lang="ko-KR" altLang="en-US" sz="800" dirty="0">
+              <a:endParaRPr lang="ko-KR" altLang="en-US" sz="900" dirty="0">
                 <a:latin typeface="KoPub돋움체 Light" panose="00000300000000000000" pitchFamily="2" charset="-127"/>
                 <a:ea typeface="KoPub돋움체 Light" panose="00000300000000000000" pitchFamily="2" charset="-127"/>
               </a:endParaRPr>
             </a:p>
             <a:p>
               <a:r>
-                <a:rPr lang="en-US" altLang="ko-KR" sz="800" dirty="0">
+                <a:rPr lang="en-US" altLang="ko-KR" sz="900" dirty="0">
                   <a:latin typeface="KoPub돋움체 Light" panose="00000300000000000000" pitchFamily="2" charset="-127"/>
                   <a:ea typeface="KoPub돋움체 Light" panose="00000300000000000000" pitchFamily="2" charset="-127"/>
                 </a:rPr>
                 <a:t>"</a:t>
               </a:r>
               <a:r>
-                <a:rPr lang="ko-KR" altLang="en-US" sz="800" dirty="0">
+                <a:rPr lang="ko-KR" altLang="en-US" sz="900" dirty="0">
                   <a:latin typeface="KoPub돋움체 Light" panose="00000300000000000000" pitchFamily="2" charset="-127"/>
                   <a:ea typeface="KoPub돋움체 Light" panose="00000300000000000000" pitchFamily="2" charset="-127"/>
                 </a:rPr>
                 <a:t>변화의 체감</a:t>
               </a:r>
               <a:r>
-                <a:rPr lang="en-US" altLang="ko-KR" sz="800" dirty="0">
+                <a:rPr lang="en-US" altLang="ko-KR" sz="900" dirty="0">
                   <a:latin typeface="KoPub돋움체 Light" panose="00000300000000000000" pitchFamily="2" charset="-127"/>
                   <a:ea typeface="KoPub돋움체 Light" panose="00000300000000000000" pitchFamily="2" charset="-127"/>
                 </a:rPr>
                 <a:t>"</a:t>
               </a:r>
-              <a:endParaRPr lang="ko-KR" altLang="en-US" sz="800" dirty="0">
+              <a:endParaRPr lang="ko-KR" altLang="en-US" sz="900" dirty="0">
                 <a:latin typeface="KoPub돋움체 Light" panose="00000300000000000000" pitchFamily="2" charset="-127"/>
                 <a:ea typeface="KoPub돋움체 Light" panose="00000300000000000000" pitchFamily="2" charset="-127"/>
               </a:endParaRPr>
@@ -5810,7 +5756,7 @@
             <p:cNvPr id="31" name="TextBox 30">
               <a:extLst>
                 <a:ext uri="{FF2B5EF4-FFF2-40B4-BE49-F238E27FC236}">
-                  <a16:creationId xmlns:a16="http://schemas.microsoft.com/office/drawing/2014/main" id="{62EAB35A-296C-468C-BCA0-D585048BF4E9}"/>
+                  <a16:creationId xmlns:a16="http://schemas.microsoft.com/office/drawing/2014/main" id="{9914B991-3807-A5A2-B334-DDB3A749557D}"/>
                 </a:ext>
               </a:extLst>
             </p:cNvPr>
@@ -5820,7 +5766,7 @@
           <p:spPr>
             <a:xfrm>
               <a:off x="796295" y="778765"/>
-              <a:ext cx="753732" cy="707886"/>
+              <a:ext cx="813043" cy="784830"/>
             </a:xfrm>
             <a:prstGeom prst="rect">
               <a:avLst/>
@@ -5841,13 +5787,13 @@
                 <a:buChar char="•"/>
               </a:pPr>
               <a:r>
-                <a:rPr lang="ko-KR" altLang="en-US" sz="800" b="1" dirty="0">
+                <a:rPr lang="ko-KR" altLang="en-US" sz="900" b="1" dirty="0">
                   <a:latin typeface="KoPub돋움체 Bold" panose="00000800000000000000" pitchFamily="2" charset="-127"/>
                   <a:ea typeface="KoPub돋움체 Bold" panose="00000800000000000000" pitchFamily="2" charset="-127"/>
                 </a:rPr>
                 <a:t>소통의 광장</a:t>
               </a:r>
-              <a:endParaRPr lang="en-US" altLang="ko-KR" sz="800" b="1" dirty="0">
+              <a:endParaRPr lang="en-US" altLang="ko-KR" sz="900" b="1" dirty="0">
                 <a:latin typeface="KoPub돋움체 Bold" panose="00000800000000000000" pitchFamily="2" charset="-127"/>
                 <a:ea typeface="KoPub돋움체 Bold" panose="00000800000000000000" pitchFamily="2" charset="-127"/>
               </a:endParaRPr>
@@ -5861,7 +5807,7 @@
                 <a:buChar char="•"/>
               </a:pPr>
               <a:r>
-                <a:rPr lang="ko-KR" altLang="en-US" sz="800" b="1" dirty="0">
+                <a:rPr lang="ko-KR" altLang="en-US" sz="900" b="1" dirty="0">
                   <a:latin typeface="KoPub돋움체 Bold" panose="00000800000000000000" pitchFamily="2" charset="-127"/>
                   <a:ea typeface="KoPub돋움체 Bold" panose="00000800000000000000" pitchFamily="2" charset="-127"/>
                 </a:rPr>
@@ -5877,7 +5823,7 @@
                 <a:buChar char="•"/>
               </a:pPr>
               <a:r>
-                <a:rPr lang="ko-KR" altLang="en-US" sz="800" b="1" dirty="0">
+                <a:rPr lang="ko-KR" altLang="en-US" sz="900" b="1" dirty="0">
                   <a:latin typeface="KoPub돋움체 Bold" panose="00000800000000000000" pitchFamily="2" charset="-127"/>
                   <a:ea typeface="KoPub돋움체 Bold" panose="00000800000000000000" pitchFamily="2" charset="-127"/>
                 </a:rPr>
@@ -5893,7 +5839,7 @@
                 <a:buChar char="•"/>
               </a:pPr>
               <a:r>
-                <a:rPr lang="ko-KR" altLang="en-US" sz="800" b="1" dirty="0">
+                <a:rPr lang="ko-KR" altLang="en-US" sz="900" b="1" dirty="0">
                   <a:latin typeface="KoPub돋움체 Bold" panose="00000800000000000000" pitchFamily="2" charset="-127"/>
                   <a:ea typeface="KoPub돋움체 Bold" panose="00000800000000000000" pitchFamily="2" charset="-127"/>
                 </a:rPr>
@@ -5909,7 +5855,7 @@
                 <a:buChar char="•"/>
               </a:pPr>
               <a:r>
-                <a:rPr lang="ko-KR" altLang="en-US" sz="800" b="1" dirty="0">
+                <a:rPr lang="ko-KR" altLang="en-US" sz="900" b="1" dirty="0">
                   <a:latin typeface="KoPub돋움체 Bold" panose="00000800000000000000" pitchFamily="2" charset="-127"/>
                   <a:ea typeface="KoPub돋움체 Bold" panose="00000800000000000000" pitchFamily="2" charset="-127"/>
                 </a:rPr>
@@ -5922,7 +5868,7 @@
     </p:spTree>
     <p:extLst>
       <p:ext uri="{BB962C8B-B14F-4D97-AF65-F5344CB8AC3E}">
-        <p14:creationId xmlns:p14="http://schemas.microsoft.com/office/powerpoint/2010/main" val="2768433760"/>
+        <p14:creationId xmlns:p14="http://schemas.microsoft.com/office/powerpoint/2010/main" val="1299290329"/>
       </p:ext>
     </p:extLst>
   </p:cSld>
@@ -5937,7 +5883,13 @@
   <p:cSld>
     <p:spTree>
       <p:nvGrpSpPr>
-        <p:cNvPr id="1" name=""/>
+        <p:cNvPr id="1" name="">
+          <a:extLst>
+            <a:ext uri="{FF2B5EF4-FFF2-40B4-BE49-F238E27FC236}">
+              <a16:creationId xmlns:a16="http://schemas.microsoft.com/office/drawing/2014/main" id="{D0BC4CB3-D484-55AD-2D47-C7731F6E7B86}"/>
+            </a:ext>
+          </a:extLst>
+        </p:cNvPr>
         <p:cNvGrpSpPr/>
         <p:nvPr/>
       </p:nvGrpSpPr>
@@ -5954,7 +5906,7 @@
           <p:cNvPr id="3" name="TextBox 2">
             <a:extLst>
               <a:ext uri="{FF2B5EF4-FFF2-40B4-BE49-F238E27FC236}">
-                <a16:creationId xmlns:a16="http://schemas.microsoft.com/office/drawing/2014/main" id="{F5E3E193-F1E8-6947-F01D-A96C1A9F6D0E}"/>
+                <a16:creationId xmlns:a16="http://schemas.microsoft.com/office/drawing/2014/main" id="{9C712F7A-4500-BD7B-AD47-DBD71D7E4C0F}"/>
               </a:ext>
             </a:extLst>
           </p:cNvPr>
@@ -6006,7 +5958,7 @@
           <p:cNvPr id="17" name="그룹 16">
             <a:extLst>
               <a:ext uri="{FF2B5EF4-FFF2-40B4-BE49-F238E27FC236}">
-                <a16:creationId xmlns:a16="http://schemas.microsoft.com/office/drawing/2014/main" id="{CCD23336-35E2-7BBF-742C-67D82BDC7617}"/>
+                <a16:creationId xmlns:a16="http://schemas.microsoft.com/office/drawing/2014/main" id="{B324A43C-5A16-3C83-6CC6-731138303B15}"/>
               </a:ext>
             </a:extLst>
           </p:cNvPr>
@@ -6015,8 +5967,8 @@
         </p:nvGrpSpPr>
         <p:grpSpPr>
           <a:xfrm>
-            <a:off x="589938" y="838920"/>
-            <a:ext cx="634026" cy="568432"/>
+            <a:off x="2050303" y="549443"/>
+            <a:ext cx="854822" cy="766386"/>
             <a:chOff x="777945" y="-736888"/>
             <a:chExt cx="663508" cy="663508"/>
           </a:xfrm>
@@ -6026,7 +5978,7 @@
             <p:cNvPr id="5" name="그림 4" descr="패턴, 사각형, 예술, 직사각형이(가) 표시된 사진&#10;&#10;AI 생성 콘텐츠는 정확하지 않을 수 있습니다.">
               <a:extLst>
                 <a:ext uri="{FF2B5EF4-FFF2-40B4-BE49-F238E27FC236}">
-                  <a16:creationId xmlns:a16="http://schemas.microsoft.com/office/drawing/2014/main" id="{40C63F4C-30AB-6EF2-23BA-1233104A9DC3}"/>
+                  <a16:creationId xmlns:a16="http://schemas.microsoft.com/office/drawing/2014/main" id="{01AFEF5B-0E09-5DEE-D44E-F299334AB277}"/>
                 </a:ext>
               </a:extLst>
             </p:cNvPr>
@@ -6056,7 +6008,7 @@
             <p:cNvPr id="13" name="L 도형 12">
               <a:extLst>
                 <a:ext uri="{FF2B5EF4-FFF2-40B4-BE49-F238E27FC236}">
-                  <a16:creationId xmlns:a16="http://schemas.microsoft.com/office/drawing/2014/main" id="{B242B433-4D06-F840-EA3E-7FA7766D184C}"/>
+                  <a16:creationId xmlns:a16="http://schemas.microsoft.com/office/drawing/2014/main" id="{6E223C1A-B58A-ADF6-4BAB-B1C335BF35E1}"/>
                 </a:ext>
               </a:extLst>
             </p:cNvPr>
@@ -6113,7 +6065,7 @@
             <p:cNvPr id="14" name="L 도형 13">
               <a:extLst>
                 <a:ext uri="{FF2B5EF4-FFF2-40B4-BE49-F238E27FC236}">
-                  <a16:creationId xmlns:a16="http://schemas.microsoft.com/office/drawing/2014/main" id="{37DD2CDD-BF9D-CD6A-CC77-30C00DF7A8EA}"/>
+                  <a16:creationId xmlns:a16="http://schemas.microsoft.com/office/drawing/2014/main" id="{5BFC87D6-5AB1-D6FD-3102-1403635A1605}"/>
                 </a:ext>
               </a:extLst>
             </p:cNvPr>
@@ -6170,7 +6122,7 @@
             <p:cNvPr id="15" name="L 도형 14">
               <a:extLst>
                 <a:ext uri="{FF2B5EF4-FFF2-40B4-BE49-F238E27FC236}">
-                  <a16:creationId xmlns:a16="http://schemas.microsoft.com/office/drawing/2014/main" id="{DD20813D-7C4F-9420-E012-EB09FDC9059E}"/>
+                  <a16:creationId xmlns:a16="http://schemas.microsoft.com/office/drawing/2014/main" id="{27EB9129-FF30-6798-5018-047599149146}"/>
                 </a:ext>
               </a:extLst>
             </p:cNvPr>
@@ -6227,7 +6179,7 @@
             <p:cNvPr id="16" name="L 도형 15">
               <a:extLst>
                 <a:ext uri="{FF2B5EF4-FFF2-40B4-BE49-F238E27FC236}">
-                  <a16:creationId xmlns:a16="http://schemas.microsoft.com/office/drawing/2014/main" id="{C2F58D7B-1E2F-7C1C-29C2-3CBAF321313E}"/>
+                  <a16:creationId xmlns:a16="http://schemas.microsoft.com/office/drawing/2014/main" id="{427F43E1-A221-4034-D075-2A7106A33686}"/>
                 </a:ext>
               </a:extLst>
             </p:cNvPr>
@@ -6285,7 +6237,7 @@
           <p:cNvPr id="18" name="그룹 17">
             <a:extLst>
               <a:ext uri="{FF2B5EF4-FFF2-40B4-BE49-F238E27FC236}">
-                <a16:creationId xmlns:a16="http://schemas.microsoft.com/office/drawing/2014/main" id="{360DDF2E-2289-473B-B5F6-77027118C993}"/>
+                <a16:creationId xmlns:a16="http://schemas.microsoft.com/office/drawing/2014/main" id="{E9950BAF-BFB0-A528-BEAF-D107987A505F}"/>
               </a:ext>
             </a:extLst>
           </p:cNvPr>
@@ -6295,9 +6247,9 @@
         <p:grpSpPr>
           <a:xfrm>
             <a:off x="113069" y="274768"/>
-            <a:ext cx="1746464" cy="425416"/>
+            <a:ext cx="1755833" cy="425416"/>
             <a:chOff x="614240" y="226472"/>
-            <a:chExt cx="1746464" cy="425416"/>
+            <a:chExt cx="1755833" cy="425416"/>
           </a:xfrm>
         </p:grpSpPr>
         <p:sp>
@@ -6305,7 +6257,7 @@
             <p:cNvPr id="4" name="TextBox 3">
               <a:extLst>
                 <a:ext uri="{FF2B5EF4-FFF2-40B4-BE49-F238E27FC236}">
-                  <a16:creationId xmlns:a16="http://schemas.microsoft.com/office/drawing/2014/main" id="{1F0C02A7-D766-DD14-548E-2AE7955534F4}"/>
+                  <a16:creationId xmlns:a16="http://schemas.microsoft.com/office/drawing/2014/main" id="{ABFCD9E6-ACFA-0E1D-9750-CA2D46B36CBA}"/>
                 </a:ext>
               </a:extLst>
             </p:cNvPr>
@@ -6314,8 +6266,8 @@
           </p:nvSpPr>
           <p:spPr>
             <a:xfrm>
-              <a:off x="685077" y="226472"/>
-              <a:ext cx="1604991" cy="307777"/>
+              <a:off x="646605" y="226472"/>
+              <a:ext cx="1681935" cy="307777"/>
             </a:xfrm>
             <a:prstGeom prst="rect">
               <a:avLst/>
@@ -6330,12 +6282,12 @@
             <a:p>
               <a:pPr algn="ctr"/>
               <a:r>
-                <a:rPr lang="ko-KR" altLang="en-US" sz="1400" dirty="0" err="1">
+                <a:rPr lang="ko-KR" altLang="en-US" sz="1400" b="1" dirty="0" err="1">
                   <a:solidFill>
                     <a:srgbClr val="00B0F0"/>
                   </a:solidFill>
-                  <a:latin typeface="KoPub돋움체 Bold" panose="00000800000000000000" pitchFamily="2" charset="-127"/>
-                  <a:ea typeface="KoPub돋움체 Bold" panose="00000800000000000000" pitchFamily="2" charset="-127"/>
+                  <a:latin typeface="Noto Sans KR Black" panose="020B0200000000000000" pitchFamily="50" charset="-127"/>
+                  <a:ea typeface="Noto Sans KR Black" panose="020B0200000000000000" pitchFamily="50" charset="-127"/>
                 </a:rPr>
                 <a:t>우리가치</a:t>
               </a:r>
@@ -6354,8 +6306,8 @@
               <a:r>
                 <a:rPr lang="en-US" altLang="ko-KR" sz="1400" dirty="0" err="1">
                   <a:solidFill>
-                    <a:schemeClr val="accent1">
-                      <a:lumMod val="50000"/>
+                    <a:schemeClr val="bg2">
+                      <a:lumMod val="10000"/>
                     </a:schemeClr>
                   </a:solidFill>
                   <a:latin typeface="Franklin Gothic Heavy" panose="020B0903020102020204" pitchFamily="34" charset="0"/>
@@ -6365,8 +6317,8 @@
               </a:r>
               <a:endParaRPr lang="en-US" altLang="ko-KR" sz="1400" dirty="0">
                 <a:solidFill>
-                  <a:schemeClr val="accent1">
-                    <a:lumMod val="50000"/>
+                  <a:schemeClr val="bg2">
+                    <a:lumMod val="10000"/>
                   </a:schemeClr>
                 </a:solidFill>
                 <a:latin typeface="Franklin Gothic Heavy" panose="020B0903020102020204" pitchFamily="34" charset="0"/>
@@ -6380,7 +6332,7 @@
             <p:cNvPr id="6" name="TextBox 5">
               <a:extLst>
                 <a:ext uri="{FF2B5EF4-FFF2-40B4-BE49-F238E27FC236}">
-                  <a16:creationId xmlns:a16="http://schemas.microsoft.com/office/drawing/2014/main" id="{25F3C248-44C4-9D7A-C464-62D68C9890DC}"/>
+                  <a16:creationId xmlns:a16="http://schemas.microsoft.com/office/drawing/2014/main" id="{AADF9BD8-5CD3-2331-7586-8EEBC649B151}"/>
                 </a:ext>
               </a:extLst>
             </p:cNvPr>
@@ -6454,7 +6406,7 @@
             <p:cNvPr id="10" name="그림 9">
               <a:extLst>
                 <a:ext uri="{FF2B5EF4-FFF2-40B4-BE49-F238E27FC236}">
-                  <a16:creationId xmlns:a16="http://schemas.microsoft.com/office/drawing/2014/main" id="{EB1E9046-9340-4D3D-AA23-F89851FB0C3F}"/>
+                  <a16:creationId xmlns:a16="http://schemas.microsoft.com/office/drawing/2014/main" id="{FFC51E42-A20D-3601-5EC0-5A57057F68DD}"/>
                 </a:ext>
               </a:extLst>
             </p:cNvPr>
@@ -6481,10 +6433,10 @@
         </p:pic>
         <p:pic>
           <p:nvPicPr>
-            <p:cNvPr id="29" name="그림 28">
+            <p:cNvPr id="30" name="그림 29">
               <a:extLst>
                 <a:ext uri="{FF2B5EF4-FFF2-40B4-BE49-F238E27FC236}">
-                  <a16:creationId xmlns:a16="http://schemas.microsoft.com/office/drawing/2014/main" id="{799E618A-B635-413C-90D6-9BBB5F48E428}"/>
+                  <a16:creationId xmlns:a16="http://schemas.microsoft.com/office/drawing/2014/main" id="{A1B5D57C-C9A0-E9AC-AA70-B663BB2BCA36}"/>
                 </a:ext>
               </a:extLst>
             </p:cNvPr>
@@ -6501,37 +6453,7 @@
           </p:blipFill>
           <p:spPr>
             <a:xfrm rot="10800000">
-              <a:off x="2181315" y="257361"/>
-              <a:ext cx="179389" cy="156650"/>
-            </a:xfrm>
-            <a:prstGeom prst="rect">
-              <a:avLst/>
-            </a:prstGeom>
-          </p:spPr>
-        </p:pic>
-        <p:pic>
-          <p:nvPicPr>
-            <p:cNvPr id="30" name="그림 29">
-              <a:extLst>
-                <a:ext uri="{FF2B5EF4-FFF2-40B4-BE49-F238E27FC236}">
-                  <a16:creationId xmlns:a16="http://schemas.microsoft.com/office/drawing/2014/main" id="{FCD9B137-9F07-4052-B76C-36D6AED25D86}"/>
-                </a:ext>
-              </a:extLst>
-            </p:cNvPr>
-            <p:cNvPicPr>
-              <a:picLocks noChangeAspect="1"/>
-            </p:cNvPicPr>
-            <p:nvPr/>
-          </p:nvPicPr>
-          <p:blipFill>
-            <a:blip r:embed="rId3"/>
-            <a:stretch>
-              <a:fillRect/>
-            </a:stretch>
-          </p:blipFill>
-          <p:spPr>
-            <a:xfrm rot="10800000">
-              <a:off x="2197302" y="276730"/>
+              <a:off x="2222659" y="276730"/>
               <a:ext cx="147414" cy="128728"/>
             </a:xfrm>
             <a:prstGeom prst="rect">
@@ -6545,7 +6467,7 @@
           <p:cNvPr id="12" name="그룹 11">
             <a:extLst>
               <a:ext uri="{FF2B5EF4-FFF2-40B4-BE49-F238E27FC236}">
-                <a16:creationId xmlns:a16="http://schemas.microsoft.com/office/drawing/2014/main" id="{6B2D700B-07E0-4E28-A7D2-0F4C62846EE3}"/>
+                <a16:creationId xmlns:a16="http://schemas.microsoft.com/office/drawing/2014/main" id="{0509C176-318C-45B9-896A-51F69D5D6BD3}"/>
               </a:ext>
             </a:extLst>
           </p:cNvPr>
@@ -6554,10 +6476,10 @@
         </p:nvGrpSpPr>
         <p:grpSpPr>
           <a:xfrm>
-            <a:off x="1488355" y="772187"/>
-            <a:ext cx="1564409" cy="707886"/>
+            <a:off x="205429" y="781187"/>
+            <a:ext cx="1731561" cy="784830"/>
             <a:chOff x="796295" y="778765"/>
-            <a:chExt cx="1564409" cy="707886"/>
+            <a:chExt cx="1731561" cy="784830"/>
           </a:xfrm>
         </p:grpSpPr>
         <p:sp>
@@ -6565,7 +6487,7 @@
             <p:cNvPr id="26" name="TextBox 25">
               <a:extLst>
                 <a:ext uri="{FF2B5EF4-FFF2-40B4-BE49-F238E27FC236}">
-                  <a16:creationId xmlns:a16="http://schemas.microsoft.com/office/drawing/2014/main" id="{61921C24-9018-417C-966E-E56980F41166}"/>
+                  <a16:creationId xmlns:a16="http://schemas.microsoft.com/office/drawing/2014/main" id="{F13C02A4-8A38-8C34-FE4B-9A367D69BBFD}"/>
                 </a:ext>
               </a:extLst>
             </p:cNvPr>
@@ -6574,8 +6496,8 @@
           </p:nvSpPr>
           <p:spPr>
             <a:xfrm>
-              <a:off x="1422627" y="778765"/>
-              <a:ext cx="938077" cy="707886"/>
+              <a:off x="1495201" y="778765"/>
+              <a:ext cx="1032655" cy="784830"/>
             </a:xfrm>
             <a:prstGeom prst="rect">
               <a:avLst/>
@@ -6589,21 +6511,21 @@
             <a:lstStyle/>
             <a:p>
               <a:r>
-                <a:rPr lang="en-US" altLang="ko-KR" sz="800" dirty="0">
+                <a:rPr lang="en-US" altLang="ko-KR" sz="900" dirty="0">
                   <a:latin typeface="KoPub돋움체 Light" panose="00000300000000000000" pitchFamily="2" charset="-127"/>
                   <a:ea typeface="KoPub돋움체 Light" panose="00000300000000000000" pitchFamily="2" charset="-127"/>
                 </a:rPr>
                 <a:t>"</a:t>
               </a:r>
               <a:r>
-                <a:rPr lang="ko-KR" altLang="en-US" sz="800" dirty="0">
+                <a:rPr lang="ko-KR" altLang="en-US" sz="900" dirty="0">
                   <a:latin typeface="KoPub돋움체 Light" panose="00000300000000000000" pitchFamily="2" charset="-127"/>
                   <a:ea typeface="KoPub돋움체 Light" panose="00000300000000000000" pitchFamily="2" charset="-127"/>
                 </a:rPr>
                 <a:t>함께하는 즐거움</a:t>
               </a:r>
               <a:r>
-                <a:rPr lang="en-US" altLang="ko-KR" sz="800" dirty="0">
+                <a:rPr lang="en-US" altLang="ko-KR" sz="900" dirty="0">
                   <a:latin typeface="KoPub돋움체 Light" panose="00000300000000000000" pitchFamily="2" charset="-127"/>
                   <a:ea typeface="KoPub돋움체 Light" panose="00000300000000000000" pitchFamily="2" charset="-127"/>
                 </a:rPr>
@@ -6612,108 +6534,108 @@
             </a:p>
             <a:p>
               <a:r>
-                <a:rPr lang="en-US" altLang="ko-KR" sz="800" dirty="0">
+                <a:rPr lang="en-US" altLang="ko-KR" sz="900" dirty="0">
                   <a:latin typeface="KoPub돋움체 Light" panose="00000300000000000000" pitchFamily="2" charset="-127"/>
                   <a:ea typeface="KoPub돋움체 Light" panose="00000300000000000000" pitchFamily="2" charset="-127"/>
                 </a:rPr>
                 <a:t>"</a:t>
               </a:r>
               <a:r>
-                <a:rPr lang="ko-KR" altLang="en-US" sz="800" dirty="0">
+                <a:rPr lang="ko-KR" altLang="en-US" sz="900" dirty="0">
                   <a:latin typeface="KoPub돋움체 Light" panose="00000300000000000000" pitchFamily="2" charset="-127"/>
                   <a:ea typeface="KoPub돋움체 Light" panose="00000300000000000000" pitchFamily="2" charset="-127"/>
                 </a:rPr>
                 <a:t>명확한 약속</a:t>
               </a:r>
               <a:r>
-                <a:rPr lang="en-US" altLang="ko-KR" sz="800" dirty="0">
+                <a:rPr lang="en-US" altLang="ko-KR" sz="900" dirty="0">
                   <a:latin typeface="KoPub돋움체 Light" panose="00000300000000000000" pitchFamily="2" charset="-127"/>
                   <a:ea typeface="KoPub돋움체 Light" panose="00000300000000000000" pitchFamily="2" charset="-127"/>
                 </a:rPr>
                 <a:t>"</a:t>
               </a:r>
-              <a:endParaRPr lang="ko-KR" altLang="en-US" sz="800" dirty="0">
+              <a:endParaRPr lang="ko-KR" altLang="en-US" sz="900" dirty="0">
                 <a:latin typeface="KoPub돋움체 Light" panose="00000300000000000000" pitchFamily="2" charset="-127"/>
                 <a:ea typeface="KoPub돋움체 Light" panose="00000300000000000000" pitchFamily="2" charset="-127"/>
               </a:endParaRPr>
             </a:p>
             <a:p>
               <a:r>
-                <a:rPr lang="en-US" altLang="ko-KR" sz="800" dirty="0">
+                <a:rPr lang="en-US" altLang="ko-KR" sz="900" dirty="0">
                   <a:latin typeface="KoPub돋움체 Light" panose="00000300000000000000" pitchFamily="2" charset="-127"/>
                   <a:ea typeface="KoPub돋움체 Light" panose="00000300000000000000" pitchFamily="2" charset="-127"/>
                 </a:rPr>
                 <a:t>"</a:t>
               </a:r>
               <a:r>
-                <a:rPr lang="ko-KR" altLang="en-US" sz="800" dirty="0">
+                <a:rPr lang="ko-KR" altLang="en-US" sz="900" dirty="0">
                   <a:latin typeface="KoPub돋움체 Light" panose="00000300000000000000" pitchFamily="2" charset="-127"/>
                   <a:ea typeface="KoPub돋움체 Light" panose="00000300000000000000" pitchFamily="2" charset="-127"/>
                 </a:rPr>
                 <a:t>한눈에 보는 실무</a:t>
               </a:r>
               <a:r>
-                <a:rPr lang="en-US" altLang="ko-KR" sz="800" dirty="0">
+                <a:rPr lang="en-US" altLang="ko-KR" sz="900" dirty="0">
                   <a:latin typeface="KoPub돋움체 Light" panose="00000300000000000000" pitchFamily="2" charset="-127"/>
                   <a:ea typeface="KoPub돋움체 Light" panose="00000300000000000000" pitchFamily="2" charset="-127"/>
                 </a:rPr>
                 <a:t>"</a:t>
               </a:r>
-              <a:endParaRPr lang="ko-KR" altLang="en-US" sz="800" dirty="0">
+              <a:endParaRPr lang="ko-KR" altLang="en-US" sz="900" dirty="0">
                 <a:latin typeface="KoPub돋움체 Light" panose="00000300000000000000" pitchFamily="2" charset="-127"/>
                 <a:ea typeface="KoPub돋움체 Light" panose="00000300000000000000" pitchFamily="2" charset="-127"/>
               </a:endParaRPr>
             </a:p>
             <a:p>
               <a:r>
-                <a:rPr lang="en-US" altLang="ko-KR" sz="800" dirty="0">
+                <a:rPr lang="en-US" altLang="ko-KR" sz="900" dirty="0">
                   <a:latin typeface="KoPub돋움체 Light" panose="00000300000000000000" pitchFamily="2" charset="-127"/>
                   <a:ea typeface="KoPub돋움체 Light" panose="00000300000000000000" pitchFamily="2" charset="-127"/>
                 </a:rPr>
                 <a:t>"</a:t>
               </a:r>
               <a:r>
-                <a:rPr lang="ko-KR" altLang="en-US" sz="800" dirty="0">
+                <a:rPr lang="ko-KR" altLang="en-US" sz="900" dirty="0">
                   <a:latin typeface="KoPub돋움체 Light" panose="00000300000000000000" pitchFamily="2" charset="-127"/>
                   <a:ea typeface="KoPub돋움체 Light" panose="00000300000000000000" pitchFamily="2" charset="-127"/>
                 </a:rPr>
                 <a:t>현장 밀착형 지원</a:t>
               </a:r>
               <a:r>
-                <a:rPr lang="en-US" altLang="ko-KR" sz="800" dirty="0">
+                <a:rPr lang="en-US" altLang="ko-KR" sz="900" dirty="0">
                   <a:latin typeface="KoPub돋움체 Light" panose="00000300000000000000" pitchFamily="2" charset="-127"/>
                   <a:ea typeface="KoPub돋움체 Light" panose="00000300000000000000" pitchFamily="2" charset="-127"/>
                 </a:rPr>
                 <a:t>"</a:t>
               </a:r>
-              <a:endParaRPr lang="ko-KR" altLang="en-US" sz="800" dirty="0">
+              <a:endParaRPr lang="ko-KR" altLang="en-US" sz="900" dirty="0">
                 <a:latin typeface="KoPub돋움체 Light" panose="00000300000000000000" pitchFamily="2" charset="-127"/>
                 <a:ea typeface="KoPub돋움체 Light" panose="00000300000000000000" pitchFamily="2" charset="-127"/>
               </a:endParaRPr>
             </a:p>
             <a:p>
               <a:r>
-                <a:rPr lang="en-US" altLang="ko-KR" sz="800" dirty="0">
+                <a:rPr lang="en-US" altLang="ko-KR" sz="900" dirty="0">
                   <a:latin typeface="KoPub돋움체 Light" panose="00000300000000000000" pitchFamily="2" charset="-127"/>
                   <a:ea typeface="KoPub돋움체 Light" panose="00000300000000000000" pitchFamily="2" charset="-127"/>
                 </a:rPr>
                 <a:t>"</a:t>
               </a:r>
               <a:r>
-                <a:rPr lang="ko-KR" altLang="en-US" sz="800" dirty="0">
+                <a:rPr lang="ko-KR" altLang="en-US" sz="900" dirty="0">
                   <a:latin typeface="KoPub돋움체 Light" panose="00000300000000000000" pitchFamily="2" charset="-127"/>
                   <a:ea typeface="KoPub돋움체 Light" panose="00000300000000000000" pitchFamily="2" charset="-127"/>
                 </a:rPr>
                 <a:t>변화의 체감</a:t>
               </a:r>
               <a:r>
-                <a:rPr lang="en-US" altLang="ko-KR" sz="800" dirty="0">
+                <a:rPr lang="en-US" altLang="ko-KR" sz="900" dirty="0">
                   <a:latin typeface="KoPub돋움체 Light" panose="00000300000000000000" pitchFamily="2" charset="-127"/>
                   <a:ea typeface="KoPub돋움체 Light" panose="00000300000000000000" pitchFamily="2" charset="-127"/>
                 </a:rPr>
                 <a:t>"</a:t>
               </a:r>
-              <a:endParaRPr lang="ko-KR" altLang="en-US" sz="800" dirty="0">
+              <a:endParaRPr lang="ko-KR" altLang="en-US" sz="900" dirty="0">
                 <a:latin typeface="KoPub돋움체 Light" panose="00000300000000000000" pitchFamily="2" charset="-127"/>
                 <a:ea typeface="KoPub돋움체 Light" panose="00000300000000000000" pitchFamily="2" charset="-127"/>
               </a:endParaRPr>
@@ -6725,7 +6647,7 @@
             <p:cNvPr id="31" name="TextBox 30">
               <a:extLst>
                 <a:ext uri="{FF2B5EF4-FFF2-40B4-BE49-F238E27FC236}">
-                  <a16:creationId xmlns:a16="http://schemas.microsoft.com/office/drawing/2014/main" id="{62EAB35A-296C-468C-BCA0-D585048BF4E9}"/>
+                  <a16:creationId xmlns:a16="http://schemas.microsoft.com/office/drawing/2014/main" id="{7DE5EE10-3C8C-0C0B-5394-75A3F0DAECC2}"/>
                 </a:ext>
               </a:extLst>
             </p:cNvPr>
@@ -6735,7 +6657,7 @@
           <p:spPr>
             <a:xfrm>
               <a:off x="796295" y="778765"/>
-              <a:ext cx="753732" cy="707886"/>
+              <a:ext cx="813043" cy="784830"/>
             </a:xfrm>
             <a:prstGeom prst="rect">
               <a:avLst/>
@@ -6756,13 +6678,13 @@
                 <a:buChar char="•"/>
               </a:pPr>
               <a:r>
-                <a:rPr lang="ko-KR" altLang="en-US" sz="800" b="1" dirty="0">
+                <a:rPr lang="ko-KR" altLang="en-US" sz="900" b="1" dirty="0">
                   <a:latin typeface="KoPub돋움체 Bold" panose="00000800000000000000" pitchFamily="2" charset="-127"/>
                   <a:ea typeface="KoPub돋움체 Bold" panose="00000800000000000000" pitchFamily="2" charset="-127"/>
                 </a:rPr>
                 <a:t>소통의 광장</a:t>
               </a:r>
-              <a:endParaRPr lang="en-US" altLang="ko-KR" sz="800" b="1" dirty="0">
+              <a:endParaRPr lang="en-US" altLang="ko-KR" sz="900" b="1" dirty="0">
                 <a:latin typeface="KoPub돋움체 Bold" panose="00000800000000000000" pitchFamily="2" charset="-127"/>
                 <a:ea typeface="KoPub돋움체 Bold" panose="00000800000000000000" pitchFamily="2" charset="-127"/>
               </a:endParaRPr>
@@ -6776,7 +6698,7 @@
                 <a:buChar char="•"/>
               </a:pPr>
               <a:r>
-                <a:rPr lang="ko-KR" altLang="en-US" sz="800" b="1" dirty="0">
+                <a:rPr lang="ko-KR" altLang="en-US" sz="900" b="1" dirty="0">
                   <a:latin typeface="KoPub돋움체 Bold" panose="00000800000000000000" pitchFamily="2" charset="-127"/>
                   <a:ea typeface="KoPub돋움체 Bold" panose="00000800000000000000" pitchFamily="2" charset="-127"/>
                 </a:rPr>
@@ -6792,7 +6714,7 @@
                 <a:buChar char="•"/>
               </a:pPr>
               <a:r>
-                <a:rPr lang="ko-KR" altLang="en-US" sz="800" b="1" dirty="0">
+                <a:rPr lang="ko-KR" altLang="en-US" sz="900" b="1" dirty="0">
                   <a:latin typeface="KoPub돋움체 Bold" panose="00000800000000000000" pitchFamily="2" charset="-127"/>
                   <a:ea typeface="KoPub돋움체 Bold" panose="00000800000000000000" pitchFamily="2" charset="-127"/>
                 </a:rPr>
@@ -6808,7 +6730,7 @@
                 <a:buChar char="•"/>
               </a:pPr>
               <a:r>
-                <a:rPr lang="ko-KR" altLang="en-US" sz="800" b="1" dirty="0">
+                <a:rPr lang="ko-KR" altLang="en-US" sz="900" b="1" dirty="0">
                   <a:latin typeface="KoPub돋움체 Bold" panose="00000800000000000000" pitchFamily="2" charset="-127"/>
                   <a:ea typeface="KoPub돋움체 Bold" panose="00000800000000000000" pitchFamily="2" charset="-127"/>
                 </a:rPr>
@@ -6824,7 +6746,7 @@
                 <a:buChar char="•"/>
               </a:pPr>
               <a:r>
-                <a:rPr lang="ko-KR" altLang="en-US" sz="800" b="1" dirty="0">
+                <a:rPr lang="ko-KR" altLang="en-US" sz="900" b="1" dirty="0">
                   <a:latin typeface="KoPub돋움체 Bold" panose="00000800000000000000" pitchFamily="2" charset="-127"/>
                   <a:ea typeface="KoPub돋움체 Bold" panose="00000800000000000000" pitchFamily="2" charset="-127"/>
                 </a:rPr>
@@ -6837,7 +6759,7 @@
     </p:spTree>
     <p:extLst>
       <p:ext uri="{BB962C8B-B14F-4D97-AF65-F5344CB8AC3E}">
-        <p14:creationId xmlns:p14="http://schemas.microsoft.com/office/powerpoint/2010/main" val="1527098437"/>
+        <p14:creationId xmlns:p14="http://schemas.microsoft.com/office/powerpoint/2010/main" val="1702695936"/>
       </p:ext>
     </p:extLst>
   </p:cSld>
@@ -6852,7 +6774,13 @@
   <p:cSld>
     <p:spTree>
       <p:nvGrpSpPr>
-        <p:cNvPr id="1" name=""/>
+        <p:cNvPr id="1" name="">
+          <a:extLst>
+            <a:ext uri="{FF2B5EF4-FFF2-40B4-BE49-F238E27FC236}">
+              <a16:creationId xmlns:a16="http://schemas.microsoft.com/office/drawing/2014/main" id="{D5A8F81F-DD39-B704-B1CA-97688524154B}"/>
+            </a:ext>
+          </a:extLst>
+        </p:cNvPr>
         <p:cNvGrpSpPr/>
         <p:nvPr/>
       </p:nvGrpSpPr>
@@ -6869,7 +6797,7 @@
           <p:cNvPr id="3" name="TextBox 2">
             <a:extLst>
               <a:ext uri="{FF2B5EF4-FFF2-40B4-BE49-F238E27FC236}">
-                <a16:creationId xmlns:a16="http://schemas.microsoft.com/office/drawing/2014/main" id="{F5E3E193-F1E8-6947-F01D-A96C1A9F6D0E}"/>
+                <a16:creationId xmlns:a16="http://schemas.microsoft.com/office/drawing/2014/main" id="{BBE4E7CB-81CC-B3BB-D56F-145F10CF5B36}"/>
               </a:ext>
             </a:extLst>
           </p:cNvPr>
@@ -6921,7 +6849,7 @@
           <p:cNvPr id="17" name="그룹 16">
             <a:extLst>
               <a:ext uri="{FF2B5EF4-FFF2-40B4-BE49-F238E27FC236}">
-                <a16:creationId xmlns:a16="http://schemas.microsoft.com/office/drawing/2014/main" id="{CCD23336-35E2-7BBF-742C-67D82BDC7617}"/>
+                <a16:creationId xmlns:a16="http://schemas.microsoft.com/office/drawing/2014/main" id="{B125C3CF-F798-5F75-3183-7595D9D757B2}"/>
               </a:ext>
             </a:extLst>
           </p:cNvPr>
@@ -6930,8 +6858,8 @@
         </p:nvGrpSpPr>
         <p:grpSpPr>
           <a:xfrm>
-            <a:off x="589938" y="838920"/>
-            <a:ext cx="634026" cy="568432"/>
+            <a:off x="2050303" y="549443"/>
+            <a:ext cx="854822" cy="766386"/>
             <a:chOff x="777945" y="-736888"/>
             <a:chExt cx="663508" cy="663508"/>
           </a:xfrm>
@@ -6941,7 +6869,7 @@
             <p:cNvPr id="5" name="그림 4" descr="패턴, 사각형, 예술, 직사각형이(가) 표시된 사진&#10;&#10;AI 생성 콘텐츠는 정확하지 않을 수 있습니다.">
               <a:extLst>
                 <a:ext uri="{FF2B5EF4-FFF2-40B4-BE49-F238E27FC236}">
-                  <a16:creationId xmlns:a16="http://schemas.microsoft.com/office/drawing/2014/main" id="{40C63F4C-30AB-6EF2-23BA-1233104A9DC3}"/>
+                  <a16:creationId xmlns:a16="http://schemas.microsoft.com/office/drawing/2014/main" id="{DE2251FC-88AB-EB43-156C-DBB20D3DB2C0}"/>
                 </a:ext>
               </a:extLst>
             </p:cNvPr>
@@ -6971,7 +6899,7 @@
             <p:cNvPr id="13" name="L 도형 12">
               <a:extLst>
                 <a:ext uri="{FF2B5EF4-FFF2-40B4-BE49-F238E27FC236}">
-                  <a16:creationId xmlns:a16="http://schemas.microsoft.com/office/drawing/2014/main" id="{B242B433-4D06-F840-EA3E-7FA7766D184C}"/>
+                  <a16:creationId xmlns:a16="http://schemas.microsoft.com/office/drawing/2014/main" id="{1FAEBB29-0292-91EF-B0B7-C809EC64DEF1}"/>
                 </a:ext>
               </a:extLst>
             </p:cNvPr>
@@ -7028,7 +6956,7 @@
             <p:cNvPr id="14" name="L 도형 13">
               <a:extLst>
                 <a:ext uri="{FF2B5EF4-FFF2-40B4-BE49-F238E27FC236}">
-                  <a16:creationId xmlns:a16="http://schemas.microsoft.com/office/drawing/2014/main" id="{37DD2CDD-BF9D-CD6A-CC77-30C00DF7A8EA}"/>
+                  <a16:creationId xmlns:a16="http://schemas.microsoft.com/office/drawing/2014/main" id="{25103396-4D15-EF30-76AE-6AF474D3B446}"/>
                 </a:ext>
               </a:extLst>
             </p:cNvPr>
@@ -7085,7 +7013,7 @@
             <p:cNvPr id="15" name="L 도형 14">
               <a:extLst>
                 <a:ext uri="{FF2B5EF4-FFF2-40B4-BE49-F238E27FC236}">
-                  <a16:creationId xmlns:a16="http://schemas.microsoft.com/office/drawing/2014/main" id="{DD20813D-7C4F-9420-E012-EB09FDC9059E}"/>
+                  <a16:creationId xmlns:a16="http://schemas.microsoft.com/office/drawing/2014/main" id="{DB50FEB4-6AF4-4E96-361F-332B2F87B0B9}"/>
                 </a:ext>
               </a:extLst>
             </p:cNvPr>
@@ -7142,7 +7070,7 @@
             <p:cNvPr id="16" name="L 도형 15">
               <a:extLst>
                 <a:ext uri="{FF2B5EF4-FFF2-40B4-BE49-F238E27FC236}">
-                  <a16:creationId xmlns:a16="http://schemas.microsoft.com/office/drawing/2014/main" id="{C2F58D7B-1E2F-7C1C-29C2-3CBAF321313E}"/>
+                  <a16:creationId xmlns:a16="http://schemas.microsoft.com/office/drawing/2014/main" id="{538418CE-B6C8-5FEE-4001-E56E4072C3BF}"/>
                 </a:ext>
               </a:extLst>
             </p:cNvPr>
@@ -7200,7 +7128,7 @@
           <p:cNvPr id="18" name="그룹 17">
             <a:extLst>
               <a:ext uri="{FF2B5EF4-FFF2-40B4-BE49-F238E27FC236}">
-                <a16:creationId xmlns:a16="http://schemas.microsoft.com/office/drawing/2014/main" id="{360DDF2E-2289-473B-B5F6-77027118C993}"/>
+                <a16:creationId xmlns:a16="http://schemas.microsoft.com/office/drawing/2014/main" id="{D24772E5-8340-6DD7-A008-F3AC60AF9C88}"/>
               </a:ext>
             </a:extLst>
           </p:cNvPr>
@@ -7210,9 +7138,9 @@
         <p:grpSpPr>
           <a:xfrm>
             <a:off x="113069" y="274768"/>
-            <a:ext cx="1746464" cy="425416"/>
+            <a:ext cx="1755833" cy="425416"/>
             <a:chOff x="614240" y="226472"/>
-            <a:chExt cx="1746464" cy="425416"/>
+            <a:chExt cx="1755833" cy="425416"/>
           </a:xfrm>
         </p:grpSpPr>
         <p:sp>
@@ -7220,7 +7148,7 @@
             <p:cNvPr id="4" name="TextBox 3">
               <a:extLst>
                 <a:ext uri="{FF2B5EF4-FFF2-40B4-BE49-F238E27FC236}">
-                  <a16:creationId xmlns:a16="http://schemas.microsoft.com/office/drawing/2014/main" id="{1F0C02A7-D766-DD14-548E-2AE7955534F4}"/>
+                  <a16:creationId xmlns:a16="http://schemas.microsoft.com/office/drawing/2014/main" id="{922BAAE5-10B5-777B-4FDD-66A8F820AD8A}"/>
                 </a:ext>
               </a:extLst>
             </p:cNvPr>
@@ -7229,8 +7157,8 @@
           </p:nvSpPr>
           <p:spPr>
             <a:xfrm>
-              <a:off x="685077" y="226472"/>
-              <a:ext cx="1604991" cy="307777"/>
+              <a:off x="646605" y="226472"/>
+              <a:ext cx="1681935" cy="307777"/>
             </a:xfrm>
             <a:prstGeom prst="rect">
               <a:avLst/>
@@ -7245,12 +7173,12 @@
             <a:p>
               <a:pPr algn="ctr"/>
               <a:r>
-                <a:rPr lang="ko-KR" altLang="en-US" sz="1400" dirty="0" err="1">
+                <a:rPr lang="ko-KR" altLang="en-US" sz="1400" b="1" dirty="0" err="1">
                   <a:solidFill>
                     <a:srgbClr val="00B0F0"/>
                   </a:solidFill>
-                  <a:latin typeface="KoPub돋움체 Bold" panose="00000800000000000000" pitchFamily="2" charset="-127"/>
-                  <a:ea typeface="KoPub돋움체 Bold" panose="00000800000000000000" pitchFamily="2" charset="-127"/>
+                  <a:latin typeface="Noto Sans KR Black" panose="020B0200000000000000" pitchFamily="50" charset="-127"/>
+                  <a:ea typeface="Noto Sans KR Black" panose="020B0200000000000000" pitchFamily="50" charset="-127"/>
                 </a:rPr>
                 <a:t>우리가치</a:t>
               </a:r>
@@ -7269,8 +7197,8 @@
               <a:r>
                 <a:rPr lang="en-US" altLang="ko-KR" sz="1400" dirty="0" err="1">
                   <a:solidFill>
-                    <a:schemeClr val="accent1">
-                      <a:lumMod val="50000"/>
+                    <a:schemeClr val="bg2">
+                      <a:lumMod val="10000"/>
                     </a:schemeClr>
                   </a:solidFill>
                   <a:latin typeface="Franklin Gothic Heavy" panose="020B0903020102020204" pitchFamily="34" charset="0"/>
@@ -7280,8 +7208,8 @@
               </a:r>
               <a:endParaRPr lang="en-US" altLang="ko-KR" sz="1400" dirty="0">
                 <a:solidFill>
-                  <a:schemeClr val="accent1">
-                    <a:lumMod val="50000"/>
+                  <a:schemeClr val="bg2">
+                    <a:lumMod val="10000"/>
                   </a:schemeClr>
                 </a:solidFill>
                 <a:latin typeface="Franklin Gothic Heavy" panose="020B0903020102020204" pitchFamily="34" charset="0"/>
@@ -7295,7 +7223,7 @@
             <p:cNvPr id="6" name="TextBox 5">
               <a:extLst>
                 <a:ext uri="{FF2B5EF4-FFF2-40B4-BE49-F238E27FC236}">
-                  <a16:creationId xmlns:a16="http://schemas.microsoft.com/office/drawing/2014/main" id="{25F3C248-44C4-9D7A-C464-62D68C9890DC}"/>
+                  <a16:creationId xmlns:a16="http://schemas.microsoft.com/office/drawing/2014/main" id="{CCAD2A9C-08F1-F08F-BDCA-A8AF71174D6C}"/>
                 </a:ext>
               </a:extLst>
             </p:cNvPr>
@@ -7369,7 +7297,7 @@
             <p:cNvPr id="10" name="그림 9">
               <a:extLst>
                 <a:ext uri="{FF2B5EF4-FFF2-40B4-BE49-F238E27FC236}">
-                  <a16:creationId xmlns:a16="http://schemas.microsoft.com/office/drawing/2014/main" id="{EB1E9046-9340-4D3D-AA23-F89851FB0C3F}"/>
+                  <a16:creationId xmlns:a16="http://schemas.microsoft.com/office/drawing/2014/main" id="{37D3769E-34B8-9299-368C-3BC0DD861D27}"/>
                 </a:ext>
               </a:extLst>
             </p:cNvPr>
@@ -7396,10 +7324,10 @@
         </p:pic>
         <p:pic>
           <p:nvPicPr>
-            <p:cNvPr id="29" name="그림 28">
+            <p:cNvPr id="30" name="그림 29">
               <a:extLst>
                 <a:ext uri="{FF2B5EF4-FFF2-40B4-BE49-F238E27FC236}">
-                  <a16:creationId xmlns:a16="http://schemas.microsoft.com/office/drawing/2014/main" id="{799E618A-B635-413C-90D6-9BBB5F48E428}"/>
+                  <a16:creationId xmlns:a16="http://schemas.microsoft.com/office/drawing/2014/main" id="{D2B42E41-536A-E90D-9990-EBB646D46BE1}"/>
                 </a:ext>
               </a:extLst>
             </p:cNvPr>
@@ -7416,37 +7344,7 @@
           </p:blipFill>
           <p:spPr>
             <a:xfrm rot="10800000">
-              <a:off x="2181315" y="257361"/>
-              <a:ext cx="179389" cy="156650"/>
-            </a:xfrm>
-            <a:prstGeom prst="rect">
-              <a:avLst/>
-            </a:prstGeom>
-          </p:spPr>
-        </p:pic>
-        <p:pic>
-          <p:nvPicPr>
-            <p:cNvPr id="30" name="그림 29">
-              <a:extLst>
-                <a:ext uri="{FF2B5EF4-FFF2-40B4-BE49-F238E27FC236}">
-                  <a16:creationId xmlns:a16="http://schemas.microsoft.com/office/drawing/2014/main" id="{FCD9B137-9F07-4052-B76C-36D6AED25D86}"/>
-                </a:ext>
-              </a:extLst>
-            </p:cNvPr>
-            <p:cNvPicPr>
-              <a:picLocks noChangeAspect="1"/>
-            </p:cNvPicPr>
-            <p:nvPr/>
-          </p:nvPicPr>
-          <p:blipFill>
-            <a:blip r:embed="rId3"/>
-            <a:stretch>
-              <a:fillRect/>
-            </a:stretch>
-          </p:blipFill>
-          <p:spPr>
-            <a:xfrm rot="10800000">
-              <a:off x="2197302" y="276730"/>
+              <a:off x="2222659" y="276730"/>
               <a:ext cx="147414" cy="128728"/>
             </a:xfrm>
             <a:prstGeom prst="rect">
@@ -7460,7 +7358,7 @@
           <p:cNvPr id="12" name="그룹 11">
             <a:extLst>
               <a:ext uri="{FF2B5EF4-FFF2-40B4-BE49-F238E27FC236}">
-                <a16:creationId xmlns:a16="http://schemas.microsoft.com/office/drawing/2014/main" id="{6B2D700B-07E0-4E28-A7D2-0F4C62846EE3}"/>
+                <a16:creationId xmlns:a16="http://schemas.microsoft.com/office/drawing/2014/main" id="{075B029C-5DD9-8C32-5D0A-C8F0E2710BC9}"/>
               </a:ext>
             </a:extLst>
           </p:cNvPr>
@@ -7469,10 +7367,10 @@
         </p:nvGrpSpPr>
         <p:grpSpPr>
           <a:xfrm>
-            <a:off x="1488355" y="772187"/>
-            <a:ext cx="1564409" cy="707886"/>
+            <a:off x="205429" y="781187"/>
+            <a:ext cx="1731561" cy="784830"/>
             <a:chOff x="796295" y="778765"/>
-            <a:chExt cx="1564409" cy="707886"/>
+            <a:chExt cx="1731561" cy="784830"/>
           </a:xfrm>
         </p:grpSpPr>
         <p:sp>
@@ -7480,7 +7378,7 @@
             <p:cNvPr id="26" name="TextBox 25">
               <a:extLst>
                 <a:ext uri="{FF2B5EF4-FFF2-40B4-BE49-F238E27FC236}">
-                  <a16:creationId xmlns:a16="http://schemas.microsoft.com/office/drawing/2014/main" id="{61921C24-9018-417C-966E-E56980F41166}"/>
+                  <a16:creationId xmlns:a16="http://schemas.microsoft.com/office/drawing/2014/main" id="{BE24F3CF-5916-6FFE-7F3F-AF32043D6C07}"/>
                 </a:ext>
               </a:extLst>
             </p:cNvPr>
@@ -7489,8 +7387,8 @@
           </p:nvSpPr>
           <p:spPr>
             <a:xfrm>
-              <a:off x="1422627" y="778765"/>
-              <a:ext cx="938077" cy="707886"/>
+              <a:off x="1495201" y="778765"/>
+              <a:ext cx="1032655" cy="784830"/>
             </a:xfrm>
             <a:prstGeom prst="rect">
               <a:avLst/>
@@ -7504,21 +7402,21 @@
             <a:lstStyle/>
             <a:p>
               <a:r>
-                <a:rPr lang="en-US" altLang="ko-KR" sz="800" dirty="0">
+                <a:rPr lang="en-US" altLang="ko-KR" sz="900" dirty="0">
                   <a:latin typeface="KoPub돋움체 Light" panose="00000300000000000000" pitchFamily="2" charset="-127"/>
                   <a:ea typeface="KoPub돋움체 Light" panose="00000300000000000000" pitchFamily="2" charset="-127"/>
                 </a:rPr>
                 <a:t>"</a:t>
               </a:r>
               <a:r>
-                <a:rPr lang="ko-KR" altLang="en-US" sz="800" dirty="0">
+                <a:rPr lang="ko-KR" altLang="en-US" sz="900" dirty="0">
                   <a:latin typeface="KoPub돋움체 Light" panose="00000300000000000000" pitchFamily="2" charset="-127"/>
                   <a:ea typeface="KoPub돋움체 Light" panose="00000300000000000000" pitchFamily="2" charset="-127"/>
                 </a:rPr>
                 <a:t>함께하는 즐거움</a:t>
               </a:r>
               <a:r>
-                <a:rPr lang="en-US" altLang="ko-KR" sz="800" dirty="0">
+                <a:rPr lang="en-US" altLang="ko-KR" sz="900" dirty="0">
                   <a:latin typeface="KoPub돋움체 Light" panose="00000300000000000000" pitchFamily="2" charset="-127"/>
                   <a:ea typeface="KoPub돋움체 Light" panose="00000300000000000000" pitchFamily="2" charset="-127"/>
                 </a:rPr>
@@ -7527,108 +7425,108 @@
             </a:p>
             <a:p>
               <a:r>
-                <a:rPr lang="en-US" altLang="ko-KR" sz="800" dirty="0">
+                <a:rPr lang="en-US" altLang="ko-KR" sz="900" dirty="0">
                   <a:latin typeface="KoPub돋움체 Light" panose="00000300000000000000" pitchFamily="2" charset="-127"/>
                   <a:ea typeface="KoPub돋움체 Light" panose="00000300000000000000" pitchFamily="2" charset="-127"/>
                 </a:rPr>
                 <a:t>"</a:t>
               </a:r>
               <a:r>
-                <a:rPr lang="ko-KR" altLang="en-US" sz="800" dirty="0">
+                <a:rPr lang="ko-KR" altLang="en-US" sz="900" dirty="0">
                   <a:latin typeface="KoPub돋움체 Light" panose="00000300000000000000" pitchFamily="2" charset="-127"/>
                   <a:ea typeface="KoPub돋움체 Light" panose="00000300000000000000" pitchFamily="2" charset="-127"/>
                 </a:rPr>
                 <a:t>명확한 약속</a:t>
               </a:r>
               <a:r>
-                <a:rPr lang="en-US" altLang="ko-KR" sz="800" dirty="0">
+                <a:rPr lang="en-US" altLang="ko-KR" sz="900" dirty="0">
                   <a:latin typeface="KoPub돋움체 Light" panose="00000300000000000000" pitchFamily="2" charset="-127"/>
                   <a:ea typeface="KoPub돋움체 Light" panose="00000300000000000000" pitchFamily="2" charset="-127"/>
                 </a:rPr>
                 <a:t>"</a:t>
               </a:r>
-              <a:endParaRPr lang="ko-KR" altLang="en-US" sz="800" dirty="0">
+              <a:endParaRPr lang="ko-KR" altLang="en-US" sz="900" dirty="0">
                 <a:latin typeface="KoPub돋움체 Light" panose="00000300000000000000" pitchFamily="2" charset="-127"/>
                 <a:ea typeface="KoPub돋움체 Light" panose="00000300000000000000" pitchFamily="2" charset="-127"/>
               </a:endParaRPr>
             </a:p>
             <a:p>
               <a:r>
-                <a:rPr lang="en-US" altLang="ko-KR" sz="800" dirty="0">
+                <a:rPr lang="en-US" altLang="ko-KR" sz="900" dirty="0">
                   <a:latin typeface="KoPub돋움체 Light" panose="00000300000000000000" pitchFamily="2" charset="-127"/>
                   <a:ea typeface="KoPub돋움체 Light" panose="00000300000000000000" pitchFamily="2" charset="-127"/>
                 </a:rPr>
                 <a:t>"</a:t>
               </a:r>
               <a:r>
-                <a:rPr lang="ko-KR" altLang="en-US" sz="800" dirty="0">
+                <a:rPr lang="ko-KR" altLang="en-US" sz="900" dirty="0">
                   <a:latin typeface="KoPub돋움체 Light" panose="00000300000000000000" pitchFamily="2" charset="-127"/>
                   <a:ea typeface="KoPub돋움체 Light" panose="00000300000000000000" pitchFamily="2" charset="-127"/>
                 </a:rPr>
                 <a:t>한눈에 보는 실무</a:t>
               </a:r>
               <a:r>
-                <a:rPr lang="en-US" altLang="ko-KR" sz="800" dirty="0">
+                <a:rPr lang="en-US" altLang="ko-KR" sz="900" dirty="0">
                   <a:latin typeface="KoPub돋움체 Light" panose="00000300000000000000" pitchFamily="2" charset="-127"/>
                   <a:ea typeface="KoPub돋움체 Light" panose="00000300000000000000" pitchFamily="2" charset="-127"/>
                 </a:rPr>
                 <a:t>"</a:t>
               </a:r>
-              <a:endParaRPr lang="ko-KR" altLang="en-US" sz="800" dirty="0">
+              <a:endParaRPr lang="ko-KR" altLang="en-US" sz="900" dirty="0">
                 <a:latin typeface="KoPub돋움체 Light" panose="00000300000000000000" pitchFamily="2" charset="-127"/>
                 <a:ea typeface="KoPub돋움체 Light" panose="00000300000000000000" pitchFamily="2" charset="-127"/>
               </a:endParaRPr>
             </a:p>
             <a:p>
               <a:r>
-                <a:rPr lang="en-US" altLang="ko-KR" sz="800" dirty="0">
+                <a:rPr lang="en-US" altLang="ko-KR" sz="900" dirty="0">
                   <a:latin typeface="KoPub돋움체 Light" panose="00000300000000000000" pitchFamily="2" charset="-127"/>
                   <a:ea typeface="KoPub돋움체 Light" panose="00000300000000000000" pitchFamily="2" charset="-127"/>
                 </a:rPr>
                 <a:t>"</a:t>
               </a:r>
               <a:r>
-                <a:rPr lang="ko-KR" altLang="en-US" sz="800" dirty="0">
+                <a:rPr lang="ko-KR" altLang="en-US" sz="900" dirty="0">
                   <a:latin typeface="KoPub돋움체 Light" panose="00000300000000000000" pitchFamily="2" charset="-127"/>
                   <a:ea typeface="KoPub돋움체 Light" panose="00000300000000000000" pitchFamily="2" charset="-127"/>
                 </a:rPr>
                 <a:t>현장 밀착형 지원</a:t>
               </a:r>
               <a:r>
-                <a:rPr lang="en-US" altLang="ko-KR" sz="800" dirty="0">
+                <a:rPr lang="en-US" altLang="ko-KR" sz="900" dirty="0">
                   <a:latin typeface="KoPub돋움체 Light" panose="00000300000000000000" pitchFamily="2" charset="-127"/>
                   <a:ea typeface="KoPub돋움체 Light" panose="00000300000000000000" pitchFamily="2" charset="-127"/>
                 </a:rPr>
                 <a:t>"</a:t>
               </a:r>
-              <a:endParaRPr lang="ko-KR" altLang="en-US" sz="800" dirty="0">
+              <a:endParaRPr lang="ko-KR" altLang="en-US" sz="900" dirty="0">
                 <a:latin typeface="KoPub돋움체 Light" panose="00000300000000000000" pitchFamily="2" charset="-127"/>
                 <a:ea typeface="KoPub돋움체 Light" panose="00000300000000000000" pitchFamily="2" charset="-127"/>
               </a:endParaRPr>
             </a:p>
             <a:p>
               <a:r>
-                <a:rPr lang="en-US" altLang="ko-KR" sz="800" dirty="0">
+                <a:rPr lang="en-US" altLang="ko-KR" sz="900" dirty="0">
                   <a:latin typeface="KoPub돋움체 Light" panose="00000300000000000000" pitchFamily="2" charset="-127"/>
                   <a:ea typeface="KoPub돋움체 Light" panose="00000300000000000000" pitchFamily="2" charset="-127"/>
                 </a:rPr>
                 <a:t>"</a:t>
               </a:r>
               <a:r>
-                <a:rPr lang="ko-KR" altLang="en-US" sz="800" dirty="0">
+                <a:rPr lang="ko-KR" altLang="en-US" sz="900" dirty="0">
                   <a:latin typeface="KoPub돋움체 Light" panose="00000300000000000000" pitchFamily="2" charset="-127"/>
                   <a:ea typeface="KoPub돋움체 Light" panose="00000300000000000000" pitchFamily="2" charset="-127"/>
                 </a:rPr>
                 <a:t>변화의 체감</a:t>
               </a:r>
               <a:r>
-                <a:rPr lang="en-US" altLang="ko-KR" sz="800" dirty="0">
+                <a:rPr lang="en-US" altLang="ko-KR" sz="900" dirty="0">
                   <a:latin typeface="KoPub돋움체 Light" panose="00000300000000000000" pitchFamily="2" charset="-127"/>
                   <a:ea typeface="KoPub돋움체 Light" panose="00000300000000000000" pitchFamily="2" charset="-127"/>
                 </a:rPr>
                 <a:t>"</a:t>
               </a:r>
-              <a:endParaRPr lang="ko-KR" altLang="en-US" sz="800" dirty="0">
+              <a:endParaRPr lang="ko-KR" altLang="en-US" sz="900" dirty="0">
                 <a:latin typeface="KoPub돋움체 Light" panose="00000300000000000000" pitchFamily="2" charset="-127"/>
                 <a:ea typeface="KoPub돋움체 Light" panose="00000300000000000000" pitchFamily="2" charset="-127"/>
               </a:endParaRPr>
@@ -7640,7 +7538,7 @@
             <p:cNvPr id="31" name="TextBox 30">
               <a:extLst>
                 <a:ext uri="{FF2B5EF4-FFF2-40B4-BE49-F238E27FC236}">
-                  <a16:creationId xmlns:a16="http://schemas.microsoft.com/office/drawing/2014/main" id="{62EAB35A-296C-468C-BCA0-D585048BF4E9}"/>
+                  <a16:creationId xmlns:a16="http://schemas.microsoft.com/office/drawing/2014/main" id="{AA6F8B63-BAF2-7E60-DC6E-15496E6EE29A}"/>
                 </a:ext>
               </a:extLst>
             </p:cNvPr>
@@ -7650,7 +7548,7 @@
           <p:spPr>
             <a:xfrm>
               <a:off x="796295" y="778765"/>
-              <a:ext cx="753732" cy="707886"/>
+              <a:ext cx="813043" cy="784830"/>
             </a:xfrm>
             <a:prstGeom prst="rect">
               <a:avLst/>
@@ -7671,13 +7569,13 @@
                 <a:buChar char="•"/>
               </a:pPr>
               <a:r>
-                <a:rPr lang="ko-KR" altLang="en-US" sz="800" b="1" dirty="0">
+                <a:rPr lang="ko-KR" altLang="en-US" sz="900" b="1" dirty="0">
                   <a:latin typeface="KoPub돋움체 Bold" panose="00000800000000000000" pitchFamily="2" charset="-127"/>
                   <a:ea typeface="KoPub돋움체 Bold" panose="00000800000000000000" pitchFamily="2" charset="-127"/>
                 </a:rPr>
                 <a:t>소통의 광장</a:t>
               </a:r>
-              <a:endParaRPr lang="en-US" altLang="ko-KR" sz="800" b="1" dirty="0">
+              <a:endParaRPr lang="en-US" altLang="ko-KR" sz="900" b="1" dirty="0">
                 <a:latin typeface="KoPub돋움체 Bold" panose="00000800000000000000" pitchFamily="2" charset="-127"/>
                 <a:ea typeface="KoPub돋움체 Bold" panose="00000800000000000000" pitchFamily="2" charset="-127"/>
               </a:endParaRPr>
@@ -7691,7 +7589,7 @@
                 <a:buChar char="•"/>
               </a:pPr>
               <a:r>
-                <a:rPr lang="ko-KR" altLang="en-US" sz="800" b="1" dirty="0">
+                <a:rPr lang="ko-KR" altLang="en-US" sz="900" b="1" dirty="0">
                   <a:latin typeface="KoPub돋움체 Bold" panose="00000800000000000000" pitchFamily="2" charset="-127"/>
                   <a:ea typeface="KoPub돋움체 Bold" panose="00000800000000000000" pitchFamily="2" charset="-127"/>
                 </a:rPr>
@@ -7707,7 +7605,7 @@
                 <a:buChar char="•"/>
               </a:pPr>
               <a:r>
-                <a:rPr lang="ko-KR" altLang="en-US" sz="800" b="1" dirty="0">
+                <a:rPr lang="ko-KR" altLang="en-US" sz="900" b="1" dirty="0">
                   <a:latin typeface="KoPub돋움체 Bold" panose="00000800000000000000" pitchFamily="2" charset="-127"/>
                   <a:ea typeface="KoPub돋움체 Bold" panose="00000800000000000000" pitchFamily="2" charset="-127"/>
                 </a:rPr>
@@ -7723,7 +7621,7 @@
                 <a:buChar char="•"/>
               </a:pPr>
               <a:r>
-                <a:rPr lang="ko-KR" altLang="en-US" sz="800" b="1" dirty="0">
+                <a:rPr lang="ko-KR" altLang="en-US" sz="900" b="1" dirty="0">
                   <a:latin typeface="KoPub돋움체 Bold" panose="00000800000000000000" pitchFamily="2" charset="-127"/>
                   <a:ea typeface="KoPub돋움체 Bold" panose="00000800000000000000" pitchFamily="2" charset="-127"/>
                 </a:rPr>
@@ -7739,7 +7637,7 @@
                 <a:buChar char="•"/>
               </a:pPr>
               <a:r>
-                <a:rPr lang="ko-KR" altLang="en-US" sz="800" b="1" dirty="0">
+                <a:rPr lang="ko-KR" altLang="en-US" sz="900" b="1" dirty="0">
                   <a:latin typeface="KoPub돋움체 Bold" panose="00000800000000000000" pitchFamily="2" charset="-127"/>
                   <a:ea typeface="KoPub돋움체 Bold" panose="00000800000000000000" pitchFamily="2" charset="-127"/>
                 </a:rPr>
@@ -7752,7 +7650,7 @@
     </p:spTree>
     <p:extLst>
       <p:ext uri="{BB962C8B-B14F-4D97-AF65-F5344CB8AC3E}">
-        <p14:creationId xmlns:p14="http://schemas.microsoft.com/office/powerpoint/2010/main" val="4217173869"/>
+        <p14:creationId xmlns:p14="http://schemas.microsoft.com/office/powerpoint/2010/main" val="2747244625"/>
       </p:ext>
     </p:extLst>
   </p:cSld>
@@ -7767,7 +7665,13 @@
   <p:cSld>
     <p:spTree>
       <p:nvGrpSpPr>
-        <p:cNvPr id="1" name=""/>
+        <p:cNvPr id="1" name="">
+          <a:extLst>
+            <a:ext uri="{FF2B5EF4-FFF2-40B4-BE49-F238E27FC236}">
+              <a16:creationId xmlns:a16="http://schemas.microsoft.com/office/drawing/2014/main" id="{926C5126-4A2A-FC7F-106F-3232C6E34FF5}"/>
+            </a:ext>
+          </a:extLst>
+        </p:cNvPr>
         <p:cNvGrpSpPr/>
         <p:nvPr/>
       </p:nvGrpSpPr>
@@ -7784,7 +7688,7 @@
           <p:cNvPr id="3" name="TextBox 2">
             <a:extLst>
               <a:ext uri="{FF2B5EF4-FFF2-40B4-BE49-F238E27FC236}">
-                <a16:creationId xmlns:a16="http://schemas.microsoft.com/office/drawing/2014/main" id="{F5E3E193-F1E8-6947-F01D-A96C1A9F6D0E}"/>
+                <a16:creationId xmlns:a16="http://schemas.microsoft.com/office/drawing/2014/main" id="{AF6BB92C-2F83-0CAF-C723-2C777E5443B0}"/>
               </a:ext>
             </a:extLst>
           </p:cNvPr>
@@ -7836,7 +7740,7 @@
           <p:cNvPr id="17" name="그룹 16">
             <a:extLst>
               <a:ext uri="{FF2B5EF4-FFF2-40B4-BE49-F238E27FC236}">
-                <a16:creationId xmlns:a16="http://schemas.microsoft.com/office/drawing/2014/main" id="{CCD23336-35E2-7BBF-742C-67D82BDC7617}"/>
+                <a16:creationId xmlns:a16="http://schemas.microsoft.com/office/drawing/2014/main" id="{31747F1F-5AA5-4C16-077D-B861466B2D43}"/>
               </a:ext>
             </a:extLst>
           </p:cNvPr>
@@ -7845,8 +7749,8 @@
         </p:nvGrpSpPr>
         <p:grpSpPr>
           <a:xfrm>
-            <a:off x="589938" y="838920"/>
-            <a:ext cx="634026" cy="568432"/>
+            <a:off x="2050303" y="549443"/>
+            <a:ext cx="854822" cy="766386"/>
             <a:chOff x="777945" y="-736888"/>
             <a:chExt cx="663508" cy="663508"/>
           </a:xfrm>
@@ -7856,7 +7760,7 @@
             <p:cNvPr id="5" name="그림 4" descr="패턴, 사각형, 예술, 직사각형이(가) 표시된 사진&#10;&#10;AI 생성 콘텐츠는 정확하지 않을 수 있습니다.">
               <a:extLst>
                 <a:ext uri="{FF2B5EF4-FFF2-40B4-BE49-F238E27FC236}">
-                  <a16:creationId xmlns:a16="http://schemas.microsoft.com/office/drawing/2014/main" id="{40C63F4C-30AB-6EF2-23BA-1233104A9DC3}"/>
+                  <a16:creationId xmlns:a16="http://schemas.microsoft.com/office/drawing/2014/main" id="{1DB8CF0D-9269-F125-ED00-9978E3CC19E5}"/>
                 </a:ext>
               </a:extLst>
             </p:cNvPr>
@@ -7886,7 +7790,7 @@
             <p:cNvPr id="13" name="L 도형 12">
               <a:extLst>
                 <a:ext uri="{FF2B5EF4-FFF2-40B4-BE49-F238E27FC236}">
-                  <a16:creationId xmlns:a16="http://schemas.microsoft.com/office/drawing/2014/main" id="{B242B433-4D06-F840-EA3E-7FA7766D184C}"/>
+                  <a16:creationId xmlns:a16="http://schemas.microsoft.com/office/drawing/2014/main" id="{C30D1DB0-202E-8A8C-451C-56E69056FE32}"/>
                 </a:ext>
               </a:extLst>
             </p:cNvPr>
@@ -7943,7 +7847,7 @@
             <p:cNvPr id="14" name="L 도형 13">
               <a:extLst>
                 <a:ext uri="{FF2B5EF4-FFF2-40B4-BE49-F238E27FC236}">
-                  <a16:creationId xmlns:a16="http://schemas.microsoft.com/office/drawing/2014/main" id="{37DD2CDD-BF9D-CD6A-CC77-30C00DF7A8EA}"/>
+                  <a16:creationId xmlns:a16="http://schemas.microsoft.com/office/drawing/2014/main" id="{9B1B619C-7AC8-1C11-F1F4-40D8C3499AC2}"/>
                 </a:ext>
               </a:extLst>
             </p:cNvPr>
@@ -8000,7 +7904,7 @@
             <p:cNvPr id="15" name="L 도형 14">
               <a:extLst>
                 <a:ext uri="{FF2B5EF4-FFF2-40B4-BE49-F238E27FC236}">
-                  <a16:creationId xmlns:a16="http://schemas.microsoft.com/office/drawing/2014/main" id="{DD20813D-7C4F-9420-E012-EB09FDC9059E}"/>
+                  <a16:creationId xmlns:a16="http://schemas.microsoft.com/office/drawing/2014/main" id="{05A0CF51-7028-B639-37F2-D38D64043ABE}"/>
                 </a:ext>
               </a:extLst>
             </p:cNvPr>
@@ -8057,7 +7961,7 @@
             <p:cNvPr id="16" name="L 도형 15">
               <a:extLst>
                 <a:ext uri="{FF2B5EF4-FFF2-40B4-BE49-F238E27FC236}">
-                  <a16:creationId xmlns:a16="http://schemas.microsoft.com/office/drawing/2014/main" id="{C2F58D7B-1E2F-7C1C-29C2-3CBAF321313E}"/>
+                  <a16:creationId xmlns:a16="http://schemas.microsoft.com/office/drawing/2014/main" id="{7731C4B1-1D06-ABE8-5F52-FD7374069060}"/>
                 </a:ext>
               </a:extLst>
             </p:cNvPr>
@@ -8115,7 +8019,7 @@
           <p:cNvPr id="18" name="그룹 17">
             <a:extLst>
               <a:ext uri="{FF2B5EF4-FFF2-40B4-BE49-F238E27FC236}">
-                <a16:creationId xmlns:a16="http://schemas.microsoft.com/office/drawing/2014/main" id="{360DDF2E-2289-473B-B5F6-77027118C993}"/>
+                <a16:creationId xmlns:a16="http://schemas.microsoft.com/office/drawing/2014/main" id="{ECB13761-177B-0572-6CB1-A6E6EAE4B2AF}"/>
               </a:ext>
             </a:extLst>
           </p:cNvPr>
@@ -8125,9 +8029,9 @@
         <p:grpSpPr>
           <a:xfrm>
             <a:off x="113069" y="274768"/>
-            <a:ext cx="1746464" cy="425416"/>
+            <a:ext cx="1755833" cy="425416"/>
             <a:chOff x="614240" y="226472"/>
-            <a:chExt cx="1746464" cy="425416"/>
+            <a:chExt cx="1755833" cy="425416"/>
           </a:xfrm>
         </p:grpSpPr>
         <p:sp>
@@ -8135,7 +8039,7 @@
             <p:cNvPr id="4" name="TextBox 3">
               <a:extLst>
                 <a:ext uri="{FF2B5EF4-FFF2-40B4-BE49-F238E27FC236}">
-                  <a16:creationId xmlns:a16="http://schemas.microsoft.com/office/drawing/2014/main" id="{1F0C02A7-D766-DD14-548E-2AE7955534F4}"/>
+                  <a16:creationId xmlns:a16="http://schemas.microsoft.com/office/drawing/2014/main" id="{15278631-70F3-056F-6686-C30116B50BC0}"/>
                 </a:ext>
               </a:extLst>
             </p:cNvPr>
@@ -8144,8 +8048,8 @@
           </p:nvSpPr>
           <p:spPr>
             <a:xfrm>
-              <a:off x="685077" y="226472"/>
-              <a:ext cx="1604991" cy="307777"/>
+              <a:off x="646605" y="226472"/>
+              <a:ext cx="1681935" cy="307777"/>
             </a:xfrm>
             <a:prstGeom prst="rect">
               <a:avLst/>
@@ -8160,12 +8064,12 @@
             <a:p>
               <a:pPr algn="ctr"/>
               <a:r>
-                <a:rPr lang="ko-KR" altLang="en-US" sz="1400" dirty="0" err="1">
+                <a:rPr lang="ko-KR" altLang="en-US" sz="1400" b="1" dirty="0" err="1">
                   <a:solidFill>
                     <a:srgbClr val="00B0F0"/>
                   </a:solidFill>
-                  <a:latin typeface="KoPub돋움체 Bold" panose="00000800000000000000" pitchFamily="2" charset="-127"/>
-                  <a:ea typeface="KoPub돋움체 Bold" panose="00000800000000000000" pitchFamily="2" charset="-127"/>
+                  <a:latin typeface="Noto Sans KR Black" panose="020B0200000000000000" pitchFamily="50" charset="-127"/>
+                  <a:ea typeface="Noto Sans KR Black" panose="020B0200000000000000" pitchFamily="50" charset="-127"/>
                 </a:rPr>
                 <a:t>우리가치</a:t>
               </a:r>
@@ -8184,8 +8088,8 @@
               <a:r>
                 <a:rPr lang="en-US" altLang="ko-KR" sz="1400" dirty="0" err="1">
                   <a:solidFill>
-                    <a:schemeClr val="accent1">
-                      <a:lumMod val="50000"/>
+                    <a:schemeClr val="bg2">
+                      <a:lumMod val="10000"/>
                     </a:schemeClr>
                   </a:solidFill>
                   <a:latin typeface="Franklin Gothic Heavy" panose="020B0903020102020204" pitchFamily="34" charset="0"/>
@@ -8195,8 +8099,8 @@
               </a:r>
               <a:endParaRPr lang="en-US" altLang="ko-KR" sz="1400" dirty="0">
                 <a:solidFill>
-                  <a:schemeClr val="accent1">
-                    <a:lumMod val="50000"/>
+                  <a:schemeClr val="bg2">
+                    <a:lumMod val="10000"/>
                   </a:schemeClr>
                 </a:solidFill>
                 <a:latin typeface="Franklin Gothic Heavy" panose="020B0903020102020204" pitchFamily="34" charset="0"/>
@@ -8210,7 +8114,7 @@
             <p:cNvPr id="6" name="TextBox 5">
               <a:extLst>
                 <a:ext uri="{FF2B5EF4-FFF2-40B4-BE49-F238E27FC236}">
-                  <a16:creationId xmlns:a16="http://schemas.microsoft.com/office/drawing/2014/main" id="{25F3C248-44C4-9D7A-C464-62D68C9890DC}"/>
+                  <a16:creationId xmlns:a16="http://schemas.microsoft.com/office/drawing/2014/main" id="{B161F65D-7CC1-469C-B77B-E5625B2EADDF}"/>
                 </a:ext>
               </a:extLst>
             </p:cNvPr>
@@ -8284,7 +8188,7 @@
             <p:cNvPr id="10" name="그림 9">
               <a:extLst>
                 <a:ext uri="{FF2B5EF4-FFF2-40B4-BE49-F238E27FC236}">
-                  <a16:creationId xmlns:a16="http://schemas.microsoft.com/office/drawing/2014/main" id="{EB1E9046-9340-4D3D-AA23-F89851FB0C3F}"/>
+                  <a16:creationId xmlns:a16="http://schemas.microsoft.com/office/drawing/2014/main" id="{815DF3D9-F3D9-85D9-62F4-90DB3DF4F646}"/>
                 </a:ext>
               </a:extLst>
             </p:cNvPr>
@@ -8311,10 +8215,10 @@
         </p:pic>
         <p:pic>
           <p:nvPicPr>
-            <p:cNvPr id="29" name="그림 28">
+            <p:cNvPr id="30" name="그림 29">
               <a:extLst>
                 <a:ext uri="{FF2B5EF4-FFF2-40B4-BE49-F238E27FC236}">
-                  <a16:creationId xmlns:a16="http://schemas.microsoft.com/office/drawing/2014/main" id="{799E618A-B635-413C-90D6-9BBB5F48E428}"/>
+                  <a16:creationId xmlns:a16="http://schemas.microsoft.com/office/drawing/2014/main" id="{C1B02909-B1FD-0935-9187-EB951A16C5E7}"/>
                 </a:ext>
               </a:extLst>
             </p:cNvPr>
@@ -8331,37 +8235,7 @@
           </p:blipFill>
           <p:spPr>
             <a:xfrm rot="10800000">
-              <a:off x="2181315" y="257361"/>
-              <a:ext cx="179389" cy="156650"/>
-            </a:xfrm>
-            <a:prstGeom prst="rect">
-              <a:avLst/>
-            </a:prstGeom>
-          </p:spPr>
-        </p:pic>
-        <p:pic>
-          <p:nvPicPr>
-            <p:cNvPr id="30" name="그림 29">
-              <a:extLst>
-                <a:ext uri="{FF2B5EF4-FFF2-40B4-BE49-F238E27FC236}">
-                  <a16:creationId xmlns:a16="http://schemas.microsoft.com/office/drawing/2014/main" id="{FCD9B137-9F07-4052-B76C-36D6AED25D86}"/>
-                </a:ext>
-              </a:extLst>
-            </p:cNvPr>
-            <p:cNvPicPr>
-              <a:picLocks noChangeAspect="1"/>
-            </p:cNvPicPr>
-            <p:nvPr/>
-          </p:nvPicPr>
-          <p:blipFill>
-            <a:blip r:embed="rId3"/>
-            <a:stretch>
-              <a:fillRect/>
-            </a:stretch>
-          </p:blipFill>
-          <p:spPr>
-            <a:xfrm rot="10800000">
-              <a:off x="2197302" y="276730"/>
+              <a:off x="2222659" y="276730"/>
               <a:ext cx="147414" cy="128728"/>
             </a:xfrm>
             <a:prstGeom prst="rect">
@@ -8375,7 +8249,7 @@
           <p:cNvPr id="12" name="그룹 11">
             <a:extLst>
               <a:ext uri="{FF2B5EF4-FFF2-40B4-BE49-F238E27FC236}">
-                <a16:creationId xmlns:a16="http://schemas.microsoft.com/office/drawing/2014/main" id="{6B2D700B-07E0-4E28-A7D2-0F4C62846EE3}"/>
+                <a16:creationId xmlns:a16="http://schemas.microsoft.com/office/drawing/2014/main" id="{E4BF5A46-07A1-C67D-7FDD-6FFD49F0A241}"/>
               </a:ext>
             </a:extLst>
           </p:cNvPr>
@@ -8384,10 +8258,10 @@
         </p:nvGrpSpPr>
         <p:grpSpPr>
           <a:xfrm>
-            <a:off x="1488355" y="772187"/>
-            <a:ext cx="1564409" cy="707886"/>
+            <a:off x="205429" y="781187"/>
+            <a:ext cx="1731561" cy="784830"/>
             <a:chOff x="796295" y="778765"/>
-            <a:chExt cx="1564409" cy="707886"/>
+            <a:chExt cx="1731561" cy="784830"/>
           </a:xfrm>
         </p:grpSpPr>
         <p:sp>
@@ -8395,7 +8269,7 @@
             <p:cNvPr id="26" name="TextBox 25">
               <a:extLst>
                 <a:ext uri="{FF2B5EF4-FFF2-40B4-BE49-F238E27FC236}">
-                  <a16:creationId xmlns:a16="http://schemas.microsoft.com/office/drawing/2014/main" id="{61921C24-9018-417C-966E-E56980F41166}"/>
+                  <a16:creationId xmlns:a16="http://schemas.microsoft.com/office/drawing/2014/main" id="{421C3F74-278E-4E5B-6A87-08D0B226889B}"/>
                 </a:ext>
               </a:extLst>
             </p:cNvPr>
@@ -8404,8 +8278,8 @@
           </p:nvSpPr>
           <p:spPr>
             <a:xfrm>
-              <a:off x="1422627" y="778765"/>
-              <a:ext cx="938077" cy="707886"/>
+              <a:off x="1495201" y="778765"/>
+              <a:ext cx="1032655" cy="784830"/>
             </a:xfrm>
             <a:prstGeom prst="rect">
               <a:avLst/>
@@ -8419,21 +8293,21 @@
             <a:lstStyle/>
             <a:p>
               <a:r>
-                <a:rPr lang="en-US" altLang="ko-KR" sz="800" dirty="0">
+                <a:rPr lang="en-US" altLang="ko-KR" sz="900" dirty="0">
                   <a:latin typeface="KoPub돋움체 Light" panose="00000300000000000000" pitchFamily="2" charset="-127"/>
                   <a:ea typeface="KoPub돋움체 Light" panose="00000300000000000000" pitchFamily="2" charset="-127"/>
                 </a:rPr>
                 <a:t>"</a:t>
               </a:r>
               <a:r>
-                <a:rPr lang="ko-KR" altLang="en-US" sz="800" dirty="0">
+                <a:rPr lang="ko-KR" altLang="en-US" sz="900" dirty="0">
                   <a:latin typeface="KoPub돋움체 Light" panose="00000300000000000000" pitchFamily="2" charset="-127"/>
                   <a:ea typeface="KoPub돋움체 Light" panose="00000300000000000000" pitchFamily="2" charset="-127"/>
                 </a:rPr>
                 <a:t>함께하는 즐거움</a:t>
               </a:r>
               <a:r>
-                <a:rPr lang="en-US" altLang="ko-KR" sz="800" dirty="0">
+                <a:rPr lang="en-US" altLang="ko-KR" sz="900" dirty="0">
                   <a:latin typeface="KoPub돋움체 Light" panose="00000300000000000000" pitchFamily="2" charset="-127"/>
                   <a:ea typeface="KoPub돋움체 Light" panose="00000300000000000000" pitchFamily="2" charset="-127"/>
                 </a:rPr>
@@ -8442,108 +8316,108 @@
             </a:p>
             <a:p>
               <a:r>
-                <a:rPr lang="en-US" altLang="ko-KR" sz="800" dirty="0">
+                <a:rPr lang="en-US" altLang="ko-KR" sz="900" dirty="0">
                   <a:latin typeface="KoPub돋움체 Light" panose="00000300000000000000" pitchFamily="2" charset="-127"/>
                   <a:ea typeface="KoPub돋움체 Light" panose="00000300000000000000" pitchFamily="2" charset="-127"/>
                 </a:rPr>
                 <a:t>"</a:t>
               </a:r>
               <a:r>
-                <a:rPr lang="ko-KR" altLang="en-US" sz="800" dirty="0">
+                <a:rPr lang="ko-KR" altLang="en-US" sz="900" dirty="0">
                   <a:latin typeface="KoPub돋움체 Light" panose="00000300000000000000" pitchFamily="2" charset="-127"/>
                   <a:ea typeface="KoPub돋움체 Light" panose="00000300000000000000" pitchFamily="2" charset="-127"/>
                 </a:rPr>
                 <a:t>명확한 약속</a:t>
               </a:r>
               <a:r>
-                <a:rPr lang="en-US" altLang="ko-KR" sz="800" dirty="0">
+                <a:rPr lang="en-US" altLang="ko-KR" sz="900" dirty="0">
                   <a:latin typeface="KoPub돋움체 Light" panose="00000300000000000000" pitchFamily="2" charset="-127"/>
                   <a:ea typeface="KoPub돋움체 Light" panose="00000300000000000000" pitchFamily="2" charset="-127"/>
                 </a:rPr>
                 <a:t>"</a:t>
               </a:r>
-              <a:endParaRPr lang="ko-KR" altLang="en-US" sz="800" dirty="0">
+              <a:endParaRPr lang="ko-KR" altLang="en-US" sz="900" dirty="0">
                 <a:latin typeface="KoPub돋움체 Light" panose="00000300000000000000" pitchFamily="2" charset="-127"/>
                 <a:ea typeface="KoPub돋움체 Light" panose="00000300000000000000" pitchFamily="2" charset="-127"/>
               </a:endParaRPr>
             </a:p>
             <a:p>
               <a:r>
-                <a:rPr lang="en-US" altLang="ko-KR" sz="800" dirty="0">
+                <a:rPr lang="en-US" altLang="ko-KR" sz="900" dirty="0">
                   <a:latin typeface="KoPub돋움체 Light" panose="00000300000000000000" pitchFamily="2" charset="-127"/>
                   <a:ea typeface="KoPub돋움체 Light" panose="00000300000000000000" pitchFamily="2" charset="-127"/>
                 </a:rPr>
                 <a:t>"</a:t>
               </a:r>
               <a:r>
-                <a:rPr lang="ko-KR" altLang="en-US" sz="800" dirty="0">
+                <a:rPr lang="ko-KR" altLang="en-US" sz="900" dirty="0">
                   <a:latin typeface="KoPub돋움체 Light" panose="00000300000000000000" pitchFamily="2" charset="-127"/>
                   <a:ea typeface="KoPub돋움체 Light" panose="00000300000000000000" pitchFamily="2" charset="-127"/>
                 </a:rPr>
                 <a:t>한눈에 보는 실무</a:t>
               </a:r>
               <a:r>
-                <a:rPr lang="en-US" altLang="ko-KR" sz="800" dirty="0">
+                <a:rPr lang="en-US" altLang="ko-KR" sz="900" dirty="0">
                   <a:latin typeface="KoPub돋움체 Light" panose="00000300000000000000" pitchFamily="2" charset="-127"/>
                   <a:ea typeface="KoPub돋움체 Light" panose="00000300000000000000" pitchFamily="2" charset="-127"/>
                 </a:rPr>
                 <a:t>"</a:t>
               </a:r>
-              <a:endParaRPr lang="ko-KR" altLang="en-US" sz="800" dirty="0">
+              <a:endParaRPr lang="ko-KR" altLang="en-US" sz="900" dirty="0">
                 <a:latin typeface="KoPub돋움체 Light" panose="00000300000000000000" pitchFamily="2" charset="-127"/>
                 <a:ea typeface="KoPub돋움체 Light" panose="00000300000000000000" pitchFamily="2" charset="-127"/>
               </a:endParaRPr>
             </a:p>
             <a:p>
               <a:r>
-                <a:rPr lang="en-US" altLang="ko-KR" sz="800" dirty="0">
+                <a:rPr lang="en-US" altLang="ko-KR" sz="900" dirty="0">
                   <a:latin typeface="KoPub돋움체 Light" panose="00000300000000000000" pitchFamily="2" charset="-127"/>
                   <a:ea typeface="KoPub돋움체 Light" panose="00000300000000000000" pitchFamily="2" charset="-127"/>
                 </a:rPr>
                 <a:t>"</a:t>
               </a:r>
               <a:r>
-                <a:rPr lang="ko-KR" altLang="en-US" sz="800" dirty="0">
+                <a:rPr lang="ko-KR" altLang="en-US" sz="900" dirty="0">
                   <a:latin typeface="KoPub돋움체 Light" panose="00000300000000000000" pitchFamily="2" charset="-127"/>
                   <a:ea typeface="KoPub돋움체 Light" panose="00000300000000000000" pitchFamily="2" charset="-127"/>
                 </a:rPr>
                 <a:t>현장 밀착형 지원</a:t>
               </a:r>
               <a:r>
-                <a:rPr lang="en-US" altLang="ko-KR" sz="800" dirty="0">
+                <a:rPr lang="en-US" altLang="ko-KR" sz="900" dirty="0">
                   <a:latin typeface="KoPub돋움체 Light" panose="00000300000000000000" pitchFamily="2" charset="-127"/>
                   <a:ea typeface="KoPub돋움체 Light" panose="00000300000000000000" pitchFamily="2" charset="-127"/>
                 </a:rPr>
                 <a:t>"</a:t>
               </a:r>
-              <a:endParaRPr lang="ko-KR" altLang="en-US" sz="800" dirty="0">
+              <a:endParaRPr lang="ko-KR" altLang="en-US" sz="900" dirty="0">
                 <a:latin typeface="KoPub돋움체 Light" panose="00000300000000000000" pitchFamily="2" charset="-127"/>
                 <a:ea typeface="KoPub돋움체 Light" panose="00000300000000000000" pitchFamily="2" charset="-127"/>
               </a:endParaRPr>
             </a:p>
             <a:p>
               <a:r>
-                <a:rPr lang="en-US" altLang="ko-KR" sz="800" dirty="0">
+                <a:rPr lang="en-US" altLang="ko-KR" sz="900" dirty="0">
                   <a:latin typeface="KoPub돋움체 Light" panose="00000300000000000000" pitchFamily="2" charset="-127"/>
                   <a:ea typeface="KoPub돋움체 Light" panose="00000300000000000000" pitchFamily="2" charset="-127"/>
                 </a:rPr>
                 <a:t>"</a:t>
               </a:r>
               <a:r>
-                <a:rPr lang="ko-KR" altLang="en-US" sz="800" dirty="0">
+                <a:rPr lang="ko-KR" altLang="en-US" sz="900" dirty="0">
                   <a:latin typeface="KoPub돋움체 Light" panose="00000300000000000000" pitchFamily="2" charset="-127"/>
                   <a:ea typeface="KoPub돋움체 Light" panose="00000300000000000000" pitchFamily="2" charset="-127"/>
                 </a:rPr>
                 <a:t>변화의 체감</a:t>
               </a:r>
               <a:r>
-                <a:rPr lang="en-US" altLang="ko-KR" sz="800" dirty="0">
+                <a:rPr lang="en-US" altLang="ko-KR" sz="900" dirty="0">
                   <a:latin typeface="KoPub돋움체 Light" panose="00000300000000000000" pitchFamily="2" charset="-127"/>
                   <a:ea typeface="KoPub돋움체 Light" panose="00000300000000000000" pitchFamily="2" charset="-127"/>
                 </a:rPr>
                 <a:t>"</a:t>
               </a:r>
-              <a:endParaRPr lang="ko-KR" altLang="en-US" sz="800" dirty="0">
+              <a:endParaRPr lang="ko-KR" altLang="en-US" sz="900" dirty="0">
                 <a:latin typeface="KoPub돋움체 Light" panose="00000300000000000000" pitchFamily="2" charset="-127"/>
                 <a:ea typeface="KoPub돋움체 Light" panose="00000300000000000000" pitchFamily="2" charset="-127"/>
               </a:endParaRPr>
@@ -8555,7 +8429,7 @@
             <p:cNvPr id="31" name="TextBox 30">
               <a:extLst>
                 <a:ext uri="{FF2B5EF4-FFF2-40B4-BE49-F238E27FC236}">
-                  <a16:creationId xmlns:a16="http://schemas.microsoft.com/office/drawing/2014/main" id="{62EAB35A-296C-468C-BCA0-D585048BF4E9}"/>
+                  <a16:creationId xmlns:a16="http://schemas.microsoft.com/office/drawing/2014/main" id="{C130B983-8173-319F-0183-7FA781C1A7A0}"/>
                 </a:ext>
               </a:extLst>
             </p:cNvPr>
@@ -8565,7 +8439,7 @@
           <p:spPr>
             <a:xfrm>
               <a:off x="796295" y="778765"/>
-              <a:ext cx="753732" cy="707886"/>
+              <a:ext cx="813043" cy="784830"/>
             </a:xfrm>
             <a:prstGeom prst="rect">
               <a:avLst/>
@@ -8586,13 +8460,13 @@
                 <a:buChar char="•"/>
               </a:pPr>
               <a:r>
-                <a:rPr lang="ko-KR" altLang="en-US" sz="800" b="1" dirty="0">
+                <a:rPr lang="ko-KR" altLang="en-US" sz="900" b="1" dirty="0">
                   <a:latin typeface="KoPub돋움체 Bold" panose="00000800000000000000" pitchFamily="2" charset="-127"/>
                   <a:ea typeface="KoPub돋움체 Bold" panose="00000800000000000000" pitchFamily="2" charset="-127"/>
                 </a:rPr>
                 <a:t>소통의 광장</a:t>
               </a:r>
-              <a:endParaRPr lang="en-US" altLang="ko-KR" sz="800" b="1" dirty="0">
+              <a:endParaRPr lang="en-US" altLang="ko-KR" sz="900" b="1" dirty="0">
                 <a:latin typeface="KoPub돋움체 Bold" panose="00000800000000000000" pitchFamily="2" charset="-127"/>
                 <a:ea typeface="KoPub돋움체 Bold" panose="00000800000000000000" pitchFamily="2" charset="-127"/>
               </a:endParaRPr>
@@ -8606,7 +8480,7 @@
                 <a:buChar char="•"/>
               </a:pPr>
               <a:r>
-                <a:rPr lang="ko-KR" altLang="en-US" sz="800" b="1" dirty="0">
+                <a:rPr lang="ko-KR" altLang="en-US" sz="900" b="1" dirty="0">
                   <a:latin typeface="KoPub돋움체 Bold" panose="00000800000000000000" pitchFamily="2" charset="-127"/>
                   <a:ea typeface="KoPub돋움체 Bold" panose="00000800000000000000" pitchFamily="2" charset="-127"/>
                 </a:rPr>
@@ -8622,7 +8496,7 @@
                 <a:buChar char="•"/>
               </a:pPr>
               <a:r>
-                <a:rPr lang="ko-KR" altLang="en-US" sz="800" b="1" dirty="0">
+                <a:rPr lang="ko-KR" altLang="en-US" sz="900" b="1" dirty="0">
                   <a:latin typeface="KoPub돋움체 Bold" panose="00000800000000000000" pitchFamily="2" charset="-127"/>
                   <a:ea typeface="KoPub돋움체 Bold" panose="00000800000000000000" pitchFamily="2" charset="-127"/>
                 </a:rPr>
@@ -8638,7 +8512,7 @@
                 <a:buChar char="•"/>
               </a:pPr>
               <a:r>
-                <a:rPr lang="ko-KR" altLang="en-US" sz="800" b="1" dirty="0">
+                <a:rPr lang="ko-KR" altLang="en-US" sz="900" b="1" dirty="0">
                   <a:latin typeface="KoPub돋움체 Bold" panose="00000800000000000000" pitchFamily="2" charset="-127"/>
                   <a:ea typeface="KoPub돋움체 Bold" panose="00000800000000000000" pitchFamily="2" charset="-127"/>
                 </a:rPr>
@@ -8654,7 +8528,7 @@
                 <a:buChar char="•"/>
               </a:pPr>
               <a:r>
-                <a:rPr lang="ko-KR" altLang="en-US" sz="800" b="1" dirty="0">
+                <a:rPr lang="ko-KR" altLang="en-US" sz="900" b="1" dirty="0">
                   <a:latin typeface="KoPub돋움체 Bold" panose="00000800000000000000" pitchFamily="2" charset="-127"/>
                   <a:ea typeface="KoPub돋움체 Bold" panose="00000800000000000000" pitchFamily="2" charset="-127"/>
                 </a:rPr>
@@ -8667,7 +8541,7 @@
     </p:spTree>
     <p:extLst>
       <p:ext uri="{BB962C8B-B14F-4D97-AF65-F5344CB8AC3E}">
-        <p14:creationId xmlns:p14="http://schemas.microsoft.com/office/powerpoint/2010/main" val="3037608543"/>
+        <p14:creationId xmlns:p14="http://schemas.microsoft.com/office/powerpoint/2010/main" val="3591184894"/>
       </p:ext>
     </p:extLst>
   </p:cSld>
@@ -8682,7 +8556,13 @@
   <p:cSld>
     <p:spTree>
       <p:nvGrpSpPr>
-        <p:cNvPr id="1" name=""/>
+        <p:cNvPr id="1" name="">
+          <a:extLst>
+            <a:ext uri="{FF2B5EF4-FFF2-40B4-BE49-F238E27FC236}">
+              <a16:creationId xmlns:a16="http://schemas.microsoft.com/office/drawing/2014/main" id="{E9A2820A-B4D2-E46D-10B9-F8ED4B428E92}"/>
+            </a:ext>
+          </a:extLst>
+        </p:cNvPr>
         <p:cNvGrpSpPr/>
         <p:nvPr/>
       </p:nvGrpSpPr>
@@ -8699,7 +8579,7 @@
           <p:cNvPr id="3" name="TextBox 2">
             <a:extLst>
               <a:ext uri="{FF2B5EF4-FFF2-40B4-BE49-F238E27FC236}">
-                <a16:creationId xmlns:a16="http://schemas.microsoft.com/office/drawing/2014/main" id="{F5E3E193-F1E8-6947-F01D-A96C1A9F6D0E}"/>
+                <a16:creationId xmlns:a16="http://schemas.microsoft.com/office/drawing/2014/main" id="{44FF95E4-3D72-A57A-28CB-829BED66AB1C}"/>
               </a:ext>
             </a:extLst>
           </p:cNvPr>
@@ -8751,7 +8631,7 @@
           <p:cNvPr id="17" name="그룹 16">
             <a:extLst>
               <a:ext uri="{FF2B5EF4-FFF2-40B4-BE49-F238E27FC236}">
-                <a16:creationId xmlns:a16="http://schemas.microsoft.com/office/drawing/2014/main" id="{CCD23336-35E2-7BBF-742C-67D82BDC7617}"/>
+                <a16:creationId xmlns:a16="http://schemas.microsoft.com/office/drawing/2014/main" id="{7B3D8C7F-6FAC-B2DC-F1E3-BA0BD38482A2}"/>
               </a:ext>
             </a:extLst>
           </p:cNvPr>
@@ -8760,8 +8640,8 @@
         </p:nvGrpSpPr>
         <p:grpSpPr>
           <a:xfrm>
-            <a:off x="589938" y="838920"/>
-            <a:ext cx="634026" cy="568432"/>
+            <a:off x="2050303" y="549443"/>
+            <a:ext cx="854822" cy="766386"/>
             <a:chOff x="777945" y="-736888"/>
             <a:chExt cx="663508" cy="663508"/>
           </a:xfrm>
@@ -8771,7 +8651,7 @@
             <p:cNvPr id="5" name="그림 4" descr="패턴, 사각형, 예술, 직사각형이(가) 표시된 사진&#10;&#10;AI 생성 콘텐츠는 정확하지 않을 수 있습니다.">
               <a:extLst>
                 <a:ext uri="{FF2B5EF4-FFF2-40B4-BE49-F238E27FC236}">
-                  <a16:creationId xmlns:a16="http://schemas.microsoft.com/office/drawing/2014/main" id="{40C63F4C-30AB-6EF2-23BA-1233104A9DC3}"/>
+                  <a16:creationId xmlns:a16="http://schemas.microsoft.com/office/drawing/2014/main" id="{53D5053F-7959-FCD3-E4C2-5F1B3CE13360}"/>
                 </a:ext>
               </a:extLst>
             </p:cNvPr>
@@ -8801,7 +8681,7 @@
             <p:cNvPr id="13" name="L 도형 12">
               <a:extLst>
                 <a:ext uri="{FF2B5EF4-FFF2-40B4-BE49-F238E27FC236}">
-                  <a16:creationId xmlns:a16="http://schemas.microsoft.com/office/drawing/2014/main" id="{B242B433-4D06-F840-EA3E-7FA7766D184C}"/>
+                  <a16:creationId xmlns:a16="http://schemas.microsoft.com/office/drawing/2014/main" id="{F8B23C62-224A-6389-C092-78BA09772905}"/>
                 </a:ext>
               </a:extLst>
             </p:cNvPr>
@@ -8858,7 +8738,7 @@
             <p:cNvPr id="14" name="L 도형 13">
               <a:extLst>
                 <a:ext uri="{FF2B5EF4-FFF2-40B4-BE49-F238E27FC236}">
-                  <a16:creationId xmlns:a16="http://schemas.microsoft.com/office/drawing/2014/main" id="{37DD2CDD-BF9D-CD6A-CC77-30C00DF7A8EA}"/>
+                  <a16:creationId xmlns:a16="http://schemas.microsoft.com/office/drawing/2014/main" id="{BA7C650D-15DD-13DD-9936-06010436CE31}"/>
                 </a:ext>
               </a:extLst>
             </p:cNvPr>
@@ -8915,7 +8795,7 @@
             <p:cNvPr id="15" name="L 도형 14">
               <a:extLst>
                 <a:ext uri="{FF2B5EF4-FFF2-40B4-BE49-F238E27FC236}">
-                  <a16:creationId xmlns:a16="http://schemas.microsoft.com/office/drawing/2014/main" id="{DD20813D-7C4F-9420-E012-EB09FDC9059E}"/>
+                  <a16:creationId xmlns:a16="http://schemas.microsoft.com/office/drawing/2014/main" id="{07C75194-149D-5FE0-5335-0B6A1DE322B5}"/>
                 </a:ext>
               </a:extLst>
             </p:cNvPr>
@@ -8972,7 +8852,7 @@
             <p:cNvPr id="16" name="L 도형 15">
               <a:extLst>
                 <a:ext uri="{FF2B5EF4-FFF2-40B4-BE49-F238E27FC236}">
-                  <a16:creationId xmlns:a16="http://schemas.microsoft.com/office/drawing/2014/main" id="{C2F58D7B-1E2F-7C1C-29C2-3CBAF321313E}"/>
+                  <a16:creationId xmlns:a16="http://schemas.microsoft.com/office/drawing/2014/main" id="{904EBC0D-29A8-ACE4-0B30-55DDD97618AE}"/>
                 </a:ext>
               </a:extLst>
             </p:cNvPr>
@@ -9030,7 +8910,7 @@
           <p:cNvPr id="18" name="그룹 17">
             <a:extLst>
               <a:ext uri="{FF2B5EF4-FFF2-40B4-BE49-F238E27FC236}">
-                <a16:creationId xmlns:a16="http://schemas.microsoft.com/office/drawing/2014/main" id="{360DDF2E-2289-473B-B5F6-77027118C993}"/>
+                <a16:creationId xmlns:a16="http://schemas.microsoft.com/office/drawing/2014/main" id="{C66D0ED8-EF19-E284-C6AC-2510E8CE63D9}"/>
               </a:ext>
             </a:extLst>
           </p:cNvPr>
@@ -9040,9 +8920,9 @@
         <p:grpSpPr>
           <a:xfrm>
             <a:off x="113069" y="274768"/>
-            <a:ext cx="1746464" cy="425416"/>
+            <a:ext cx="1755833" cy="425416"/>
             <a:chOff x="614240" y="226472"/>
-            <a:chExt cx="1746464" cy="425416"/>
+            <a:chExt cx="1755833" cy="425416"/>
           </a:xfrm>
         </p:grpSpPr>
         <p:sp>
@@ -9050,7 +8930,7 @@
             <p:cNvPr id="4" name="TextBox 3">
               <a:extLst>
                 <a:ext uri="{FF2B5EF4-FFF2-40B4-BE49-F238E27FC236}">
-                  <a16:creationId xmlns:a16="http://schemas.microsoft.com/office/drawing/2014/main" id="{1F0C02A7-D766-DD14-548E-2AE7955534F4}"/>
+                  <a16:creationId xmlns:a16="http://schemas.microsoft.com/office/drawing/2014/main" id="{52897FB5-7AB8-9E90-B425-8548637A93C5}"/>
                 </a:ext>
               </a:extLst>
             </p:cNvPr>
@@ -9059,8 +8939,8 @@
           </p:nvSpPr>
           <p:spPr>
             <a:xfrm>
-              <a:off x="685077" y="226472"/>
-              <a:ext cx="1604991" cy="307777"/>
+              <a:off x="646605" y="226472"/>
+              <a:ext cx="1681935" cy="307777"/>
             </a:xfrm>
             <a:prstGeom prst="rect">
               <a:avLst/>
@@ -9075,12 +8955,12 @@
             <a:p>
               <a:pPr algn="ctr"/>
               <a:r>
-                <a:rPr lang="ko-KR" altLang="en-US" sz="1400" dirty="0" err="1">
+                <a:rPr lang="ko-KR" altLang="en-US" sz="1400" b="1" dirty="0" err="1">
                   <a:solidFill>
                     <a:srgbClr val="00B0F0"/>
                   </a:solidFill>
-                  <a:latin typeface="KoPub돋움체 Bold" panose="00000800000000000000" pitchFamily="2" charset="-127"/>
-                  <a:ea typeface="KoPub돋움체 Bold" panose="00000800000000000000" pitchFamily="2" charset="-127"/>
+                  <a:latin typeface="Noto Sans KR Black" panose="020B0200000000000000" pitchFamily="50" charset="-127"/>
+                  <a:ea typeface="Noto Sans KR Black" panose="020B0200000000000000" pitchFamily="50" charset="-127"/>
                 </a:rPr>
                 <a:t>우리가치</a:t>
               </a:r>
@@ -9125,7 +9005,7 @@
             <p:cNvPr id="6" name="TextBox 5">
               <a:extLst>
                 <a:ext uri="{FF2B5EF4-FFF2-40B4-BE49-F238E27FC236}">
-                  <a16:creationId xmlns:a16="http://schemas.microsoft.com/office/drawing/2014/main" id="{25F3C248-44C4-9D7A-C464-62D68C9890DC}"/>
+                  <a16:creationId xmlns:a16="http://schemas.microsoft.com/office/drawing/2014/main" id="{54C445C6-7A9C-6F31-BE91-E3F66A510177}"/>
                 </a:ext>
               </a:extLst>
             </p:cNvPr>
@@ -9199,7 +9079,7 @@
             <p:cNvPr id="10" name="그림 9">
               <a:extLst>
                 <a:ext uri="{FF2B5EF4-FFF2-40B4-BE49-F238E27FC236}">
-                  <a16:creationId xmlns:a16="http://schemas.microsoft.com/office/drawing/2014/main" id="{EB1E9046-9340-4D3D-AA23-F89851FB0C3F}"/>
+                  <a16:creationId xmlns:a16="http://schemas.microsoft.com/office/drawing/2014/main" id="{CBAF3D6C-A41F-BE3C-3C2A-A78F89FDF17B}"/>
                 </a:ext>
               </a:extLst>
             </p:cNvPr>
@@ -9226,10 +9106,10 @@
         </p:pic>
         <p:pic>
           <p:nvPicPr>
-            <p:cNvPr id="29" name="그림 28">
+            <p:cNvPr id="30" name="그림 29">
               <a:extLst>
                 <a:ext uri="{FF2B5EF4-FFF2-40B4-BE49-F238E27FC236}">
-                  <a16:creationId xmlns:a16="http://schemas.microsoft.com/office/drawing/2014/main" id="{799E618A-B635-413C-90D6-9BBB5F48E428}"/>
+                  <a16:creationId xmlns:a16="http://schemas.microsoft.com/office/drawing/2014/main" id="{591357B3-E42D-AA88-F0C8-196DDE389AD5}"/>
                 </a:ext>
               </a:extLst>
             </p:cNvPr>
@@ -9246,37 +9126,7 @@
           </p:blipFill>
           <p:spPr>
             <a:xfrm rot="10800000">
-              <a:off x="2181315" y="257361"/>
-              <a:ext cx="179389" cy="156650"/>
-            </a:xfrm>
-            <a:prstGeom prst="rect">
-              <a:avLst/>
-            </a:prstGeom>
-          </p:spPr>
-        </p:pic>
-        <p:pic>
-          <p:nvPicPr>
-            <p:cNvPr id="30" name="그림 29">
-              <a:extLst>
-                <a:ext uri="{FF2B5EF4-FFF2-40B4-BE49-F238E27FC236}">
-                  <a16:creationId xmlns:a16="http://schemas.microsoft.com/office/drawing/2014/main" id="{FCD9B137-9F07-4052-B76C-36D6AED25D86}"/>
-                </a:ext>
-              </a:extLst>
-            </p:cNvPr>
-            <p:cNvPicPr>
-              <a:picLocks noChangeAspect="1"/>
-            </p:cNvPicPr>
-            <p:nvPr/>
-          </p:nvPicPr>
-          <p:blipFill>
-            <a:blip r:embed="rId3"/>
-            <a:stretch>
-              <a:fillRect/>
-            </a:stretch>
-          </p:blipFill>
-          <p:spPr>
-            <a:xfrm rot="10800000">
-              <a:off x="2197302" y="276730"/>
+              <a:off x="2222659" y="276730"/>
               <a:ext cx="147414" cy="128728"/>
             </a:xfrm>
             <a:prstGeom prst="rect">
@@ -9290,7 +9140,7 @@
           <p:cNvPr id="12" name="그룹 11">
             <a:extLst>
               <a:ext uri="{FF2B5EF4-FFF2-40B4-BE49-F238E27FC236}">
-                <a16:creationId xmlns:a16="http://schemas.microsoft.com/office/drawing/2014/main" id="{6B2D700B-07E0-4E28-A7D2-0F4C62846EE3}"/>
+                <a16:creationId xmlns:a16="http://schemas.microsoft.com/office/drawing/2014/main" id="{C76EDDA3-0179-EE4D-B001-73D6EA954789}"/>
               </a:ext>
             </a:extLst>
           </p:cNvPr>
@@ -9299,10 +9149,10 @@
         </p:nvGrpSpPr>
         <p:grpSpPr>
           <a:xfrm>
-            <a:off x="1488355" y="772187"/>
-            <a:ext cx="1564409" cy="707886"/>
+            <a:off x="205429" y="781187"/>
+            <a:ext cx="1731561" cy="784830"/>
             <a:chOff x="796295" y="778765"/>
-            <a:chExt cx="1564409" cy="707886"/>
+            <a:chExt cx="1731561" cy="784830"/>
           </a:xfrm>
         </p:grpSpPr>
         <p:sp>
@@ -9310,7 +9160,7 @@
             <p:cNvPr id="26" name="TextBox 25">
               <a:extLst>
                 <a:ext uri="{FF2B5EF4-FFF2-40B4-BE49-F238E27FC236}">
-                  <a16:creationId xmlns:a16="http://schemas.microsoft.com/office/drawing/2014/main" id="{61921C24-9018-417C-966E-E56980F41166}"/>
+                  <a16:creationId xmlns:a16="http://schemas.microsoft.com/office/drawing/2014/main" id="{C8DF4D13-C70B-2F32-B5F3-B6EB82F96C1B}"/>
                 </a:ext>
               </a:extLst>
             </p:cNvPr>
@@ -9319,8 +9169,8 @@
           </p:nvSpPr>
           <p:spPr>
             <a:xfrm>
-              <a:off x="1422627" y="778765"/>
-              <a:ext cx="938077" cy="707886"/>
+              <a:off x="1495201" y="778765"/>
+              <a:ext cx="1032655" cy="784830"/>
             </a:xfrm>
             <a:prstGeom prst="rect">
               <a:avLst/>
@@ -9334,21 +9184,21 @@
             <a:lstStyle/>
             <a:p>
               <a:r>
-                <a:rPr lang="en-US" altLang="ko-KR" sz="800" dirty="0">
+                <a:rPr lang="en-US" altLang="ko-KR" sz="900" dirty="0">
                   <a:latin typeface="KoPub돋움체 Light" panose="00000300000000000000" pitchFamily="2" charset="-127"/>
                   <a:ea typeface="KoPub돋움체 Light" panose="00000300000000000000" pitchFamily="2" charset="-127"/>
                 </a:rPr>
                 <a:t>"</a:t>
               </a:r>
               <a:r>
-                <a:rPr lang="ko-KR" altLang="en-US" sz="800" dirty="0">
+                <a:rPr lang="ko-KR" altLang="en-US" sz="900" dirty="0">
                   <a:latin typeface="KoPub돋움체 Light" panose="00000300000000000000" pitchFamily="2" charset="-127"/>
                   <a:ea typeface="KoPub돋움체 Light" panose="00000300000000000000" pitchFamily="2" charset="-127"/>
                 </a:rPr>
                 <a:t>함께하는 즐거움</a:t>
               </a:r>
               <a:r>
-                <a:rPr lang="en-US" altLang="ko-KR" sz="800" dirty="0">
+                <a:rPr lang="en-US" altLang="ko-KR" sz="900" dirty="0">
                   <a:latin typeface="KoPub돋움체 Light" panose="00000300000000000000" pitchFamily="2" charset="-127"/>
                   <a:ea typeface="KoPub돋움체 Light" panose="00000300000000000000" pitchFamily="2" charset="-127"/>
                 </a:rPr>
@@ -9357,108 +9207,108 @@
             </a:p>
             <a:p>
               <a:r>
-                <a:rPr lang="en-US" altLang="ko-KR" sz="800" dirty="0">
+                <a:rPr lang="en-US" altLang="ko-KR" sz="900" dirty="0">
                   <a:latin typeface="KoPub돋움체 Light" panose="00000300000000000000" pitchFamily="2" charset="-127"/>
                   <a:ea typeface="KoPub돋움체 Light" panose="00000300000000000000" pitchFamily="2" charset="-127"/>
                 </a:rPr>
                 <a:t>"</a:t>
               </a:r>
               <a:r>
-                <a:rPr lang="ko-KR" altLang="en-US" sz="800" dirty="0">
+                <a:rPr lang="ko-KR" altLang="en-US" sz="900" dirty="0">
                   <a:latin typeface="KoPub돋움체 Light" panose="00000300000000000000" pitchFamily="2" charset="-127"/>
                   <a:ea typeface="KoPub돋움체 Light" panose="00000300000000000000" pitchFamily="2" charset="-127"/>
                 </a:rPr>
                 <a:t>명확한 약속</a:t>
               </a:r>
               <a:r>
-                <a:rPr lang="en-US" altLang="ko-KR" sz="800" dirty="0">
+                <a:rPr lang="en-US" altLang="ko-KR" sz="900" dirty="0">
                   <a:latin typeface="KoPub돋움체 Light" panose="00000300000000000000" pitchFamily="2" charset="-127"/>
                   <a:ea typeface="KoPub돋움체 Light" panose="00000300000000000000" pitchFamily="2" charset="-127"/>
                 </a:rPr>
                 <a:t>"</a:t>
               </a:r>
-              <a:endParaRPr lang="ko-KR" altLang="en-US" sz="800" dirty="0">
+              <a:endParaRPr lang="ko-KR" altLang="en-US" sz="900" dirty="0">
                 <a:latin typeface="KoPub돋움체 Light" panose="00000300000000000000" pitchFamily="2" charset="-127"/>
                 <a:ea typeface="KoPub돋움체 Light" panose="00000300000000000000" pitchFamily="2" charset="-127"/>
               </a:endParaRPr>
             </a:p>
             <a:p>
               <a:r>
-                <a:rPr lang="en-US" altLang="ko-KR" sz="800" dirty="0">
+                <a:rPr lang="en-US" altLang="ko-KR" sz="900" dirty="0">
                   <a:latin typeface="KoPub돋움체 Light" panose="00000300000000000000" pitchFamily="2" charset="-127"/>
                   <a:ea typeface="KoPub돋움체 Light" panose="00000300000000000000" pitchFamily="2" charset="-127"/>
                 </a:rPr>
                 <a:t>"</a:t>
               </a:r>
               <a:r>
-                <a:rPr lang="ko-KR" altLang="en-US" sz="800" dirty="0">
+                <a:rPr lang="ko-KR" altLang="en-US" sz="900" dirty="0">
                   <a:latin typeface="KoPub돋움체 Light" panose="00000300000000000000" pitchFamily="2" charset="-127"/>
                   <a:ea typeface="KoPub돋움체 Light" panose="00000300000000000000" pitchFamily="2" charset="-127"/>
                 </a:rPr>
                 <a:t>한눈에 보는 실무</a:t>
               </a:r>
               <a:r>
-                <a:rPr lang="en-US" altLang="ko-KR" sz="800" dirty="0">
+                <a:rPr lang="en-US" altLang="ko-KR" sz="900" dirty="0">
                   <a:latin typeface="KoPub돋움체 Light" panose="00000300000000000000" pitchFamily="2" charset="-127"/>
                   <a:ea typeface="KoPub돋움체 Light" panose="00000300000000000000" pitchFamily="2" charset="-127"/>
                 </a:rPr>
                 <a:t>"</a:t>
               </a:r>
-              <a:endParaRPr lang="ko-KR" altLang="en-US" sz="800" dirty="0">
+              <a:endParaRPr lang="ko-KR" altLang="en-US" sz="900" dirty="0">
                 <a:latin typeface="KoPub돋움체 Light" panose="00000300000000000000" pitchFamily="2" charset="-127"/>
                 <a:ea typeface="KoPub돋움체 Light" panose="00000300000000000000" pitchFamily="2" charset="-127"/>
               </a:endParaRPr>
             </a:p>
             <a:p>
               <a:r>
-                <a:rPr lang="en-US" altLang="ko-KR" sz="800" dirty="0">
+                <a:rPr lang="en-US" altLang="ko-KR" sz="900" dirty="0">
                   <a:latin typeface="KoPub돋움체 Light" panose="00000300000000000000" pitchFamily="2" charset="-127"/>
                   <a:ea typeface="KoPub돋움체 Light" panose="00000300000000000000" pitchFamily="2" charset="-127"/>
                 </a:rPr>
                 <a:t>"</a:t>
               </a:r>
               <a:r>
-                <a:rPr lang="ko-KR" altLang="en-US" sz="800" dirty="0">
+                <a:rPr lang="ko-KR" altLang="en-US" sz="900" dirty="0">
                   <a:latin typeface="KoPub돋움체 Light" panose="00000300000000000000" pitchFamily="2" charset="-127"/>
                   <a:ea typeface="KoPub돋움체 Light" panose="00000300000000000000" pitchFamily="2" charset="-127"/>
                 </a:rPr>
                 <a:t>현장 밀착형 지원</a:t>
               </a:r>
               <a:r>
-                <a:rPr lang="en-US" altLang="ko-KR" sz="800" dirty="0">
+                <a:rPr lang="en-US" altLang="ko-KR" sz="900" dirty="0">
                   <a:latin typeface="KoPub돋움체 Light" panose="00000300000000000000" pitchFamily="2" charset="-127"/>
                   <a:ea typeface="KoPub돋움체 Light" panose="00000300000000000000" pitchFamily="2" charset="-127"/>
                 </a:rPr>
                 <a:t>"</a:t>
               </a:r>
-              <a:endParaRPr lang="ko-KR" altLang="en-US" sz="800" dirty="0">
+              <a:endParaRPr lang="ko-KR" altLang="en-US" sz="900" dirty="0">
                 <a:latin typeface="KoPub돋움체 Light" panose="00000300000000000000" pitchFamily="2" charset="-127"/>
                 <a:ea typeface="KoPub돋움체 Light" panose="00000300000000000000" pitchFamily="2" charset="-127"/>
               </a:endParaRPr>
             </a:p>
             <a:p>
               <a:r>
-                <a:rPr lang="en-US" altLang="ko-KR" sz="800" dirty="0">
+                <a:rPr lang="en-US" altLang="ko-KR" sz="900" dirty="0">
                   <a:latin typeface="KoPub돋움체 Light" panose="00000300000000000000" pitchFamily="2" charset="-127"/>
                   <a:ea typeface="KoPub돋움체 Light" panose="00000300000000000000" pitchFamily="2" charset="-127"/>
                 </a:rPr>
                 <a:t>"</a:t>
               </a:r>
               <a:r>
-                <a:rPr lang="ko-KR" altLang="en-US" sz="800" dirty="0">
+                <a:rPr lang="ko-KR" altLang="en-US" sz="900" dirty="0">
                   <a:latin typeface="KoPub돋움체 Light" panose="00000300000000000000" pitchFamily="2" charset="-127"/>
                   <a:ea typeface="KoPub돋움체 Light" panose="00000300000000000000" pitchFamily="2" charset="-127"/>
                 </a:rPr>
                 <a:t>변화의 체감</a:t>
               </a:r>
               <a:r>
-                <a:rPr lang="en-US" altLang="ko-KR" sz="800" dirty="0">
+                <a:rPr lang="en-US" altLang="ko-KR" sz="900" dirty="0">
                   <a:latin typeface="KoPub돋움체 Light" panose="00000300000000000000" pitchFamily="2" charset="-127"/>
                   <a:ea typeface="KoPub돋움체 Light" panose="00000300000000000000" pitchFamily="2" charset="-127"/>
                 </a:rPr>
                 <a:t>"</a:t>
               </a:r>
-              <a:endParaRPr lang="ko-KR" altLang="en-US" sz="800" dirty="0">
+              <a:endParaRPr lang="ko-KR" altLang="en-US" sz="900" dirty="0">
                 <a:latin typeface="KoPub돋움체 Light" panose="00000300000000000000" pitchFamily="2" charset="-127"/>
                 <a:ea typeface="KoPub돋움체 Light" panose="00000300000000000000" pitchFamily="2" charset="-127"/>
               </a:endParaRPr>
@@ -9470,7 +9320,7 @@
             <p:cNvPr id="31" name="TextBox 30">
               <a:extLst>
                 <a:ext uri="{FF2B5EF4-FFF2-40B4-BE49-F238E27FC236}">
-                  <a16:creationId xmlns:a16="http://schemas.microsoft.com/office/drawing/2014/main" id="{62EAB35A-296C-468C-BCA0-D585048BF4E9}"/>
+                  <a16:creationId xmlns:a16="http://schemas.microsoft.com/office/drawing/2014/main" id="{925BF914-A40D-9720-C2CE-C62A45D9DB8B}"/>
                 </a:ext>
               </a:extLst>
             </p:cNvPr>
@@ -9480,7 +9330,7 @@
           <p:spPr>
             <a:xfrm>
               <a:off x="796295" y="778765"/>
-              <a:ext cx="753732" cy="707886"/>
+              <a:ext cx="813043" cy="784830"/>
             </a:xfrm>
             <a:prstGeom prst="rect">
               <a:avLst/>
@@ -9501,13 +9351,13 @@
                 <a:buChar char="•"/>
               </a:pPr>
               <a:r>
-                <a:rPr lang="ko-KR" altLang="en-US" sz="800" b="1" dirty="0">
+                <a:rPr lang="ko-KR" altLang="en-US" sz="900" b="1" dirty="0">
                   <a:latin typeface="KoPub돋움체 Bold" panose="00000800000000000000" pitchFamily="2" charset="-127"/>
                   <a:ea typeface="KoPub돋움체 Bold" panose="00000800000000000000" pitchFamily="2" charset="-127"/>
                 </a:rPr>
                 <a:t>소통의 광장</a:t>
               </a:r>
-              <a:endParaRPr lang="en-US" altLang="ko-KR" sz="800" b="1" dirty="0">
+              <a:endParaRPr lang="en-US" altLang="ko-KR" sz="900" b="1" dirty="0">
                 <a:latin typeface="KoPub돋움체 Bold" panose="00000800000000000000" pitchFamily="2" charset="-127"/>
                 <a:ea typeface="KoPub돋움체 Bold" panose="00000800000000000000" pitchFamily="2" charset="-127"/>
               </a:endParaRPr>
@@ -9521,7 +9371,7 @@
                 <a:buChar char="•"/>
               </a:pPr>
               <a:r>
-                <a:rPr lang="ko-KR" altLang="en-US" sz="800" b="1" dirty="0">
+                <a:rPr lang="ko-KR" altLang="en-US" sz="900" b="1" dirty="0">
                   <a:latin typeface="KoPub돋움체 Bold" panose="00000800000000000000" pitchFamily="2" charset="-127"/>
                   <a:ea typeface="KoPub돋움체 Bold" panose="00000800000000000000" pitchFamily="2" charset="-127"/>
                 </a:rPr>
@@ -9537,7 +9387,7 @@
                 <a:buChar char="•"/>
               </a:pPr>
               <a:r>
-                <a:rPr lang="ko-KR" altLang="en-US" sz="800" b="1" dirty="0">
+                <a:rPr lang="ko-KR" altLang="en-US" sz="900" b="1" dirty="0">
                   <a:latin typeface="KoPub돋움체 Bold" panose="00000800000000000000" pitchFamily="2" charset="-127"/>
                   <a:ea typeface="KoPub돋움체 Bold" panose="00000800000000000000" pitchFamily="2" charset="-127"/>
                 </a:rPr>
@@ -9553,7 +9403,7 @@
                 <a:buChar char="•"/>
               </a:pPr>
               <a:r>
-                <a:rPr lang="ko-KR" altLang="en-US" sz="800" b="1" dirty="0">
+                <a:rPr lang="ko-KR" altLang="en-US" sz="900" b="1" dirty="0">
                   <a:latin typeface="KoPub돋움체 Bold" panose="00000800000000000000" pitchFamily="2" charset="-127"/>
                   <a:ea typeface="KoPub돋움체 Bold" panose="00000800000000000000" pitchFamily="2" charset="-127"/>
                 </a:rPr>
@@ -9569,7 +9419,7 @@
                 <a:buChar char="•"/>
               </a:pPr>
               <a:r>
-                <a:rPr lang="ko-KR" altLang="en-US" sz="800" b="1" dirty="0">
+                <a:rPr lang="ko-KR" altLang="en-US" sz="900" b="1" dirty="0">
                   <a:latin typeface="KoPub돋움체 Bold" panose="00000800000000000000" pitchFamily="2" charset="-127"/>
                   <a:ea typeface="KoPub돋움체 Bold" panose="00000800000000000000" pitchFamily="2" charset="-127"/>
                 </a:rPr>
@@ -9582,7 +9432,7 @@
     </p:spTree>
     <p:extLst>
       <p:ext uri="{BB962C8B-B14F-4D97-AF65-F5344CB8AC3E}">
-        <p14:creationId xmlns:p14="http://schemas.microsoft.com/office/powerpoint/2010/main" val="4175183273"/>
+        <p14:creationId xmlns:p14="http://schemas.microsoft.com/office/powerpoint/2010/main" val="1385286103"/>
       </p:ext>
     </p:extLst>
   </p:cSld>

--- a/documents/명함제작/[2026 우리가치(WeValue) QI 활동 프로젝트 명함1(앞).pptx
+++ b/documents/명함제작/[2026 우리가치(WeValue) QI 활동 프로젝트 명함1(앞).pptx
@@ -1,6 +1,6 @@
 
 <file path=ppt/presentation.xml><?xml version="1.0" encoding="utf-8"?>
-<p:presentation xmlns:a="http://schemas.openxmlformats.org/drawingml/2006/main" xmlns:r="http://schemas.openxmlformats.org/officeDocument/2006/relationships" xmlns:p="http://schemas.openxmlformats.org/presentationml/2006/main" saveSubsetFonts="1">
+<p:presentation xmlns:a="http://schemas.openxmlformats.org/drawingml/2006/main" xmlns:r="http://schemas.openxmlformats.org/officeDocument/2006/relationships" xmlns:p="http://schemas.openxmlformats.org/presentationml/2006/main" embedTrueTypeFonts="1" saveSubsetFonts="1">
   <p:sldMasterIdLst>
     <p:sldMasterId id="2147483883" r:id="rId1"/>
   </p:sldMasterIdLst>
@@ -8,15 +8,35 @@
     <p:notesMasterId r:id="rId8"/>
   </p:notesMasterIdLst>
   <p:sldIdLst>
-    <p:sldId id="265" r:id="rId2"/>
-    <p:sldId id="266" r:id="rId3"/>
-    <p:sldId id="267" r:id="rId4"/>
-    <p:sldId id="268" r:id="rId5"/>
-    <p:sldId id="269" r:id="rId6"/>
-    <p:sldId id="270" r:id="rId7"/>
+    <p:sldId id="270" r:id="rId2"/>
+    <p:sldId id="271" r:id="rId3"/>
+    <p:sldId id="272" r:id="rId4"/>
+    <p:sldId id="273" r:id="rId5"/>
+    <p:sldId id="274" r:id="rId6"/>
+    <p:sldId id="275" r:id="rId7"/>
   </p:sldIdLst>
   <p:sldSz cx="3203575" cy="1800225"/>
   <p:notesSz cx="6858000" cy="9945688"/>
+  <p:embeddedFontLst>
+    <p:embeddedFont>
+      <p:font typeface="Franklin Gothic Heavy" panose="020B0903020102020204" pitchFamily="34" charset="0"/>
+      <p:regular r:id="rId9"/>
+      <p:italic r:id="rId10"/>
+    </p:embeddedFont>
+    <p:embeddedFont>
+      <p:font typeface="KoPub돋움체 Bold" panose="02020603020101020101" pitchFamily="18" charset="-127"/>
+      <p:regular r:id="rId11"/>
+    </p:embeddedFont>
+    <p:embeddedFont>
+      <p:font typeface="Noto Sans KR Black" panose="020B0200000000000000" pitchFamily="50" charset="-127"/>
+      <p:bold r:id="rId12"/>
+    </p:embeddedFont>
+    <p:embeddedFont>
+      <p:font typeface="맑은 고딕" panose="020B0503020000020004" pitchFamily="50" charset="-127"/>
+      <p:regular r:id="rId13"/>
+      <p:bold r:id="rId14"/>
+    </p:embeddedFont>
+  </p:embeddedFontLst>
   <p:defaultTextStyle>
     <a:defPPr>
       <a:defRPr lang="en-US"/>
@@ -233,7 +253,7 @@
           <a:p>
             <a:fld id="{F929F65E-AEE7-45C5-814B-4468CAF1E537}" type="datetimeFigureOut">
               <a:rPr lang="ko-KR" altLang="en-US" smtClean="0"/>
-              <a:t>2026-05-14</a:t>
+              <a:t>2026-07-09</a:t>
             </a:fld>
             <a:endParaRPr lang="ko-KR" altLang="en-US"/>
           </a:p>
@@ -631,7 +651,7 @@
           <a:p>
             <a:fld id="{149F34B4-7175-41BD-B98B-2E7021201D7D}" type="datetimeFigureOut">
               <a:rPr lang="ko-KR" altLang="en-US" smtClean="0"/>
-              <a:t>2026-05-14</a:t>
+              <a:t>2026-07-09</a:t>
             </a:fld>
             <a:endParaRPr lang="ko-KR" altLang="en-US"/>
           </a:p>
@@ -801,7 +821,7 @@
           <a:p>
             <a:fld id="{149F34B4-7175-41BD-B98B-2E7021201D7D}" type="datetimeFigureOut">
               <a:rPr lang="ko-KR" altLang="en-US" smtClean="0"/>
-              <a:t>2026-05-14</a:t>
+              <a:t>2026-07-09</a:t>
             </a:fld>
             <a:endParaRPr lang="ko-KR" altLang="en-US"/>
           </a:p>
@@ -981,7 +1001,7 @@
           <a:p>
             <a:fld id="{149F34B4-7175-41BD-B98B-2E7021201D7D}" type="datetimeFigureOut">
               <a:rPr lang="ko-KR" altLang="en-US" smtClean="0"/>
-              <a:t>2026-05-14</a:t>
+              <a:t>2026-07-09</a:t>
             </a:fld>
             <a:endParaRPr lang="ko-KR" altLang="en-US"/>
           </a:p>
@@ -1165,47 +1185,12 @@
           </a:p>
         </p:txBody>
       </p:sp>
-      <p:pic>
-        <p:nvPicPr>
-          <p:cNvPr id="9" name="Picture 1">
+      <p:sp>
+        <p:nvSpPr>
+          <p:cNvPr id="2" name="TextBox 1">
             <a:extLst>
               <a:ext uri="{FF2B5EF4-FFF2-40B4-BE49-F238E27FC236}">
-                <a16:creationId xmlns:a16="http://schemas.microsoft.com/office/drawing/2014/main" id="{5C76C7A1-71AE-1C7D-2C36-7DEA1D47FF0E}"/>
-              </a:ext>
-            </a:extLst>
-          </p:cNvPr>
-          <p:cNvPicPr>
-            <a:picLocks noChangeAspect="1"/>
-          </p:cNvPicPr>
-          <p:nvPr userDrawn="1"/>
-        </p:nvPicPr>
-        <p:blipFill>
-          <a:blip r:embed="rId2"/>
-          <a:stretch>
-            <a:fillRect/>
-          </a:stretch>
-        </p:blipFill>
-        <p:spPr>
-          <a:xfrm>
-            <a:off x="2759375" y="81588"/>
-            <a:ext cx="359069" cy="203042"/>
-          </a:xfrm>
-          <a:prstGeom prst="rect">
-            <a:avLst/>
-          </a:prstGeom>
-          <a:noFill/>
-          <a:ln>
-            <a:noFill/>
-          </a:ln>
-          <a:effectLst/>
-        </p:spPr>
-      </p:pic>
-      <p:sp>
-        <p:nvSpPr>
-          <p:cNvPr id="3" name="TextBox 2">
-            <a:extLst>
-              <a:ext uri="{FF2B5EF4-FFF2-40B4-BE49-F238E27FC236}">
-                <a16:creationId xmlns:a16="http://schemas.microsoft.com/office/drawing/2014/main" id="{49BA0C91-E2D0-A166-2BE8-3501CE9BABF8}"/>
+                <a16:creationId xmlns:a16="http://schemas.microsoft.com/office/drawing/2014/main" id="{4A304AE3-A7A5-53DE-4C22-7CB33DB4161D}"/>
               </a:ext>
             </a:extLst>
           </p:cNvPr>
@@ -1214,8 +1199,8 @@
         </p:nvSpPr>
         <p:spPr>
           <a:xfrm>
-            <a:off x="2074628" y="1569906"/>
-            <a:ext cx="1128948" cy="169277"/>
+            <a:off x="2439508" y="1520782"/>
+            <a:ext cx="734495" cy="200055"/>
           </a:xfrm>
           <a:prstGeom prst="rect">
             <a:avLst/>
@@ -1223,25 +1208,29 @@
           <a:noFill/>
         </p:spPr>
         <p:txBody>
-          <a:bodyPr wrap="square" rtlCol="0">
+          <a:bodyPr wrap="none" rtlCol="0">
             <a:spAutoFit/>
           </a:bodyPr>
           <a:lstStyle/>
           <a:p>
             <a:pPr algn="r"/>
             <a:r>
-              <a:rPr lang="ko-KR" altLang="en-US" sz="500" b="1" dirty="0">
+              <a:rPr lang="ko-KR" altLang="en-US" sz="700" b="1" dirty="0">
                 <a:solidFill>
-                  <a:srgbClr val="4472C4"/>
+                  <a:schemeClr val="accent1">
+                    <a:lumMod val="50000"/>
+                  </a:schemeClr>
                 </a:solidFill>
                 <a:latin typeface="KoPub돋움체 Bold" panose="02020603020101020101" pitchFamily="18" charset="-127"/>
                 <a:ea typeface="KoPub돋움체 Bold" panose="02020603020101020101" pitchFamily="18" charset="-127"/>
               </a:rPr>
               <a:t>진료지원간호팀</a:t>
             </a:r>
-            <a:endParaRPr lang="ko-KR" altLang="en-US" sz="600" b="1" dirty="0">
+            <a:endParaRPr lang="ko-KR" altLang="en-US" sz="800" b="1" dirty="0">
               <a:solidFill>
-                <a:srgbClr val="4472C4"/>
+                <a:schemeClr val="accent1">
+                  <a:lumMod val="50000"/>
+                </a:schemeClr>
               </a:solidFill>
               <a:latin typeface="KoPub돋움체 Bold" panose="02020603020101020101" pitchFamily="18" charset="-127"/>
               <a:ea typeface="KoPub돋움체 Bold" panose="02020603020101020101" pitchFamily="18" charset="-127"/>
@@ -1890,7 +1879,7 @@
           <a:p>
             <a:fld id="{149F34B4-7175-41BD-B98B-2E7021201D7D}" type="datetimeFigureOut">
               <a:rPr lang="ko-KR" altLang="en-US" smtClean="0"/>
-              <a:t>2026-05-14</a:t>
+              <a:t>2026-07-09</a:t>
             </a:fld>
             <a:endParaRPr lang="ko-KR" altLang="en-US"/>
           </a:p>
@@ -2136,7 +2125,7 @@
           <a:p>
             <a:fld id="{149F34B4-7175-41BD-B98B-2E7021201D7D}" type="datetimeFigureOut">
               <a:rPr lang="ko-KR" altLang="en-US" smtClean="0"/>
-              <a:t>2026-05-14</a:t>
+              <a:t>2026-07-09</a:t>
             </a:fld>
             <a:endParaRPr lang="ko-KR" altLang="en-US"/>
           </a:p>
@@ -2368,7 +2357,7 @@
           <a:p>
             <a:fld id="{149F34B4-7175-41BD-B98B-2E7021201D7D}" type="datetimeFigureOut">
               <a:rPr lang="ko-KR" altLang="en-US" smtClean="0"/>
-              <a:t>2026-05-14</a:t>
+              <a:t>2026-07-09</a:t>
             </a:fld>
             <a:endParaRPr lang="ko-KR" altLang="en-US"/>
           </a:p>
@@ -2735,7 +2724,7 @@
           <a:p>
             <a:fld id="{149F34B4-7175-41BD-B98B-2E7021201D7D}" type="datetimeFigureOut">
               <a:rPr lang="ko-KR" altLang="en-US" smtClean="0"/>
-              <a:t>2026-05-14</a:t>
+              <a:t>2026-07-09</a:t>
             </a:fld>
             <a:endParaRPr lang="ko-KR" altLang="en-US"/>
           </a:p>
@@ -2853,7 +2842,7 @@
           <a:p>
             <a:fld id="{149F34B4-7175-41BD-B98B-2E7021201D7D}" type="datetimeFigureOut">
               <a:rPr lang="ko-KR" altLang="en-US" smtClean="0"/>
-              <a:t>2026-05-14</a:t>
+              <a:t>2026-07-09</a:t>
             </a:fld>
             <a:endParaRPr lang="ko-KR" altLang="en-US"/>
           </a:p>
@@ -2948,7 +2937,7 @@
           <a:p>
             <a:fld id="{149F34B4-7175-41BD-B98B-2E7021201D7D}" type="datetimeFigureOut">
               <a:rPr lang="ko-KR" altLang="en-US" smtClean="0"/>
-              <a:t>2026-05-14</a:t>
+              <a:t>2026-07-09</a:t>
             </a:fld>
             <a:endParaRPr lang="ko-KR" altLang="en-US"/>
           </a:p>
@@ -3225,7 +3214,7 @@
           <a:p>
             <a:fld id="{149F34B4-7175-41BD-B98B-2E7021201D7D}" type="datetimeFigureOut">
               <a:rPr lang="ko-KR" altLang="en-US" smtClean="0"/>
-              <a:t>2026-05-14</a:t>
+              <a:t>2026-07-09</a:t>
             </a:fld>
             <a:endParaRPr lang="ko-KR" altLang="en-US"/>
           </a:p>
@@ -3482,7 +3471,7 @@
           <a:p>
             <a:fld id="{149F34B4-7175-41BD-B98B-2E7021201D7D}" type="datetimeFigureOut">
               <a:rPr lang="ko-KR" altLang="en-US" smtClean="0"/>
-              <a:t>2026-05-14</a:t>
+              <a:t>2026-07-09</a:t>
             </a:fld>
             <a:endParaRPr lang="ko-KR" altLang="en-US"/>
           </a:p>
@@ -3695,7 +3684,7 @@
           <a:p>
             <a:fld id="{149F34B4-7175-41BD-B98B-2E7021201D7D}" type="datetimeFigureOut">
               <a:rPr lang="ko-KR" altLang="en-US" smtClean="0"/>
-              <a:t>2026-05-14</a:t>
+              <a:t>2026-07-09</a:t>
             </a:fld>
             <a:endParaRPr lang="ko-KR" altLang="en-US"/>
           </a:p>
@@ -4107,7 +4096,13 @@
   <p:cSld>
     <p:spTree>
       <p:nvGrpSpPr>
-        <p:cNvPr id="1" name=""/>
+        <p:cNvPr id="1" name="">
+          <a:extLst>
+            <a:ext uri="{FF2B5EF4-FFF2-40B4-BE49-F238E27FC236}">
+              <a16:creationId xmlns:a16="http://schemas.microsoft.com/office/drawing/2014/main" id="{EF66A5B3-163B-6F07-10F6-516CFF5236F4}"/>
+            </a:ext>
+          </a:extLst>
+        </p:cNvPr>
         <p:cNvGrpSpPr/>
         <p:nvPr/>
       </p:nvGrpSpPr>
@@ -4124,7 +4119,7 @@
           <p:cNvPr id="3" name="TextBox 2">
             <a:extLst>
               <a:ext uri="{FF2B5EF4-FFF2-40B4-BE49-F238E27FC236}">
-                <a16:creationId xmlns:a16="http://schemas.microsoft.com/office/drawing/2014/main" id="{F5E3E193-F1E8-6947-F01D-A96C1A9F6D0E}"/>
+                <a16:creationId xmlns:a16="http://schemas.microsoft.com/office/drawing/2014/main" id="{1A26FCE8-5EF0-0DF6-F8B5-C649DC205363}"/>
               </a:ext>
             </a:extLst>
           </p:cNvPr>
@@ -4152,21 +4147,7 @@
                 <a:latin typeface="KoPub돋움체 Bold" panose="00000800000000000000" pitchFamily="2" charset="-127"/>
                 <a:ea typeface="KoPub돋움체 Bold" panose="00000800000000000000" pitchFamily="2" charset="-127"/>
               </a:rPr>
-              <a:t>순천향대학교 천안병원 </a:t>
-            </a:r>
-            <a:r>
-              <a:rPr lang="en-US" altLang="ko-KR" sz="600" b="1" spc="-11" dirty="0">
-                <a:latin typeface="KoPub돋움체 Bold" panose="00000800000000000000" pitchFamily="2" charset="-127"/>
-                <a:ea typeface="KoPub돋움체 Bold" panose="00000800000000000000" pitchFamily="2" charset="-127"/>
-              </a:rPr>
-              <a:t>| </a:t>
-            </a:r>
-            <a:r>
-              <a:rPr lang="ko-KR" altLang="en-US" sz="600" b="1" spc="-11" dirty="0">
-                <a:latin typeface="KoPub돋움체 Bold" panose="00000800000000000000" pitchFamily="2" charset="-127"/>
-                <a:ea typeface="KoPub돋움체 Bold" panose="00000800000000000000" pitchFamily="2" charset="-127"/>
-              </a:rPr>
-              <a:t>진료지원간호팀 </a:t>
+              <a:t>순천향대학교 천안병원</a:t>
             </a:r>
           </a:p>
         </p:txBody>
@@ -4176,7 +4157,7 @@
           <p:cNvPr id="17" name="그룹 16">
             <a:extLst>
               <a:ext uri="{FF2B5EF4-FFF2-40B4-BE49-F238E27FC236}">
-                <a16:creationId xmlns:a16="http://schemas.microsoft.com/office/drawing/2014/main" id="{CCD23336-35E2-7BBF-742C-67D82BDC7617}"/>
+                <a16:creationId xmlns:a16="http://schemas.microsoft.com/office/drawing/2014/main" id="{1A49BD73-09B6-9576-4A99-AEFE0F7F42C3}"/>
               </a:ext>
             </a:extLst>
           </p:cNvPr>
@@ -4185,8 +4166,8 @@
         </p:nvGrpSpPr>
         <p:grpSpPr>
           <a:xfrm>
-            <a:off x="2050303" y="549443"/>
-            <a:ext cx="854822" cy="766386"/>
+            <a:off x="2298353" y="149770"/>
+            <a:ext cx="746131" cy="668940"/>
             <a:chOff x="777945" y="-736888"/>
             <a:chExt cx="663508" cy="663508"/>
           </a:xfrm>
@@ -4196,7 +4177,7 @@
             <p:cNvPr id="5" name="그림 4" descr="패턴, 사각형, 예술, 직사각형이(가) 표시된 사진&#10;&#10;AI 생성 콘텐츠는 정확하지 않을 수 있습니다.">
               <a:extLst>
                 <a:ext uri="{FF2B5EF4-FFF2-40B4-BE49-F238E27FC236}">
-                  <a16:creationId xmlns:a16="http://schemas.microsoft.com/office/drawing/2014/main" id="{40C63F4C-30AB-6EF2-23BA-1233104A9DC3}"/>
+                  <a16:creationId xmlns:a16="http://schemas.microsoft.com/office/drawing/2014/main" id="{237758EC-8039-A3EA-24AD-2B5B0B1F60A1}"/>
                 </a:ext>
               </a:extLst>
             </p:cNvPr>
@@ -4226,7 +4207,7 @@
             <p:cNvPr id="13" name="L 도형 12">
               <a:extLst>
                 <a:ext uri="{FF2B5EF4-FFF2-40B4-BE49-F238E27FC236}">
-                  <a16:creationId xmlns:a16="http://schemas.microsoft.com/office/drawing/2014/main" id="{B242B433-4D06-F840-EA3E-7FA7766D184C}"/>
+                  <a16:creationId xmlns:a16="http://schemas.microsoft.com/office/drawing/2014/main" id="{1386BAC4-C977-A7C2-6D4E-8D1313D44B3B}"/>
                 </a:ext>
               </a:extLst>
             </p:cNvPr>
@@ -4283,7 +4264,7 @@
             <p:cNvPr id="14" name="L 도형 13">
               <a:extLst>
                 <a:ext uri="{FF2B5EF4-FFF2-40B4-BE49-F238E27FC236}">
-                  <a16:creationId xmlns:a16="http://schemas.microsoft.com/office/drawing/2014/main" id="{37DD2CDD-BF9D-CD6A-CC77-30C00DF7A8EA}"/>
+                  <a16:creationId xmlns:a16="http://schemas.microsoft.com/office/drawing/2014/main" id="{925A8E91-1465-F155-CE7D-07F92B383DAE}"/>
                 </a:ext>
               </a:extLst>
             </p:cNvPr>
@@ -4340,7 +4321,7 @@
             <p:cNvPr id="15" name="L 도형 14">
               <a:extLst>
                 <a:ext uri="{FF2B5EF4-FFF2-40B4-BE49-F238E27FC236}">
-                  <a16:creationId xmlns:a16="http://schemas.microsoft.com/office/drawing/2014/main" id="{DD20813D-7C4F-9420-E012-EB09FDC9059E}"/>
+                  <a16:creationId xmlns:a16="http://schemas.microsoft.com/office/drawing/2014/main" id="{C1BBBB1F-2080-F657-B9D3-EDC41813B5EF}"/>
                 </a:ext>
               </a:extLst>
             </p:cNvPr>
@@ -4397,7 +4378,7 @@
             <p:cNvPr id="16" name="L 도형 15">
               <a:extLst>
                 <a:ext uri="{FF2B5EF4-FFF2-40B4-BE49-F238E27FC236}">
-                  <a16:creationId xmlns:a16="http://schemas.microsoft.com/office/drawing/2014/main" id="{C2F58D7B-1E2F-7C1C-29C2-3CBAF321313E}"/>
+                  <a16:creationId xmlns:a16="http://schemas.microsoft.com/office/drawing/2014/main" id="{C255AB45-9E19-5135-2840-6E83A0CEA2B5}"/>
                 </a:ext>
               </a:extLst>
             </p:cNvPr>
@@ -4455,7 +4436,7 @@
           <p:cNvPr id="18" name="그룹 17">
             <a:extLst>
               <a:ext uri="{FF2B5EF4-FFF2-40B4-BE49-F238E27FC236}">
-                <a16:creationId xmlns:a16="http://schemas.microsoft.com/office/drawing/2014/main" id="{360DDF2E-2289-473B-B5F6-77027118C993}"/>
+                <a16:creationId xmlns:a16="http://schemas.microsoft.com/office/drawing/2014/main" id="{8C3E1EF8-8C3B-A192-11B5-BED425D3D79C}"/>
               </a:ext>
             </a:extLst>
           </p:cNvPr>
@@ -4475,7 +4456,7 @@
             <p:cNvPr id="4" name="TextBox 3">
               <a:extLst>
                 <a:ext uri="{FF2B5EF4-FFF2-40B4-BE49-F238E27FC236}">
-                  <a16:creationId xmlns:a16="http://schemas.microsoft.com/office/drawing/2014/main" id="{1F0C02A7-D766-DD14-548E-2AE7955534F4}"/>
+                  <a16:creationId xmlns:a16="http://schemas.microsoft.com/office/drawing/2014/main" id="{A9D039A7-DA18-313A-AF87-12621352F5CE}"/>
                 </a:ext>
               </a:extLst>
             </p:cNvPr>
@@ -4550,7 +4531,7 @@
             <p:cNvPr id="6" name="TextBox 5">
               <a:extLst>
                 <a:ext uri="{FF2B5EF4-FFF2-40B4-BE49-F238E27FC236}">
-                  <a16:creationId xmlns:a16="http://schemas.microsoft.com/office/drawing/2014/main" id="{25F3C248-44C4-9D7A-C464-62D68C9890DC}"/>
+                  <a16:creationId xmlns:a16="http://schemas.microsoft.com/office/drawing/2014/main" id="{DEEE7C7E-6934-B627-6EC0-48367D0769B1}"/>
                 </a:ext>
               </a:extLst>
             </p:cNvPr>
@@ -4559,8 +4540,8 @@
           </p:nvSpPr>
           <p:spPr>
             <a:xfrm>
-              <a:off x="622591" y="451833"/>
-              <a:ext cx="1729962" cy="200055"/>
+              <a:off x="660262" y="451833"/>
+              <a:ext cx="1654620" cy="200055"/>
             </a:xfrm>
             <a:prstGeom prst="rect">
               <a:avLst/>
@@ -4586,35 +4567,28 @@
                   <a:latin typeface="KoPub돋움체 Bold" panose="00000800000000000000" pitchFamily="2" charset="-127"/>
                   <a:ea typeface="KoPub돋움체 Bold" panose="00000800000000000000" pitchFamily="2" charset="-127"/>
                 </a:rPr>
-                <a:t>우리가 가치를 만드는 공간</a:t>
+                <a:t>스마트 소통 약속</a:t>
               </a:r>
               <a:r>
                 <a:rPr lang="en-US" altLang="ko-KR" sz="700" b="1" dirty="0">
                   <a:latin typeface="KoPub돋움체 Bold" panose="00000800000000000000" pitchFamily="2" charset="-127"/>
                   <a:ea typeface="KoPub돋움체 Bold" panose="00000800000000000000" pitchFamily="2" charset="-127"/>
                 </a:rPr>
-                <a:t>, </a:t>
+                <a:t>(</a:t>
               </a:r>
               <a:r>
-                <a:rPr lang="ko-KR" altLang="en-US" sz="700" b="1" dirty="0" err="1">
+                <a:rPr lang="en-US" altLang="ko-KR" sz="700" b="1" dirty="0" err="1">
                   <a:latin typeface="KoPub돋움체 Bold" panose="00000800000000000000" pitchFamily="2" charset="-127"/>
                   <a:ea typeface="KoPub돋움체 Bold" panose="00000800000000000000" pitchFamily="2" charset="-127"/>
                 </a:rPr>
-                <a:t>우리가치</a:t>
-              </a:r>
-              <a:r>
-                <a:rPr lang="ko-KR" altLang="en-US" sz="700" b="1" dirty="0">
-                  <a:latin typeface="KoPub돋움체 Bold" panose="00000800000000000000" pitchFamily="2" charset="-127"/>
-                  <a:ea typeface="KoPub돋움체 Bold" panose="00000800000000000000" pitchFamily="2" charset="-127"/>
-                </a:rPr>
-                <a:t> 허브</a:t>
+                <a:t>WeValue</a:t>
               </a:r>
               <a:r>
                 <a:rPr lang="en-US" altLang="ko-KR" sz="700" b="1" dirty="0">
                   <a:latin typeface="KoPub돋움체 Bold" panose="00000800000000000000" pitchFamily="2" charset="-127"/>
                   <a:ea typeface="KoPub돋움체 Bold" panose="00000800000000000000" pitchFamily="2" charset="-127"/>
                 </a:rPr>
-                <a:t>]</a:t>
+                <a:t> Promises)]</a:t>
               </a:r>
             </a:p>
           </p:txBody>
@@ -4624,7 +4598,7 @@
             <p:cNvPr id="10" name="그림 9">
               <a:extLst>
                 <a:ext uri="{FF2B5EF4-FFF2-40B4-BE49-F238E27FC236}">
-                  <a16:creationId xmlns:a16="http://schemas.microsoft.com/office/drawing/2014/main" id="{EB1E9046-9340-4D3D-AA23-F89851FB0C3F}"/>
+                  <a16:creationId xmlns:a16="http://schemas.microsoft.com/office/drawing/2014/main" id="{22CDF7ED-65DD-B2AB-0D3A-2876557659C7}"/>
                 </a:ext>
               </a:extLst>
             </p:cNvPr>
@@ -4654,7 +4628,7 @@
             <p:cNvPr id="30" name="그림 29">
               <a:extLst>
                 <a:ext uri="{FF2B5EF4-FFF2-40B4-BE49-F238E27FC236}">
-                  <a16:creationId xmlns:a16="http://schemas.microsoft.com/office/drawing/2014/main" id="{FCD9B137-9F07-4052-B76C-36D6AED25D86}"/>
+                  <a16:creationId xmlns:a16="http://schemas.microsoft.com/office/drawing/2014/main" id="{CACE4F19-6C03-B4A0-12DF-B80E74EF21DC}"/>
                 </a:ext>
               </a:extLst>
             </p:cNvPr>
@@ -4680,304 +4654,435 @@
           </p:spPr>
         </p:pic>
       </p:grpSp>
-      <p:grpSp>
-        <p:nvGrpSpPr>
-          <p:cNvPr id="12" name="그룹 11">
+      <p:sp>
+        <p:nvSpPr>
+          <p:cNvPr id="31" name="TextBox 30">
             <a:extLst>
               <a:ext uri="{FF2B5EF4-FFF2-40B4-BE49-F238E27FC236}">
-                <a16:creationId xmlns:a16="http://schemas.microsoft.com/office/drawing/2014/main" id="{6B2D700B-07E0-4E28-A7D2-0F4C62846EE3}"/>
+                <a16:creationId xmlns:a16="http://schemas.microsoft.com/office/drawing/2014/main" id="{8286C7F5-77BB-B584-5E2E-82705B55B19B}"/>
               </a:ext>
             </a:extLst>
           </p:cNvPr>
-          <p:cNvGrpSpPr/>
+          <p:cNvSpPr txBox="1"/>
           <p:nvPr/>
-        </p:nvGrpSpPr>
-        <p:grpSpPr>
+        </p:nvSpPr>
+        <p:spPr>
           <a:xfrm>
-            <a:off x="205429" y="781187"/>
-            <a:ext cx="1731561" cy="784830"/>
-            <a:chOff x="796295" y="778765"/>
-            <a:chExt cx="1731561" cy="784830"/>
+            <a:off x="82843" y="781989"/>
+            <a:ext cx="2592376" cy="790345"/>
           </a:xfrm>
-        </p:grpSpPr>
-        <p:sp>
-          <p:nvSpPr>
-            <p:cNvPr id="26" name="TextBox 25">
-              <a:extLst>
-                <a:ext uri="{FF2B5EF4-FFF2-40B4-BE49-F238E27FC236}">
-                  <a16:creationId xmlns:a16="http://schemas.microsoft.com/office/drawing/2014/main" id="{61921C24-9018-417C-966E-E56980F41166}"/>
-                </a:ext>
-              </a:extLst>
-            </p:cNvPr>
-            <p:cNvSpPr txBox="1"/>
-            <p:nvPr/>
-          </p:nvSpPr>
-          <p:spPr>
-            <a:xfrm>
-              <a:off x="1495201" y="778765"/>
-              <a:ext cx="1032655" cy="784830"/>
-            </a:xfrm>
-            <a:prstGeom prst="rect">
-              <a:avLst/>
-            </a:prstGeom>
-            <a:noFill/>
-          </p:spPr>
-          <p:txBody>
-            <a:bodyPr wrap="none" rtlCol="0">
-              <a:spAutoFit/>
-            </a:bodyPr>
-            <a:lstStyle/>
-            <a:p>
-              <a:r>
-                <a:rPr lang="en-US" altLang="ko-KR" sz="900" dirty="0">
-                  <a:latin typeface="KoPub돋움체 Light" panose="00000300000000000000" pitchFamily="2" charset="-127"/>
-                  <a:ea typeface="KoPub돋움체 Light" panose="00000300000000000000" pitchFamily="2" charset="-127"/>
-                </a:rPr>
-                <a:t>"</a:t>
-              </a:r>
-              <a:r>
-                <a:rPr lang="ko-KR" altLang="en-US" sz="900" dirty="0">
-                  <a:latin typeface="KoPub돋움체 Light" panose="00000300000000000000" pitchFamily="2" charset="-127"/>
-                  <a:ea typeface="KoPub돋움체 Light" panose="00000300000000000000" pitchFamily="2" charset="-127"/>
-                </a:rPr>
-                <a:t>함께하는 즐거움</a:t>
-              </a:r>
-              <a:r>
-                <a:rPr lang="en-US" altLang="ko-KR" sz="900" dirty="0">
-                  <a:latin typeface="KoPub돋움체 Light" panose="00000300000000000000" pitchFamily="2" charset="-127"/>
-                  <a:ea typeface="KoPub돋움체 Light" panose="00000300000000000000" pitchFamily="2" charset="-127"/>
-                </a:rPr>
-                <a:t>“</a:t>
-              </a:r>
-            </a:p>
-            <a:p>
-              <a:r>
-                <a:rPr lang="en-US" altLang="ko-KR" sz="900" dirty="0">
-                  <a:latin typeface="KoPub돋움체 Light" panose="00000300000000000000" pitchFamily="2" charset="-127"/>
-                  <a:ea typeface="KoPub돋움체 Light" panose="00000300000000000000" pitchFamily="2" charset="-127"/>
-                </a:rPr>
-                <a:t>"</a:t>
-              </a:r>
-              <a:r>
-                <a:rPr lang="ko-KR" altLang="en-US" sz="900" dirty="0">
-                  <a:latin typeface="KoPub돋움체 Light" panose="00000300000000000000" pitchFamily="2" charset="-127"/>
-                  <a:ea typeface="KoPub돋움체 Light" panose="00000300000000000000" pitchFamily="2" charset="-127"/>
-                </a:rPr>
-                <a:t>명확한 약속</a:t>
-              </a:r>
-              <a:r>
-                <a:rPr lang="en-US" altLang="ko-KR" sz="900" dirty="0">
-                  <a:latin typeface="KoPub돋움체 Light" panose="00000300000000000000" pitchFamily="2" charset="-127"/>
-                  <a:ea typeface="KoPub돋움체 Light" panose="00000300000000000000" pitchFamily="2" charset="-127"/>
-                </a:rPr>
-                <a:t>"</a:t>
-              </a:r>
-              <a:endParaRPr lang="ko-KR" altLang="en-US" sz="900" dirty="0">
-                <a:latin typeface="KoPub돋움체 Light" panose="00000300000000000000" pitchFamily="2" charset="-127"/>
-                <a:ea typeface="KoPub돋움체 Light" panose="00000300000000000000" pitchFamily="2" charset="-127"/>
-              </a:endParaRPr>
-            </a:p>
-            <a:p>
-              <a:r>
-                <a:rPr lang="en-US" altLang="ko-KR" sz="900" dirty="0">
-                  <a:latin typeface="KoPub돋움체 Light" panose="00000300000000000000" pitchFamily="2" charset="-127"/>
-                  <a:ea typeface="KoPub돋움체 Light" panose="00000300000000000000" pitchFamily="2" charset="-127"/>
-                </a:rPr>
-                <a:t>"</a:t>
-              </a:r>
-              <a:r>
-                <a:rPr lang="ko-KR" altLang="en-US" sz="900" dirty="0">
-                  <a:latin typeface="KoPub돋움체 Light" panose="00000300000000000000" pitchFamily="2" charset="-127"/>
-                  <a:ea typeface="KoPub돋움체 Light" panose="00000300000000000000" pitchFamily="2" charset="-127"/>
-                </a:rPr>
-                <a:t>한눈에 보는 실무</a:t>
-              </a:r>
-              <a:r>
-                <a:rPr lang="en-US" altLang="ko-KR" sz="900" dirty="0">
-                  <a:latin typeface="KoPub돋움체 Light" panose="00000300000000000000" pitchFamily="2" charset="-127"/>
-                  <a:ea typeface="KoPub돋움체 Light" panose="00000300000000000000" pitchFamily="2" charset="-127"/>
-                </a:rPr>
-                <a:t>"</a:t>
-              </a:r>
-              <a:endParaRPr lang="ko-KR" altLang="en-US" sz="900" dirty="0">
-                <a:latin typeface="KoPub돋움체 Light" panose="00000300000000000000" pitchFamily="2" charset="-127"/>
-                <a:ea typeface="KoPub돋움체 Light" panose="00000300000000000000" pitchFamily="2" charset="-127"/>
-              </a:endParaRPr>
-            </a:p>
-            <a:p>
-              <a:r>
-                <a:rPr lang="en-US" altLang="ko-KR" sz="900" dirty="0">
-                  <a:latin typeface="KoPub돋움체 Light" panose="00000300000000000000" pitchFamily="2" charset="-127"/>
-                  <a:ea typeface="KoPub돋움체 Light" panose="00000300000000000000" pitchFamily="2" charset="-127"/>
-                </a:rPr>
-                <a:t>"</a:t>
-              </a:r>
-              <a:r>
-                <a:rPr lang="ko-KR" altLang="en-US" sz="900" dirty="0">
-                  <a:latin typeface="KoPub돋움체 Light" panose="00000300000000000000" pitchFamily="2" charset="-127"/>
-                  <a:ea typeface="KoPub돋움체 Light" panose="00000300000000000000" pitchFamily="2" charset="-127"/>
-                </a:rPr>
-                <a:t>현장 밀착형 지원</a:t>
-              </a:r>
-              <a:r>
-                <a:rPr lang="en-US" altLang="ko-KR" sz="900" dirty="0">
-                  <a:latin typeface="KoPub돋움체 Light" panose="00000300000000000000" pitchFamily="2" charset="-127"/>
-                  <a:ea typeface="KoPub돋움체 Light" panose="00000300000000000000" pitchFamily="2" charset="-127"/>
-                </a:rPr>
-                <a:t>"</a:t>
-              </a:r>
-              <a:endParaRPr lang="ko-KR" altLang="en-US" sz="900" dirty="0">
-                <a:latin typeface="KoPub돋움체 Light" panose="00000300000000000000" pitchFamily="2" charset="-127"/>
-                <a:ea typeface="KoPub돋움체 Light" panose="00000300000000000000" pitchFamily="2" charset="-127"/>
-              </a:endParaRPr>
-            </a:p>
-            <a:p>
-              <a:r>
-                <a:rPr lang="en-US" altLang="ko-KR" sz="900" dirty="0">
-                  <a:latin typeface="KoPub돋움체 Light" panose="00000300000000000000" pitchFamily="2" charset="-127"/>
-                  <a:ea typeface="KoPub돋움체 Light" panose="00000300000000000000" pitchFamily="2" charset="-127"/>
-                </a:rPr>
-                <a:t>"</a:t>
-              </a:r>
-              <a:r>
-                <a:rPr lang="ko-KR" altLang="en-US" sz="900" dirty="0">
-                  <a:latin typeface="KoPub돋움체 Light" panose="00000300000000000000" pitchFamily="2" charset="-127"/>
-                  <a:ea typeface="KoPub돋움체 Light" panose="00000300000000000000" pitchFamily="2" charset="-127"/>
-                </a:rPr>
-                <a:t>변화의 체감</a:t>
-              </a:r>
-              <a:r>
-                <a:rPr lang="en-US" altLang="ko-KR" sz="900" dirty="0">
-                  <a:latin typeface="KoPub돋움체 Light" panose="00000300000000000000" pitchFamily="2" charset="-127"/>
-                  <a:ea typeface="KoPub돋움체 Light" panose="00000300000000000000" pitchFamily="2" charset="-127"/>
-                </a:rPr>
-                <a:t>"</a:t>
-              </a:r>
-              <a:endParaRPr lang="ko-KR" altLang="en-US" sz="900" dirty="0">
-                <a:latin typeface="KoPub돋움체 Light" panose="00000300000000000000" pitchFamily="2" charset="-127"/>
-                <a:ea typeface="KoPub돋움체 Light" panose="00000300000000000000" pitchFamily="2" charset="-127"/>
-              </a:endParaRPr>
-            </a:p>
-          </p:txBody>
-        </p:sp>
-        <p:sp>
-          <p:nvSpPr>
-            <p:cNvPr id="31" name="TextBox 30">
-              <a:extLst>
-                <a:ext uri="{FF2B5EF4-FFF2-40B4-BE49-F238E27FC236}">
-                  <a16:creationId xmlns:a16="http://schemas.microsoft.com/office/drawing/2014/main" id="{62EAB35A-296C-468C-BCA0-D585048BF4E9}"/>
-                </a:ext>
-              </a:extLst>
-            </p:cNvPr>
-            <p:cNvSpPr txBox="1"/>
-            <p:nvPr/>
-          </p:nvSpPr>
-          <p:spPr>
-            <a:xfrm>
-              <a:off x="796295" y="778765"/>
-              <a:ext cx="813043" cy="784830"/>
-            </a:xfrm>
-            <a:prstGeom prst="rect">
-              <a:avLst/>
-            </a:prstGeom>
-            <a:noFill/>
-          </p:spPr>
-          <p:txBody>
-            <a:bodyPr wrap="none" rtlCol="0">
-              <a:spAutoFit/>
-            </a:bodyPr>
-            <a:lstStyle/>
-            <a:p>
-              <a:pPr marL="88900" indent="-88900">
-                <a:buClr>
-                  <a:srgbClr val="00B0F0"/>
-                </a:buClr>
-                <a:buFont typeface="Arial" panose="020B0604020202020204" pitchFamily="34" charset="0"/>
-                <a:buChar char="•"/>
-              </a:pPr>
-              <a:r>
-                <a:rPr lang="ko-KR" altLang="en-US" sz="900" b="1" dirty="0">
-                  <a:latin typeface="KoPub돋움체 Bold" panose="00000800000000000000" pitchFamily="2" charset="-127"/>
-                  <a:ea typeface="KoPub돋움체 Bold" panose="00000800000000000000" pitchFamily="2" charset="-127"/>
-                </a:rPr>
-                <a:t>소통의 광장</a:t>
-              </a:r>
-              <a:endParaRPr lang="en-US" altLang="ko-KR" sz="900" b="1" dirty="0">
-                <a:latin typeface="KoPub돋움체 Bold" panose="00000800000000000000" pitchFamily="2" charset="-127"/>
-                <a:ea typeface="KoPub돋움체 Bold" panose="00000800000000000000" pitchFamily="2" charset="-127"/>
-              </a:endParaRPr>
-            </a:p>
-            <a:p>
-              <a:pPr marL="88900" indent="-88900">
-                <a:buClr>
-                  <a:srgbClr val="00B0F0"/>
-                </a:buClr>
-                <a:buFont typeface="Arial" panose="020B0604020202020204" pitchFamily="34" charset="0"/>
-                <a:buChar char="•"/>
-              </a:pPr>
-              <a:r>
-                <a:rPr lang="ko-KR" altLang="en-US" sz="900" b="1" dirty="0">
-                  <a:latin typeface="KoPub돋움체 Bold" panose="00000800000000000000" pitchFamily="2" charset="-127"/>
-                  <a:ea typeface="KoPub돋움체 Bold" panose="00000800000000000000" pitchFamily="2" charset="-127"/>
-                </a:rPr>
-                <a:t>업무 기준</a:t>
-              </a:r>
-            </a:p>
-            <a:p>
-              <a:pPr marL="88900" indent="-88900">
-                <a:buClr>
-                  <a:srgbClr val="00B0F0"/>
-                </a:buClr>
-                <a:buFont typeface="Arial" panose="020B0604020202020204" pitchFamily="34" charset="0"/>
-                <a:buChar char="•"/>
-              </a:pPr>
-              <a:r>
-                <a:rPr lang="ko-KR" altLang="en-US" sz="900" b="1" dirty="0">
-                  <a:latin typeface="KoPub돋움체 Bold" panose="00000800000000000000" pitchFamily="2" charset="-127"/>
-                  <a:ea typeface="KoPub돋움체 Bold" panose="00000800000000000000" pitchFamily="2" charset="-127"/>
-                </a:rPr>
-                <a:t>교육자료</a:t>
-              </a:r>
-            </a:p>
-            <a:p>
-              <a:pPr marL="88900" indent="-88900">
-                <a:buClr>
-                  <a:srgbClr val="00B0F0"/>
-                </a:buClr>
-                <a:buFont typeface="Arial" panose="020B0604020202020204" pitchFamily="34" charset="0"/>
-                <a:buChar char="•"/>
-              </a:pPr>
-              <a:r>
-                <a:rPr lang="ko-KR" altLang="en-US" sz="900" b="1" dirty="0">
-                  <a:latin typeface="KoPub돋움체 Bold" panose="00000800000000000000" pitchFamily="2" charset="-127"/>
-                  <a:ea typeface="KoPub돋움체 Bold" panose="00000800000000000000" pitchFamily="2" charset="-127"/>
-                </a:rPr>
-                <a:t>요청</a:t>
-              </a:r>
-            </a:p>
-            <a:p>
-              <a:pPr marL="88900" indent="-88900">
-                <a:buClr>
-                  <a:srgbClr val="00B0F0"/>
-                </a:buClr>
-                <a:buFont typeface="Arial" panose="020B0604020202020204" pitchFamily="34" charset="0"/>
-                <a:buChar char="•"/>
-              </a:pPr>
-              <a:r>
-                <a:rPr lang="ko-KR" altLang="en-US" sz="900" b="1" dirty="0">
-                  <a:latin typeface="KoPub돋움체 Bold" panose="00000800000000000000" pitchFamily="2" charset="-127"/>
-                  <a:ea typeface="KoPub돋움체 Bold" panose="00000800000000000000" pitchFamily="2" charset="-127"/>
-                </a:rPr>
-                <a:t>지표</a:t>
-              </a:r>
-            </a:p>
-          </p:txBody>
-        </p:sp>
-      </p:grpSp>
+          <a:prstGeom prst="rect">
+            <a:avLst/>
+          </a:prstGeom>
+          <a:noFill/>
+        </p:spPr>
+        <p:txBody>
+          <a:bodyPr wrap="none" rtlCol="0">
+            <a:spAutoFit/>
+          </a:bodyPr>
+          <a:lstStyle/>
+          <a:p>
+            <a:pPr marL="88900" indent="-88900">
+              <a:lnSpc>
+                <a:spcPts val="1100"/>
+              </a:lnSpc>
+              <a:buClr>
+                <a:srgbClr val="00B0F0"/>
+              </a:buClr>
+              <a:buFont typeface="Arial" panose="020B0604020202020204" pitchFamily="34" charset="0"/>
+              <a:buChar char="•"/>
+            </a:pPr>
+            <a:r>
+              <a:rPr lang="en-US" altLang="ko-KR" sz="800" b="1" dirty="0">
+                <a:latin typeface="KoPub돋움체 Bold" panose="00000800000000000000" pitchFamily="2" charset="-127"/>
+                <a:ea typeface="KoPub돋움체 Bold" panose="00000800000000000000" pitchFamily="2" charset="-127"/>
+              </a:rPr>
+              <a:t>[</a:t>
+            </a:r>
+            <a:r>
+              <a:rPr lang="ko-KR" altLang="en-US" sz="800" b="1" dirty="0">
+                <a:latin typeface="KoPub돋움체 Bold" panose="00000800000000000000" pitchFamily="2" charset="-127"/>
+                <a:ea typeface="KoPub돋움체 Bold" panose="00000800000000000000" pitchFamily="2" charset="-127"/>
+              </a:rPr>
+              <a:t>식별</a:t>
+            </a:r>
+            <a:r>
+              <a:rPr lang="en-US" altLang="ko-KR" sz="800" b="1" dirty="0">
+                <a:latin typeface="KoPub돋움체 Bold" panose="00000800000000000000" pitchFamily="2" charset="-127"/>
+                <a:ea typeface="KoPub돋움체 Bold" panose="00000800000000000000" pitchFamily="2" charset="-127"/>
+              </a:rPr>
+              <a:t>] </a:t>
+            </a:r>
+            <a:r>
+              <a:rPr lang="ko-KR" altLang="en-US" sz="800" b="1" dirty="0">
+                <a:latin typeface="KoPub돋움체 Bold" panose="00000800000000000000" pitchFamily="2" charset="-127"/>
+                <a:ea typeface="KoPub돋움체 Bold" panose="00000800000000000000" pitchFamily="2" charset="-127"/>
+              </a:rPr>
+              <a:t>첫머리 </a:t>
+            </a:r>
+            <a:r>
+              <a:rPr lang="en-US" altLang="ko-KR" sz="800" b="1" dirty="0">
+                <a:latin typeface="KoPub돋움체 Bold" panose="00000800000000000000" pitchFamily="2" charset="-127"/>
+                <a:ea typeface="KoPub돋움체 Bold" panose="00000800000000000000" pitchFamily="2" charset="-127"/>
+              </a:rPr>
+              <a:t>[</a:t>
+            </a:r>
+            <a:r>
+              <a:rPr lang="ko-KR" altLang="en-US" sz="800" b="1" dirty="0">
+                <a:latin typeface="KoPub돋움체 Bold" panose="00000800000000000000" pitchFamily="2" charset="-127"/>
+                <a:ea typeface="KoPub돋움체 Bold" panose="00000800000000000000" pitchFamily="2" charset="-127"/>
+              </a:rPr>
+              <a:t>병실</a:t>
+            </a:r>
+            <a:r>
+              <a:rPr lang="en-US" altLang="ko-KR" sz="800" b="1" dirty="0">
+                <a:latin typeface="KoPub돋움체 Bold" panose="00000800000000000000" pitchFamily="2" charset="-127"/>
+                <a:ea typeface="KoPub돋움체 Bold" panose="00000800000000000000" pitchFamily="2" charset="-127"/>
+              </a:rPr>
+              <a:t>/</a:t>
+            </a:r>
+            <a:r>
+              <a:rPr lang="ko-KR" altLang="en-US" sz="800" b="1" dirty="0">
+                <a:latin typeface="KoPub돋움체 Bold" panose="00000800000000000000" pitchFamily="2" charset="-127"/>
+                <a:ea typeface="KoPub돋움체 Bold" panose="00000800000000000000" pitchFamily="2" charset="-127"/>
+              </a:rPr>
+              <a:t>성함</a:t>
+            </a:r>
+            <a:r>
+              <a:rPr lang="en-US" altLang="ko-KR" sz="800" b="1" dirty="0">
+                <a:latin typeface="KoPub돋움체 Bold" panose="00000800000000000000" pitchFamily="2" charset="-127"/>
+                <a:ea typeface="KoPub돋움체 Bold" panose="00000800000000000000" pitchFamily="2" charset="-127"/>
+              </a:rPr>
+              <a:t>/</a:t>
+            </a:r>
+            <a:r>
+              <a:rPr lang="ko-KR" altLang="en-US" sz="800" b="1" dirty="0">
+                <a:latin typeface="KoPub돋움체 Bold" panose="00000800000000000000" pitchFamily="2" charset="-127"/>
+                <a:ea typeface="KoPub돋움체 Bold" panose="00000800000000000000" pitchFamily="2" charset="-127"/>
+              </a:rPr>
+              <a:t>사유</a:t>
+            </a:r>
+            <a:r>
+              <a:rPr lang="en-US" altLang="ko-KR" sz="800" b="1" dirty="0">
+                <a:latin typeface="KoPub돋움체 Bold" panose="00000800000000000000" pitchFamily="2" charset="-127"/>
+                <a:ea typeface="KoPub돋움체 Bold" panose="00000800000000000000" pitchFamily="2" charset="-127"/>
+              </a:rPr>
+              <a:t>]</a:t>
+            </a:r>
+            <a:r>
+              <a:rPr lang="ko-KR" altLang="en-US" sz="800" b="1" dirty="0">
+                <a:latin typeface="KoPub돋움체 Bold" panose="00000800000000000000" pitchFamily="2" charset="-127"/>
+                <a:ea typeface="KoPub돋움체 Bold" panose="00000800000000000000" pitchFamily="2" charset="-127"/>
+              </a:rPr>
+              <a:t>필수 기재</a:t>
+            </a:r>
+          </a:p>
+          <a:p>
+            <a:pPr marL="88900" indent="-88900">
+              <a:lnSpc>
+                <a:spcPts val="1100"/>
+              </a:lnSpc>
+              <a:buClr>
+                <a:srgbClr val="00B0F0"/>
+              </a:buClr>
+              <a:buFont typeface="Arial" panose="020B0604020202020204" pitchFamily="34" charset="0"/>
+              <a:buChar char="•"/>
+            </a:pPr>
+            <a:r>
+              <a:rPr lang="en-US" altLang="ko-KR" sz="800" b="1" dirty="0">
+                <a:latin typeface="KoPub돋움체 Bold" panose="00000800000000000000" pitchFamily="2" charset="-127"/>
+                <a:ea typeface="KoPub돋움체 Bold" panose="00000800000000000000" pitchFamily="2" charset="-127"/>
+              </a:rPr>
+              <a:t>[</a:t>
+            </a:r>
+            <a:r>
+              <a:rPr lang="ko-KR" altLang="en-US" sz="800" b="1" dirty="0">
+                <a:latin typeface="KoPub돋움체 Bold" panose="00000800000000000000" pitchFamily="2" charset="-127"/>
+                <a:ea typeface="KoPub돋움체 Bold" panose="00000800000000000000" pitchFamily="2" charset="-127"/>
+              </a:rPr>
+              <a:t>공유</a:t>
+            </a:r>
+            <a:r>
+              <a:rPr lang="en-US" altLang="ko-KR" sz="800" b="1" dirty="0">
+                <a:latin typeface="KoPub돋움체 Bold" panose="00000800000000000000" pitchFamily="2" charset="-127"/>
+                <a:ea typeface="KoPub돋움체 Bold" panose="00000800000000000000" pitchFamily="2" charset="-127"/>
+              </a:rPr>
+              <a:t>] </a:t>
+            </a:r>
+            <a:r>
+              <a:rPr lang="ko-KR" altLang="en-US" sz="800" b="1" dirty="0">
+                <a:latin typeface="KoPub돋움체 Bold" panose="00000800000000000000" pitchFamily="2" charset="-127"/>
+                <a:ea typeface="KoPub돋움체 Bold" panose="00000800000000000000" pitchFamily="2" charset="-127"/>
+              </a:rPr>
+              <a:t>결정 사항의 </a:t>
+            </a:r>
+            <a:r>
+              <a:rPr lang="ko-KR" altLang="en-US" sz="800" b="1" dirty="0" err="1">
+                <a:latin typeface="KoPub돋움체 Bold" panose="00000800000000000000" pitchFamily="2" charset="-127"/>
+                <a:ea typeface="KoPub돋움체 Bold" panose="00000800000000000000" pitchFamily="2" charset="-127"/>
+              </a:rPr>
+              <a:t>선제적</a:t>
+            </a:r>
+            <a:r>
+              <a:rPr lang="ko-KR" altLang="en-US" sz="800" b="1" dirty="0">
+                <a:latin typeface="KoPub돋움체 Bold" panose="00000800000000000000" pitchFamily="2" charset="-127"/>
+                <a:ea typeface="KoPub돋움체 Bold" panose="00000800000000000000" pitchFamily="2" charset="-127"/>
+              </a:rPr>
+              <a:t> 알림 </a:t>
+            </a:r>
+            <a:r>
+              <a:rPr lang="en-US" altLang="ko-KR" sz="800" b="1" dirty="0">
+                <a:latin typeface="KoPub돋움체 Bold" panose="00000800000000000000" pitchFamily="2" charset="-127"/>
+                <a:ea typeface="KoPub돋움체 Bold" panose="00000800000000000000" pitchFamily="2" charset="-127"/>
+              </a:rPr>
+              <a:t>(PA ↔ </a:t>
+            </a:r>
+            <a:r>
+              <a:rPr lang="ko-KR" altLang="en-US" sz="800" b="1" dirty="0">
+                <a:latin typeface="KoPub돋움체 Bold" panose="00000800000000000000" pitchFamily="2" charset="-127"/>
+                <a:ea typeface="KoPub돋움체 Bold" panose="00000800000000000000" pitchFamily="2" charset="-127"/>
+              </a:rPr>
+              <a:t>병동</a:t>
+            </a:r>
+            <a:r>
+              <a:rPr lang="en-US" altLang="ko-KR" sz="800" b="1" dirty="0">
+                <a:latin typeface="KoPub돋움체 Bold" panose="00000800000000000000" pitchFamily="2" charset="-127"/>
+                <a:ea typeface="KoPub돋움체 Bold" panose="00000800000000000000" pitchFamily="2" charset="-127"/>
+              </a:rPr>
+              <a:t>)</a:t>
+            </a:r>
+          </a:p>
+          <a:p>
+            <a:pPr marL="88900" indent="-88900">
+              <a:lnSpc>
+                <a:spcPts val="1100"/>
+              </a:lnSpc>
+              <a:buClr>
+                <a:srgbClr val="00B0F0"/>
+              </a:buClr>
+              <a:buFont typeface="Arial" panose="020B0604020202020204" pitchFamily="34" charset="0"/>
+              <a:buChar char="•"/>
+            </a:pPr>
+            <a:r>
+              <a:rPr lang="en-US" altLang="ko-KR" sz="800" b="1" dirty="0">
+                <a:latin typeface="KoPub돋움체 Bold" panose="00000800000000000000" pitchFamily="2" charset="-127"/>
+                <a:ea typeface="KoPub돋움체 Bold" panose="00000800000000000000" pitchFamily="2" charset="-127"/>
+              </a:rPr>
+              <a:t>[</a:t>
+            </a:r>
+            <a:r>
+              <a:rPr lang="ko-KR" altLang="en-US" sz="800" b="1" dirty="0">
+                <a:latin typeface="KoPub돋움체 Bold" panose="00000800000000000000" pitchFamily="2" charset="-127"/>
+                <a:ea typeface="KoPub돋움체 Bold" panose="00000800000000000000" pitchFamily="2" charset="-127"/>
+              </a:rPr>
+              <a:t>원칙</a:t>
+            </a:r>
+            <a:r>
+              <a:rPr lang="en-US" altLang="ko-KR" sz="800" b="1" dirty="0">
+                <a:latin typeface="KoPub돋움체 Bold" panose="00000800000000000000" pitchFamily="2" charset="-127"/>
+                <a:ea typeface="KoPub돋움체 Bold" panose="00000800000000000000" pitchFamily="2" charset="-127"/>
+              </a:rPr>
+              <a:t>] </a:t>
+            </a:r>
+            <a:r>
+              <a:rPr lang="ko-KR" altLang="en-US" sz="800" b="1" dirty="0">
+                <a:latin typeface="KoPub돋움체 Bold" panose="00000800000000000000" pitchFamily="2" charset="-127"/>
+                <a:ea typeface="KoPub돋움체 Bold" panose="00000800000000000000" pitchFamily="2" charset="-127"/>
+              </a:rPr>
+              <a:t>공식 채널</a:t>
+            </a:r>
+            <a:r>
+              <a:rPr lang="en-US" altLang="ko-KR" sz="800" b="1" dirty="0">
+                <a:latin typeface="KoPub돋움체 Bold" panose="00000800000000000000" pitchFamily="2" charset="-127"/>
+                <a:ea typeface="KoPub돋움체 Bold" panose="00000800000000000000" pitchFamily="2" charset="-127"/>
+              </a:rPr>
+              <a:t>(EMR/</a:t>
+            </a:r>
+            <a:r>
+              <a:rPr lang="ko-KR" altLang="en-US" sz="800" b="1" dirty="0">
+                <a:latin typeface="KoPub돋움체 Bold" panose="00000800000000000000" pitchFamily="2" charset="-127"/>
+                <a:ea typeface="KoPub돋움체 Bold" panose="00000800000000000000" pitchFamily="2" charset="-127"/>
+              </a:rPr>
+              <a:t>유선</a:t>
+            </a:r>
+            <a:r>
+              <a:rPr lang="en-US" altLang="ko-KR" sz="800" b="1" dirty="0">
+                <a:latin typeface="KoPub돋움체 Bold" panose="00000800000000000000" pitchFamily="2" charset="-127"/>
+                <a:ea typeface="KoPub돋움체 Bold" panose="00000800000000000000" pitchFamily="2" charset="-127"/>
+              </a:rPr>
+              <a:t>) </a:t>
+            </a:r>
+            <a:r>
+              <a:rPr lang="ko-KR" altLang="en-US" sz="800" b="1" dirty="0">
+                <a:latin typeface="KoPub돋움체 Bold" panose="00000800000000000000" pitchFamily="2" charset="-127"/>
+                <a:ea typeface="KoPub돋움체 Bold" panose="00000800000000000000" pitchFamily="2" charset="-127"/>
+              </a:rPr>
+              <a:t>활용 </a:t>
+            </a:r>
+            <a:r>
+              <a:rPr lang="en-US" altLang="ko-KR" sz="800" b="1" dirty="0">
+                <a:latin typeface="KoPub돋움체 Bold" panose="00000800000000000000" pitchFamily="2" charset="-127"/>
+                <a:ea typeface="KoPub돋움체 Bold" panose="00000800000000000000" pitchFamily="2" charset="-127"/>
+              </a:rPr>
+              <a:t>(</a:t>
+            </a:r>
+            <a:r>
+              <a:rPr lang="ko-KR" altLang="en-US" sz="800" b="1" dirty="0">
+                <a:latin typeface="KoPub돋움체 Bold" panose="00000800000000000000" pitchFamily="2" charset="-127"/>
+                <a:ea typeface="KoPub돋움체 Bold" panose="00000800000000000000" pitchFamily="2" charset="-127"/>
+              </a:rPr>
+              <a:t>수술</a:t>
+            </a:r>
+            <a:r>
+              <a:rPr lang="en-US" altLang="ko-KR" sz="800" b="1" dirty="0">
+                <a:latin typeface="KoPub돋움체 Bold" panose="00000800000000000000" pitchFamily="2" charset="-127"/>
+                <a:ea typeface="KoPub돋움체 Bold" panose="00000800000000000000" pitchFamily="2" charset="-127"/>
+              </a:rPr>
+              <a:t>, </a:t>
+            </a:r>
+            <a:r>
+              <a:rPr lang="ko-KR" altLang="en-US" sz="800" b="1" dirty="0">
+                <a:latin typeface="KoPub돋움체 Bold" panose="00000800000000000000" pitchFamily="2" charset="-127"/>
+                <a:ea typeface="KoPub돋움체 Bold" panose="00000800000000000000" pitchFamily="2" charset="-127"/>
+              </a:rPr>
+              <a:t>검사 결과 보고</a:t>
+            </a:r>
+            <a:r>
+              <a:rPr lang="en-US" altLang="ko-KR" sz="800" b="1" dirty="0">
+                <a:latin typeface="KoPub돋움체 Bold" panose="00000800000000000000" pitchFamily="2" charset="-127"/>
+                <a:ea typeface="KoPub돋움체 Bold" panose="00000800000000000000" pitchFamily="2" charset="-127"/>
+              </a:rPr>
+              <a:t>)</a:t>
+            </a:r>
+          </a:p>
+          <a:p>
+            <a:pPr marL="88900" indent="-88900">
+              <a:lnSpc>
+                <a:spcPts val="1100"/>
+              </a:lnSpc>
+              <a:buClr>
+                <a:srgbClr val="00B0F0"/>
+              </a:buClr>
+              <a:buFont typeface="Arial" panose="020B0604020202020204" pitchFamily="34" charset="0"/>
+              <a:buChar char="•"/>
+            </a:pPr>
+            <a:r>
+              <a:rPr lang="en-US" altLang="ko-KR" sz="800" b="1" dirty="0">
+                <a:latin typeface="KoPub돋움체 Bold" panose="00000800000000000000" pitchFamily="2" charset="-127"/>
+                <a:ea typeface="KoPub돋움체 Bold" panose="00000800000000000000" pitchFamily="2" charset="-127"/>
+              </a:rPr>
+              <a:t>[</a:t>
+            </a:r>
+            <a:r>
+              <a:rPr lang="ko-KR" altLang="en-US" sz="800" b="1" dirty="0">
+                <a:latin typeface="KoPub돋움체 Bold" panose="00000800000000000000" pitchFamily="2" charset="-127"/>
+                <a:ea typeface="KoPub돋움체 Bold" panose="00000800000000000000" pitchFamily="2" charset="-127"/>
+              </a:rPr>
+              <a:t>완결</a:t>
+            </a:r>
+            <a:r>
+              <a:rPr lang="en-US" altLang="ko-KR" sz="800" b="1" dirty="0">
+                <a:latin typeface="KoPub돋움체 Bold" panose="00000800000000000000" pitchFamily="2" charset="-127"/>
+                <a:ea typeface="KoPub돋움체 Bold" panose="00000800000000000000" pitchFamily="2" charset="-127"/>
+              </a:rPr>
+              <a:t>] [</a:t>
+            </a:r>
+            <a:r>
+              <a:rPr lang="ko-KR" altLang="en-US" sz="800" b="1" dirty="0">
+                <a:latin typeface="KoPub돋움체 Bold" panose="00000800000000000000" pitchFamily="2" charset="-127"/>
+                <a:ea typeface="KoPub돋움체 Bold" panose="00000800000000000000" pitchFamily="2" charset="-127"/>
+              </a:rPr>
+              <a:t>답장</a:t>
+            </a:r>
+            <a:r>
+              <a:rPr lang="en-US" altLang="ko-KR" sz="800" b="1" dirty="0">
+                <a:latin typeface="KoPub돋움체 Bold" panose="00000800000000000000" pitchFamily="2" charset="-127"/>
+                <a:ea typeface="KoPub돋움체 Bold" panose="00000800000000000000" pitchFamily="2" charset="-127"/>
+              </a:rPr>
+              <a:t>(Reply)]</a:t>
+            </a:r>
+            <a:r>
+              <a:rPr lang="ko-KR" altLang="en-US" sz="800" b="1" dirty="0">
+                <a:latin typeface="KoPub돋움체 Bold" panose="00000800000000000000" pitchFamily="2" charset="-127"/>
+                <a:ea typeface="KoPub돋움체 Bold" panose="00000800000000000000" pitchFamily="2" charset="-127"/>
+              </a:rPr>
+              <a:t>기능 필수 활용</a:t>
+            </a:r>
+          </a:p>
+          <a:p>
+            <a:pPr marL="88900" indent="-88900">
+              <a:lnSpc>
+                <a:spcPts val="1100"/>
+              </a:lnSpc>
+              <a:buClr>
+                <a:srgbClr val="00B0F0"/>
+              </a:buClr>
+              <a:buFont typeface="Arial" panose="020B0604020202020204" pitchFamily="34" charset="0"/>
+              <a:buChar char="•"/>
+            </a:pPr>
+            <a:r>
+              <a:rPr lang="en-US" altLang="ko-KR" sz="800" b="1" dirty="0">
+                <a:latin typeface="KoPub돋움체 Bold" panose="00000800000000000000" pitchFamily="2" charset="-127"/>
+                <a:ea typeface="KoPub돋움체 Bold" panose="00000800000000000000" pitchFamily="2" charset="-127"/>
+              </a:rPr>
+              <a:t>[</a:t>
+            </a:r>
+            <a:r>
+              <a:rPr lang="ko-KR" altLang="en-US" sz="800" b="1" dirty="0">
+                <a:latin typeface="KoPub돋움체 Bold" panose="00000800000000000000" pitchFamily="2" charset="-127"/>
+                <a:ea typeface="KoPub돋움체 Bold" panose="00000800000000000000" pitchFamily="2" charset="-127"/>
+              </a:rPr>
+              <a:t>대응</a:t>
+            </a:r>
+            <a:r>
+              <a:rPr lang="en-US" altLang="ko-KR" sz="800" b="1" dirty="0">
+                <a:latin typeface="KoPub돋움체 Bold" panose="00000800000000000000" pitchFamily="2" charset="-127"/>
+                <a:ea typeface="KoPub돋움체 Bold" panose="00000800000000000000" pitchFamily="2" charset="-127"/>
+              </a:rPr>
+              <a:t>] </a:t>
+            </a:r>
+            <a:r>
+              <a:rPr lang="ko-KR" altLang="en-US" sz="800" b="1" dirty="0">
+                <a:latin typeface="KoPub돋움체 Bold" panose="00000800000000000000" pitchFamily="2" charset="-127"/>
+                <a:ea typeface="KoPub돋움체 Bold" panose="00000800000000000000" pitchFamily="2" charset="-127"/>
+              </a:rPr>
+              <a:t>메신저 응답 </a:t>
+            </a:r>
+            <a:r>
+              <a:rPr lang="en-US" altLang="ko-KR" sz="800" b="1" dirty="0">
+                <a:latin typeface="KoPub돋움체 Bold" panose="00000800000000000000" pitchFamily="2" charset="-127"/>
+                <a:ea typeface="KoPub돋움체 Bold" panose="00000800000000000000" pitchFamily="2" charset="-127"/>
+              </a:rPr>
+              <a:t>'10</a:t>
+            </a:r>
+            <a:r>
+              <a:rPr lang="ko-KR" altLang="en-US" sz="800" b="1" dirty="0">
+                <a:latin typeface="KoPub돋움체 Bold" panose="00000800000000000000" pitchFamily="2" charset="-127"/>
+                <a:ea typeface="KoPub돋움체 Bold" panose="00000800000000000000" pitchFamily="2" charset="-127"/>
+              </a:rPr>
+              <a:t>분 룰</a:t>
+            </a:r>
+            <a:r>
+              <a:rPr lang="en-US" altLang="ko-KR" sz="800" b="1" dirty="0">
+                <a:latin typeface="KoPub돋움체 Bold" panose="00000800000000000000" pitchFamily="2" charset="-127"/>
+                <a:ea typeface="KoPub돋움체 Bold" panose="00000800000000000000" pitchFamily="2" charset="-127"/>
+              </a:rPr>
+              <a:t>(Rule)' </a:t>
+            </a:r>
+            <a:r>
+              <a:rPr lang="ko-KR" altLang="en-US" sz="800" b="1" dirty="0">
+                <a:latin typeface="KoPub돋움체 Bold" panose="00000800000000000000" pitchFamily="2" charset="-127"/>
+                <a:ea typeface="KoPub돋움체 Bold" panose="00000800000000000000" pitchFamily="2" charset="-127"/>
+              </a:rPr>
+              <a:t>적용</a:t>
+            </a:r>
+          </a:p>
+        </p:txBody>
+      </p:sp>
     </p:spTree>
     <p:extLst>
       <p:ext uri="{BB962C8B-B14F-4D97-AF65-F5344CB8AC3E}">
-        <p14:creationId xmlns:p14="http://schemas.microsoft.com/office/powerpoint/2010/main" val="1956204071"/>
+        <p14:creationId xmlns:p14="http://schemas.microsoft.com/office/powerpoint/2010/main" val="4063746640"/>
       </p:ext>
     </p:extLst>
   </p:cSld>
@@ -4995,7 +5100,7 @@
         <p:cNvPr id="1" name="">
           <a:extLst>
             <a:ext uri="{FF2B5EF4-FFF2-40B4-BE49-F238E27FC236}">
-              <a16:creationId xmlns:a16="http://schemas.microsoft.com/office/drawing/2014/main" id="{61FB1853-D86F-AE10-543F-BAABA72B3674}"/>
+              <a16:creationId xmlns:a16="http://schemas.microsoft.com/office/drawing/2014/main" id="{D664C560-2A89-718E-69C2-067E6CEDFE26}"/>
             </a:ext>
           </a:extLst>
         </p:cNvPr>
@@ -5015,7 +5120,7 @@
           <p:cNvPr id="3" name="TextBox 2">
             <a:extLst>
               <a:ext uri="{FF2B5EF4-FFF2-40B4-BE49-F238E27FC236}">
-                <a16:creationId xmlns:a16="http://schemas.microsoft.com/office/drawing/2014/main" id="{26A23A21-E568-0342-3A20-FA8182BCF8D6}"/>
+                <a16:creationId xmlns:a16="http://schemas.microsoft.com/office/drawing/2014/main" id="{C297340C-5BAB-A660-C746-988E54C203E7}"/>
               </a:ext>
             </a:extLst>
           </p:cNvPr>
@@ -5043,21 +5148,7 @@
                 <a:latin typeface="KoPub돋움체 Bold" panose="00000800000000000000" pitchFamily="2" charset="-127"/>
                 <a:ea typeface="KoPub돋움체 Bold" panose="00000800000000000000" pitchFamily="2" charset="-127"/>
               </a:rPr>
-              <a:t>순천향대학교 천안병원 </a:t>
-            </a:r>
-            <a:r>
-              <a:rPr lang="en-US" altLang="ko-KR" sz="600" b="1" spc="-11" dirty="0">
-                <a:latin typeface="KoPub돋움체 Bold" panose="00000800000000000000" pitchFamily="2" charset="-127"/>
-                <a:ea typeface="KoPub돋움체 Bold" panose="00000800000000000000" pitchFamily="2" charset="-127"/>
-              </a:rPr>
-              <a:t>| </a:t>
-            </a:r>
-            <a:r>
-              <a:rPr lang="ko-KR" altLang="en-US" sz="600" b="1" spc="-11" dirty="0">
-                <a:latin typeface="KoPub돋움체 Bold" panose="00000800000000000000" pitchFamily="2" charset="-127"/>
-                <a:ea typeface="KoPub돋움체 Bold" panose="00000800000000000000" pitchFamily="2" charset="-127"/>
-              </a:rPr>
-              <a:t>진료지원간호팀 </a:t>
+              <a:t>순천향대학교 천안병원</a:t>
             </a:r>
           </a:p>
         </p:txBody>
@@ -5067,7 +5158,7 @@
           <p:cNvPr id="17" name="그룹 16">
             <a:extLst>
               <a:ext uri="{FF2B5EF4-FFF2-40B4-BE49-F238E27FC236}">
-                <a16:creationId xmlns:a16="http://schemas.microsoft.com/office/drawing/2014/main" id="{19217828-C16C-7429-AC1A-2C8AAFD9F0BE}"/>
+                <a16:creationId xmlns:a16="http://schemas.microsoft.com/office/drawing/2014/main" id="{0CC2092D-47FE-E004-CB8A-64B1B9321CEE}"/>
               </a:ext>
             </a:extLst>
           </p:cNvPr>
@@ -5076,8 +5167,8 @@
         </p:nvGrpSpPr>
         <p:grpSpPr>
           <a:xfrm>
-            <a:off x="2050303" y="549443"/>
-            <a:ext cx="854822" cy="766386"/>
+            <a:off x="2298353" y="149770"/>
+            <a:ext cx="746131" cy="668940"/>
             <a:chOff x="777945" y="-736888"/>
             <a:chExt cx="663508" cy="663508"/>
           </a:xfrm>
@@ -5087,7 +5178,7 @@
             <p:cNvPr id="5" name="그림 4" descr="패턴, 사각형, 예술, 직사각형이(가) 표시된 사진&#10;&#10;AI 생성 콘텐츠는 정확하지 않을 수 있습니다.">
               <a:extLst>
                 <a:ext uri="{FF2B5EF4-FFF2-40B4-BE49-F238E27FC236}">
-                  <a16:creationId xmlns:a16="http://schemas.microsoft.com/office/drawing/2014/main" id="{BA461494-ABB8-F5DB-BA43-AD168AB94CE7}"/>
+                  <a16:creationId xmlns:a16="http://schemas.microsoft.com/office/drawing/2014/main" id="{2D1353C8-EF17-381D-29C2-8AA339F0BC66}"/>
                 </a:ext>
               </a:extLst>
             </p:cNvPr>
@@ -5117,7 +5208,7 @@
             <p:cNvPr id="13" name="L 도형 12">
               <a:extLst>
                 <a:ext uri="{FF2B5EF4-FFF2-40B4-BE49-F238E27FC236}">
-                  <a16:creationId xmlns:a16="http://schemas.microsoft.com/office/drawing/2014/main" id="{F536F961-28D9-0E9B-4EA6-A7858F4C75B2}"/>
+                  <a16:creationId xmlns:a16="http://schemas.microsoft.com/office/drawing/2014/main" id="{98A575AA-7C3A-64EF-D5B9-EF06EA8CE347}"/>
                 </a:ext>
               </a:extLst>
             </p:cNvPr>
@@ -5174,7 +5265,7 @@
             <p:cNvPr id="14" name="L 도형 13">
               <a:extLst>
                 <a:ext uri="{FF2B5EF4-FFF2-40B4-BE49-F238E27FC236}">
-                  <a16:creationId xmlns:a16="http://schemas.microsoft.com/office/drawing/2014/main" id="{976B8771-FC7D-5649-DF68-BB076A834F2A}"/>
+                  <a16:creationId xmlns:a16="http://schemas.microsoft.com/office/drawing/2014/main" id="{E3F1B362-4BD3-AE19-67E1-49E6B4E64821}"/>
                 </a:ext>
               </a:extLst>
             </p:cNvPr>
@@ -5231,7 +5322,7 @@
             <p:cNvPr id="15" name="L 도형 14">
               <a:extLst>
                 <a:ext uri="{FF2B5EF4-FFF2-40B4-BE49-F238E27FC236}">
-                  <a16:creationId xmlns:a16="http://schemas.microsoft.com/office/drawing/2014/main" id="{11289191-0401-B8EC-355E-FD5A93C57126}"/>
+                  <a16:creationId xmlns:a16="http://schemas.microsoft.com/office/drawing/2014/main" id="{0D83545F-EA24-B316-B6AD-E49BB677DCED}"/>
                 </a:ext>
               </a:extLst>
             </p:cNvPr>
@@ -5288,7 +5379,7 @@
             <p:cNvPr id="16" name="L 도형 15">
               <a:extLst>
                 <a:ext uri="{FF2B5EF4-FFF2-40B4-BE49-F238E27FC236}">
-                  <a16:creationId xmlns:a16="http://schemas.microsoft.com/office/drawing/2014/main" id="{4A757402-69EE-78AA-363F-5A95E0E396E0}"/>
+                  <a16:creationId xmlns:a16="http://schemas.microsoft.com/office/drawing/2014/main" id="{0A15FA0F-D622-F591-E3AB-BD1A21BE92D9}"/>
                 </a:ext>
               </a:extLst>
             </p:cNvPr>
@@ -5346,7 +5437,7 @@
           <p:cNvPr id="18" name="그룹 17">
             <a:extLst>
               <a:ext uri="{FF2B5EF4-FFF2-40B4-BE49-F238E27FC236}">
-                <a16:creationId xmlns:a16="http://schemas.microsoft.com/office/drawing/2014/main" id="{9FC97A71-578A-2057-ADB8-52F77F11B4DD}"/>
+                <a16:creationId xmlns:a16="http://schemas.microsoft.com/office/drawing/2014/main" id="{E4D0B762-02AF-6784-F7A5-C5E081880D44}"/>
               </a:ext>
             </a:extLst>
           </p:cNvPr>
@@ -5366,7 +5457,7 @@
             <p:cNvPr id="4" name="TextBox 3">
               <a:extLst>
                 <a:ext uri="{FF2B5EF4-FFF2-40B4-BE49-F238E27FC236}">
-                  <a16:creationId xmlns:a16="http://schemas.microsoft.com/office/drawing/2014/main" id="{92BE50D3-21BE-AB1A-4F05-A3BFEB8126C7}"/>
+                  <a16:creationId xmlns:a16="http://schemas.microsoft.com/office/drawing/2014/main" id="{4677305B-6007-A492-C346-1FE19AA78EB8}"/>
                 </a:ext>
               </a:extLst>
             </p:cNvPr>
@@ -5441,7 +5532,7 @@
             <p:cNvPr id="6" name="TextBox 5">
               <a:extLst>
                 <a:ext uri="{FF2B5EF4-FFF2-40B4-BE49-F238E27FC236}">
-                  <a16:creationId xmlns:a16="http://schemas.microsoft.com/office/drawing/2014/main" id="{3A824919-9EC1-560E-A7F8-0280B081097A}"/>
+                  <a16:creationId xmlns:a16="http://schemas.microsoft.com/office/drawing/2014/main" id="{91721AF9-B167-FB4A-7C44-CE13786BEA06}"/>
                 </a:ext>
               </a:extLst>
             </p:cNvPr>
@@ -5450,8 +5541,8 @@
           </p:nvSpPr>
           <p:spPr>
             <a:xfrm>
-              <a:off x="622591" y="451833"/>
-              <a:ext cx="1729962" cy="200055"/>
+              <a:off x="660262" y="451833"/>
+              <a:ext cx="1654620" cy="200055"/>
             </a:xfrm>
             <a:prstGeom prst="rect">
               <a:avLst/>
@@ -5477,35 +5568,28 @@
                   <a:latin typeface="KoPub돋움체 Bold" panose="00000800000000000000" pitchFamily="2" charset="-127"/>
                   <a:ea typeface="KoPub돋움체 Bold" panose="00000800000000000000" pitchFamily="2" charset="-127"/>
                 </a:rPr>
-                <a:t>우리가 가치를 만드는 공간</a:t>
+                <a:t>스마트 소통 약속</a:t>
               </a:r>
               <a:r>
                 <a:rPr lang="en-US" altLang="ko-KR" sz="700" b="1" dirty="0">
                   <a:latin typeface="KoPub돋움체 Bold" panose="00000800000000000000" pitchFamily="2" charset="-127"/>
                   <a:ea typeface="KoPub돋움체 Bold" panose="00000800000000000000" pitchFamily="2" charset="-127"/>
                 </a:rPr>
-                <a:t>, </a:t>
+                <a:t>(</a:t>
               </a:r>
               <a:r>
-                <a:rPr lang="ko-KR" altLang="en-US" sz="700" b="1" dirty="0" err="1">
+                <a:rPr lang="en-US" altLang="ko-KR" sz="700" b="1" dirty="0" err="1">
                   <a:latin typeface="KoPub돋움체 Bold" panose="00000800000000000000" pitchFamily="2" charset="-127"/>
                   <a:ea typeface="KoPub돋움체 Bold" panose="00000800000000000000" pitchFamily="2" charset="-127"/>
                 </a:rPr>
-                <a:t>우리가치</a:t>
-              </a:r>
-              <a:r>
-                <a:rPr lang="ko-KR" altLang="en-US" sz="700" b="1" dirty="0">
-                  <a:latin typeface="KoPub돋움체 Bold" panose="00000800000000000000" pitchFamily="2" charset="-127"/>
-                  <a:ea typeface="KoPub돋움체 Bold" panose="00000800000000000000" pitchFamily="2" charset="-127"/>
-                </a:rPr>
-                <a:t> 허브</a:t>
+                <a:t>WeValue</a:t>
               </a:r>
               <a:r>
                 <a:rPr lang="en-US" altLang="ko-KR" sz="700" b="1" dirty="0">
                   <a:latin typeface="KoPub돋움체 Bold" panose="00000800000000000000" pitchFamily="2" charset="-127"/>
                   <a:ea typeface="KoPub돋움체 Bold" panose="00000800000000000000" pitchFamily="2" charset="-127"/>
                 </a:rPr>
-                <a:t>]</a:t>
+                <a:t> Promises)]</a:t>
               </a:r>
             </a:p>
           </p:txBody>
@@ -5515,7 +5599,7 @@
             <p:cNvPr id="10" name="그림 9">
               <a:extLst>
                 <a:ext uri="{FF2B5EF4-FFF2-40B4-BE49-F238E27FC236}">
-                  <a16:creationId xmlns:a16="http://schemas.microsoft.com/office/drawing/2014/main" id="{068AAB0D-7BD0-E425-9368-9A2068744F2C}"/>
+                  <a16:creationId xmlns:a16="http://schemas.microsoft.com/office/drawing/2014/main" id="{86819978-DB14-3FDA-53E5-6B25FE933B1F}"/>
                 </a:ext>
               </a:extLst>
             </p:cNvPr>
@@ -5545,7 +5629,7 @@
             <p:cNvPr id="30" name="그림 29">
               <a:extLst>
                 <a:ext uri="{FF2B5EF4-FFF2-40B4-BE49-F238E27FC236}">
-                  <a16:creationId xmlns:a16="http://schemas.microsoft.com/office/drawing/2014/main" id="{10CB1D78-7715-1EE6-6680-17E5EC69EC1A}"/>
+                  <a16:creationId xmlns:a16="http://schemas.microsoft.com/office/drawing/2014/main" id="{385AEA96-A161-20C4-23AE-0DBB8789F201}"/>
                 </a:ext>
               </a:extLst>
             </p:cNvPr>
@@ -5571,304 +5655,435 @@
           </p:spPr>
         </p:pic>
       </p:grpSp>
-      <p:grpSp>
-        <p:nvGrpSpPr>
-          <p:cNvPr id="12" name="그룹 11">
+      <p:sp>
+        <p:nvSpPr>
+          <p:cNvPr id="31" name="TextBox 30">
             <a:extLst>
               <a:ext uri="{FF2B5EF4-FFF2-40B4-BE49-F238E27FC236}">
-                <a16:creationId xmlns:a16="http://schemas.microsoft.com/office/drawing/2014/main" id="{B7F2EA6B-BAA9-8379-0FD3-123EB46A73D7}"/>
+                <a16:creationId xmlns:a16="http://schemas.microsoft.com/office/drawing/2014/main" id="{30BDDE92-38B9-06BB-82FE-1F8D8E70085D}"/>
               </a:ext>
             </a:extLst>
           </p:cNvPr>
-          <p:cNvGrpSpPr/>
+          <p:cNvSpPr txBox="1"/>
           <p:nvPr/>
-        </p:nvGrpSpPr>
-        <p:grpSpPr>
+        </p:nvSpPr>
+        <p:spPr>
           <a:xfrm>
-            <a:off x="205429" y="781187"/>
-            <a:ext cx="1731561" cy="784830"/>
-            <a:chOff x="796295" y="778765"/>
-            <a:chExt cx="1731561" cy="784830"/>
+            <a:off x="82843" y="781989"/>
+            <a:ext cx="2592376" cy="790345"/>
           </a:xfrm>
-        </p:grpSpPr>
-        <p:sp>
-          <p:nvSpPr>
-            <p:cNvPr id="26" name="TextBox 25">
-              <a:extLst>
-                <a:ext uri="{FF2B5EF4-FFF2-40B4-BE49-F238E27FC236}">
-                  <a16:creationId xmlns:a16="http://schemas.microsoft.com/office/drawing/2014/main" id="{40E844D0-1902-E7CC-6AAD-D7774E0E783E}"/>
-                </a:ext>
-              </a:extLst>
-            </p:cNvPr>
-            <p:cNvSpPr txBox="1"/>
-            <p:nvPr/>
-          </p:nvSpPr>
-          <p:spPr>
-            <a:xfrm>
-              <a:off x="1495201" y="778765"/>
-              <a:ext cx="1032655" cy="784830"/>
-            </a:xfrm>
-            <a:prstGeom prst="rect">
-              <a:avLst/>
-            </a:prstGeom>
-            <a:noFill/>
-          </p:spPr>
-          <p:txBody>
-            <a:bodyPr wrap="none" rtlCol="0">
-              <a:spAutoFit/>
-            </a:bodyPr>
-            <a:lstStyle/>
-            <a:p>
-              <a:r>
-                <a:rPr lang="en-US" altLang="ko-KR" sz="900" dirty="0">
-                  <a:latin typeface="KoPub돋움체 Light" panose="00000300000000000000" pitchFamily="2" charset="-127"/>
-                  <a:ea typeface="KoPub돋움체 Light" panose="00000300000000000000" pitchFamily="2" charset="-127"/>
-                </a:rPr>
-                <a:t>"</a:t>
-              </a:r>
-              <a:r>
-                <a:rPr lang="ko-KR" altLang="en-US" sz="900" dirty="0">
-                  <a:latin typeface="KoPub돋움체 Light" panose="00000300000000000000" pitchFamily="2" charset="-127"/>
-                  <a:ea typeface="KoPub돋움체 Light" panose="00000300000000000000" pitchFamily="2" charset="-127"/>
-                </a:rPr>
-                <a:t>함께하는 즐거움</a:t>
-              </a:r>
-              <a:r>
-                <a:rPr lang="en-US" altLang="ko-KR" sz="900" dirty="0">
-                  <a:latin typeface="KoPub돋움체 Light" panose="00000300000000000000" pitchFamily="2" charset="-127"/>
-                  <a:ea typeface="KoPub돋움체 Light" panose="00000300000000000000" pitchFamily="2" charset="-127"/>
-                </a:rPr>
-                <a:t>“</a:t>
-              </a:r>
-            </a:p>
-            <a:p>
-              <a:r>
-                <a:rPr lang="en-US" altLang="ko-KR" sz="900" dirty="0">
-                  <a:latin typeface="KoPub돋움체 Light" panose="00000300000000000000" pitchFamily="2" charset="-127"/>
-                  <a:ea typeface="KoPub돋움체 Light" panose="00000300000000000000" pitchFamily="2" charset="-127"/>
-                </a:rPr>
-                <a:t>"</a:t>
-              </a:r>
-              <a:r>
-                <a:rPr lang="ko-KR" altLang="en-US" sz="900" dirty="0">
-                  <a:latin typeface="KoPub돋움체 Light" panose="00000300000000000000" pitchFamily="2" charset="-127"/>
-                  <a:ea typeface="KoPub돋움체 Light" panose="00000300000000000000" pitchFamily="2" charset="-127"/>
-                </a:rPr>
-                <a:t>명확한 약속</a:t>
-              </a:r>
-              <a:r>
-                <a:rPr lang="en-US" altLang="ko-KR" sz="900" dirty="0">
-                  <a:latin typeface="KoPub돋움체 Light" panose="00000300000000000000" pitchFamily="2" charset="-127"/>
-                  <a:ea typeface="KoPub돋움체 Light" panose="00000300000000000000" pitchFamily="2" charset="-127"/>
-                </a:rPr>
-                <a:t>"</a:t>
-              </a:r>
-              <a:endParaRPr lang="ko-KR" altLang="en-US" sz="900" dirty="0">
-                <a:latin typeface="KoPub돋움체 Light" panose="00000300000000000000" pitchFamily="2" charset="-127"/>
-                <a:ea typeface="KoPub돋움체 Light" panose="00000300000000000000" pitchFamily="2" charset="-127"/>
-              </a:endParaRPr>
-            </a:p>
-            <a:p>
-              <a:r>
-                <a:rPr lang="en-US" altLang="ko-KR" sz="900" dirty="0">
-                  <a:latin typeface="KoPub돋움체 Light" panose="00000300000000000000" pitchFamily="2" charset="-127"/>
-                  <a:ea typeface="KoPub돋움체 Light" panose="00000300000000000000" pitchFamily="2" charset="-127"/>
-                </a:rPr>
-                <a:t>"</a:t>
-              </a:r>
-              <a:r>
-                <a:rPr lang="ko-KR" altLang="en-US" sz="900" dirty="0">
-                  <a:latin typeface="KoPub돋움체 Light" panose="00000300000000000000" pitchFamily="2" charset="-127"/>
-                  <a:ea typeface="KoPub돋움체 Light" panose="00000300000000000000" pitchFamily="2" charset="-127"/>
-                </a:rPr>
-                <a:t>한눈에 보는 실무</a:t>
-              </a:r>
-              <a:r>
-                <a:rPr lang="en-US" altLang="ko-KR" sz="900" dirty="0">
-                  <a:latin typeface="KoPub돋움체 Light" panose="00000300000000000000" pitchFamily="2" charset="-127"/>
-                  <a:ea typeface="KoPub돋움체 Light" panose="00000300000000000000" pitchFamily="2" charset="-127"/>
-                </a:rPr>
-                <a:t>"</a:t>
-              </a:r>
-              <a:endParaRPr lang="ko-KR" altLang="en-US" sz="900" dirty="0">
-                <a:latin typeface="KoPub돋움체 Light" panose="00000300000000000000" pitchFamily="2" charset="-127"/>
-                <a:ea typeface="KoPub돋움체 Light" panose="00000300000000000000" pitchFamily="2" charset="-127"/>
-              </a:endParaRPr>
-            </a:p>
-            <a:p>
-              <a:r>
-                <a:rPr lang="en-US" altLang="ko-KR" sz="900" dirty="0">
-                  <a:latin typeface="KoPub돋움체 Light" panose="00000300000000000000" pitchFamily="2" charset="-127"/>
-                  <a:ea typeface="KoPub돋움체 Light" panose="00000300000000000000" pitchFamily="2" charset="-127"/>
-                </a:rPr>
-                <a:t>"</a:t>
-              </a:r>
-              <a:r>
-                <a:rPr lang="ko-KR" altLang="en-US" sz="900" dirty="0">
-                  <a:latin typeface="KoPub돋움체 Light" panose="00000300000000000000" pitchFamily="2" charset="-127"/>
-                  <a:ea typeface="KoPub돋움체 Light" panose="00000300000000000000" pitchFamily="2" charset="-127"/>
-                </a:rPr>
-                <a:t>현장 밀착형 지원</a:t>
-              </a:r>
-              <a:r>
-                <a:rPr lang="en-US" altLang="ko-KR" sz="900" dirty="0">
-                  <a:latin typeface="KoPub돋움체 Light" panose="00000300000000000000" pitchFamily="2" charset="-127"/>
-                  <a:ea typeface="KoPub돋움체 Light" panose="00000300000000000000" pitchFamily="2" charset="-127"/>
-                </a:rPr>
-                <a:t>"</a:t>
-              </a:r>
-              <a:endParaRPr lang="ko-KR" altLang="en-US" sz="900" dirty="0">
-                <a:latin typeface="KoPub돋움체 Light" panose="00000300000000000000" pitchFamily="2" charset="-127"/>
-                <a:ea typeface="KoPub돋움체 Light" panose="00000300000000000000" pitchFamily="2" charset="-127"/>
-              </a:endParaRPr>
-            </a:p>
-            <a:p>
-              <a:r>
-                <a:rPr lang="en-US" altLang="ko-KR" sz="900" dirty="0">
-                  <a:latin typeface="KoPub돋움체 Light" panose="00000300000000000000" pitchFamily="2" charset="-127"/>
-                  <a:ea typeface="KoPub돋움체 Light" panose="00000300000000000000" pitchFamily="2" charset="-127"/>
-                </a:rPr>
-                <a:t>"</a:t>
-              </a:r>
-              <a:r>
-                <a:rPr lang="ko-KR" altLang="en-US" sz="900" dirty="0">
-                  <a:latin typeface="KoPub돋움체 Light" panose="00000300000000000000" pitchFamily="2" charset="-127"/>
-                  <a:ea typeface="KoPub돋움체 Light" panose="00000300000000000000" pitchFamily="2" charset="-127"/>
-                </a:rPr>
-                <a:t>변화의 체감</a:t>
-              </a:r>
-              <a:r>
-                <a:rPr lang="en-US" altLang="ko-KR" sz="900" dirty="0">
-                  <a:latin typeface="KoPub돋움체 Light" panose="00000300000000000000" pitchFamily="2" charset="-127"/>
-                  <a:ea typeface="KoPub돋움체 Light" panose="00000300000000000000" pitchFamily="2" charset="-127"/>
-                </a:rPr>
-                <a:t>"</a:t>
-              </a:r>
-              <a:endParaRPr lang="ko-KR" altLang="en-US" sz="900" dirty="0">
-                <a:latin typeface="KoPub돋움체 Light" panose="00000300000000000000" pitchFamily="2" charset="-127"/>
-                <a:ea typeface="KoPub돋움체 Light" panose="00000300000000000000" pitchFamily="2" charset="-127"/>
-              </a:endParaRPr>
-            </a:p>
-          </p:txBody>
-        </p:sp>
-        <p:sp>
-          <p:nvSpPr>
-            <p:cNvPr id="31" name="TextBox 30">
-              <a:extLst>
-                <a:ext uri="{FF2B5EF4-FFF2-40B4-BE49-F238E27FC236}">
-                  <a16:creationId xmlns:a16="http://schemas.microsoft.com/office/drawing/2014/main" id="{9914B991-3807-A5A2-B334-DDB3A749557D}"/>
-                </a:ext>
-              </a:extLst>
-            </p:cNvPr>
-            <p:cNvSpPr txBox="1"/>
-            <p:nvPr/>
-          </p:nvSpPr>
-          <p:spPr>
-            <a:xfrm>
-              <a:off x="796295" y="778765"/>
-              <a:ext cx="813043" cy="784830"/>
-            </a:xfrm>
-            <a:prstGeom prst="rect">
-              <a:avLst/>
-            </a:prstGeom>
-            <a:noFill/>
-          </p:spPr>
-          <p:txBody>
-            <a:bodyPr wrap="none" rtlCol="0">
-              <a:spAutoFit/>
-            </a:bodyPr>
-            <a:lstStyle/>
-            <a:p>
-              <a:pPr marL="88900" indent="-88900">
-                <a:buClr>
-                  <a:srgbClr val="00B0F0"/>
-                </a:buClr>
-                <a:buFont typeface="Arial" panose="020B0604020202020204" pitchFamily="34" charset="0"/>
-                <a:buChar char="•"/>
-              </a:pPr>
-              <a:r>
-                <a:rPr lang="ko-KR" altLang="en-US" sz="900" b="1" dirty="0">
-                  <a:latin typeface="KoPub돋움체 Bold" panose="00000800000000000000" pitchFamily="2" charset="-127"/>
-                  <a:ea typeface="KoPub돋움체 Bold" panose="00000800000000000000" pitchFamily="2" charset="-127"/>
-                </a:rPr>
-                <a:t>소통의 광장</a:t>
-              </a:r>
-              <a:endParaRPr lang="en-US" altLang="ko-KR" sz="900" b="1" dirty="0">
-                <a:latin typeface="KoPub돋움체 Bold" panose="00000800000000000000" pitchFamily="2" charset="-127"/>
-                <a:ea typeface="KoPub돋움체 Bold" panose="00000800000000000000" pitchFamily="2" charset="-127"/>
-              </a:endParaRPr>
-            </a:p>
-            <a:p>
-              <a:pPr marL="88900" indent="-88900">
-                <a:buClr>
-                  <a:srgbClr val="00B0F0"/>
-                </a:buClr>
-                <a:buFont typeface="Arial" panose="020B0604020202020204" pitchFamily="34" charset="0"/>
-                <a:buChar char="•"/>
-              </a:pPr>
-              <a:r>
-                <a:rPr lang="ko-KR" altLang="en-US" sz="900" b="1" dirty="0">
-                  <a:latin typeface="KoPub돋움체 Bold" panose="00000800000000000000" pitchFamily="2" charset="-127"/>
-                  <a:ea typeface="KoPub돋움체 Bold" panose="00000800000000000000" pitchFamily="2" charset="-127"/>
-                </a:rPr>
-                <a:t>업무 기준</a:t>
-              </a:r>
-            </a:p>
-            <a:p>
-              <a:pPr marL="88900" indent="-88900">
-                <a:buClr>
-                  <a:srgbClr val="00B0F0"/>
-                </a:buClr>
-                <a:buFont typeface="Arial" panose="020B0604020202020204" pitchFamily="34" charset="0"/>
-                <a:buChar char="•"/>
-              </a:pPr>
-              <a:r>
-                <a:rPr lang="ko-KR" altLang="en-US" sz="900" b="1" dirty="0">
-                  <a:latin typeface="KoPub돋움체 Bold" panose="00000800000000000000" pitchFamily="2" charset="-127"/>
-                  <a:ea typeface="KoPub돋움체 Bold" panose="00000800000000000000" pitchFamily="2" charset="-127"/>
-                </a:rPr>
-                <a:t>교육자료</a:t>
-              </a:r>
-            </a:p>
-            <a:p>
-              <a:pPr marL="88900" indent="-88900">
-                <a:buClr>
-                  <a:srgbClr val="00B0F0"/>
-                </a:buClr>
-                <a:buFont typeface="Arial" panose="020B0604020202020204" pitchFamily="34" charset="0"/>
-                <a:buChar char="•"/>
-              </a:pPr>
-              <a:r>
-                <a:rPr lang="ko-KR" altLang="en-US" sz="900" b="1" dirty="0">
-                  <a:latin typeface="KoPub돋움체 Bold" panose="00000800000000000000" pitchFamily="2" charset="-127"/>
-                  <a:ea typeface="KoPub돋움체 Bold" panose="00000800000000000000" pitchFamily="2" charset="-127"/>
-                </a:rPr>
-                <a:t>요청</a:t>
-              </a:r>
-            </a:p>
-            <a:p>
-              <a:pPr marL="88900" indent="-88900">
-                <a:buClr>
-                  <a:srgbClr val="00B0F0"/>
-                </a:buClr>
-                <a:buFont typeface="Arial" panose="020B0604020202020204" pitchFamily="34" charset="0"/>
-                <a:buChar char="•"/>
-              </a:pPr>
-              <a:r>
-                <a:rPr lang="ko-KR" altLang="en-US" sz="900" b="1" dirty="0">
-                  <a:latin typeface="KoPub돋움체 Bold" panose="00000800000000000000" pitchFamily="2" charset="-127"/>
-                  <a:ea typeface="KoPub돋움체 Bold" panose="00000800000000000000" pitchFamily="2" charset="-127"/>
-                </a:rPr>
-                <a:t>지표</a:t>
-              </a:r>
-            </a:p>
-          </p:txBody>
-        </p:sp>
-      </p:grpSp>
+          <a:prstGeom prst="rect">
+            <a:avLst/>
+          </a:prstGeom>
+          <a:noFill/>
+        </p:spPr>
+        <p:txBody>
+          <a:bodyPr wrap="none" rtlCol="0">
+            <a:spAutoFit/>
+          </a:bodyPr>
+          <a:lstStyle/>
+          <a:p>
+            <a:pPr marL="88900" indent="-88900">
+              <a:lnSpc>
+                <a:spcPts val="1100"/>
+              </a:lnSpc>
+              <a:buClr>
+                <a:srgbClr val="00B0F0"/>
+              </a:buClr>
+              <a:buFont typeface="Arial" panose="020B0604020202020204" pitchFamily="34" charset="0"/>
+              <a:buChar char="•"/>
+            </a:pPr>
+            <a:r>
+              <a:rPr lang="en-US" altLang="ko-KR" sz="800" b="1" dirty="0">
+                <a:latin typeface="KoPub돋움체 Bold" panose="00000800000000000000" pitchFamily="2" charset="-127"/>
+                <a:ea typeface="KoPub돋움체 Bold" panose="00000800000000000000" pitchFamily="2" charset="-127"/>
+              </a:rPr>
+              <a:t>[</a:t>
+            </a:r>
+            <a:r>
+              <a:rPr lang="ko-KR" altLang="en-US" sz="800" b="1" dirty="0">
+                <a:latin typeface="KoPub돋움체 Bold" panose="00000800000000000000" pitchFamily="2" charset="-127"/>
+                <a:ea typeface="KoPub돋움체 Bold" panose="00000800000000000000" pitchFamily="2" charset="-127"/>
+              </a:rPr>
+              <a:t>식별</a:t>
+            </a:r>
+            <a:r>
+              <a:rPr lang="en-US" altLang="ko-KR" sz="800" b="1" dirty="0">
+                <a:latin typeface="KoPub돋움체 Bold" panose="00000800000000000000" pitchFamily="2" charset="-127"/>
+                <a:ea typeface="KoPub돋움체 Bold" panose="00000800000000000000" pitchFamily="2" charset="-127"/>
+              </a:rPr>
+              <a:t>] </a:t>
+            </a:r>
+            <a:r>
+              <a:rPr lang="ko-KR" altLang="en-US" sz="800" b="1" dirty="0">
+                <a:latin typeface="KoPub돋움체 Bold" panose="00000800000000000000" pitchFamily="2" charset="-127"/>
+                <a:ea typeface="KoPub돋움체 Bold" panose="00000800000000000000" pitchFamily="2" charset="-127"/>
+              </a:rPr>
+              <a:t>첫머리 </a:t>
+            </a:r>
+            <a:r>
+              <a:rPr lang="en-US" altLang="ko-KR" sz="800" b="1" dirty="0">
+                <a:latin typeface="KoPub돋움체 Bold" panose="00000800000000000000" pitchFamily="2" charset="-127"/>
+                <a:ea typeface="KoPub돋움체 Bold" panose="00000800000000000000" pitchFamily="2" charset="-127"/>
+              </a:rPr>
+              <a:t>[</a:t>
+            </a:r>
+            <a:r>
+              <a:rPr lang="ko-KR" altLang="en-US" sz="800" b="1" dirty="0">
+                <a:latin typeface="KoPub돋움체 Bold" panose="00000800000000000000" pitchFamily="2" charset="-127"/>
+                <a:ea typeface="KoPub돋움체 Bold" panose="00000800000000000000" pitchFamily="2" charset="-127"/>
+              </a:rPr>
+              <a:t>병실</a:t>
+            </a:r>
+            <a:r>
+              <a:rPr lang="en-US" altLang="ko-KR" sz="800" b="1" dirty="0">
+                <a:latin typeface="KoPub돋움체 Bold" panose="00000800000000000000" pitchFamily="2" charset="-127"/>
+                <a:ea typeface="KoPub돋움체 Bold" panose="00000800000000000000" pitchFamily="2" charset="-127"/>
+              </a:rPr>
+              <a:t>/</a:t>
+            </a:r>
+            <a:r>
+              <a:rPr lang="ko-KR" altLang="en-US" sz="800" b="1" dirty="0">
+                <a:latin typeface="KoPub돋움체 Bold" panose="00000800000000000000" pitchFamily="2" charset="-127"/>
+                <a:ea typeface="KoPub돋움체 Bold" panose="00000800000000000000" pitchFamily="2" charset="-127"/>
+              </a:rPr>
+              <a:t>성함</a:t>
+            </a:r>
+            <a:r>
+              <a:rPr lang="en-US" altLang="ko-KR" sz="800" b="1" dirty="0">
+                <a:latin typeface="KoPub돋움체 Bold" panose="00000800000000000000" pitchFamily="2" charset="-127"/>
+                <a:ea typeface="KoPub돋움체 Bold" panose="00000800000000000000" pitchFamily="2" charset="-127"/>
+              </a:rPr>
+              <a:t>/</a:t>
+            </a:r>
+            <a:r>
+              <a:rPr lang="ko-KR" altLang="en-US" sz="800" b="1" dirty="0">
+                <a:latin typeface="KoPub돋움체 Bold" panose="00000800000000000000" pitchFamily="2" charset="-127"/>
+                <a:ea typeface="KoPub돋움체 Bold" panose="00000800000000000000" pitchFamily="2" charset="-127"/>
+              </a:rPr>
+              <a:t>사유</a:t>
+            </a:r>
+            <a:r>
+              <a:rPr lang="en-US" altLang="ko-KR" sz="800" b="1" dirty="0">
+                <a:latin typeface="KoPub돋움체 Bold" panose="00000800000000000000" pitchFamily="2" charset="-127"/>
+                <a:ea typeface="KoPub돋움체 Bold" panose="00000800000000000000" pitchFamily="2" charset="-127"/>
+              </a:rPr>
+              <a:t>]</a:t>
+            </a:r>
+            <a:r>
+              <a:rPr lang="ko-KR" altLang="en-US" sz="800" b="1" dirty="0">
+                <a:latin typeface="KoPub돋움체 Bold" panose="00000800000000000000" pitchFamily="2" charset="-127"/>
+                <a:ea typeface="KoPub돋움체 Bold" panose="00000800000000000000" pitchFamily="2" charset="-127"/>
+              </a:rPr>
+              <a:t>필수 기재</a:t>
+            </a:r>
+          </a:p>
+          <a:p>
+            <a:pPr marL="88900" indent="-88900">
+              <a:lnSpc>
+                <a:spcPts val="1100"/>
+              </a:lnSpc>
+              <a:buClr>
+                <a:srgbClr val="00B0F0"/>
+              </a:buClr>
+              <a:buFont typeface="Arial" panose="020B0604020202020204" pitchFamily="34" charset="0"/>
+              <a:buChar char="•"/>
+            </a:pPr>
+            <a:r>
+              <a:rPr lang="en-US" altLang="ko-KR" sz="800" b="1" dirty="0">
+                <a:latin typeface="KoPub돋움체 Bold" panose="00000800000000000000" pitchFamily="2" charset="-127"/>
+                <a:ea typeface="KoPub돋움체 Bold" panose="00000800000000000000" pitchFamily="2" charset="-127"/>
+              </a:rPr>
+              <a:t>[</a:t>
+            </a:r>
+            <a:r>
+              <a:rPr lang="ko-KR" altLang="en-US" sz="800" b="1" dirty="0">
+                <a:latin typeface="KoPub돋움체 Bold" panose="00000800000000000000" pitchFamily="2" charset="-127"/>
+                <a:ea typeface="KoPub돋움체 Bold" panose="00000800000000000000" pitchFamily="2" charset="-127"/>
+              </a:rPr>
+              <a:t>공유</a:t>
+            </a:r>
+            <a:r>
+              <a:rPr lang="en-US" altLang="ko-KR" sz="800" b="1" dirty="0">
+                <a:latin typeface="KoPub돋움체 Bold" panose="00000800000000000000" pitchFamily="2" charset="-127"/>
+                <a:ea typeface="KoPub돋움체 Bold" panose="00000800000000000000" pitchFamily="2" charset="-127"/>
+              </a:rPr>
+              <a:t>] </a:t>
+            </a:r>
+            <a:r>
+              <a:rPr lang="ko-KR" altLang="en-US" sz="800" b="1" dirty="0">
+                <a:latin typeface="KoPub돋움체 Bold" panose="00000800000000000000" pitchFamily="2" charset="-127"/>
+                <a:ea typeface="KoPub돋움체 Bold" panose="00000800000000000000" pitchFamily="2" charset="-127"/>
+              </a:rPr>
+              <a:t>결정 사항의 </a:t>
+            </a:r>
+            <a:r>
+              <a:rPr lang="ko-KR" altLang="en-US" sz="800" b="1" dirty="0" err="1">
+                <a:latin typeface="KoPub돋움체 Bold" panose="00000800000000000000" pitchFamily="2" charset="-127"/>
+                <a:ea typeface="KoPub돋움체 Bold" panose="00000800000000000000" pitchFamily="2" charset="-127"/>
+              </a:rPr>
+              <a:t>선제적</a:t>
+            </a:r>
+            <a:r>
+              <a:rPr lang="ko-KR" altLang="en-US" sz="800" b="1" dirty="0">
+                <a:latin typeface="KoPub돋움체 Bold" panose="00000800000000000000" pitchFamily="2" charset="-127"/>
+                <a:ea typeface="KoPub돋움체 Bold" panose="00000800000000000000" pitchFamily="2" charset="-127"/>
+              </a:rPr>
+              <a:t> 알림 </a:t>
+            </a:r>
+            <a:r>
+              <a:rPr lang="en-US" altLang="ko-KR" sz="800" b="1" dirty="0">
+                <a:latin typeface="KoPub돋움체 Bold" panose="00000800000000000000" pitchFamily="2" charset="-127"/>
+                <a:ea typeface="KoPub돋움체 Bold" panose="00000800000000000000" pitchFamily="2" charset="-127"/>
+              </a:rPr>
+              <a:t>(PA ↔ </a:t>
+            </a:r>
+            <a:r>
+              <a:rPr lang="ko-KR" altLang="en-US" sz="800" b="1" dirty="0">
+                <a:latin typeface="KoPub돋움체 Bold" panose="00000800000000000000" pitchFamily="2" charset="-127"/>
+                <a:ea typeface="KoPub돋움체 Bold" panose="00000800000000000000" pitchFamily="2" charset="-127"/>
+              </a:rPr>
+              <a:t>병동</a:t>
+            </a:r>
+            <a:r>
+              <a:rPr lang="en-US" altLang="ko-KR" sz="800" b="1" dirty="0">
+                <a:latin typeface="KoPub돋움체 Bold" panose="00000800000000000000" pitchFamily="2" charset="-127"/>
+                <a:ea typeface="KoPub돋움체 Bold" panose="00000800000000000000" pitchFamily="2" charset="-127"/>
+              </a:rPr>
+              <a:t>)</a:t>
+            </a:r>
+          </a:p>
+          <a:p>
+            <a:pPr marL="88900" indent="-88900">
+              <a:lnSpc>
+                <a:spcPts val="1100"/>
+              </a:lnSpc>
+              <a:buClr>
+                <a:srgbClr val="00B0F0"/>
+              </a:buClr>
+              <a:buFont typeface="Arial" panose="020B0604020202020204" pitchFamily="34" charset="0"/>
+              <a:buChar char="•"/>
+            </a:pPr>
+            <a:r>
+              <a:rPr lang="en-US" altLang="ko-KR" sz="800" b="1" dirty="0">
+                <a:latin typeface="KoPub돋움체 Bold" panose="00000800000000000000" pitchFamily="2" charset="-127"/>
+                <a:ea typeface="KoPub돋움체 Bold" panose="00000800000000000000" pitchFamily="2" charset="-127"/>
+              </a:rPr>
+              <a:t>[</a:t>
+            </a:r>
+            <a:r>
+              <a:rPr lang="ko-KR" altLang="en-US" sz="800" b="1" dirty="0">
+                <a:latin typeface="KoPub돋움체 Bold" panose="00000800000000000000" pitchFamily="2" charset="-127"/>
+                <a:ea typeface="KoPub돋움체 Bold" panose="00000800000000000000" pitchFamily="2" charset="-127"/>
+              </a:rPr>
+              <a:t>원칙</a:t>
+            </a:r>
+            <a:r>
+              <a:rPr lang="en-US" altLang="ko-KR" sz="800" b="1" dirty="0">
+                <a:latin typeface="KoPub돋움체 Bold" panose="00000800000000000000" pitchFamily="2" charset="-127"/>
+                <a:ea typeface="KoPub돋움체 Bold" panose="00000800000000000000" pitchFamily="2" charset="-127"/>
+              </a:rPr>
+              <a:t>] </a:t>
+            </a:r>
+            <a:r>
+              <a:rPr lang="ko-KR" altLang="en-US" sz="800" b="1" dirty="0">
+                <a:latin typeface="KoPub돋움체 Bold" panose="00000800000000000000" pitchFamily="2" charset="-127"/>
+                <a:ea typeface="KoPub돋움체 Bold" panose="00000800000000000000" pitchFamily="2" charset="-127"/>
+              </a:rPr>
+              <a:t>공식 채널</a:t>
+            </a:r>
+            <a:r>
+              <a:rPr lang="en-US" altLang="ko-KR" sz="800" b="1" dirty="0">
+                <a:latin typeface="KoPub돋움체 Bold" panose="00000800000000000000" pitchFamily="2" charset="-127"/>
+                <a:ea typeface="KoPub돋움체 Bold" panose="00000800000000000000" pitchFamily="2" charset="-127"/>
+              </a:rPr>
+              <a:t>(EMR/</a:t>
+            </a:r>
+            <a:r>
+              <a:rPr lang="ko-KR" altLang="en-US" sz="800" b="1" dirty="0">
+                <a:latin typeface="KoPub돋움체 Bold" panose="00000800000000000000" pitchFamily="2" charset="-127"/>
+                <a:ea typeface="KoPub돋움체 Bold" panose="00000800000000000000" pitchFamily="2" charset="-127"/>
+              </a:rPr>
+              <a:t>유선</a:t>
+            </a:r>
+            <a:r>
+              <a:rPr lang="en-US" altLang="ko-KR" sz="800" b="1" dirty="0">
+                <a:latin typeface="KoPub돋움체 Bold" panose="00000800000000000000" pitchFamily="2" charset="-127"/>
+                <a:ea typeface="KoPub돋움체 Bold" panose="00000800000000000000" pitchFamily="2" charset="-127"/>
+              </a:rPr>
+              <a:t>) </a:t>
+            </a:r>
+            <a:r>
+              <a:rPr lang="ko-KR" altLang="en-US" sz="800" b="1" dirty="0">
+                <a:latin typeface="KoPub돋움체 Bold" panose="00000800000000000000" pitchFamily="2" charset="-127"/>
+                <a:ea typeface="KoPub돋움체 Bold" panose="00000800000000000000" pitchFamily="2" charset="-127"/>
+              </a:rPr>
+              <a:t>활용 </a:t>
+            </a:r>
+            <a:r>
+              <a:rPr lang="en-US" altLang="ko-KR" sz="800" b="1" dirty="0">
+                <a:latin typeface="KoPub돋움체 Bold" panose="00000800000000000000" pitchFamily="2" charset="-127"/>
+                <a:ea typeface="KoPub돋움체 Bold" panose="00000800000000000000" pitchFamily="2" charset="-127"/>
+              </a:rPr>
+              <a:t>(</a:t>
+            </a:r>
+            <a:r>
+              <a:rPr lang="ko-KR" altLang="en-US" sz="800" b="1" dirty="0">
+                <a:latin typeface="KoPub돋움체 Bold" panose="00000800000000000000" pitchFamily="2" charset="-127"/>
+                <a:ea typeface="KoPub돋움체 Bold" panose="00000800000000000000" pitchFamily="2" charset="-127"/>
+              </a:rPr>
+              <a:t>수술</a:t>
+            </a:r>
+            <a:r>
+              <a:rPr lang="en-US" altLang="ko-KR" sz="800" b="1" dirty="0">
+                <a:latin typeface="KoPub돋움체 Bold" panose="00000800000000000000" pitchFamily="2" charset="-127"/>
+                <a:ea typeface="KoPub돋움체 Bold" panose="00000800000000000000" pitchFamily="2" charset="-127"/>
+              </a:rPr>
+              <a:t>, </a:t>
+            </a:r>
+            <a:r>
+              <a:rPr lang="ko-KR" altLang="en-US" sz="800" b="1" dirty="0">
+                <a:latin typeface="KoPub돋움체 Bold" panose="00000800000000000000" pitchFamily="2" charset="-127"/>
+                <a:ea typeface="KoPub돋움체 Bold" panose="00000800000000000000" pitchFamily="2" charset="-127"/>
+              </a:rPr>
+              <a:t>검사 결과 보고</a:t>
+            </a:r>
+            <a:r>
+              <a:rPr lang="en-US" altLang="ko-KR" sz="800" b="1" dirty="0">
+                <a:latin typeface="KoPub돋움체 Bold" panose="00000800000000000000" pitchFamily="2" charset="-127"/>
+                <a:ea typeface="KoPub돋움체 Bold" panose="00000800000000000000" pitchFamily="2" charset="-127"/>
+              </a:rPr>
+              <a:t>)</a:t>
+            </a:r>
+          </a:p>
+          <a:p>
+            <a:pPr marL="88900" indent="-88900">
+              <a:lnSpc>
+                <a:spcPts val="1100"/>
+              </a:lnSpc>
+              <a:buClr>
+                <a:srgbClr val="00B0F0"/>
+              </a:buClr>
+              <a:buFont typeface="Arial" panose="020B0604020202020204" pitchFamily="34" charset="0"/>
+              <a:buChar char="•"/>
+            </a:pPr>
+            <a:r>
+              <a:rPr lang="en-US" altLang="ko-KR" sz="800" b="1" dirty="0">
+                <a:latin typeface="KoPub돋움체 Bold" panose="00000800000000000000" pitchFamily="2" charset="-127"/>
+                <a:ea typeface="KoPub돋움체 Bold" panose="00000800000000000000" pitchFamily="2" charset="-127"/>
+              </a:rPr>
+              <a:t>[</a:t>
+            </a:r>
+            <a:r>
+              <a:rPr lang="ko-KR" altLang="en-US" sz="800" b="1" dirty="0">
+                <a:latin typeface="KoPub돋움체 Bold" panose="00000800000000000000" pitchFamily="2" charset="-127"/>
+                <a:ea typeface="KoPub돋움체 Bold" panose="00000800000000000000" pitchFamily="2" charset="-127"/>
+              </a:rPr>
+              <a:t>완결</a:t>
+            </a:r>
+            <a:r>
+              <a:rPr lang="en-US" altLang="ko-KR" sz="800" b="1" dirty="0">
+                <a:latin typeface="KoPub돋움체 Bold" panose="00000800000000000000" pitchFamily="2" charset="-127"/>
+                <a:ea typeface="KoPub돋움체 Bold" panose="00000800000000000000" pitchFamily="2" charset="-127"/>
+              </a:rPr>
+              <a:t>] [</a:t>
+            </a:r>
+            <a:r>
+              <a:rPr lang="ko-KR" altLang="en-US" sz="800" b="1" dirty="0">
+                <a:latin typeface="KoPub돋움체 Bold" panose="00000800000000000000" pitchFamily="2" charset="-127"/>
+                <a:ea typeface="KoPub돋움체 Bold" panose="00000800000000000000" pitchFamily="2" charset="-127"/>
+              </a:rPr>
+              <a:t>답장</a:t>
+            </a:r>
+            <a:r>
+              <a:rPr lang="en-US" altLang="ko-KR" sz="800" b="1" dirty="0">
+                <a:latin typeface="KoPub돋움체 Bold" panose="00000800000000000000" pitchFamily="2" charset="-127"/>
+                <a:ea typeface="KoPub돋움체 Bold" panose="00000800000000000000" pitchFamily="2" charset="-127"/>
+              </a:rPr>
+              <a:t>(Reply)]</a:t>
+            </a:r>
+            <a:r>
+              <a:rPr lang="ko-KR" altLang="en-US" sz="800" b="1" dirty="0">
+                <a:latin typeface="KoPub돋움체 Bold" panose="00000800000000000000" pitchFamily="2" charset="-127"/>
+                <a:ea typeface="KoPub돋움체 Bold" panose="00000800000000000000" pitchFamily="2" charset="-127"/>
+              </a:rPr>
+              <a:t>기능 필수 활용</a:t>
+            </a:r>
+          </a:p>
+          <a:p>
+            <a:pPr marL="88900" indent="-88900">
+              <a:lnSpc>
+                <a:spcPts val="1100"/>
+              </a:lnSpc>
+              <a:buClr>
+                <a:srgbClr val="00B0F0"/>
+              </a:buClr>
+              <a:buFont typeface="Arial" panose="020B0604020202020204" pitchFamily="34" charset="0"/>
+              <a:buChar char="•"/>
+            </a:pPr>
+            <a:r>
+              <a:rPr lang="en-US" altLang="ko-KR" sz="800" b="1" dirty="0">
+                <a:latin typeface="KoPub돋움체 Bold" panose="00000800000000000000" pitchFamily="2" charset="-127"/>
+                <a:ea typeface="KoPub돋움체 Bold" panose="00000800000000000000" pitchFamily="2" charset="-127"/>
+              </a:rPr>
+              <a:t>[</a:t>
+            </a:r>
+            <a:r>
+              <a:rPr lang="ko-KR" altLang="en-US" sz="800" b="1" dirty="0">
+                <a:latin typeface="KoPub돋움체 Bold" panose="00000800000000000000" pitchFamily="2" charset="-127"/>
+                <a:ea typeface="KoPub돋움체 Bold" panose="00000800000000000000" pitchFamily="2" charset="-127"/>
+              </a:rPr>
+              <a:t>대응</a:t>
+            </a:r>
+            <a:r>
+              <a:rPr lang="en-US" altLang="ko-KR" sz="800" b="1" dirty="0">
+                <a:latin typeface="KoPub돋움체 Bold" panose="00000800000000000000" pitchFamily="2" charset="-127"/>
+                <a:ea typeface="KoPub돋움체 Bold" panose="00000800000000000000" pitchFamily="2" charset="-127"/>
+              </a:rPr>
+              <a:t>] </a:t>
+            </a:r>
+            <a:r>
+              <a:rPr lang="ko-KR" altLang="en-US" sz="800" b="1" dirty="0">
+                <a:latin typeface="KoPub돋움체 Bold" panose="00000800000000000000" pitchFamily="2" charset="-127"/>
+                <a:ea typeface="KoPub돋움체 Bold" panose="00000800000000000000" pitchFamily="2" charset="-127"/>
+              </a:rPr>
+              <a:t>메신저 응답 </a:t>
+            </a:r>
+            <a:r>
+              <a:rPr lang="en-US" altLang="ko-KR" sz="800" b="1" dirty="0">
+                <a:latin typeface="KoPub돋움체 Bold" panose="00000800000000000000" pitchFamily="2" charset="-127"/>
+                <a:ea typeface="KoPub돋움체 Bold" panose="00000800000000000000" pitchFamily="2" charset="-127"/>
+              </a:rPr>
+              <a:t>'10</a:t>
+            </a:r>
+            <a:r>
+              <a:rPr lang="ko-KR" altLang="en-US" sz="800" b="1" dirty="0">
+                <a:latin typeface="KoPub돋움체 Bold" panose="00000800000000000000" pitchFamily="2" charset="-127"/>
+                <a:ea typeface="KoPub돋움체 Bold" panose="00000800000000000000" pitchFamily="2" charset="-127"/>
+              </a:rPr>
+              <a:t>분 룰</a:t>
+            </a:r>
+            <a:r>
+              <a:rPr lang="en-US" altLang="ko-KR" sz="800" b="1" dirty="0">
+                <a:latin typeface="KoPub돋움체 Bold" panose="00000800000000000000" pitchFamily="2" charset="-127"/>
+                <a:ea typeface="KoPub돋움체 Bold" panose="00000800000000000000" pitchFamily="2" charset="-127"/>
+              </a:rPr>
+              <a:t>(Rule)' </a:t>
+            </a:r>
+            <a:r>
+              <a:rPr lang="ko-KR" altLang="en-US" sz="800" b="1" dirty="0">
+                <a:latin typeface="KoPub돋움체 Bold" panose="00000800000000000000" pitchFamily="2" charset="-127"/>
+                <a:ea typeface="KoPub돋움체 Bold" panose="00000800000000000000" pitchFamily="2" charset="-127"/>
+              </a:rPr>
+              <a:t>적용</a:t>
+            </a:r>
+          </a:p>
+        </p:txBody>
+      </p:sp>
     </p:spTree>
     <p:extLst>
       <p:ext uri="{BB962C8B-B14F-4D97-AF65-F5344CB8AC3E}">
-        <p14:creationId xmlns:p14="http://schemas.microsoft.com/office/powerpoint/2010/main" val="1299290329"/>
+        <p14:creationId xmlns:p14="http://schemas.microsoft.com/office/powerpoint/2010/main" val="3435437932"/>
       </p:ext>
     </p:extLst>
   </p:cSld>
@@ -5886,7 +6101,7 @@
         <p:cNvPr id="1" name="">
           <a:extLst>
             <a:ext uri="{FF2B5EF4-FFF2-40B4-BE49-F238E27FC236}">
-              <a16:creationId xmlns:a16="http://schemas.microsoft.com/office/drawing/2014/main" id="{D0BC4CB3-D484-55AD-2D47-C7731F6E7B86}"/>
+              <a16:creationId xmlns:a16="http://schemas.microsoft.com/office/drawing/2014/main" id="{BAA12EC8-194A-8C00-0CA9-0727007234DB}"/>
             </a:ext>
           </a:extLst>
         </p:cNvPr>
@@ -5906,7 +6121,7 @@
           <p:cNvPr id="3" name="TextBox 2">
             <a:extLst>
               <a:ext uri="{FF2B5EF4-FFF2-40B4-BE49-F238E27FC236}">
-                <a16:creationId xmlns:a16="http://schemas.microsoft.com/office/drawing/2014/main" id="{9C712F7A-4500-BD7B-AD47-DBD71D7E4C0F}"/>
+                <a16:creationId xmlns:a16="http://schemas.microsoft.com/office/drawing/2014/main" id="{ECB8C652-C5C5-77B8-99FF-8C1B5938DDC0}"/>
               </a:ext>
             </a:extLst>
           </p:cNvPr>
@@ -5934,21 +6149,7 @@
                 <a:latin typeface="KoPub돋움체 Bold" panose="00000800000000000000" pitchFamily="2" charset="-127"/>
                 <a:ea typeface="KoPub돋움체 Bold" panose="00000800000000000000" pitchFamily="2" charset="-127"/>
               </a:rPr>
-              <a:t>순천향대학교 천안병원 </a:t>
-            </a:r>
-            <a:r>
-              <a:rPr lang="en-US" altLang="ko-KR" sz="600" b="1" spc="-11" dirty="0">
-                <a:latin typeface="KoPub돋움체 Bold" panose="00000800000000000000" pitchFamily="2" charset="-127"/>
-                <a:ea typeface="KoPub돋움체 Bold" panose="00000800000000000000" pitchFamily="2" charset="-127"/>
-              </a:rPr>
-              <a:t>| </a:t>
-            </a:r>
-            <a:r>
-              <a:rPr lang="ko-KR" altLang="en-US" sz="600" b="1" spc="-11" dirty="0">
-                <a:latin typeface="KoPub돋움체 Bold" panose="00000800000000000000" pitchFamily="2" charset="-127"/>
-                <a:ea typeface="KoPub돋움체 Bold" panose="00000800000000000000" pitchFamily="2" charset="-127"/>
-              </a:rPr>
-              <a:t>진료지원간호팀 </a:t>
+              <a:t>순천향대학교 천안병원</a:t>
             </a:r>
           </a:p>
         </p:txBody>
@@ -5958,7 +6159,7 @@
           <p:cNvPr id="17" name="그룹 16">
             <a:extLst>
               <a:ext uri="{FF2B5EF4-FFF2-40B4-BE49-F238E27FC236}">
-                <a16:creationId xmlns:a16="http://schemas.microsoft.com/office/drawing/2014/main" id="{B324A43C-5A16-3C83-6CC6-731138303B15}"/>
+                <a16:creationId xmlns:a16="http://schemas.microsoft.com/office/drawing/2014/main" id="{AC2A831D-C44C-ECDE-295B-4D7EECD506B5}"/>
               </a:ext>
             </a:extLst>
           </p:cNvPr>
@@ -5967,8 +6168,8 @@
         </p:nvGrpSpPr>
         <p:grpSpPr>
           <a:xfrm>
-            <a:off x="2050303" y="549443"/>
-            <a:ext cx="854822" cy="766386"/>
+            <a:off x="2298353" y="149770"/>
+            <a:ext cx="746131" cy="668940"/>
             <a:chOff x="777945" y="-736888"/>
             <a:chExt cx="663508" cy="663508"/>
           </a:xfrm>
@@ -5978,7 +6179,7 @@
             <p:cNvPr id="5" name="그림 4" descr="패턴, 사각형, 예술, 직사각형이(가) 표시된 사진&#10;&#10;AI 생성 콘텐츠는 정확하지 않을 수 있습니다.">
               <a:extLst>
                 <a:ext uri="{FF2B5EF4-FFF2-40B4-BE49-F238E27FC236}">
-                  <a16:creationId xmlns:a16="http://schemas.microsoft.com/office/drawing/2014/main" id="{01AFEF5B-0E09-5DEE-D44E-F299334AB277}"/>
+                  <a16:creationId xmlns:a16="http://schemas.microsoft.com/office/drawing/2014/main" id="{9AF0A680-A546-C66D-333B-F0383EFF91DD}"/>
                 </a:ext>
               </a:extLst>
             </p:cNvPr>
@@ -6008,7 +6209,7 @@
             <p:cNvPr id="13" name="L 도형 12">
               <a:extLst>
                 <a:ext uri="{FF2B5EF4-FFF2-40B4-BE49-F238E27FC236}">
-                  <a16:creationId xmlns:a16="http://schemas.microsoft.com/office/drawing/2014/main" id="{6E223C1A-B58A-ADF6-4BAB-B1C335BF35E1}"/>
+                  <a16:creationId xmlns:a16="http://schemas.microsoft.com/office/drawing/2014/main" id="{241B1B8D-3AAC-7967-5C34-BE1CE0E4E7F1}"/>
                 </a:ext>
               </a:extLst>
             </p:cNvPr>
@@ -6065,7 +6266,7 @@
             <p:cNvPr id="14" name="L 도형 13">
               <a:extLst>
                 <a:ext uri="{FF2B5EF4-FFF2-40B4-BE49-F238E27FC236}">
-                  <a16:creationId xmlns:a16="http://schemas.microsoft.com/office/drawing/2014/main" id="{5BFC87D6-5AB1-D6FD-3102-1403635A1605}"/>
+                  <a16:creationId xmlns:a16="http://schemas.microsoft.com/office/drawing/2014/main" id="{2EA9A3A1-2936-970C-7A69-55D4FE99E86A}"/>
                 </a:ext>
               </a:extLst>
             </p:cNvPr>
@@ -6122,7 +6323,7 @@
             <p:cNvPr id="15" name="L 도형 14">
               <a:extLst>
                 <a:ext uri="{FF2B5EF4-FFF2-40B4-BE49-F238E27FC236}">
-                  <a16:creationId xmlns:a16="http://schemas.microsoft.com/office/drawing/2014/main" id="{27EB9129-FF30-6798-5018-047599149146}"/>
+                  <a16:creationId xmlns:a16="http://schemas.microsoft.com/office/drawing/2014/main" id="{408CF039-E898-D4BA-4817-331156B094C3}"/>
                 </a:ext>
               </a:extLst>
             </p:cNvPr>
@@ -6179,7 +6380,7 @@
             <p:cNvPr id="16" name="L 도형 15">
               <a:extLst>
                 <a:ext uri="{FF2B5EF4-FFF2-40B4-BE49-F238E27FC236}">
-                  <a16:creationId xmlns:a16="http://schemas.microsoft.com/office/drawing/2014/main" id="{427F43E1-A221-4034-D075-2A7106A33686}"/>
+                  <a16:creationId xmlns:a16="http://schemas.microsoft.com/office/drawing/2014/main" id="{74D0F0DB-663F-20B1-9C55-772A4CA03319}"/>
                 </a:ext>
               </a:extLst>
             </p:cNvPr>
@@ -6237,7 +6438,7 @@
           <p:cNvPr id="18" name="그룹 17">
             <a:extLst>
               <a:ext uri="{FF2B5EF4-FFF2-40B4-BE49-F238E27FC236}">
-                <a16:creationId xmlns:a16="http://schemas.microsoft.com/office/drawing/2014/main" id="{E9950BAF-BFB0-A528-BEAF-D107987A505F}"/>
+                <a16:creationId xmlns:a16="http://schemas.microsoft.com/office/drawing/2014/main" id="{188983EB-296F-BBFD-FBA9-91E07EE72348}"/>
               </a:ext>
             </a:extLst>
           </p:cNvPr>
@@ -6257,7 +6458,7 @@
             <p:cNvPr id="4" name="TextBox 3">
               <a:extLst>
                 <a:ext uri="{FF2B5EF4-FFF2-40B4-BE49-F238E27FC236}">
-                  <a16:creationId xmlns:a16="http://schemas.microsoft.com/office/drawing/2014/main" id="{ABFCD9E6-ACFA-0E1D-9750-CA2D46B36CBA}"/>
+                  <a16:creationId xmlns:a16="http://schemas.microsoft.com/office/drawing/2014/main" id="{F66AAF09-31FE-26FC-2FB0-B8D02E7AF1F1}"/>
                 </a:ext>
               </a:extLst>
             </p:cNvPr>
@@ -6332,7 +6533,7 @@
             <p:cNvPr id="6" name="TextBox 5">
               <a:extLst>
                 <a:ext uri="{FF2B5EF4-FFF2-40B4-BE49-F238E27FC236}">
-                  <a16:creationId xmlns:a16="http://schemas.microsoft.com/office/drawing/2014/main" id="{AADF9BD8-5CD3-2331-7586-8EEBC649B151}"/>
+                  <a16:creationId xmlns:a16="http://schemas.microsoft.com/office/drawing/2014/main" id="{54A0752C-9789-18EF-5BAA-38C04B086EDB}"/>
                 </a:ext>
               </a:extLst>
             </p:cNvPr>
@@ -6341,8 +6542,8 @@
           </p:nvSpPr>
           <p:spPr>
             <a:xfrm>
-              <a:off x="622591" y="451833"/>
-              <a:ext cx="1729962" cy="200055"/>
+              <a:off x="660262" y="451833"/>
+              <a:ext cx="1654620" cy="200055"/>
             </a:xfrm>
             <a:prstGeom prst="rect">
               <a:avLst/>
@@ -6368,35 +6569,28 @@
                   <a:latin typeface="KoPub돋움체 Bold" panose="00000800000000000000" pitchFamily="2" charset="-127"/>
                   <a:ea typeface="KoPub돋움체 Bold" panose="00000800000000000000" pitchFamily="2" charset="-127"/>
                 </a:rPr>
-                <a:t>우리가 가치를 만드는 공간</a:t>
+                <a:t>스마트 소통 약속</a:t>
               </a:r>
               <a:r>
                 <a:rPr lang="en-US" altLang="ko-KR" sz="700" b="1" dirty="0">
                   <a:latin typeface="KoPub돋움체 Bold" panose="00000800000000000000" pitchFamily="2" charset="-127"/>
                   <a:ea typeface="KoPub돋움체 Bold" panose="00000800000000000000" pitchFamily="2" charset="-127"/>
                 </a:rPr>
-                <a:t>, </a:t>
+                <a:t>(</a:t>
               </a:r>
               <a:r>
-                <a:rPr lang="ko-KR" altLang="en-US" sz="700" b="1" dirty="0" err="1">
+                <a:rPr lang="en-US" altLang="ko-KR" sz="700" b="1" dirty="0" err="1">
                   <a:latin typeface="KoPub돋움체 Bold" panose="00000800000000000000" pitchFamily="2" charset="-127"/>
                   <a:ea typeface="KoPub돋움체 Bold" panose="00000800000000000000" pitchFamily="2" charset="-127"/>
                 </a:rPr>
-                <a:t>우리가치</a:t>
-              </a:r>
-              <a:r>
-                <a:rPr lang="ko-KR" altLang="en-US" sz="700" b="1" dirty="0">
-                  <a:latin typeface="KoPub돋움체 Bold" panose="00000800000000000000" pitchFamily="2" charset="-127"/>
-                  <a:ea typeface="KoPub돋움체 Bold" panose="00000800000000000000" pitchFamily="2" charset="-127"/>
-                </a:rPr>
-                <a:t> 허브</a:t>
+                <a:t>WeValue</a:t>
               </a:r>
               <a:r>
                 <a:rPr lang="en-US" altLang="ko-KR" sz="700" b="1" dirty="0">
                   <a:latin typeface="KoPub돋움체 Bold" panose="00000800000000000000" pitchFamily="2" charset="-127"/>
                   <a:ea typeface="KoPub돋움체 Bold" panose="00000800000000000000" pitchFamily="2" charset="-127"/>
                 </a:rPr>
-                <a:t>]</a:t>
+                <a:t> Promises)]</a:t>
               </a:r>
             </a:p>
           </p:txBody>
@@ -6406,7 +6600,7 @@
             <p:cNvPr id="10" name="그림 9">
               <a:extLst>
                 <a:ext uri="{FF2B5EF4-FFF2-40B4-BE49-F238E27FC236}">
-                  <a16:creationId xmlns:a16="http://schemas.microsoft.com/office/drawing/2014/main" id="{FFC51E42-A20D-3601-5EC0-5A57057F68DD}"/>
+                  <a16:creationId xmlns:a16="http://schemas.microsoft.com/office/drawing/2014/main" id="{5A939EB4-0387-B056-7B13-E24AE7132CBA}"/>
                 </a:ext>
               </a:extLst>
             </p:cNvPr>
@@ -6436,7 +6630,7 @@
             <p:cNvPr id="30" name="그림 29">
               <a:extLst>
                 <a:ext uri="{FF2B5EF4-FFF2-40B4-BE49-F238E27FC236}">
-                  <a16:creationId xmlns:a16="http://schemas.microsoft.com/office/drawing/2014/main" id="{A1B5D57C-C9A0-E9AC-AA70-B663BB2BCA36}"/>
+                  <a16:creationId xmlns:a16="http://schemas.microsoft.com/office/drawing/2014/main" id="{D4CEAAA8-E19B-66C3-DDA1-FAAA8A759B4F}"/>
                 </a:ext>
               </a:extLst>
             </p:cNvPr>
@@ -6462,304 +6656,435 @@
           </p:spPr>
         </p:pic>
       </p:grpSp>
-      <p:grpSp>
-        <p:nvGrpSpPr>
-          <p:cNvPr id="12" name="그룹 11">
+      <p:sp>
+        <p:nvSpPr>
+          <p:cNvPr id="31" name="TextBox 30">
             <a:extLst>
               <a:ext uri="{FF2B5EF4-FFF2-40B4-BE49-F238E27FC236}">
-                <a16:creationId xmlns:a16="http://schemas.microsoft.com/office/drawing/2014/main" id="{0509C176-318C-45B9-896A-51F69D5D6BD3}"/>
+                <a16:creationId xmlns:a16="http://schemas.microsoft.com/office/drawing/2014/main" id="{9611EB94-5D24-9E99-9D8A-1251B0D8BFBB}"/>
               </a:ext>
             </a:extLst>
           </p:cNvPr>
-          <p:cNvGrpSpPr/>
+          <p:cNvSpPr txBox="1"/>
           <p:nvPr/>
-        </p:nvGrpSpPr>
-        <p:grpSpPr>
+        </p:nvSpPr>
+        <p:spPr>
           <a:xfrm>
-            <a:off x="205429" y="781187"/>
-            <a:ext cx="1731561" cy="784830"/>
-            <a:chOff x="796295" y="778765"/>
-            <a:chExt cx="1731561" cy="784830"/>
+            <a:off x="82843" y="781989"/>
+            <a:ext cx="2592376" cy="790345"/>
           </a:xfrm>
-        </p:grpSpPr>
-        <p:sp>
-          <p:nvSpPr>
-            <p:cNvPr id="26" name="TextBox 25">
-              <a:extLst>
-                <a:ext uri="{FF2B5EF4-FFF2-40B4-BE49-F238E27FC236}">
-                  <a16:creationId xmlns:a16="http://schemas.microsoft.com/office/drawing/2014/main" id="{F13C02A4-8A38-8C34-FE4B-9A367D69BBFD}"/>
-                </a:ext>
-              </a:extLst>
-            </p:cNvPr>
-            <p:cNvSpPr txBox="1"/>
-            <p:nvPr/>
-          </p:nvSpPr>
-          <p:spPr>
-            <a:xfrm>
-              <a:off x="1495201" y="778765"/>
-              <a:ext cx="1032655" cy="784830"/>
-            </a:xfrm>
-            <a:prstGeom prst="rect">
-              <a:avLst/>
-            </a:prstGeom>
-            <a:noFill/>
-          </p:spPr>
-          <p:txBody>
-            <a:bodyPr wrap="none" rtlCol="0">
-              <a:spAutoFit/>
-            </a:bodyPr>
-            <a:lstStyle/>
-            <a:p>
-              <a:r>
-                <a:rPr lang="en-US" altLang="ko-KR" sz="900" dirty="0">
-                  <a:latin typeface="KoPub돋움체 Light" panose="00000300000000000000" pitchFamily="2" charset="-127"/>
-                  <a:ea typeface="KoPub돋움체 Light" panose="00000300000000000000" pitchFamily="2" charset="-127"/>
-                </a:rPr>
-                <a:t>"</a:t>
-              </a:r>
-              <a:r>
-                <a:rPr lang="ko-KR" altLang="en-US" sz="900" dirty="0">
-                  <a:latin typeface="KoPub돋움체 Light" panose="00000300000000000000" pitchFamily="2" charset="-127"/>
-                  <a:ea typeface="KoPub돋움체 Light" panose="00000300000000000000" pitchFamily="2" charset="-127"/>
-                </a:rPr>
-                <a:t>함께하는 즐거움</a:t>
-              </a:r>
-              <a:r>
-                <a:rPr lang="en-US" altLang="ko-KR" sz="900" dirty="0">
-                  <a:latin typeface="KoPub돋움체 Light" panose="00000300000000000000" pitchFamily="2" charset="-127"/>
-                  <a:ea typeface="KoPub돋움체 Light" panose="00000300000000000000" pitchFamily="2" charset="-127"/>
-                </a:rPr>
-                <a:t>“</a:t>
-              </a:r>
-            </a:p>
-            <a:p>
-              <a:r>
-                <a:rPr lang="en-US" altLang="ko-KR" sz="900" dirty="0">
-                  <a:latin typeface="KoPub돋움체 Light" panose="00000300000000000000" pitchFamily="2" charset="-127"/>
-                  <a:ea typeface="KoPub돋움체 Light" panose="00000300000000000000" pitchFamily="2" charset="-127"/>
-                </a:rPr>
-                <a:t>"</a:t>
-              </a:r>
-              <a:r>
-                <a:rPr lang="ko-KR" altLang="en-US" sz="900" dirty="0">
-                  <a:latin typeface="KoPub돋움체 Light" panose="00000300000000000000" pitchFamily="2" charset="-127"/>
-                  <a:ea typeface="KoPub돋움체 Light" panose="00000300000000000000" pitchFamily="2" charset="-127"/>
-                </a:rPr>
-                <a:t>명확한 약속</a:t>
-              </a:r>
-              <a:r>
-                <a:rPr lang="en-US" altLang="ko-KR" sz="900" dirty="0">
-                  <a:latin typeface="KoPub돋움체 Light" panose="00000300000000000000" pitchFamily="2" charset="-127"/>
-                  <a:ea typeface="KoPub돋움체 Light" panose="00000300000000000000" pitchFamily="2" charset="-127"/>
-                </a:rPr>
-                <a:t>"</a:t>
-              </a:r>
-              <a:endParaRPr lang="ko-KR" altLang="en-US" sz="900" dirty="0">
-                <a:latin typeface="KoPub돋움체 Light" panose="00000300000000000000" pitchFamily="2" charset="-127"/>
-                <a:ea typeface="KoPub돋움체 Light" panose="00000300000000000000" pitchFamily="2" charset="-127"/>
-              </a:endParaRPr>
-            </a:p>
-            <a:p>
-              <a:r>
-                <a:rPr lang="en-US" altLang="ko-KR" sz="900" dirty="0">
-                  <a:latin typeface="KoPub돋움체 Light" panose="00000300000000000000" pitchFamily="2" charset="-127"/>
-                  <a:ea typeface="KoPub돋움체 Light" panose="00000300000000000000" pitchFamily="2" charset="-127"/>
-                </a:rPr>
-                <a:t>"</a:t>
-              </a:r>
-              <a:r>
-                <a:rPr lang="ko-KR" altLang="en-US" sz="900" dirty="0">
-                  <a:latin typeface="KoPub돋움체 Light" panose="00000300000000000000" pitchFamily="2" charset="-127"/>
-                  <a:ea typeface="KoPub돋움체 Light" panose="00000300000000000000" pitchFamily="2" charset="-127"/>
-                </a:rPr>
-                <a:t>한눈에 보는 실무</a:t>
-              </a:r>
-              <a:r>
-                <a:rPr lang="en-US" altLang="ko-KR" sz="900" dirty="0">
-                  <a:latin typeface="KoPub돋움체 Light" panose="00000300000000000000" pitchFamily="2" charset="-127"/>
-                  <a:ea typeface="KoPub돋움체 Light" panose="00000300000000000000" pitchFamily="2" charset="-127"/>
-                </a:rPr>
-                <a:t>"</a:t>
-              </a:r>
-              <a:endParaRPr lang="ko-KR" altLang="en-US" sz="900" dirty="0">
-                <a:latin typeface="KoPub돋움체 Light" panose="00000300000000000000" pitchFamily="2" charset="-127"/>
-                <a:ea typeface="KoPub돋움체 Light" panose="00000300000000000000" pitchFamily="2" charset="-127"/>
-              </a:endParaRPr>
-            </a:p>
-            <a:p>
-              <a:r>
-                <a:rPr lang="en-US" altLang="ko-KR" sz="900" dirty="0">
-                  <a:latin typeface="KoPub돋움체 Light" panose="00000300000000000000" pitchFamily="2" charset="-127"/>
-                  <a:ea typeface="KoPub돋움체 Light" panose="00000300000000000000" pitchFamily="2" charset="-127"/>
-                </a:rPr>
-                <a:t>"</a:t>
-              </a:r>
-              <a:r>
-                <a:rPr lang="ko-KR" altLang="en-US" sz="900" dirty="0">
-                  <a:latin typeface="KoPub돋움체 Light" panose="00000300000000000000" pitchFamily="2" charset="-127"/>
-                  <a:ea typeface="KoPub돋움체 Light" panose="00000300000000000000" pitchFamily="2" charset="-127"/>
-                </a:rPr>
-                <a:t>현장 밀착형 지원</a:t>
-              </a:r>
-              <a:r>
-                <a:rPr lang="en-US" altLang="ko-KR" sz="900" dirty="0">
-                  <a:latin typeface="KoPub돋움체 Light" panose="00000300000000000000" pitchFamily="2" charset="-127"/>
-                  <a:ea typeface="KoPub돋움체 Light" panose="00000300000000000000" pitchFamily="2" charset="-127"/>
-                </a:rPr>
-                <a:t>"</a:t>
-              </a:r>
-              <a:endParaRPr lang="ko-KR" altLang="en-US" sz="900" dirty="0">
-                <a:latin typeface="KoPub돋움체 Light" panose="00000300000000000000" pitchFamily="2" charset="-127"/>
-                <a:ea typeface="KoPub돋움체 Light" panose="00000300000000000000" pitchFamily="2" charset="-127"/>
-              </a:endParaRPr>
-            </a:p>
-            <a:p>
-              <a:r>
-                <a:rPr lang="en-US" altLang="ko-KR" sz="900" dirty="0">
-                  <a:latin typeface="KoPub돋움체 Light" panose="00000300000000000000" pitchFamily="2" charset="-127"/>
-                  <a:ea typeface="KoPub돋움체 Light" panose="00000300000000000000" pitchFamily="2" charset="-127"/>
-                </a:rPr>
-                <a:t>"</a:t>
-              </a:r>
-              <a:r>
-                <a:rPr lang="ko-KR" altLang="en-US" sz="900" dirty="0">
-                  <a:latin typeface="KoPub돋움체 Light" panose="00000300000000000000" pitchFamily="2" charset="-127"/>
-                  <a:ea typeface="KoPub돋움체 Light" panose="00000300000000000000" pitchFamily="2" charset="-127"/>
-                </a:rPr>
-                <a:t>변화의 체감</a:t>
-              </a:r>
-              <a:r>
-                <a:rPr lang="en-US" altLang="ko-KR" sz="900" dirty="0">
-                  <a:latin typeface="KoPub돋움체 Light" panose="00000300000000000000" pitchFamily="2" charset="-127"/>
-                  <a:ea typeface="KoPub돋움체 Light" panose="00000300000000000000" pitchFamily="2" charset="-127"/>
-                </a:rPr>
-                <a:t>"</a:t>
-              </a:r>
-              <a:endParaRPr lang="ko-KR" altLang="en-US" sz="900" dirty="0">
-                <a:latin typeface="KoPub돋움체 Light" panose="00000300000000000000" pitchFamily="2" charset="-127"/>
-                <a:ea typeface="KoPub돋움체 Light" panose="00000300000000000000" pitchFamily="2" charset="-127"/>
-              </a:endParaRPr>
-            </a:p>
-          </p:txBody>
-        </p:sp>
-        <p:sp>
-          <p:nvSpPr>
-            <p:cNvPr id="31" name="TextBox 30">
-              <a:extLst>
-                <a:ext uri="{FF2B5EF4-FFF2-40B4-BE49-F238E27FC236}">
-                  <a16:creationId xmlns:a16="http://schemas.microsoft.com/office/drawing/2014/main" id="{7DE5EE10-3C8C-0C0B-5394-75A3F0DAECC2}"/>
-                </a:ext>
-              </a:extLst>
-            </p:cNvPr>
-            <p:cNvSpPr txBox="1"/>
-            <p:nvPr/>
-          </p:nvSpPr>
-          <p:spPr>
-            <a:xfrm>
-              <a:off x="796295" y="778765"/>
-              <a:ext cx="813043" cy="784830"/>
-            </a:xfrm>
-            <a:prstGeom prst="rect">
-              <a:avLst/>
-            </a:prstGeom>
-            <a:noFill/>
-          </p:spPr>
-          <p:txBody>
-            <a:bodyPr wrap="none" rtlCol="0">
-              <a:spAutoFit/>
-            </a:bodyPr>
-            <a:lstStyle/>
-            <a:p>
-              <a:pPr marL="88900" indent="-88900">
-                <a:buClr>
-                  <a:srgbClr val="00B0F0"/>
-                </a:buClr>
-                <a:buFont typeface="Arial" panose="020B0604020202020204" pitchFamily="34" charset="0"/>
-                <a:buChar char="•"/>
-              </a:pPr>
-              <a:r>
-                <a:rPr lang="ko-KR" altLang="en-US" sz="900" b="1" dirty="0">
-                  <a:latin typeface="KoPub돋움체 Bold" panose="00000800000000000000" pitchFamily="2" charset="-127"/>
-                  <a:ea typeface="KoPub돋움체 Bold" panose="00000800000000000000" pitchFamily="2" charset="-127"/>
-                </a:rPr>
-                <a:t>소통의 광장</a:t>
-              </a:r>
-              <a:endParaRPr lang="en-US" altLang="ko-KR" sz="900" b="1" dirty="0">
-                <a:latin typeface="KoPub돋움체 Bold" panose="00000800000000000000" pitchFamily="2" charset="-127"/>
-                <a:ea typeface="KoPub돋움체 Bold" panose="00000800000000000000" pitchFamily="2" charset="-127"/>
-              </a:endParaRPr>
-            </a:p>
-            <a:p>
-              <a:pPr marL="88900" indent="-88900">
-                <a:buClr>
-                  <a:srgbClr val="00B0F0"/>
-                </a:buClr>
-                <a:buFont typeface="Arial" panose="020B0604020202020204" pitchFamily="34" charset="0"/>
-                <a:buChar char="•"/>
-              </a:pPr>
-              <a:r>
-                <a:rPr lang="ko-KR" altLang="en-US" sz="900" b="1" dirty="0">
-                  <a:latin typeface="KoPub돋움체 Bold" panose="00000800000000000000" pitchFamily="2" charset="-127"/>
-                  <a:ea typeface="KoPub돋움체 Bold" panose="00000800000000000000" pitchFamily="2" charset="-127"/>
-                </a:rPr>
-                <a:t>업무 기준</a:t>
-              </a:r>
-            </a:p>
-            <a:p>
-              <a:pPr marL="88900" indent="-88900">
-                <a:buClr>
-                  <a:srgbClr val="00B0F0"/>
-                </a:buClr>
-                <a:buFont typeface="Arial" panose="020B0604020202020204" pitchFamily="34" charset="0"/>
-                <a:buChar char="•"/>
-              </a:pPr>
-              <a:r>
-                <a:rPr lang="ko-KR" altLang="en-US" sz="900" b="1" dirty="0">
-                  <a:latin typeface="KoPub돋움체 Bold" panose="00000800000000000000" pitchFamily="2" charset="-127"/>
-                  <a:ea typeface="KoPub돋움체 Bold" panose="00000800000000000000" pitchFamily="2" charset="-127"/>
-                </a:rPr>
-                <a:t>교육자료</a:t>
-              </a:r>
-            </a:p>
-            <a:p>
-              <a:pPr marL="88900" indent="-88900">
-                <a:buClr>
-                  <a:srgbClr val="00B0F0"/>
-                </a:buClr>
-                <a:buFont typeface="Arial" panose="020B0604020202020204" pitchFamily="34" charset="0"/>
-                <a:buChar char="•"/>
-              </a:pPr>
-              <a:r>
-                <a:rPr lang="ko-KR" altLang="en-US" sz="900" b="1" dirty="0">
-                  <a:latin typeface="KoPub돋움체 Bold" panose="00000800000000000000" pitchFamily="2" charset="-127"/>
-                  <a:ea typeface="KoPub돋움체 Bold" panose="00000800000000000000" pitchFamily="2" charset="-127"/>
-                </a:rPr>
-                <a:t>요청</a:t>
-              </a:r>
-            </a:p>
-            <a:p>
-              <a:pPr marL="88900" indent="-88900">
-                <a:buClr>
-                  <a:srgbClr val="00B0F0"/>
-                </a:buClr>
-                <a:buFont typeface="Arial" panose="020B0604020202020204" pitchFamily="34" charset="0"/>
-                <a:buChar char="•"/>
-              </a:pPr>
-              <a:r>
-                <a:rPr lang="ko-KR" altLang="en-US" sz="900" b="1" dirty="0">
-                  <a:latin typeface="KoPub돋움체 Bold" panose="00000800000000000000" pitchFamily="2" charset="-127"/>
-                  <a:ea typeface="KoPub돋움체 Bold" panose="00000800000000000000" pitchFamily="2" charset="-127"/>
-                </a:rPr>
-                <a:t>지표</a:t>
-              </a:r>
-            </a:p>
-          </p:txBody>
-        </p:sp>
-      </p:grpSp>
+          <a:prstGeom prst="rect">
+            <a:avLst/>
+          </a:prstGeom>
+          <a:noFill/>
+        </p:spPr>
+        <p:txBody>
+          <a:bodyPr wrap="none" rtlCol="0">
+            <a:spAutoFit/>
+          </a:bodyPr>
+          <a:lstStyle/>
+          <a:p>
+            <a:pPr marL="88900" indent="-88900">
+              <a:lnSpc>
+                <a:spcPts val="1100"/>
+              </a:lnSpc>
+              <a:buClr>
+                <a:srgbClr val="00B0F0"/>
+              </a:buClr>
+              <a:buFont typeface="Arial" panose="020B0604020202020204" pitchFamily="34" charset="0"/>
+              <a:buChar char="•"/>
+            </a:pPr>
+            <a:r>
+              <a:rPr lang="en-US" altLang="ko-KR" sz="800" b="1" dirty="0">
+                <a:latin typeface="KoPub돋움체 Bold" panose="00000800000000000000" pitchFamily="2" charset="-127"/>
+                <a:ea typeface="KoPub돋움체 Bold" panose="00000800000000000000" pitchFamily="2" charset="-127"/>
+              </a:rPr>
+              <a:t>[</a:t>
+            </a:r>
+            <a:r>
+              <a:rPr lang="ko-KR" altLang="en-US" sz="800" b="1" dirty="0">
+                <a:latin typeface="KoPub돋움체 Bold" panose="00000800000000000000" pitchFamily="2" charset="-127"/>
+                <a:ea typeface="KoPub돋움체 Bold" panose="00000800000000000000" pitchFamily="2" charset="-127"/>
+              </a:rPr>
+              <a:t>식별</a:t>
+            </a:r>
+            <a:r>
+              <a:rPr lang="en-US" altLang="ko-KR" sz="800" b="1" dirty="0">
+                <a:latin typeface="KoPub돋움체 Bold" panose="00000800000000000000" pitchFamily="2" charset="-127"/>
+                <a:ea typeface="KoPub돋움체 Bold" panose="00000800000000000000" pitchFamily="2" charset="-127"/>
+              </a:rPr>
+              <a:t>] </a:t>
+            </a:r>
+            <a:r>
+              <a:rPr lang="ko-KR" altLang="en-US" sz="800" b="1" dirty="0">
+                <a:latin typeface="KoPub돋움체 Bold" panose="00000800000000000000" pitchFamily="2" charset="-127"/>
+                <a:ea typeface="KoPub돋움체 Bold" panose="00000800000000000000" pitchFamily="2" charset="-127"/>
+              </a:rPr>
+              <a:t>첫머리 </a:t>
+            </a:r>
+            <a:r>
+              <a:rPr lang="en-US" altLang="ko-KR" sz="800" b="1" dirty="0">
+                <a:latin typeface="KoPub돋움체 Bold" panose="00000800000000000000" pitchFamily="2" charset="-127"/>
+                <a:ea typeface="KoPub돋움체 Bold" panose="00000800000000000000" pitchFamily="2" charset="-127"/>
+              </a:rPr>
+              <a:t>[</a:t>
+            </a:r>
+            <a:r>
+              <a:rPr lang="ko-KR" altLang="en-US" sz="800" b="1" dirty="0">
+                <a:latin typeface="KoPub돋움체 Bold" panose="00000800000000000000" pitchFamily="2" charset="-127"/>
+                <a:ea typeface="KoPub돋움체 Bold" panose="00000800000000000000" pitchFamily="2" charset="-127"/>
+              </a:rPr>
+              <a:t>병실</a:t>
+            </a:r>
+            <a:r>
+              <a:rPr lang="en-US" altLang="ko-KR" sz="800" b="1" dirty="0">
+                <a:latin typeface="KoPub돋움체 Bold" panose="00000800000000000000" pitchFamily="2" charset="-127"/>
+                <a:ea typeface="KoPub돋움체 Bold" panose="00000800000000000000" pitchFamily="2" charset="-127"/>
+              </a:rPr>
+              <a:t>/</a:t>
+            </a:r>
+            <a:r>
+              <a:rPr lang="ko-KR" altLang="en-US" sz="800" b="1" dirty="0">
+                <a:latin typeface="KoPub돋움체 Bold" panose="00000800000000000000" pitchFamily="2" charset="-127"/>
+                <a:ea typeface="KoPub돋움체 Bold" panose="00000800000000000000" pitchFamily="2" charset="-127"/>
+              </a:rPr>
+              <a:t>성함</a:t>
+            </a:r>
+            <a:r>
+              <a:rPr lang="en-US" altLang="ko-KR" sz="800" b="1" dirty="0">
+                <a:latin typeface="KoPub돋움체 Bold" panose="00000800000000000000" pitchFamily="2" charset="-127"/>
+                <a:ea typeface="KoPub돋움체 Bold" panose="00000800000000000000" pitchFamily="2" charset="-127"/>
+              </a:rPr>
+              <a:t>/</a:t>
+            </a:r>
+            <a:r>
+              <a:rPr lang="ko-KR" altLang="en-US" sz="800" b="1" dirty="0">
+                <a:latin typeface="KoPub돋움체 Bold" panose="00000800000000000000" pitchFamily="2" charset="-127"/>
+                <a:ea typeface="KoPub돋움체 Bold" panose="00000800000000000000" pitchFamily="2" charset="-127"/>
+              </a:rPr>
+              <a:t>사유</a:t>
+            </a:r>
+            <a:r>
+              <a:rPr lang="en-US" altLang="ko-KR" sz="800" b="1" dirty="0">
+                <a:latin typeface="KoPub돋움체 Bold" panose="00000800000000000000" pitchFamily="2" charset="-127"/>
+                <a:ea typeface="KoPub돋움체 Bold" panose="00000800000000000000" pitchFamily="2" charset="-127"/>
+              </a:rPr>
+              <a:t>]</a:t>
+            </a:r>
+            <a:r>
+              <a:rPr lang="ko-KR" altLang="en-US" sz="800" b="1" dirty="0">
+                <a:latin typeface="KoPub돋움체 Bold" panose="00000800000000000000" pitchFamily="2" charset="-127"/>
+                <a:ea typeface="KoPub돋움체 Bold" panose="00000800000000000000" pitchFamily="2" charset="-127"/>
+              </a:rPr>
+              <a:t>필수 기재</a:t>
+            </a:r>
+          </a:p>
+          <a:p>
+            <a:pPr marL="88900" indent="-88900">
+              <a:lnSpc>
+                <a:spcPts val="1100"/>
+              </a:lnSpc>
+              <a:buClr>
+                <a:srgbClr val="00B0F0"/>
+              </a:buClr>
+              <a:buFont typeface="Arial" panose="020B0604020202020204" pitchFamily="34" charset="0"/>
+              <a:buChar char="•"/>
+            </a:pPr>
+            <a:r>
+              <a:rPr lang="en-US" altLang="ko-KR" sz="800" b="1" dirty="0">
+                <a:latin typeface="KoPub돋움체 Bold" panose="00000800000000000000" pitchFamily="2" charset="-127"/>
+                <a:ea typeface="KoPub돋움체 Bold" panose="00000800000000000000" pitchFamily="2" charset="-127"/>
+              </a:rPr>
+              <a:t>[</a:t>
+            </a:r>
+            <a:r>
+              <a:rPr lang="ko-KR" altLang="en-US" sz="800" b="1" dirty="0">
+                <a:latin typeface="KoPub돋움체 Bold" panose="00000800000000000000" pitchFamily="2" charset="-127"/>
+                <a:ea typeface="KoPub돋움체 Bold" panose="00000800000000000000" pitchFamily="2" charset="-127"/>
+              </a:rPr>
+              <a:t>공유</a:t>
+            </a:r>
+            <a:r>
+              <a:rPr lang="en-US" altLang="ko-KR" sz="800" b="1" dirty="0">
+                <a:latin typeface="KoPub돋움체 Bold" panose="00000800000000000000" pitchFamily="2" charset="-127"/>
+                <a:ea typeface="KoPub돋움체 Bold" panose="00000800000000000000" pitchFamily="2" charset="-127"/>
+              </a:rPr>
+              <a:t>] </a:t>
+            </a:r>
+            <a:r>
+              <a:rPr lang="ko-KR" altLang="en-US" sz="800" b="1" dirty="0">
+                <a:latin typeface="KoPub돋움체 Bold" panose="00000800000000000000" pitchFamily="2" charset="-127"/>
+                <a:ea typeface="KoPub돋움체 Bold" panose="00000800000000000000" pitchFamily="2" charset="-127"/>
+              </a:rPr>
+              <a:t>결정 사항의 </a:t>
+            </a:r>
+            <a:r>
+              <a:rPr lang="ko-KR" altLang="en-US" sz="800" b="1" dirty="0" err="1">
+                <a:latin typeface="KoPub돋움체 Bold" panose="00000800000000000000" pitchFamily="2" charset="-127"/>
+                <a:ea typeface="KoPub돋움체 Bold" panose="00000800000000000000" pitchFamily="2" charset="-127"/>
+              </a:rPr>
+              <a:t>선제적</a:t>
+            </a:r>
+            <a:r>
+              <a:rPr lang="ko-KR" altLang="en-US" sz="800" b="1" dirty="0">
+                <a:latin typeface="KoPub돋움체 Bold" panose="00000800000000000000" pitchFamily="2" charset="-127"/>
+                <a:ea typeface="KoPub돋움체 Bold" panose="00000800000000000000" pitchFamily="2" charset="-127"/>
+              </a:rPr>
+              <a:t> 알림 </a:t>
+            </a:r>
+            <a:r>
+              <a:rPr lang="en-US" altLang="ko-KR" sz="800" b="1" dirty="0">
+                <a:latin typeface="KoPub돋움체 Bold" panose="00000800000000000000" pitchFamily="2" charset="-127"/>
+                <a:ea typeface="KoPub돋움체 Bold" panose="00000800000000000000" pitchFamily="2" charset="-127"/>
+              </a:rPr>
+              <a:t>(PA ↔ </a:t>
+            </a:r>
+            <a:r>
+              <a:rPr lang="ko-KR" altLang="en-US" sz="800" b="1" dirty="0">
+                <a:latin typeface="KoPub돋움체 Bold" panose="00000800000000000000" pitchFamily="2" charset="-127"/>
+                <a:ea typeface="KoPub돋움체 Bold" panose="00000800000000000000" pitchFamily="2" charset="-127"/>
+              </a:rPr>
+              <a:t>병동</a:t>
+            </a:r>
+            <a:r>
+              <a:rPr lang="en-US" altLang="ko-KR" sz="800" b="1" dirty="0">
+                <a:latin typeface="KoPub돋움체 Bold" panose="00000800000000000000" pitchFamily="2" charset="-127"/>
+                <a:ea typeface="KoPub돋움체 Bold" panose="00000800000000000000" pitchFamily="2" charset="-127"/>
+              </a:rPr>
+              <a:t>)</a:t>
+            </a:r>
+          </a:p>
+          <a:p>
+            <a:pPr marL="88900" indent="-88900">
+              <a:lnSpc>
+                <a:spcPts val="1100"/>
+              </a:lnSpc>
+              <a:buClr>
+                <a:srgbClr val="00B0F0"/>
+              </a:buClr>
+              <a:buFont typeface="Arial" panose="020B0604020202020204" pitchFamily="34" charset="0"/>
+              <a:buChar char="•"/>
+            </a:pPr>
+            <a:r>
+              <a:rPr lang="en-US" altLang="ko-KR" sz="800" b="1" dirty="0">
+                <a:latin typeface="KoPub돋움체 Bold" panose="00000800000000000000" pitchFamily="2" charset="-127"/>
+                <a:ea typeface="KoPub돋움체 Bold" panose="00000800000000000000" pitchFamily="2" charset="-127"/>
+              </a:rPr>
+              <a:t>[</a:t>
+            </a:r>
+            <a:r>
+              <a:rPr lang="ko-KR" altLang="en-US" sz="800" b="1" dirty="0">
+                <a:latin typeface="KoPub돋움체 Bold" panose="00000800000000000000" pitchFamily="2" charset="-127"/>
+                <a:ea typeface="KoPub돋움체 Bold" panose="00000800000000000000" pitchFamily="2" charset="-127"/>
+              </a:rPr>
+              <a:t>원칙</a:t>
+            </a:r>
+            <a:r>
+              <a:rPr lang="en-US" altLang="ko-KR" sz="800" b="1" dirty="0">
+                <a:latin typeface="KoPub돋움체 Bold" panose="00000800000000000000" pitchFamily="2" charset="-127"/>
+                <a:ea typeface="KoPub돋움체 Bold" panose="00000800000000000000" pitchFamily="2" charset="-127"/>
+              </a:rPr>
+              <a:t>] </a:t>
+            </a:r>
+            <a:r>
+              <a:rPr lang="ko-KR" altLang="en-US" sz="800" b="1" dirty="0">
+                <a:latin typeface="KoPub돋움체 Bold" panose="00000800000000000000" pitchFamily="2" charset="-127"/>
+                <a:ea typeface="KoPub돋움체 Bold" panose="00000800000000000000" pitchFamily="2" charset="-127"/>
+              </a:rPr>
+              <a:t>공식 채널</a:t>
+            </a:r>
+            <a:r>
+              <a:rPr lang="en-US" altLang="ko-KR" sz="800" b="1" dirty="0">
+                <a:latin typeface="KoPub돋움체 Bold" panose="00000800000000000000" pitchFamily="2" charset="-127"/>
+                <a:ea typeface="KoPub돋움체 Bold" panose="00000800000000000000" pitchFamily="2" charset="-127"/>
+              </a:rPr>
+              <a:t>(EMR/</a:t>
+            </a:r>
+            <a:r>
+              <a:rPr lang="ko-KR" altLang="en-US" sz="800" b="1" dirty="0">
+                <a:latin typeface="KoPub돋움체 Bold" panose="00000800000000000000" pitchFamily="2" charset="-127"/>
+                <a:ea typeface="KoPub돋움체 Bold" panose="00000800000000000000" pitchFamily="2" charset="-127"/>
+              </a:rPr>
+              <a:t>유선</a:t>
+            </a:r>
+            <a:r>
+              <a:rPr lang="en-US" altLang="ko-KR" sz="800" b="1" dirty="0">
+                <a:latin typeface="KoPub돋움체 Bold" panose="00000800000000000000" pitchFamily="2" charset="-127"/>
+                <a:ea typeface="KoPub돋움체 Bold" panose="00000800000000000000" pitchFamily="2" charset="-127"/>
+              </a:rPr>
+              <a:t>) </a:t>
+            </a:r>
+            <a:r>
+              <a:rPr lang="ko-KR" altLang="en-US" sz="800" b="1" dirty="0">
+                <a:latin typeface="KoPub돋움체 Bold" panose="00000800000000000000" pitchFamily="2" charset="-127"/>
+                <a:ea typeface="KoPub돋움체 Bold" panose="00000800000000000000" pitchFamily="2" charset="-127"/>
+              </a:rPr>
+              <a:t>활용 </a:t>
+            </a:r>
+            <a:r>
+              <a:rPr lang="en-US" altLang="ko-KR" sz="800" b="1" dirty="0">
+                <a:latin typeface="KoPub돋움체 Bold" panose="00000800000000000000" pitchFamily="2" charset="-127"/>
+                <a:ea typeface="KoPub돋움체 Bold" panose="00000800000000000000" pitchFamily="2" charset="-127"/>
+              </a:rPr>
+              <a:t>(</a:t>
+            </a:r>
+            <a:r>
+              <a:rPr lang="ko-KR" altLang="en-US" sz="800" b="1" dirty="0">
+                <a:latin typeface="KoPub돋움체 Bold" panose="00000800000000000000" pitchFamily="2" charset="-127"/>
+                <a:ea typeface="KoPub돋움체 Bold" panose="00000800000000000000" pitchFamily="2" charset="-127"/>
+              </a:rPr>
+              <a:t>수술</a:t>
+            </a:r>
+            <a:r>
+              <a:rPr lang="en-US" altLang="ko-KR" sz="800" b="1" dirty="0">
+                <a:latin typeface="KoPub돋움체 Bold" panose="00000800000000000000" pitchFamily="2" charset="-127"/>
+                <a:ea typeface="KoPub돋움체 Bold" panose="00000800000000000000" pitchFamily="2" charset="-127"/>
+              </a:rPr>
+              <a:t>, </a:t>
+            </a:r>
+            <a:r>
+              <a:rPr lang="ko-KR" altLang="en-US" sz="800" b="1" dirty="0">
+                <a:latin typeface="KoPub돋움체 Bold" panose="00000800000000000000" pitchFamily="2" charset="-127"/>
+                <a:ea typeface="KoPub돋움체 Bold" panose="00000800000000000000" pitchFamily="2" charset="-127"/>
+              </a:rPr>
+              <a:t>검사 결과 보고</a:t>
+            </a:r>
+            <a:r>
+              <a:rPr lang="en-US" altLang="ko-KR" sz="800" b="1" dirty="0">
+                <a:latin typeface="KoPub돋움체 Bold" panose="00000800000000000000" pitchFamily="2" charset="-127"/>
+                <a:ea typeface="KoPub돋움체 Bold" panose="00000800000000000000" pitchFamily="2" charset="-127"/>
+              </a:rPr>
+              <a:t>)</a:t>
+            </a:r>
+          </a:p>
+          <a:p>
+            <a:pPr marL="88900" indent="-88900">
+              <a:lnSpc>
+                <a:spcPts val="1100"/>
+              </a:lnSpc>
+              <a:buClr>
+                <a:srgbClr val="00B0F0"/>
+              </a:buClr>
+              <a:buFont typeface="Arial" panose="020B0604020202020204" pitchFamily="34" charset="0"/>
+              <a:buChar char="•"/>
+            </a:pPr>
+            <a:r>
+              <a:rPr lang="en-US" altLang="ko-KR" sz="800" b="1" dirty="0">
+                <a:latin typeface="KoPub돋움체 Bold" panose="00000800000000000000" pitchFamily="2" charset="-127"/>
+                <a:ea typeface="KoPub돋움체 Bold" panose="00000800000000000000" pitchFamily="2" charset="-127"/>
+              </a:rPr>
+              <a:t>[</a:t>
+            </a:r>
+            <a:r>
+              <a:rPr lang="ko-KR" altLang="en-US" sz="800" b="1" dirty="0">
+                <a:latin typeface="KoPub돋움체 Bold" panose="00000800000000000000" pitchFamily="2" charset="-127"/>
+                <a:ea typeface="KoPub돋움체 Bold" panose="00000800000000000000" pitchFamily="2" charset="-127"/>
+              </a:rPr>
+              <a:t>완결</a:t>
+            </a:r>
+            <a:r>
+              <a:rPr lang="en-US" altLang="ko-KR" sz="800" b="1" dirty="0">
+                <a:latin typeface="KoPub돋움체 Bold" panose="00000800000000000000" pitchFamily="2" charset="-127"/>
+                <a:ea typeface="KoPub돋움체 Bold" panose="00000800000000000000" pitchFamily="2" charset="-127"/>
+              </a:rPr>
+              <a:t>] [</a:t>
+            </a:r>
+            <a:r>
+              <a:rPr lang="ko-KR" altLang="en-US" sz="800" b="1" dirty="0">
+                <a:latin typeface="KoPub돋움체 Bold" panose="00000800000000000000" pitchFamily="2" charset="-127"/>
+                <a:ea typeface="KoPub돋움체 Bold" panose="00000800000000000000" pitchFamily="2" charset="-127"/>
+              </a:rPr>
+              <a:t>답장</a:t>
+            </a:r>
+            <a:r>
+              <a:rPr lang="en-US" altLang="ko-KR" sz="800" b="1" dirty="0">
+                <a:latin typeface="KoPub돋움체 Bold" panose="00000800000000000000" pitchFamily="2" charset="-127"/>
+                <a:ea typeface="KoPub돋움체 Bold" panose="00000800000000000000" pitchFamily="2" charset="-127"/>
+              </a:rPr>
+              <a:t>(Reply)]</a:t>
+            </a:r>
+            <a:r>
+              <a:rPr lang="ko-KR" altLang="en-US" sz="800" b="1" dirty="0">
+                <a:latin typeface="KoPub돋움체 Bold" panose="00000800000000000000" pitchFamily="2" charset="-127"/>
+                <a:ea typeface="KoPub돋움체 Bold" panose="00000800000000000000" pitchFamily="2" charset="-127"/>
+              </a:rPr>
+              <a:t>기능 필수 활용</a:t>
+            </a:r>
+          </a:p>
+          <a:p>
+            <a:pPr marL="88900" indent="-88900">
+              <a:lnSpc>
+                <a:spcPts val="1100"/>
+              </a:lnSpc>
+              <a:buClr>
+                <a:srgbClr val="00B0F0"/>
+              </a:buClr>
+              <a:buFont typeface="Arial" panose="020B0604020202020204" pitchFamily="34" charset="0"/>
+              <a:buChar char="•"/>
+            </a:pPr>
+            <a:r>
+              <a:rPr lang="en-US" altLang="ko-KR" sz="800" b="1" dirty="0">
+                <a:latin typeface="KoPub돋움체 Bold" panose="00000800000000000000" pitchFamily="2" charset="-127"/>
+                <a:ea typeface="KoPub돋움체 Bold" panose="00000800000000000000" pitchFamily="2" charset="-127"/>
+              </a:rPr>
+              <a:t>[</a:t>
+            </a:r>
+            <a:r>
+              <a:rPr lang="ko-KR" altLang="en-US" sz="800" b="1" dirty="0">
+                <a:latin typeface="KoPub돋움체 Bold" panose="00000800000000000000" pitchFamily="2" charset="-127"/>
+                <a:ea typeface="KoPub돋움체 Bold" panose="00000800000000000000" pitchFamily="2" charset="-127"/>
+              </a:rPr>
+              <a:t>대응</a:t>
+            </a:r>
+            <a:r>
+              <a:rPr lang="en-US" altLang="ko-KR" sz="800" b="1" dirty="0">
+                <a:latin typeface="KoPub돋움체 Bold" panose="00000800000000000000" pitchFamily="2" charset="-127"/>
+                <a:ea typeface="KoPub돋움체 Bold" panose="00000800000000000000" pitchFamily="2" charset="-127"/>
+              </a:rPr>
+              <a:t>] </a:t>
+            </a:r>
+            <a:r>
+              <a:rPr lang="ko-KR" altLang="en-US" sz="800" b="1" dirty="0">
+                <a:latin typeface="KoPub돋움체 Bold" panose="00000800000000000000" pitchFamily="2" charset="-127"/>
+                <a:ea typeface="KoPub돋움체 Bold" panose="00000800000000000000" pitchFamily="2" charset="-127"/>
+              </a:rPr>
+              <a:t>메신저 응답 </a:t>
+            </a:r>
+            <a:r>
+              <a:rPr lang="en-US" altLang="ko-KR" sz="800" b="1" dirty="0">
+                <a:latin typeface="KoPub돋움체 Bold" panose="00000800000000000000" pitchFamily="2" charset="-127"/>
+                <a:ea typeface="KoPub돋움체 Bold" panose="00000800000000000000" pitchFamily="2" charset="-127"/>
+              </a:rPr>
+              <a:t>'10</a:t>
+            </a:r>
+            <a:r>
+              <a:rPr lang="ko-KR" altLang="en-US" sz="800" b="1" dirty="0">
+                <a:latin typeface="KoPub돋움체 Bold" panose="00000800000000000000" pitchFamily="2" charset="-127"/>
+                <a:ea typeface="KoPub돋움체 Bold" panose="00000800000000000000" pitchFamily="2" charset="-127"/>
+              </a:rPr>
+              <a:t>분 룰</a:t>
+            </a:r>
+            <a:r>
+              <a:rPr lang="en-US" altLang="ko-KR" sz="800" b="1" dirty="0">
+                <a:latin typeface="KoPub돋움체 Bold" panose="00000800000000000000" pitchFamily="2" charset="-127"/>
+                <a:ea typeface="KoPub돋움체 Bold" panose="00000800000000000000" pitchFamily="2" charset="-127"/>
+              </a:rPr>
+              <a:t>(Rule)' </a:t>
+            </a:r>
+            <a:r>
+              <a:rPr lang="ko-KR" altLang="en-US" sz="800" b="1" dirty="0">
+                <a:latin typeface="KoPub돋움체 Bold" panose="00000800000000000000" pitchFamily="2" charset="-127"/>
+                <a:ea typeface="KoPub돋움체 Bold" panose="00000800000000000000" pitchFamily="2" charset="-127"/>
+              </a:rPr>
+              <a:t>적용</a:t>
+            </a:r>
+          </a:p>
+        </p:txBody>
+      </p:sp>
     </p:spTree>
     <p:extLst>
       <p:ext uri="{BB962C8B-B14F-4D97-AF65-F5344CB8AC3E}">
-        <p14:creationId xmlns:p14="http://schemas.microsoft.com/office/powerpoint/2010/main" val="1702695936"/>
+        <p14:creationId xmlns:p14="http://schemas.microsoft.com/office/powerpoint/2010/main" val="3678952818"/>
       </p:ext>
     </p:extLst>
   </p:cSld>
@@ -6777,7 +7102,7 @@
         <p:cNvPr id="1" name="">
           <a:extLst>
             <a:ext uri="{FF2B5EF4-FFF2-40B4-BE49-F238E27FC236}">
-              <a16:creationId xmlns:a16="http://schemas.microsoft.com/office/drawing/2014/main" id="{D5A8F81F-DD39-B704-B1CA-97688524154B}"/>
+              <a16:creationId xmlns:a16="http://schemas.microsoft.com/office/drawing/2014/main" id="{3B6E841A-094F-E21B-4984-7C2AB68E90B9}"/>
             </a:ext>
           </a:extLst>
         </p:cNvPr>
@@ -6797,7 +7122,7 @@
           <p:cNvPr id="3" name="TextBox 2">
             <a:extLst>
               <a:ext uri="{FF2B5EF4-FFF2-40B4-BE49-F238E27FC236}">
-                <a16:creationId xmlns:a16="http://schemas.microsoft.com/office/drawing/2014/main" id="{BBE4E7CB-81CC-B3BB-D56F-145F10CF5B36}"/>
+                <a16:creationId xmlns:a16="http://schemas.microsoft.com/office/drawing/2014/main" id="{030BFB71-8789-32EB-AE5E-E28CB8CEA0FE}"/>
               </a:ext>
             </a:extLst>
           </p:cNvPr>
@@ -6825,21 +7150,7 @@
                 <a:latin typeface="KoPub돋움체 Bold" panose="00000800000000000000" pitchFamily="2" charset="-127"/>
                 <a:ea typeface="KoPub돋움체 Bold" panose="00000800000000000000" pitchFamily="2" charset="-127"/>
               </a:rPr>
-              <a:t>순천향대학교 천안병원 </a:t>
-            </a:r>
-            <a:r>
-              <a:rPr lang="en-US" altLang="ko-KR" sz="600" b="1" spc="-11" dirty="0">
-                <a:latin typeface="KoPub돋움체 Bold" panose="00000800000000000000" pitchFamily="2" charset="-127"/>
-                <a:ea typeface="KoPub돋움체 Bold" panose="00000800000000000000" pitchFamily="2" charset="-127"/>
-              </a:rPr>
-              <a:t>| </a:t>
-            </a:r>
-            <a:r>
-              <a:rPr lang="ko-KR" altLang="en-US" sz="600" b="1" spc="-11" dirty="0">
-                <a:latin typeface="KoPub돋움체 Bold" panose="00000800000000000000" pitchFamily="2" charset="-127"/>
-                <a:ea typeface="KoPub돋움체 Bold" panose="00000800000000000000" pitchFamily="2" charset="-127"/>
-              </a:rPr>
-              <a:t>진료지원간호팀 </a:t>
+              <a:t>순천향대학교 천안병원</a:t>
             </a:r>
           </a:p>
         </p:txBody>
@@ -6849,7 +7160,7 @@
           <p:cNvPr id="17" name="그룹 16">
             <a:extLst>
               <a:ext uri="{FF2B5EF4-FFF2-40B4-BE49-F238E27FC236}">
-                <a16:creationId xmlns:a16="http://schemas.microsoft.com/office/drawing/2014/main" id="{B125C3CF-F798-5F75-3183-7595D9D757B2}"/>
+                <a16:creationId xmlns:a16="http://schemas.microsoft.com/office/drawing/2014/main" id="{7F40C51C-4C75-A81B-C099-33299CC4320F}"/>
               </a:ext>
             </a:extLst>
           </p:cNvPr>
@@ -6858,8 +7169,8 @@
         </p:nvGrpSpPr>
         <p:grpSpPr>
           <a:xfrm>
-            <a:off x="2050303" y="549443"/>
-            <a:ext cx="854822" cy="766386"/>
+            <a:off x="2298353" y="149770"/>
+            <a:ext cx="746131" cy="668940"/>
             <a:chOff x="777945" y="-736888"/>
             <a:chExt cx="663508" cy="663508"/>
           </a:xfrm>
@@ -6869,7 +7180,7 @@
             <p:cNvPr id="5" name="그림 4" descr="패턴, 사각형, 예술, 직사각형이(가) 표시된 사진&#10;&#10;AI 생성 콘텐츠는 정확하지 않을 수 있습니다.">
               <a:extLst>
                 <a:ext uri="{FF2B5EF4-FFF2-40B4-BE49-F238E27FC236}">
-                  <a16:creationId xmlns:a16="http://schemas.microsoft.com/office/drawing/2014/main" id="{DE2251FC-88AB-EB43-156C-DBB20D3DB2C0}"/>
+                  <a16:creationId xmlns:a16="http://schemas.microsoft.com/office/drawing/2014/main" id="{8F36B08E-20CB-B44E-F94F-540F03482C37}"/>
                 </a:ext>
               </a:extLst>
             </p:cNvPr>
@@ -6899,7 +7210,7 @@
             <p:cNvPr id="13" name="L 도형 12">
               <a:extLst>
                 <a:ext uri="{FF2B5EF4-FFF2-40B4-BE49-F238E27FC236}">
-                  <a16:creationId xmlns:a16="http://schemas.microsoft.com/office/drawing/2014/main" id="{1FAEBB29-0292-91EF-B0B7-C809EC64DEF1}"/>
+                  <a16:creationId xmlns:a16="http://schemas.microsoft.com/office/drawing/2014/main" id="{C2AC4A5D-664D-CEAE-B259-5F9BE582D143}"/>
                 </a:ext>
               </a:extLst>
             </p:cNvPr>
@@ -6956,7 +7267,7 @@
             <p:cNvPr id="14" name="L 도형 13">
               <a:extLst>
                 <a:ext uri="{FF2B5EF4-FFF2-40B4-BE49-F238E27FC236}">
-                  <a16:creationId xmlns:a16="http://schemas.microsoft.com/office/drawing/2014/main" id="{25103396-4D15-EF30-76AE-6AF474D3B446}"/>
+                  <a16:creationId xmlns:a16="http://schemas.microsoft.com/office/drawing/2014/main" id="{6A67E2D3-109E-24F5-84A1-DD8BAAFC79E9}"/>
                 </a:ext>
               </a:extLst>
             </p:cNvPr>
@@ -7013,7 +7324,7 @@
             <p:cNvPr id="15" name="L 도형 14">
               <a:extLst>
                 <a:ext uri="{FF2B5EF4-FFF2-40B4-BE49-F238E27FC236}">
-                  <a16:creationId xmlns:a16="http://schemas.microsoft.com/office/drawing/2014/main" id="{DB50FEB4-6AF4-4E96-361F-332B2F87B0B9}"/>
+                  <a16:creationId xmlns:a16="http://schemas.microsoft.com/office/drawing/2014/main" id="{E3A8464E-CB96-1232-432A-14CCBBE52BD2}"/>
                 </a:ext>
               </a:extLst>
             </p:cNvPr>
@@ -7070,7 +7381,7 @@
             <p:cNvPr id="16" name="L 도형 15">
               <a:extLst>
                 <a:ext uri="{FF2B5EF4-FFF2-40B4-BE49-F238E27FC236}">
-                  <a16:creationId xmlns:a16="http://schemas.microsoft.com/office/drawing/2014/main" id="{538418CE-B6C8-5FEE-4001-E56E4072C3BF}"/>
+                  <a16:creationId xmlns:a16="http://schemas.microsoft.com/office/drawing/2014/main" id="{D61CFB78-D286-2268-4506-27A712AA1B3F}"/>
                 </a:ext>
               </a:extLst>
             </p:cNvPr>
@@ -7128,7 +7439,7 @@
           <p:cNvPr id="18" name="그룹 17">
             <a:extLst>
               <a:ext uri="{FF2B5EF4-FFF2-40B4-BE49-F238E27FC236}">
-                <a16:creationId xmlns:a16="http://schemas.microsoft.com/office/drawing/2014/main" id="{D24772E5-8340-6DD7-A008-F3AC60AF9C88}"/>
+                <a16:creationId xmlns:a16="http://schemas.microsoft.com/office/drawing/2014/main" id="{4E485452-030B-E14C-C794-9B41715C6923}"/>
               </a:ext>
             </a:extLst>
           </p:cNvPr>
@@ -7148,7 +7459,7 @@
             <p:cNvPr id="4" name="TextBox 3">
               <a:extLst>
                 <a:ext uri="{FF2B5EF4-FFF2-40B4-BE49-F238E27FC236}">
-                  <a16:creationId xmlns:a16="http://schemas.microsoft.com/office/drawing/2014/main" id="{922BAAE5-10B5-777B-4FDD-66A8F820AD8A}"/>
+                  <a16:creationId xmlns:a16="http://schemas.microsoft.com/office/drawing/2014/main" id="{970381D3-A253-48EB-179E-0D280273139A}"/>
                 </a:ext>
               </a:extLst>
             </p:cNvPr>
@@ -7223,7 +7534,7 @@
             <p:cNvPr id="6" name="TextBox 5">
               <a:extLst>
                 <a:ext uri="{FF2B5EF4-FFF2-40B4-BE49-F238E27FC236}">
-                  <a16:creationId xmlns:a16="http://schemas.microsoft.com/office/drawing/2014/main" id="{CCAD2A9C-08F1-F08F-BDCA-A8AF71174D6C}"/>
+                  <a16:creationId xmlns:a16="http://schemas.microsoft.com/office/drawing/2014/main" id="{83CA30CC-6CFD-A9A9-F494-2F4ECBCD95E8}"/>
                 </a:ext>
               </a:extLst>
             </p:cNvPr>
@@ -7232,8 +7543,8 @@
           </p:nvSpPr>
           <p:spPr>
             <a:xfrm>
-              <a:off x="622591" y="451833"/>
-              <a:ext cx="1729962" cy="200055"/>
+              <a:off x="660262" y="451833"/>
+              <a:ext cx="1654620" cy="200055"/>
             </a:xfrm>
             <a:prstGeom prst="rect">
               <a:avLst/>
@@ -7259,35 +7570,28 @@
                   <a:latin typeface="KoPub돋움체 Bold" panose="00000800000000000000" pitchFamily="2" charset="-127"/>
                   <a:ea typeface="KoPub돋움체 Bold" panose="00000800000000000000" pitchFamily="2" charset="-127"/>
                 </a:rPr>
-                <a:t>우리가 가치를 만드는 공간</a:t>
+                <a:t>스마트 소통 약속</a:t>
               </a:r>
               <a:r>
                 <a:rPr lang="en-US" altLang="ko-KR" sz="700" b="1" dirty="0">
                   <a:latin typeface="KoPub돋움체 Bold" panose="00000800000000000000" pitchFamily="2" charset="-127"/>
                   <a:ea typeface="KoPub돋움체 Bold" panose="00000800000000000000" pitchFamily="2" charset="-127"/>
                 </a:rPr>
-                <a:t>, </a:t>
+                <a:t>(</a:t>
               </a:r>
               <a:r>
-                <a:rPr lang="ko-KR" altLang="en-US" sz="700" b="1" dirty="0" err="1">
+                <a:rPr lang="en-US" altLang="ko-KR" sz="700" b="1" dirty="0" err="1">
                   <a:latin typeface="KoPub돋움체 Bold" panose="00000800000000000000" pitchFamily="2" charset="-127"/>
                   <a:ea typeface="KoPub돋움체 Bold" panose="00000800000000000000" pitchFamily="2" charset="-127"/>
                 </a:rPr>
-                <a:t>우리가치</a:t>
-              </a:r>
-              <a:r>
-                <a:rPr lang="ko-KR" altLang="en-US" sz="700" b="1" dirty="0">
-                  <a:latin typeface="KoPub돋움체 Bold" panose="00000800000000000000" pitchFamily="2" charset="-127"/>
-                  <a:ea typeface="KoPub돋움체 Bold" panose="00000800000000000000" pitchFamily="2" charset="-127"/>
-                </a:rPr>
-                <a:t> 허브</a:t>
+                <a:t>WeValue</a:t>
               </a:r>
               <a:r>
                 <a:rPr lang="en-US" altLang="ko-KR" sz="700" b="1" dirty="0">
                   <a:latin typeface="KoPub돋움체 Bold" panose="00000800000000000000" pitchFamily="2" charset="-127"/>
                   <a:ea typeface="KoPub돋움체 Bold" panose="00000800000000000000" pitchFamily="2" charset="-127"/>
                 </a:rPr>
-                <a:t>]</a:t>
+                <a:t> Promises)]</a:t>
               </a:r>
             </a:p>
           </p:txBody>
@@ -7297,7 +7601,7 @@
             <p:cNvPr id="10" name="그림 9">
               <a:extLst>
                 <a:ext uri="{FF2B5EF4-FFF2-40B4-BE49-F238E27FC236}">
-                  <a16:creationId xmlns:a16="http://schemas.microsoft.com/office/drawing/2014/main" id="{37D3769E-34B8-9299-368C-3BC0DD861D27}"/>
+                  <a16:creationId xmlns:a16="http://schemas.microsoft.com/office/drawing/2014/main" id="{4F7CF062-42CC-7B1F-60D3-A32235AD21F3}"/>
                 </a:ext>
               </a:extLst>
             </p:cNvPr>
@@ -7327,7 +7631,7 @@
             <p:cNvPr id="30" name="그림 29">
               <a:extLst>
                 <a:ext uri="{FF2B5EF4-FFF2-40B4-BE49-F238E27FC236}">
-                  <a16:creationId xmlns:a16="http://schemas.microsoft.com/office/drawing/2014/main" id="{D2B42E41-536A-E90D-9990-EBB646D46BE1}"/>
+                  <a16:creationId xmlns:a16="http://schemas.microsoft.com/office/drawing/2014/main" id="{0425FA11-1B8B-F61D-8BF8-89C8222F3F04}"/>
                 </a:ext>
               </a:extLst>
             </p:cNvPr>
@@ -7353,304 +7657,435 @@
           </p:spPr>
         </p:pic>
       </p:grpSp>
-      <p:grpSp>
-        <p:nvGrpSpPr>
-          <p:cNvPr id="12" name="그룹 11">
+      <p:sp>
+        <p:nvSpPr>
+          <p:cNvPr id="31" name="TextBox 30">
             <a:extLst>
               <a:ext uri="{FF2B5EF4-FFF2-40B4-BE49-F238E27FC236}">
-                <a16:creationId xmlns:a16="http://schemas.microsoft.com/office/drawing/2014/main" id="{075B029C-5DD9-8C32-5D0A-C8F0E2710BC9}"/>
+                <a16:creationId xmlns:a16="http://schemas.microsoft.com/office/drawing/2014/main" id="{5E4F2F05-A956-83B3-5532-01A65E8E9609}"/>
               </a:ext>
             </a:extLst>
           </p:cNvPr>
-          <p:cNvGrpSpPr/>
+          <p:cNvSpPr txBox="1"/>
           <p:nvPr/>
-        </p:nvGrpSpPr>
-        <p:grpSpPr>
+        </p:nvSpPr>
+        <p:spPr>
           <a:xfrm>
-            <a:off x="205429" y="781187"/>
-            <a:ext cx="1731561" cy="784830"/>
-            <a:chOff x="796295" y="778765"/>
-            <a:chExt cx="1731561" cy="784830"/>
+            <a:off x="82843" y="781989"/>
+            <a:ext cx="2592376" cy="790345"/>
           </a:xfrm>
-        </p:grpSpPr>
-        <p:sp>
-          <p:nvSpPr>
-            <p:cNvPr id="26" name="TextBox 25">
-              <a:extLst>
-                <a:ext uri="{FF2B5EF4-FFF2-40B4-BE49-F238E27FC236}">
-                  <a16:creationId xmlns:a16="http://schemas.microsoft.com/office/drawing/2014/main" id="{BE24F3CF-5916-6FFE-7F3F-AF32043D6C07}"/>
-                </a:ext>
-              </a:extLst>
-            </p:cNvPr>
-            <p:cNvSpPr txBox="1"/>
-            <p:nvPr/>
-          </p:nvSpPr>
-          <p:spPr>
-            <a:xfrm>
-              <a:off x="1495201" y="778765"/>
-              <a:ext cx="1032655" cy="784830"/>
-            </a:xfrm>
-            <a:prstGeom prst="rect">
-              <a:avLst/>
-            </a:prstGeom>
-            <a:noFill/>
-          </p:spPr>
-          <p:txBody>
-            <a:bodyPr wrap="none" rtlCol="0">
-              <a:spAutoFit/>
-            </a:bodyPr>
-            <a:lstStyle/>
-            <a:p>
-              <a:r>
-                <a:rPr lang="en-US" altLang="ko-KR" sz="900" dirty="0">
-                  <a:latin typeface="KoPub돋움체 Light" panose="00000300000000000000" pitchFamily="2" charset="-127"/>
-                  <a:ea typeface="KoPub돋움체 Light" panose="00000300000000000000" pitchFamily="2" charset="-127"/>
-                </a:rPr>
-                <a:t>"</a:t>
-              </a:r>
-              <a:r>
-                <a:rPr lang="ko-KR" altLang="en-US" sz="900" dirty="0">
-                  <a:latin typeface="KoPub돋움체 Light" panose="00000300000000000000" pitchFamily="2" charset="-127"/>
-                  <a:ea typeface="KoPub돋움체 Light" panose="00000300000000000000" pitchFamily="2" charset="-127"/>
-                </a:rPr>
-                <a:t>함께하는 즐거움</a:t>
-              </a:r>
-              <a:r>
-                <a:rPr lang="en-US" altLang="ko-KR" sz="900" dirty="0">
-                  <a:latin typeface="KoPub돋움체 Light" panose="00000300000000000000" pitchFamily="2" charset="-127"/>
-                  <a:ea typeface="KoPub돋움체 Light" panose="00000300000000000000" pitchFamily="2" charset="-127"/>
-                </a:rPr>
-                <a:t>“</a:t>
-              </a:r>
-            </a:p>
-            <a:p>
-              <a:r>
-                <a:rPr lang="en-US" altLang="ko-KR" sz="900" dirty="0">
-                  <a:latin typeface="KoPub돋움체 Light" panose="00000300000000000000" pitchFamily="2" charset="-127"/>
-                  <a:ea typeface="KoPub돋움체 Light" panose="00000300000000000000" pitchFamily="2" charset="-127"/>
-                </a:rPr>
-                <a:t>"</a:t>
-              </a:r>
-              <a:r>
-                <a:rPr lang="ko-KR" altLang="en-US" sz="900" dirty="0">
-                  <a:latin typeface="KoPub돋움체 Light" panose="00000300000000000000" pitchFamily="2" charset="-127"/>
-                  <a:ea typeface="KoPub돋움체 Light" panose="00000300000000000000" pitchFamily="2" charset="-127"/>
-                </a:rPr>
-                <a:t>명확한 약속</a:t>
-              </a:r>
-              <a:r>
-                <a:rPr lang="en-US" altLang="ko-KR" sz="900" dirty="0">
-                  <a:latin typeface="KoPub돋움체 Light" panose="00000300000000000000" pitchFamily="2" charset="-127"/>
-                  <a:ea typeface="KoPub돋움체 Light" panose="00000300000000000000" pitchFamily="2" charset="-127"/>
-                </a:rPr>
-                <a:t>"</a:t>
-              </a:r>
-              <a:endParaRPr lang="ko-KR" altLang="en-US" sz="900" dirty="0">
-                <a:latin typeface="KoPub돋움체 Light" panose="00000300000000000000" pitchFamily="2" charset="-127"/>
-                <a:ea typeface="KoPub돋움체 Light" panose="00000300000000000000" pitchFamily="2" charset="-127"/>
-              </a:endParaRPr>
-            </a:p>
-            <a:p>
-              <a:r>
-                <a:rPr lang="en-US" altLang="ko-KR" sz="900" dirty="0">
-                  <a:latin typeface="KoPub돋움체 Light" panose="00000300000000000000" pitchFamily="2" charset="-127"/>
-                  <a:ea typeface="KoPub돋움체 Light" panose="00000300000000000000" pitchFamily="2" charset="-127"/>
-                </a:rPr>
-                <a:t>"</a:t>
-              </a:r>
-              <a:r>
-                <a:rPr lang="ko-KR" altLang="en-US" sz="900" dirty="0">
-                  <a:latin typeface="KoPub돋움체 Light" panose="00000300000000000000" pitchFamily="2" charset="-127"/>
-                  <a:ea typeface="KoPub돋움체 Light" panose="00000300000000000000" pitchFamily="2" charset="-127"/>
-                </a:rPr>
-                <a:t>한눈에 보는 실무</a:t>
-              </a:r>
-              <a:r>
-                <a:rPr lang="en-US" altLang="ko-KR" sz="900" dirty="0">
-                  <a:latin typeface="KoPub돋움체 Light" panose="00000300000000000000" pitchFamily="2" charset="-127"/>
-                  <a:ea typeface="KoPub돋움체 Light" panose="00000300000000000000" pitchFamily="2" charset="-127"/>
-                </a:rPr>
-                <a:t>"</a:t>
-              </a:r>
-              <a:endParaRPr lang="ko-KR" altLang="en-US" sz="900" dirty="0">
-                <a:latin typeface="KoPub돋움체 Light" panose="00000300000000000000" pitchFamily="2" charset="-127"/>
-                <a:ea typeface="KoPub돋움체 Light" panose="00000300000000000000" pitchFamily="2" charset="-127"/>
-              </a:endParaRPr>
-            </a:p>
-            <a:p>
-              <a:r>
-                <a:rPr lang="en-US" altLang="ko-KR" sz="900" dirty="0">
-                  <a:latin typeface="KoPub돋움체 Light" panose="00000300000000000000" pitchFamily="2" charset="-127"/>
-                  <a:ea typeface="KoPub돋움체 Light" panose="00000300000000000000" pitchFamily="2" charset="-127"/>
-                </a:rPr>
-                <a:t>"</a:t>
-              </a:r>
-              <a:r>
-                <a:rPr lang="ko-KR" altLang="en-US" sz="900" dirty="0">
-                  <a:latin typeface="KoPub돋움체 Light" panose="00000300000000000000" pitchFamily="2" charset="-127"/>
-                  <a:ea typeface="KoPub돋움체 Light" panose="00000300000000000000" pitchFamily="2" charset="-127"/>
-                </a:rPr>
-                <a:t>현장 밀착형 지원</a:t>
-              </a:r>
-              <a:r>
-                <a:rPr lang="en-US" altLang="ko-KR" sz="900" dirty="0">
-                  <a:latin typeface="KoPub돋움체 Light" panose="00000300000000000000" pitchFamily="2" charset="-127"/>
-                  <a:ea typeface="KoPub돋움체 Light" panose="00000300000000000000" pitchFamily="2" charset="-127"/>
-                </a:rPr>
-                <a:t>"</a:t>
-              </a:r>
-              <a:endParaRPr lang="ko-KR" altLang="en-US" sz="900" dirty="0">
-                <a:latin typeface="KoPub돋움체 Light" panose="00000300000000000000" pitchFamily="2" charset="-127"/>
-                <a:ea typeface="KoPub돋움체 Light" panose="00000300000000000000" pitchFamily="2" charset="-127"/>
-              </a:endParaRPr>
-            </a:p>
-            <a:p>
-              <a:r>
-                <a:rPr lang="en-US" altLang="ko-KR" sz="900" dirty="0">
-                  <a:latin typeface="KoPub돋움체 Light" panose="00000300000000000000" pitchFamily="2" charset="-127"/>
-                  <a:ea typeface="KoPub돋움체 Light" panose="00000300000000000000" pitchFamily="2" charset="-127"/>
-                </a:rPr>
-                <a:t>"</a:t>
-              </a:r>
-              <a:r>
-                <a:rPr lang="ko-KR" altLang="en-US" sz="900" dirty="0">
-                  <a:latin typeface="KoPub돋움체 Light" panose="00000300000000000000" pitchFamily="2" charset="-127"/>
-                  <a:ea typeface="KoPub돋움체 Light" panose="00000300000000000000" pitchFamily="2" charset="-127"/>
-                </a:rPr>
-                <a:t>변화의 체감</a:t>
-              </a:r>
-              <a:r>
-                <a:rPr lang="en-US" altLang="ko-KR" sz="900" dirty="0">
-                  <a:latin typeface="KoPub돋움체 Light" panose="00000300000000000000" pitchFamily="2" charset="-127"/>
-                  <a:ea typeface="KoPub돋움체 Light" panose="00000300000000000000" pitchFamily="2" charset="-127"/>
-                </a:rPr>
-                <a:t>"</a:t>
-              </a:r>
-              <a:endParaRPr lang="ko-KR" altLang="en-US" sz="900" dirty="0">
-                <a:latin typeface="KoPub돋움체 Light" panose="00000300000000000000" pitchFamily="2" charset="-127"/>
-                <a:ea typeface="KoPub돋움체 Light" panose="00000300000000000000" pitchFamily="2" charset="-127"/>
-              </a:endParaRPr>
-            </a:p>
-          </p:txBody>
-        </p:sp>
-        <p:sp>
-          <p:nvSpPr>
-            <p:cNvPr id="31" name="TextBox 30">
-              <a:extLst>
-                <a:ext uri="{FF2B5EF4-FFF2-40B4-BE49-F238E27FC236}">
-                  <a16:creationId xmlns:a16="http://schemas.microsoft.com/office/drawing/2014/main" id="{AA6F8B63-BAF2-7E60-DC6E-15496E6EE29A}"/>
-                </a:ext>
-              </a:extLst>
-            </p:cNvPr>
-            <p:cNvSpPr txBox="1"/>
-            <p:nvPr/>
-          </p:nvSpPr>
-          <p:spPr>
-            <a:xfrm>
-              <a:off x="796295" y="778765"/>
-              <a:ext cx="813043" cy="784830"/>
-            </a:xfrm>
-            <a:prstGeom prst="rect">
-              <a:avLst/>
-            </a:prstGeom>
-            <a:noFill/>
-          </p:spPr>
-          <p:txBody>
-            <a:bodyPr wrap="none" rtlCol="0">
-              <a:spAutoFit/>
-            </a:bodyPr>
-            <a:lstStyle/>
-            <a:p>
-              <a:pPr marL="88900" indent="-88900">
-                <a:buClr>
-                  <a:srgbClr val="00B0F0"/>
-                </a:buClr>
-                <a:buFont typeface="Arial" panose="020B0604020202020204" pitchFamily="34" charset="0"/>
-                <a:buChar char="•"/>
-              </a:pPr>
-              <a:r>
-                <a:rPr lang="ko-KR" altLang="en-US" sz="900" b="1" dirty="0">
-                  <a:latin typeface="KoPub돋움체 Bold" panose="00000800000000000000" pitchFamily="2" charset="-127"/>
-                  <a:ea typeface="KoPub돋움체 Bold" panose="00000800000000000000" pitchFamily="2" charset="-127"/>
-                </a:rPr>
-                <a:t>소통의 광장</a:t>
-              </a:r>
-              <a:endParaRPr lang="en-US" altLang="ko-KR" sz="900" b="1" dirty="0">
-                <a:latin typeface="KoPub돋움체 Bold" panose="00000800000000000000" pitchFamily="2" charset="-127"/>
-                <a:ea typeface="KoPub돋움체 Bold" panose="00000800000000000000" pitchFamily="2" charset="-127"/>
-              </a:endParaRPr>
-            </a:p>
-            <a:p>
-              <a:pPr marL="88900" indent="-88900">
-                <a:buClr>
-                  <a:srgbClr val="00B0F0"/>
-                </a:buClr>
-                <a:buFont typeface="Arial" panose="020B0604020202020204" pitchFamily="34" charset="0"/>
-                <a:buChar char="•"/>
-              </a:pPr>
-              <a:r>
-                <a:rPr lang="ko-KR" altLang="en-US" sz="900" b="1" dirty="0">
-                  <a:latin typeface="KoPub돋움체 Bold" panose="00000800000000000000" pitchFamily="2" charset="-127"/>
-                  <a:ea typeface="KoPub돋움체 Bold" panose="00000800000000000000" pitchFamily="2" charset="-127"/>
-                </a:rPr>
-                <a:t>업무 기준</a:t>
-              </a:r>
-            </a:p>
-            <a:p>
-              <a:pPr marL="88900" indent="-88900">
-                <a:buClr>
-                  <a:srgbClr val="00B0F0"/>
-                </a:buClr>
-                <a:buFont typeface="Arial" panose="020B0604020202020204" pitchFamily="34" charset="0"/>
-                <a:buChar char="•"/>
-              </a:pPr>
-              <a:r>
-                <a:rPr lang="ko-KR" altLang="en-US" sz="900" b="1" dirty="0">
-                  <a:latin typeface="KoPub돋움체 Bold" panose="00000800000000000000" pitchFamily="2" charset="-127"/>
-                  <a:ea typeface="KoPub돋움체 Bold" panose="00000800000000000000" pitchFamily="2" charset="-127"/>
-                </a:rPr>
-                <a:t>교육자료</a:t>
-              </a:r>
-            </a:p>
-            <a:p>
-              <a:pPr marL="88900" indent="-88900">
-                <a:buClr>
-                  <a:srgbClr val="00B0F0"/>
-                </a:buClr>
-                <a:buFont typeface="Arial" panose="020B0604020202020204" pitchFamily="34" charset="0"/>
-                <a:buChar char="•"/>
-              </a:pPr>
-              <a:r>
-                <a:rPr lang="ko-KR" altLang="en-US" sz="900" b="1" dirty="0">
-                  <a:latin typeface="KoPub돋움체 Bold" panose="00000800000000000000" pitchFamily="2" charset="-127"/>
-                  <a:ea typeface="KoPub돋움체 Bold" panose="00000800000000000000" pitchFamily="2" charset="-127"/>
-                </a:rPr>
-                <a:t>요청</a:t>
-              </a:r>
-            </a:p>
-            <a:p>
-              <a:pPr marL="88900" indent="-88900">
-                <a:buClr>
-                  <a:srgbClr val="00B0F0"/>
-                </a:buClr>
-                <a:buFont typeface="Arial" panose="020B0604020202020204" pitchFamily="34" charset="0"/>
-                <a:buChar char="•"/>
-              </a:pPr>
-              <a:r>
-                <a:rPr lang="ko-KR" altLang="en-US" sz="900" b="1" dirty="0">
-                  <a:latin typeface="KoPub돋움체 Bold" panose="00000800000000000000" pitchFamily="2" charset="-127"/>
-                  <a:ea typeface="KoPub돋움체 Bold" panose="00000800000000000000" pitchFamily="2" charset="-127"/>
-                </a:rPr>
-                <a:t>지표</a:t>
-              </a:r>
-            </a:p>
-          </p:txBody>
-        </p:sp>
-      </p:grpSp>
+          <a:prstGeom prst="rect">
+            <a:avLst/>
+          </a:prstGeom>
+          <a:noFill/>
+        </p:spPr>
+        <p:txBody>
+          <a:bodyPr wrap="none" rtlCol="0">
+            <a:spAutoFit/>
+          </a:bodyPr>
+          <a:lstStyle/>
+          <a:p>
+            <a:pPr marL="88900" indent="-88900">
+              <a:lnSpc>
+                <a:spcPts val="1100"/>
+              </a:lnSpc>
+              <a:buClr>
+                <a:srgbClr val="00B0F0"/>
+              </a:buClr>
+              <a:buFont typeface="Arial" panose="020B0604020202020204" pitchFamily="34" charset="0"/>
+              <a:buChar char="•"/>
+            </a:pPr>
+            <a:r>
+              <a:rPr lang="en-US" altLang="ko-KR" sz="800" b="1" dirty="0">
+                <a:latin typeface="KoPub돋움체 Bold" panose="00000800000000000000" pitchFamily="2" charset="-127"/>
+                <a:ea typeface="KoPub돋움체 Bold" panose="00000800000000000000" pitchFamily="2" charset="-127"/>
+              </a:rPr>
+              <a:t>[</a:t>
+            </a:r>
+            <a:r>
+              <a:rPr lang="ko-KR" altLang="en-US" sz="800" b="1" dirty="0">
+                <a:latin typeface="KoPub돋움체 Bold" panose="00000800000000000000" pitchFamily="2" charset="-127"/>
+                <a:ea typeface="KoPub돋움체 Bold" panose="00000800000000000000" pitchFamily="2" charset="-127"/>
+              </a:rPr>
+              <a:t>식별</a:t>
+            </a:r>
+            <a:r>
+              <a:rPr lang="en-US" altLang="ko-KR" sz="800" b="1" dirty="0">
+                <a:latin typeface="KoPub돋움체 Bold" panose="00000800000000000000" pitchFamily="2" charset="-127"/>
+                <a:ea typeface="KoPub돋움체 Bold" panose="00000800000000000000" pitchFamily="2" charset="-127"/>
+              </a:rPr>
+              <a:t>] </a:t>
+            </a:r>
+            <a:r>
+              <a:rPr lang="ko-KR" altLang="en-US" sz="800" b="1" dirty="0">
+                <a:latin typeface="KoPub돋움체 Bold" panose="00000800000000000000" pitchFamily="2" charset="-127"/>
+                <a:ea typeface="KoPub돋움체 Bold" panose="00000800000000000000" pitchFamily="2" charset="-127"/>
+              </a:rPr>
+              <a:t>첫머리 </a:t>
+            </a:r>
+            <a:r>
+              <a:rPr lang="en-US" altLang="ko-KR" sz="800" b="1" dirty="0">
+                <a:latin typeface="KoPub돋움체 Bold" panose="00000800000000000000" pitchFamily="2" charset="-127"/>
+                <a:ea typeface="KoPub돋움체 Bold" panose="00000800000000000000" pitchFamily="2" charset="-127"/>
+              </a:rPr>
+              <a:t>[</a:t>
+            </a:r>
+            <a:r>
+              <a:rPr lang="ko-KR" altLang="en-US" sz="800" b="1" dirty="0">
+                <a:latin typeface="KoPub돋움체 Bold" panose="00000800000000000000" pitchFamily="2" charset="-127"/>
+                <a:ea typeface="KoPub돋움체 Bold" panose="00000800000000000000" pitchFamily="2" charset="-127"/>
+              </a:rPr>
+              <a:t>병실</a:t>
+            </a:r>
+            <a:r>
+              <a:rPr lang="en-US" altLang="ko-KR" sz="800" b="1" dirty="0">
+                <a:latin typeface="KoPub돋움체 Bold" panose="00000800000000000000" pitchFamily="2" charset="-127"/>
+                <a:ea typeface="KoPub돋움체 Bold" panose="00000800000000000000" pitchFamily="2" charset="-127"/>
+              </a:rPr>
+              <a:t>/</a:t>
+            </a:r>
+            <a:r>
+              <a:rPr lang="ko-KR" altLang="en-US" sz="800" b="1" dirty="0">
+                <a:latin typeface="KoPub돋움체 Bold" panose="00000800000000000000" pitchFamily="2" charset="-127"/>
+                <a:ea typeface="KoPub돋움체 Bold" panose="00000800000000000000" pitchFamily="2" charset="-127"/>
+              </a:rPr>
+              <a:t>성함</a:t>
+            </a:r>
+            <a:r>
+              <a:rPr lang="en-US" altLang="ko-KR" sz="800" b="1" dirty="0">
+                <a:latin typeface="KoPub돋움체 Bold" panose="00000800000000000000" pitchFamily="2" charset="-127"/>
+                <a:ea typeface="KoPub돋움체 Bold" panose="00000800000000000000" pitchFamily="2" charset="-127"/>
+              </a:rPr>
+              <a:t>/</a:t>
+            </a:r>
+            <a:r>
+              <a:rPr lang="ko-KR" altLang="en-US" sz="800" b="1" dirty="0">
+                <a:latin typeface="KoPub돋움체 Bold" panose="00000800000000000000" pitchFamily="2" charset="-127"/>
+                <a:ea typeface="KoPub돋움체 Bold" panose="00000800000000000000" pitchFamily="2" charset="-127"/>
+              </a:rPr>
+              <a:t>사유</a:t>
+            </a:r>
+            <a:r>
+              <a:rPr lang="en-US" altLang="ko-KR" sz="800" b="1" dirty="0">
+                <a:latin typeface="KoPub돋움체 Bold" panose="00000800000000000000" pitchFamily="2" charset="-127"/>
+                <a:ea typeface="KoPub돋움체 Bold" panose="00000800000000000000" pitchFamily="2" charset="-127"/>
+              </a:rPr>
+              <a:t>]</a:t>
+            </a:r>
+            <a:r>
+              <a:rPr lang="ko-KR" altLang="en-US" sz="800" b="1" dirty="0">
+                <a:latin typeface="KoPub돋움체 Bold" panose="00000800000000000000" pitchFamily="2" charset="-127"/>
+                <a:ea typeface="KoPub돋움체 Bold" panose="00000800000000000000" pitchFamily="2" charset="-127"/>
+              </a:rPr>
+              <a:t>필수 기재</a:t>
+            </a:r>
+          </a:p>
+          <a:p>
+            <a:pPr marL="88900" indent="-88900">
+              <a:lnSpc>
+                <a:spcPts val="1100"/>
+              </a:lnSpc>
+              <a:buClr>
+                <a:srgbClr val="00B0F0"/>
+              </a:buClr>
+              <a:buFont typeface="Arial" panose="020B0604020202020204" pitchFamily="34" charset="0"/>
+              <a:buChar char="•"/>
+            </a:pPr>
+            <a:r>
+              <a:rPr lang="en-US" altLang="ko-KR" sz="800" b="1" dirty="0">
+                <a:latin typeface="KoPub돋움체 Bold" panose="00000800000000000000" pitchFamily="2" charset="-127"/>
+                <a:ea typeface="KoPub돋움체 Bold" panose="00000800000000000000" pitchFamily="2" charset="-127"/>
+              </a:rPr>
+              <a:t>[</a:t>
+            </a:r>
+            <a:r>
+              <a:rPr lang="ko-KR" altLang="en-US" sz="800" b="1" dirty="0">
+                <a:latin typeface="KoPub돋움체 Bold" panose="00000800000000000000" pitchFamily="2" charset="-127"/>
+                <a:ea typeface="KoPub돋움체 Bold" panose="00000800000000000000" pitchFamily="2" charset="-127"/>
+              </a:rPr>
+              <a:t>공유</a:t>
+            </a:r>
+            <a:r>
+              <a:rPr lang="en-US" altLang="ko-KR" sz="800" b="1" dirty="0">
+                <a:latin typeface="KoPub돋움체 Bold" panose="00000800000000000000" pitchFamily="2" charset="-127"/>
+                <a:ea typeface="KoPub돋움체 Bold" panose="00000800000000000000" pitchFamily="2" charset="-127"/>
+              </a:rPr>
+              <a:t>] </a:t>
+            </a:r>
+            <a:r>
+              <a:rPr lang="ko-KR" altLang="en-US" sz="800" b="1" dirty="0">
+                <a:latin typeface="KoPub돋움체 Bold" panose="00000800000000000000" pitchFamily="2" charset="-127"/>
+                <a:ea typeface="KoPub돋움체 Bold" panose="00000800000000000000" pitchFamily="2" charset="-127"/>
+              </a:rPr>
+              <a:t>결정 사항의 </a:t>
+            </a:r>
+            <a:r>
+              <a:rPr lang="ko-KR" altLang="en-US" sz="800" b="1" dirty="0" err="1">
+                <a:latin typeface="KoPub돋움체 Bold" panose="00000800000000000000" pitchFamily="2" charset="-127"/>
+                <a:ea typeface="KoPub돋움체 Bold" panose="00000800000000000000" pitchFamily="2" charset="-127"/>
+              </a:rPr>
+              <a:t>선제적</a:t>
+            </a:r>
+            <a:r>
+              <a:rPr lang="ko-KR" altLang="en-US" sz="800" b="1" dirty="0">
+                <a:latin typeface="KoPub돋움체 Bold" panose="00000800000000000000" pitchFamily="2" charset="-127"/>
+                <a:ea typeface="KoPub돋움체 Bold" panose="00000800000000000000" pitchFamily="2" charset="-127"/>
+              </a:rPr>
+              <a:t> 알림 </a:t>
+            </a:r>
+            <a:r>
+              <a:rPr lang="en-US" altLang="ko-KR" sz="800" b="1" dirty="0">
+                <a:latin typeface="KoPub돋움체 Bold" panose="00000800000000000000" pitchFamily="2" charset="-127"/>
+                <a:ea typeface="KoPub돋움체 Bold" panose="00000800000000000000" pitchFamily="2" charset="-127"/>
+              </a:rPr>
+              <a:t>(PA ↔ </a:t>
+            </a:r>
+            <a:r>
+              <a:rPr lang="ko-KR" altLang="en-US" sz="800" b="1" dirty="0">
+                <a:latin typeface="KoPub돋움체 Bold" panose="00000800000000000000" pitchFamily="2" charset="-127"/>
+                <a:ea typeface="KoPub돋움체 Bold" panose="00000800000000000000" pitchFamily="2" charset="-127"/>
+              </a:rPr>
+              <a:t>병동</a:t>
+            </a:r>
+            <a:r>
+              <a:rPr lang="en-US" altLang="ko-KR" sz="800" b="1" dirty="0">
+                <a:latin typeface="KoPub돋움체 Bold" panose="00000800000000000000" pitchFamily="2" charset="-127"/>
+                <a:ea typeface="KoPub돋움체 Bold" panose="00000800000000000000" pitchFamily="2" charset="-127"/>
+              </a:rPr>
+              <a:t>)</a:t>
+            </a:r>
+          </a:p>
+          <a:p>
+            <a:pPr marL="88900" indent="-88900">
+              <a:lnSpc>
+                <a:spcPts val="1100"/>
+              </a:lnSpc>
+              <a:buClr>
+                <a:srgbClr val="00B0F0"/>
+              </a:buClr>
+              <a:buFont typeface="Arial" panose="020B0604020202020204" pitchFamily="34" charset="0"/>
+              <a:buChar char="•"/>
+            </a:pPr>
+            <a:r>
+              <a:rPr lang="en-US" altLang="ko-KR" sz="800" b="1" dirty="0">
+                <a:latin typeface="KoPub돋움체 Bold" panose="00000800000000000000" pitchFamily="2" charset="-127"/>
+                <a:ea typeface="KoPub돋움체 Bold" panose="00000800000000000000" pitchFamily="2" charset="-127"/>
+              </a:rPr>
+              <a:t>[</a:t>
+            </a:r>
+            <a:r>
+              <a:rPr lang="ko-KR" altLang="en-US" sz="800" b="1" dirty="0">
+                <a:latin typeface="KoPub돋움체 Bold" panose="00000800000000000000" pitchFamily="2" charset="-127"/>
+                <a:ea typeface="KoPub돋움체 Bold" panose="00000800000000000000" pitchFamily="2" charset="-127"/>
+              </a:rPr>
+              <a:t>원칙</a:t>
+            </a:r>
+            <a:r>
+              <a:rPr lang="en-US" altLang="ko-KR" sz="800" b="1" dirty="0">
+                <a:latin typeface="KoPub돋움체 Bold" panose="00000800000000000000" pitchFamily="2" charset="-127"/>
+                <a:ea typeface="KoPub돋움체 Bold" panose="00000800000000000000" pitchFamily="2" charset="-127"/>
+              </a:rPr>
+              <a:t>] </a:t>
+            </a:r>
+            <a:r>
+              <a:rPr lang="ko-KR" altLang="en-US" sz="800" b="1" dirty="0">
+                <a:latin typeface="KoPub돋움체 Bold" panose="00000800000000000000" pitchFamily="2" charset="-127"/>
+                <a:ea typeface="KoPub돋움체 Bold" panose="00000800000000000000" pitchFamily="2" charset="-127"/>
+              </a:rPr>
+              <a:t>공식 채널</a:t>
+            </a:r>
+            <a:r>
+              <a:rPr lang="en-US" altLang="ko-KR" sz="800" b="1" dirty="0">
+                <a:latin typeface="KoPub돋움체 Bold" panose="00000800000000000000" pitchFamily="2" charset="-127"/>
+                <a:ea typeface="KoPub돋움체 Bold" panose="00000800000000000000" pitchFamily="2" charset="-127"/>
+              </a:rPr>
+              <a:t>(EMR/</a:t>
+            </a:r>
+            <a:r>
+              <a:rPr lang="ko-KR" altLang="en-US" sz="800" b="1" dirty="0">
+                <a:latin typeface="KoPub돋움체 Bold" panose="00000800000000000000" pitchFamily="2" charset="-127"/>
+                <a:ea typeface="KoPub돋움체 Bold" panose="00000800000000000000" pitchFamily="2" charset="-127"/>
+              </a:rPr>
+              <a:t>유선</a:t>
+            </a:r>
+            <a:r>
+              <a:rPr lang="en-US" altLang="ko-KR" sz="800" b="1" dirty="0">
+                <a:latin typeface="KoPub돋움체 Bold" panose="00000800000000000000" pitchFamily="2" charset="-127"/>
+                <a:ea typeface="KoPub돋움체 Bold" panose="00000800000000000000" pitchFamily="2" charset="-127"/>
+              </a:rPr>
+              <a:t>) </a:t>
+            </a:r>
+            <a:r>
+              <a:rPr lang="ko-KR" altLang="en-US" sz="800" b="1" dirty="0">
+                <a:latin typeface="KoPub돋움체 Bold" panose="00000800000000000000" pitchFamily="2" charset="-127"/>
+                <a:ea typeface="KoPub돋움체 Bold" panose="00000800000000000000" pitchFamily="2" charset="-127"/>
+              </a:rPr>
+              <a:t>활용 </a:t>
+            </a:r>
+            <a:r>
+              <a:rPr lang="en-US" altLang="ko-KR" sz="800" b="1" dirty="0">
+                <a:latin typeface="KoPub돋움체 Bold" panose="00000800000000000000" pitchFamily="2" charset="-127"/>
+                <a:ea typeface="KoPub돋움체 Bold" panose="00000800000000000000" pitchFamily="2" charset="-127"/>
+              </a:rPr>
+              <a:t>(</a:t>
+            </a:r>
+            <a:r>
+              <a:rPr lang="ko-KR" altLang="en-US" sz="800" b="1" dirty="0">
+                <a:latin typeface="KoPub돋움체 Bold" panose="00000800000000000000" pitchFamily="2" charset="-127"/>
+                <a:ea typeface="KoPub돋움체 Bold" panose="00000800000000000000" pitchFamily="2" charset="-127"/>
+              </a:rPr>
+              <a:t>수술</a:t>
+            </a:r>
+            <a:r>
+              <a:rPr lang="en-US" altLang="ko-KR" sz="800" b="1" dirty="0">
+                <a:latin typeface="KoPub돋움체 Bold" panose="00000800000000000000" pitchFamily="2" charset="-127"/>
+                <a:ea typeface="KoPub돋움체 Bold" panose="00000800000000000000" pitchFamily="2" charset="-127"/>
+              </a:rPr>
+              <a:t>, </a:t>
+            </a:r>
+            <a:r>
+              <a:rPr lang="ko-KR" altLang="en-US" sz="800" b="1" dirty="0">
+                <a:latin typeface="KoPub돋움체 Bold" panose="00000800000000000000" pitchFamily="2" charset="-127"/>
+                <a:ea typeface="KoPub돋움체 Bold" panose="00000800000000000000" pitchFamily="2" charset="-127"/>
+              </a:rPr>
+              <a:t>검사 결과 보고</a:t>
+            </a:r>
+            <a:r>
+              <a:rPr lang="en-US" altLang="ko-KR" sz="800" b="1" dirty="0">
+                <a:latin typeface="KoPub돋움체 Bold" panose="00000800000000000000" pitchFamily="2" charset="-127"/>
+                <a:ea typeface="KoPub돋움체 Bold" panose="00000800000000000000" pitchFamily="2" charset="-127"/>
+              </a:rPr>
+              <a:t>)</a:t>
+            </a:r>
+          </a:p>
+          <a:p>
+            <a:pPr marL="88900" indent="-88900">
+              <a:lnSpc>
+                <a:spcPts val="1100"/>
+              </a:lnSpc>
+              <a:buClr>
+                <a:srgbClr val="00B0F0"/>
+              </a:buClr>
+              <a:buFont typeface="Arial" panose="020B0604020202020204" pitchFamily="34" charset="0"/>
+              <a:buChar char="•"/>
+            </a:pPr>
+            <a:r>
+              <a:rPr lang="en-US" altLang="ko-KR" sz="800" b="1" dirty="0">
+                <a:latin typeface="KoPub돋움체 Bold" panose="00000800000000000000" pitchFamily="2" charset="-127"/>
+                <a:ea typeface="KoPub돋움체 Bold" panose="00000800000000000000" pitchFamily="2" charset="-127"/>
+              </a:rPr>
+              <a:t>[</a:t>
+            </a:r>
+            <a:r>
+              <a:rPr lang="ko-KR" altLang="en-US" sz="800" b="1" dirty="0">
+                <a:latin typeface="KoPub돋움체 Bold" panose="00000800000000000000" pitchFamily="2" charset="-127"/>
+                <a:ea typeface="KoPub돋움체 Bold" panose="00000800000000000000" pitchFamily="2" charset="-127"/>
+              </a:rPr>
+              <a:t>완결</a:t>
+            </a:r>
+            <a:r>
+              <a:rPr lang="en-US" altLang="ko-KR" sz="800" b="1" dirty="0">
+                <a:latin typeface="KoPub돋움체 Bold" panose="00000800000000000000" pitchFamily="2" charset="-127"/>
+                <a:ea typeface="KoPub돋움체 Bold" panose="00000800000000000000" pitchFamily="2" charset="-127"/>
+              </a:rPr>
+              <a:t>] [</a:t>
+            </a:r>
+            <a:r>
+              <a:rPr lang="ko-KR" altLang="en-US" sz="800" b="1" dirty="0">
+                <a:latin typeface="KoPub돋움체 Bold" panose="00000800000000000000" pitchFamily="2" charset="-127"/>
+                <a:ea typeface="KoPub돋움체 Bold" panose="00000800000000000000" pitchFamily="2" charset="-127"/>
+              </a:rPr>
+              <a:t>답장</a:t>
+            </a:r>
+            <a:r>
+              <a:rPr lang="en-US" altLang="ko-KR" sz="800" b="1" dirty="0">
+                <a:latin typeface="KoPub돋움체 Bold" panose="00000800000000000000" pitchFamily="2" charset="-127"/>
+                <a:ea typeface="KoPub돋움체 Bold" panose="00000800000000000000" pitchFamily="2" charset="-127"/>
+              </a:rPr>
+              <a:t>(Reply)]</a:t>
+            </a:r>
+            <a:r>
+              <a:rPr lang="ko-KR" altLang="en-US" sz="800" b="1" dirty="0">
+                <a:latin typeface="KoPub돋움체 Bold" panose="00000800000000000000" pitchFamily="2" charset="-127"/>
+                <a:ea typeface="KoPub돋움체 Bold" panose="00000800000000000000" pitchFamily="2" charset="-127"/>
+              </a:rPr>
+              <a:t>기능 필수 활용</a:t>
+            </a:r>
+          </a:p>
+          <a:p>
+            <a:pPr marL="88900" indent="-88900">
+              <a:lnSpc>
+                <a:spcPts val="1100"/>
+              </a:lnSpc>
+              <a:buClr>
+                <a:srgbClr val="00B0F0"/>
+              </a:buClr>
+              <a:buFont typeface="Arial" panose="020B0604020202020204" pitchFamily="34" charset="0"/>
+              <a:buChar char="•"/>
+            </a:pPr>
+            <a:r>
+              <a:rPr lang="en-US" altLang="ko-KR" sz="800" b="1" dirty="0">
+                <a:latin typeface="KoPub돋움체 Bold" panose="00000800000000000000" pitchFamily="2" charset="-127"/>
+                <a:ea typeface="KoPub돋움체 Bold" panose="00000800000000000000" pitchFamily="2" charset="-127"/>
+              </a:rPr>
+              <a:t>[</a:t>
+            </a:r>
+            <a:r>
+              <a:rPr lang="ko-KR" altLang="en-US" sz="800" b="1" dirty="0">
+                <a:latin typeface="KoPub돋움체 Bold" panose="00000800000000000000" pitchFamily="2" charset="-127"/>
+                <a:ea typeface="KoPub돋움체 Bold" panose="00000800000000000000" pitchFamily="2" charset="-127"/>
+              </a:rPr>
+              <a:t>대응</a:t>
+            </a:r>
+            <a:r>
+              <a:rPr lang="en-US" altLang="ko-KR" sz="800" b="1" dirty="0">
+                <a:latin typeface="KoPub돋움체 Bold" panose="00000800000000000000" pitchFamily="2" charset="-127"/>
+                <a:ea typeface="KoPub돋움체 Bold" panose="00000800000000000000" pitchFamily="2" charset="-127"/>
+              </a:rPr>
+              <a:t>] </a:t>
+            </a:r>
+            <a:r>
+              <a:rPr lang="ko-KR" altLang="en-US" sz="800" b="1" dirty="0">
+                <a:latin typeface="KoPub돋움체 Bold" panose="00000800000000000000" pitchFamily="2" charset="-127"/>
+                <a:ea typeface="KoPub돋움체 Bold" panose="00000800000000000000" pitchFamily="2" charset="-127"/>
+              </a:rPr>
+              <a:t>메신저 응답 </a:t>
+            </a:r>
+            <a:r>
+              <a:rPr lang="en-US" altLang="ko-KR" sz="800" b="1" dirty="0">
+                <a:latin typeface="KoPub돋움체 Bold" panose="00000800000000000000" pitchFamily="2" charset="-127"/>
+                <a:ea typeface="KoPub돋움체 Bold" panose="00000800000000000000" pitchFamily="2" charset="-127"/>
+              </a:rPr>
+              <a:t>'10</a:t>
+            </a:r>
+            <a:r>
+              <a:rPr lang="ko-KR" altLang="en-US" sz="800" b="1" dirty="0">
+                <a:latin typeface="KoPub돋움체 Bold" panose="00000800000000000000" pitchFamily="2" charset="-127"/>
+                <a:ea typeface="KoPub돋움체 Bold" panose="00000800000000000000" pitchFamily="2" charset="-127"/>
+              </a:rPr>
+              <a:t>분 룰</a:t>
+            </a:r>
+            <a:r>
+              <a:rPr lang="en-US" altLang="ko-KR" sz="800" b="1" dirty="0">
+                <a:latin typeface="KoPub돋움체 Bold" panose="00000800000000000000" pitchFamily="2" charset="-127"/>
+                <a:ea typeface="KoPub돋움체 Bold" panose="00000800000000000000" pitchFamily="2" charset="-127"/>
+              </a:rPr>
+              <a:t>(Rule)' </a:t>
+            </a:r>
+            <a:r>
+              <a:rPr lang="ko-KR" altLang="en-US" sz="800" b="1" dirty="0">
+                <a:latin typeface="KoPub돋움체 Bold" panose="00000800000000000000" pitchFamily="2" charset="-127"/>
+                <a:ea typeface="KoPub돋움체 Bold" panose="00000800000000000000" pitchFamily="2" charset="-127"/>
+              </a:rPr>
+              <a:t>적용</a:t>
+            </a:r>
+          </a:p>
+        </p:txBody>
+      </p:sp>
     </p:spTree>
     <p:extLst>
       <p:ext uri="{BB962C8B-B14F-4D97-AF65-F5344CB8AC3E}">
-        <p14:creationId xmlns:p14="http://schemas.microsoft.com/office/powerpoint/2010/main" val="2747244625"/>
+        <p14:creationId xmlns:p14="http://schemas.microsoft.com/office/powerpoint/2010/main" val="1936089100"/>
       </p:ext>
     </p:extLst>
   </p:cSld>
@@ -7668,7 +8103,7 @@
         <p:cNvPr id="1" name="">
           <a:extLst>
             <a:ext uri="{FF2B5EF4-FFF2-40B4-BE49-F238E27FC236}">
-              <a16:creationId xmlns:a16="http://schemas.microsoft.com/office/drawing/2014/main" id="{926C5126-4A2A-FC7F-106F-3232C6E34FF5}"/>
+              <a16:creationId xmlns:a16="http://schemas.microsoft.com/office/drawing/2014/main" id="{57338D27-9888-E8B2-933B-58AC118FED94}"/>
             </a:ext>
           </a:extLst>
         </p:cNvPr>
@@ -7688,7 +8123,7 @@
           <p:cNvPr id="3" name="TextBox 2">
             <a:extLst>
               <a:ext uri="{FF2B5EF4-FFF2-40B4-BE49-F238E27FC236}">
-                <a16:creationId xmlns:a16="http://schemas.microsoft.com/office/drawing/2014/main" id="{AF6BB92C-2F83-0CAF-C723-2C777E5443B0}"/>
+                <a16:creationId xmlns:a16="http://schemas.microsoft.com/office/drawing/2014/main" id="{82E99EED-B91E-04B6-385B-CA72C4DE37FA}"/>
               </a:ext>
             </a:extLst>
           </p:cNvPr>
@@ -7716,21 +8151,7 @@
                 <a:latin typeface="KoPub돋움체 Bold" panose="00000800000000000000" pitchFamily="2" charset="-127"/>
                 <a:ea typeface="KoPub돋움체 Bold" panose="00000800000000000000" pitchFamily="2" charset="-127"/>
               </a:rPr>
-              <a:t>순천향대학교 천안병원 </a:t>
-            </a:r>
-            <a:r>
-              <a:rPr lang="en-US" altLang="ko-KR" sz="600" b="1" spc="-11" dirty="0">
-                <a:latin typeface="KoPub돋움체 Bold" panose="00000800000000000000" pitchFamily="2" charset="-127"/>
-                <a:ea typeface="KoPub돋움체 Bold" panose="00000800000000000000" pitchFamily="2" charset="-127"/>
-              </a:rPr>
-              <a:t>| </a:t>
-            </a:r>
-            <a:r>
-              <a:rPr lang="ko-KR" altLang="en-US" sz="600" b="1" spc="-11" dirty="0">
-                <a:latin typeface="KoPub돋움체 Bold" panose="00000800000000000000" pitchFamily="2" charset="-127"/>
-                <a:ea typeface="KoPub돋움체 Bold" panose="00000800000000000000" pitchFamily="2" charset="-127"/>
-              </a:rPr>
-              <a:t>진료지원간호팀 </a:t>
+              <a:t>순천향대학교 천안병원</a:t>
             </a:r>
           </a:p>
         </p:txBody>
@@ -7740,7 +8161,7 @@
           <p:cNvPr id="17" name="그룹 16">
             <a:extLst>
               <a:ext uri="{FF2B5EF4-FFF2-40B4-BE49-F238E27FC236}">
-                <a16:creationId xmlns:a16="http://schemas.microsoft.com/office/drawing/2014/main" id="{31747F1F-5AA5-4C16-077D-B861466B2D43}"/>
+                <a16:creationId xmlns:a16="http://schemas.microsoft.com/office/drawing/2014/main" id="{1F219120-78F7-E455-1598-32BF060343A6}"/>
               </a:ext>
             </a:extLst>
           </p:cNvPr>
@@ -7749,8 +8170,8 @@
         </p:nvGrpSpPr>
         <p:grpSpPr>
           <a:xfrm>
-            <a:off x="2050303" y="549443"/>
-            <a:ext cx="854822" cy="766386"/>
+            <a:off x="2298353" y="149770"/>
+            <a:ext cx="746131" cy="668940"/>
             <a:chOff x="777945" y="-736888"/>
             <a:chExt cx="663508" cy="663508"/>
           </a:xfrm>
@@ -7760,7 +8181,7 @@
             <p:cNvPr id="5" name="그림 4" descr="패턴, 사각형, 예술, 직사각형이(가) 표시된 사진&#10;&#10;AI 생성 콘텐츠는 정확하지 않을 수 있습니다.">
               <a:extLst>
                 <a:ext uri="{FF2B5EF4-FFF2-40B4-BE49-F238E27FC236}">
-                  <a16:creationId xmlns:a16="http://schemas.microsoft.com/office/drawing/2014/main" id="{1DB8CF0D-9269-F125-ED00-9978E3CC19E5}"/>
+                  <a16:creationId xmlns:a16="http://schemas.microsoft.com/office/drawing/2014/main" id="{0EC54231-9AFF-0F30-9CE8-C9B0ADE86320}"/>
                 </a:ext>
               </a:extLst>
             </p:cNvPr>
@@ -7790,7 +8211,7 @@
             <p:cNvPr id="13" name="L 도형 12">
               <a:extLst>
                 <a:ext uri="{FF2B5EF4-FFF2-40B4-BE49-F238E27FC236}">
-                  <a16:creationId xmlns:a16="http://schemas.microsoft.com/office/drawing/2014/main" id="{C30D1DB0-202E-8A8C-451C-56E69056FE32}"/>
+                  <a16:creationId xmlns:a16="http://schemas.microsoft.com/office/drawing/2014/main" id="{734CBA43-E640-F06A-57CB-DACF86AE6E83}"/>
                 </a:ext>
               </a:extLst>
             </p:cNvPr>
@@ -7847,7 +8268,7 @@
             <p:cNvPr id="14" name="L 도형 13">
               <a:extLst>
                 <a:ext uri="{FF2B5EF4-FFF2-40B4-BE49-F238E27FC236}">
-                  <a16:creationId xmlns:a16="http://schemas.microsoft.com/office/drawing/2014/main" id="{9B1B619C-7AC8-1C11-F1F4-40D8C3499AC2}"/>
+                  <a16:creationId xmlns:a16="http://schemas.microsoft.com/office/drawing/2014/main" id="{BA9E35DA-ADB0-38A2-DDA5-957CB477F630}"/>
                 </a:ext>
               </a:extLst>
             </p:cNvPr>
@@ -7904,7 +8325,7 @@
             <p:cNvPr id="15" name="L 도형 14">
               <a:extLst>
                 <a:ext uri="{FF2B5EF4-FFF2-40B4-BE49-F238E27FC236}">
-                  <a16:creationId xmlns:a16="http://schemas.microsoft.com/office/drawing/2014/main" id="{05A0CF51-7028-B639-37F2-D38D64043ABE}"/>
+                  <a16:creationId xmlns:a16="http://schemas.microsoft.com/office/drawing/2014/main" id="{20EB962B-1EB4-BA2D-BFC5-B6C695D6CFB2}"/>
                 </a:ext>
               </a:extLst>
             </p:cNvPr>
@@ -7961,7 +8382,7 @@
             <p:cNvPr id="16" name="L 도형 15">
               <a:extLst>
                 <a:ext uri="{FF2B5EF4-FFF2-40B4-BE49-F238E27FC236}">
-                  <a16:creationId xmlns:a16="http://schemas.microsoft.com/office/drawing/2014/main" id="{7731C4B1-1D06-ABE8-5F52-FD7374069060}"/>
+                  <a16:creationId xmlns:a16="http://schemas.microsoft.com/office/drawing/2014/main" id="{F979FC5C-4874-C745-D27C-90B5E3D80FC2}"/>
                 </a:ext>
               </a:extLst>
             </p:cNvPr>
@@ -8019,7 +8440,7 @@
           <p:cNvPr id="18" name="그룹 17">
             <a:extLst>
               <a:ext uri="{FF2B5EF4-FFF2-40B4-BE49-F238E27FC236}">
-                <a16:creationId xmlns:a16="http://schemas.microsoft.com/office/drawing/2014/main" id="{ECB13761-177B-0572-6CB1-A6E6EAE4B2AF}"/>
+                <a16:creationId xmlns:a16="http://schemas.microsoft.com/office/drawing/2014/main" id="{C8146134-793D-3F7A-1873-B178E892AFBB}"/>
               </a:ext>
             </a:extLst>
           </p:cNvPr>
@@ -8039,7 +8460,7 @@
             <p:cNvPr id="4" name="TextBox 3">
               <a:extLst>
                 <a:ext uri="{FF2B5EF4-FFF2-40B4-BE49-F238E27FC236}">
-                  <a16:creationId xmlns:a16="http://schemas.microsoft.com/office/drawing/2014/main" id="{15278631-70F3-056F-6686-C30116B50BC0}"/>
+                  <a16:creationId xmlns:a16="http://schemas.microsoft.com/office/drawing/2014/main" id="{2BC5242E-5CA4-6217-1821-01AFC509D42D}"/>
                 </a:ext>
               </a:extLst>
             </p:cNvPr>
@@ -8114,7 +8535,7 @@
             <p:cNvPr id="6" name="TextBox 5">
               <a:extLst>
                 <a:ext uri="{FF2B5EF4-FFF2-40B4-BE49-F238E27FC236}">
-                  <a16:creationId xmlns:a16="http://schemas.microsoft.com/office/drawing/2014/main" id="{B161F65D-7CC1-469C-B77B-E5625B2EADDF}"/>
+                  <a16:creationId xmlns:a16="http://schemas.microsoft.com/office/drawing/2014/main" id="{604FCF81-594C-31C3-18B3-25B93F3500A1}"/>
                 </a:ext>
               </a:extLst>
             </p:cNvPr>
@@ -8123,8 +8544,8 @@
           </p:nvSpPr>
           <p:spPr>
             <a:xfrm>
-              <a:off x="622591" y="451833"/>
-              <a:ext cx="1729962" cy="200055"/>
+              <a:off x="660262" y="451833"/>
+              <a:ext cx="1654620" cy="200055"/>
             </a:xfrm>
             <a:prstGeom prst="rect">
               <a:avLst/>
@@ -8150,35 +8571,28 @@
                   <a:latin typeface="KoPub돋움체 Bold" panose="00000800000000000000" pitchFamily="2" charset="-127"/>
                   <a:ea typeface="KoPub돋움체 Bold" panose="00000800000000000000" pitchFamily="2" charset="-127"/>
                 </a:rPr>
-                <a:t>우리가 가치를 만드는 공간</a:t>
+                <a:t>스마트 소통 약속</a:t>
               </a:r>
               <a:r>
                 <a:rPr lang="en-US" altLang="ko-KR" sz="700" b="1" dirty="0">
                   <a:latin typeface="KoPub돋움체 Bold" panose="00000800000000000000" pitchFamily="2" charset="-127"/>
                   <a:ea typeface="KoPub돋움체 Bold" panose="00000800000000000000" pitchFamily="2" charset="-127"/>
                 </a:rPr>
-                <a:t>, </a:t>
+                <a:t>(</a:t>
               </a:r>
               <a:r>
-                <a:rPr lang="ko-KR" altLang="en-US" sz="700" b="1" dirty="0" err="1">
+                <a:rPr lang="en-US" altLang="ko-KR" sz="700" b="1" dirty="0" err="1">
                   <a:latin typeface="KoPub돋움체 Bold" panose="00000800000000000000" pitchFamily="2" charset="-127"/>
                   <a:ea typeface="KoPub돋움체 Bold" panose="00000800000000000000" pitchFamily="2" charset="-127"/>
                 </a:rPr>
-                <a:t>우리가치</a:t>
-              </a:r>
-              <a:r>
-                <a:rPr lang="ko-KR" altLang="en-US" sz="700" b="1" dirty="0">
-                  <a:latin typeface="KoPub돋움체 Bold" panose="00000800000000000000" pitchFamily="2" charset="-127"/>
-                  <a:ea typeface="KoPub돋움체 Bold" panose="00000800000000000000" pitchFamily="2" charset="-127"/>
-                </a:rPr>
-                <a:t> 허브</a:t>
+                <a:t>WeValue</a:t>
               </a:r>
               <a:r>
                 <a:rPr lang="en-US" altLang="ko-KR" sz="700" b="1" dirty="0">
                   <a:latin typeface="KoPub돋움체 Bold" panose="00000800000000000000" pitchFamily="2" charset="-127"/>
                   <a:ea typeface="KoPub돋움체 Bold" panose="00000800000000000000" pitchFamily="2" charset="-127"/>
                 </a:rPr>
-                <a:t>]</a:t>
+                <a:t> Promises)]</a:t>
               </a:r>
             </a:p>
           </p:txBody>
@@ -8188,7 +8602,7 @@
             <p:cNvPr id="10" name="그림 9">
               <a:extLst>
                 <a:ext uri="{FF2B5EF4-FFF2-40B4-BE49-F238E27FC236}">
-                  <a16:creationId xmlns:a16="http://schemas.microsoft.com/office/drawing/2014/main" id="{815DF3D9-F3D9-85D9-62F4-90DB3DF4F646}"/>
+                  <a16:creationId xmlns:a16="http://schemas.microsoft.com/office/drawing/2014/main" id="{18034259-4CDC-550B-0484-8424B1840976}"/>
                 </a:ext>
               </a:extLst>
             </p:cNvPr>
@@ -8218,7 +8632,7 @@
             <p:cNvPr id="30" name="그림 29">
               <a:extLst>
                 <a:ext uri="{FF2B5EF4-FFF2-40B4-BE49-F238E27FC236}">
-                  <a16:creationId xmlns:a16="http://schemas.microsoft.com/office/drawing/2014/main" id="{C1B02909-B1FD-0935-9187-EB951A16C5E7}"/>
+                  <a16:creationId xmlns:a16="http://schemas.microsoft.com/office/drawing/2014/main" id="{8437BAE9-35E6-B8FB-71FB-5C49E156476C}"/>
                 </a:ext>
               </a:extLst>
             </p:cNvPr>
@@ -8244,304 +8658,435 @@
           </p:spPr>
         </p:pic>
       </p:grpSp>
-      <p:grpSp>
-        <p:nvGrpSpPr>
-          <p:cNvPr id="12" name="그룹 11">
+      <p:sp>
+        <p:nvSpPr>
+          <p:cNvPr id="31" name="TextBox 30">
             <a:extLst>
               <a:ext uri="{FF2B5EF4-FFF2-40B4-BE49-F238E27FC236}">
-                <a16:creationId xmlns:a16="http://schemas.microsoft.com/office/drawing/2014/main" id="{E4BF5A46-07A1-C67D-7FDD-6FFD49F0A241}"/>
+                <a16:creationId xmlns:a16="http://schemas.microsoft.com/office/drawing/2014/main" id="{2A838841-41AC-CFC1-D5BD-E34271622934}"/>
               </a:ext>
             </a:extLst>
           </p:cNvPr>
-          <p:cNvGrpSpPr/>
+          <p:cNvSpPr txBox="1"/>
           <p:nvPr/>
-        </p:nvGrpSpPr>
-        <p:grpSpPr>
+        </p:nvSpPr>
+        <p:spPr>
           <a:xfrm>
-            <a:off x="205429" y="781187"/>
-            <a:ext cx="1731561" cy="784830"/>
-            <a:chOff x="796295" y="778765"/>
-            <a:chExt cx="1731561" cy="784830"/>
+            <a:off x="82843" y="781989"/>
+            <a:ext cx="2592376" cy="790345"/>
           </a:xfrm>
-        </p:grpSpPr>
-        <p:sp>
-          <p:nvSpPr>
-            <p:cNvPr id="26" name="TextBox 25">
-              <a:extLst>
-                <a:ext uri="{FF2B5EF4-FFF2-40B4-BE49-F238E27FC236}">
-                  <a16:creationId xmlns:a16="http://schemas.microsoft.com/office/drawing/2014/main" id="{421C3F74-278E-4E5B-6A87-08D0B226889B}"/>
-                </a:ext>
-              </a:extLst>
-            </p:cNvPr>
-            <p:cNvSpPr txBox="1"/>
-            <p:nvPr/>
-          </p:nvSpPr>
-          <p:spPr>
-            <a:xfrm>
-              <a:off x="1495201" y="778765"/>
-              <a:ext cx="1032655" cy="784830"/>
-            </a:xfrm>
-            <a:prstGeom prst="rect">
-              <a:avLst/>
-            </a:prstGeom>
-            <a:noFill/>
-          </p:spPr>
-          <p:txBody>
-            <a:bodyPr wrap="none" rtlCol="0">
-              <a:spAutoFit/>
-            </a:bodyPr>
-            <a:lstStyle/>
-            <a:p>
-              <a:r>
-                <a:rPr lang="en-US" altLang="ko-KR" sz="900" dirty="0">
-                  <a:latin typeface="KoPub돋움체 Light" panose="00000300000000000000" pitchFamily="2" charset="-127"/>
-                  <a:ea typeface="KoPub돋움체 Light" panose="00000300000000000000" pitchFamily="2" charset="-127"/>
-                </a:rPr>
-                <a:t>"</a:t>
-              </a:r>
-              <a:r>
-                <a:rPr lang="ko-KR" altLang="en-US" sz="900" dirty="0">
-                  <a:latin typeface="KoPub돋움체 Light" panose="00000300000000000000" pitchFamily="2" charset="-127"/>
-                  <a:ea typeface="KoPub돋움체 Light" panose="00000300000000000000" pitchFamily="2" charset="-127"/>
-                </a:rPr>
-                <a:t>함께하는 즐거움</a:t>
-              </a:r>
-              <a:r>
-                <a:rPr lang="en-US" altLang="ko-KR" sz="900" dirty="0">
-                  <a:latin typeface="KoPub돋움체 Light" panose="00000300000000000000" pitchFamily="2" charset="-127"/>
-                  <a:ea typeface="KoPub돋움체 Light" panose="00000300000000000000" pitchFamily="2" charset="-127"/>
-                </a:rPr>
-                <a:t>“</a:t>
-              </a:r>
-            </a:p>
-            <a:p>
-              <a:r>
-                <a:rPr lang="en-US" altLang="ko-KR" sz="900" dirty="0">
-                  <a:latin typeface="KoPub돋움체 Light" panose="00000300000000000000" pitchFamily="2" charset="-127"/>
-                  <a:ea typeface="KoPub돋움체 Light" panose="00000300000000000000" pitchFamily="2" charset="-127"/>
-                </a:rPr>
-                <a:t>"</a:t>
-              </a:r>
-              <a:r>
-                <a:rPr lang="ko-KR" altLang="en-US" sz="900" dirty="0">
-                  <a:latin typeface="KoPub돋움체 Light" panose="00000300000000000000" pitchFamily="2" charset="-127"/>
-                  <a:ea typeface="KoPub돋움체 Light" panose="00000300000000000000" pitchFamily="2" charset="-127"/>
-                </a:rPr>
-                <a:t>명확한 약속</a:t>
-              </a:r>
-              <a:r>
-                <a:rPr lang="en-US" altLang="ko-KR" sz="900" dirty="0">
-                  <a:latin typeface="KoPub돋움체 Light" panose="00000300000000000000" pitchFamily="2" charset="-127"/>
-                  <a:ea typeface="KoPub돋움체 Light" panose="00000300000000000000" pitchFamily="2" charset="-127"/>
-                </a:rPr>
-                <a:t>"</a:t>
-              </a:r>
-              <a:endParaRPr lang="ko-KR" altLang="en-US" sz="900" dirty="0">
-                <a:latin typeface="KoPub돋움체 Light" panose="00000300000000000000" pitchFamily="2" charset="-127"/>
-                <a:ea typeface="KoPub돋움체 Light" panose="00000300000000000000" pitchFamily="2" charset="-127"/>
-              </a:endParaRPr>
-            </a:p>
-            <a:p>
-              <a:r>
-                <a:rPr lang="en-US" altLang="ko-KR" sz="900" dirty="0">
-                  <a:latin typeface="KoPub돋움체 Light" panose="00000300000000000000" pitchFamily="2" charset="-127"/>
-                  <a:ea typeface="KoPub돋움체 Light" panose="00000300000000000000" pitchFamily="2" charset="-127"/>
-                </a:rPr>
-                <a:t>"</a:t>
-              </a:r>
-              <a:r>
-                <a:rPr lang="ko-KR" altLang="en-US" sz="900" dirty="0">
-                  <a:latin typeface="KoPub돋움체 Light" panose="00000300000000000000" pitchFamily="2" charset="-127"/>
-                  <a:ea typeface="KoPub돋움체 Light" panose="00000300000000000000" pitchFamily="2" charset="-127"/>
-                </a:rPr>
-                <a:t>한눈에 보는 실무</a:t>
-              </a:r>
-              <a:r>
-                <a:rPr lang="en-US" altLang="ko-KR" sz="900" dirty="0">
-                  <a:latin typeface="KoPub돋움체 Light" panose="00000300000000000000" pitchFamily="2" charset="-127"/>
-                  <a:ea typeface="KoPub돋움체 Light" panose="00000300000000000000" pitchFamily="2" charset="-127"/>
-                </a:rPr>
-                <a:t>"</a:t>
-              </a:r>
-              <a:endParaRPr lang="ko-KR" altLang="en-US" sz="900" dirty="0">
-                <a:latin typeface="KoPub돋움체 Light" panose="00000300000000000000" pitchFamily="2" charset="-127"/>
-                <a:ea typeface="KoPub돋움체 Light" panose="00000300000000000000" pitchFamily="2" charset="-127"/>
-              </a:endParaRPr>
-            </a:p>
-            <a:p>
-              <a:r>
-                <a:rPr lang="en-US" altLang="ko-KR" sz="900" dirty="0">
-                  <a:latin typeface="KoPub돋움체 Light" panose="00000300000000000000" pitchFamily="2" charset="-127"/>
-                  <a:ea typeface="KoPub돋움체 Light" panose="00000300000000000000" pitchFamily="2" charset="-127"/>
-                </a:rPr>
-                <a:t>"</a:t>
-              </a:r>
-              <a:r>
-                <a:rPr lang="ko-KR" altLang="en-US" sz="900" dirty="0">
-                  <a:latin typeface="KoPub돋움체 Light" panose="00000300000000000000" pitchFamily="2" charset="-127"/>
-                  <a:ea typeface="KoPub돋움체 Light" panose="00000300000000000000" pitchFamily="2" charset="-127"/>
-                </a:rPr>
-                <a:t>현장 밀착형 지원</a:t>
-              </a:r>
-              <a:r>
-                <a:rPr lang="en-US" altLang="ko-KR" sz="900" dirty="0">
-                  <a:latin typeface="KoPub돋움체 Light" panose="00000300000000000000" pitchFamily="2" charset="-127"/>
-                  <a:ea typeface="KoPub돋움체 Light" panose="00000300000000000000" pitchFamily="2" charset="-127"/>
-                </a:rPr>
-                <a:t>"</a:t>
-              </a:r>
-              <a:endParaRPr lang="ko-KR" altLang="en-US" sz="900" dirty="0">
-                <a:latin typeface="KoPub돋움체 Light" panose="00000300000000000000" pitchFamily="2" charset="-127"/>
-                <a:ea typeface="KoPub돋움체 Light" panose="00000300000000000000" pitchFamily="2" charset="-127"/>
-              </a:endParaRPr>
-            </a:p>
-            <a:p>
-              <a:r>
-                <a:rPr lang="en-US" altLang="ko-KR" sz="900" dirty="0">
-                  <a:latin typeface="KoPub돋움체 Light" panose="00000300000000000000" pitchFamily="2" charset="-127"/>
-                  <a:ea typeface="KoPub돋움체 Light" panose="00000300000000000000" pitchFamily="2" charset="-127"/>
-                </a:rPr>
-                <a:t>"</a:t>
-              </a:r>
-              <a:r>
-                <a:rPr lang="ko-KR" altLang="en-US" sz="900" dirty="0">
-                  <a:latin typeface="KoPub돋움체 Light" panose="00000300000000000000" pitchFamily="2" charset="-127"/>
-                  <a:ea typeface="KoPub돋움체 Light" panose="00000300000000000000" pitchFamily="2" charset="-127"/>
-                </a:rPr>
-                <a:t>변화의 체감</a:t>
-              </a:r>
-              <a:r>
-                <a:rPr lang="en-US" altLang="ko-KR" sz="900" dirty="0">
-                  <a:latin typeface="KoPub돋움체 Light" panose="00000300000000000000" pitchFamily="2" charset="-127"/>
-                  <a:ea typeface="KoPub돋움체 Light" panose="00000300000000000000" pitchFamily="2" charset="-127"/>
-                </a:rPr>
-                <a:t>"</a:t>
-              </a:r>
-              <a:endParaRPr lang="ko-KR" altLang="en-US" sz="900" dirty="0">
-                <a:latin typeface="KoPub돋움체 Light" panose="00000300000000000000" pitchFamily="2" charset="-127"/>
-                <a:ea typeface="KoPub돋움체 Light" panose="00000300000000000000" pitchFamily="2" charset="-127"/>
-              </a:endParaRPr>
-            </a:p>
-          </p:txBody>
-        </p:sp>
-        <p:sp>
-          <p:nvSpPr>
-            <p:cNvPr id="31" name="TextBox 30">
-              <a:extLst>
-                <a:ext uri="{FF2B5EF4-FFF2-40B4-BE49-F238E27FC236}">
-                  <a16:creationId xmlns:a16="http://schemas.microsoft.com/office/drawing/2014/main" id="{C130B983-8173-319F-0183-7FA781C1A7A0}"/>
-                </a:ext>
-              </a:extLst>
-            </p:cNvPr>
-            <p:cNvSpPr txBox="1"/>
-            <p:nvPr/>
-          </p:nvSpPr>
-          <p:spPr>
-            <a:xfrm>
-              <a:off x="796295" y="778765"/>
-              <a:ext cx="813043" cy="784830"/>
-            </a:xfrm>
-            <a:prstGeom prst="rect">
-              <a:avLst/>
-            </a:prstGeom>
-            <a:noFill/>
-          </p:spPr>
-          <p:txBody>
-            <a:bodyPr wrap="none" rtlCol="0">
-              <a:spAutoFit/>
-            </a:bodyPr>
-            <a:lstStyle/>
-            <a:p>
-              <a:pPr marL="88900" indent="-88900">
-                <a:buClr>
-                  <a:srgbClr val="00B0F0"/>
-                </a:buClr>
-                <a:buFont typeface="Arial" panose="020B0604020202020204" pitchFamily="34" charset="0"/>
-                <a:buChar char="•"/>
-              </a:pPr>
-              <a:r>
-                <a:rPr lang="ko-KR" altLang="en-US" sz="900" b="1" dirty="0">
-                  <a:latin typeface="KoPub돋움체 Bold" panose="00000800000000000000" pitchFamily="2" charset="-127"/>
-                  <a:ea typeface="KoPub돋움체 Bold" panose="00000800000000000000" pitchFamily="2" charset="-127"/>
-                </a:rPr>
-                <a:t>소통의 광장</a:t>
-              </a:r>
-              <a:endParaRPr lang="en-US" altLang="ko-KR" sz="900" b="1" dirty="0">
-                <a:latin typeface="KoPub돋움체 Bold" panose="00000800000000000000" pitchFamily="2" charset="-127"/>
-                <a:ea typeface="KoPub돋움체 Bold" panose="00000800000000000000" pitchFamily="2" charset="-127"/>
-              </a:endParaRPr>
-            </a:p>
-            <a:p>
-              <a:pPr marL="88900" indent="-88900">
-                <a:buClr>
-                  <a:srgbClr val="00B0F0"/>
-                </a:buClr>
-                <a:buFont typeface="Arial" panose="020B0604020202020204" pitchFamily="34" charset="0"/>
-                <a:buChar char="•"/>
-              </a:pPr>
-              <a:r>
-                <a:rPr lang="ko-KR" altLang="en-US" sz="900" b="1" dirty="0">
-                  <a:latin typeface="KoPub돋움체 Bold" panose="00000800000000000000" pitchFamily="2" charset="-127"/>
-                  <a:ea typeface="KoPub돋움체 Bold" panose="00000800000000000000" pitchFamily="2" charset="-127"/>
-                </a:rPr>
-                <a:t>업무 기준</a:t>
-              </a:r>
-            </a:p>
-            <a:p>
-              <a:pPr marL="88900" indent="-88900">
-                <a:buClr>
-                  <a:srgbClr val="00B0F0"/>
-                </a:buClr>
-                <a:buFont typeface="Arial" panose="020B0604020202020204" pitchFamily="34" charset="0"/>
-                <a:buChar char="•"/>
-              </a:pPr>
-              <a:r>
-                <a:rPr lang="ko-KR" altLang="en-US" sz="900" b="1" dirty="0">
-                  <a:latin typeface="KoPub돋움체 Bold" panose="00000800000000000000" pitchFamily="2" charset="-127"/>
-                  <a:ea typeface="KoPub돋움체 Bold" panose="00000800000000000000" pitchFamily="2" charset="-127"/>
-                </a:rPr>
-                <a:t>교육자료</a:t>
-              </a:r>
-            </a:p>
-            <a:p>
-              <a:pPr marL="88900" indent="-88900">
-                <a:buClr>
-                  <a:srgbClr val="00B0F0"/>
-                </a:buClr>
-                <a:buFont typeface="Arial" panose="020B0604020202020204" pitchFamily="34" charset="0"/>
-                <a:buChar char="•"/>
-              </a:pPr>
-              <a:r>
-                <a:rPr lang="ko-KR" altLang="en-US" sz="900" b="1" dirty="0">
-                  <a:latin typeface="KoPub돋움체 Bold" panose="00000800000000000000" pitchFamily="2" charset="-127"/>
-                  <a:ea typeface="KoPub돋움체 Bold" panose="00000800000000000000" pitchFamily="2" charset="-127"/>
-                </a:rPr>
-                <a:t>요청</a:t>
-              </a:r>
-            </a:p>
-            <a:p>
-              <a:pPr marL="88900" indent="-88900">
-                <a:buClr>
-                  <a:srgbClr val="00B0F0"/>
-                </a:buClr>
-                <a:buFont typeface="Arial" panose="020B0604020202020204" pitchFamily="34" charset="0"/>
-                <a:buChar char="•"/>
-              </a:pPr>
-              <a:r>
-                <a:rPr lang="ko-KR" altLang="en-US" sz="900" b="1" dirty="0">
-                  <a:latin typeface="KoPub돋움체 Bold" panose="00000800000000000000" pitchFamily="2" charset="-127"/>
-                  <a:ea typeface="KoPub돋움체 Bold" panose="00000800000000000000" pitchFamily="2" charset="-127"/>
-                </a:rPr>
-                <a:t>지표</a:t>
-              </a:r>
-            </a:p>
-          </p:txBody>
-        </p:sp>
-      </p:grpSp>
+          <a:prstGeom prst="rect">
+            <a:avLst/>
+          </a:prstGeom>
+          <a:noFill/>
+        </p:spPr>
+        <p:txBody>
+          <a:bodyPr wrap="none" rtlCol="0">
+            <a:spAutoFit/>
+          </a:bodyPr>
+          <a:lstStyle/>
+          <a:p>
+            <a:pPr marL="88900" indent="-88900">
+              <a:lnSpc>
+                <a:spcPts val="1100"/>
+              </a:lnSpc>
+              <a:buClr>
+                <a:srgbClr val="00B0F0"/>
+              </a:buClr>
+              <a:buFont typeface="Arial" panose="020B0604020202020204" pitchFamily="34" charset="0"/>
+              <a:buChar char="•"/>
+            </a:pPr>
+            <a:r>
+              <a:rPr lang="en-US" altLang="ko-KR" sz="800" b="1" dirty="0">
+                <a:latin typeface="KoPub돋움체 Bold" panose="00000800000000000000" pitchFamily="2" charset="-127"/>
+                <a:ea typeface="KoPub돋움체 Bold" panose="00000800000000000000" pitchFamily="2" charset="-127"/>
+              </a:rPr>
+              <a:t>[</a:t>
+            </a:r>
+            <a:r>
+              <a:rPr lang="ko-KR" altLang="en-US" sz="800" b="1" dirty="0">
+                <a:latin typeface="KoPub돋움체 Bold" panose="00000800000000000000" pitchFamily="2" charset="-127"/>
+                <a:ea typeface="KoPub돋움체 Bold" panose="00000800000000000000" pitchFamily="2" charset="-127"/>
+              </a:rPr>
+              <a:t>식별</a:t>
+            </a:r>
+            <a:r>
+              <a:rPr lang="en-US" altLang="ko-KR" sz="800" b="1" dirty="0">
+                <a:latin typeface="KoPub돋움체 Bold" panose="00000800000000000000" pitchFamily="2" charset="-127"/>
+                <a:ea typeface="KoPub돋움체 Bold" panose="00000800000000000000" pitchFamily="2" charset="-127"/>
+              </a:rPr>
+              <a:t>] </a:t>
+            </a:r>
+            <a:r>
+              <a:rPr lang="ko-KR" altLang="en-US" sz="800" b="1" dirty="0">
+                <a:latin typeface="KoPub돋움체 Bold" panose="00000800000000000000" pitchFamily="2" charset="-127"/>
+                <a:ea typeface="KoPub돋움체 Bold" panose="00000800000000000000" pitchFamily="2" charset="-127"/>
+              </a:rPr>
+              <a:t>첫머리 </a:t>
+            </a:r>
+            <a:r>
+              <a:rPr lang="en-US" altLang="ko-KR" sz="800" b="1" dirty="0">
+                <a:latin typeface="KoPub돋움체 Bold" panose="00000800000000000000" pitchFamily="2" charset="-127"/>
+                <a:ea typeface="KoPub돋움체 Bold" panose="00000800000000000000" pitchFamily="2" charset="-127"/>
+              </a:rPr>
+              <a:t>[</a:t>
+            </a:r>
+            <a:r>
+              <a:rPr lang="ko-KR" altLang="en-US" sz="800" b="1" dirty="0">
+                <a:latin typeface="KoPub돋움체 Bold" panose="00000800000000000000" pitchFamily="2" charset="-127"/>
+                <a:ea typeface="KoPub돋움체 Bold" panose="00000800000000000000" pitchFamily="2" charset="-127"/>
+              </a:rPr>
+              <a:t>병실</a:t>
+            </a:r>
+            <a:r>
+              <a:rPr lang="en-US" altLang="ko-KR" sz="800" b="1" dirty="0">
+                <a:latin typeface="KoPub돋움체 Bold" panose="00000800000000000000" pitchFamily="2" charset="-127"/>
+                <a:ea typeface="KoPub돋움체 Bold" panose="00000800000000000000" pitchFamily="2" charset="-127"/>
+              </a:rPr>
+              <a:t>/</a:t>
+            </a:r>
+            <a:r>
+              <a:rPr lang="ko-KR" altLang="en-US" sz="800" b="1" dirty="0">
+                <a:latin typeface="KoPub돋움체 Bold" panose="00000800000000000000" pitchFamily="2" charset="-127"/>
+                <a:ea typeface="KoPub돋움체 Bold" panose="00000800000000000000" pitchFamily="2" charset="-127"/>
+              </a:rPr>
+              <a:t>성함</a:t>
+            </a:r>
+            <a:r>
+              <a:rPr lang="en-US" altLang="ko-KR" sz="800" b="1" dirty="0">
+                <a:latin typeface="KoPub돋움체 Bold" panose="00000800000000000000" pitchFamily="2" charset="-127"/>
+                <a:ea typeface="KoPub돋움체 Bold" panose="00000800000000000000" pitchFamily="2" charset="-127"/>
+              </a:rPr>
+              <a:t>/</a:t>
+            </a:r>
+            <a:r>
+              <a:rPr lang="ko-KR" altLang="en-US" sz="800" b="1" dirty="0">
+                <a:latin typeface="KoPub돋움체 Bold" panose="00000800000000000000" pitchFamily="2" charset="-127"/>
+                <a:ea typeface="KoPub돋움체 Bold" panose="00000800000000000000" pitchFamily="2" charset="-127"/>
+              </a:rPr>
+              <a:t>사유</a:t>
+            </a:r>
+            <a:r>
+              <a:rPr lang="en-US" altLang="ko-KR" sz="800" b="1" dirty="0">
+                <a:latin typeface="KoPub돋움체 Bold" panose="00000800000000000000" pitchFamily="2" charset="-127"/>
+                <a:ea typeface="KoPub돋움체 Bold" panose="00000800000000000000" pitchFamily="2" charset="-127"/>
+              </a:rPr>
+              <a:t>]</a:t>
+            </a:r>
+            <a:r>
+              <a:rPr lang="ko-KR" altLang="en-US" sz="800" b="1" dirty="0">
+                <a:latin typeface="KoPub돋움체 Bold" panose="00000800000000000000" pitchFamily="2" charset="-127"/>
+                <a:ea typeface="KoPub돋움체 Bold" panose="00000800000000000000" pitchFamily="2" charset="-127"/>
+              </a:rPr>
+              <a:t>필수 기재</a:t>
+            </a:r>
+          </a:p>
+          <a:p>
+            <a:pPr marL="88900" indent="-88900">
+              <a:lnSpc>
+                <a:spcPts val="1100"/>
+              </a:lnSpc>
+              <a:buClr>
+                <a:srgbClr val="00B0F0"/>
+              </a:buClr>
+              <a:buFont typeface="Arial" panose="020B0604020202020204" pitchFamily="34" charset="0"/>
+              <a:buChar char="•"/>
+            </a:pPr>
+            <a:r>
+              <a:rPr lang="en-US" altLang="ko-KR" sz="800" b="1" dirty="0">
+                <a:latin typeface="KoPub돋움체 Bold" panose="00000800000000000000" pitchFamily="2" charset="-127"/>
+                <a:ea typeface="KoPub돋움체 Bold" panose="00000800000000000000" pitchFamily="2" charset="-127"/>
+              </a:rPr>
+              <a:t>[</a:t>
+            </a:r>
+            <a:r>
+              <a:rPr lang="ko-KR" altLang="en-US" sz="800" b="1" dirty="0">
+                <a:latin typeface="KoPub돋움체 Bold" panose="00000800000000000000" pitchFamily="2" charset="-127"/>
+                <a:ea typeface="KoPub돋움체 Bold" panose="00000800000000000000" pitchFamily="2" charset="-127"/>
+              </a:rPr>
+              <a:t>공유</a:t>
+            </a:r>
+            <a:r>
+              <a:rPr lang="en-US" altLang="ko-KR" sz="800" b="1" dirty="0">
+                <a:latin typeface="KoPub돋움체 Bold" panose="00000800000000000000" pitchFamily="2" charset="-127"/>
+                <a:ea typeface="KoPub돋움체 Bold" panose="00000800000000000000" pitchFamily="2" charset="-127"/>
+              </a:rPr>
+              <a:t>] </a:t>
+            </a:r>
+            <a:r>
+              <a:rPr lang="ko-KR" altLang="en-US" sz="800" b="1" dirty="0">
+                <a:latin typeface="KoPub돋움체 Bold" panose="00000800000000000000" pitchFamily="2" charset="-127"/>
+                <a:ea typeface="KoPub돋움체 Bold" panose="00000800000000000000" pitchFamily="2" charset="-127"/>
+              </a:rPr>
+              <a:t>결정 사항의 </a:t>
+            </a:r>
+            <a:r>
+              <a:rPr lang="ko-KR" altLang="en-US" sz="800" b="1" dirty="0" err="1">
+                <a:latin typeface="KoPub돋움체 Bold" panose="00000800000000000000" pitchFamily="2" charset="-127"/>
+                <a:ea typeface="KoPub돋움체 Bold" panose="00000800000000000000" pitchFamily="2" charset="-127"/>
+              </a:rPr>
+              <a:t>선제적</a:t>
+            </a:r>
+            <a:r>
+              <a:rPr lang="ko-KR" altLang="en-US" sz="800" b="1" dirty="0">
+                <a:latin typeface="KoPub돋움체 Bold" panose="00000800000000000000" pitchFamily="2" charset="-127"/>
+                <a:ea typeface="KoPub돋움체 Bold" panose="00000800000000000000" pitchFamily="2" charset="-127"/>
+              </a:rPr>
+              <a:t> 알림 </a:t>
+            </a:r>
+            <a:r>
+              <a:rPr lang="en-US" altLang="ko-KR" sz="800" b="1" dirty="0">
+                <a:latin typeface="KoPub돋움체 Bold" panose="00000800000000000000" pitchFamily="2" charset="-127"/>
+                <a:ea typeface="KoPub돋움체 Bold" panose="00000800000000000000" pitchFamily="2" charset="-127"/>
+              </a:rPr>
+              <a:t>(PA ↔ </a:t>
+            </a:r>
+            <a:r>
+              <a:rPr lang="ko-KR" altLang="en-US" sz="800" b="1" dirty="0">
+                <a:latin typeface="KoPub돋움체 Bold" panose="00000800000000000000" pitchFamily="2" charset="-127"/>
+                <a:ea typeface="KoPub돋움체 Bold" panose="00000800000000000000" pitchFamily="2" charset="-127"/>
+              </a:rPr>
+              <a:t>병동</a:t>
+            </a:r>
+            <a:r>
+              <a:rPr lang="en-US" altLang="ko-KR" sz="800" b="1" dirty="0">
+                <a:latin typeface="KoPub돋움체 Bold" panose="00000800000000000000" pitchFamily="2" charset="-127"/>
+                <a:ea typeface="KoPub돋움체 Bold" panose="00000800000000000000" pitchFamily="2" charset="-127"/>
+              </a:rPr>
+              <a:t>)</a:t>
+            </a:r>
+          </a:p>
+          <a:p>
+            <a:pPr marL="88900" indent="-88900">
+              <a:lnSpc>
+                <a:spcPts val="1100"/>
+              </a:lnSpc>
+              <a:buClr>
+                <a:srgbClr val="00B0F0"/>
+              </a:buClr>
+              <a:buFont typeface="Arial" panose="020B0604020202020204" pitchFamily="34" charset="0"/>
+              <a:buChar char="•"/>
+            </a:pPr>
+            <a:r>
+              <a:rPr lang="en-US" altLang="ko-KR" sz="800" b="1" dirty="0">
+                <a:latin typeface="KoPub돋움체 Bold" panose="00000800000000000000" pitchFamily="2" charset="-127"/>
+                <a:ea typeface="KoPub돋움체 Bold" panose="00000800000000000000" pitchFamily="2" charset="-127"/>
+              </a:rPr>
+              <a:t>[</a:t>
+            </a:r>
+            <a:r>
+              <a:rPr lang="ko-KR" altLang="en-US" sz="800" b="1" dirty="0">
+                <a:latin typeface="KoPub돋움체 Bold" panose="00000800000000000000" pitchFamily="2" charset="-127"/>
+                <a:ea typeface="KoPub돋움체 Bold" panose="00000800000000000000" pitchFamily="2" charset="-127"/>
+              </a:rPr>
+              <a:t>원칙</a:t>
+            </a:r>
+            <a:r>
+              <a:rPr lang="en-US" altLang="ko-KR" sz="800" b="1" dirty="0">
+                <a:latin typeface="KoPub돋움체 Bold" panose="00000800000000000000" pitchFamily="2" charset="-127"/>
+                <a:ea typeface="KoPub돋움체 Bold" panose="00000800000000000000" pitchFamily="2" charset="-127"/>
+              </a:rPr>
+              <a:t>] </a:t>
+            </a:r>
+            <a:r>
+              <a:rPr lang="ko-KR" altLang="en-US" sz="800" b="1" dirty="0">
+                <a:latin typeface="KoPub돋움체 Bold" panose="00000800000000000000" pitchFamily="2" charset="-127"/>
+                <a:ea typeface="KoPub돋움체 Bold" panose="00000800000000000000" pitchFamily="2" charset="-127"/>
+              </a:rPr>
+              <a:t>공식 채널</a:t>
+            </a:r>
+            <a:r>
+              <a:rPr lang="en-US" altLang="ko-KR" sz="800" b="1" dirty="0">
+                <a:latin typeface="KoPub돋움체 Bold" panose="00000800000000000000" pitchFamily="2" charset="-127"/>
+                <a:ea typeface="KoPub돋움체 Bold" panose="00000800000000000000" pitchFamily="2" charset="-127"/>
+              </a:rPr>
+              <a:t>(EMR/</a:t>
+            </a:r>
+            <a:r>
+              <a:rPr lang="ko-KR" altLang="en-US" sz="800" b="1" dirty="0">
+                <a:latin typeface="KoPub돋움체 Bold" panose="00000800000000000000" pitchFamily="2" charset="-127"/>
+                <a:ea typeface="KoPub돋움체 Bold" panose="00000800000000000000" pitchFamily="2" charset="-127"/>
+              </a:rPr>
+              <a:t>유선</a:t>
+            </a:r>
+            <a:r>
+              <a:rPr lang="en-US" altLang="ko-KR" sz="800" b="1" dirty="0">
+                <a:latin typeface="KoPub돋움체 Bold" panose="00000800000000000000" pitchFamily="2" charset="-127"/>
+                <a:ea typeface="KoPub돋움체 Bold" panose="00000800000000000000" pitchFamily="2" charset="-127"/>
+              </a:rPr>
+              <a:t>) </a:t>
+            </a:r>
+            <a:r>
+              <a:rPr lang="ko-KR" altLang="en-US" sz="800" b="1" dirty="0">
+                <a:latin typeface="KoPub돋움체 Bold" panose="00000800000000000000" pitchFamily="2" charset="-127"/>
+                <a:ea typeface="KoPub돋움체 Bold" panose="00000800000000000000" pitchFamily="2" charset="-127"/>
+              </a:rPr>
+              <a:t>활용 </a:t>
+            </a:r>
+            <a:r>
+              <a:rPr lang="en-US" altLang="ko-KR" sz="800" b="1" dirty="0">
+                <a:latin typeface="KoPub돋움체 Bold" panose="00000800000000000000" pitchFamily="2" charset="-127"/>
+                <a:ea typeface="KoPub돋움체 Bold" panose="00000800000000000000" pitchFamily="2" charset="-127"/>
+              </a:rPr>
+              <a:t>(</a:t>
+            </a:r>
+            <a:r>
+              <a:rPr lang="ko-KR" altLang="en-US" sz="800" b="1" dirty="0">
+                <a:latin typeface="KoPub돋움체 Bold" panose="00000800000000000000" pitchFamily="2" charset="-127"/>
+                <a:ea typeface="KoPub돋움체 Bold" panose="00000800000000000000" pitchFamily="2" charset="-127"/>
+              </a:rPr>
+              <a:t>수술</a:t>
+            </a:r>
+            <a:r>
+              <a:rPr lang="en-US" altLang="ko-KR" sz="800" b="1" dirty="0">
+                <a:latin typeface="KoPub돋움체 Bold" panose="00000800000000000000" pitchFamily="2" charset="-127"/>
+                <a:ea typeface="KoPub돋움체 Bold" panose="00000800000000000000" pitchFamily="2" charset="-127"/>
+              </a:rPr>
+              <a:t>, </a:t>
+            </a:r>
+            <a:r>
+              <a:rPr lang="ko-KR" altLang="en-US" sz="800" b="1" dirty="0">
+                <a:latin typeface="KoPub돋움체 Bold" panose="00000800000000000000" pitchFamily="2" charset="-127"/>
+                <a:ea typeface="KoPub돋움체 Bold" panose="00000800000000000000" pitchFamily="2" charset="-127"/>
+              </a:rPr>
+              <a:t>검사 결과 보고</a:t>
+            </a:r>
+            <a:r>
+              <a:rPr lang="en-US" altLang="ko-KR" sz="800" b="1" dirty="0">
+                <a:latin typeface="KoPub돋움체 Bold" panose="00000800000000000000" pitchFamily="2" charset="-127"/>
+                <a:ea typeface="KoPub돋움체 Bold" panose="00000800000000000000" pitchFamily="2" charset="-127"/>
+              </a:rPr>
+              <a:t>)</a:t>
+            </a:r>
+          </a:p>
+          <a:p>
+            <a:pPr marL="88900" indent="-88900">
+              <a:lnSpc>
+                <a:spcPts val="1100"/>
+              </a:lnSpc>
+              <a:buClr>
+                <a:srgbClr val="00B0F0"/>
+              </a:buClr>
+              <a:buFont typeface="Arial" panose="020B0604020202020204" pitchFamily="34" charset="0"/>
+              <a:buChar char="•"/>
+            </a:pPr>
+            <a:r>
+              <a:rPr lang="en-US" altLang="ko-KR" sz="800" b="1" dirty="0">
+                <a:latin typeface="KoPub돋움체 Bold" panose="00000800000000000000" pitchFamily="2" charset="-127"/>
+                <a:ea typeface="KoPub돋움체 Bold" panose="00000800000000000000" pitchFamily="2" charset="-127"/>
+              </a:rPr>
+              <a:t>[</a:t>
+            </a:r>
+            <a:r>
+              <a:rPr lang="ko-KR" altLang="en-US" sz="800" b="1" dirty="0">
+                <a:latin typeface="KoPub돋움체 Bold" panose="00000800000000000000" pitchFamily="2" charset="-127"/>
+                <a:ea typeface="KoPub돋움체 Bold" panose="00000800000000000000" pitchFamily="2" charset="-127"/>
+              </a:rPr>
+              <a:t>완결</a:t>
+            </a:r>
+            <a:r>
+              <a:rPr lang="en-US" altLang="ko-KR" sz="800" b="1" dirty="0">
+                <a:latin typeface="KoPub돋움체 Bold" panose="00000800000000000000" pitchFamily="2" charset="-127"/>
+                <a:ea typeface="KoPub돋움체 Bold" panose="00000800000000000000" pitchFamily="2" charset="-127"/>
+              </a:rPr>
+              <a:t>] [</a:t>
+            </a:r>
+            <a:r>
+              <a:rPr lang="ko-KR" altLang="en-US" sz="800" b="1" dirty="0">
+                <a:latin typeface="KoPub돋움체 Bold" panose="00000800000000000000" pitchFamily="2" charset="-127"/>
+                <a:ea typeface="KoPub돋움체 Bold" panose="00000800000000000000" pitchFamily="2" charset="-127"/>
+              </a:rPr>
+              <a:t>답장</a:t>
+            </a:r>
+            <a:r>
+              <a:rPr lang="en-US" altLang="ko-KR" sz="800" b="1" dirty="0">
+                <a:latin typeface="KoPub돋움체 Bold" panose="00000800000000000000" pitchFamily="2" charset="-127"/>
+                <a:ea typeface="KoPub돋움체 Bold" panose="00000800000000000000" pitchFamily="2" charset="-127"/>
+              </a:rPr>
+              <a:t>(Reply)]</a:t>
+            </a:r>
+            <a:r>
+              <a:rPr lang="ko-KR" altLang="en-US" sz="800" b="1" dirty="0">
+                <a:latin typeface="KoPub돋움체 Bold" panose="00000800000000000000" pitchFamily="2" charset="-127"/>
+                <a:ea typeface="KoPub돋움체 Bold" panose="00000800000000000000" pitchFamily="2" charset="-127"/>
+              </a:rPr>
+              <a:t>기능 필수 활용</a:t>
+            </a:r>
+          </a:p>
+          <a:p>
+            <a:pPr marL="88900" indent="-88900">
+              <a:lnSpc>
+                <a:spcPts val="1100"/>
+              </a:lnSpc>
+              <a:buClr>
+                <a:srgbClr val="00B0F0"/>
+              </a:buClr>
+              <a:buFont typeface="Arial" panose="020B0604020202020204" pitchFamily="34" charset="0"/>
+              <a:buChar char="•"/>
+            </a:pPr>
+            <a:r>
+              <a:rPr lang="en-US" altLang="ko-KR" sz="800" b="1" dirty="0">
+                <a:latin typeface="KoPub돋움체 Bold" panose="00000800000000000000" pitchFamily="2" charset="-127"/>
+                <a:ea typeface="KoPub돋움체 Bold" panose="00000800000000000000" pitchFamily="2" charset="-127"/>
+              </a:rPr>
+              <a:t>[</a:t>
+            </a:r>
+            <a:r>
+              <a:rPr lang="ko-KR" altLang="en-US" sz="800" b="1" dirty="0">
+                <a:latin typeface="KoPub돋움체 Bold" panose="00000800000000000000" pitchFamily="2" charset="-127"/>
+                <a:ea typeface="KoPub돋움체 Bold" panose="00000800000000000000" pitchFamily="2" charset="-127"/>
+              </a:rPr>
+              <a:t>대응</a:t>
+            </a:r>
+            <a:r>
+              <a:rPr lang="en-US" altLang="ko-KR" sz="800" b="1" dirty="0">
+                <a:latin typeface="KoPub돋움체 Bold" panose="00000800000000000000" pitchFamily="2" charset="-127"/>
+                <a:ea typeface="KoPub돋움체 Bold" panose="00000800000000000000" pitchFamily="2" charset="-127"/>
+              </a:rPr>
+              <a:t>] </a:t>
+            </a:r>
+            <a:r>
+              <a:rPr lang="ko-KR" altLang="en-US" sz="800" b="1" dirty="0">
+                <a:latin typeface="KoPub돋움체 Bold" panose="00000800000000000000" pitchFamily="2" charset="-127"/>
+                <a:ea typeface="KoPub돋움체 Bold" panose="00000800000000000000" pitchFamily="2" charset="-127"/>
+              </a:rPr>
+              <a:t>메신저 응답 </a:t>
+            </a:r>
+            <a:r>
+              <a:rPr lang="en-US" altLang="ko-KR" sz="800" b="1" dirty="0">
+                <a:latin typeface="KoPub돋움체 Bold" panose="00000800000000000000" pitchFamily="2" charset="-127"/>
+                <a:ea typeface="KoPub돋움체 Bold" panose="00000800000000000000" pitchFamily="2" charset="-127"/>
+              </a:rPr>
+              <a:t>'10</a:t>
+            </a:r>
+            <a:r>
+              <a:rPr lang="ko-KR" altLang="en-US" sz="800" b="1" dirty="0">
+                <a:latin typeface="KoPub돋움체 Bold" panose="00000800000000000000" pitchFamily="2" charset="-127"/>
+                <a:ea typeface="KoPub돋움체 Bold" panose="00000800000000000000" pitchFamily="2" charset="-127"/>
+              </a:rPr>
+              <a:t>분 룰</a:t>
+            </a:r>
+            <a:r>
+              <a:rPr lang="en-US" altLang="ko-KR" sz="800" b="1" dirty="0">
+                <a:latin typeface="KoPub돋움체 Bold" panose="00000800000000000000" pitchFamily="2" charset="-127"/>
+                <a:ea typeface="KoPub돋움체 Bold" panose="00000800000000000000" pitchFamily="2" charset="-127"/>
+              </a:rPr>
+              <a:t>(Rule)' </a:t>
+            </a:r>
+            <a:r>
+              <a:rPr lang="ko-KR" altLang="en-US" sz="800" b="1" dirty="0">
+                <a:latin typeface="KoPub돋움체 Bold" panose="00000800000000000000" pitchFamily="2" charset="-127"/>
+                <a:ea typeface="KoPub돋움체 Bold" panose="00000800000000000000" pitchFamily="2" charset="-127"/>
+              </a:rPr>
+              <a:t>적용</a:t>
+            </a:r>
+          </a:p>
+        </p:txBody>
+      </p:sp>
     </p:spTree>
     <p:extLst>
       <p:ext uri="{BB962C8B-B14F-4D97-AF65-F5344CB8AC3E}">
-        <p14:creationId xmlns:p14="http://schemas.microsoft.com/office/powerpoint/2010/main" val="3591184894"/>
+        <p14:creationId xmlns:p14="http://schemas.microsoft.com/office/powerpoint/2010/main" val="3268644569"/>
       </p:ext>
     </p:extLst>
   </p:cSld>
@@ -8559,7 +9104,7 @@
         <p:cNvPr id="1" name="">
           <a:extLst>
             <a:ext uri="{FF2B5EF4-FFF2-40B4-BE49-F238E27FC236}">
-              <a16:creationId xmlns:a16="http://schemas.microsoft.com/office/drawing/2014/main" id="{E9A2820A-B4D2-E46D-10B9-F8ED4B428E92}"/>
+              <a16:creationId xmlns:a16="http://schemas.microsoft.com/office/drawing/2014/main" id="{97F6C89A-D6B5-51CF-8CB2-D187420BD9EC}"/>
             </a:ext>
           </a:extLst>
         </p:cNvPr>
@@ -8579,7 +9124,7 @@
           <p:cNvPr id="3" name="TextBox 2">
             <a:extLst>
               <a:ext uri="{FF2B5EF4-FFF2-40B4-BE49-F238E27FC236}">
-                <a16:creationId xmlns:a16="http://schemas.microsoft.com/office/drawing/2014/main" id="{44FF95E4-3D72-A57A-28CB-829BED66AB1C}"/>
+                <a16:creationId xmlns:a16="http://schemas.microsoft.com/office/drawing/2014/main" id="{E0D98137-0338-4CA6-6A50-A070AA4D2BC5}"/>
               </a:ext>
             </a:extLst>
           </p:cNvPr>
@@ -8607,21 +9152,7 @@
                 <a:latin typeface="KoPub돋움체 Bold" panose="00000800000000000000" pitchFamily="2" charset="-127"/>
                 <a:ea typeface="KoPub돋움체 Bold" panose="00000800000000000000" pitchFamily="2" charset="-127"/>
               </a:rPr>
-              <a:t>순천향대학교 천안병원 </a:t>
-            </a:r>
-            <a:r>
-              <a:rPr lang="en-US" altLang="ko-KR" sz="600" b="1" spc="-11" dirty="0">
-                <a:latin typeface="KoPub돋움체 Bold" panose="00000800000000000000" pitchFamily="2" charset="-127"/>
-                <a:ea typeface="KoPub돋움체 Bold" panose="00000800000000000000" pitchFamily="2" charset="-127"/>
-              </a:rPr>
-              <a:t>| </a:t>
-            </a:r>
-            <a:r>
-              <a:rPr lang="ko-KR" altLang="en-US" sz="600" b="1" spc="-11" dirty="0">
-                <a:latin typeface="KoPub돋움체 Bold" panose="00000800000000000000" pitchFamily="2" charset="-127"/>
-                <a:ea typeface="KoPub돋움체 Bold" panose="00000800000000000000" pitchFamily="2" charset="-127"/>
-              </a:rPr>
-              <a:t>진료지원간호팀 </a:t>
+              <a:t>순천향대학교 천안병원</a:t>
             </a:r>
           </a:p>
         </p:txBody>
@@ -8631,7 +9162,7 @@
           <p:cNvPr id="17" name="그룹 16">
             <a:extLst>
               <a:ext uri="{FF2B5EF4-FFF2-40B4-BE49-F238E27FC236}">
-                <a16:creationId xmlns:a16="http://schemas.microsoft.com/office/drawing/2014/main" id="{7B3D8C7F-6FAC-B2DC-F1E3-BA0BD38482A2}"/>
+                <a16:creationId xmlns:a16="http://schemas.microsoft.com/office/drawing/2014/main" id="{4BEF0CA0-0403-BEFD-777A-E8972AECCADB}"/>
               </a:ext>
             </a:extLst>
           </p:cNvPr>
@@ -8640,8 +9171,8 @@
         </p:nvGrpSpPr>
         <p:grpSpPr>
           <a:xfrm>
-            <a:off x="2050303" y="549443"/>
-            <a:ext cx="854822" cy="766386"/>
+            <a:off x="2298353" y="149770"/>
+            <a:ext cx="746131" cy="668940"/>
             <a:chOff x="777945" y="-736888"/>
             <a:chExt cx="663508" cy="663508"/>
           </a:xfrm>
@@ -8651,7 +9182,7 @@
             <p:cNvPr id="5" name="그림 4" descr="패턴, 사각형, 예술, 직사각형이(가) 표시된 사진&#10;&#10;AI 생성 콘텐츠는 정확하지 않을 수 있습니다.">
               <a:extLst>
                 <a:ext uri="{FF2B5EF4-FFF2-40B4-BE49-F238E27FC236}">
-                  <a16:creationId xmlns:a16="http://schemas.microsoft.com/office/drawing/2014/main" id="{53D5053F-7959-FCD3-E4C2-5F1B3CE13360}"/>
+                  <a16:creationId xmlns:a16="http://schemas.microsoft.com/office/drawing/2014/main" id="{15B8EB17-8BAA-C2BE-FD82-AE2F9A5965FD}"/>
                 </a:ext>
               </a:extLst>
             </p:cNvPr>
@@ -8681,7 +9212,7 @@
             <p:cNvPr id="13" name="L 도형 12">
               <a:extLst>
                 <a:ext uri="{FF2B5EF4-FFF2-40B4-BE49-F238E27FC236}">
-                  <a16:creationId xmlns:a16="http://schemas.microsoft.com/office/drawing/2014/main" id="{F8B23C62-224A-6389-C092-78BA09772905}"/>
+                  <a16:creationId xmlns:a16="http://schemas.microsoft.com/office/drawing/2014/main" id="{F494371F-7A26-9C08-8A07-93D49DC5A8E7}"/>
                 </a:ext>
               </a:extLst>
             </p:cNvPr>
@@ -8738,7 +9269,7 @@
             <p:cNvPr id="14" name="L 도형 13">
               <a:extLst>
                 <a:ext uri="{FF2B5EF4-FFF2-40B4-BE49-F238E27FC236}">
-                  <a16:creationId xmlns:a16="http://schemas.microsoft.com/office/drawing/2014/main" id="{BA7C650D-15DD-13DD-9936-06010436CE31}"/>
+                  <a16:creationId xmlns:a16="http://schemas.microsoft.com/office/drawing/2014/main" id="{645ACC24-6AE5-4959-5566-0CBBB70100A5}"/>
                 </a:ext>
               </a:extLst>
             </p:cNvPr>
@@ -8795,7 +9326,7 @@
             <p:cNvPr id="15" name="L 도형 14">
               <a:extLst>
                 <a:ext uri="{FF2B5EF4-FFF2-40B4-BE49-F238E27FC236}">
-                  <a16:creationId xmlns:a16="http://schemas.microsoft.com/office/drawing/2014/main" id="{07C75194-149D-5FE0-5335-0B6A1DE322B5}"/>
+                  <a16:creationId xmlns:a16="http://schemas.microsoft.com/office/drawing/2014/main" id="{1DA0A7B9-8209-8B1B-EE43-1AD93BA67554}"/>
                 </a:ext>
               </a:extLst>
             </p:cNvPr>
@@ -8852,7 +9383,7 @@
             <p:cNvPr id="16" name="L 도형 15">
               <a:extLst>
                 <a:ext uri="{FF2B5EF4-FFF2-40B4-BE49-F238E27FC236}">
-                  <a16:creationId xmlns:a16="http://schemas.microsoft.com/office/drawing/2014/main" id="{904EBC0D-29A8-ACE4-0B30-55DDD97618AE}"/>
+                  <a16:creationId xmlns:a16="http://schemas.microsoft.com/office/drawing/2014/main" id="{D795E057-2E13-7630-328A-0BB064DFBF67}"/>
                 </a:ext>
               </a:extLst>
             </p:cNvPr>
@@ -8910,7 +9441,7 @@
           <p:cNvPr id="18" name="그룹 17">
             <a:extLst>
               <a:ext uri="{FF2B5EF4-FFF2-40B4-BE49-F238E27FC236}">
-                <a16:creationId xmlns:a16="http://schemas.microsoft.com/office/drawing/2014/main" id="{C66D0ED8-EF19-E284-C6AC-2510E8CE63D9}"/>
+                <a16:creationId xmlns:a16="http://schemas.microsoft.com/office/drawing/2014/main" id="{6EED756D-9CD3-3B29-4674-550E1C8C98DD}"/>
               </a:ext>
             </a:extLst>
           </p:cNvPr>
@@ -8930,7 +9461,7 @@
             <p:cNvPr id="4" name="TextBox 3">
               <a:extLst>
                 <a:ext uri="{FF2B5EF4-FFF2-40B4-BE49-F238E27FC236}">
-                  <a16:creationId xmlns:a16="http://schemas.microsoft.com/office/drawing/2014/main" id="{52897FB5-7AB8-9E90-B425-8548637A93C5}"/>
+                  <a16:creationId xmlns:a16="http://schemas.microsoft.com/office/drawing/2014/main" id="{BC64E581-7B5B-1CDC-0A00-E8F5F0F96A78}"/>
                 </a:ext>
               </a:extLst>
             </p:cNvPr>
@@ -8979,8 +9510,8 @@
               <a:r>
                 <a:rPr lang="en-US" altLang="ko-KR" sz="1400" dirty="0" err="1">
                   <a:solidFill>
-                    <a:schemeClr val="accent1">
-                      <a:lumMod val="50000"/>
+                    <a:schemeClr val="bg2">
+                      <a:lumMod val="10000"/>
                     </a:schemeClr>
                   </a:solidFill>
                   <a:latin typeface="Franklin Gothic Heavy" panose="020B0903020102020204" pitchFamily="34" charset="0"/>
@@ -8990,8 +9521,8 @@
               </a:r>
               <a:endParaRPr lang="en-US" altLang="ko-KR" sz="1400" dirty="0">
                 <a:solidFill>
-                  <a:schemeClr val="accent1">
-                    <a:lumMod val="50000"/>
+                  <a:schemeClr val="bg2">
+                    <a:lumMod val="10000"/>
                   </a:schemeClr>
                 </a:solidFill>
                 <a:latin typeface="Franklin Gothic Heavy" panose="020B0903020102020204" pitchFamily="34" charset="0"/>
@@ -9005,7 +9536,7 @@
             <p:cNvPr id="6" name="TextBox 5">
               <a:extLst>
                 <a:ext uri="{FF2B5EF4-FFF2-40B4-BE49-F238E27FC236}">
-                  <a16:creationId xmlns:a16="http://schemas.microsoft.com/office/drawing/2014/main" id="{54C445C6-7A9C-6F31-BE91-E3F66A510177}"/>
+                  <a16:creationId xmlns:a16="http://schemas.microsoft.com/office/drawing/2014/main" id="{0010CCEB-4FBA-4B4D-7B2F-49134F48AF21}"/>
                 </a:ext>
               </a:extLst>
             </p:cNvPr>
@@ -9014,8 +9545,8 @@
           </p:nvSpPr>
           <p:spPr>
             <a:xfrm>
-              <a:off x="622591" y="451833"/>
-              <a:ext cx="1729962" cy="200055"/>
+              <a:off x="660262" y="451833"/>
+              <a:ext cx="1654620" cy="200055"/>
             </a:xfrm>
             <a:prstGeom prst="rect">
               <a:avLst/>
@@ -9041,35 +9572,28 @@
                   <a:latin typeface="KoPub돋움체 Bold" panose="00000800000000000000" pitchFamily="2" charset="-127"/>
                   <a:ea typeface="KoPub돋움체 Bold" panose="00000800000000000000" pitchFamily="2" charset="-127"/>
                 </a:rPr>
-                <a:t>우리가 가치를 만드는 공간</a:t>
+                <a:t>스마트 소통 약속</a:t>
               </a:r>
               <a:r>
                 <a:rPr lang="en-US" altLang="ko-KR" sz="700" b="1" dirty="0">
                   <a:latin typeface="KoPub돋움체 Bold" panose="00000800000000000000" pitchFamily="2" charset="-127"/>
                   <a:ea typeface="KoPub돋움체 Bold" panose="00000800000000000000" pitchFamily="2" charset="-127"/>
                 </a:rPr>
-                <a:t>, </a:t>
+                <a:t>(</a:t>
               </a:r>
               <a:r>
-                <a:rPr lang="ko-KR" altLang="en-US" sz="700" b="1" dirty="0" err="1">
+                <a:rPr lang="en-US" altLang="ko-KR" sz="700" b="1" dirty="0" err="1">
                   <a:latin typeface="KoPub돋움체 Bold" panose="00000800000000000000" pitchFamily="2" charset="-127"/>
                   <a:ea typeface="KoPub돋움체 Bold" panose="00000800000000000000" pitchFamily="2" charset="-127"/>
                 </a:rPr>
-                <a:t>우리가치</a:t>
-              </a:r>
-              <a:r>
-                <a:rPr lang="ko-KR" altLang="en-US" sz="700" b="1" dirty="0">
-                  <a:latin typeface="KoPub돋움체 Bold" panose="00000800000000000000" pitchFamily="2" charset="-127"/>
-                  <a:ea typeface="KoPub돋움체 Bold" panose="00000800000000000000" pitchFamily="2" charset="-127"/>
-                </a:rPr>
-                <a:t> 허브</a:t>
+                <a:t>WeValue</a:t>
               </a:r>
               <a:r>
                 <a:rPr lang="en-US" altLang="ko-KR" sz="700" b="1" dirty="0">
                   <a:latin typeface="KoPub돋움체 Bold" panose="00000800000000000000" pitchFamily="2" charset="-127"/>
                   <a:ea typeface="KoPub돋움체 Bold" panose="00000800000000000000" pitchFamily="2" charset="-127"/>
                 </a:rPr>
-                <a:t>]</a:t>
+                <a:t> Promises)]</a:t>
               </a:r>
             </a:p>
           </p:txBody>
@@ -9079,7 +9603,7 @@
             <p:cNvPr id="10" name="그림 9">
               <a:extLst>
                 <a:ext uri="{FF2B5EF4-FFF2-40B4-BE49-F238E27FC236}">
-                  <a16:creationId xmlns:a16="http://schemas.microsoft.com/office/drawing/2014/main" id="{CBAF3D6C-A41F-BE3C-3C2A-A78F89FDF17B}"/>
+                  <a16:creationId xmlns:a16="http://schemas.microsoft.com/office/drawing/2014/main" id="{1F2E85FA-B5B4-0204-C020-CEF2963F05F8}"/>
                 </a:ext>
               </a:extLst>
             </p:cNvPr>
@@ -9109,7 +9633,7 @@
             <p:cNvPr id="30" name="그림 29">
               <a:extLst>
                 <a:ext uri="{FF2B5EF4-FFF2-40B4-BE49-F238E27FC236}">
-                  <a16:creationId xmlns:a16="http://schemas.microsoft.com/office/drawing/2014/main" id="{591357B3-E42D-AA88-F0C8-196DDE389AD5}"/>
+                  <a16:creationId xmlns:a16="http://schemas.microsoft.com/office/drawing/2014/main" id="{9B6092DC-1B2C-E575-FF2C-2EC2A7B8081B}"/>
                 </a:ext>
               </a:extLst>
             </p:cNvPr>
@@ -9135,304 +9659,435 @@
           </p:spPr>
         </p:pic>
       </p:grpSp>
-      <p:grpSp>
-        <p:nvGrpSpPr>
-          <p:cNvPr id="12" name="그룹 11">
+      <p:sp>
+        <p:nvSpPr>
+          <p:cNvPr id="31" name="TextBox 30">
             <a:extLst>
               <a:ext uri="{FF2B5EF4-FFF2-40B4-BE49-F238E27FC236}">
-                <a16:creationId xmlns:a16="http://schemas.microsoft.com/office/drawing/2014/main" id="{C76EDDA3-0179-EE4D-B001-73D6EA954789}"/>
+                <a16:creationId xmlns:a16="http://schemas.microsoft.com/office/drawing/2014/main" id="{3A4A9F9E-6719-4DA0-066E-CFFB141C3E77}"/>
               </a:ext>
             </a:extLst>
           </p:cNvPr>
-          <p:cNvGrpSpPr/>
+          <p:cNvSpPr txBox="1"/>
           <p:nvPr/>
-        </p:nvGrpSpPr>
-        <p:grpSpPr>
+        </p:nvSpPr>
+        <p:spPr>
           <a:xfrm>
-            <a:off x="205429" y="781187"/>
-            <a:ext cx="1731561" cy="784830"/>
-            <a:chOff x="796295" y="778765"/>
-            <a:chExt cx="1731561" cy="784830"/>
+            <a:off x="82843" y="781989"/>
+            <a:ext cx="2592376" cy="790345"/>
           </a:xfrm>
-        </p:grpSpPr>
-        <p:sp>
-          <p:nvSpPr>
-            <p:cNvPr id="26" name="TextBox 25">
-              <a:extLst>
-                <a:ext uri="{FF2B5EF4-FFF2-40B4-BE49-F238E27FC236}">
-                  <a16:creationId xmlns:a16="http://schemas.microsoft.com/office/drawing/2014/main" id="{C8DF4D13-C70B-2F32-B5F3-B6EB82F96C1B}"/>
-                </a:ext>
-              </a:extLst>
-            </p:cNvPr>
-            <p:cNvSpPr txBox="1"/>
-            <p:nvPr/>
-          </p:nvSpPr>
-          <p:spPr>
-            <a:xfrm>
-              <a:off x="1495201" y="778765"/>
-              <a:ext cx="1032655" cy="784830"/>
-            </a:xfrm>
-            <a:prstGeom prst="rect">
-              <a:avLst/>
-            </a:prstGeom>
-            <a:noFill/>
-          </p:spPr>
-          <p:txBody>
-            <a:bodyPr wrap="none" rtlCol="0">
-              <a:spAutoFit/>
-            </a:bodyPr>
-            <a:lstStyle/>
-            <a:p>
-              <a:r>
-                <a:rPr lang="en-US" altLang="ko-KR" sz="900" dirty="0">
-                  <a:latin typeface="KoPub돋움체 Light" panose="00000300000000000000" pitchFamily="2" charset="-127"/>
-                  <a:ea typeface="KoPub돋움체 Light" panose="00000300000000000000" pitchFamily="2" charset="-127"/>
-                </a:rPr>
-                <a:t>"</a:t>
-              </a:r>
-              <a:r>
-                <a:rPr lang="ko-KR" altLang="en-US" sz="900" dirty="0">
-                  <a:latin typeface="KoPub돋움체 Light" panose="00000300000000000000" pitchFamily="2" charset="-127"/>
-                  <a:ea typeface="KoPub돋움체 Light" panose="00000300000000000000" pitchFamily="2" charset="-127"/>
-                </a:rPr>
-                <a:t>함께하는 즐거움</a:t>
-              </a:r>
-              <a:r>
-                <a:rPr lang="en-US" altLang="ko-KR" sz="900" dirty="0">
-                  <a:latin typeface="KoPub돋움체 Light" panose="00000300000000000000" pitchFamily="2" charset="-127"/>
-                  <a:ea typeface="KoPub돋움체 Light" panose="00000300000000000000" pitchFamily="2" charset="-127"/>
-                </a:rPr>
-                <a:t>“</a:t>
-              </a:r>
-            </a:p>
-            <a:p>
-              <a:r>
-                <a:rPr lang="en-US" altLang="ko-KR" sz="900" dirty="0">
-                  <a:latin typeface="KoPub돋움체 Light" panose="00000300000000000000" pitchFamily="2" charset="-127"/>
-                  <a:ea typeface="KoPub돋움체 Light" panose="00000300000000000000" pitchFamily="2" charset="-127"/>
-                </a:rPr>
-                <a:t>"</a:t>
-              </a:r>
-              <a:r>
-                <a:rPr lang="ko-KR" altLang="en-US" sz="900" dirty="0">
-                  <a:latin typeface="KoPub돋움체 Light" panose="00000300000000000000" pitchFamily="2" charset="-127"/>
-                  <a:ea typeface="KoPub돋움체 Light" panose="00000300000000000000" pitchFamily="2" charset="-127"/>
-                </a:rPr>
-                <a:t>명확한 약속</a:t>
-              </a:r>
-              <a:r>
-                <a:rPr lang="en-US" altLang="ko-KR" sz="900" dirty="0">
-                  <a:latin typeface="KoPub돋움체 Light" panose="00000300000000000000" pitchFamily="2" charset="-127"/>
-                  <a:ea typeface="KoPub돋움체 Light" panose="00000300000000000000" pitchFamily="2" charset="-127"/>
-                </a:rPr>
-                <a:t>"</a:t>
-              </a:r>
-              <a:endParaRPr lang="ko-KR" altLang="en-US" sz="900" dirty="0">
-                <a:latin typeface="KoPub돋움체 Light" panose="00000300000000000000" pitchFamily="2" charset="-127"/>
-                <a:ea typeface="KoPub돋움체 Light" panose="00000300000000000000" pitchFamily="2" charset="-127"/>
-              </a:endParaRPr>
-            </a:p>
-            <a:p>
-              <a:r>
-                <a:rPr lang="en-US" altLang="ko-KR" sz="900" dirty="0">
-                  <a:latin typeface="KoPub돋움체 Light" panose="00000300000000000000" pitchFamily="2" charset="-127"/>
-                  <a:ea typeface="KoPub돋움체 Light" panose="00000300000000000000" pitchFamily="2" charset="-127"/>
-                </a:rPr>
-                <a:t>"</a:t>
-              </a:r>
-              <a:r>
-                <a:rPr lang="ko-KR" altLang="en-US" sz="900" dirty="0">
-                  <a:latin typeface="KoPub돋움체 Light" panose="00000300000000000000" pitchFamily="2" charset="-127"/>
-                  <a:ea typeface="KoPub돋움체 Light" panose="00000300000000000000" pitchFamily="2" charset="-127"/>
-                </a:rPr>
-                <a:t>한눈에 보는 실무</a:t>
-              </a:r>
-              <a:r>
-                <a:rPr lang="en-US" altLang="ko-KR" sz="900" dirty="0">
-                  <a:latin typeface="KoPub돋움체 Light" panose="00000300000000000000" pitchFamily="2" charset="-127"/>
-                  <a:ea typeface="KoPub돋움체 Light" panose="00000300000000000000" pitchFamily="2" charset="-127"/>
-                </a:rPr>
-                <a:t>"</a:t>
-              </a:r>
-              <a:endParaRPr lang="ko-KR" altLang="en-US" sz="900" dirty="0">
-                <a:latin typeface="KoPub돋움체 Light" panose="00000300000000000000" pitchFamily="2" charset="-127"/>
-                <a:ea typeface="KoPub돋움체 Light" panose="00000300000000000000" pitchFamily="2" charset="-127"/>
-              </a:endParaRPr>
-            </a:p>
-            <a:p>
-              <a:r>
-                <a:rPr lang="en-US" altLang="ko-KR" sz="900" dirty="0">
-                  <a:latin typeface="KoPub돋움체 Light" panose="00000300000000000000" pitchFamily="2" charset="-127"/>
-                  <a:ea typeface="KoPub돋움체 Light" panose="00000300000000000000" pitchFamily="2" charset="-127"/>
-                </a:rPr>
-                <a:t>"</a:t>
-              </a:r>
-              <a:r>
-                <a:rPr lang="ko-KR" altLang="en-US" sz="900" dirty="0">
-                  <a:latin typeface="KoPub돋움체 Light" panose="00000300000000000000" pitchFamily="2" charset="-127"/>
-                  <a:ea typeface="KoPub돋움체 Light" panose="00000300000000000000" pitchFamily="2" charset="-127"/>
-                </a:rPr>
-                <a:t>현장 밀착형 지원</a:t>
-              </a:r>
-              <a:r>
-                <a:rPr lang="en-US" altLang="ko-KR" sz="900" dirty="0">
-                  <a:latin typeface="KoPub돋움체 Light" panose="00000300000000000000" pitchFamily="2" charset="-127"/>
-                  <a:ea typeface="KoPub돋움체 Light" panose="00000300000000000000" pitchFamily="2" charset="-127"/>
-                </a:rPr>
-                <a:t>"</a:t>
-              </a:r>
-              <a:endParaRPr lang="ko-KR" altLang="en-US" sz="900" dirty="0">
-                <a:latin typeface="KoPub돋움체 Light" panose="00000300000000000000" pitchFamily="2" charset="-127"/>
-                <a:ea typeface="KoPub돋움체 Light" panose="00000300000000000000" pitchFamily="2" charset="-127"/>
-              </a:endParaRPr>
-            </a:p>
-            <a:p>
-              <a:r>
-                <a:rPr lang="en-US" altLang="ko-KR" sz="900" dirty="0">
-                  <a:latin typeface="KoPub돋움체 Light" panose="00000300000000000000" pitchFamily="2" charset="-127"/>
-                  <a:ea typeface="KoPub돋움체 Light" panose="00000300000000000000" pitchFamily="2" charset="-127"/>
-                </a:rPr>
-                <a:t>"</a:t>
-              </a:r>
-              <a:r>
-                <a:rPr lang="ko-KR" altLang="en-US" sz="900" dirty="0">
-                  <a:latin typeface="KoPub돋움체 Light" panose="00000300000000000000" pitchFamily="2" charset="-127"/>
-                  <a:ea typeface="KoPub돋움체 Light" panose="00000300000000000000" pitchFamily="2" charset="-127"/>
-                </a:rPr>
-                <a:t>변화의 체감</a:t>
-              </a:r>
-              <a:r>
-                <a:rPr lang="en-US" altLang="ko-KR" sz="900" dirty="0">
-                  <a:latin typeface="KoPub돋움체 Light" panose="00000300000000000000" pitchFamily="2" charset="-127"/>
-                  <a:ea typeface="KoPub돋움체 Light" panose="00000300000000000000" pitchFamily="2" charset="-127"/>
-                </a:rPr>
-                <a:t>"</a:t>
-              </a:r>
-              <a:endParaRPr lang="ko-KR" altLang="en-US" sz="900" dirty="0">
-                <a:latin typeface="KoPub돋움체 Light" panose="00000300000000000000" pitchFamily="2" charset="-127"/>
-                <a:ea typeface="KoPub돋움체 Light" panose="00000300000000000000" pitchFamily="2" charset="-127"/>
-              </a:endParaRPr>
-            </a:p>
-          </p:txBody>
-        </p:sp>
-        <p:sp>
-          <p:nvSpPr>
-            <p:cNvPr id="31" name="TextBox 30">
-              <a:extLst>
-                <a:ext uri="{FF2B5EF4-FFF2-40B4-BE49-F238E27FC236}">
-                  <a16:creationId xmlns:a16="http://schemas.microsoft.com/office/drawing/2014/main" id="{925BF914-A40D-9720-C2CE-C62A45D9DB8B}"/>
-                </a:ext>
-              </a:extLst>
-            </p:cNvPr>
-            <p:cNvSpPr txBox="1"/>
-            <p:nvPr/>
-          </p:nvSpPr>
-          <p:spPr>
-            <a:xfrm>
-              <a:off x="796295" y="778765"/>
-              <a:ext cx="813043" cy="784830"/>
-            </a:xfrm>
-            <a:prstGeom prst="rect">
-              <a:avLst/>
-            </a:prstGeom>
-            <a:noFill/>
-          </p:spPr>
-          <p:txBody>
-            <a:bodyPr wrap="none" rtlCol="0">
-              <a:spAutoFit/>
-            </a:bodyPr>
-            <a:lstStyle/>
-            <a:p>
-              <a:pPr marL="88900" indent="-88900">
-                <a:buClr>
-                  <a:srgbClr val="00B0F0"/>
-                </a:buClr>
-                <a:buFont typeface="Arial" panose="020B0604020202020204" pitchFamily="34" charset="0"/>
-                <a:buChar char="•"/>
-              </a:pPr>
-              <a:r>
-                <a:rPr lang="ko-KR" altLang="en-US" sz="900" b="1" dirty="0">
-                  <a:latin typeface="KoPub돋움체 Bold" panose="00000800000000000000" pitchFamily="2" charset="-127"/>
-                  <a:ea typeface="KoPub돋움체 Bold" panose="00000800000000000000" pitchFamily="2" charset="-127"/>
-                </a:rPr>
-                <a:t>소통의 광장</a:t>
-              </a:r>
-              <a:endParaRPr lang="en-US" altLang="ko-KR" sz="900" b="1" dirty="0">
-                <a:latin typeface="KoPub돋움체 Bold" panose="00000800000000000000" pitchFamily="2" charset="-127"/>
-                <a:ea typeface="KoPub돋움체 Bold" panose="00000800000000000000" pitchFamily="2" charset="-127"/>
-              </a:endParaRPr>
-            </a:p>
-            <a:p>
-              <a:pPr marL="88900" indent="-88900">
-                <a:buClr>
-                  <a:srgbClr val="00B0F0"/>
-                </a:buClr>
-                <a:buFont typeface="Arial" panose="020B0604020202020204" pitchFamily="34" charset="0"/>
-                <a:buChar char="•"/>
-              </a:pPr>
-              <a:r>
-                <a:rPr lang="ko-KR" altLang="en-US" sz="900" b="1" dirty="0">
-                  <a:latin typeface="KoPub돋움체 Bold" panose="00000800000000000000" pitchFamily="2" charset="-127"/>
-                  <a:ea typeface="KoPub돋움체 Bold" panose="00000800000000000000" pitchFamily="2" charset="-127"/>
-                </a:rPr>
-                <a:t>업무 기준</a:t>
-              </a:r>
-            </a:p>
-            <a:p>
-              <a:pPr marL="88900" indent="-88900">
-                <a:buClr>
-                  <a:srgbClr val="00B0F0"/>
-                </a:buClr>
-                <a:buFont typeface="Arial" panose="020B0604020202020204" pitchFamily="34" charset="0"/>
-                <a:buChar char="•"/>
-              </a:pPr>
-              <a:r>
-                <a:rPr lang="ko-KR" altLang="en-US" sz="900" b="1" dirty="0">
-                  <a:latin typeface="KoPub돋움체 Bold" panose="00000800000000000000" pitchFamily="2" charset="-127"/>
-                  <a:ea typeface="KoPub돋움체 Bold" panose="00000800000000000000" pitchFamily="2" charset="-127"/>
-                </a:rPr>
-                <a:t>교육자료</a:t>
-              </a:r>
-            </a:p>
-            <a:p>
-              <a:pPr marL="88900" indent="-88900">
-                <a:buClr>
-                  <a:srgbClr val="00B0F0"/>
-                </a:buClr>
-                <a:buFont typeface="Arial" panose="020B0604020202020204" pitchFamily="34" charset="0"/>
-                <a:buChar char="•"/>
-              </a:pPr>
-              <a:r>
-                <a:rPr lang="ko-KR" altLang="en-US" sz="900" b="1" dirty="0">
-                  <a:latin typeface="KoPub돋움체 Bold" panose="00000800000000000000" pitchFamily="2" charset="-127"/>
-                  <a:ea typeface="KoPub돋움체 Bold" panose="00000800000000000000" pitchFamily="2" charset="-127"/>
-                </a:rPr>
-                <a:t>요청</a:t>
-              </a:r>
-            </a:p>
-            <a:p>
-              <a:pPr marL="88900" indent="-88900">
-                <a:buClr>
-                  <a:srgbClr val="00B0F0"/>
-                </a:buClr>
-                <a:buFont typeface="Arial" panose="020B0604020202020204" pitchFamily="34" charset="0"/>
-                <a:buChar char="•"/>
-              </a:pPr>
-              <a:r>
-                <a:rPr lang="ko-KR" altLang="en-US" sz="900" b="1" dirty="0">
-                  <a:latin typeface="KoPub돋움체 Bold" panose="00000800000000000000" pitchFamily="2" charset="-127"/>
-                  <a:ea typeface="KoPub돋움체 Bold" panose="00000800000000000000" pitchFamily="2" charset="-127"/>
-                </a:rPr>
-                <a:t>지표</a:t>
-              </a:r>
-            </a:p>
-          </p:txBody>
-        </p:sp>
-      </p:grpSp>
+          <a:prstGeom prst="rect">
+            <a:avLst/>
+          </a:prstGeom>
+          <a:noFill/>
+        </p:spPr>
+        <p:txBody>
+          <a:bodyPr wrap="none" rtlCol="0">
+            <a:spAutoFit/>
+          </a:bodyPr>
+          <a:lstStyle/>
+          <a:p>
+            <a:pPr marL="88900" indent="-88900">
+              <a:lnSpc>
+                <a:spcPts val="1100"/>
+              </a:lnSpc>
+              <a:buClr>
+                <a:srgbClr val="00B0F0"/>
+              </a:buClr>
+              <a:buFont typeface="Arial" panose="020B0604020202020204" pitchFamily="34" charset="0"/>
+              <a:buChar char="•"/>
+            </a:pPr>
+            <a:r>
+              <a:rPr lang="en-US" altLang="ko-KR" sz="800" b="1" dirty="0">
+                <a:latin typeface="KoPub돋움체 Bold" panose="00000800000000000000" pitchFamily="2" charset="-127"/>
+                <a:ea typeface="KoPub돋움체 Bold" panose="00000800000000000000" pitchFamily="2" charset="-127"/>
+              </a:rPr>
+              <a:t>[</a:t>
+            </a:r>
+            <a:r>
+              <a:rPr lang="ko-KR" altLang="en-US" sz="800" b="1" dirty="0">
+                <a:latin typeface="KoPub돋움체 Bold" panose="00000800000000000000" pitchFamily="2" charset="-127"/>
+                <a:ea typeface="KoPub돋움체 Bold" panose="00000800000000000000" pitchFamily="2" charset="-127"/>
+              </a:rPr>
+              <a:t>식별</a:t>
+            </a:r>
+            <a:r>
+              <a:rPr lang="en-US" altLang="ko-KR" sz="800" b="1" dirty="0">
+                <a:latin typeface="KoPub돋움체 Bold" panose="00000800000000000000" pitchFamily="2" charset="-127"/>
+                <a:ea typeface="KoPub돋움체 Bold" panose="00000800000000000000" pitchFamily="2" charset="-127"/>
+              </a:rPr>
+              <a:t>] </a:t>
+            </a:r>
+            <a:r>
+              <a:rPr lang="ko-KR" altLang="en-US" sz="800" b="1" dirty="0">
+                <a:latin typeface="KoPub돋움체 Bold" panose="00000800000000000000" pitchFamily="2" charset="-127"/>
+                <a:ea typeface="KoPub돋움체 Bold" panose="00000800000000000000" pitchFamily="2" charset="-127"/>
+              </a:rPr>
+              <a:t>첫머리 </a:t>
+            </a:r>
+            <a:r>
+              <a:rPr lang="en-US" altLang="ko-KR" sz="800" b="1" dirty="0">
+                <a:latin typeface="KoPub돋움체 Bold" panose="00000800000000000000" pitchFamily="2" charset="-127"/>
+                <a:ea typeface="KoPub돋움체 Bold" panose="00000800000000000000" pitchFamily="2" charset="-127"/>
+              </a:rPr>
+              <a:t>[</a:t>
+            </a:r>
+            <a:r>
+              <a:rPr lang="ko-KR" altLang="en-US" sz="800" b="1" dirty="0">
+                <a:latin typeface="KoPub돋움체 Bold" panose="00000800000000000000" pitchFamily="2" charset="-127"/>
+                <a:ea typeface="KoPub돋움체 Bold" panose="00000800000000000000" pitchFamily="2" charset="-127"/>
+              </a:rPr>
+              <a:t>병실</a:t>
+            </a:r>
+            <a:r>
+              <a:rPr lang="en-US" altLang="ko-KR" sz="800" b="1" dirty="0">
+                <a:latin typeface="KoPub돋움체 Bold" panose="00000800000000000000" pitchFamily="2" charset="-127"/>
+                <a:ea typeface="KoPub돋움체 Bold" panose="00000800000000000000" pitchFamily="2" charset="-127"/>
+              </a:rPr>
+              <a:t>/</a:t>
+            </a:r>
+            <a:r>
+              <a:rPr lang="ko-KR" altLang="en-US" sz="800" b="1" dirty="0">
+                <a:latin typeface="KoPub돋움체 Bold" panose="00000800000000000000" pitchFamily="2" charset="-127"/>
+                <a:ea typeface="KoPub돋움체 Bold" panose="00000800000000000000" pitchFamily="2" charset="-127"/>
+              </a:rPr>
+              <a:t>성함</a:t>
+            </a:r>
+            <a:r>
+              <a:rPr lang="en-US" altLang="ko-KR" sz="800" b="1" dirty="0">
+                <a:latin typeface="KoPub돋움체 Bold" panose="00000800000000000000" pitchFamily="2" charset="-127"/>
+                <a:ea typeface="KoPub돋움체 Bold" panose="00000800000000000000" pitchFamily="2" charset="-127"/>
+              </a:rPr>
+              <a:t>/</a:t>
+            </a:r>
+            <a:r>
+              <a:rPr lang="ko-KR" altLang="en-US" sz="800" b="1" dirty="0">
+                <a:latin typeface="KoPub돋움체 Bold" panose="00000800000000000000" pitchFamily="2" charset="-127"/>
+                <a:ea typeface="KoPub돋움체 Bold" panose="00000800000000000000" pitchFamily="2" charset="-127"/>
+              </a:rPr>
+              <a:t>사유</a:t>
+            </a:r>
+            <a:r>
+              <a:rPr lang="en-US" altLang="ko-KR" sz="800" b="1" dirty="0">
+                <a:latin typeface="KoPub돋움체 Bold" panose="00000800000000000000" pitchFamily="2" charset="-127"/>
+                <a:ea typeface="KoPub돋움체 Bold" panose="00000800000000000000" pitchFamily="2" charset="-127"/>
+              </a:rPr>
+              <a:t>]</a:t>
+            </a:r>
+            <a:r>
+              <a:rPr lang="ko-KR" altLang="en-US" sz="800" b="1" dirty="0">
+                <a:latin typeface="KoPub돋움체 Bold" panose="00000800000000000000" pitchFamily="2" charset="-127"/>
+                <a:ea typeface="KoPub돋움체 Bold" panose="00000800000000000000" pitchFamily="2" charset="-127"/>
+              </a:rPr>
+              <a:t>필수 기재</a:t>
+            </a:r>
+          </a:p>
+          <a:p>
+            <a:pPr marL="88900" indent="-88900">
+              <a:lnSpc>
+                <a:spcPts val="1100"/>
+              </a:lnSpc>
+              <a:buClr>
+                <a:srgbClr val="00B0F0"/>
+              </a:buClr>
+              <a:buFont typeface="Arial" panose="020B0604020202020204" pitchFamily="34" charset="0"/>
+              <a:buChar char="•"/>
+            </a:pPr>
+            <a:r>
+              <a:rPr lang="en-US" altLang="ko-KR" sz="800" b="1" dirty="0">
+                <a:latin typeface="KoPub돋움체 Bold" panose="00000800000000000000" pitchFamily="2" charset="-127"/>
+                <a:ea typeface="KoPub돋움체 Bold" panose="00000800000000000000" pitchFamily="2" charset="-127"/>
+              </a:rPr>
+              <a:t>[</a:t>
+            </a:r>
+            <a:r>
+              <a:rPr lang="ko-KR" altLang="en-US" sz="800" b="1" dirty="0">
+                <a:latin typeface="KoPub돋움체 Bold" panose="00000800000000000000" pitchFamily="2" charset="-127"/>
+                <a:ea typeface="KoPub돋움체 Bold" panose="00000800000000000000" pitchFamily="2" charset="-127"/>
+              </a:rPr>
+              <a:t>공유</a:t>
+            </a:r>
+            <a:r>
+              <a:rPr lang="en-US" altLang="ko-KR" sz="800" b="1" dirty="0">
+                <a:latin typeface="KoPub돋움체 Bold" panose="00000800000000000000" pitchFamily="2" charset="-127"/>
+                <a:ea typeface="KoPub돋움체 Bold" panose="00000800000000000000" pitchFamily="2" charset="-127"/>
+              </a:rPr>
+              <a:t>] </a:t>
+            </a:r>
+            <a:r>
+              <a:rPr lang="ko-KR" altLang="en-US" sz="800" b="1" dirty="0">
+                <a:latin typeface="KoPub돋움체 Bold" panose="00000800000000000000" pitchFamily="2" charset="-127"/>
+                <a:ea typeface="KoPub돋움체 Bold" panose="00000800000000000000" pitchFamily="2" charset="-127"/>
+              </a:rPr>
+              <a:t>결정 사항의 </a:t>
+            </a:r>
+            <a:r>
+              <a:rPr lang="ko-KR" altLang="en-US" sz="800" b="1" dirty="0" err="1">
+                <a:latin typeface="KoPub돋움체 Bold" panose="00000800000000000000" pitchFamily="2" charset="-127"/>
+                <a:ea typeface="KoPub돋움체 Bold" panose="00000800000000000000" pitchFamily="2" charset="-127"/>
+              </a:rPr>
+              <a:t>선제적</a:t>
+            </a:r>
+            <a:r>
+              <a:rPr lang="ko-KR" altLang="en-US" sz="800" b="1" dirty="0">
+                <a:latin typeface="KoPub돋움체 Bold" panose="00000800000000000000" pitchFamily="2" charset="-127"/>
+                <a:ea typeface="KoPub돋움체 Bold" panose="00000800000000000000" pitchFamily="2" charset="-127"/>
+              </a:rPr>
+              <a:t> 알림 </a:t>
+            </a:r>
+            <a:r>
+              <a:rPr lang="en-US" altLang="ko-KR" sz="800" b="1" dirty="0">
+                <a:latin typeface="KoPub돋움체 Bold" panose="00000800000000000000" pitchFamily="2" charset="-127"/>
+                <a:ea typeface="KoPub돋움체 Bold" panose="00000800000000000000" pitchFamily="2" charset="-127"/>
+              </a:rPr>
+              <a:t>(PA ↔ </a:t>
+            </a:r>
+            <a:r>
+              <a:rPr lang="ko-KR" altLang="en-US" sz="800" b="1" dirty="0">
+                <a:latin typeface="KoPub돋움체 Bold" panose="00000800000000000000" pitchFamily="2" charset="-127"/>
+                <a:ea typeface="KoPub돋움체 Bold" panose="00000800000000000000" pitchFamily="2" charset="-127"/>
+              </a:rPr>
+              <a:t>병동</a:t>
+            </a:r>
+            <a:r>
+              <a:rPr lang="en-US" altLang="ko-KR" sz="800" b="1" dirty="0">
+                <a:latin typeface="KoPub돋움체 Bold" panose="00000800000000000000" pitchFamily="2" charset="-127"/>
+                <a:ea typeface="KoPub돋움체 Bold" panose="00000800000000000000" pitchFamily="2" charset="-127"/>
+              </a:rPr>
+              <a:t>)</a:t>
+            </a:r>
+          </a:p>
+          <a:p>
+            <a:pPr marL="88900" indent="-88900">
+              <a:lnSpc>
+                <a:spcPts val="1100"/>
+              </a:lnSpc>
+              <a:buClr>
+                <a:srgbClr val="00B0F0"/>
+              </a:buClr>
+              <a:buFont typeface="Arial" panose="020B0604020202020204" pitchFamily="34" charset="0"/>
+              <a:buChar char="•"/>
+            </a:pPr>
+            <a:r>
+              <a:rPr lang="en-US" altLang="ko-KR" sz="800" b="1" dirty="0">
+                <a:latin typeface="KoPub돋움체 Bold" panose="00000800000000000000" pitchFamily="2" charset="-127"/>
+                <a:ea typeface="KoPub돋움체 Bold" panose="00000800000000000000" pitchFamily="2" charset="-127"/>
+              </a:rPr>
+              <a:t>[</a:t>
+            </a:r>
+            <a:r>
+              <a:rPr lang="ko-KR" altLang="en-US" sz="800" b="1" dirty="0">
+                <a:latin typeface="KoPub돋움체 Bold" panose="00000800000000000000" pitchFamily="2" charset="-127"/>
+                <a:ea typeface="KoPub돋움체 Bold" panose="00000800000000000000" pitchFamily="2" charset="-127"/>
+              </a:rPr>
+              <a:t>원칙</a:t>
+            </a:r>
+            <a:r>
+              <a:rPr lang="en-US" altLang="ko-KR" sz="800" b="1" dirty="0">
+                <a:latin typeface="KoPub돋움체 Bold" panose="00000800000000000000" pitchFamily="2" charset="-127"/>
+                <a:ea typeface="KoPub돋움체 Bold" panose="00000800000000000000" pitchFamily="2" charset="-127"/>
+              </a:rPr>
+              <a:t>] </a:t>
+            </a:r>
+            <a:r>
+              <a:rPr lang="ko-KR" altLang="en-US" sz="800" b="1" dirty="0">
+                <a:latin typeface="KoPub돋움체 Bold" panose="00000800000000000000" pitchFamily="2" charset="-127"/>
+                <a:ea typeface="KoPub돋움체 Bold" panose="00000800000000000000" pitchFamily="2" charset="-127"/>
+              </a:rPr>
+              <a:t>공식 채널</a:t>
+            </a:r>
+            <a:r>
+              <a:rPr lang="en-US" altLang="ko-KR" sz="800" b="1" dirty="0">
+                <a:latin typeface="KoPub돋움체 Bold" panose="00000800000000000000" pitchFamily="2" charset="-127"/>
+                <a:ea typeface="KoPub돋움체 Bold" panose="00000800000000000000" pitchFamily="2" charset="-127"/>
+              </a:rPr>
+              <a:t>(EMR/</a:t>
+            </a:r>
+            <a:r>
+              <a:rPr lang="ko-KR" altLang="en-US" sz="800" b="1" dirty="0">
+                <a:latin typeface="KoPub돋움체 Bold" panose="00000800000000000000" pitchFamily="2" charset="-127"/>
+                <a:ea typeface="KoPub돋움체 Bold" panose="00000800000000000000" pitchFamily="2" charset="-127"/>
+              </a:rPr>
+              <a:t>유선</a:t>
+            </a:r>
+            <a:r>
+              <a:rPr lang="en-US" altLang="ko-KR" sz="800" b="1" dirty="0">
+                <a:latin typeface="KoPub돋움체 Bold" panose="00000800000000000000" pitchFamily="2" charset="-127"/>
+                <a:ea typeface="KoPub돋움체 Bold" panose="00000800000000000000" pitchFamily="2" charset="-127"/>
+              </a:rPr>
+              <a:t>) </a:t>
+            </a:r>
+            <a:r>
+              <a:rPr lang="ko-KR" altLang="en-US" sz="800" b="1" dirty="0">
+                <a:latin typeface="KoPub돋움체 Bold" panose="00000800000000000000" pitchFamily="2" charset="-127"/>
+                <a:ea typeface="KoPub돋움체 Bold" panose="00000800000000000000" pitchFamily="2" charset="-127"/>
+              </a:rPr>
+              <a:t>활용 </a:t>
+            </a:r>
+            <a:r>
+              <a:rPr lang="en-US" altLang="ko-KR" sz="800" b="1" dirty="0">
+                <a:latin typeface="KoPub돋움체 Bold" panose="00000800000000000000" pitchFamily="2" charset="-127"/>
+                <a:ea typeface="KoPub돋움체 Bold" panose="00000800000000000000" pitchFamily="2" charset="-127"/>
+              </a:rPr>
+              <a:t>(</a:t>
+            </a:r>
+            <a:r>
+              <a:rPr lang="ko-KR" altLang="en-US" sz="800" b="1" dirty="0">
+                <a:latin typeface="KoPub돋움체 Bold" panose="00000800000000000000" pitchFamily="2" charset="-127"/>
+                <a:ea typeface="KoPub돋움체 Bold" panose="00000800000000000000" pitchFamily="2" charset="-127"/>
+              </a:rPr>
+              <a:t>수술</a:t>
+            </a:r>
+            <a:r>
+              <a:rPr lang="en-US" altLang="ko-KR" sz="800" b="1" dirty="0">
+                <a:latin typeface="KoPub돋움체 Bold" panose="00000800000000000000" pitchFamily="2" charset="-127"/>
+                <a:ea typeface="KoPub돋움체 Bold" panose="00000800000000000000" pitchFamily="2" charset="-127"/>
+              </a:rPr>
+              <a:t>, </a:t>
+            </a:r>
+            <a:r>
+              <a:rPr lang="ko-KR" altLang="en-US" sz="800" b="1" dirty="0">
+                <a:latin typeface="KoPub돋움체 Bold" panose="00000800000000000000" pitchFamily="2" charset="-127"/>
+                <a:ea typeface="KoPub돋움체 Bold" panose="00000800000000000000" pitchFamily="2" charset="-127"/>
+              </a:rPr>
+              <a:t>검사 결과 보고</a:t>
+            </a:r>
+            <a:r>
+              <a:rPr lang="en-US" altLang="ko-KR" sz="800" b="1" dirty="0">
+                <a:latin typeface="KoPub돋움체 Bold" panose="00000800000000000000" pitchFamily="2" charset="-127"/>
+                <a:ea typeface="KoPub돋움체 Bold" panose="00000800000000000000" pitchFamily="2" charset="-127"/>
+              </a:rPr>
+              <a:t>)</a:t>
+            </a:r>
+          </a:p>
+          <a:p>
+            <a:pPr marL="88900" indent="-88900">
+              <a:lnSpc>
+                <a:spcPts val="1100"/>
+              </a:lnSpc>
+              <a:buClr>
+                <a:srgbClr val="00B0F0"/>
+              </a:buClr>
+              <a:buFont typeface="Arial" panose="020B0604020202020204" pitchFamily="34" charset="0"/>
+              <a:buChar char="•"/>
+            </a:pPr>
+            <a:r>
+              <a:rPr lang="en-US" altLang="ko-KR" sz="800" b="1" dirty="0">
+                <a:latin typeface="KoPub돋움체 Bold" panose="00000800000000000000" pitchFamily="2" charset="-127"/>
+                <a:ea typeface="KoPub돋움체 Bold" panose="00000800000000000000" pitchFamily="2" charset="-127"/>
+              </a:rPr>
+              <a:t>[</a:t>
+            </a:r>
+            <a:r>
+              <a:rPr lang="ko-KR" altLang="en-US" sz="800" b="1" dirty="0">
+                <a:latin typeface="KoPub돋움체 Bold" panose="00000800000000000000" pitchFamily="2" charset="-127"/>
+                <a:ea typeface="KoPub돋움체 Bold" panose="00000800000000000000" pitchFamily="2" charset="-127"/>
+              </a:rPr>
+              <a:t>완결</a:t>
+            </a:r>
+            <a:r>
+              <a:rPr lang="en-US" altLang="ko-KR" sz="800" b="1" dirty="0">
+                <a:latin typeface="KoPub돋움체 Bold" panose="00000800000000000000" pitchFamily="2" charset="-127"/>
+                <a:ea typeface="KoPub돋움체 Bold" panose="00000800000000000000" pitchFamily="2" charset="-127"/>
+              </a:rPr>
+              <a:t>] [</a:t>
+            </a:r>
+            <a:r>
+              <a:rPr lang="ko-KR" altLang="en-US" sz="800" b="1" dirty="0">
+                <a:latin typeface="KoPub돋움체 Bold" panose="00000800000000000000" pitchFamily="2" charset="-127"/>
+                <a:ea typeface="KoPub돋움체 Bold" panose="00000800000000000000" pitchFamily="2" charset="-127"/>
+              </a:rPr>
+              <a:t>답장</a:t>
+            </a:r>
+            <a:r>
+              <a:rPr lang="en-US" altLang="ko-KR" sz="800" b="1" dirty="0">
+                <a:latin typeface="KoPub돋움체 Bold" panose="00000800000000000000" pitchFamily="2" charset="-127"/>
+                <a:ea typeface="KoPub돋움체 Bold" panose="00000800000000000000" pitchFamily="2" charset="-127"/>
+              </a:rPr>
+              <a:t>(Reply)]</a:t>
+            </a:r>
+            <a:r>
+              <a:rPr lang="ko-KR" altLang="en-US" sz="800" b="1" dirty="0">
+                <a:latin typeface="KoPub돋움체 Bold" panose="00000800000000000000" pitchFamily="2" charset="-127"/>
+                <a:ea typeface="KoPub돋움체 Bold" panose="00000800000000000000" pitchFamily="2" charset="-127"/>
+              </a:rPr>
+              <a:t>기능 필수 활용</a:t>
+            </a:r>
+          </a:p>
+          <a:p>
+            <a:pPr marL="88900" indent="-88900">
+              <a:lnSpc>
+                <a:spcPts val="1100"/>
+              </a:lnSpc>
+              <a:buClr>
+                <a:srgbClr val="00B0F0"/>
+              </a:buClr>
+              <a:buFont typeface="Arial" panose="020B0604020202020204" pitchFamily="34" charset="0"/>
+              <a:buChar char="•"/>
+            </a:pPr>
+            <a:r>
+              <a:rPr lang="en-US" altLang="ko-KR" sz="800" b="1" dirty="0">
+                <a:latin typeface="KoPub돋움체 Bold" panose="00000800000000000000" pitchFamily="2" charset="-127"/>
+                <a:ea typeface="KoPub돋움체 Bold" panose="00000800000000000000" pitchFamily="2" charset="-127"/>
+              </a:rPr>
+              <a:t>[</a:t>
+            </a:r>
+            <a:r>
+              <a:rPr lang="ko-KR" altLang="en-US" sz="800" b="1" dirty="0">
+                <a:latin typeface="KoPub돋움체 Bold" panose="00000800000000000000" pitchFamily="2" charset="-127"/>
+                <a:ea typeface="KoPub돋움체 Bold" panose="00000800000000000000" pitchFamily="2" charset="-127"/>
+              </a:rPr>
+              <a:t>대응</a:t>
+            </a:r>
+            <a:r>
+              <a:rPr lang="en-US" altLang="ko-KR" sz="800" b="1" dirty="0">
+                <a:latin typeface="KoPub돋움체 Bold" panose="00000800000000000000" pitchFamily="2" charset="-127"/>
+                <a:ea typeface="KoPub돋움체 Bold" panose="00000800000000000000" pitchFamily="2" charset="-127"/>
+              </a:rPr>
+              <a:t>] </a:t>
+            </a:r>
+            <a:r>
+              <a:rPr lang="ko-KR" altLang="en-US" sz="800" b="1" dirty="0">
+                <a:latin typeface="KoPub돋움체 Bold" panose="00000800000000000000" pitchFamily="2" charset="-127"/>
+                <a:ea typeface="KoPub돋움체 Bold" panose="00000800000000000000" pitchFamily="2" charset="-127"/>
+              </a:rPr>
+              <a:t>메신저 응답 </a:t>
+            </a:r>
+            <a:r>
+              <a:rPr lang="en-US" altLang="ko-KR" sz="800" b="1" dirty="0">
+                <a:latin typeface="KoPub돋움체 Bold" panose="00000800000000000000" pitchFamily="2" charset="-127"/>
+                <a:ea typeface="KoPub돋움체 Bold" panose="00000800000000000000" pitchFamily="2" charset="-127"/>
+              </a:rPr>
+              <a:t>'10</a:t>
+            </a:r>
+            <a:r>
+              <a:rPr lang="ko-KR" altLang="en-US" sz="800" b="1" dirty="0">
+                <a:latin typeface="KoPub돋움체 Bold" panose="00000800000000000000" pitchFamily="2" charset="-127"/>
+                <a:ea typeface="KoPub돋움체 Bold" panose="00000800000000000000" pitchFamily="2" charset="-127"/>
+              </a:rPr>
+              <a:t>분 룰</a:t>
+            </a:r>
+            <a:r>
+              <a:rPr lang="en-US" altLang="ko-KR" sz="800" b="1" dirty="0">
+                <a:latin typeface="KoPub돋움체 Bold" panose="00000800000000000000" pitchFamily="2" charset="-127"/>
+                <a:ea typeface="KoPub돋움체 Bold" panose="00000800000000000000" pitchFamily="2" charset="-127"/>
+              </a:rPr>
+              <a:t>(Rule)' </a:t>
+            </a:r>
+            <a:r>
+              <a:rPr lang="ko-KR" altLang="en-US" sz="800" b="1" dirty="0">
+                <a:latin typeface="KoPub돋움체 Bold" panose="00000800000000000000" pitchFamily="2" charset="-127"/>
+                <a:ea typeface="KoPub돋움체 Bold" panose="00000800000000000000" pitchFamily="2" charset="-127"/>
+              </a:rPr>
+              <a:t>적용</a:t>
+            </a:r>
+          </a:p>
+        </p:txBody>
+      </p:sp>
     </p:spTree>
     <p:extLst>
       <p:ext uri="{BB962C8B-B14F-4D97-AF65-F5344CB8AC3E}">
-        <p14:creationId xmlns:p14="http://schemas.microsoft.com/office/powerpoint/2010/main" val="1385286103"/>
+        <p14:creationId xmlns:p14="http://schemas.microsoft.com/office/powerpoint/2010/main" val="549628975"/>
       </p:ext>
     </p:extLst>
   </p:cSld>
